--- a/outputs/Muhammad_Ali_Akbar_Al-Qahri_Portfolio.pptx
+++ b/outputs/Muhammad_Ali_Akbar_Al-Qahri_Portfolio.pptx
@@ -2,23 +2,23 @@
 <file path=ppt/presentation.xml><?xml version="1.0" encoding="utf-8"?>
 <p:presentation xmlns:p="http://schemas.openxmlformats.org/presentationml/2006/main">
   <p:sldMasterIdLst>
-    <p:sldMasterId xmlns:r="http://schemas.openxmlformats.org/officeDocument/2006/relationships" id="2147483648" r:id="R98f25594fa75406c"/>
+    <p:sldMasterId xmlns:r="http://schemas.openxmlformats.org/officeDocument/2006/relationships" id="2147483648" r:id="Rb3aecc7f327443c8"/>
   </p:sldMasterIdLst>
   <p:notesMasterIdLst>
-    <p:notesMasterId xmlns:r="http://schemas.openxmlformats.org/officeDocument/2006/relationships" r:id="Rcc6a0a974881455f"/>
+    <p:notesMasterId xmlns:r="http://schemas.openxmlformats.org/officeDocument/2006/relationships" r:id="Rb8767244bdd941b9"/>
   </p:notesMasterIdLst>
   <p:sldIdLst>
-    <p:sldId xmlns:r="http://schemas.openxmlformats.org/officeDocument/2006/relationships" id="256" r:id="R747cc081cb0e40ba"/>
-    <p:sldId xmlns:r="http://schemas.openxmlformats.org/officeDocument/2006/relationships" id="257" r:id="Re4325baf6d404a6a"/>
-    <p:sldId xmlns:r="http://schemas.openxmlformats.org/officeDocument/2006/relationships" id="258" r:id="Refa55aecee68443c"/>
-    <p:sldId xmlns:r="http://schemas.openxmlformats.org/officeDocument/2006/relationships" id="259" r:id="Rc996029f145840df"/>
-    <p:sldId xmlns:r="http://schemas.openxmlformats.org/officeDocument/2006/relationships" id="260" r:id="R9a2e1d7b447a4d0f"/>
-    <p:sldId xmlns:r="http://schemas.openxmlformats.org/officeDocument/2006/relationships" id="261" r:id="R10332859be974eb2"/>
-    <p:sldId xmlns:r="http://schemas.openxmlformats.org/officeDocument/2006/relationships" id="262" r:id="R54d724df9bc64422"/>
-    <p:sldId xmlns:r="http://schemas.openxmlformats.org/officeDocument/2006/relationships" id="263" r:id="Re4d25e2a76064990"/>
-    <p:sldId xmlns:r="http://schemas.openxmlformats.org/officeDocument/2006/relationships" id="264" r:id="R204071dedc694e5b"/>
-    <p:sldId xmlns:r="http://schemas.openxmlformats.org/officeDocument/2006/relationships" id="265" r:id="Ra3cd14d101e14755"/>
-    <p:sldId xmlns:r="http://schemas.openxmlformats.org/officeDocument/2006/relationships" id="266" r:id="R203b6bf2ebaf421b"/>
+    <p:sldId xmlns:r="http://schemas.openxmlformats.org/officeDocument/2006/relationships" id="256" r:id="R8227a1aec2d04c52"/>
+    <p:sldId xmlns:r="http://schemas.openxmlformats.org/officeDocument/2006/relationships" id="257" r:id="R83e922ac714d4b42"/>
+    <p:sldId xmlns:r="http://schemas.openxmlformats.org/officeDocument/2006/relationships" id="258" r:id="Rb7a700d923634d72"/>
+    <p:sldId xmlns:r="http://schemas.openxmlformats.org/officeDocument/2006/relationships" id="259" r:id="R40ec7691f0e34268"/>
+    <p:sldId xmlns:r="http://schemas.openxmlformats.org/officeDocument/2006/relationships" id="260" r:id="R85528466862f4723"/>
+    <p:sldId xmlns:r="http://schemas.openxmlformats.org/officeDocument/2006/relationships" id="261" r:id="Rb403ff9b6dc44031"/>
+    <p:sldId xmlns:r="http://schemas.openxmlformats.org/officeDocument/2006/relationships" id="262" r:id="R063485ee2a2c4fb4"/>
+    <p:sldId xmlns:r="http://schemas.openxmlformats.org/officeDocument/2006/relationships" id="263" r:id="R1c7215f4d5e640fb"/>
+    <p:sldId xmlns:r="http://schemas.openxmlformats.org/officeDocument/2006/relationships" id="264" r:id="R58d6f86db66a4e45"/>
+    <p:sldId xmlns:r="http://schemas.openxmlformats.org/officeDocument/2006/relationships" id="265" r:id="R8e55402a7a4a4676"/>
+    <p:sldId xmlns:r="http://schemas.openxmlformats.org/officeDocument/2006/relationships" id="266" r:id="R29514ac0a21d463d"/>
   </p:sldIdLst>
   <p:sldSz cx="12192000" cy="6858000"/>
   <p:notesSz cx="6858000" cy="9144000"/>
@@ -1271,7 +1271,7 @@
   </p:cSld>
   <p:clrMap bg1="lt1" tx1="dk1" bg2="lt2" tx2="dk2" accent1="accent1" accent2="accent2" accent3="accent3" accent4="accent4" accent5="accent5" accent6="accent6" hlink="hlink" folHlink="folHlink"/>
   <p:sldLayoutIdLst>
-    <p:sldLayoutId xmlns:r="http://schemas.openxmlformats.org/officeDocument/2006/relationships" id="2147483649" r:id="Rb56336e19df34e41"/>
+    <p:sldLayoutId xmlns:r="http://schemas.openxmlformats.org/officeDocument/2006/relationships" id="2147483649" r:id="Rc8664c03651f4629"/>
   </p:sldLayoutIdLst>
   <p:txStyles>
     <p:titleStyle>
@@ -1812,10 +1812,10 @@
       </p:grpSpPr>
       <p:sp>
         <p:nvSpPr>
-          <p:cNvPr id="1" name="01-cover-canvas">
-            <a:extLst xmlns:a="http://schemas.openxmlformats.org/drawingml/2006/main">
-              <a:ext uri="{FF2B5EF4-FFF2-40B4-BE49-F238E27FC236}">
-                <a16:creationId xmlns:a16="http://schemas.microsoft.com/office/drawing/2014/main" id="{EF09E9A7-F066-4381-86A5-247E72BF732F}"/>
+          <p:cNvPr id="21" name="01-cover-canvas">
+            <a:extLst xmlns:a="http://schemas.openxmlformats.org/drawingml/2006/main">
+              <a:ext uri="{FF2B5EF4-FFF2-40B4-BE49-F238E27FC236}">
+                <a16:creationId xmlns:a16="http://schemas.microsoft.com/office/drawing/2014/main" id="{874E0670-C662-42E7-B453-32A943B1D28F}"/>
               </a:ext>
             </a:extLst>
           </p:cNvPr>
@@ -1842,7 +1842,7 @@
           <p:cNvPr id="2" name="cover-blue-rail">
             <a:extLst xmlns:a="http://schemas.openxmlformats.org/drawingml/2006/main">
               <a:ext uri="{FF2B5EF4-FFF2-40B4-BE49-F238E27FC236}">
-                <a16:creationId xmlns:a16="http://schemas.microsoft.com/office/drawing/2014/main" id="{68A2A6D9-AF4C-4266-92CE-AEF4B4761CB9}"/>
+                <a16:creationId xmlns:a16="http://schemas.microsoft.com/office/drawing/2014/main" id="{628FB84B-82C9-4022-B5FC-B75E39F96C3E}"/>
               </a:ext>
             </a:extLst>
           </p:cNvPr>
@@ -1860,7 +1860,7 @@
             <a:avLst/>
           </a:prstGeom>
           <a:solidFill xmlns:a="http://schemas.openxmlformats.org/drawingml/2006/main">
-            <a:srgbClr val="3D8DFF"/>
+            <a:srgbClr val="E0B44F"/>
           </a:solidFill>
         </p:spPr>
       </p:sp>
@@ -1869,7 +1869,7 @@
           <p:cNvPr id="3" name="cover-kicker">
             <a:extLst xmlns:a="http://schemas.openxmlformats.org/drawingml/2006/main">
               <a:ext uri="{FF2B5EF4-FFF2-40B4-BE49-F238E27FC236}">
-                <a16:creationId xmlns:a16="http://schemas.microsoft.com/office/drawing/2014/main" id="{72B3F886-C508-4825-993E-548638244739}"/>
+                <a16:creationId xmlns:a16="http://schemas.microsoft.com/office/drawing/2014/main" id="{1DE9DE61-F9B6-4717-AE27-8E6249E96E88}"/>
               </a:ext>
             </a:extLst>
           </p:cNvPr>
@@ -1896,7 +1896,7 @@
             <a:pPr algn="l">
               <a:defRPr sz="1050" b="1">
                 <a:solidFill>
-                  <a:srgbClr val="1769E0"/>
+                  <a:srgbClr val="6845C6"/>
                 </a:solidFill>
                 <a:latin typeface="Arial"/>
                 <a:ea typeface="Arial"/>
@@ -1914,7 +1914,7 @@
           <p:cNvPr id="4" name="cover-title">
             <a:extLst xmlns:a="http://schemas.openxmlformats.org/drawingml/2006/main">
               <a:ext uri="{FF2B5EF4-FFF2-40B4-BE49-F238E27FC236}">
-                <a16:creationId xmlns:a16="http://schemas.microsoft.com/office/drawing/2014/main" id="{A9699A2B-6E55-4B7E-8722-50B9A4E95305}"/>
+                <a16:creationId xmlns:a16="http://schemas.microsoft.com/office/drawing/2014/main" id="{77E19648-E717-443B-8F94-6103D5793B48}"/>
               </a:ext>
             </a:extLst>
           </p:cNvPr>
@@ -1941,7 +1941,7 @@
             <a:pPr algn="l">
               <a:defRPr sz="4650" b="1">
                 <a:solidFill>
-                  <a:srgbClr val="111318"/>
+                  <a:srgbClr val="180D20"/>
                 </a:solidFill>
                 <a:latin typeface="Arial"/>
                 <a:ea typeface="Arial"/>
@@ -1960,7 +1960,7 @@
           <p:cNvPr id="5" name="cover-subtitle">
             <a:extLst xmlns:a="http://schemas.openxmlformats.org/drawingml/2006/main">
               <a:ext uri="{FF2B5EF4-FFF2-40B4-BE49-F238E27FC236}">
-                <a16:creationId xmlns:a16="http://schemas.microsoft.com/office/drawing/2014/main" id="{C41C3CDC-3672-47CB-831D-A007B02ED9AE}"/>
+                <a16:creationId xmlns:a16="http://schemas.microsoft.com/office/drawing/2014/main" id="{7CF40701-CCD7-42FF-B82F-2EC68E7D5A87}"/>
               </a:ext>
             </a:extLst>
           </p:cNvPr>
@@ -1987,7 +1987,7 @@
             <a:pPr algn="l">
               <a:defRPr sz="1725" b="0">
                 <a:solidFill>
-                  <a:srgbClr val="626A78"/>
+                  <a:srgbClr val="70647A"/>
                 </a:solidFill>
                 <a:latin typeface="Arial"/>
                 <a:ea typeface="Arial"/>
@@ -2005,7 +2005,7 @@
           <p:cNvPr id="6" name="cover-pill-1-bg">
             <a:extLst xmlns:a="http://schemas.openxmlformats.org/drawingml/2006/main">
               <a:ext uri="{FF2B5EF4-FFF2-40B4-BE49-F238E27FC236}">
-                <a16:creationId xmlns:a16="http://schemas.microsoft.com/office/drawing/2014/main" id="{88CAC462-F310-4CCC-A48E-01C8CE7F3FC5}"/>
+                <a16:creationId xmlns:a16="http://schemas.microsoft.com/office/drawing/2014/main" id="{E7BE3185-E624-4ECD-97A1-6A8F4268266E}"/>
               </a:ext>
             </a:extLst>
           </p:cNvPr>
@@ -2025,7 +2025,7 @@
             </a:avLst>
           </a:prstGeom>
           <a:solidFill xmlns:a="http://schemas.openxmlformats.org/drawingml/2006/main">
-            <a:srgbClr val="EAF3FF"/>
+            <a:srgbClr val="F1EBFF"/>
           </a:solidFill>
         </p:spPr>
       </p:sp>
@@ -2034,7 +2034,7 @@
           <p:cNvPr id="7" name="cover-pill-1-text">
             <a:extLst xmlns:a="http://schemas.openxmlformats.org/drawingml/2006/main">
               <a:ext uri="{FF2B5EF4-FFF2-40B4-BE49-F238E27FC236}">
-                <a16:creationId xmlns:a16="http://schemas.microsoft.com/office/drawing/2014/main" id="{5EA49221-E842-41EF-959A-498F823312A9}"/>
+                <a16:creationId xmlns:a16="http://schemas.microsoft.com/office/drawing/2014/main" id="{D999D140-8015-4577-9F34-A05397A854DC}"/>
               </a:ext>
             </a:extLst>
           </p:cNvPr>
@@ -2061,7 +2061,7 @@
             <a:pPr algn="ctr">
               <a:defRPr sz="1125" b="1">
                 <a:solidFill>
-                  <a:srgbClr val="1769E0"/>
+                  <a:srgbClr val="6845C6"/>
                 </a:solidFill>
                 <a:latin typeface="Arial"/>
                 <a:ea typeface="Arial"/>
@@ -2079,7 +2079,7 @@
           <p:cNvPr id="8" name="cover-pill-2-bg">
             <a:extLst xmlns:a="http://schemas.openxmlformats.org/drawingml/2006/main">
               <a:ext uri="{FF2B5EF4-FFF2-40B4-BE49-F238E27FC236}">
-                <a16:creationId xmlns:a16="http://schemas.microsoft.com/office/drawing/2014/main" id="{E032CA76-797A-4625-A10A-37FECCF9DE0A}"/>
+                <a16:creationId xmlns:a16="http://schemas.microsoft.com/office/drawing/2014/main" id="{54E07E58-B362-4B89-9CF3-42A009607108}"/>
               </a:ext>
             </a:extLst>
           </p:cNvPr>
@@ -2099,7 +2099,7 @@
             </a:avLst>
           </a:prstGeom>
           <a:solidFill xmlns:a="http://schemas.openxmlformats.org/drawingml/2006/main">
-            <a:srgbClr val="EAF3FF"/>
+            <a:srgbClr val="F1EBFF"/>
           </a:solidFill>
         </p:spPr>
       </p:sp>
@@ -2108,7 +2108,7 @@
           <p:cNvPr id="9" name="cover-pill-2-text">
             <a:extLst xmlns:a="http://schemas.openxmlformats.org/drawingml/2006/main">
               <a:ext uri="{FF2B5EF4-FFF2-40B4-BE49-F238E27FC236}">
-                <a16:creationId xmlns:a16="http://schemas.microsoft.com/office/drawing/2014/main" id="{B252E3A4-98E1-4D75-A495-40B7B4DF200A}"/>
+                <a16:creationId xmlns:a16="http://schemas.microsoft.com/office/drawing/2014/main" id="{A09B1C40-EC50-4084-8AB3-77C3C349CBE7}"/>
               </a:ext>
             </a:extLst>
           </p:cNvPr>
@@ -2135,7 +2135,7 @@
             <a:pPr algn="ctr">
               <a:defRPr sz="1125" b="1">
                 <a:solidFill>
-                  <a:srgbClr val="1769E0"/>
+                  <a:srgbClr val="6845C6"/>
                 </a:solidFill>
                 <a:latin typeface="Arial"/>
                 <a:ea typeface="Arial"/>
@@ -2153,7 +2153,7 @@
           <p:cNvPr id="10" name="cover-pill-3-bg">
             <a:extLst xmlns:a="http://schemas.openxmlformats.org/drawingml/2006/main">
               <a:ext uri="{FF2B5EF4-FFF2-40B4-BE49-F238E27FC236}">
-                <a16:creationId xmlns:a16="http://schemas.microsoft.com/office/drawing/2014/main" id="{6154A977-BE12-40AA-8232-E8EDFFC20B5B}"/>
+                <a16:creationId xmlns:a16="http://schemas.microsoft.com/office/drawing/2014/main" id="{F15BC570-B3E8-426E-9AF8-71DA5D1FAF2E}"/>
               </a:ext>
             </a:extLst>
           </p:cNvPr>
@@ -2173,7 +2173,7 @@
             </a:avLst>
           </a:prstGeom>
           <a:solidFill xmlns:a="http://schemas.openxmlformats.org/drawingml/2006/main">
-            <a:srgbClr val="EAF3FF"/>
+            <a:srgbClr val="F1EBFF"/>
           </a:solidFill>
         </p:spPr>
       </p:sp>
@@ -2182,7 +2182,7 @@
           <p:cNvPr id="11" name="cover-pill-3-text">
             <a:extLst xmlns:a="http://schemas.openxmlformats.org/drawingml/2006/main">
               <a:ext uri="{FF2B5EF4-FFF2-40B4-BE49-F238E27FC236}">
-                <a16:creationId xmlns:a16="http://schemas.microsoft.com/office/drawing/2014/main" id="{9345FBF1-4CC9-4EF4-BF0A-BED3A9F34A47}"/>
+                <a16:creationId xmlns:a16="http://schemas.microsoft.com/office/drawing/2014/main" id="{6B3515CA-F211-4BC9-B414-07028D6D6EC8}"/>
               </a:ext>
             </a:extLst>
           </p:cNvPr>
@@ -2209,7 +2209,7 @@
             <a:pPr algn="ctr">
               <a:defRPr sz="1125" b="1">
                 <a:solidFill>
-                  <a:srgbClr val="1769E0"/>
+                  <a:srgbClr val="6845C6"/>
                 </a:solidFill>
                 <a:latin typeface="Arial"/>
                 <a:ea typeface="Arial"/>
@@ -2227,7 +2227,7 @@
           <p:cNvPr id="12" name="cover-contact-panel">
             <a:extLst xmlns:a="http://schemas.openxmlformats.org/drawingml/2006/main">
               <a:ext uri="{FF2B5EF4-FFF2-40B4-BE49-F238E27FC236}">
-                <a16:creationId xmlns:a16="http://schemas.microsoft.com/office/drawing/2014/main" id="{8B46D02B-7F10-46A5-9346-5C125009A020}"/>
+                <a16:creationId xmlns:a16="http://schemas.microsoft.com/office/drawing/2014/main" id="{F440EC31-D423-45F2-9334-6BD23B241F17}"/>
               </a:ext>
             </a:extLst>
           </p:cNvPr>
@@ -2247,7 +2247,7 @@
             </a:avLst>
           </a:prstGeom>
           <a:solidFill xmlns:a="http://schemas.openxmlformats.org/drawingml/2006/main">
-            <a:srgbClr val="F3F6FA"/>
+            <a:srgbClr val="FBF7EF"/>
           </a:solidFill>
         </p:spPr>
       </p:sp>
@@ -2256,7 +2256,7 @@
           <p:cNvPr id="13" name="cover-name">
             <a:extLst xmlns:a="http://schemas.openxmlformats.org/drawingml/2006/main">
               <a:ext uri="{FF2B5EF4-FFF2-40B4-BE49-F238E27FC236}">
-                <a16:creationId xmlns:a16="http://schemas.microsoft.com/office/drawing/2014/main" id="{59745533-2166-44EF-B92A-D85865A59545}"/>
+                <a16:creationId xmlns:a16="http://schemas.microsoft.com/office/drawing/2014/main" id="{9D1D8A8D-68F7-4C4E-A85A-22F1D58A4844}"/>
               </a:ext>
             </a:extLst>
           </p:cNvPr>
@@ -2283,7 +2283,7 @@
             <a:pPr algn="l">
               <a:defRPr sz="1725" b="1">
                 <a:solidFill>
-                  <a:srgbClr val="111318"/>
+                  <a:srgbClr val="180D20"/>
                 </a:solidFill>
                 <a:latin typeface="Arial"/>
                 <a:ea typeface="Arial"/>
@@ -2301,7 +2301,7 @@
           <p:cNvPr id="14" name="cover-email">
             <a:extLst xmlns:a="http://schemas.openxmlformats.org/drawingml/2006/main">
               <a:ext uri="{FF2B5EF4-FFF2-40B4-BE49-F238E27FC236}">
-                <a16:creationId xmlns:a16="http://schemas.microsoft.com/office/drawing/2014/main" id="{E52EE1D8-2D30-4677-81D0-665779AF4446}"/>
+                <a16:creationId xmlns:a16="http://schemas.microsoft.com/office/drawing/2014/main" id="{E4F56AD4-527F-4A2E-B12B-047DD826D41B}"/>
               </a:ext>
             </a:extLst>
           </p:cNvPr>
@@ -2328,7 +2328,7 @@
             <a:pPr algn="l">
               <a:defRPr sz="1200" b="0">
                 <a:solidFill>
-                  <a:srgbClr val="626A78"/>
+                  <a:srgbClr val="70647A"/>
                 </a:solidFill>
                 <a:latin typeface="Arial"/>
                 <a:ea typeface="Arial"/>
@@ -2346,7 +2346,7 @@
           <p:cNvPr id="15" name="cover-photo-frame">
             <a:extLst xmlns:a="http://schemas.openxmlformats.org/drawingml/2006/main">
               <a:ext uri="{FF2B5EF4-FFF2-40B4-BE49-F238E27FC236}">
-                <a16:creationId xmlns:a16="http://schemas.microsoft.com/office/drawing/2014/main" id="{D4C00C3E-F47A-45E0-8D95-5C40FD78A5E6}"/>
+                <a16:creationId xmlns:a16="http://schemas.microsoft.com/office/drawing/2014/main" id="{FAE369E5-0A6B-40CB-ABCF-68E728820D97}"/>
               </a:ext>
             </a:extLst>
           </p:cNvPr>
@@ -2366,7 +2366,7 @@
             </a:avLst>
           </a:prstGeom>
           <a:solidFill xmlns:a="http://schemas.openxmlformats.org/drawingml/2006/main">
-            <a:srgbClr val="EAF3FF"/>
+            <a:srgbClr val="F1EBFF"/>
           </a:solidFill>
         </p:spPr>
       </p:sp>
@@ -2375,7 +2375,7 @@
           <p:cNvPr id="16" name="cover-photo-accent">
             <a:extLst xmlns:a="http://schemas.openxmlformats.org/drawingml/2006/main">
               <a:ext uri="{FF2B5EF4-FFF2-40B4-BE49-F238E27FC236}">
-                <a16:creationId xmlns:a16="http://schemas.microsoft.com/office/drawing/2014/main" id="{113D72FC-CA35-4AB8-981F-B41CA944B7CD}"/>
+                <a16:creationId xmlns:a16="http://schemas.microsoft.com/office/drawing/2014/main" id="{A1CF5E8C-37EE-4789-8CD5-5BA404A7FA1D}"/>
               </a:ext>
             </a:extLst>
           </p:cNvPr>
@@ -2395,7 +2395,7 @@
             </a:avLst>
           </a:prstGeom>
           <a:solidFill xmlns:a="http://schemas.openxmlformats.org/drawingml/2006/main">
-            <a:srgbClr val="3D8DFF"/>
+            <a:srgbClr val="E65FA8"/>
           </a:solidFill>
         </p:spPr>
       </p:sp>
@@ -2404,7 +2404,7 @@
           <p:cNvPr id="17" name="footer-line-1">
             <a:extLst xmlns:a="http://schemas.openxmlformats.org/drawingml/2006/main">
               <a:ext uri="{FF2B5EF4-FFF2-40B4-BE49-F238E27FC236}">
-                <a16:creationId xmlns:a16="http://schemas.microsoft.com/office/drawing/2014/main" id="{0A698D02-7A98-4C3B-ACBA-6B091DC0B4DE}"/>
+                <a16:creationId xmlns:a16="http://schemas.microsoft.com/office/drawing/2014/main" id="{DB4121B9-6E7A-4C55-AF25-C6B6E568B9A5}"/>
               </a:ext>
             </a:extLst>
           </p:cNvPr>
@@ -2422,7 +2422,7 @@
             <a:avLst/>
           </a:prstGeom>
           <a:solidFill xmlns:a="http://schemas.openxmlformats.org/drawingml/2006/main">
-            <a:srgbClr val="D9E0E9"/>
+            <a:srgbClr val="DED4E6"/>
           </a:solidFill>
         </p:spPr>
       </p:sp>
@@ -2431,7 +2431,7 @@
           <p:cNvPr id="18" name="footer-name-1">
             <a:extLst xmlns:a="http://schemas.openxmlformats.org/drawingml/2006/main">
               <a:ext uri="{FF2B5EF4-FFF2-40B4-BE49-F238E27FC236}">
-                <a16:creationId xmlns:a16="http://schemas.microsoft.com/office/drawing/2014/main" id="{DE53D55E-6EF6-465E-8AEA-B294E474C01B}"/>
+                <a16:creationId xmlns:a16="http://schemas.microsoft.com/office/drawing/2014/main" id="{24F00833-164A-434C-B903-696D71857DCD}"/>
               </a:ext>
             </a:extLst>
           </p:cNvPr>
@@ -2458,7 +2458,7 @@
             <a:pPr algn="l">
               <a:defRPr sz="825" b="1">
                 <a:solidFill>
-                  <a:srgbClr val="626A78"/>
+                  <a:srgbClr val="70647A"/>
                 </a:solidFill>
                 <a:latin typeface="Arial"/>
                 <a:ea typeface="Arial"/>
@@ -2476,7 +2476,7 @@
           <p:cNvPr id="19" name="footer-page-1">
             <a:extLst xmlns:a="http://schemas.openxmlformats.org/drawingml/2006/main">
               <a:ext uri="{FF2B5EF4-FFF2-40B4-BE49-F238E27FC236}">
-                <a16:creationId xmlns:a16="http://schemas.microsoft.com/office/drawing/2014/main" id="{D4E8A8C5-B44D-422C-A262-8979CD33FE54}"/>
+                <a16:creationId xmlns:a16="http://schemas.microsoft.com/office/drawing/2014/main" id="{1FBC802E-C34C-45C8-85E8-23C12B6B8711}"/>
               </a:ext>
             </a:extLst>
           </p:cNvPr>
@@ -2503,7 +2503,7 @@
             <a:pPr algn="r">
               <a:defRPr sz="900" b="1">
                 <a:solidFill>
-                  <a:srgbClr val="626A78"/>
+                  <a:srgbClr val="70647A"/>
                 </a:solidFill>
                 <a:latin typeface="Arial"/>
                 <a:ea typeface="Arial"/>
@@ -2525,7 +2525,7 @@
           <p:nvPr/>
         </p:nvPicPr>
         <p:blipFill>
-          <a:blip xmlns:r="http://schemas.openxmlformats.org/officeDocument/2006/relationships" xmlns:a="http://schemas.openxmlformats.org/drawingml/2006/main" r:embed="Ra4957b4bad0b43e9"/>
+          <a:blip xmlns:r="http://schemas.openxmlformats.org/officeDocument/2006/relationships" xmlns:a="http://schemas.openxmlformats.org/drawingml/2006/main" r:embed="R2b28eba398554a4e"/>
           <a:srcRect xmlns:a="http://schemas.openxmlformats.org/drawingml/2006/main" l="0" t="1015" r="0" b="1015"/>
           <a:stretch xmlns:a="http://schemas.openxmlformats.org/drawingml/2006/main">
             <a:fillRect l="0" t="0" r="0" b="0"/>
@@ -2544,7 +2544,7 @@
     </p:spTree>
     <p:extLst>
       <p:ext uri="{BB962C8B-B14F-4D97-AF65-F5344CB8AC3E}">
-        <p14:creationId xmlns:p14="http://schemas.microsoft.com/office/powerpoint/2010/main" val="660216686"/>
+        <p14:creationId xmlns:p14="http://schemas.microsoft.com/office/powerpoint/2010/main" val="1642647245"/>
       </p:ext>
     </p:extLst>
   </p:cSld>
@@ -2565,10 +2565,10 @@
       </p:grpSpPr>
       <p:sp>
         <p:nvSpPr>
-          <p:cNvPr id="1" name="10-capability-canvas">
-            <a:extLst xmlns:a="http://schemas.openxmlformats.org/drawingml/2006/main">
-              <a:ext uri="{FF2B5EF4-FFF2-40B4-BE49-F238E27FC236}">
-                <a16:creationId xmlns:a16="http://schemas.microsoft.com/office/drawing/2014/main" id="{CA1D87DB-74E4-4A97-92CF-62DE6F9B1351}"/>
+          <p:cNvPr id="26" name="10-capability-canvas">
+            <a:extLst xmlns:a="http://schemas.openxmlformats.org/drawingml/2006/main">
+              <a:ext uri="{FF2B5EF4-FFF2-40B4-BE49-F238E27FC236}">
+                <a16:creationId xmlns:a16="http://schemas.microsoft.com/office/drawing/2014/main" id="{DFC061BE-9235-4D04-B345-D904C5A37931}"/>
               </a:ext>
             </a:extLst>
           </p:cNvPr>
@@ -2595,7 +2595,7 @@
           <p:cNvPr id="2" name="eyebrow-10">
             <a:extLst xmlns:a="http://schemas.openxmlformats.org/drawingml/2006/main">
               <a:ext uri="{FF2B5EF4-FFF2-40B4-BE49-F238E27FC236}">
-                <a16:creationId xmlns:a16="http://schemas.microsoft.com/office/drawing/2014/main" id="{F3D86B20-42A7-4111-BB3F-2949F19BE23E}"/>
+                <a16:creationId xmlns:a16="http://schemas.microsoft.com/office/drawing/2014/main" id="{C7310ACA-64DB-4470-989A-51628F165207}"/>
               </a:ext>
             </a:extLst>
           </p:cNvPr>
@@ -2622,7 +2622,7 @@
             <a:pPr algn="l">
               <a:defRPr sz="1050" b="1">
                 <a:solidFill>
-                  <a:srgbClr val="1769E0"/>
+                  <a:srgbClr val="6845C6"/>
                 </a:solidFill>
                 <a:latin typeface="Arial"/>
                 <a:ea typeface="Arial"/>
@@ -2640,7 +2640,7 @@
           <p:cNvPr id="3" name="title-10">
             <a:extLst xmlns:a="http://schemas.openxmlformats.org/drawingml/2006/main">
               <a:ext uri="{FF2B5EF4-FFF2-40B4-BE49-F238E27FC236}">
-                <a16:creationId xmlns:a16="http://schemas.microsoft.com/office/drawing/2014/main" id="{CA2555B2-36DB-4CDD-BDF7-4A210DF42244}"/>
+                <a16:creationId xmlns:a16="http://schemas.microsoft.com/office/drawing/2014/main" id="{BC0A561E-2C7A-4A8F-A6D6-25C955EC7491}"/>
               </a:ext>
             </a:extLst>
           </p:cNvPr>
@@ -2667,7 +2667,7 @@
             <a:pPr algn="l">
               <a:defRPr sz="3225" b="1">
                 <a:solidFill>
-                  <a:srgbClr val="111318"/>
+                  <a:srgbClr val="180D20"/>
                 </a:solidFill>
                 <a:latin typeface="Arial"/>
                 <a:ea typeface="Arial"/>
@@ -2685,7 +2685,7 @@
           <p:cNvPr id="4" name="cap-card-0">
             <a:extLst xmlns:a="http://schemas.openxmlformats.org/drawingml/2006/main">
               <a:ext uri="{FF2B5EF4-FFF2-40B4-BE49-F238E27FC236}">
-                <a16:creationId xmlns:a16="http://schemas.microsoft.com/office/drawing/2014/main" id="{A91DA0A1-00DA-489F-BB2A-10A7CA24AE07}"/>
+                <a16:creationId xmlns:a16="http://schemas.microsoft.com/office/drawing/2014/main" id="{23C57131-354B-423E-B6CD-BCA08F141EC8}"/>
               </a:ext>
             </a:extLst>
           </p:cNvPr>
@@ -2705,7 +2705,7 @@
             </a:avLst>
           </a:prstGeom>
           <a:solidFill xmlns:a="http://schemas.openxmlformats.org/drawingml/2006/main">
-            <a:srgbClr val="F3F6FA"/>
+            <a:srgbClr val="FBF7EF"/>
           </a:solidFill>
         </p:spPr>
       </p:sp>
@@ -2714,7 +2714,7 @@
           <p:cNvPr id="5" name="cap-accent-0">
             <a:extLst xmlns:a="http://schemas.openxmlformats.org/drawingml/2006/main">
               <a:ext uri="{FF2B5EF4-FFF2-40B4-BE49-F238E27FC236}">
-                <a16:creationId xmlns:a16="http://schemas.microsoft.com/office/drawing/2014/main" id="{D9648BAC-5E2A-4618-90CE-8939F78AB9C8}"/>
+                <a16:creationId xmlns:a16="http://schemas.microsoft.com/office/drawing/2014/main" id="{FBFC52CE-BBC5-4B62-81F4-3FDACD90F4D5}"/>
               </a:ext>
             </a:extLst>
           </p:cNvPr>
@@ -2734,7 +2734,7 @@
             </a:avLst>
           </a:prstGeom>
           <a:solidFill xmlns:a="http://schemas.openxmlformats.org/drawingml/2006/main">
-            <a:srgbClr val="3D8DFF"/>
+            <a:srgbClr val="E0B44F"/>
           </a:solidFill>
         </p:spPr>
       </p:sp>
@@ -2743,7 +2743,7 @@
           <p:cNvPr id="6" name="cap-title-0">
             <a:extLst xmlns:a="http://schemas.openxmlformats.org/drawingml/2006/main">
               <a:ext uri="{FF2B5EF4-FFF2-40B4-BE49-F238E27FC236}">
-                <a16:creationId xmlns:a16="http://schemas.microsoft.com/office/drawing/2014/main" id="{23280969-998E-4EC2-9032-4E25DAFBE786}"/>
+                <a16:creationId xmlns:a16="http://schemas.microsoft.com/office/drawing/2014/main" id="{07423D7B-C12F-4C9B-9CE5-F5FCE9A32DEC}"/>
               </a:ext>
             </a:extLst>
           </p:cNvPr>
@@ -2770,7 +2770,7 @@
             <a:pPr algn="l">
               <a:defRPr sz="1875" b="1">
                 <a:solidFill>
-                  <a:srgbClr val="111318"/>
+                  <a:srgbClr val="180D20"/>
                 </a:solidFill>
                 <a:latin typeface="Arial"/>
                 <a:ea typeface="Arial"/>
@@ -2788,7 +2788,7 @@
           <p:cNvPr id="7" name="cap-items-0">
             <a:extLst xmlns:a="http://schemas.openxmlformats.org/drawingml/2006/main">
               <a:ext uri="{FF2B5EF4-FFF2-40B4-BE49-F238E27FC236}">
-                <a16:creationId xmlns:a16="http://schemas.microsoft.com/office/drawing/2014/main" id="{84BB7560-D15B-45C3-A876-82EB8F2405C2}"/>
+                <a16:creationId xmlns:a16="http://schemas.microsoft.com/office/drawing/2014/main" id="{DFD05DAB-4C81-4303-80A1-5CF6116D0CAE}"/>
               </a:ext>
             </a:extLst>
           </p:cNvPr>
@@ -2815,7 +2815,7 @@
             <a:pPr algn="l">
               <a:defRPr sz="1350" b="0">
                 <a:solidFill>
-                  <a:srgbClr val="626A78"/>
+                  <a:srgbClr val="70647A"/>
                 </a:solidFill>
                 <a:latin typeface="Arial"/>
                 <a:ea typeface="Arial"/>
@@ -2835,7 +2835,7 @@
           <p:cNvPr id="8" name="cap-card-1">
             <a:extLst xmlns:a="http://schemas.openxmlformats.org/drawingml/2006/main">
               <a:ext uri="{FF2B5EF4-FFF2-40B4-BE49-F238E27FC236}">
-                <a16:creationId xmlns:a16="http://schemas.microsoft.com/office/drawing/2014/main" id="{5B1492E1-0D6E-43AB-BD9A-784388DC5372}"/>
+                <a16:creationId xmlns:a16="http://schemas.microsoft.com/office/drawing/2014/main" id="{872455CC-9A24-410D-B995-B4EA7332FD1F}"/>
               </a:ext>
             </a:extLst>
           </p:cNvPr>
@@ -2855,7 +2855,7 @@
             </a:avLst>
           </a:prstGeom>
           <a:solidFill xmlns:a="http://schemas.openxmlformats.org/drawingml/2006/main">
-            <a:srgbClr val="F3F6FA"/>
+            <a:srgbClr val="FBF7EF"/>
           </a:solidFill>
         </p:spPr>
       </p:sp>
@@ -2864,7 +2864,7 @@
           <p:cNvPr id="9" name="cap-accent-1">
             <a:extLst xmlns:a="http://schemas.openxmlformats.org/drawingml/2006/main">
               <a:ext uri="{FF2B5EF4-FFF2-40B4-BE49-F238E27FC236}">
-                <a16:creationId xmlns:a16="http://schemas.microsoft.com/office/drawing/2014/main" id="{A4C8EE99-B8E0-46EB-8177-9B351C52F22C}"/>
+                <a16:creationId xmlns:a16="http://schemas.microsoft.com/office/drawing/2014/main" id="{755844F1-29E4-4E01-805E-B56E5150D21A}"/>
               </a:ext>
             </a:extLst>
           </p:cNvPr>
@@ -2884,7 +2884,7 @@
             </a:avLst>
           </a:prstGeom>
           <a:solidFill xmlns:a="http://schemas.openxmlformats.org/drawingml/2006/main">
-            <a:srgbClr val="6DCBF4"/>
+            <a:srgbClr val="A78BFA"/>
           </a:solidFill>
         </p:spPr>
       </p:sp>
@@ -2893,7 +2893,7 @@
           <p:cNvPr id="10" name="cap-title-1">
             <a:extLst xmlns:a="http://schemas.openxmlformats.org/drawingml/2006/main">
               <a:ext uri="{FF2B5EF4-FFF2-40B4-BE49-F238E27FC236}">
-                <a16:creationId xmlns:a16="http://schemas.microsoft.com/office/drawing/2014/main" id="{57E164BD-02BE-4663-BB36-C297DB6E6A20}"/>
+                <a16:creationId xmlns:a16="http://schemas.microsoft.com/office/drawing/2014/main" id="{BB10AE61-C408-4CCE-B0A7-2B35DB5F053B}"/>
               </a:ext>
             </a:extLst>
           </p:cNvPr>
@@ -2920,7 +2920,7 @@
             <a:pPr algn="l">
               <a:defRPr sz="1875" b="1">
                 <a:solidFill>
-                  <a:srgbClr val="111318"/>
+                  <a:srgbClr val="180D20"/>
                 </a:solidFill>
                 <a:latin typeface="Arial"/>
                 <a:ea typeface="Arial"/>
@@ -2938,7 +2938,7 @@
           <p:cNvPr id="11" name="cap-items-1">
             <a:extLst xmlns:a="http://schemas.openxmlformats.org/drawingml/2006/main">
               <a:ext uri="{FF2B5EF4-FFF2-40B4-BE49-F238E27FC236}">
-                <a16:creationId xmlns:a16="http://schemas.microsoft.com/office/drawing/2014/main" id="{5FC4E3BB-B970-42ED-B92D-9D3E28E986FF}"/>
+                <a16:creationId xmlns:a16="http://schemas.microsoft.com/office/drawing/2014/main" id="{6133E922-869C-4AE2-ADAC-2E9AB0497F79}"/>
               </a:ext>
             </a:extLst>
           </p:cNvPr>
@@ -2965,7 +2965,7 @@
             <a:pPr algn="l">
               <a:defRPr sz="1350" b="0">
                 <a:solidFill>
-                  <a:srgbClr val="626A78"/>
+                  <a:srgbClr val="70647A"/>
                 </a:solidFill>
                 <a:latin typeface="Arial"/>
                 <a:ea typeface="Arial"/>
@@ -2985,7 +2985,7 @@
           <p:cNvPr id="12" name="cap-card-2">
             <a:extLst xmlns:a="http://schemas.openxmlformats.org/drawingml/2006/main">
               <a:ext uri="{FF2B5EF4-FFF2-40B4-BE49-F238E27FC236}">
-                <a16:creationId xmlns:a16="http://schemas.microsoft.com/office/drawing/2014/main" id="{6DC18B71-1987-4459-8FE1-012654303978}"/>
+                <a16:creationId xmlns:a16="http://schemas.microsoft.com/office/drawing/2014/main" id="{9B9AF789-5EF2-4354-89BE-7894D0396263}"/>
               </a:ext>
             </a:extLst>
           </p:cNvPr>
@@ -3005,7 +3005,7 @@
             </a:avLst>
           </a:prstGeom>
           <a:solidFill xmlns:a="http://schemas.openxmlformats.org/drawingml/2006/main">
-            <a:srgbClr val="F3F6FA"/>
+            <a:srgbClr val="FBF7EF"/>
           </a:solidFill>
         </p:spPr>
       </p:sp>
@@ -3014,7 +3014,7 @@
           <p:cNvPr id="13" name="cap-accent-2">
             <a:extLst xmlns:a="http://schemas.openxmlformats.org/drawingml/2006/main">
               <a:ext uri="{FF2B5EF4-FFF2-40B4-BE49-F238E27FC236}">
-                <a16:creationId xmlns:a16="http://schemas.microsoft.com/office/drawing/2014/main" id="{369A4D99-CBE0-48EC-9EE6-41682CFFF3CF}"/>
+                <a16:creationId xmlns:a16="http://schemas.microsoft.com/office/drawing/2014/main" id="{343F16CC-B37A-4259-A483-E706B03DB10D}"/>
               </a:ext>
             </a:extLst>
           </p:cNvPr>
@@ -3034,7 +3034,7 @@
             </a:avLst>
           </a:prstGeom>
           <a:solidFill xmlns:a="http://schemas.openxmlformats.org/drawingml/2006/main">
-            <a:srgbClr val="12A36D"/>
+            <a:srgbClr val="E65FA8"/>
           </a:solidFill>
         </p:spPr>
       </p:sp>
@@ -3043,7 +3043,7 @@
           <p:cNvPr id="14" name="cap-title-2">
             <a:extLst xmlns:a="http://schemas.openxmlformats.org/drawingml/2006/main">
               <a:ext uri="{FF2B5EF4-FFF2-40B4-BE49-F238E27FC236}">
-                <a16:creationId xmlns:a16="http://schemas.microsoft.com/office/drawing/2014/main" id="{658EEDAA-6C75-4BC4-B09A-28813B916400}"/>
+                <a16:creationId xmlns:a16="http://schemas.microsoft.com/office/drawing/2014/main" id="{FD138D6A-57AE-44F7-BC04-AA17287EAF66}"/>
               </a:ext>
             </a:extLst>
           </p:cNvPr>
@@ -3070,7 +3070,7 @@
             <a:pPr algn="l">
               <a:defRPr sz="1875" b="1">
                 <a:solidFill>
-                  <a:srgbClr val="111318"/>
+                  <a:srgbClr val="180D20"/>
                 </a:solidFill>
                 <a:latin typeface="Arial"/>
                 <a:ea typeface="Arial"/>
@@ -3088,7 +3088,7 @@
           <p:cNvPr id="15" name="cap-items-2">
             <a:extLst xmlns:a="http://schemas.openxmlformats.org/drawingml/2006/main">
               <a:ext uri="{FF2B5EF4-FFF2-40B4-BE49-F238E27FC236}">
-                <a16:creationId xmlns:a16="http://schemas.microsoft.com/office/drawing/2014/main" id="{35488A8F-ECAF-471F-AFBF-71974CCFEFEA}"/>
+                <a16:creationId xmlns:a16="http://schemas.microsoft.com/office/drawing/2014/main" id="{4631D334-F265-4F31-8F48-061F013B20E2}"/>
               </a:ext>
             </a:extLst>
           </p:cNvPr>
@@ -3115,7 +3115,7 @@
             <a:pPr algn="l">
               <a:defRPr sz="1350" b="0">
                 <a:solidFill>
-                  <a:srgbClr val="626A78"/>
+                  <a:srgbClr val="70647A"/>
                 </a:solidFill>
                 <a:latin typeface="Arial"/>
                 <a:ea typeface="Arial"/>
@@ -3135,7 +3135,7 @@
           <p:cNvPr id="16" name="cap-card-3">
             <a:extLst xmlns:a="http://schemas.openxmlformats.org/drawingml/2006/main">
               <a:ext uri="{FF2B5EF4-FFF2-40B4-BE49-F238E27FC236}">
-                <a16:creationId xmlns:a16="http://schemas.microsoft.com/office/drawing/2014/main" id="{1C6F27DA-42D7-41B9-93D6-FB809D3254E3}"/>
+                <a16:creationId xmlns:a16="http://schemas.microsoft.com/office/drawing/2014/main" id="{0FB20EF8-026F-419F-B2EB-59A99628B400}"/>
               </a:ext>
             </a:extLst>
           </p:cNvPr>
@@ -3155,7 +3155,7 @@
             </a:avLst>
           </a:prstGeom>
           <a:solidFill xmlns:a="http://schemas.openxmlformats.org/drawingml/2006/main">
-            <a:srgbClr val="F3F6FA"/>
+            <a:srgbClr val="FBF7EF"/>
           </a:solidFill>
         </p:spPr>
       </p:sp>
@@ -3164,7 +3164,7 @@
           <p:cNvPr id="17" name="cap-accent-3">
             <a:extLst xmlns:a="http://schemas.openxmlformats.org/drawingml/2006/main">
               <a:ext uri="{FF2B5EF4-FFF2-40B4-BE49-F238E27FC236}">
-                <a16:creationId xmlns:a16="http://schemas.microsoft.com/office/drawing/2014/main" id="{E583C847-2AE5-498F-90E6-7A02B2420653}"/>
+                <a16:creationId xmlns:a16="http://schemas.microsoft.com/office/drawing/2014/main" id="{CBE2A702-EF9B-4BE0-91EE-04C11F2C1EEE}"/>
               </a:ext>
             </a:extLst>
           </p:cNvPr>
@@ -3184,7 +3184,7 @@
             </a:avLst>
           </a:prstGeom>
           <a:solidFill xmlns:a="http://schemas.openxmlformats.org/drawingml/2006/main">
-            <a:srgbClr val="F3A712"/>
+            <a:srgbClr val="6845C6"/>
           </a:solidFill>
         </p:spPr>
       </p:sp>
@@ -3193,7 +3193,7 @@
           <p:cNvPr id="18" name="cap-title-3">
             <a:extLst xmlns:a="http://schemas.openxmlformats.org/drawingml/2006/main">
               <a:ext uri="{FF2B5EF4-FFF2-40B4-BE49-F238E27FC236}">
-                <a16:creationId xmlns:a16="http://schemas.microsoft.com/office/drawing/2014/main" id="{08226B23-5836-4356-8033-27383B1F0961}"/>
+                <a16:creationId xmlns:a16="http://schemas.microsoft.com/office/drawing/2014/main" id="{1459A81A-DA91-4FC1-B32E-19A8C4123223}"/>
               </a:ext>
             </a:extLst>
           </p:cNvPr>
@@ -3220,7 +3220,7 @@
             <a:pPr algn="l">
               <a:defRPr sz="1875" b="1">
                 <a:solidFill>
-                  <a:srgbClr val="111318"/>
+                  <a:srgbClr val="180D20"/>
                 </a:solidFill>
                 <a:latin typeface="Arial"/>
                 <a:ea typeface="Arial"/>
@@ -3238,7 +3238,7 @@
           <p:cNvPr id="19" name="cap-items-3">
             <a:extLst xmlns:a="http://schemas.openxmlformats.org/drawingml/2006/main">
               <a:ext uri="{FF2B5EF4-FFF2-40B4-BE49-F238E27FC236}">
-                <a16:creationId xmlns:a16="http://schemas.microsoft.com/office/drawing/2014/main" id="{CEA22BDD-B68B-4278-9032-5D98C4194701}"/>
+                <a16:creationId xmlns:a16="http://schemas.microsoft.com/office/drawing/2014/main" id="{D9EEFA4E-1713-48DF-912E-53E070E40D85}"/>
               </a:ext>
             </a:extLst>
           </p:cNvPr>
@@ -3265,7 +3265,7 @@
             <a:pPr algn="l">
               <a:defRPr sz="1350" b="0">
                 <a:solidFill>
-                  <a:srgbClr val="626A78"/>
+                  <a:srgbClr val="70647A"/>
                 </a:solidFill>
                 <a:latin typeface="Arial"/>
                 <a:ea typeface="Arial"/>
@@ -3285,7 +3285,7 @@
           <p:cNvPr id="20" name="credentials-strip">
             <a:extLst xmlns:a="http://schemas.openxmlformats.org/drawingml/2006/main">
               <a:ext uri="{FF2B5EF4-FFF2-40B4-BE49-F238E27FC236}">
-                <a16:creationId xmlns:a16="http://schemas.microsoft.com/office/drawing/2014/main" id="{9CB65168-FE37-4811-8D0D-0498744B99F2}"/>
+                <a16:creationId xmlns:a16="http://schemas.microsoft.com/office/drawing/2014/main" id="{DFAAE59E-9589-407E-8F70-0BA07A8A3260}"/>
               </a:ext>
             </a:extLst>
           </p:cNvPr>
@@ -3305,7 +3305,7 @@
             </a:avLst>
           </a:prstGeom>
           <a:solidFill xmlns:a="http://schemas.openxmlformats.org/drawingml/2006/main">
-            <a:srgbClr val="EAF3FF"/>
+            <a:srgbClr val="F1EBFF"/>
           </a:solidFill>
         </p:spPr>
       </p:sp>
@@ -3314,7 +3314,7 @@
           <p:cNvPr id="21" name="credentials-label">
             <a:extLst xmlns:a="http://schemas.openxmlformats.org/drawingml/2006/main">
               <a:ext uri="{FF2B5EF4-FFF2-40B4-BE49-F238E27FC236}">
-                <a16:creationId xmlns:a16="http://schemas.microsoft.com/office/drawing/2014/main" id="{C8501AB4-6046-4E45-A645-81E02CBF0EC5}"/>
+                <a16:creationId xmlns:a16="http://schemas.microsoft.com/office/drawing/2014/main" id="{40127A28-820F-42B9-AA39-AEA5B9A3C847}"/>
               </a:ext>
             </a:extLst>
           </p:cNvPr>
@@ -3341,7 +3341,7 @@
             <a:pPr algn="l">
               <a:defRPr sz="975" b="1">
                 <a:solidFill>
-                  <a:srgbClr val="1769E0"/>
+                  <a:srgbClr val="6845C6"/>
                 </a:solidFill>
                 <a:latin typeface="Arial"/>
                 <a:ea typeface="Arial"/>
@@ -3359,7 +3359,7 @@
           <p:cNvPr id="22" name="credentials-text">
             <a:extLst xmlns:a="http://schemas.openxmlformats.org/drawingml/2006/main">
               <a:ext uri="{FF2B5EF4-FFF2-40B4-BE49-F238E27FC236}">
-                <a16:creationId xmlns:a16="http://schemas.microsoft.com/office/drawing/2014/main" id="{A6CA503F-48C1-441A-81E7-CEBC25183D7E}"/>
+                <a16:creationId xmlns:a16="http://schemas.microsoft.com/office/drawing/2014/main" id="{CEEA3CB4-9B1D-46AD-BCE7-D4C380928E00}"/>
               </a:ext>
             </a:extLst>
           </p:cNvPr>
@@ -3386,7 +3386,7 @@
             <a:pPr algn="l">
               <a:defRPr sz="1200" b="1">
                 <a:solidFill>
-                  <a:srgbClr val="111318"/>
+                  <a:srgbClr val="180D20"/>
                 </a:solidFill>
                 <a:latin typeface="Arial"/>
                 <a:ea typeface="Arial"/>
@@ -3404,7 +3404,7 @@
           <p:cNvPr id="23" name="footer-line-10">
             <a:extLst xmlns:a="http://schemas.openxmlformats.org/drawingml/2006/main">
               <a:ext uri="{FF2B5EF4-FFF2-40B4-BE49-F238E27FC236}">
-                <a16:creationId xmlns:a16="http://schemas.microsoft.com/office/drawing/2014/main" id="{9C1B9C3D-6329-4FE0-A645-1F6AA47DD0FB}"/>
+                <a16:creationId xmlns:a16="http://schemas.microsoft.com/office/drawing/2014/main" id="{8B949F16-F0C7-481D-AF0C-9D2B115588EA}"/>
               </a:ext>
             </a:extLst>
           </p:cNvPr>
@@ -3422,7 +3422,7 @@
             <a:avLst/>
           </a:prstGeom>
           <a:solidFill xmlns:a="http://schemas.openxmlformats.org/drawingml/2006/main">
-            <a:srgbClr val="D9E0E9"/>
+            <a:srgbClr val="DED4E6"/>
           </a:solidFill>
         </p:spPr>
       </p:sp>
@@ -3431,7 +3431,7 @@
           <p:cNvPr id="24" name="footer-name-10">
             <a:extLst xmlns:a="http://schemas.openxmlformats.org/drawingml/2006/main">
               <a:ext uri="{FF2B5EF4-FFF2-40B4-BE49-F238E27FC236}">
-                <a16:creationId xmlns:a16="http://schemas.microsoft.com/office/drawing/2014/main" id="{CBECA872-4A6F-45B5-A41B-AD38F7C0BAAF}"/>
+                <a16:creationId xmlns:a16="http://schemas.microsoft.com/office/drawing/2014/main" id="{3B5E951F-09E3-40EE-8F00-1DC1BF45A6BB}"/>
               </a:ext>
             </a:extLst>
           </p:cNvPr>
@@ -3458,7 +3458,7 @@
             <a:pPr algn="l">
               <a:defRPr sz="825" b="1">
                 <a:solidFill>
-                  <a:srgbClr val="626A78"/>
+                  <a:srgbClr val="70647A"/>
                 </a:solidFill>
                 <a:latin typeface="Arial"/>
                 <a:ea typeface="Arial"/>
@@ -3476,7 +3476,7 @@
           <p:cNvPr id="25" name="footer-page-10">
             <a:extLst xmlns:a="http://schemas.openxmlformats.org/drawingml/2006/main">
               <a:ext uri="{FF2B5EF4-FFF2-40B4-BE49-F238E27FC236}">
-                <a16:creationId xmlns:a16="http://schemas.microsoft.com/office/drawing/2014/main" id="{5CC6082B-6D82-4265-A787-23140E1BF058}"/>
+                <a16:creationId xmlns:a16="http://schemas.microsoft.com/office/drawing/2014/main" id="{C97D4472-CE2F-430E-AFDA-4421E429D713}"/>
               </a:ext>
             </a:extLst>
           </p:cNvPr>
@@ -3503,7 +3503,7 @@
             <a:pPr algn="r">
               <a:defRPr sz="900" b="1">
                 <a:solidFill>
-                  <a:srgbClr val="626A78"/>
+                  <a:srgbClr val="70647A"/>
                 </a:solidFill>
                 <a:latin typeface="Arial"/>
                 <a:ea typeface="Arial"/>
@@ -3519,7 +3519,7 @@
     </p:spTree>
     <p:extLst>
       <p:ext uri="{BB962C8B-B14F-4D97-AF65-F5344CB8AC3E}">
-        <p14:creationId xmlns:p14="http://schemas.microsoft.com/office/powerpoint/2010/main" val="1048712631"/>
+        <p14:creationId xmlns:p14="http://schemas.microsoft.com/office/powerpoint/2010/main" val="2040103951"/>
       </p:ext>
     </p:extLst>
   </p:cSld>
@@ -3540,10 +3540,10 @@
       </p:grpSpPr>
       <p:sp>
         <p:nvSpPr>
-          <p:cNvPr id="1" name="11-closing-canvas">
-            <a:extLst xmlns:a="http://schemas.openxmlformats.org/drawingml/2006/main">
-              <a:ext uri="{FF2B5EF4-FFF2-40B4-BE49-F238E27FC236}">
-                <a16:creationId xmlns:a16="http://schemas.microsoft.com/office/drawing/2014/main" id="{293A1A83-1E16-403C-A53B-7C0E26EA841F}"/>
+          <p:cNvPr id="14" name="11-closing-canvas">
+            <a:extLst xmlns:a="http://schemas.openxmlformats.org/drawingml/2006/main">
+              <a:ext uri="{FF2B5EF4-FFF2-40B4-BE49-F238E27FC236}">
+                <a16:creationId xmlns:a16="http://schemas.microsoft.com/office/drawing/2014/main" id="{C61273E1-5C14-482D-BA15-61DB09C9A266}"/>
               </a:ext>
             </a:extLst>
           </p:cNvPr>
@@ -3570,7 +3570,7 @@
           <p:cNvPr id="2" name="closing-blue">
             <a:extLst xmlns:a="http://schemas.openxmlformats.org/drawingml/2006/main">
               <a:ext uri="{FF2B5EF4-FFF2-40B4-BE49-F238E27FC236}">
-                <a16:creationId xmlns:a16="http://schemas.microsoft.com/office/drawing/2014/main" id="{59A3B09A-1CA8-4829-A9DF-9C9F83B280EC}"/>
+                <a16:creationId xmlns:a16="http://schemas.microsoft.com/office/drawing/2014/main" id="{6BEE99CF-85B3-44A5-89CA-A491A88BB6BD}"/>
               </a:ext>
             </a:extLst>
           </p:cNvPr>
@@ -3588,7 +3588,7 @@
             <a:avLst/>
           </a:prstGeom>
           <a:solidFill xmlns:a="http://schemas.openxmlformats.org/drawingml/2006/main">
-            <a:srgbClr val="3D8DFF"/>
+            <a:srgbClr val="180D20"/>
           </a:solidFill>
         </p:spPr>
       </p:sp>
@@ -3597,7 +3597,7 @@
           <p:cNvPr id="3" name="closing-blue-detail">
             <a:extLst xmlns:a="http://schemas.openxmlformats.org/drawingml/2006/main">
               <a:ext uri="{FF2B5EF4-FFF2-40B4-BE49-F238E27FC236}">
-                <a16:creationId xmlns:a16="http://schemas.microsoft.com/office/drawing/2014/main" id="{1D148B5D-31DA-4716-B65A-065C7CE642E9}"/>
+                <a16:creationId xmlns:a16="http://schemas.microsoft.com/office/drawing/2014/main" id="{7716D1E4-CCC4-45A1-92ED-B5F2126A0D77}"/>
               </a:ext>
             </a:extLst>
           </p:cNvPr>
@@ -3617,7 +3617,7 @@
             </a:avLst>
           </a:prstGeom>
           <a:solidFill xmlns:a="http://schemas.openxmlformats.org/drawingml/2006/main">
-            <a:srgbClr val="1769E0"/>
+            <a:srgbClr val="6845C6"/>
           </a:solidFill>
         </p:spPr>
       </p:sp>
@@ -3626,7 +3626,7 @@
           <p:cNvPr id="4" name="closing-monogram">
             <a:extLst xmlns:a="http://schemas.openxmlformats.org/drawingml/2006/main">
               <a:ext uri="{FF2B5EF4-FFF2-40B4-BE49-F238E27FC236}">
-                <a16:creationId xmlns:a16="http://schemas.microsoft.com/office/drawing/2014/main" id="{850E7E3A-8238-49B3-BD12-259EDEE00FE7}"/>
+                <a16:creationId xmlns:a16="http://schemas.microsoft.com/office/drawing/2014/main" id="{51F82954-8E04-42A7-B15B-09FC51020028}"/>
               </a:ext>
             </a:extLst>
           </p:cNvPr>
@@ -3653,7 +3653,7 @@
             <a:pPr algn="ctr">
               <a:defRPr sz="7350" b="1">
                 <a:solidFill>
-                  <a:srgbClr val="FFFFFF"/>
+                  <a:srgbClr val="E0B44F"/>
                 </a:solidFill>
                 <a:latin typeface="Arial"/>
                 <a:ea typeface="Arial"/>
@@ -3671,7 +3671,7 @@
           <p:cNvPr id="5" name="closing-role">
             <a:extLst xmlns:a="http://schemas.openxmlformats.org/drawingml/2006/main">
               <a:ext uri="{FF2B5EF4-FFF2-40B4-BE49-F238E27FC236}">
-                <a16:creationId xmlns:a16="http://schemas.microsoft.com/office/drawing/2014/main" id="{37D32111-E1A9-4868-81CE-D814C9137205}"/>
+                <a16:creationId xmlns:a16="http://schemas.microsoft.com/office/drawing/2014/main" id="{9CA143AB-97A0-428E-87AF-8861DFDB3BE1}"/>
               </a:ext>
             </a:extLst>
           </p:cNvPr>
@@ -3698,7 +3698,7 @@
             <a:pPr algn="ctr">
               <a:defRPr sz="1050" b="1">
                 <a:solidFill>
-                  <a:srgbClr val="FFFFFF"/>
+                  <a:srgbClr val="E65FA8"/>
                 </a:solidFill>
                 <a:latin typeface="Arial"/>
                 <a:ea typeface="Arial"/>
@@ -3716,7 +3716,7 @@
           <p:cNvPr id="6" name="closing-title">
             <a:extLst xmlns:a="http://schemas.openxmlformats.org/drawingml/2006/main">
               <a:ext uri="{FF2B5EF4-FFF2-40B4-BE49-F238E27FC236}">
-                <a16:creationId xmlns:a16="http://schemas.microsoft.com/office/drawing/2014/main" id="{64037A91-1E87-46D4-9DE6-B759185705FC}"/>
+                <a16:creationId xmlns:a16="http://schemas.microsoft.com/office/drawing/2014/main" id="{B1FDF5A7-8D04-46FB-8D47-E3D2BF13285E}"/>
               </a:ext>
             </a:extLst>
           </p:cNvPr>
@@ -3743,7 +3743,7 @@
             <a:pPr algn="l">
               <a:defRPr sz="3750" b="1">
                 <a:solidFill>
-                  <a:srgbClr val="111318"/>
+                  <a:srgbClr val="180D20"/>
                 </a:solidFill>
                 <a:latin typeface="Arial"/>
                 <a:ea typeface="Arial"/>
@@ -3762,7 +3762,7 @@
           <p:cNvPr id="7" name="closing-copy">
             <a:extLst xmlns:a="http://schemas.openxmlformats.org/drawingml/2006/main">
               <a:ext uri="{FF2B5EF4-FFF2-40B4-BE49-F238E27FC236}">
-                <a16:creationId xmlns:a16="http://schemas.microsoft.com/office/drawing/2014/main" id="{91535760-9E05-4A5B-AFB8-96C6FF813F2B}"/>
+                <a16:creationId xmlns:a16="http://schemas.microsoft.com/office/drawing/2014/main" id="{A49F3D27-B105-4CAA-90D3-A0D0090648D0}"/>
               </a:ext>
             </a:extLst>
           </p:cNvPr>
@@ -3789,7 +3789,7 @@
             <a:pPr algn="l">
               <a:defRPr sz="1575" b="0">
                 <a:solidFill>
-                  <a:srgbClr val="626A78"/>
+                  <a:srgbClr val="70647A"/>
                 </a:solidFill>
                 <a:latin typeface="Arial"/>
                 <a:ea typeface="Arial"/>
@@ -3807,7 +3807,7 @@
           <p:cNvPr id="8" name="closing-line">
             <a:extLst xmlns:a="http://schemas.openxmlformats.org/drawingml/2006/main">
               <a:ext uri="{FF2B5EF4-FFF2-40B4-BE49-F238E27FC236}">
-                <a16:creationId xmlns:a16="http://schemas.microsoft.com/office/drawing/2014/main" id="{044F9902-2D61-4617-A42F-58C85AF4AF40}"/>
+                <a16:creationId xmlns:a16="http://schemas.microsoft.com/office/drawing/2014/main" id="{D12C9D6F-992C-418D-A0CB-D725A012476E}"/>
               </a:ext>
             </a:extLst>
           </p:cNvPr>
@@ -3825,7 +3825,7 @@
             <a:avLst/>
           </a:prstGeom>
           <a:solidFill xmlns:a="http://schemas.openxmlformats.org/drawingml/2006/main">
-            <a:srgbClr val="D9E0E9"/>
+            <a:srgbClr val="DED4E6"/>
           </a:solidFill>
         </p:spPr>
       </p:sp>
@@ -3834,7 +3834,7 @@
           <p:cNvPr id="9" name="closing-email-label">
             <a:extLst xmlns:a="http://schemas.openxmlformats.org/drawingml/2006/main">
               <a:ext uri="{FF2B5EF4-FFF2-40B4-BE49-F238E27FC236}">
-                <a16:creationId xmlns:a16="http://schemas.microsoft.com/office/drawing/2014/main" id="{A44EF13F-B77E-4AF9-8DD8-A6799BFD720F}"/>
+                <a16:creationId xmlns:a16="http://schemas.microsoft.com/office/drawing/2014/main" id="{F7FC7CEE-E350-43C6-B2D9-E766708E0EE8}"/>
               </a:ext>
             </a:extLst>
           </p:cNvPr>
@@ -3861,7 +3861,7 @@
             <a:pPr algn="l">
               <a:defRPr sz="975" b="1">
                 <a:solidFill>
-                  <a:srgbClr val="1769E0"/>
+                  <a:srgbClr val="6845C6"/>
                 </a:solidFill>
                 <a:latin typeface="Arial"/>
                 <a:ea typeface="Arial"/>
@@ -3879,7 +3879,7 @@
           <p:cNvPr id="10" name="closing-email">
             <a:extLst xmlns:a="http://schemas.openxmlformats.org/drawingml/2006/main">
               <a:ext uri="{FF2B5EF4-FFF2-40B4-BE49-F238E27FC236}">
-                <a16:creationId xmlns:a16="http://schemas.microsoft.com/office/drawing/2014/main" id="{0FBB9FF1-5EF8-44CE-92FD-944F1035B8EF}"/>
+                <a16:creationId xmlns:a16="http://schemas.microsoft.com/office/drawing/2014/main" id="{0B3D969D-6BE8-4BC2-9632-CBB2776027E7}"/>
               </a:ext>
             </a:extLst>
           </p:cNvPr>
@@ -3906,7 +3906,7 @@
             <a:pPr algn="l">
               <a:defRPr sz="1650" b="1">
                 <a:solidFill>
-                  <a:srgbClr val="111318"/>
+                  <a:srgbClr val="180D20"/>
                 </a:solidFill>
                 <a:latin typeface="Arial"/>
                 <a:ea typeface="Arial"/>
@@ -3924,7 +3924,7 @@
           <p:cNvPr id="11" name="closing-links">
             <a:extLst xmlns:a="http://schemas.openxmlformats.org/drawingml/2006/main">
               <a:ext uri="{FF2B5EF4-FFF2-40B4-BE49-F238E27FC236}">
-                <a16:creationId xmlns:a16="http://schemas.microsoft.com/office/drawing/2014/main" id="{7BC66D2F-83AE-4AE9-B642-0C1E1F74A506}"/>
+                <a16:creationId xmlns:a16="http://schemas.microsoft.com/office/drawing/2014/main" id="{7B9C0E9B-04A1-4F6B-B687-7EE0C25FB303}"/>
               </a:ext>
             </a:extLst>
           </p:cNvPr>
@@ -3951,7 +3951,7 @@
             <a:pPr algn="l">
               <a:defRPr sz="1425" b="0">
                 <a:solidFill>
-                  <a:srgbClr val="626A78"/>
+                  <a:srgbClr val="70647A"/>
                 </a:solidFill>
                 <a:latin typeface="Arial"/>
                 <a:ea typeface="Arial"/>
@@ -3970,7 +3970,7 @@
           <p:cNvPr id="12" name="closing-phone">
             <a:extLst xmlns:a="http://schemas.openxmlformats.org/drawingml/2006/main">
               <a:ext uri="{FF2B5EF4-FFF2-40B4-BE49-F238E27FC236}">
-                <a16:creationId xmlns:a16="http://schemas.microsoft.com/office/drawing/2014/main" id="{99AC1F4A-6CB6-4FD0-B7C6-77045F81A931}"/>
+                <a16:creationId xmlns:a16="http://schemas.microsoft.com/office/drawing/2014/main" id="{ED998B23-023E-4A17-A158-6444550DD35E}"/>
               </a:ext>
             </a:extLst>
           </p:cNvPr>
@@ -3997,7 +3997,7 @@
             <a:pPr algn="l">
               <a:defRPr sz="1275" b="1">
                 <a:solidFill>
-                  <a:srgbClr val="111318"/>
+                  <a:srgbClr val="180D20"/>
                 </a:solidFill>
                 <a:latin typeface="Arial"/>
                 <a:ea typeface="Arial"/>
@@ -4015,7 +4015,7 @@
           <p:cNvPr id="13" name="closing-page">
             <a:extLst xmlns:a="http://schemas.openxmlformats.org/drawingml/2006/main">
               <a:ext uri="{FF2B5EF4-FFF2-40B4-BE49-F238E27FC236}">
-                <a16:creationId xmlns:a16="http://schemas.microsoft.com/office/drawing/2014/main" id="{F4944A1B-CE08-4016-A7FB-75CC08CE6A24}"/>
+                <a16:creationId xmlns:a16="http://schemas.microsoft.com/office/drawing/2014/main" id="{FA4C20BB-7B73-412D-A199-26448E22C54C}"/>
               </a:ext>
             </a:extLst>
           </p:cNvPr>
@@ -4042,7 +4042,7 @@
             <a:pPr algn="r">
               <a:defRPr sz="900" b="1">
                 <a:solidFill>
-                  <a:srgbClr val="626A78"/>
+                  <a:srgbClr val="70647A"/>
                 </a:solidFill>
                 <a:latin typeface="Arial"/>
                 <a:ea typeface="Arial"/>
@@ -4058,7 +4058,7 @@
     </p:spTree>
     <p:extLst>
       <p:ext uri="{BB962C8B-B14F-4D97-AF65-F5344CB8AC3E}">
-        <p14:creationId xmlns:p14="http://schemas.microsoft.com/office/powerpoint/2010/main" val="1420869108"/>
+        <p14:creationId xmlns:p14="http://schemas.microsoft.com/office/powerpoint/2010/main" val="592213662"/>
       </p:ext>
     </p:extLst>
   </p:cSld>
@@ -4079,10 +4079,10 @@
       </p:grpSpPr>
       <p:sp>
         <p:nvSpPr>
-          <p:cNvPr id="1" name="02-lifecycle-canvas">
-            <a:extLst xmlns:a="http://schemas.openxmlformats.org/drawingml/2006/main">
-              <a:ext uri="{FF2B5EF4-FFF2-40B4-BE49-F238E27FC236}">
-                <a16:creationId xmlns:a16="http://schemas.microsoft.com/office/drawing/2014/main" id="{382C14A4-3204-44D5-8B63-DF280B82E1C3}"/>
+          <p:cNvPr id="29" name="02-lifecycle-canvas">
+            <a:extLst xmlns:a="http://schemas.openxmlformats.org/drawingml/2006/main">
+              <a:ext uri="{FF2B5EF4-FFF2-40B4-BE49-F238E27FC236}">
+                <a16:creationId xmlns:a16="http://schemas.microsoft.com/office/drawing/2014/main" id="{818BC0FA-92D5-472F-8021-F05C7177CF60}"/>
               </a:ext>
             </a:extLst>
           </p:cNvPr>
@@ -4109,7 +4109,7 @@
           <p:cNvPr id="2" name="eyebrow-2">
             <a:extLst xmlns:a="http://schemas.openxmlformats.org/drawingml/2006/main">
               <a:ext uri="{FF2B5EF4-FFF2-40B4-BE49-F238E27FC236}">
-                <a16:creationId xmlns:a16="http://schemas.microsoft.com/office/drawing/2014/main" id="{A9293446-9BF3-42B6-A364-448999573775}"/>
+                <a16:creationId xmlns:a16="http://schemas.microsoft.com/office/drawing/2014/main" id="{1B59F5F9-EA83-4A91-BFC5-33586D69310C}"/>
               </a:ext>
             </a:extLst>
           </p:cNvPr>
@@ -4136,7 +4136,7 @@
             <a:pPr algn="l">
               <a:defRPr sz="1050" b="1">
                 <a:solidFill>
-                  <a:srgbClr val="1769E0"/>
+                  <a:srgbClr val="6845C6"/>
                 </a:solidFill>
                 <a:latin typeface="Arial"/>
                 <a:ea typeface="Arial"/>
@@ -4154,7 +4154,7 @@
           <p:cNvPr id="3" name="title-2">
             <a:extLst xmlns:a="http://schemas.openxmlformats.org/drawingml/2006/main">
               <a:ext uri="{FF2B5EF4-FFF2-40B4-BE49-F238E27FC236}">
-                <a16:creationId xmlns:a16="http://schemas.microsoft.com/office/drawing/2014/main" id="{87A233B2-8C56-4C71-8170-A85FA344C836}"/>
+                <a16:creationId xmlns:a16="http://schemas.microsoft.com/office/drawing/2014/main" id="{47A712AF-4D3F-4056-883D-C6D398BF5A5E}"/>
               </a:ext>
             </a:extLst>
           </p:cNvPr>
@@ -4181,7 +4181,7 @@
             <a:pPr algn="l">
               <a:defRPr sz="3225" b="1">
                 <a:solidFill>
-                  <a:srgbClr val="111318"/>
+                  <a:srgbClr val="180D20"/>
                 </a:solidFill>
                 <a:latin typeface="Arial"/>
                 <a:ea typeface="Arial"/>
@@ -4199,7 +4199,7 @@
           <p:cNvPr id="4" name="subtitle-2">
             <a:extLst xmlns:a="http://schemas.openxmlformats.org/drawingml/2006/main">
               <a:ext uri="{FF2B5EF4-FFF2-40B4-BE49-F238E27FC236}">
-                <a16:creationId xmlns:a16="http://schemas.microsoft.com/office/drawing/2014/main" id="{1CF86FDF-A8F9-4B96-827F-DA6106AA03DB}"/>
+                <a16:creationId xmlns:a16="http://schemas.microsoft.com/office/drawing/2014/main" id="{0CB2E2AF-6E6B-4E0B-9B6B-634ED9FAE72E}"/>
               </a:ext>
             </a:extLst>
           </p:cNvPr>
@@ -4226,7 +4226,7 @@
             <a:pPr algn="l">
               <a:defRPr sz="1425" b="0">
                 <a:solidFill>
-                  <a:srgbClr val="626A78"/>
+                  <a:srgbClr val="70647A"/>
                 </a:solidFill>
                 <a:latin typeface="Arial"/>
                 <a:ea typeface="Arial"/>
@@ -4244,7 +4244,7 @@
           <p:cNvPr id="5" name="role-card-01">
             <a:extLst xmlns:a="http://schemas.openxmlformats.org/drawingml/2006/main">
               <a:ext uri="{FF2B5EF4-FFF2-40B4-BE49-F238E27FC236}">
-                <a16:creationId xmlns:a16="http://schemas.microsoft.com/office/drawing/2014/main" id="{B7D32D76-01C1-4836-96E3-0D2859977844}"/>
+                <a16:creationId xmlns:a16="http://schemas.microsoft.com/office/drawing/2014/main" id="{446AB52E-F49C-41FB-B4E0-8DFAD1DBA371}"/>
               </a:ext>
             </a:extLst>
           </p:cNvPr>
@@ -4264,7 +4264,7 @@
             </a:avLst>
           </a:prstGeom>
           <a:solidFill xmlns:a="http://schemas.openxmlformats.org/drawingml/2006/main">
-            <a:srgbClr val="F3F6FA"/>
+            <a:srgbClr val="FBF7EF"/>
           </a:solidFill>
         </p:spPr>
       </p:sp>
@@ -4273,7 +4273,7 @@
           <p:cNvPr id="6" name="role-step-bg-01">
             <a:extLst xmlns:a="http://schemas.openxmlformats.org/drawingml/2006/main">
               <a:ext uri="{FF2B5EF4-FFF2-40B4-BE49-F238E27FC236}">
-                <a16:creationId xmlns:a16="http://schemas.microsoft.com/office/drawing/2014/main" id="{43C1B1DA-F9CA-43AF-9703-B7186456653B}"/>
+                <a16:creationId xmlns:a16="http://schemas.microsoft.com/office/drawing/2014/main" id="{0F5FAF3D-CE9C-4696-8EA6-72C9F09392C0}"/>
               </a:ext>
             </a:extLst>
           </p:cNvPr>
@@ -4293,7 +4293,7 @@
             </a:avLst>
           </a:prstGeom>
           <a:solidFill xmlns:a="http://schemas.openxmlformats.org/drawingml/2006/main">
-            <a:srgbClr val="3D8DFF"/>
+            <a:srgbClr val="E0B44F"/>
           </a:solidFill>
         </p:spPr>
       </p:sp>
@@ -4302,7 +4302,7 @@
           <p:cNvPr id="7" name="role-step-01">
             <a:extLst xmlns:a="http://schemas.openxmlformats.org/drawingml/2006/main">
               <a:ext uri="{FF2B5EF4-FFF2-40B4-BE49-F238E27FC236}">
-                <a16:creationId xmlns:a16="http://schemas.microsoft.com/office/drawing/2014/main" id="{2FA6699C-3314-4993-A3F1-DBC2B89C9129}"/>
+                <a16:creationId xmlns:a16="http://schemas.microsoft.com/office/drawing/2014/main" id="{3C93951F-A5DD-4610-95F9-6BE73924B0ED}"/>
               </a:ext>
             </a:extLst>
           </p:cNvPr>
@@ -4347,7 +4347,7 @@
           <p:cNvPr id="8" name="role-title-01">
             <a:extLst xmlns:a="http://schemas.openxmlformats.org/drawingml/2006/main">
               <a:ext uri="{FF2B5EF4-FFF2-40B4-BE49-F238E27FC236}">
-                <a16:creationId xmlns:a16="http://schemas.microsoft.com/office/drawing/2014/main" id="{383AD453-AF0C-4272-92E5-8907C39C14E7}"/>
+                <a16:creationId xmlns:a16="http://schemas.microsoft.com/office/drawing/2014/main" id="{53AF66AF-F63D-477F-AEFE-9DED5ED349B2}"/>
               </a:ext>
             </a:extLst>
           </p:cNvPr>
@@ -4374,7 +4374,7 @@
             <a:pPr algn="l">
               <a:defRPr sz="2100" b="1">
                 <a:solidFill>
-                  <a:srgbClr val="111318"/>
+                  <a:srgbClr val="180D20"/>
                 </a:solidFill>
                 <a:latin typeface="Arial"/>
                 <a:ea typeface="Arial"/>
@@ -4392,7 +4392,7 @@
           <p:cNvPr id="9" name="role-desc-01">
             <a:extLst xmlns:a="http://schemas.openxmlformats.org/drawingml/2006/main">
               <a:ext uri="{FF2B5EF4-FFF2-40B4-BE49-F238E27FC236}">
-                <a16:creationId xmlns:a16="http://schemas.microsoft.com/office/drawing/2014/main" id="{2FD251E3-2651-423B-9EE2-DE923E76031F}"/>
+                <a16:creationId xmlns:a16="http://schemas.microsoft.com/office/drawing/2014/main" id="{900F5480-240F-4180-8BDA-61CD91BE7BD8}"/>
               </a:ext>
             </a:extLst>
           </p:cNvPr>
@@ -4419,7 +4419,7 @@
             <a:pPr algn="l">
               <a:defRPr sz="1350" b="0">
                 <a:solidFill>
-                  <a:srgbClr val="626A78"/>
+                  <a:srgbClr val="70647A"/>
                 </a:solidFill>
                 <a:latin typeface="Arial"/>
                 <a:ea typeface="Arial"/>
@@ -4437,7 +4437,7 @@
           <p:cNvPr id="10" name="role-proof-line-01">
             <a:extLst xmlns:a="http://schemas.openxmlformats.org/drawingml/2006/main">
               <a:ext uri="{FF2B5EF4-FFF2-40B4-BE49-F238E27FC236}">
-                <a16:creationId xmlns:a16="http://schemas.microsoft.com/office/drawing/2014/main" id="{723C3827-8026-4E54-9BF8-D04090607EB4}"/>
+                <a16:creationId xmlns:a16="http://schemas.microsoft.com/office/drawing/2014/main" id="{D24ACF06-0E81-438D-A572-9564435F392B}"/>
               </a:ext>
             </a:extLst>
           </p:cNvPr>
@@ -4455,7 +4455,7 @@
             <a:avLst/>
           </a:prstGeom>
           <a:solidFill xmlns:a="http://schemas.openxmlformats.org/drawingml/2006/main">
-            <a:srgbClr val="D9E0E9"/>
+            <a:srgbClr val="DED4E6"/>
           </a:solidFill>
         </p:spPr>
       </p:sp>
@@ -4464,7 +4464,7 @@
           <p:cNvPr id="11" name="role-proof-01">
             <a:extLst xmlns:a="http://schemas.openxmlformats.org/drawingml/2006/main">
               <a:ext uri="{FF2B5EF4-FFF2-40B4-BE49-F238E27FC236}">
-                <a16:creationId xmlns:a16="http://schemas.microsoft.com/office/drawing/2014/main" id="{CB672EE4-1E53-4C37-A369-21EDBA74DA3B}"/>
+                <a16:creationId xmlns:a16="http://schemas.microsoft.com/office/drawing/2014/main" id="{3EAD081B-8A2D-46E0-84A9-53481F9BA589}"/>
               </a:ext>
             </a:extLst>
           </p:cNvPr>
@@ -4491,7 +4491,7 @@
             <a:pPr algn="l">
               <a:defRPr sz="1275" b="1">
                 <a:solidFill>
-                  <a:srgbClr val="1769E0"/>
+                  <a:srgbClr val="6845C6"/>
                 </a:solidFill>
                 <a:latin typeface="Arial"/>
                 <a:ea typeface="Arial"/>
@@ -4509,7 +4509,7 @@
           <p:cNvPr id="12" name="role-card-02">
             <a:extLst xmlns:a="http://schemas.openxmlformats.org/drawingml/2006/main">
               <a:ext uri="{FF2B5EF4-FFF2-40B4-BE49-F238E27FC236}">
-                <a16:creationId xmlns:a16="http://schemas.microsoft.com/office/drawing/2014/main" id="{3F2B27C1-5FC2-40C8-BE45-6050B2F6A133}"/>
+                <a16:creationId xmlns:a16="http://schemas.microsoft.com/office/drawing/2014/main" id="{935C5DF7-6D44-4407-9CE1-1C265F04F034}"/>
               </a:ext>
             </a:extLst>
           </p:cNvPr>
@@ -4529,7 +4529,7 @@
             </a:avLst>
           </a:prstGeom>
           <a:solidFill xmlns:a="http://schemas.openxmlformats.org/drawingml/2006/main">
-            <a:srgbClr val="F3F6FA"/>
+            <a:srgbClr val="FBF7EF"/>
           </a:solidFill>
         </p:spPr>
       </p:sp>
@@ -4538,7 +4538,7 @@
           <p:cNvPr id="13" name="role-step-bg-02">
             <a:extLst xmlns:a="http://schemas.openxmlformats.org/drawingml/2006/main">
               <a:ext uri="{FF2B5EF4-FFF2-40B4-BE49-F238E27FC236}">
-                <a16:creationId xmlns:a16="http://schemas.microsoft.com/office/drawing/2014/main" id="{D92A4594-22EE-4716-87B7-3DDE9126FC24}"/>
+                <a16:creationId xmlns:a16="http://schemas.microsoft.com/office/drawing/2014/main" id="{34106409-DD96-49BD-901B-CFA8D800772E}"/>
               </a:ext>
             </a:extLst>
           </p:cNvPr>
@@ -4558,7 +4558,7 @@
             </a:avLst>
           </a:prstGeom>
           <a:solidFill xmlns:a="http://schemas.openxmlformats.org/drawingml/2006/main">
-            <a:srgbClr val="3D8DFF"/>
+            <a:srgbClr val="A78BFA"/>
           </a:solidFill>
         </p:spPr>
       </p:sp>
@@ -4567,7 +4567,7 @@
           <p:cNvPr id="14" name="role-step-02">
             <a:extLst xmlns:a="http://schemas.openxmlformats.org/drawingml/2006/main">
               <a:ext uri="{FF2B5EF4-FFF2-40B4-BE49-F238E27FC236}">
-                <a16:creationId xmlns:a16="http://schemas.microsoft.com/office/drawing/2014/main" id="{519FF9E3-474E-4917-91DD-C0C9EA7651C1}"/>
+                <a16:creationId xmlns:a16="http://schemas.microsoft.com/office/drawing/2014/main" id="{6251DE9C-1BCB-47E4-BA53-3480A15D7B67}"/>
               </a:ext>
             </a:extLst>
           </p:cNvPr>
@@ -4612,7 +4612,7 @@
           <p:cNvPr id="15" name="role-title-02">
             <a:extLst xmlns:a="http://schemas.openxmlformats.org/drawingml/2006/main">
               <a:ext uri="{FF2B5EF4-FFF2-40B4-BE49-F238E27FC236}">
-                <a16:creationId xmlns:a16="http://schemas.microsoft.com/office/drawing/2014/main" id="{D57CA499-F34C-4E47-9AC1-44850B46063E}"/>
+                <a16:creationId xmlns:a16="http://schemas.microsoft.com/office/drawing/2014/main" id="{2C436E90-05A6-4984-A8DF-D11CF471DFAC}"/>
               </a:ext>
             </a:extLst>
           </p:cNvPr>
@@ -4639,7 +4639,7 @@
             <a:pPr algn="l">
               <a:defRPr sz="2100" b="1">
                 <a:solidFill>
-                  <a:srgbClr val="111318"/>
+                  <a:srgbClr val="180D20"/>
                 </a:solidFill>
                 <a:latin typeface="Arial"/>
                 <a:ea typeface="Arial"/>
@@ -4657,7 +4657,7 @@
           <p:cNvPr id="16" name="role-desc-02">
             <a:extLst xmlns:a="http://schemas.openxmlformats.org/drawingml/2006/main">
               <a:ext uri="{FF2B5EF4-FFF2-40B4-BE49-F238E27FC236}">
-                <a16:creationId xmlns:a16="http://schemas.microsoft.com/office/drawing/2014/main" id="{4327F13B-9245-483E-A63F-17313C76AFE4}"/>
+                <a16:creationId xmlns:a16="http://schemas.microsoft.com/office/drawing/2014/main" id="{1927BE34-B858-489C-A48C-E6AA30098AF7}"/>
               </a:ext>
             </a:extLst>
           </p:cNvPr>
@@ -4684,7 +4684,7 @@
             <a:pPr algn="l">
               <a:defRPr sz="1350" b="0">
                 <a:solidFill>
-                  <a:srgbClr val="626A78"/>
+                  <a:srgbClr val="70647A"/>
                 </a:solidFill>
                 <a:latin typeface="Arial"/>
                 <a:ea typeface="Arial"/>
@@ -4702,7 +4702,7 @@
           <p:cNvPr id="17" name="role-proof-line-02">
             <a:extLst xmlns:a="http://schemas.openxmlformats.org/drawingml/2006/main">
               <a:ext uri="{FF2B5EF4-FFF2-40B4-BE49-F238E27FC236}">
-                <a16:creationId xmlns:a16="http://schemas.microsoft.com/office/drawing/2014/main" id="{3DF695C4-7C8C-4593-8FB1-3656B730134E}"/>
+                <a16:creationId xmlns:a16="http://schemas.microsoft.com/office/drawing/2014/main" id="{69BA743C-CF62-4881-A45D-35A028472068}"/>
               </a:ext>
             </a:extLst>
           </p:cNvPr>
@@ -4720,7 +4720,7 @@
             <a:avLst/>
           </a:prstGeom>
           <a:solidFill xmlns:a="http://schemas.openxmlformats.org/drawingml/2006/main">
-            <a:srgbClr val="D9E0E9"/>
+            <a:srgbClr val="DED4E6"/>
           </a:solidFill>
         </p:spPr>
       </p:sp>
@@ -4729,7 +4729,7 @@
           <p:cNvPr id="18" name="role-proof-02">
             <a:extLst xmlns:a="http://schemas.openxmlformats.org/drawingml/2006/main">
               <a:ext uri="{FF2B5EF4-FFF2-40B4-BE49-F238E27FC236}">
-                <a16:creationId xmlns:a16="http://schemas.microsoft.com/office/drawing/2014/main" id="{CE7C41A4-4DDB-4F0C-B47C-BEB176AB5878}"/>
+                <a16:creationId xmlns:a16="http://schemas.microsoft.com/office/drawing/2014/main" id="{B215376D-6D65-4DE1-89C5-DDA0629E3975}"/>
               </a:ext>
             </a:extLst>
           </p:cNvPr>
@@ -4756,7 +4756,7 @@
             <a:pPr algn="l">
               <a:defRPr sz="1275" b="1">
                 <a:solidFill>
-                  <a:srgbClr val="1769E0"/>
+                  <a:srgbClr val="6845C6"/>
                 </a:solidFill>
                 <a:latin typeface="Arial"/>
                 <a:ea typeface="Arial"/>
@@ -4774,7 +4774,7 @@
           <p:cNvPr id="19" name="role-card-03">
             <a:extLst xmlns:a="http://schemas.openxmlformats.org/drawingml/2006/main">
               <a:ext uri="{FF2B5EF4-FFF2-40B4-BE49-F238E27FC236}">
-                <a16:creationId xmlns:a16="http://schemas.microsoft.com/office/drawing/2014/main" id="{4BFE1AFB-90D5-4D03-A88D-24A34F7FEF61}"/>
+                <a16:creationId xmlns:a16="http://schemas.microsoft.com/office/drawing/2014/main" id="{804EEB0D-AC3C-499C-BB72-A6C297B2B5D0}"/>
               </a:ext>
             </a:extLst>
           </p:cNvPr>
@@ -4794,7 +4794,7 @@
             </a:avLst>
           </a:prstGeom>
           <a:solidFill xmlns:a="http://schemas.openxmlformats.org/drawingml/2006/main">
-            <a:srgbClr val="F3F6FA"/>
+            <a:srgbClr val="FBF7EF"/>
           </a:solidFill>
         </p:spPr>
       </p:sp>
@@ -4803,7 +4803,7 @@
           <p:cNvPr id="20" name="role-step-bg-03">
             <a:extLst xmlns:a="http://schemas.openxmlformats.org/drawingml/2006/main">
               <a:ext uri="{FF2B5EF4-FFF2-40B4-BE49-F238E27FC236}">
-                <a16:creationId xmlns:a16="http://schemas.microsoft.com/office/drawing/2014/main" id="{576A4817-021B-4BF9-BDCF-F832E11AFA55}"/>
+                <a16:creationId xmlns:a16="http://schemas.microsoft.com/office/drawing/2014/main" id="{573AD520-FD92-45AE-8F5E-6C4663DD4196}"/>
               </a:ext>
             </a:extLst>
           </p:cNvPr>
@@ -4823,7 +4823,7 @@
             </a:avLst>
           </a:prstGeom>
           <a:solidFill xmlns:a="http://schemas.openxmlformats.org/drawingml/2006/main">
-            <a:srgbClr val="3D8DFF"/>
+            <a:srgbClr val="E65FA8"/>
           </a:solidFill>
         </p:spPr>
       </p:sp>
@@ -4832,7 +4832,7 @@
           <p:cNvPr id="21" name="role-step-03">
             <a:extLst xmlns:a="http://schemas.openxmlformats.org/drawingml/2006/main">
               <a:ext uri="{FF2B5EF4-FFF2-40B4-BE49-F238E27FC236}">
-                <a16:creationId xmlns:a16="http://schemas.microsoft.com/office/drawing/2014/main" id="{0508E3F3-F193-445F-900D-0DDA0FD21366}"/>
+                <a16:creationId xmlns:a16="http://schemas.microsoft.com/office/drawing/2014/main" id="{B6E72B28-417E-4C3C-8AB9-4FF105B5631D}"/>
               </a:ext>
             </a:extLst>
           </p:cNvPr>
@@ -4877,7 +4877,7 @@
           <p:cNvPr id="22" name="role-title-03">
             <a:extLst xmlns:a="http://schemas.openxmlformats.org/drawingml/2006/main">
               <a:ext uri="{FF2B5EF4-FFF2-40B4-BE49-F238E27FC236}">
-                <a16:creationId xmlns:a16="http://schemas.microsoft.com/office/drawing/2014/main" id="{5A841E32-D226-4CE4-8604-1B57D403F3AC}"/>
+                <a16:creationId xmlns:a16="http://schemas.microsoft.com/office/drawing/2014/main" id="{BE3D86B3-EC89-49C2-A745-3467228C7C81}"/>
               </a:ext>
             </a:extLst>
           </p:cNvPr>
@@ -4904,7 +4904,7 @@
             <a:pPr algn="l">
               <a:defRPr sz="2100" b="1">
                 <a:solidFill>
-                  <a:srgbClr val="111318"/>
+                  <a:srgbClr val="180D20"/>
                 </a:solidFill>
                 <a:latin typeface="Arial"/>
                 <a:ea typeface="Arial"/>
@@ -4922,7 +4922,7 @@
           <p:cNvPr id="23" name="role-desc-03">
             <a:extLst xmlns:a="http://schemas.openxmlformats.org/drawingml/2006/main">
               <a:ext uri="{FF2B5EF4-FFF2-40B4-BE49-F238E27FC236}">
-                <a16:creationId xmlns:a16="http://schemas.microsoft.com/office/drawing/2014/main" id="{7CE090CC-9706-402D-825F-91F1074A768D}"/>
+                <a16:creationId xmlns:a16="http://schemas.microsoft.com/office/drawing/2014/main" id="{0F587F3A-271E-4D03-AF75-D0B5E5FA08F9}"/>
               </a:ext>
             </a:extLst>
           </p:cNvPr>
@@ -4949,7 +4949,7 @@
             <a:pPr algn="l">
               <a:defRPr sz="1350" b="0">
                 <a:solidFill>
-                  <a:srgbClr val="626A78"/>
+                  <a:srgbClr val="70647A"/>
                 </a:solidFill>
                 <a:latin typeface="Arial"/>
                 <a:ea typeface="Arial"/>
@@ -4967,7 +4967,7 @@
           <p:cNvPr id="24" name="role-proof-line-03">
             <a:extLst xmlns:a="http://schemas.openxmlformats.org/drawingml/2006/main">
               <a:ext uri="{FF2B5EF4-FFF2-40B4-BE49-F238E27FC236}">
-                <a16:creationId xmlns:a16="http://schemas.microsoft.com/office/drawing/2014/main" id="{C38D7F2F-C020-422B-AA87-13B5999350EC}"/>
+                <a16:creationId xmlns:a16="http://schemas.microsoft.com/office/drawing/2014/main" id="{C5C91A87-ED3C-4C24-B13B-DBCFA5511325}"/>
               </a:ext>
             </a:extLst>
           </p:cNvPr>
@@ -4985,7 +4985,7 @@
             <a:avLst/>
           </a:prstGeom>
           <a:solidFill xmlns:a="http://schemas.openxmlformats.org/drawingml/2006/main">
-            <a:srgbClr val="D9E0E9"/>
+            <a:srgbClr val="DED4E6"/>
           </a:solidFill>
         </p:spPr>
       </p:sp>
@@ -4994,7 +4994,7 @@
           <p:cNvPr id="25" name="role-proof-03">
             <a:extLst xmlns:a="http://schemas.openxmlformats.org/drawingml/2006/main">
               <a:ext uri="{FF2B5EF4-FFF2-40B4-BE49-F238E27FC236}">
-                <a16:creationId xmlns:a16="http://schemas.microsoft.com/office/drawing/2014/main" id="{4B6EF80E-2375-4665-929C-190D0827DF07}"/>
+                <a16:creationId xmlns:a16="http://schemas.microsoft.com/office/drawing/2014/main" id="{57F5AD64-05D6-4385-A0D5-4957E155DB9E}"/>
               </a:ext>
             </a:extLst>
           </p:cNvPr>
@@ -5021,7 +5021,7 @@
             <a:pPr algn="l">
               <a:defRPr sz="1275" b="1">
                 <a:solidFill>
-                  <a:srgbClr val="1769E0"/>
+                  <a:srgbClr val="6845C6"/>
                 </a:solidFill>
                 <a:latin typeface="Arial"/>
                 <a:ea typeface="Arial"/>
@@ -5039,7 +5039,7 @@
           <p:cNvPr id="26" name="footer-line-2">
             <a:extLst xmlns:a="http://schemas.openxmlformats.org/drawingml/2006/main">
               <a:ext uri="{FF2B5EF4-FFF2-40B4-BE49-F238E27FC236}">
-                <a16:creationId xmlns:a16="http://schemas.microsoft.com/office/drawing/2014/main" id="{F07FD335-B8B6-4C84-9787-FE68E12F5E3C}"/>
+                <a16:creationId xmlns:a16="http://schemas.microsoft.com/office/drawing/2014/main" id="{4CCDDDC0-38D0-42C4-BEA3-CAC4C3BC9077}"/>
               </a:ext>
             </a:extLst>
           </p:cNvPr>
@@ -5057,7 +5057,7 @@
             <a:avLst/>
           </a:prstGeom>
           <a:solidFill xmlns:a="http://schemas.openxmlformats.org/drawingml/2006/main">
-            <a:srgbClr val="D9E0E9"/>
+            <a:srgbClr val="DED4E6"/>
           </a:solidFill>
         </p:spPr>
       </p:sp>
@@ -5066,7 +5066,7 @@
           <p:cNvPr id="27" name="footer-name-2">
             <a:extLst xmlns:a="http://schemas.openxmlformats.org/drawingml/2006/main">
               <a:ext uri="{FF2B5EF4-FFF2-40B4-BE49-F238E27FC236}">
-                <a16:creationId xmlns:a16="http://schemas.microsoft.com/office/drawing/2014/main" id="{2A652A89-5978-414F-A47F-B4E92D22DAB8}"/>
+                <a16:creationId xmlns:a16="http://schemas.microsoft.com/office/drawing/2014/main" id="{75189572-8B16-4FC1-8C0C-7B5DDD6B17B1}"/>
               </a:ext>
             </a:extLst>
           </p:cNvPr>
@@ -5093,7 +5093,7 @@
             <a:pPr algn="l">
               <a:defRPr sz="825" b="1">
                 <a:solidFill>
-                  <a:srgbClr val="626A78"/>
+                  <a:srgbClr val="70647A"/>
                 </a:solidFill>
                 <a:latin typeface="Arial"/>
                 <a:ea typeface="Arial"/>
@@ -5111,7 +5111,7 @@
           <p:cNvPr id="28" name="footer-page-2">
             <a:extLst xmlns:a="http://schemas.openxmlformats.org/drawingml/2006/main">
               <a:ext uri="{FF2B5EF4-FFF2-40B4-BE49-F238E27FC236}">
-                <a16:creationId xmlns:a16="http://schemas.microsoft.com/office/drawing/2014/main" id="{2809B252-49AE-488E-9A5E-BBD3CA7D874C}"/>
+                <a16:creationId xmlns:a16="http://schemas.microsoft.com/office/drawing/2014/main" id="{3DF4DCBB-3822-471A-801A-0B9C7D80F186}"/>
               </a:ext>
             </a:extLst>
           </p:cNvPr>
@@ -5138,7 +5138,7 @@
             <a:pPr algn="r">
               <a:defRPr sz="900" b="1">
                 <a:solidFill>
-                  <a:srgbClr val="626A78"/>
+                  <a:srgbClr val="70647A"/>
                 </a:solidFill>
                 <a:latin typeface="Arial"/>
                 <a:ea typeface="Arial"/>
@@ -5154,7 +5154,7 @@
     </p:spTree>
     <p:extLst>
       <p:ext uri="{BB962C8B-B14F-4D97-AF65-F5344CB8AC3E}">
-        <p14:creationId xmlns:p14="http://schemas.microsoft.com/office/powerpoint/2010/main" val="756810682"/>
+        <p14:creationId xmlns:p14="http://schemas.microsoft.com/office/powerpoint/2010/main" val="1634199713"/>
       </p:ext>
     </p:extLst>
   </p:cSld>
@@ -5175,10 +5175,10 @@
       </p:grpSpPr>
       <p:sp>
         <p:nvSpPr>
-          <p:cNvPr id="1" name="03-proof-canvas">
-            <a:extLst xmlns:a="http://schemas.openxmlformats.org/drawingml/2006/main">
-              <a:ext uri="{FF2B5EF4-FFF2-40B4-BE49-F238E27FC236}">
-                <a16:creationId xmlns:a16="http://schemas.microsoft.com/office/drawing/2014/main" id="{F6834E5E-D3A6-4B2F-BA83-6F82680F58C9}"/>
+          <p:cNvPr id="23" name="03-proof-canvas">
+            <a:extLst xmlns:a="http://schemas.openxmlformats.org/drawingml/2006/main">
+              <a:ext uri="{FF2B5EF4-FFF2-40B4-BE49-F238E27FC236}">
+                <a16:creationId xmlns:a16="http://schemas.microsoft.com/office/drawing/2014/main" id="{BE87A7E3-E62C-4C7A-90A3-3D61C90A3CFE}"/>
               </a:ext>
             </a:extLst>
           </p:cNvPr>
@@ -5205,7 +5205,7 @@
           <p:cNvPr id="2" name="eyebrow-3">
             <a:extLst xmlns:a="http://schemas.openxmlformats.org/drawingml/2006/main">
               <a:ext uri="{FF2B5EF4-FFF2-40B4-BE49-F238E27FC236}">
-                <a16:creationId xmlns:a16="http://schemas.microsoft.com/office/drawing/2014/main" id="{FC293B96-575B-4B0D-8C2C-E798ACD3C5DF}"/>
+                <a16:creationId xmlns:a16="http://schemas.microsoft.com/office/drawing/2014/main" id="{DD7E3909-8788-4F22-B6E6-05AE2C6E8B96}"/>
               </a:ext>
             </a:extLst>
           </p:cNvPr>
@@ -5232,7 +5232,7 @@
             <a:pPr algn="l">
               <a:defRPr sz="1050" b="1">
                 <a:solidFill>
-                  <a:srgbClr val="1769E0"/>
+                  <a:srgbClr val="6845C6"/>
                 </a:solidFill>
                 <a:latin typeface="Arial"/>
                 <a:ea typeface="Arial"/>
@@ -5250,7 +5250,7 @@
           <p:cNvPr id="3" name="title-3">
             <a:extLst xmlns:a="http://schemas.openxmlformats.org/drawingml/2006/main">
               <a:ext uri="{FF2B5EF4-FFF2-40B4-BE49-F238E27FC236}">
-                <a16:creationId xmlns:a16="http://schemas.microsoft.com/office/drawing/2014/main" id="{BA8A7808-08DC-4E06-8AA0-3DABB83761CD}"/>
+                <a16:creationId xmlns:a16="http://schemas.microsoft.com/office/drawing/2014/main" id="{AA36BC9A-BF54-4CAD-9BC3-B206FB4EF975}"/>
               </a:ext>
             </a:extLst>
           </p:cNvPr>
@@ -5277,7 +5277,7 @@
             <a:pPr algn="l">
               <a:defRPr sz="3225" b="1">
                 <a:solidFill>
-                  <a:srgbClr val="111318"/>
+                  <a:srgbClr val="180D20"/>
                 </a:solidFill>
                 <a:latin typeface="Arial"/>
                 <a:ea typeface="Arial"/>
@@ -5295,7 +5295,7 @@
           <p:cNvPr id="4" name="subtitle-3">
             <a:extLst xmlns:a="http://schemas.openxmlformats.org/drawingml/2006/main">
               <a:ext uri="{FF2B5EF4-FFF2-40B4-BE49-F238E27FC236}">
-                <a16:creationId xmlns:a16="http://schemas.microsoft.com/office/drawing/2014/main" id="{61C77AA1-1F22-48BB-B20E-A3E9883FDE32}"/>
+                <a16:creationId xmlns:a16="http://schemas.microsoft.com/office/drawing/2014/main" id="{A7126580-7E95-44AF-970E-87C5C187C5C4}"/>
               </a:ext>
             </a:extLst>
           </p:cNvPr>
@@ -5322,7 +5322,7 @@
             <a:pPr algn="l">
               <a:defRPr sz="1425" b="0">
                 <a:solidFill>
-                  <a:srgbClr val="626A78"/>
+                  <a:srgbClr val="70647A"/>
                 </a:solidFill>
                 <a:latin typeface="Arial"/>
                 <a:ea typeface="Arial"/>
@@ -5340,7 +5340,7 @@
           <p:cNvPr id="5" name="metric-card-40%">
             <a:extLst xmlns:a="http://schemas.openxmlformats.org/drawingml/2006/main">
               <a:ext uri="{FF2B5EF4-FFF2-40B4-BE49-F238E27FC236}">
-                <a16:creationId xmlns:a16="http://schemas.microsoft.com/office/drawing/2014/main" id="{B938189A-1BE9-4018-B14F-ED08C0349FC5}"/>
+                <a16:creationId xmlns:a16="http://schemas.microsoft.com/office/drawing/2014/main" id="{3412164B-360E-4C9E-B5B4-1FF7776926C4}"/>
               </a:ext>
             </a:extLst>
           </p:cNvPr>
@@ -5360,7 +5360,7 @@
             </a:avLst>
           </a:prstGeom>
           <a:solidFill xmlns:a="http://schemas.openxmlformats.org/drawingml/2006/main">
-            <a:srgbClr val="F3F6FA"/>
+            <a:srgbClr val="FBF7EF"/>
           </a:solidFill>
         </p:spPr>
       </p:sp>
@@ -5369,7 +5369,7 @@
           <p:cNvPr id="6" name="metric-accent-40%">
             <a:extLst xmlns:a="http://schemas.openxmlformats.org/drawingml/2006/main">
               <a:ext uri="{FF2B5EF4-FFF2-40B4-BE49-F238E27FC236}">
-                <a16:creationId xmlns:a16="http://schemas.microsoft.com/office/drawing/2014/main" id="{81903176-3B44-4949-A635-FE658B04ED07}"/>
+                <a16:creationId xmlns:a16="http://schemas.microsoft.com/office/drawing/2014/main" id="{C0FB40D1-A8F5-4657-A590-8E9FB3245595}"/>
               </a:ext>
             </a:extLst>
           </p:cNvPr>
@@ -5389,7 +5389,7 @@
             </a:avLst>
           </a:prstGeom>
           <a:solidFill xmlns:a="http://schemas.openxmlformats.org/drawingml/2006/main">
-            <a:srgbClr val="3D8DFF"/>
+            <a:srgbClr val="E0B44F"/>
           </a:solidFill>
         </p:spPr>
       </p:sp>
@@ -5398,7 +5398,7 @@
           <p:cNvPr id="7" name="metric-value-40%">
             <a:extLst xmlns:a="http://schemas.openxmlformats.org/drawingml/2006/main">
               <a:ext uri="{FF2B5EF4-FFF2-40B4-BE49-F238E27FC236}">
-                <a16:creationId xmlns:a16="http://schemas.microsoft.com/office/drawing/2014/main" id="{066388BD-BCAA-450F-B601-0518C22DC65F}"/>
+                <a16:creationId xmlns:a16="http://schemas.microsoft.com/office/drawing/2014/main" id="{AE36D262-1B0C-4C87-9A6A-50988B5244E6}"/>
               </a:ext>
             </a:extLst>
           </p:cNvPr>
@@ -5425,7 +5425,7 @@
             <a:pPr algn="l">
               <a:defRPr sz="5100" b="1">
                 <a:solidFill>
-                  <a:srgbClr val="111318"/>
+                  <a:srgbClr val="180D20"/>
                 </a:solidFill>
                 <a:latin typeface="Arial"/>
                 <a:ea typeface="Arial"/>
@@ -5443,7 +5443,7 @@
           <p:cNvPr id="8" name="metric-label-40%">
             <a:extLst xmlns:a="http://schemas.openxmlformats.org/drawingml/2006/main">
               <a:ext uri="{FF2B5EF4-FFF2-40B4-BE49-F238E27FC236}">
-                <a16:creationId xmlns:a16="http://schemas.microsoft.com/office/drawing/2014/main" id="{E4E12559-2432-4854-872C-DF50E7367871}"/>
+                <a16:creationId xmlns:a16="http://schemas.microsoft.com/office/drawing/2014/main" id="{B553037E-9DE7-4F42-B042-5121B567A70C}"/>
               </a:ext>
             </a:extLst>
           </p:cNvPr>
@@ -5470,7 +5470,7 @@
             <a:pPr algn="l">
               <a:defRPr sz="1800" b="1">
                 <a:solidFill>
-                  <a:srgbClr val="111318"/>
+                  <a:srgbClr val="180D20"/>
                 </a:solidFill>
                 <a:latin typeface="Arial"/>
                 <a:ea typeface="Arial"/>
@@ -5488,7 +5488,7 @@
           <p:cNvPr id="9" name="metric-detail-40%">
             <a:extLst xmlns:a="http://schemas.openxmlformats.org/drawingml/2006/main">
               <a:ext uri="{FF2B5EF4-FFF2-40B4-BE49-F238E27FC236}">
-                <a16:creationId xmlns:a16="http://schemas.microsoft.com/office/drawing/2014/main" id="{87F22E4F-8994-4E09-89F1-8C598CF6B48C}"/>
+                <a16:creationId xmlns:a16="http://schemas.microsoft.com/office/drawing/2014/main" id="{F579D585-B4B0-4702-8840-A2714CCEB252}"/>
               </a:ext>
             </a:extLst>
           </p:cNvPr>
@@ -5515,7 +5515,7 @@
             <a:pPr algn="l">
               <a:defRPr sz="1275" b="0">
                 <a:solidFill>
-                  <a:srgbClr val="626A78"/>
+                  <a:srgbClr val="70647A"/>
                 </a:solidFill>
                 <a:latin typeface="Arial"/>
                 <a:ea typeface="Arial"/>
@@ -5533,7 +5533,7 @@
           <p:cNvPr id="10" name="metric-card-92%">
             <a:extLst xmlns:a="http://schemas.openxmlformats.org/drawingml/2006/main">
               <a:ext uri="{FF2B5EF4-FFF2-40B4-BE49-F238E27FC236}">
-                <a16:creationId xmlns:a16="http://schemas.microsoft.com/office/drawing/2014/main" id="{B16E0D76-DFCD-4AE2-A425-15F82934CFCC}"/>
+                <a16:creationId xmlns:a16="http://schemas.microsoft.com/office/drawing/2014/main" id="{A4DF6434-7580-4E28-866F-99CAC2C436C8}"/>
               </a:ext>
             </a:extLst>
           </p:cNvPr>
@@ -5553,7 +5553,7 @@
             </a:avLst>
           </a:prstGeom>
           <a:solidFill xmlns:a="http://schemas.openxmlformats.org/drawingml/2006/main">
-            <a:srgbClr val="F3F6FA"/>
+            <a:srgbClr val="FBF7EF"/>
           </a:solidFill>
         </p:spPr>
       </p:sp>
@@ -5562,7 +5562,7 @@
           <p:cNvPr id="11" name="metric-accent-92%">
             <a:extLst xmlns:a="http://schemas.openxmlformats.org/drawingml/2006/main">
               <a:ext uri="{FF2B5EF4-FFF2-40B4-BE49-F238E27FC236}">
-                <a16:creationId xmlns:a16="http://schemas.microsoft.com/office/drawing/2014/main" id="{BA0914A2-D0CF-4FE1-85F2-DBDB9431FC7A}"/>
+                <a16:creationId xmlns:a16="http://schemas.microsoft.com/office/drawing/2014/main" id="{68D5C66D-D29F-4231-A1F0-61FAD6F9BEC3}"/>
               </a:ext>
             </a:extLst>
           </p:cNvPr>
@@ -5582,7 +5582,7 @@
             </a:avLst>
           </a:prstGeom>
           <a:solidFill xmlns:a="http://schemas.openxmlformats.org/drawingml/2006/main">
-            <a:srgbClr val="6DCBF4"/>
+            <a:srgbClr val="A78BFA"/>
           </a:solidFill>
         </p:spPr>
       </p:sp>
@@ -5591,7 +5591,7 @@
           <p:cNvPr id="12" name="metric-value-92%">
             <a:extLst xmlns:a="http://schemas.openxmlformats.org/drawingml/2006/main">
               <a:ext uri="{FF2B5EF4-FFF2-40B4-BE49-F238E27FC236}">
-                <a16:creationId xmlns:a16="http://schemas.microsoft.com/office/drawing/2014/main" id="{7480921B-2585-40F0-8207-170090141574}"/>
+                <a16:creationId xmlns:a16="http://schemas.microsoft.com/office/drawing/2014/main" id="{3DC3C3EA-9DAF-4D6A-A9D9-F28C21B5FDE0}"/>
               </a:ext>
             </a:extLst>
           </p:cNvPr>
@@ -5618,7 +5618,7 @@
             <a:pPr algn="l">
               <a:defRPr sz="5100" b="1">
                 <a:solidFill>
-                  <a:srgbClr val="111318"/>
+                  <a:srgbClr val="180D20"/>
                 </a:solidFill>
                 <a:latin typeface="Arial"/>
                 <a:ea typeface="Arial"/>
@@ -5636,7 +5636,7 @@
           <p:cNvPr id="13" name="metric-label-92%">
             <a:extLst xmlns:a="http://schemas.openxmlformats.org/drawingml/2006/main">
               <a:ext uri="{FF2B5EF4-FFF2-40B4-BE49-F238E27FC236}">
-                <a16:creationId xmlns:a16="http://schemas.microsoft.com/office/drawing/2014/main" id="{0C4D535A-C238-4713-88C8-07AC98EEB695}"/>
+                <a16:creationId xmlns:a16="http://schemas.microsoft.com/office/drawing/2014/main" id="{B703B55A-95F9-4464-9111-EC5DCCF21986}"/>
               </a:ext>
             </a:extLst>
           </p:cNvPr>
@@ -5663,7 +5663,7 @@
             <a:pPr algn="l">
               <a:defRPr sz="1800" b="1">
                 <a:solidFill>
-                  <a:srgbClr val="111318"/>
+                  <a:srgbClr val="180D20"/>
                 </a:solidFill>
                 <a:latin typeface="Arial"/>
                 <a:ea typeface="Arial"/>
@@ -5681,7 +5681,7 @@
           <p:cNvPr id="14" name="metric-detail-92%">
             <a:extLst xmlns:a="http://schemas.openxmlformats.org/drawingml/2006/main">
               <a:ext uri="{FF2B5EF4-FFF2-40B4-BE49-F238E27FC236}">
-                <a16:creationId xmlns:a16="http://schemas.microsoft.com/office/drawing/2014/main" id="{F06FA15F-47BA-49E0-AB35-62FAD1012321}"/>
+                <a16:creationId xmlns:a16="http://schemas.microsoft.com/office/drawing/2014/main" id="{3B1DFEB5-BEAE-4639-8426-A91D71D138BD}"/>
               </a:ext>
             </a:extLst>
           </p:cNvPr>
@@ -5708,7 +5708,7 @@
             <a:pPr algn="l">
               <a:defRPr sz="1275" b="0">
                 <a:solidFill>
-                  <a:srgbClr val="626A78"/>
+                  <a:srgbClr val="70647A"/>
                 </a:solidFill>
                 <a:latin typeface="Arial"/>
                 <a:ea typeface="Arial"/>
@@ -5726,7 +5726,7 @@
           <p:cNvPr id="15" name="metric-card-89%">
             <a:extLst xmlns:a="http://schemas.openxmlformats.org/drawingml/2006/main">
               <a:ext uri="{FF2B5EF4-FFF2-40B4-BE49-F238E27FC236}">
-                <a16:creationId xmlns:a16="http://schemas.microsoft.com/office/drawing/2014/main" id="{4C59DB9B-EB54-4422-BDB2-5D3F3A15C009}"/>
+                <a16:creationId xmlns:a16="http://schemas.microsoft.com/office/drawing/2014/main" id="{F341EE52-5EED-4928-9897-7FBAE21E28C0}"/>
               </a:ext>
             </a:extLst>
           </p:cNvPr>
@@ -5746,7 +5746,7 @@
             </a:avLst>
           </a:prstGeom>
           <a:solidFill xmlns:a="http://schemas.openxmlformats.org/drawingml/2006/main">
-            <a:srgbClr val="F3F6FA"/>
+            <a:srgbClr val="FBF7EF"/>
           </a:solidFill>
         </p:spPr>
       </p:sp>
@@ -5755,7 +5755,7 @@
           <p:cNvPr id="16" name="metric-accent-89%">
             <a:extLst xmlns:a="http://schemas.openxmlformats.org/drawingml/2006/main">
               <a:ext uri="{FF2B5EF4-FFF2-40B4-BE49-F238E27FC236}">
-                <a16:creationId xmlns:a16="http://schemas.microsoft.com/office/drawing/2014/main" id="{FEB7A62F-DA7E-474B-AEF0-0C7D37089399}"/>
+                <a16:creationId xmlns:a16="http://schemas.microsoft.com/office/drawing/2014/main" id="{4464C0EF-4179-4064-AE5E-A0D2D43F0EB7}"/>
               </a:ext>
             </a:extLst>
           </p:cNvPr>
@@ -5775,7 +5775,7 @@
             </a:avLst>
           </a:prstGeom>
           <a:solidFill xmlns:a="http://schemas.openxmlformats.org/drawingml/2006/main">
-            <a:srgbClr val="12A36D"/>
+            <a:srgbClr val="E65FA8"/>
           </a:solidFill>
         </p:spPr>
       </p:sp>
@@ -5784,7 +5784,7 @@
           <p:cNvPr id="17" name="metric-value-89%">
             <a:extLst xmlns:a="http://schemas.openxmlformats.org/drawingml/2006/main">
               <a:ext uri="{FF2B5EF4-FFF2-40B4-BE49-F238E27FC236}">
-                <a16:creationId xmlns:a16="http://schemas.microsoft.com/office/drawing/2014/main" id="{DBA1AB0B-264A-4D66-A61B-38005A69D516}"/>
+                <a16:creationId xmlns:a16="http://schemas.microsoft.com/office/drawing/2014/main" id="{18446EA5-10DF-4FBA-9B08-2F96EBC1FB1D}"/>
               </a:ext>
             </a:extLst>
           </p:cNvPr>
@@ -5811,7 +5811,7 @@
             <a:pPr algn="l">
               <a:defRPr sz="5100" b="1">
                 <a:solidFill>
-                  <a:srgbClr val="111318"/>
+                  <a:srgbClr val="180D20"/>
                 </a:solidFill>
                 <a:latin typeface="Arial"/>
                 <a:ea typeface="Arial"/>
@@ -5829,7 +5829,7 @@
           <p:cNvPr id="18" name="metric-label-89%">
             <a:extLst xmlns:a="http://schemas.openxmlformats.org/drawingml/2006/main">
               <a:ext uri="{FF2B5EF4-FFF2-40B4-BE49-F238E27FC236}">
-                <a16:creationId xmlns:a16="http://schemas.microsoft.com/office/drawing/2014/main" id="{ABD489DE-652F-4D76-B9CA-ED003B0639DC}"/>
+                <a16:creationId xmlns:a16="http://schemas.microsoft.com/office/drawing/2014/main" id="{2ECBD27B-DC9D-40FC-8ED6-6FF78995AD19}"/>
               </a:ext>
             </a:extLst>
           </p:cNvPr>
@@ -5856,7 +5856,7 @@
             <a:pPr algn="l">
               <a:defRPr sz="1800" b="1">
                 <a:solidFill>
-                  <a:srgbClr val="111318"/>
+                  <a:srgbClr val="180D20"/>
                 </a:solidFill>
                 <a:latin typeface="Arial"/>
                 <a:ea typeface="Arial"/>
@@ -5874,7 +5874,7 @@
           <p:cNvPr id="19" name="metric-detail-89%">
             <a:extLst xmlns:a="http://schemas.openxmlformats.org/drawingml/2006/main">
               <a:ext uri="{FF2B5EF4-FFF2-40B4-BE49-F238E27FC236}">
-                <a16:creationId xmlns:a16="http://schemas.microsoft.com/office/drawing/2014/main" id="{01B4DE4C-A3E9-47F2-9F49-E42B26711CE3}"/>
+                <a16:creationId xmlns:a16="http://schemas.microsoft.com/office/drawing/2014/main" id="{DD2548A7-5817-418D-8014-CAAADF9FF589}"/>
               </a:ext>
             </a:extLst>
           </p:cNvPr>
@@ -5901,7 +5901,7 @@
             <a:pPr algn="l">
               <a:defRPr sz="1275" b="0">
                 <a:solidFill>
-                  <a:srgbClr val="626A78"/>
+                  <a:srgbClr val="70647A"/>
                 </a:solidFill>
                 <a:latin typeface="Arial"/>
                 <a:ea typeface="Arial"/>
@@ -5919,7 +5919,7 @@
           <p:cNvPr id="20" name="footer-line-3">
             <a:extLst xmlns:a="http://schemas.openxmlformats.org/drawingml/2006/main">
               <a:ext uri="{FF2B5EF4-FFF2-40B4-BE49-F238E27FC236}">
-                <a16:creationId xmlns:a16="http://schemas.microsoft.com/office/drawing/2014/main" id="{B0FBCAEB-0C15-4D37-977D-64A1315D8758}"/>
+                <a16:creationId xmlns:a16="http://schemas.microsoft.com/office/drawing/2014/main" id="{A9BFA24B-7769-443D-816C-3056D7DEDDAD}"/>
               </a:ext>
             </a:extLst>
           </p:cNvPr>
@@ -5937,7 +5937,7 @@
             <a:avLst/>
           </a:prstGeom>
           <a:solidFill xmlns:a="http://schemas.openxmlformats.org/drawingml/2006/main">
-            <a:srgbClr val="D9E0E9"/>
+            <a:srgbClr val="DED4E6"/>
           </a:solidFill>
         </p:spPr>
       </p:sp>
@@ -5946,7 +5946,7 @@
           <p:cNvPr id="21" name="footer-name-3">
             <a:extLst xmlns:a="http://schemas.openxmlformats.org/drawingml/2006/main">
               <a:ext uri="{FF2B5EF4-FFF2-40B4-BE49-F238E27FC236}">
-                <a16:creationId xmlns:a16="http://schemas.microsoft.com/office/drawing/2014/main" id="{AED2C076-39AF-4BE2-BF43-906ABD8CC513}"/>
+                <a16:creationId xmlns:a16="http://schemas.microsoft.com/office/drawing/2014/main" id="{2E52BDA6-BDA4-4B3F-B3A0-1D9A54233928}"/>
               </a:ext>
             </a:extLst>
           </p:cNvPr>
@@ -5973,7 +5973,7 @@
             <a:pPr algn="l">
               <a:defRPr sz="825" b="1">
                 <a:solidFill>
-                  <a:srgbClr val="626A78"/>
+                  <a:srgbClr val="70647A"/>
                 </a:solidFill>
                 <a:latin typeface="Arial"/>
                 <a:ea typeface="Arial"/>
@@ -5991,7 +5991,7 @@
           <p:cNvPr id="22" name="footer-page-3">
             <a:extLst xmlns:a="http://schemas.openxmlformats.org/drawingml/2006/main">
               <a:ext uri="{FF2B5EF4-FFF2-40B4-BE49-F238E27FC236}">
-                <a16:creationId xmlns:a16="http://schemas.microsoft.com/office/drawing/2014/main" id="{BD0AE470-6408-4C0F-9783-7D2DF000FE81}"/>
+                <a16:creationId xmlns:a16="http://schemas.microsoft.com/office/drawing/2014/main" id="{99DD64F3-7C11-4E4F-9911-EF95699E3DCE}"/>
               </a:ext>
             </a:extLst>
           </p:cNvPr>
@@ -6018,7 +6018,7 @@
             <a:pPr algn="r">
               <a:defRPr sz="900" b="1">
                 <a:solidFill>
-                  <a:srgbClr val="626A78"/>
+                  <a:srgbClr val="70647A"/>
                 </a:solidFill>
                 <a:latin typeface="Arial"/>
                 <a:ea typeface="Arial"/>
@@ -6034,7 +6034,7 @@
     </p:spTree>
     <p:extLst>
       <p:ext uri="{BB962C8B-B14F-4D97-AF65-F5344CB8AC3E}">
-        <p14:creationId xmlns:p14="http://schemas.microsoft.com/office/powerpoint/2010/main" val="693692485"/>
+        <p14:creationId xmlns:p14="http://schemas.microsoft.com/office/powerpoint/2010/main" val="762832475"/>
       </p:ext>
     </p:extLst>
   </p:cSld>
@@ -6055,10 +6055,10 @@
       </p:grpSpPr>
       <p:sp>
         <p:nvSpPr>
-          <p:cNvPr id="1" name="04-experience-canvas">
-            <a:extLst xmlns:a="http://schemas.openxmlformats.org/drawingml/2006/main">
-              <a:ext uri="{FF2B5EF4-FFF2-40B4-BE49-F238E27FC236}">
-                <a16:creationId xmlns:a16="http://schemas.microsoft.com/office/drawing/2014/main" id="{E796E8DD-B9F7-4642-8D5E-BBA34397B14F}"/>
+          <p:cNvPr id="32" name="04-experience-canvas">
+            <a:extLst xmlns:a="http://schemas.openxmlformats.org/drawingml/2006/main">
+              <a:ext uri="{FF2B5EF4-FFF2-40B4-BE49-F238E27FC236}">
+                <a16:creationId xmlns:a16="http://schemas.microsoft.com/office/drawing/2014/main" id="{232FEB19-3239-4055-90BF-41D14502ED8D}"/>
               </a:ext>
             </a:extLst>
           </p:cNvPr>
@@ -6085,7 +6085,7 @@
           <p:cNvPr id="2" name="eyebrow-4">
             <a:extLst xmlns:a="http://schemas.openxmlformats.org/drawingml/2006/main">
               <a:ext uri="{FF2B5EF4-FFF2-40B4-BE49-F238E27FC236}">
-                <a16:creationId xmlns:a16="http://schemas.microsoft.com/office/drawing/2014/main" id="{F7DAA213-39BA-47A1-95D7-C9CFD21096F1}"/>
+                <a16:creationId xmlns:a16="http://schemas.microsoft.com/office/drawing/2014/main" id="{4C1993B5-261E-4037-83E7-1E561225AC43}"/>
               </a:ext>
             </a:extLst>
           </p:cNvPr>
@@ -6112,7 +6112,7 @@
             <a:pPr algn="l">
               <a:defRPr sz="1050" b="1">
                 <a:solidFill>
-                  <a:srgbClr val="1769E0"/>
+                  <a:srgbClr val="6845C6"/>
                 </a:solidFill>
                 <a:latin typeface="Arial"/>
                 <a:ea typeface="Arial"/>
@@ -6130,7 +6130,7 @@
           <p:cNvPr id="3" name="title-4">
             <a:extLst xmlns:a="http://schemas.openxmlformats.org/drawingml/2006/main">
               <a:ext uri="{FF2B5EF4-FFF2-40B4-BE49-F238E27FC236}">
-                <a16:creationId xmlns:a16="http://schemas.microsoft.com/office/drawing/2014/main" id="{437C9F15-4F32-40C1-B410-7B54041DB95A}"/>
+                <a16:creationId xmlns:a16="http://schemas.microsoft.com/office/drawing/2014/main" id="{A3320AD2-4E21-4A5A-B22C-F74D033FF966}"/>
               </a:ext>
             </a:extLst>
           </p:cNvPr>
@@ -6157,7 +6157,7 @@
             <a:pPr algn="l">
               <a:defRPr sz="3225" b="1">
                 <a:solidFill>
-                  <a:srgbClr val="111318"/>
+                  <a:srgbClr val="180D20"/>
                 </a:solidFill>
                 <a:latin typeface="Arial"/>
                 <a:ea typeface="Arial"/>
@@ -6175,7 +6175,7 @@
           <p:cNvPr id="4" name="timeline-line">
             <a:extLst xmlns:a="http://schemas.openxmlformats.org/drawingml/2006/main">
               <a:ext uri="{FF2B5EF4-FFF2-40B4-BE49-F238E27FC236}">
-                <a16:creationId xmlns:a16="http://schemas.microsoft.com/office/drawing/2014/main" id="{041F4304-9C49-4A62-AAA3-4B624B7F0A57}"/>
+                <a16:creationId xmlns:a16="http://schemas.microsoft.com/office/drawing/2014/main" id="{94BCBC37-03BD-4D80-9B44-C414104201AC}"/>
               </a:ext>
             </a:extLst>
           </p:cNvPr>
@@ -6193,7 +6193,7 @@
             <a:avLst/>
           </a:prstGeom>
           <a:solidFill xmlns:a="http://schemas.openxmlformats.org/drawingml/2006/main">
-            <a:srgbClr val="D9E0E9"/>
+            <a:srgbClr val="DED4E6"/>
           </a:solidFill>
         </p:spPr>
       </p:sp>
@@ -6202,7 +6202,7 @@
           <p:cNvPr id="5" name="timeline-dot-0">
             <a:extLst xmlns:a="http://schemas.openxmlformats.org/drawingml/2006/main">
               <a:ext uri="{FF2B5EF4-FFF2-40B4-BE49-F238E27FC236}">
-                <a16:creationId xmlns:a16="http://schemas.microsoft.com/office/drawing/2014/main" id="{D837D2AF-06FF-4669-9808-340443CB0ABD}"/>
+                <a16:creationId xmlns:a16="http://schemas.microsoft.com/office/drawing/2014/main" id="{C39A6FFF-3B85-4803-A74D-70E25AD3CC66}"/>
               </a:ext>
             </a:extLst>
           </p:cNvPr>
@@ -6222,7 +6222,7 @@
             </a:avLst>
           </a:prstGeom>
           <a:solidFill xmlns:a="http://schemas.openxmlformats.org/drawingml/2006/main">
-            <a:srgbClr val="EAF3FF"/>
+            <a:srgbClr val="F1EBFF"/>
           </a:solidFill>
         </p:spPr>
       </p:sp>
@@ -6231,7 +6231,7 @@
           <p:cNvPr id="6" name="timeline-dot-core-0">
             <a:extLst xmlns:a="http://schemas.openxmlformats.org/drawingml/2006/main">
               <a:ext uri="{FF2B5EF4-FFF2-40B4-BE49-F238E27FC236}">
-                <a16:creationId xmlns:a16="http://schemas.microsoft.com/office/drawing/2014/main" id="{64FB88D0-4445-4432-AD4B-3C6E0C563B2A}"/>
+                <a16:creationId xmlns:a16="http://schemas.microsoft.com/office/drawing/2014/main" id="{DF4A4292-BF80-44D9-B2A2-C0E193DF4B7D}"/>
               </a:ext>
             </a:extLst>
           </p:cNvPr>
@@ -6251,7 +6251,7 @@
             </a:avLst>
           </a:prstGeom>
           <a:solidFill xmlns:a="http://schemas.openxmlformats.org/drawingml/2006/main">
-            <a:srgbClr val="3D8DFF"/>
+            <a:srgbClr val="E0B44F"/>
           </a:solidFill>
         </p:spPr>
       </p:sp>
@@ -6260,7 +6260,7 @@
           <p:cNvPr id="7" name="timeline-period-0">
             <a:extLst xmlns:a="http://schemas.openxmlformats.org/drawingml/2006/main">
               <a:ext uri="{FF2B5EF4-FFF2-40B4-BE49-F238E27FC236}">
-                <a16:creationId xmlns:a16="http://schemas.microsoft.com/office/drawing/2014/main" id="{2DE46EDF-5BE9-4471-B532-A8E11DFB1045}"/>
+                <a16:creationId xmlns:a16="http://schemas.microsoft.com/office/drawing/2014/main" id="{9C59F436-B611-447E-969E-FAA98490CA32}"/>
               </a:ext>
             </a:extLst>
           </p:cNvPr>
@@ -6287,7 +6287,7 @@
             <a:pPr algn="l">
               <a:defRPr sz="1350" b="1">
                 <a:solidFill>
-                  <a:srgbClr val="1769E0"/>
+                  <a:srgbClr val="6845C6"/>
                 </a:solidFill>
                 <a:latin typeface="Arial"/>
                 <a:ea typeface="Arial"/>
@@ -6305,7 +6305,7 @@
           <p:cNvPr id="8" name="timeline-org-0">
             <a:extLst xmlns:a="http://schemas.openxmlformats.org/drawingml/2006/main">
               <a:ext uri="{FF2B5EF4-FFF2-40B4-BE49-F238E27FC236}">
-                <a16:creationId xmlns:a16="http://schemas.microsoft.com/office/drawing/2014/main" id="{DD59C452-EF21-4AD7-BC17-63BEAEC111AD}"/>
+                <a16:creationId xmlns:a16="http://schemas.microsoft.com/office/drawing/2014/main" id="{6873E7E1-6571-4F7B-9F47-F410EB19190A}"/>
               </a:ext>
             </a:extLst>
           </p:cNvPr>
@@ -6332,7 +6332,7 @@
             <a:pPr algn="l">
               <a:defRPr sz="1800" b="1">
                 <a:solidFill>
-                  <a:srgbClr val="111318"/>
+                  <a:srgbClr val="180D20"/>
                 </a:solidFill>
                 <a:latin typeface="Arial"/>
                 <a:ea typeface="Arial"/>
@@ -6350,7 +6350,7 @@
           <p:cNvPr id="9" name="timeline-role-0">
             <a:extLst xmlns:a="http://schemas.openxmlformats.org/drawingml/2006/main">
               <a:ext uri="{FF2B5EF4-FFF2-40B4-BE49-F238E27FC236}">
-                <a16:creationId xmlns:a16="http://schemas.microsoft.com/office/drawing/2014/main" id="{145B6D69-F9CA-4C50-A67F-1FD6A979A876}"/>
+                <a16:creationId xmlns:a16="http://schemas.microsoft.com/office/drawing/2014/main" id="{591854D6-A535-4370-BEDB-2542800944F4}"/>
               </a:ext>
             </a:extLst>
           </p:cNvPr>
@@ -6377,7 +6377,7 @@
             <a:pPr algn="l">
               <a:defRPr sz="1200" b="0">
                 <a:solidFill>
-                  <a:srgbClr val="626A78"/>
+                  <a:srgbClr val="70647A"/>
                 </a:solidFill>
                 <a:latin typeface="Arial"/>
                 <a:ea typeface="Arial"/>
@@ -6395,7 +6395,7 @@
           <p:cNvPr id="10" name="timeline-result-0">
             <a:extLst xmlns:a="http://schemas.openxmlformats.org/drawingml/2006/main">
               <a:ext uri="{FF2B5EF4-FFF2-40B4-BE49-F238E27FC236}">
-                <a16:creationId xmlns:a16="http://schemas.microsoft.com/office/drawing/2014/main" id="{98BC2C73-33F9-46EA-9900-03F71BCB4DE0}"/>
+                <a16:creationId xmlns:a16="http://schemas.microsoft.com/office/drawing/2014/main" id="{46F00BE0-25C3-484F-82BE-34379E75CCA4}"/>
               </a:ext>
             </a:extLst>
           </p:cNvPr>
@@ -6422,7 +6422,7 @@
             <a:pPr algn="l">
               <a:defRPr sz="1200" b="1">
                 <a:solidFill>
-                  <a:srgbClr val="111318"/>
+                  <a:srgbClr val="180D20"/>
                 </a:solidFill>
                 <a:latin typeface="Arial"/>
                 <a:ea typeface="Arial"/>
@@ -6440,7 +6440,7 @@
           <p:cNvPr id="11" name="timeline-dot-1">
             <a:extLst xmlns:a="http://schemas.openxmlformats.org/drawingml/2006/main">
               <a:ext uri="{FF2B5EF4-FFF2-40B4-BE49-F238E27FC236}">
-                <a16:creationId xmlns:a16="http://schemas.microsoft.com/office/drawing/2014/main" id="{93C8FE9F-37FC-4D94-ACC4-57F06C33FCE4}"/>
+                <a16:creationId xmlns:a16="http://schemas.microsoft.com/office/drawing/2014/main" id="{06F2765D-90A2-4DD8-A49A-89FFC62504DE}"/>
               </a:ext>
             </a:extLst>
           </p:cNvPr>
@@ -6460,7 +6460,7 @@
             </a:avLst>
           </a:prstGeom>
           <a:solidFill xmlns:a="http://schemas.openxmlformats.org/drawingml/2006/main">
-            <a:srgbClr val="EAF3FF"/>
+            <a:srgbClr val="F1EBFF"/>
           </a:solidFill>
         </p:spPr>
       </p:sp>
@@ -6469,7 +6469,7 @@
           <p:cNvPr id="12" name="timeline-dot-core-1">
             <a:extLst xmlns:a="http://schemas.openxmlformats.org/drawingml/2006/main">
               <a:ext uri="{FF2B5EF4-FFF2-40B4-BE49-F238E27FC236}">
-                <a16:creationId xmlns:a16="http://schemas.microsoft.com/office/drawing/2014/main" id="{066BCE51-0677-41D1-88F9-7400B2A56B8A}"/>
+                <a16:creationId xmlns:a16="http://schemas.microsoft.com/office/drawing/2014/main" id="{BB0648B0-F890-4CF1-8D43-B05A186BB0E4}"/>
               </a:ext>
             </a:extLst>
           </p:cNvPr>
@@ -6489,7 +6489,7 @@
             </a:avLst>
           </a:prstGeom>
           <a:solidFill xmlns:a="http://schemas.openxmlformats.org/drawingml/2006/main">
-            <a:srgbClr val="3D8DFF"/>
+            <a:srgbClr val="E0B44F"/>
           </a:solidFill>
         </p:spPr>
       </p:sp>
@@ -6498,7 +6498,7 @@
           <p:cNvPr id="13" name="timeline-period-1">
             <a:extLst xmlns:a="http://schemas.openxmlformats.org/drawingml/2006/main">
               <a:ext uri="{FF2B5EF4-FFF2-40B4-BE49-F238E27FC236}">
-                <a16:creationId xmlns:a16="http://schemas.microsoft.com/office/drawing/2014/main" id="{EBDD1655-275C-4FE2-BCF5-108A5102B262}"/>
+                <a16:creationId xmlns:a16="http://schemas.microsoft.com/office/drawing/2014/main" id="{95D531E7-7696-43C0-A80C-6A8040DC6ADA}"/>
               </a:ext>
             </a:extLst>
           </p:cNvPr>
@@ -6525,7 +6525,7 @@
             <a:pPr algn="l">
               <a:defRPr sz="1350" b="1">
                 <a:solidFill>
-                  <a:srgbClr val="1769E0"/>
+                  <a:srgbClr val="6845C6"/>
                 </a:solidFill>
                 <a:latin typeface="Arial"/>
                 <a:ea typeface="Arial"/>
@@ -6543,7 +6543,7 @@
           <p:cNvPr id="14" name="timeline-org-1">
             <a:extLst xmlns:a="http://schemas.openxmlformats.org/drawingml/2006/main">
               <a:ext uri="{FF2B5EF4-FFF2-40B4-BE49-F238E27FC236}">
-                <a16:creationId xmlns:a16="http://schemas.microsoft.com/office/drawing/2014/main" id="{419BA8C8-F56D-44EF-A27F-475846FE21F1}"/>
+                <a16:creationId xmlns:a16="http://schemas.microsoft.com/office/drawing/2014/main" id="{87E41F04-EE91-49ED-BA45-4A5BB324AD77}"/>
               </a:ext>
             </a:extLst>
           </p:cNvPr>
@@ -6570,7 +6570,7 @@
             <a:pPr algn="l">
               <a:defRPr sz="1800" b="1">
                 <a:solidFill>
-                  <a:srgbClr val="111318"/>
+                  <a:srgbClr val="180D20"/>
                 </a:solidFill>
                 <a:latin typeface="Arial"/>
                 <a:ea typeface="Arial"/>
@@ -6588,7 +6588,7 @@
           <p:cNvPr id="15" name="timeline-role-1">
             <a:extLst xmlns:a="http://schemas.openxmlformats.org/drawingml/2006/main">
               <a:ext uri="{FF2B5EF4-FFF2-40B4-BE49-F238E27FC236}">
-                <a16:creationId xmlns:a16="http://schemas.microsoft.com/office/drawing/2014/main" id="{6912FE72-4ADE-4082-9BC4-25284DF16B1C}"/>
+                <a16:creationId xmlns:a16="http://schemas.microsoft.com/office/drawing/2014/main" id="{F2F89A42-E51B-4AF1-A404-4E0C05A4C9C5}"/>
               </a:ext>
             </a:extLst>
           </p:cNvPr>
@@ -6615,7 +6615,7 @@
             <a:pPr algn="l">
               <a:defRPr sz="1200" b="0">
                 <a:solidFill>
-                  <a:srgbClr val="626A78"/>
+                  <a:srgbClr val="70647A"/>
                 </a:solidFill>
                 <a:latin typeface="Arial"/>
                 <a:ea typeface="Arial"/>
@@ -6633,7 +6633,7 @@
           <p:cNvPr id="16" name="timeline-result-1">
             <a:extLst xmlns:a="http://schemas.openxmlformats.org/drawingml/2006/main">
               <a:ext uri="{FF2B5EF4-FFF2-40B4-BE49-F238E27FC236}">
-                <a16:creationId xmlns:a16="http://schemas.microsoft.com/office/drawing/2014/main" id="{0DBC2C36-FAD3-419B-A504-CE68283A9572}"/>
+                <a16:creationId xmlns:a16="http://schemas.microsoft.com/office/drawing/2014/main" id="{9E07E301-013D-4C1C-BB7F-0E3886CE3C9C}"/>
               </a:ext>
             </a:extLst>
           </p:cNvPr>
@@ -6660,7 +6660,7 @@
             <a:pPr algn="l">
               <a:defRPr sz="1200" b="1">
                 <a:solidFill>
-                  <a:srgbClr val="111318"/>
+                  <a:srgbClr val="180D20"/>
                 </a:solidFill>
                 <a:latin typeface="Arial"/>
                 <a:ea typeface="Arial"/>
@@ -6678,7 +6678,7 @@
           <p:cNvPr id="17" name="timeline-dot-2">
             <a:extLst xmlns:a="http://schemas.openxmlformats.org/drawingml/2006/main">
               <a:ext uri="{FF2B5EF4-FFF2-40B4-BE49-F238E27FC236}">
-                <a16:creationId xmlns:a16="http://schemas.microsoft.com/office/drawing/2014/main" id="{8AE70BF8-79F3-4F43-94B7-87B28E62B7FA}"/>
+                <a16:creationId xmlns:a16="http://schemas.microsoft.com/office/drawing/2014/main" id="{16134491-6C34-4B78-B37E-DE60E4FA905D}"/>
               </a:ext>
             </a:extLst>
           </p:cNvPr>
@@ -6698,7 +6698,7 @@
             </a:avLst>
           </a:prstGeom>
           <a:solidFill xmlns:a="http://schemas.openxmlformats.org/drawingml/2006/main">
-            <a:srgbClr val="EAF3FF"/>
+            <a:srgbClr val="F1EBFF"/>
           </a:solidFill>
         </p:spPr>
       </p:sp>
@@ -6707,7 +6707,7 @@
           <p:cNvPr id="18" name="timeline-dot-core-2">
             <a:extLst xmlns:a="http://schemas.openxmlformats.org/drawingml/2006/main">
               <a:ext uri="{FF2B5EF4-FFF2-40B4-BE49-F238E27FC236}">
-                <a16:creationId xmlns:a16="http://schemas.microsoft.com/office/drawing/2014/main" id="{BAE89546-87D0-4934-B6F6-FEDDB0E0489B}"/>
+                <a16:creationId xmlns:a16="http://schemas.microsoft.com/office/drawing/2014/main" id="{816FF0D6-50E9-41C6-9C3F-2BA59512727D}"/>
               </a:ext>
             </a:extLst>
           </p:cNvPr>
@@ -6727,7 +6727,7 @@
             </a:avLst>
           </a:prstGeom>
           <a:solidFill xmlns:a="http://schemas.openxmlformats.org/drawingml/2006/main">
-            <a:srgbClr val="3D8DFF"/>
+            <a:srgbClr val="E0B44F"/>
           </a:solidFill>
         </p:spPr>
       </p:sp>
@@ -6736,7 +6736,7 @@
           <p:cNvPr id="19" name="timeline-period-2">
             <a:extLst xmlns:a="http://schemas.openxmlformats.org/drawingml/2006/main">
               <a:ext uri="{FF2B5EF4-FFF2-40B4-BE49-F238E27FC236}">
-                <a16:creationId xmlns:a16="http://schemas.microsoft.com/office/drawing/2014/main" id="{F2AEC194-BAEB-42CC-827A-62F19AD48D88}"/>
+                <a16:creationId xmlns:a16="http://schemas.microsoft.com/office/drawing/2014/main" id="{64E1508F-C9C5-4925-A3DC-2EF9EC4527EF}"/>
               </a:ext>
             </a:extLst>
           </p:cNvPr>
@@ -6763,7 +6763,7 @@
             <a:pPr algn="l">
               <a:defRPr sz="1350" b="1">
                 <a:solidFill>
-                  <a:srgbClr val="1769E0"/>
+                  <a:srgbClr val="6845C6"/>
                 </a:solidFill>
                 <a:latin typeface="Arial"/>
                 <a:ea typeface="Arial"/>
@@ -6781,7 +6781,7 @@
           <p:cNvPr id="20" name="timeline-org-2">
             <a:extLst xmlns:a="http://schemas.openxmlformats.org/drawingml/2006/main">
               <a:ext uri="{FF2B5EF4-FFF2-40B4-BE49-F238E27FC236}">
-                <a16:creationId xmlns:a16="http://schemas.microsoft.com/office/drawing/2014/main" id="{47606A67-6237-4CCF-9FB9-AB4EB2080F8F}"/>
+                <a16:creationId xmlns:a16="http://schemas.microsoft.com/office/drawing/2014/main" id="{1428C36B-66A9-4B63-A83B-ED36DA7DD32B}"/>
               </a:ext>
             </a:extLst>
           </p:cNvPr>
@@ -6808,7 +6808,7 @@
             <a:pPr algn="l">
               <a:defRPr sz="1800" b="1">
                 <a:solidFill>
-                  <a:srgbClr val="111318"/>
+                  <a:srgbClr val="180D20"/>
                 </a:solidFill>
                 <a:latin typeface="Arial"/>
                 <a:ea typeface="Arial"/>
@@ -6826,7 +6826,7 @@
           <p:cNvPr id="21" name="timeline-role-2">
             <a:extLst xmlns:a="http://schemas.openxmlformats.org/drawingml/2006/main">
               <a:ext uri="{FF2B5EF4-FFF2-40B4-BE49-F238E27FC236}">
-                <a16:creationId xmlns:a16="http://schemas.microsoft.com/office/drawing/2014/main" id="{06FEB51F-F9A7-40FD-90DB-A10A12B7B102}"/>
+                <a16:creationId xmlns:a16="http://schemas.microsoft.com/office/drawing/2014/main" id="{B17D3980-0D2E-49D4-8168-47D74BFE4658}"/>
               </a:ext>
             </a:extLst>
           </p:cNvPr>
@@ -6853,7 +6853,7 @@
             <a:pPr algn="l">
               <a:defRPr sz="1200" b="0">
                 <a:solidFill>
-                  <a:srgbClr val="626A78"/>
+                  <a:srgbClr val="70647A"/>
                 </a:solidFill>
                 <a:latin typeface="Arial"/>
                 <a:ea typeface="Arial"/>
@@ -6871,7 +6871,7 @@
           <p:cNvPr id="22" name="timeline-result-2">
             <a:extLst xmlns:a="http://schemas.openxmlformats.org/drawingml/2006/main">
               <a:ext uri="{FF2B5EF4-FFF2-40B4-BE49-F238E27FC236}">
-                <a16:creationId xmlns:a16="http://schemas.microsoft.com/office/drawing/2014/main" id="{53A83A50-4CAC-48DA-B565-EFC710B1CC4E}"/>
+                <a16:creationId xmlns:a16="http://schemas.microsoft.com/office/drawing/2014/main" id="{F3508A03-0510-47F4-9AC9-96D39819FAEF}"/>
               </a:ext>
             </a:extLst>
           </p:cNvPr>
@@ -6898,7 +6898,7 @@
             <a:pPr algn="l">
               <a:defRPr sz="1200" b="1">
                 <a:solidFill>
-                  <a:srgbClr val="111318"/>
+                  <a:srgbClr val="180D20"/>
                 </a:solidFill>
                 <a:latin typeface="Arial"/>
                 <a:ea typeface="Arial"/>
@@ -6916,7 +6916,7 @@
           <p:cNvPr id="23" name="timeline-dot-3">
             <a:extLst xmlns:a="http://schemas.openxmlformats.org/drawingml/2006/main">
               <a:ext uri="{FF2B5EF4-FFF2-40B4-BE49-F238E27FC236}">
-                <a16:creationId xmlns:a16="http://schemas.microsoft.com/office/drawing/2014/main" id="{E131A8C6-BF10-44B1-B84E-A8A4A184101C}"/>
+                <a16:creationId xmlns:a16="http://schemas.microsoft.com/office/drawing/2014/main" id="{89FFAABF-E869-4332-8F3B-605992AD3562}"/>
               </a:ext>
             </a:extLst>
           </p:cNvPr>
@@ -6936,7 +6936,7 @@
             </a:avLst>
           </a:prstGeom>
           <a:solidFill xmlns:a="http://schemas.openxmlformats.org/drawingml/2006/main">
-            <a:srgbClr val="3D8DFF"/>
+            <a:srgbClr val="E0B44F"/>
           </a:solidFill>
         </p:spPr>
       </p:sp>
@@ -6945,7 +6945,7 @@
           <p:cNvPr id="24" name="timeline-dot-core-3">
             <a:extLst xmlns:a="http://schemas.openxmlformats.org/drawingml/2006/main">
               <a:ext uri="{FF2B5EF4-FFF2-40B4-BE49-F238E27FC236}">
-                <a16:creationId xmlns:a16="http://schemas.microsoft.com/office/drawing/2014/main" id="{E01E0D76-311C-47DB-93D5-D38277A02DF0}"/>
+                <a16:creationId xmlns:a16="http://schemas.microsoft.com/office/drawing/2014/main" id="{0E28A986-8839-4987-A22A-8E989468CD32}"/>
               </a:ext>
             </a:extLst>
           </p:cNvPr>
@@ -6974,7 +6974,7 @@
           <p:cNvPr id="25" name="timeline-period-3">
             <a:extLst xmlns:a="http://schemas.openxmlformats.org/drawingml/2006/main">
               <a:ext uri="{FF2B5EF4-FFF2-40B4-BE49-F238E27FC236}">
-                <a16:creationId xmlns:a16="http://schemas.microsoft.com/office/drawing/2014/main" id="{54CFA38E-B62A-47CC-88D4-9672ECE13810}"/>
+                <a16:creationId xmlns:a16="http://schemas.microsoft.com/office/drawing/2014/main" id="{7E3CCC75-EBED-48A8-A1A8-FB971B6F9F42}"/>
               </a:ext>
             </a:extLst>
           </p:cNvPr>
@@ -7001,7 +7001,7 @@
             <a:pPr algn="l">
               <a:defRPr sz="1350" b="1">
                 <a:solidFill>
-                  <a:srgbClr val="1769E0"/>
+                  <a:srgbClr val="6845C6"/>
                 </a:solidFill>
                 <a:latin typeface="Arial"/>
                 <a:ea typeface="Arial"/>
@@ -7019,7 +7019,7 @@
           <p:cNvPr id="26" name="timeline-org-3">
             <a:extLst xmlns:a="http://schemas.openxmlformats.org/drawingml/2006/main">
               <a:ext uri="{FF2B5EF4-FFF2-40B4-BE49-F238E27FC236}">
-                <a16:creationId xmlns:a16="http://schemas.microsoft.com/office/drawing/2014/main" id="{95E59926-B0C5-455F-88FA-74287E1729FA}"/>
+                <a16:creationId xmlns:a16="http://schemas.microsoft.com/office/drawing/2014/main" id="{2819C91C-197A-4753-AC06-0EAADB99C87A}"/>
               </a:ext>
             </a:extLst>
           </p:cNvPr>
@@ -7046,7 +7046,7 @@
             <a:pPr algn="l">
               <a:defRPr sz="1800" b="1">
                 <a:solidFill>
-                  <a:srgbClr val="111318"/>
+                  <a:srgbClr val="180D20"/>
                 </a:solidFill>
                 <a:latin typeface="Arial"/>
                 <a:ea typeface="Arial"/>
@@ -7064,7 +7064,7 @@
           <p:cNvPr id="27" name="timeline-role-3">
             <a:extLst xmlns:a="http://schemas.openxmlformats.org/drawingml/2006/main">
               <a:ext uri="{FF2B5EF4-FFF2-40B4-BE49-F238E27FC236}">
-                <a16:creationId xmlns:a16="http://schemas.microsoft.com/office/drawing/2014/main" id="{460084C6-1C44-46F5-9121-DC4B26718E61}"/>
+                <a16:creationId xmlns:a16="http://schemas.microsoft.com/office/drawing/2014/main" id="{C42DF89F-2AA1-4EBC-B925-528AF5785A81}"/>
               </a:ext>
             </a:extLst>
           </p:cNvPr>
@@ -7091,7 +7091,7 @@
             <a:pPr algn="l">
               <a:defRPr sz="1200" b="0">
                 <a:solidFill>
-                  <a:srgbClr val="626A78"/>
+                  <a:srgbClr val="70647A"/>
                 </a:solidFill>
                 <a:latin typeface="Arial"/>
                 <a:ea typeface="Arial"/>
@@ -7109,7 +7109,7 @@
           <p:cNvPr id="28" name="timeline-result-3">
             <a:extLst xmlns:a="http://schemas.openxmlformats.org/drawingml/2006/main">
               <a:ext uri="{FF2B5EF4-FFF2-40B4-BE49-F238E27FC236}">
-                <a16:creationId xmlns:a16="http://schemas.microsoft.com/office/drawing/2014/main" id="{ABD285C2-6933-49B9-B6E3-4A20A85AE02E}"/>
+                <a16:creationId xmlns:a16="http://schemas.microsoft.com/office/drawing/2014/main" id="{7B3830D0-86DF-4EF8-B828-C7BC35783BE4}"/>
               </a:ext>
             </a:extLst>
           </p:cNvPr>
@@ -7136,7 +7136,7 @@
             <a:pPr algn="l">
               <a:defRPr sz="1200" b="1">
                 <a:solidFill>
-                  <a:srgbClr val="111318"/>
+                  <a:srgbClr val="180D20"/>
                 </a:solidFill>
                 <a:latin typeface="Arial"/>
                 <a:ea typeface="Arial"/>
@@ -7154,7 +7154,7 @@
           <p:cNvPr id="29" name="footer-line-4">
             <a:extLst xmlns:a="http://schemas.openxmlformats.org/drawingml/2006/main">
               <a:ext uri="{FF2B5EF4-FFF2-40B4-BE49-F238E27FC236}">
-                <a16:creationId xmlns:a16="http://schemas.microsoft.com/office/drawing/2014/main" id="{1AD27370-21AB-428C-A384-EC1F542464B4}"/>
+                <a16:creationId xmlns:a16="http://schemas.microsoft.com/office/drawing/2014/main" id="{F51D81FC-46DC-43B7-95B2-A2E73A91095C}"/>
               </a:ext>
             </a:extLst>
           </p:cNvPr>
@@ -7172,7 +7172,7 @@
             <a:avLst/>
           </a:prstGeom>
           <a:solidFill xmlns:a="http://schemas.openxmlformats.org/drawingml/2006/main">
-            <a:srgbClr val="D9E0E9"/>
+            <a:srgbClr val="DED4E6"/>
           </a:solidFill>
         </p:spPr>
       </p:sp>
@@ -7181,7 +7181,7 @@
           <p:cNvPr id="30" name="footer-name-4">
             <a:extLst xmlns:a="http://schemas.openxmlformats.org/drawingml/2006/main">
               <a:ext uri="{FF2B5EF4-FFF2-40B4-BE49-F238E27FC236}">
-                <a16:creationId xmlns:a16="http://schemas.microsoft.com/office/drawing/2014/main" id="{64D865C2-FEEC-4228-A97E-36BE4E68910A}"/>
+                <a16:creationId xmlns:a16="http://schemas.microsoft.com/office/drawing/2014/main" id="{AE2F22FF-13CC-4BC5-9451-3B2360FC1B7C}"/>
               </a:ext>
             </a:extLst>
           </p:cNvPr>
@@ -7208,7 +7208,7 @@
             <a:pPr algn="l">
               <a:defRPr sz="825" b="1">
                 <a:solidFill>
-                  <a:srgbClr val="626A78"/>
+                  <a:srgbClr val="70647A"/>
                 </a:solidFill>
                 <a:latin typeface="Arial"/>
                 <a:ea typeface="Arial"/>
@@ -7226,7 +7226,7 @@
           <p:cNvPr id="31" name="footer-page-4">
             <a:extLst xmlns:a="http://schemas.openxmlformats.org/drawingml/2006/main">
               <a:ext uri="{FF2B5EF4-FFF2-40B4-BE49-F238E27FC236}">
-                <a16:creationId xmlns:a16="http://schemas.microsoft.com/office/drawing/2014/main" id="{9015D369-03E1-4ED7-AFDC-E234DDC4BDEE}"/>
+                <a16:creationId xmlns:a16="http://schemas.microsoft.com/office/drawing/2014/main" id="{52A7D92E-6FAF-430F-91A5-2D60A1EB9C95}"/>
               </a:ext>
             </a:extLst>
           </p:cNvPr>
@@ -7253,7 +7253,7 @@
             <a:pPr algn="r">
               <a:defRPr sz="900" b="1">
                 <a:solidFill>
-                  <a:srgbClr val="626A78"/>
+                  <a:srgbClr val="70647A"/>
                 </a:solidFill>
                 <a:latin typeface="Arial"/>
                 <a:ea typeface="Arial"/>
@@ -7269,7 +7269,7 @@
     </p:spTree>
     <p:extLst>
       <p:ext uri="{BB962C8B-B14F-4D97-AF65-F5344CB8AC3E}">
-        <p14:creationId xmlns:p14="http://schemas.microsoft.com/office/powerpoint/2010/main" val="1274789790"/>
+        <p14:creationId xmlns:p14="http://schemas.microsoft.com/office/powerpoint/2010/main" val="662653398"/>
       </p:ext>
     </p:extLst>
   </p:cSld>
@@ -7290,10 +7290,10 @@
       </p:grpSpPr>
       <p:sp>
         <p:nvSpPr>
-          <p:cNvPr id="1" name="05-pddikti-canvas">
-            <a:extLst xmlns:a="http://schemas.openxmlformats.org/drawingml/2006/main">
-              <a:ext uri="{FF2B5EF4-FFF2-40B4-BE49-F238E27FC236}">
-                <a16:creationId xmlns:a16="http://schemas.microsoft.com/office/drawing/2014/main" id="{585B598C-F988-47D5-B16F-34227E94D62A}"/>
+          <p:cNvPr id="19" name="05-pddikti-canvas">
+            <a:extLst xmlns:a="http://schemas.openxmlformats.org/drawingml/2006/main">
+              <a:ext uri="{FF2B5EF4-FFF2-40B4-BE49-F238E27FC236}">
+                <a16:creationId xmlns:a16="http://schemas.microsoft.com/office/drawing/2014/main" id="{5D98760D-6606-4394-86A1-4CB43F9C3B53}"/>
               </a:ext>
             </a:extLst>
           </p:cNvPr>
@@ -7320,7 +7320,7 @@
           <p:cNvPr id="2" name="eyebrow-5">
             <a:extLst xmlns:a="http://schemas.openxmlformats.org/drawingml/2006/main">
               <a:ext uri="{FF2B5EF4-FFF2-40B4-BE49-F238E27FC236}">
-                <a16:creationId xmlns:a16="http://schemas.microsoft.com/office/drawing/2014/main" id="{54609DC5-5D80-483B-9ADC-7BB97706EB48}"/>
+                <a16:creationId xmlns:a16="http://schemas.microsoft.com/office/drawing/2014/main" id="{2FDFE097-7ED2-4113-9921-CE470EC01A4C}"/>
               </a:ext>
             </a:extLst>
           </p:cNvPr>
@@ -7347,7 +7347,7 @@
             <a:pPr algn="l">
               <a:defRPr sz="1050" b="1">
                 <a:solidFill>
-                  <a:srgbClr val="1769E0"/>
+                  <a:srgbClr val="6845C6"/>
                 </a:solidFill>
                 <a:latin typeface="Arial"/>
                 <a:ea typeface="Arial"/>
@@ -7365,7 +7365,7 @@
           <p:cNvPr id="3" name="title-5">
             <a:extLst xmlns:a="http://schemas.openxmlformats.org/drawingml/2006/main">
               <a:ext uri="{FF2B5EF4-FFF2-40B4-BE49-F238E27FC236}">
-                <a16:creationId xmlns:a16="http://schemas.microsoft.com/office/drawing/2014/main" id="{8B6D3714-5426-4350-B282-6071B153C7E9}"/>
+                <a16:creationId xmlns:a16="http://schemas.microsoft.com/office/drawing/2014/main" id="{5110BDB0-55BF-40F3-B113-A583502BA56D}"/>
               </a:ext>
             </a:extLst>
           </p:cNvPr>
@@ -7392,7 +7392,7 @@
             <a:pPr algn="l">
               <a:defRPr sz="3225" b="1">
                 <a:solidFill>
-                  <a:srgbClr val="111318"/>
+                  <a:srgbClr val="180D20"/>
                 </a:solidFill>
                 <a:latin typeface="Arial"/>
                 <a:ea typeface="Arial"/>
@@ -7410,7 +7410,7 @@
           <p:cNvPr id="4" name="pddikti-copy">
             <a:extLst xmlns:a="http://schemas.openxmlformats.org/drawingml/2006/main">
               <a:ext uri="{FF2B5EF4-FFF2-40B4-BE49-F238E27FC236}">
-                <a16:creationId xmlns:a16="http://schemas.microsoft.com/office/drawing/2014/main" id="{1DA15CE5-9910-4298-AA3B-C925839B7FC6}"/>
+                <a16:creationId xmlns:a16="http://schemas.microsoft.com/office/drawing/2014/main" id="{1C855B0C-9684-443D-A71F-683A5325BA2D}"/>
               </a:ext>
             </a:extLst>
           </p:cNvPr>
@@ -7437,7 +7437,7 @@
             <a:pPr algn="l">
               <a:defRPr sz="1500" b="0">
                 <a:solidFill>
-                  <a:srgbClr val="626A78"/>
+                  <a:srgbClr val="70647A"/>
                 </a:solidFill>
                 <a:latin typeface="Arial"/>
                 <a:ea typeface="Arial"/>
@@ -7455,7 +7455,7 @@
           <p:cNvPr id="5" name="pddikti-pill-bg">
             <a:extLst xmlns:a="http://schemas.openxmlformats.org/drawingml/2006/main">
               <a:ext uri="{FF2B5EF4-FFF2-40B4-BE49-F238E27FC236}">
-                <a16:creationId xmlns:a16="http://schemas.microsoft.com/office/drawing/2014/main" id="{83DDCD15-9C43-4C51-8051-C50B2F9A1836}"/>
+                <a16:creationId xmlns:a16="http://schemas.microsoft.com/office/drawing/2014/main" id="{135C7711-E71E-45CF-A037-5D5DB7A38D06}"/>
               </a:ext>
             </a:extLst>
           </p:cNvPr>
@@ -7475,7 +7475,7 @@
             </a:avLst>
           </a:prstGeom>
           <a:solidFill xmlns:a="http://schemas.openxmlformats.org/drawingml/2006/main">
-            <a:srgbClr val="EAF3FF"/>
+            <a:srgbClr val="F1EBFF"/>
           </a:solidFill>
         </p:spPr>
       </p:sp>
@@ -7484,7 +7484,7 @@
           <p:cNvPr id="6" name="pddikti-pill-text">
             <a:extLst xmlns:a="http://schemas.openxmlformats.org/drawingml/2006/main">
               <a:ext uri="{FF2B5EF4-FFF2-40B4-BE49-F238E27FC236}">
-                <a16:creationId xmlns:a16="http://schemas.microsoft.com/office/drawing/2014/main" id="{F497C7BE-B29F-4BD3-9B12-5A35EDB85838}"/>
+                <a16:creationId xmlns:a16="http://schemas.microsoft.com/office/drawing/2014/main" id="{5182A32E-1EEA-4454-B364-3673004106EE}"/>
               </a:ext>
             </a:extLst>
           </p:cNvPr>
@@ -7504,14 +7504,14 @@
         </p:spPr>
         <p:txBody>
           <a:bodyPr xmlns:a="http://schemas.openxmlformats.org/drawingml/2006/main" wrap="square" lIns="0" tIns="0" rIns="0" bIns="0" anchor="t">
-            <a:normAutofit fontScale="95730"/>
+            <a:normAutofit fontScale="95830"/>
           </a:bodyPr>
           <a:lstStyle xmlns:a="http://schemas.openxmlformats.org/drawingml/2006/main"/>
           <a:p xmlns:a="http://schemas.openxmlformats.org/drawingml/2006/main">
             <a:pPr algn="ctr">
               <a:defRPr sz="1125" b="1">
                 <a:solidFill>
-                  <a:srgbClr val="1769E0"/>
+                  <a:srgbClr val="6845C6"/>
                 </a:solidFill>
                 <a:latin typeface="Arial"/>
                 <a:ea typeface="Arial"/>
@@ -7529,7 +7529,7 @@
           <p:cNvPr id="7" name="pddikti-metric-1">
             <a:extLst xmlns:a="http://schemas.openxmlformats.org/drawingml/2006/main">
               <a:ext uri="{FF2B5EF4-FFF2-40B4-BE49-F238E27FC236}">
-                <a16:creationId xmlns:a16="http://schemas.microsoft.com/office/drawing/2014/main" id="{14E01DD3-C529-4755-BBEF-78185BB9102F}"/>
+                <a16:creationId xmlns:a16="http://schemas.microsoft.com/office/drawing/2014/main" id="{B683498D-3028-416D-9266-9380EE764288}"/>
               </a:ext>
             </a:extLst>
           </p:cNvPr>
@@ -7556,7 +7556,7 @@
             <a:pPr algn="l">
               <a:defRPr sz="3300" b="1">
                 <a:solidFill>
-                  <a:srgbClr val="111318"/>
+                  <a:srgbClr val="180D20"/>
                 </a:solidFill>
                 <a:latin typeface="Arial"/>
                 <a:ea typeface="Arial"/>
@@ -7574,7 +7574,7 @@
           <p:cNvPr id="8" name="pddikti-label-1">
             <a:extLst xmlns:a="http://schemas.openxmlformats.org/drawingml/2006/main">
               <a:ext uri="{FF2B5EF4-FFF2-40B4-BE49-F238E27FC236}">
-                <a16:creationId xmlns:a16="http://schemas.microsoft.com/office/drawing/2014/main" id="{99DBA529-70AB-4B45-AFD7-503D57FB8205}"/>
+                <a16:creationId xmlns:a16="http://schemas.microsoft.com/office/drawing/2014/main" id="{9B0129FE-53CF-45EC-8106-1443A6902F66}"/>
               </a:ext>
             </a:extLst>
           </p:cNvPr>
@@ -7601,7 +7601,7 @@
             <a:pPr algn="l">
               <a:defRPr sz="1275" b="0">
                 <a:solidFill>
-                  <a:srgbClr val="626A78"/>
+                  <a:srgbClr val="70647A"/>
                 </a:solidFill>
                 <a:latin typeface="Arial"/>
                 <a:ea typeface="Arial"/>
@@ -7619,7 +7619,7 @@
           <p:cNvPr id="9" name="pddikti-metric-2">
             <a:extLst xmlns:a="http://schemas.openxmlformats.org/drawingml/2006/main">
               <a:ext uri="{FF2B5EF4-FFF2-40B4-BE49-F238E27FC236}">
-                <a16:creationId xmlns:a16="http://schemas.microsoft.com/office/drawing/2014/main" id="{37A16DD5-5583-46CC-BDAA-B290B9CFCD46}"/>
+                <a16:creationId xmlns:a16="http://schemas.microsoft.com/office/drawing/2014/main" id="{DAC036C0-0B30-4359-97F8-A5E76677A4AF}"/>
               </a:ext>
             </a:extLst>
           </p:cNvPr>
@@ -7646,7 +7646,7 @@
             <a:pPr algn="l">
               <a:defRPr sz="3300" b="1">
                 <a:solidFill>
-                  <a:srgbClr val="111318"/>
+                  <a:srgbClr val="180D20"/>
                 </a:solidFill>
                 <a:latin typeface="Arial"/>
                 <a:ea typeface="Arial"/>
@@ -7664,7 +7664,7 @@
           <p:cNvPr id="10" name="pddikti-label-2">
             <a:extLst xmlns:a="http://schemas.openxmlformats.org/drawingml/2006/main">
               <a:ext uri="{FF2B5EF4-FFF2-40B4-BE49-F238E27FC236}">
-                <a16:creationId xmlns:a16="http://schemas.microsoft.com/office/drawing/2014/main" id="{6FC997B5-234C-4CDD-90F5-E6BA96A7A868}"/>
+                <a16:creationId xmlns:a16="http://schemas.microsoft.com/office/drawing/2014/main" id="{97A22853-6894-4D1F-A613-39FFFAA3F95C}"/>
               </a:ext>
             </a:extLst>
           </p:cNvPr>
@@ -7691,7 +7691,7 @@
             <a:pPr algn="l">
               <a:defRPr sz="1275" b="0">
                 <a:solidFill>
-                  <a:srgbClr val="626A78"/>
+                  <a:srgbClr val="70647A"/>
                 </a:solidFill>
                 <a:latin typeface="Arial"/>
                 <a:ea typeface="Arial"/>
@@ -7709,7 +7709,7 @@
           <p:cNvPr id="11" name="pddikti-metric-3">
             <a:extLst xmlns:a="http://schemas.openxmlformats.org/drawingml/2006/main">
               <a:ext uri="{FF2B5EF4-FFF2-40B4-BE49-F238E27FC236}">
-                <a16:creationId xmlns:a16="http://schemas.microsoft.com/office/drawing/2014/main" id="{C4228B18-6998-4FB8-B8D9-6D47A027431B}"/>
+                <a16:creationId xmlns:a16="http://schemas.microsoft.com/office/drawing/2014/main" id="{F2EA13E9-6E16-4A32-81D8-5525FC5405BD}"/>
               </a:ext>
             </a:extLst>
           </p:cNvPr>
@@ -7736,7 +7736,7 @@
             <a:pPr algn="l">
               <a:defRPr sz="3300" b="1">
                 <a:solidFill>
-                  <a:srgbClr val="111318"/>
+                  <a:srgbClr val="180D20"/>
                 </a:solidFill>
                 <a:latin typeface="Arial"/>
                 <a:ea typeface="Arial"/>
@@ -7754,7 +7754,7 @@
           <p:cNvPr id="12" name="pddikti-label-3">
             <a:extLst xmlns:a="http://schemas.openxmlformats.org/drawingml/2006/main">
               <a:ext uri="{FF2B5EF4-FFF2-40B4-BE49-F238E27FC236}">
-                <a16:creationId xmlns:a16="http://schemas.microsoft.com/office/drawing/2014/main" id="{E1793B3D-328A-4603-A614-205C5D580041}"/>
+                <a16:creationId xmlns:a16="http://schemas.microsoft.com/office/drawing/2014/main" id="{C5B73F77-CB5C-4FB1-B0F8-AD1E7D6A777E}"/>
               </a:ext>
             </a:extLst>
           </p:cNvPr>
@@ -7781,7 +7781,7 @@
             <a:pPr algn="l">
               <a:defRPr sz="1275" b="0">
                 <a:solidFill>
-                  <a:srgbClr val="626A78"/>
+                  <a:srgbClr val="70647A"/>
                 </a:solidFill>
                 <a:latin typeface="Arial"/>
                 <a:ea typeface="Arial"/>
@@ -7799,7 +7799,7 @@
           <p:cNvPr id="13" name="pddikti-frame">
             <a:extLst xmlns:a="http://schemas.openxmlformats.org/drawingml/2006/main">
               <a:ext uri="{FF2B5EF4-FFF2-40B4-BE49-F238E27FC236}">
-                <a16:creationId xmlns:a16="http://schemas.microsoft.com/office/drawing/2014/main" id="{53E946DA-FE02-44E9-8C6E-85A0ACFD0140}"/>
+                <a16:creationId xmlns:a16="http://schemas.microsoft.com/office/drawing/2014/main" id="{F79C57A9-38EC-4C97-9A5E-D78E0C04D216}"/>
               </a:ext>
             </a:extLst>
           </p:cNvPr>
@@ -7819,7 +7819,7 @@
             </a:avLst>
           </a:prstGeom>
           <a:solidFill xmlns:a="http://schemas.openxmlformats.org/drawingml/2006/main">
-            <a:srgbClr val="F3F6FA"/>
+            <a:srgbClr val="FBF7EF"/>
           </a:solidFill>
         </p:spPr>
       </p:sp>
@@ -7828,7 +7828,7 @@
           <p:cNvPr id="14" name="pddikti-url">
             <a:extLst xmlns:a="http://schemas.openxmlformats.org/drawingml/2006/main">
               <a:ext uri="{FF2B5EF4-FFF2-40B4-BE49-F238E27FC236}">
-                <a16:creationId xmlns:a16="http://schemas.microsoft.com/office/drawing/2014/main" id="{FCACA772-FE94-4976-8230-82C47580CC97}"/>
+                <a16:creationId xmlns:a16="http://schemas.microsoft.com/office/drawing/2014/main" id="{779F4F8E-0251-4998-9370-A597DD862842}"/>
               </a:ext>
             </a:extLst>
           </p:cNvPr>
@@ -7855,7 +7855,7 @@
             <a:pPr algn="r">
               <a:defRPr sz="1050" b="1">
                 <a:solidFill>
-                  <a:srgbClr val="1769E0"/>
+                  <a:srgbClr val="6845C6"/>
                 </a:solidFill>
                 <a:latin typeface="Arial"/>
                 <a:ea typeface="Arial"/>
@@ -7873,7 +7873,7 @@
           <p:cNvPr id="15" name="footer-line-5">
             <a:extLst xmlns:a="http://schemas.openxmlformats.org/drawingml/2006/main">
               <a:ext uri="{FF2B5EF4-FFF2-40B4-BE49-F238E27FC236}">
-                <a16:creationId xmlns:a16="http://schemas.microsoft.com/office/drawing/2014/main" id="{2F2AB097-2F88-40E6-A3CB-5F29857DFAC4}"/>
+                <a16:creationId xmlns:a16="http://schemas.microsoft.com/office/drawing/2014/main" id="{3839861A-6911-4953-8F9A-FADF30130428}"/>
               </a:ext>
             </a:extLst>
           </p:cNvPr>
@@ -7891,7 +7891,7 @@
             <a:avLst/>
           </a:prstGeom>
           <a:solidFill xmlns:a="http://schemas.openxmlformats.org/drawingml/2006/main">
-            <a:srgbClr val="D9E0E9"/>
+            <a:srgbClr val="DED4E6"/>
           </a:solidFill>
         </p:spPr>
       </p:sp>
@@ -7900,7 +7900,7 @@
           <p:cNvPr id="16" name="footer-name-5">
             <a:extLst xmlns:a="http://schemas.openxmlformats.org/drawingml/2006/main">
               <a:ext uri="{FF2B5EF4-FFF2-40B4-BE49-F238E27FC236}">
-                <a16:creationId xmlns:a16="http://schemas.microsoft.com/office/drawing/2014/main" id="{D3F3A40D-A46F-4A4B-9079-7CD4C7E1E692}"/>
+                <a16:creationId xmlns:a16="http://schemas.microsoft.com/office/drawing/2014/main" id="{62FB6725-73EB-4437-88DE-486CF9E8CF89}"/>
               </a:ext>
             </a:extLst>
           </p:cNvPr>
@@ -7927,7 +7927,7 @@
             <a:pPr algn="l">
               <a:defRPr sz="825" b="1">
                 <a:solidFill>
-                  <a:srgbClr val="626A78"/>
+                  <a:srgbClr val="70647A"/>
                 </a:solidFill>
                 <a:latin typeface="Arial"/>
                 <a:ea typeface="Arial"/>
@@ -7945,7 +7945,7 @@
           <p:cNvPr id="17" name="footer-page-5">
             <a:extLst xmlns:a="http://schemas.openxmlformats.org/drawingml/2006/main">
               <a:ext uri="{FF2B5EF4-FFF2-40B4-BE49-F238E27FC236}">
-                <a16:creationId xmlns:a16="http://schemas.microsoft.com/office/drawing/2014/main" id="{3265C82B-0BA4-43FD-B783-8682F9B3A9D9}"/>
+                <a16:creationId xmlns:a16="http://schemas.microsoft.com/office/drawing/2014/main" id="{D6F9E653-BD19-478B-A28A-9ED75C20EFDC}"/>
               </a:ext>
             </a:extLst>
           </p:cNvPr>
@@ -7972,7 +7972,7 @@
             <a:pPr algn="r">
               <a:defRPr sz="900" b="1">
                 <a:solidFill>
-                  <a:srgbClr val="626A78"/>
+                  <a:srgbClr val="70647A"/>
                 </a:solidFill>
                 <a:latin typeface="Arial"/>
                 <a:ea typeface="Arial"/>
@@ -7994,7 +7994,7 @@
           <p:nvPr/>
         </p:nvPicPr>
         <p:blipFill>
-          <a:blip xmlns:r="http://schemas.openxmlformats.org/officeDocument/2006/relationships" xmlns:a="http://schemas.openxmlformats.org/drawingml/2006/main" r:embed="R130a8e10c76a4f7d"/>
+          <a:blip xmlns:r="http://schemas.openxmlformats.org/officeDocument/2006/relationships" xmlns:a="http://schemas.openxmlformats.org/drawingml/2006/main" r:embed="R119d49ebbf264a38"/>
           <a:srcRect xmlns:a="http://schemas.openxmlformats.org/drawingml/2006/main" l="0" t="874" r="0" b="874"/>
           <a:stretch xmlns:a="http://schemas.openxmlformats.org/drawingml/2006/main">
             <a:fillRect l="0" t="0" r="0" b="0"/>
@@ -8013,7 +8013,7 @@
     </p:spTree>
     <p:extLst>
       <p:ext uri="{BB962C8B-B14F-4D97-AF65-F5344CB8AC3E}">
-        <p14:creationId xmlns:p14="http://schemas.microsoft.com/office/powerpoint/2010/main" val="1867150362"/>
+        <p14:creationId xmlns:p14="http://schemas.microsoft.com/office/powerpoint/2010/main" val="1638630102"/>
       </p:ext>
     </p:extLst>
   </p:cSld>
@@ -8034,10 +8034,10 @@
       </p:grpSpPr>
       <p:sp>
         <p:nvSpPr>
-          <p:cNvPr id="1" name="06-decision-products-canvas">
-            <a:extLst xmlns:a="http://schemas.openxmlformats.org/drawingml/2006/main">
-              <a:ext uri="{FF2B5EF4-FFF2-40B4-BE49-F238E27FC236}">
-                <a16:creationId xmlns:a16="http://schemas.microsoft.com/office/drawing/2014/main" id="{27F2E4EA-0C5D-4D6B-88B8-BDDBD874AA23}"/>
+          <p:cNvPr id="19" name="06-decision-products-canvas">
+            <a:extLst xmlns:a="http://schemas.openxmlformats.org/drawingml/2006/main">
+              <a:ext uri="{FF2B5EF4-FFF2-40B4-BE49-F238E27FC236}">
+                <a16:creationId xmlns:a16="http://schemas.microsoft.com/office/drawing/2014/main" id="{D2E1F8BE-0820-47A2-A864-15BD91D17951}"/>
               </a:ext>
             </a:extLst>
           </p:cNvPr>
@@ -8064,7 +8064,7 @@
           <p:cNvPr id="2" name="eyebrow-6">
             <a:extLst xmlns:a="http://schemas.openxmlformats.org/drawingml/2006/main">
               <a:ext uri="{FF2B5EF4-FFF2-40B4-BE49-F238E27FC236}">
-                <a16:creationId xmlns:a16="http://schemas.microsoft.com/office/drawing/2014/main" id="{3630F324-8DBC-4696-8421-46C1360D1AAB}"/>
+                <a16:creationId xmlns:a16="http://schemas.microsoft.com/office/drawing/2014/main" id="{0E965DCA-0314-4F61-B732-D32EBBA9BFA8}"/>
               </a:ext>
             </a:extLst>
           </p:cNvPr>
@@ -8091,7 +8091,7 @@
             <a:pPr algn="l">
               <a:defRPr sz="1050" b="1">
                 <a:solidFill>
-                  <a:srgbClr val="1769E0"/>
+                  <a:srgbClr val="6845C6"/>
                 </a:solidFill>
                 <a:latin typeface="Arial"/>
                 <a:ea typeface="Arial"/>
@@ -8109,7 +8109,7 @@
           <p:cNvPr id="3" name="title-6">
             <a:extLst xmlns:a="http://schemas.openxmlformats.org/drawingml/2006/main">
               <a:ext uri="{FF2B5EF4-FFF2-40B4-BE49-F238E27FC236}">
-                <a16:creationId xmlns:a16="http://schemas.microsoft.com/office/drawing/2014/main" id="{3A517EDB-B548-4B88-BEF0-135C351FC131}"/>
+                <a16:creationId xmlns:a16="http://schemas.microsoft.com/office/drawing/2014/main" id="{EE354381-17FA-4643-A7E6-3AF3F5479E7B}"/>
               </a:ext>
             </a:extLst>
           </p:cNvPr>
@@ -8136,7 +8136,7 @@
             <a:pPr algn="l">
               <a:defRPr sz="3225" b="1">
                 <a:solidFill>
-                  <a:srgbClr val="111318"/>
+                  <a:srgbClr val="180D20"/>
                 </a:solidFill>
                 <a:latin typeface="Arial"/>
                 <a:ea typeface="Arial"/>
@@ -8154,7 +8154,7 @@
           <p:cNvPr id="4" name="planner-frame">
             <a:extLst xmlns:a="http://schemas.openxmlformats.org/drawingml/2006/main">
               <a:ext uri="{FF2B5EF4-FFF2-40B4-BE49-F238E27FC236}">
-                <a16:creationId xmlns:a16="http://schemas.microsoft.com/office/drawing/2014/main" id="{71B533CF-4179-4B2E-84ED-5278643E988C}"/>
+                <a16:creationId xmlns:a16="http://schemas.microsoft.com/office/drawing/2014/main" id="{11D0E4DC-19EE-498C-94A7-0FB423A8BF5F}"/>
               </a:ext>
             </a:extLst>
           </p:cNvPr>
@@ -8174,7 +8174,7 @@
             </a:avLst>
           </a:prstGeom>
           <a:solidFill xmlns:a="http://schemas.openxmlformats.org/drawingml/2006/main">
-            <a:srgbClr val="F3F6FA"/>
+            <a:srgbClr val="FBF7EF"/>
           </a:solidFill>
         </p:spPr>
       </p:sp>
@@ -8183,7 +8183,7 @@
           <p:cNvPr id="5" name="snpmb-frame">
             <a:extLst xmlns:a="http://schemas.openxmlformats.org/drawingml/2006/main">
               <a:ext uri="{FF2B5EF4-FFF2-40B4-BE49-F238E27FC236}">
-                <a16:creationId xmlns:a16="http://schemas.microsoft.com/office/drawing/2014/main" id="{CCD9C7D2-C075-4673-BEEC-DFB09D0DC95C}"/>
+                <a16:creationId xmlns:a16="http://schemas.microsoft.com/office/drawing/2014/main" id="{FEDE345A-4B00-47EB-81EC-40CCB0D32B37}"/>
               </a:ext>
             </a:extLst>
           </p:cNvPr>
@@ -8203,7 +8203,7 @@
             </a:avLst>
           </a:prstGeom>
           <a:solidFill xmlns:a="http://schemas.openxmlformats.org/drawingml/2006/main">
-            <a:srgbClr val="F3F6FA"/>
+            <a:srgbClr val="FBF7EF"/>
           </a:solidFill>
         </p:spPr>
       </p:sp>
@@ -8212,7 +8212,7 @@
           <p:cNvPr id="6" name="planner-title">
             <a:extLst xmlns:a="http://schemas.openxmlformats.org/drawingml/2006/main">
               <a:ext uri="{FF2B5EF4-FFF2-40B4-BE49-F238E27FC236}">
-                <a16:creationId xmlns:a16="http://schemas.microsoft.com/office/drawing/2014/main" id="{D365A9AC-9884-44F5-A1D4-FED13C0C1FF8}"/>
+                <a16:creationId xmlns:a16="http://schemas.microsoft.com/office/drawing/2014/main" id="{FEB83952-72B9-42EE-B416-A3B023016088}"/>
               </a:ext>
             </a:extLst>
           </p:cNvPr>
@@ -8239,7 +8239,7 @@
             <a:pPr algn="l">
               <a:defRPr sz="1875" b="1">
                 <a:solidFill>
-                  <a:srgbClr val="111318"/>
+                  <a:srgbClr val="180D20"/>
                 </a:solidFill>
                 <a:latin typeface="Arial"/>
                 <a:ea typeface="Arial"/>
@@ -8257,7 +8257,7 @@
           <p:cNvPr id="7" name="planner-body">
             <a:extLst xmlns:a="http://schemas.openxmlformats.org/drawingml/2006/main">
               <a:ext uri="{FF2B5EF4-FFF2-40B4-BE49-F238E27FC236}">
-                <a16:creationId xmlns:a16="http://schemas.microsoft.com/office/drawing/2014/main" id="{65FF7B0A-88BB-4DC1-97D7-E8ACFC6D3AF0}"/>
+                <a16:creationId xmlns:a16="http://schemas.microsoft.com/office/drawing/2014/main" id="{56B999EB-03D5-47ED-8564-92D442E71F0D}"/>
               </a:ext>
             </a:extLst>
           </p:cNvPr>
@@ -8284,7 +8284,7 @@
             <a:pPr algn="l">
               <a:defRPr sz="1275" b="0">
                 <a:solidFill>
-                  <a:srgbClr val="626A78"/>
+                  <a:srgbClr val="70647A"/>
                 </a:solidFill>
                 <a:latin typeface="Arial"/>
                 <a:ea typeface="Arial"/>
@@ -8302,7 +8302,7 @@
           <p:cNvPr id="8" name="planner-tech-bg">
             <a:extLst xmlns:a="http://schemas.openxmlformats.org/drawingml/2006/main">
               <a:ext uri="{FF2B5EF4-FFF2-40B4-BE49-F238E27FC236}">
-                <a16:creationId xmlns:a16="http://schemas.microsoft.com/office/drawing/2014/main" id="{87424682-FB64-47EA-8E4E-42B45CE02103}"/>
+                <a16:creationId xmlns:a16="http://schemas.microsoft.com/office/drawing/2014/main" id="{196D4310-8937-4668-9C0B-2AABE110D4B1}"/>
               </a:ext>
             </a:extLst>
           </p:cNvPr>
@@ -8322,7 +8322,7 @@
             </a:avLst>
           </a:prstGeom>
           <a:solidFill xmlns:a="http://schemas.openxmlformats.org/drawingml/2006/main">
-            <a:srgbClr val="EAF3FF"/>
+            <a:srgbClr val="F1EBFF"/>
           </a:solidFill>
         </p:spPr>
       </p:sp>
@@ -8331,7 +8331,7 @@
           <p:cNvPr id="9" name="planner-tech-text">
             <a:extLst xmlns:a="http://schemas.openxmlformats.org/drawingml/2006/main">
               <a:ext uri="{FF2B5EF4-FFF2-40B4-BE49-F238E27FC236}">
-                <a16:creationId xmlns:a16="http://schemas.microsoft.com/office/drawing/2014/main" id="{85402DDB-C532-4269-BA01-AED943C90AAC}"/>
+                <a16:creationId xmlns:a16="http://schemas.microsoft.com/office/drawing/2014/main" id="{61A3A46B-D866-401A-822F-E55A265D92AF}"/>
               </a:ext>
             </a:extLst>
           </p:cNvPr>
@@ -8358,7 +8358,7 @@
             <a:pPr algn="ctr">
               <a:defRPr sz="1125" b="1">
                 <a:solidFill>
-                  <a:srgbClr val="1769E0"/>
+                  <a:srgbClr val="6845C6"/>
                 </a:solidFill>
                 <a:latin typeface="Arial"/>
                 <a:ea typeface="Arial"/>
@@ -8376,7 +8376,7 @@
           <p:cNvPr id="10" name="snpmb-title">
             <a:extLst xmlns:a="http://schemas.openxmlformats.org/drawingml/2006/main">
               <a:ext uri="{FF2B5EF4-FFF2-40B4-BE49-F238E27FC236}">
-                <a16:creationId xmlns:a16="http://schemas.microsoft.com/office/drawing/2014/main" id="{34CA870D-0DAD-4823-963E-376B1708E61B}"/>
+                <a16:creationId xmlns:a16="http://schemas.microsoft.com/office/drawing/2014/main" id="{9782537C-6F78-4FED-8108-A51CBAE6754D}"/>
               </a:ext>
             </a:extLst>
           </p:cNvPr>
@@ -8403,7 +8403,7 @@
             <a:pPr algn="l">
               <a:defRPr sz="1875" b="1">
                 <a:solidFill>
-                  <a:srgbClr val="111318"/>
+                  <a:srgbClr val="180D20"/>
                 </a:solidFill>
                 <a:latin typeface="Arial"/>
                 <a:ea typeface="Arial"/>
@@ -8421,7 +8421,7 @@
           <p:cNvPr id="11" name="snpmb-body">
             <a:extLst xmlns:a="http://schemas.openxmlformats.org/drawingml/2006/main">
               <a:ext uri="{FF2B5EF4-FFF2-40B4-BE49-F238E27FC236}">
-                <a16:creationId xmlns:a16="http://schemas.microsoft.com/office/drawing/2014/main" id="{A3F6CB97-5BC9-4AEB-ABBD-A1444099AC7A}"/>
+                <a16:creationId xmlns:a16="http://schemas.microsoft.com/office/drawing/2014/main" id="{550DD1C0-2E87-4F8A-AAFD-9EDB6DE59F04}"/>
               </a:ext>
             </a:extLst>
           </p:cNvPr>
@@ -8448,7 +8448,7 @@
             <a:pPr algn="l">
               <a:defRPr sz="1275" b="0">
                 <a:solidFill>
-                  <a:srgbClr val="626A78"/>
+                  <a:srgbClr val="70647A"/>
                 </a:solidFill>
                 <a:latin typeface="Arial"/>
                 <a:ea typeface="Arial"/>
@@ -8466,7 +8466,7 @@
           <p:cNvPr id="12" name="snpmb-tech-bg">
             <a:extLst xmlns:a="http://schemas.openxmlformats.org/drawingml/2006/main">
               <a:ext uri="{FF2B5EF4-FFF2-40B4-BE49-F238E27FC236}">
-                <a16:creationId xmlns:a16="http://schemas.microsoft.com/office/drawing/2014/main" id="{9F258929-1B03-4C97-A39B-B9A8B9D305A9}"/>
+                <a16:creationId xmlns:a16="http://schemas.microsoft.com/office/drawing/2014/main" id="{4CA378BF-2CBA-44C5-A13F-DF08664AF480}"/>
               </a:ext>
             </a:extLst>
           </p:cNvPr>
@@ -8486,7 +8486,7 @@
             </a:avLst>
           </a:prstGeom>
           <a:solidFill xmlns:a="http://schemas.openxmlformats.org/drawingml/2006/main">
-            <a:srgbClr val="EAF3FF"/>
+            <a:srgbClr val="F1EBFF"/>
           </a:solidFill>
         </p:spPr>
       </p:sp>
@@ -8495,7 +8495,7 @@
           <p:cNvPr id="13" name="snpmb-tech-text">
             <a:extLst xmlns:a="http://schemas.openxmlformats.org/drawingml/2006/main">
               <a:ext uri="{FF2B5EF4-FFF2-40B4-BE49-F238E27FC236}">
-                <a16:creationId xmlns:a16="http://schemas.microsoft.com/office/drawing/2014/main" id="{A4B4EC6D-1534-445F-A32E-616088DA4A60}"/>
+                <a16:creationId xmlns:a16="http://schemas.microsoft.com/office/drawing/2014/main" id="{C5D570C2-DD63-44E2-A6C4-5730D5109DF9}"/>
               </a:ext>
             </a:extLst>
           </p:cNvPr>
@@ -8522,7 +8522,7 @@
             <a:pPr algn="ctr">
               <a:defRPr sz="1125" b="1">
                 <a:solidFill>
-                  <a:srgbClr val="1769E0"/>
+                  <a:srgbClr val="6845C6"/>
                 </a:solidFill>
                 <a:latin typeface="Arial"/>
                 <a:ea typeface="Arial"/>
@@ -8540,7 +8540,7 @@
           <p:cNvPr id="14" name="footer-line-6">
             <a:extLst xmlns:a="http://schemas.openxmlformats.org/drawingml/2006/main">
               <a:ext uri="{FF2B5EF4-FFF2-40B4-BE49-F238E27FC236}">
-                <a16:creationId xmlns:a16="http://schemas.microsoft.com/office/drawing/2014/main" id="{96F8BE65-DE51-42E1-B2C9-989EE2B4A7A8}"/>
+                <a16:creationId xmlns:a16="http://schemas.microsoft.com/office/drawing/2014/main" id="{24999EDD-543E-421F-98D8-FAC695EF7672}"/>
               </a:ext>
             </a:extLst>
           </p:cNvPr>
@@ -8558,7 +8558,7 @@
             <a:avLst/>
           </a:prstGeom>
           <a:solidFill xmlns:a="http://schemas.openxmlformats.org/drawingml/2006/main">
-            <a:srgbClr val="D9E0E9"/>
+            <a:srgbClr val="DED4E6"/>
           </a:solidFill>
         </p:spPr>
       </p:sp>
@@ -8567,7 +8567,7 @@
           <p:cNvPr id="15" name="footer-name-6">
             <a:extLst xmlns:a="http://schemas.openxmlformats.org/drawingml/2006/main">
               <a:ext uri="{FF2B5EF4-FFF2-40B4-BE49-F238E27FC236}">
-                <a16:creationId xmlns:a16="http://schemas.microsoft.com/office/drawing/2014/main" id="{30982FCA-3648-4EB8-836D-027A2DA63804}"/>
+                <a16:creationId xmlns:a16="http://schemas.microsoft.com/office/drawing/2014/main" id="{5E4A7E80-12C0-4610-B06C-4D2EF0FDCC14}"/>
               </a:ext>
             </a:extLst>
           </p:cNvPr>
@@ -8594,7 +8594,7 @@
             <a:pPr algn="l">
               <a:defRPr sz="825" b="1">
                 <a:solidFill>
-                  <a:srgbClr val="626A78"/>
+                  <a:srgbClr val="70647A"/>
                 </a:solidFill>
                 <a:latin typeface="Arial"/>
                 <a:ea typeface="Arial"/>
@@ -8612,7 +8612,7 @@
           <p:cNvPr id="16" name="footer-page-6">
             <a:extLst xmlns:a="http://schemas.openxmlformats.org/drawingml/2006/main">
               <a:ext uri="{FF2B5EF4-FFF2-40B4-BE49-F238E27FC236}">
-                <a16:creationId xmlns:a16="http://schemas.microsoft.com/office/drawing/2014/main" id="{BAA3FF95-DF48-4920-89AF-31E431633ECF}"/>
+                <a16:creationId xmlns:a16="http://schemas.microsoft.com/office/drawing/2014/main" id="{46EDDEAB-CDAC-41FF-9799-E1671C778B78}"/>
               </a:ext>
             </a:extLst>
           </p:cNvPr>
@@ -8639,7 +8639,7 @@
             <a:pPr algn="r">
               <a:defRPr sz="900" b="1">
                 <a:solidFill>
-                  <a:srgbClr val="626A78"/>
+                  <a:srgbClr val="70647A"/>
                 </a:solidFill>
                 <a:latin typeface="Arial"/>
                 <a:ea typeface="Arial"/>
@@ -8661,7 +8661,7 @@
           <p:nvPr/>
         </p:nvPicPr>
         <p:blipFill>
-          <a:blip xmlns:r="http://schemas.openxmlformats.org/officeDocument/2006/relationships" xmlns:a="http://schemas.openxmlformats.org/drawingml/2006/main" r:embed="Re318fd157f5e4695"/>
+          <a:blip xmlns:r="http://schemas.openxmlformats.org/officeDocument/2006/relationships" xmlns:a="http://schemas.openxmlformats.org/drawingml/2006/main" r:embed="R59e696ef98f74b0f"/>
           <a:srcRect xmlns:a="http://schemas.openxmlformats.org/drawingml/2006/main" l="0" t="5719" r="0" b="5719"/>
           <a:stretch xmlns:a="http://schemas.openxmlformats.org/drawingml/2006/main">
             <a:fillRect l="0" t="0" r="0" b="0"/>
@@ -8686,7 +8686,7 @@
           <p:nvPr/>
         </p:nvPicPr>
         <p:blipFill>
-          <a:blip xmlns:r="http://schemas.openxmlformats.org/officeDocument/2006/relationships" xmlns:a="http://schemas.openxmlformats.org/drawingml/2006/main" r:embed="R59a1ce6cf5cb4846"/>
+          <a:blip xmlns:r="http://schemas.openxmlformats.org/officeDocument/2006/relationships" xmlns:a="http://schemas.openxmlformats.org/drawingml/2006/main" r:embed="R9371c9e41ec5455e"/>
           <a:srcRect xmlns:a="http://schemas.openxmlformats.org/drawingml/2006/main" l="0" t="5719" r="0" b="5719"/>
           <a:stretch xmlns:a="http://schemas.openxmlformats.org/drawingml/2006/main">
             <a:fillRect l="0" t="0" r="0" b="0"/>
@@ -8705,7 +8705,7 @@
     </p:spTree>
     <p:extLst>
       <p:ext uri="{BB962C8B-B14F-4D97-AF65-F5344CB8AC3E}">
-        <p14:creationId xmlns:p14="http://schemas.microsoft.com/office/powerpoint/2010/main" val="295862890"/>
+        <p14:creationId xmlns:p14="http://schemas.microsoft.com/office/powerpoint/2010/main" val="513183152"/>
       </p:ext>
     </p:extLst>
   </p:cSld>
@@ -8726,10 +8726,10 @@
       </p:grpSpPr>
       <p:sp>
         <p:nvSpPr>
-          <p:cNvPr id="1" name="07-market-products-canvas">
-            <a:extLst xmlns:a="http://schemas.openxmlformats.org/drawingml/2006/main">
-              <a:ext uri="{FF2B5EF4-FFF2-40B4-BE49-F238E27FC236}">
-                <a16:creationId xmlns:a16="http://schemas.microsoft.com/office/drawing/2014/main" id="{799DB8C5-A79A-4216-89B4-7B6A06579290}"/>
+          <p:cNvPr id="18" name="07-market-products-canvas">
+            <a:extLst xmlns:a="http://schemas.openxmlformats.org/drawingml/2006/main">
+              <a:ext uri="{FF2B5EF4-FFF2-40B4-BE49-F238E27FC236}">
+                <a16:creationId xmlns:a16="http://schemas.microsoft.com/office/drawing/2014/main" id="{84538341-7F73-4951-9F6B-617120AB37E0}"/>
               </a:ext>
             </a:extLst>
           </p:cNvPr>
@@ -8756,7 +8756,7 @@
           <p:cNvPr id="2" name="eyebrow-7">
             <a:extLst xmlns:a="http://schemas.openxmlformats.org/drawingml/2006/main">
               <a:ext uri="{FF2B5EF4-FFF2-40B4-BE49-F238E27FC236}">
-                <a16:creationId xmlns:a16="http://schemas.microsoft.com/office/drawing/2014/main" id="{12CD01FB-3844-4FB5-9CAF-BB61139D2D61}"/>
+                <a16:creationId xmlns:a16="http://schemas.microsoft.com/office/drawing/2014/main" id="{1A738EB2-0730-4CBE-8E90-F369EEA0F055}"/>
               </a:ext>
             </a:extLst>
           </p:cNvPr>
@@ -8783,7 +8783,7 @@
             <a:pPr algn="l">
               <a:defRPr sz="1050" b="1">
                 <a:solidFill>
-                  <a:srgbClr val="1769E0"/>
+                  <a:srgbClr val="6845C6"/>
                 </a:solidFill>
                 <a:latin typeface="Arial"/>
                 <a:ea typeface="Arial"/>
@@ -8801,7 +8801,7 @@
           <p:cNvPr id="3" name="title-7">
             <a:extLst xmlns:a="http://schemas.openxmlformats.org/drawingml/2006/main">
               <a:ext uri="{FF2B5EF4-FFF2-40B4-BE49-F238E27FC236}">
-                <a16:creationId xmlns:a16="http://schemas.microsoft.com/office/drawing/2014/main" id="{9EB9F259-33AA-4646-8E1D-CD5D26458DA4}"/>
+                <a16:creationId xmlns:a16="http://schemas.microsoft.com/office/drawing/2014/main" id="{2C099D6D-4269-49F7-B639-E9319E03DAF5}"/>
               </a:ext>
             </a:extLst>
           </p:cNvPr>
@@ -8828,7 +8828,7 @@
             <a:pPr algn="l">
               <a:defRPr sz="3225" b="1">
                 <a:solidFill>
-                  <a:srgbClr val="111318"/>
+                  <a:srgbClr val="180D20"/>
                 </a:solidFill>
                 <a:latin typeface="Arial"/>
                 <a:ea typeface="Arial"/>
@@ -8846,7 +8846,7 @@
           <p:cNvPr id="4" name="market-left-panel">
             <a:extLst xmlns:a="http://schemas.openxmlformats.org/drawingml/2006/main">
               <a:ext uri="{FF2B5EF4-FFF2-40B4-BE49-F238E27FC236}">
-                <a16:creationId xmlns:a16="http://schemas.microsoft.com/office/drawing/2014/main" id="{494BF6A5-58EF-42FB-9874-069B70E9F6AF}"/>
+                <a16:creationId xmlns:a16="http://schemas.microsoft.com/office/drawing/2014/main" id="{800C6341-E9BC-47FD-8E45-E0773FF1E378}"/>
               </a:ext>
             </a:extLst>
           </p:cNvPr>
@@ -8866,7 +8866,7 @@
             </a:avLst>
           </a:prstGeom>
           <a:solidFill xmlns:a="http://schemas.openxmlformats.org/drawingml/2006/main">
-            <a:srgbClr val="F3F6FA"/>
+            <a:srgbClr val="FBF7EF"/>
           </a:solidFill>
         </p:spPr>
       </p:sp>
@@ -8875,7 +8875,7 @@
           <p:cNvPr id="5" name="market-right-panel">
             <a:extLst xmlns:a="http://schemas.openxmlformats.org/drawingml/2006/main">
               <a:ext uri="{FF2B5EF4-FFF2-40B4-BE49-F238E27FC236}">
-                <a16:creationId xmlns:a16="http://schemas.microsoft.com/office/drawing/2014/main" id="{4B144D87-CF09-4722-B2DB-4C17BD84444A}"/>
+                <a16:creationId xmlns:a16="http://schemas.microsoft.com/office/drawing/2014/main" id="{4129E43D-2CA0-4109-A5F2-264545A12D1B}"/>
               </a:ext>
             </a:extLst>
           </p:cNvPr>
@@ -8895,7 +8895,7 @@
             </a:avLst>
           </a:prstGeom>
           <a:solidFill xmlns:a="http://schemas.openxmlformats.org/drawingml/2006/main">
-            <a:srgbClr val="F3F6FA"/>
+            <a:srgbClr val="FBF7EF"/>
           </a:solidFill>
         </p:spPr>
       </p:sp>
@@ -8904,7 +8904,7 @@
           <p:cNvPr id="6" name="ipo-eyebrow">
             <a:extLst xmlns:a="http://schemas.openxmlformats.org/drawingml/2006/main">
               <a:ext uri="{FF2B5EF4-FFF2-40B4-BE49-F238E27FC236}">
-                <a16:creationId xmlns:a16="http://schemas.microsoft.com/office/drawing/2014/main" id="{06B4C01D-735F-4A1D-87D1-9DEE9207C4BD}"/>
+                <a16:creationId xmlns:a16="http://schemas.microsoft.com/office/drawing/2014/main" id="{7317282C-7524-46E5-8A41-7ABC16205E02}"/>
               </a:ext>
             </a:extLst>
           </p:cNvPr>
@@ -8931,7 +8931,7 @@
             <a:pPr algn="l">
               <a:defRPr sz="1050" b="1">
                 <a:solidFill>
-                  <a:srgbClr val="1769E0"/>
+                  <a:srgbClr val="6845C6"/>
                 </a:solidFill>
                 <a:latin typeface="Arial"/>
                 <a:ea typeface="Arial"/>
@@ -8949,7 +8949,7 @@
           <p:cNvPr id="7" name="ipo-title">
             <a:extLst xmlns:a="http://schemas.openxmlformats.org/drawingml/2006/main">
               <a:ext uri="{FF2B5EF4-FFF2-40B4-BE49-F238E27FC236}">
-                <a16:creationId xmlns:a16="http://schemas.microsoft.com/office/drawing/2014/main" id="{4BE5D4F7-634D-46B9-9167-2CF0698CB153}"/>
+                <a16:creationId xmlns:a16="http://schemas.microsoft.com/office/drawing/2014/main" id="{1FEC491C-4EE6-455F-92BA-F39CF673392E}"/>
               </a:ext>
             </a:extLst>
           </p:cNvPr>
@@ -8976,7 +8976,7 @@
             <a:pPr algn="l">
               <a:defRPr sz="2175" b="1">
                 <a:solidFill>
-                  <a:srgbClr val="111318"/>
+                  <a:srgbClr val="180D20"/>
                 </a:solidFill>
                 <a:latin typeface="Arial"/>
                 <a:ea typeface="Arial"/>
@@ -8995,7 +8995,7 @@
           <p:cNvPr id="8" name="ipo-copy">
             <a:extLst xmlns:a="http://schemas.openxmlformats.org/drawingml/2006/main">
               <a:ext uri="{FF2B5EF4-FFF2-40B4-BE49-F238E27FC236}">
-                <a16:creationId xmlns:a16="http://schemas.microsoft.com/office/drawing/2014/main" id="{F6F354F0-17B8-4B3F-8264-63AD006DD661}"/>
+                <a16:creationId xmlns:a16="http://schemas.microsoft.com/office/drawing/2014/main" id="{30E38706-780F-479B-B0A7-0B551238D857}"/>
               </a:ext>
             </a:extLst>
           </p:cNvPr>
@@ -9022,7 +9022,7 @@
             <a:pPr algn="l">
               <a:defRPr sz="1350" b="0">
                 <a:solidFill>
-                  <a:srgbClr val="626A78"/>
+                  <a:srgbClr val="70647A"/>
                 </a:solidFill>
                 <a:latin typeface="Arial"/>
                 <a:ea typeface="Arial"/>
@@ -9040,7 +9040,7 @@
           <p:cNvPr id="9" name="ipo-url">
             <a:extLst xmlns:a="http://schemas.openxmlformats.org/drawingml/2006/main">
               <a:ext uri="{FF2B5EF4-FFF2-40B4-BE49-F238E27FC236}">
-                <a16:creationId xmlns:a16="http://schemas.microsoft.com/office/drawing/2014/main" id="{3E6FAC3B-5D60-4A23-931A-2CC277A1132B}"/>
+                <a16:creationId xmlns:a16="http://schemas.microsoft.com/office/drawing/2014/main" id="{53E224B8-07DC-447C-A4B0-F2935453A11A}"/>
               </a:ext>
             </a:extLst>
           </p:cNvPr>
@@ -9067,7 +9067,7 @@
             <a:pPr algn="l">
               <a:defRPr sz="1125" b="1">
                 <a:solidFill>
-                  <a:srgbClr val="1769E0"/>
+                  <a:srgbClr val="6845C6"/>
                 </a:solidFill>
                 <a:latin typeface="Arial"/>
                 <a:ea typeface="Arial"/>
@@ -9085,7 +9085,7 @@
           <p:cNvPr id="10" name="ihsg-eyebrow">
             <a:extLst xmlns:a="http://schemas.openxmlformats.org/drawingml/2006/main">
               <a:ext uri="{FF2B5EF4-FFF2-40B4-BE49-F238E27FC236}">
-                <a16:creationId xmlns:a16="http://schemas.microsoft.com/office/drawing/2014/main" id="{F0CC1EB2-CF6F-4EF7-BC22-0D1A416B3B1A}"/>
+                <a16:creationId xmlns:a16="http://schemas.microsoft.com/office/drawing/2014/main" id="{F5C80F84-E6C1-4C90-ADDB-0DC414899A75}"/>
               </a:ext>
             </a:extLst>
           </p:cNvPr>
@@ -9112,7 +9112,7 @@
             <a:pPr algn="l">
               <a:defRPr sz="1050" b="1">
                 <a:solidFill>
-                  <a:srgbClr val="12A36D"/>
+                  <a:srgbClr val="E65FA8"/>
                 </a:solidFill>
                 <a:latin typeface="Arial"/>
                 <a:ea typeface="Arial"/>
@@ -9130,7 +9130,7 @@
           <p:cNvPr id="11" name="ihsg-title">
             <a:extLst xmlns:a="http://schemas.openxmlformats.org/drawingml/2006/main">
               <a:ext uri="{FF2B5EF4-FFF2-40B4-BE49-F238E27FC236}">
-                <a16:creationId xmlns:a16="http://schemas.microsoft.com/office/drawing/2014/main" id="{7E5DCB9C-0306-4F18-A02A-FAC3C113005C}"/>
+                <a16:creationId xmlns:a16="http://schemas.microsoft.com/office/drawing/2014/main" id="{E7F0AD4C-AC8B-4493-8E53-2DD0B56A750D}"/>
               </a:ext>
             </a:extLst>
           </p:cNvPr>
@@ -9157,7 +9157,7 @@
             <a:pPr algn="l">
               <a:defRPr sz="2175" b="1">
                 <a:solidFill>
-                  <a:srgbClr val="111318"/>
+                  <a:srgbClr val="180D20"/>
                 </a:solidFill>
                 <a:latin typeface="Arial"/>
                 <a:ea typeface="Arial"/>
@@ -9176,7 +9176,7 @@
           <p:cNvPr id="12" name="ihsg-url">
             <a:extLst xmlns:a="http://schemas.openxmlformats.org/drawingml/2006/main">
               <a:ext uri="{FF2B5EF4-FFF2-40B4-BE49-F238E27FC236}">
-                <a16:creationId xmlns:a16="http://schemas.microsoft.com/office/drawing/2014/main" id="{70DF4C1B-D695-48A3-9898-06490B24BC82}"/>
+                <a16:creationId xmlns:a16="http://schemas.microsoft.com/office/drawing/2014/main" id="{E4B21BA3-0A8D-493C-8062-98AB02E65A58}"/>
               </a:ext>
             </a:extLst>
           </p:cNvPr>
@@ -9203,7 +9203,7 @@
             <a:pPr algn="l">
               <a:defRPr sz="1125" b="1">
                 <a:solidFill>
-                  <a:srgbClr val="1769E0"/>
+                  <a:srgbClr val="6845C6"/>
                 </a:solidFill>
                 <a:latin typeface="Arial"/>
                 <a:ea typeface="Arial"/>
@@ -9221,7 +9221,7 @@
           <p:cNvPr id="13" name="footer-line-7">
             <a:extLst xmlns:a="http://schemas.openxmlformats.org/drawingml/2006/main">
               <a:ext uri="{FF2B5EF4-FFF2-40B4-BE49-F238E27FC236}">
-                <a16:creationId xmlns:a16="http://schemas.microsoft.com/office/drawing/2014/main" id="{FBBDD721-2649-4FCF-8D12-30F4FFBDB0C2}"/>
+                <a16:creationId xmlns:a16="http://schemas.microsoft.com/office/drawing/2014/main" id="{A419D0D5-E2F1-42AD-91DD-DEB319D68B9A}"/>
               </a:ext>
             </a:extLst>
           </p:cNvPr>
@@ -9239,7 +9239,7 @@
             <a:avLst/>
           </a:prstGeom>
           <a:solidFill xmlns:a="http://schemas.openxmlformats.org/drawingml/2006/main">
-            <a:srgbClr val="D9E0E9"/>
+            <a:srgbClr val="DED4E6"/>
           </a:solidFill>
         </p:spPr>
       </p:sp>
@@ -9248,7 +9248,7 @@
           <p:cNvPr id="14" name="footer-name-7">
             <a:extLst xmlns:a="http://schemas.openxmlformats.org/drawingml/2006/main">
               <a:ext uri="{FF2B5EF4-FFF2-40B4-BE49-F238E27FC236}">
-                <a16:creationId xmlns:a16="http://schemas.microsoft.com/office/drawing/2014/main" id="{C11BCAC0-4F07-4DC6-9A63-BEBFEC52D9BB}"/>
+                <a16:creationId xmlns:a16="http://schemas.microsoft.com/office/drawing/2014/main" id="{857C0951-6A53-48CC-9D92-7F9177971660}"/>
               </a:ext>
             </a:extLst>
           </p:cNvPr>
@@ -9275,7 +9275,7 @@
             <a:pPr algn="l">
               <a:defRPr sz="825" b="1">
                 <a:solidFill>
-                  <a:srgbClr val="626A78"/>
+                  <a:srgbClr val="70647A"/>
                 </a:solidFill>
                 <a:latin typeface="Arial"/>
                 <a:ea typeface="Arial"/>
@@ -9293,7 +9293,7 @@
           <p:cNvPr id="15" name="footer-page-7">
             <a:extLst xmlns:a="http://schemas.openxmlformats.org/drawingml/2006/main">
               <a:ext uri="{FF2B5EF4-FFF2-40B4-BE49-F238E27FC236}">
-                <a16:creationId xmlns:a16="http://schemas.microsoft.com/office/drawing/2014/main" id="{8BB0E74C-8AB2-4E80-93C0-DB8F9790E37B}"/>
+                <a16:creationId xmlns:a16="http://schemas.microsoft.com/office/drawing/2014/main" id="{A6787E05-D6E3-4314-BDA9-FE4996D0C777}"/>
               </a:ext>
             </a:extLst>
           </p:cNvPr>
@@ -9320,7 +9320,7 @@
             <a:pPr algn="r">
               <a:defRPr sz="900" b="1">
                 <a:solidFill>
-                  <a:srgbClr val="626A78"/>
+                  <a:srgbClr val="70647A"/>
                 </a:solidFill>
                 <a:latin typeface="Arial"/>
                 <a:ea typeface="Arial"/>
@@ -9342,7 +9342,7 @@
           <p:nvPr/>
         </p:nvPicPr>
         <p:blipFill>
-          <a:blip xmlns:r="http://schemas.openxmlformats.org/officeDocument/2006/relationships" xmlns:a="http://schemas.openxmlformats.org/drawingml/2006/main" r:embed="R9dc0db0d3a4549ad"/>
+          <a:blip xmlns:r="http://schemas.openxmlformats.org/officeDocument/2006/relationships" xmlns:a="http://schemas.openxmlformats.org/drawingml/2006/main" r:embed="Re33f205eaedd4281"/>
           <a:srcRect xmlns:a="http://schemas.openxmlformats.org/drawingml/2006/main" l="0" t="22720" r="0" b="22720"/>
           <a:stretch xmlns:a="http://schemas.openxmlformats.org/drawingml/2006/main">
             <a:fillRect l="0" t="0" r="0" b="0"/>
@@ -9367,7 +9367,7 @@
           <p:nvPr/>
         </p:nvPicPr>
         <p:blipFill>
-          <a:blip xmlns:r="http://schemas.openxmlformats.org/officeDocument/2006/relationships" xmlns:a="http://schemas.openxmlformats.org/drawingml/2006/main" r:embed="R0e65082ce6974d6f"/>
+          <a:blip xmlns:r="http://schemas.openxmlformats.org/officeDocument/2006/relationships" xmlns:a="http://schemas.openxmlformats.org/drawingml/2006/main" r:embed="R5da926c1163e447b"/>
           <a:srcRect xmlns:a="http://schemas.openxmlformats.org/drawingml/2006/main" l="0" t="22324" r="0" b="22324"/>
           <a:stretch xmlns:a="http://schemas.openxmlformats.org/drawingml/2006/main">
             <a:fillRect l="0" t="0" r="0" b="0"/>
@@ -9386,7 +9386,7 @@
     </p:spTree>
     <p:extLst>
       <p:ext uri="{BB962C8B-B14F-4D97-AF65-F5344CB8AC3E}">
-        <p14:creationId xmlns:p14="http://schemas.microsoft.com/office/powerpoint/2010/main" val="1905586206"/>
+        <p14:creationId xmlns:p14="http://schemas.microsoft.com/office/powerpoint/2010/main" val="1322431331"/>
       </p:ext>
     </p:extLst>
   </p:cSld>
@@ -9407,10 +9407,10 @@
       </p:grpSpPr>
       <p:sp>
         <p:nvSpPr>
-          <p:cNvPr id="1" name="08-ml-evidence-canvas">
-            <a:extLst xmlns:a="http://schemas.openxmlformats.org/drawingml/2006/main">
-              <a:ext uri="{FF2B5EF4-FFF2-40B4-BE49-F238E27FC236}">
-                <a16:creationId xmlns:a16="http://schemas.microsoft.com/office/drawing/2014/main" id="{A8156572-F02C-47E7-8BA7-13289E33B42F}"/>
+          <p:cNvPr id="19" name="08-ml-evidence-canvas">
+            <a:extLst xmlns:a="http://schemas.openxmlformats.org/drawingml/2006/main">
+              <a:ext uri="{FF2B5EF4-FFF2-40B4-BE49-F238E27FC236}">
+                <a16:creationId xmlns:a16="http://schemas.microsoft.com/office/drawing/2014/main" id="{678694C8-9371-4F65-A709-322BE5561A9F}"/>
               </a:ext>
             </a:extLst>
           </p:cNvPr>
@@ -9437,7 +9437,7 @@
           <p:cNvPr id="2" name="eyebrow-8">
             <a:extLst xmlns:a="http://schemas.openxmlformats.org/drawingml/2006/main">
               <a:ext uri="{FF2B5EF4-FFF2-40B4-BE49-F238E27FC236}">
-                <a16:creationId xmlns:a16="http://schemas.microsoft.com/office/drawing/2014/main" id="{9B23671A-B16B-4F35-A956-1F407A138F33}"/>
+                <a16:creationId xmlns:a16="http://schemas.microsoft.com/office/drawing/2014/main" id="{AAA648B4-627C-4FAE-A1DB-B37D2B4442FA}"/>
               </a:ext>
             </a:extLst>
           </p:cNvPr>
@@ -9464,7 +9464,7 @@
             <a:pPr algn="l">
               <a:defRPr sz="1050" b="1">
                 <a:solidFill>
-                  <a:srgbClr val="1769E0"/>
+                  <a:srgbClr val="6845C6"/>
                 </a:solidFill>
                 <a:latin typeface="Arial"/>
                 <a:ea typeface="Arial"/>
@@ -9482,7 +9482,7 @@
           <p:cNvPr id="3" name="title-8">
             <a:extLst xmlns:a="http://schemas.openxmlformats.org/drawingml/2006/main">
               <a:ext uri="{FF2B5EF4-FFF2-40B4-BE49-F238E27FC236}">
-                <a16:creationId xmlns:a16="http://schemas.microsoft.com/office/drawing/2014/main" id="{D22E47F2-7403-4E83-8F5C-95797F5E4881}"/>
+                <a16:creationId xmlns:a16="http://schemas.microsoft.com/office/drawing/2014/main" id="{587AFB1A-DF7A-43B5-8C59-C74B29783381}"/>
               </a:ext>
             </a:extLst>
           </p:cNvPr>
@@ -9509,7 +9509,7 @@
             <a:pPr algn="l">
               <a:defRPr sz="3225" b="1">
                 <a:solidFill>
-                  <a:srgbClr val="111318"/>
+                  <a:srgbClr val="180D20"/>
                 </a:solidFill>
                 <a:latin typeface="Arial"/>
                 <a:ea typeface="Arial"/>
@@ -9527,7 +9527,7 @@
           <p:cNvPr id="4" name="food-image-frame">
             <a:extLst xmlns:a="http://schemas.openxmlformats.org/drawingml/2006/main">
               <a:ext uri="{FF2B5EF4-FFF2-40B4-BE49-F238E27FC236}">
-                <a16:creationId xmlns:a16="http://schemas.microsoft.com/office/drawing/2014/main" id="{A09E27BC-A9E5-4B09-99E8-753812B706FE}"/>
+                <a16:creationId xmlns:a16="http://schemas.microsoft.com/office/drawing/2014/main" id="{E7C192DF-7CB8-4601-BE2E-985BFC27AE00}"/>
               </a:ext>
             </a:extLst>
           </p:cNvPr>
@@ -9547,7 +9547,7 @@
             </a:avLst>
           </a:prstGeom>
           <a:solidFill xmlns:a="http://schemas.openxmlformats.org/drawingml/2006/main">
-            <a:srgbClr val="F3F6FA"/>
+            <a:srgbClr val="FBF7EF"/>
           </a:solidFill>
         </p:spPr>
       </p:sp>
@@ -9556,7 +9556,7 @@
           <p:cNvPr id="5" name="food-metric-card">
             <a:extLst xmlns:a="http://schemas.openxmlformats.org/drawingml/2006/main">
               <a:ext uri="{FF2B5EF4-FFF2-40B4-BE49-F238E27FC236}">
-                <a16:creationId xmlns:a16="http://schemas.microsoft.com/office/drawing/2014/main" id="{4B673F51-C53F-4CBB-A03E-3DE9D0547A80}"/>
+                <a16:creationId xmlns:a16="http://schemas.microsoft.com/office/drawing/2014/main" id="{8889D5DA-460C-4B67-82FC-10612A5A577E}"/>
               </a:ext>
             </a:extLst>
           </p:cNvPr>
@@ -9576,7 +9576,7 @@
             </a:avLst>
           </a:prstGeom>
           <a:solidFill xmlns:a="http://schemas.openxmlformats.org/drawingml/2006/main">
-            <a:srgbClr val="EAF3FF"/>
+            <a:srgbClr val="F1EBFF"/>
           </a:solidFill>
         </p:spPr>
       </p:sp>
@@ -9585,7 +9585,7 @@
           <p:cNvPr id="6" name="food-metric">
             <a:extLst xmlns:a="http://schemas.openxmlformats.org/drawingml/2006/main">
               <a:ext uri="{FF2B5EF4-FFF2-40B4-BE49-F238E27FC236}">
-                <a16:creationId xmlns:a16="http://schemas.microsoft.com/office/drawing/2014/main" id="{3EAE5D22-0728-4243-85E4-45914078B672}"/>
+                <a16:creationId xmlns:a16="http://schemas.microsoft.com/office/drawing/2014/main" id="{8F77F592-7085-4C5B-80C5-A4CF0AFC9AE3}"/>
               </a:ext>
             </a:extLst>
           </p:cNvPr>
@@ -9612,7 +9612,7 @@
             <a:pPr algn="ctr">
               <a:defRPr sz="3975" b="1">
                 <a:solidFill>
-                  <a:srgbClr val="111318"/>
+                  <a:srgbClr val="180D20"/>
                 </a:solidFill>
                 <a:latin typeface="Arial"/>
                 <a:ea typeface="Arial"/>
@@ -9630,7 +9630,7 @@
           <p:cNvPr id="7" name="food-metric-label">
             <a:extLst xmlns:a="http://schemas.openxmlformats.org/drawingml/2006/main">
               <a:ext uri="{FF2B5EF4-FFF2-40B4-BE49-F238E27FC236}">
-                <a16:creationId xmlns:a16="http://schemas.microsoft.com/office/drawing/2014/main" id="{055FEBDA-E621-460E-8762-21A786C00C88}"/>
+                <a16:creationId xmlns:a16="http://schemas.microsoft.com/office/drawing/2014/main" id="{11F72CA4-6051-48E1-9D3E-48A407ED5B25}"/>
               </a:ext>
             </a:extLst>
           </p:cNvPr>
@@ -9657,7 +9657,7 @@
             <a:pPr algn="ctr">
               <a:defRPr sz="1275" b="0">
                 <a:solidFill>
-                  <a:srgbClr val="626A78"/>
+                  <a:srgbClr val="70647A"/>
                 </a:solidFill>
                 <a:latin typeface="Arial"/>
                 <a:ea typeface="Arial"/>
@@ -9675,7 +9675,7 @@
           <p:cNvPr id="8" name="stock-metric-card">
             <a:extLst xmlns:a="http://schemas.openxmlformats.org/drawingml/2006/main">
               <a:ext uri="{FF2B5EF4-FFF2-40B4-BE49-F238E27FC236}">
-                <a16:creationId xmlns:a16="http://schemas.microsoft.com/office/drawing/2014/main" id="{A1FAA8D5-678F-4CFC-AD96-88961B70AB18}"/>
+                <a16:creationId xmlns:a16="http://schemas.microsoft.com/office/drawing/2014/main" id="{57BA6217-BA51-470F-AABF-B66E10DBB9FE}"/>
               </a:ext>
             </a:extLst>
           </p:cNvPr>
@@ -9695,7 +9695,7 @@
             </a:avLst>
           </a:prstGeom>
           <a:solidFill xmlns:a="http://schemas.openxmlformats.org/drawingml/2006/main">
-            <a:srgbClr val="F3F6FA"/>
+            <a:srgbClr val="FBF7EF"/>
           </a:solidFill>
         </p:spPr>
       </p:sp>
@@ -9704,7 +9704,7 @@
           <p:cNvPr id="9" name="stock-metric">
             <a:extLst xmlns:a="http://schemas.openxmlformats.org/drawingml/2006/main">
               <a:ext uri="{FF2B5EF4-FFF2-40B4-BE49-F238E27FC236}">
-                <a16:creationId xmlns:a16="http://schemas.microsoft.com/office/drawing/2014/main" id="{92F90E30-0C80-4DA9-97F5-AECE5ADA2805}"/>
+                <a16:creationId xmlns:a16="http://schemas.microsoft.com/office/drawing/2014/main" id="{A9B278A2-A2ED-45B8-9565-539B4C5BBDC1}"/>
               </a:ext>
             </a:extLst>
           </p:cNvPr>
@@ -9731,7 +9731,7 @@
             <a:pPr algn="ctr">
               <a:defRPr sz="3975" b="1">
                 <a:solidFill>
-                  <a:srgbClr val="111318"/>
+                  <a:srgbClr val="180D20"/>
                 </a:solidFill>
                 <a:latin typeface="Arial"/>
                 <a:ea typeface="Arial"/>
@@ -9749,7 +9749,7 @@
           <p:cNvPr id="10" name="stock-metric-label">
             <a:extLst xmlns:a="http://schemas.openxmlformats.org/drawingml/2006/main">
               <a:ext uri="{FF2B5EF4-FFF2-40B4-BE49-F238E27FC236}">
-                <a16:creationId xmlns:a16="http://schemas.microsoft.com/office/drawing/2014/main" id="{72B7EDA3-652C-40C6-BC58-9B35E544DCA3}"/>
+                <a16:creationId xmlns:a16="http://schemas.microsoft.com/office/drawing/2014/main" id="{1E8E0323-81A4-4EEF-9870-086F17853E5A}"/>
               </a:ext>
             </a:extLst>
           </p:cNvPr>
@@ -9769,14 +9769,14 @@
         </p:spPr>
         <p:txBody>
           <a:bodyPr xmlns:a="http://schemas.openxmlformats.org/drawingml/2006/main" wrap="square" lIns="0" tIns="0" rIns="0" bIns="0" anchor="t">
-            <a:normAutofit fontScale="96021"/>
+            <a:normAutofit fontScale="96103"/>
           </a:bodyPr>
           <a:lstStyle xmlns:a="http://schemas.openxmlformats.org/drawingml/2006/main"/>
           <a:p xmlns:a="http://schemas.openxmlformats.org/drawingml/2006/main">
             <a:pPr algn="ctr">
               <a:defRPr sz="1275" b="0">
                 <a:solidFill>
-                  <a:srgbClr val="626A78"/>
+                  <a:srgbClr val="70647A"/>
                 </a:solidFill>
                 <a:latin typeface="Arial"/>
                 <a:ea typeface="Arial"/>
@@ -9794,7 +9794,7 @@
           <p:cNvPr id="11" name="food-title">
             <a:extLst xmlns:a="http://schemas.openxmlformats.org/drawingml/2006/main">
               <a:ext uri="{FF2B5EF4-FFF2-40B4-BE49-F238E27FC236}">
-                <a16:creationId xmlns:a16="http://schemas.microsoft.com/office/drawing/2014/main" id="{68404119-42EE-4D11-B8FA-52B50A2A3DDC}"/>
+                <a16:creationId xmlns:a16="http://schemas.microsoft.com/office/drawing/2014/main" id="{EDDC12DB-E0BB-4A09-BE14-6C87796A158F}"/>
               </a:ext>
             </a:extLst>
           </p:cNvPr>
@@ -9821,7 +9821,7 @@
             <a:pPr algn="l">
               <a:defRPr sz="1950" b="1">
                 <a:solidFill>
-                  <a:srgbClr val="111318"/>
+                  <a:srgbClr val="180D20"/>
                 </a:solidFill>
                 <a:latin typeface="Arial"/>
                 <a:ea typeface="Arial"/>
@@ -9839,7 +9839,7 @@
           <p:cNvPr id="12" name="food-copy">
             <a:extLst xmlns:a="http://schemas.openxmlformats.org/drawingml/2006/main">
               <a:ext uri="{FF2B5EF4-FFF2-40B4-BE49-F238E27FC236}">
-                <a16:creationId xmlns:a16="http://schemas.microsoft.com/office/drawing/2014/main" id="{8B381734-B53D-465D-9C47-46E3A40C6C9B}"/>
+                <a16:creationId xmlns:a16="http://schemas.microsoft.com/office/drawing/2014/main" id="{13CAA9C8-E5BA-464E-B860-ACDF6057209D}"/>
               </a:ext>
             </a:extLst>
           </p:cNvPr>
@@ -9866,7 +9866,7 @@
             <a:pPr algn="l">
               <a:defRPr sz="1350" b="0">
                 <a:solidFill>
-                  <a:srgbClr val="626A78"/>
+                  <a:srgbClr val="70647A"/>
                 </a:solidFill>
                 <a:latin typeface="Arial"/>
                 <a:ea typeface="Arial"/>
@@ -9884,7 +9884,7 @@
           <p:cNvPr id="13" name="award-strip">
             <a:extLst xmlns:a="http://schemas.openxmlformats.org/drawingml/2006/main">
               <a:ext uri="{FF2B5EF4-FFF2-40B4-BE49-F238E27FC236}">
-                <a16:creationId xmlns:a16="http://schemas.microsoft.com/office/drawing/2014/main" id="{0389B973-3BDC-433B-B423-748DD1EDAA40}"/>
+                <a16:creationId xmlns:a16="http://schemas.microsoft.com/office/drawing/2014/main" id="{708A9C4E-2722-4C57-A4E9-087DD83A071C}"/>
               </a:ext>
             </a:extLst>
           </p:cNvPr>
@@ -9904,7 +9904,7 @@
             </a:avLst>
           </a:prstGeom>
           <a:solidFill xmlns:a="http://schemas.openxmlformats.org/drawingml/2006/main">
-            <a:srgbClr val="3D8DFF"/>
+            <a:srgbClr val="E0B44F"/>
           </a:solidFill>
         </p:spPr>
       </p:sp>
@@ -9913,7 +9913,7 @@
           <p:cNvPr id="14" name="award-text">
             <a:extLst xmlns:a="http://schemas.openxmlformats.org/drawingml/2006/main">
               <a:ext uri="{FF2B5EF4-FFF2-40B4-BE49-F238E27FC236}">
-                <a16:creationId xmlns:a16="http://schemas.microsoft.com/office/drawing/2014/main" id="{B8C0F831-05B8-44AB-A450-FA18C8DCBCCD}"/>
+                <a16:creationId xmlns:a16="http://schemas.microsoft.com/office/drawing/2014/main" id="{8A5E61EB-C735-4958-8953-B6A56AF23575}"/>
               </a:ext>
             </a:extLst>
           </p:cNvPr>
@@ -9958,7 +9958,7 @@
           <p:cNvPr id="15" name="footer-line-8">
             <a:extLst xmlns:a="http://schemas.openxmlformats.org/drawingml/2006/main">
               <a:ext uri="{FF2B5EF4-FFF2-40B4-BE49-F238E27FC236}">
-                <a16:creationId xmlns:a16="http://schemas.microsoft.com/office/drawing/2014/main" id="{F8EB5624-C4AC-475F-8AD0-7D865C23C2F2}"/>
+                <a16:creationId xmlns:a16="http://schemas.microsoft.com/office/drawing/2014/main" id="{8CE349C5-FDB5-442A-AD84-50B9AAF52C9F}"/>
               </a:ext>
             </a:extLst>
           </p:cNvPr>
@@ -9976,7 +9976,7 @@
             <a:avLst/>
           </a:prstGeom>
           <a:solidFill xmlns:a="http://schemas.openxmlformats.org/drawingml/2006/main">
-            <a:srgbClr val="D9E0E9"/>
+            <a:srgbClr val="DED4E6"/>
           </a:solidFill>
         </p:spPr>
       </p:sp>
@@ -9985,7 +9985,7 @@
           <p:cNvPr id="16" name="footer-name-8">
             <a:extLst xmlns:a="http://schemas.openxmlformats.org/drawingml/2006/main">
               <a:ext uri="{FF2B5EF4-FFF2-40B4-BE49-F238E27FC236}">
-                <a16:creationId xmlns:a16="http://schemas.microsoft.com/office/drawing/2014/main" id="{71D59580-CF23-45F5-9C76-A7D9C34B860A}"/>
+                <a16:creationId xmlns:a16="http://schemas.microsoft.com/office/drawing/2014/main" id="{958EDD60-2B2A-4897-BC83-EB4BF0474630}"/>
               </a:ext>
             </a:extLst>
           </p:cNvPr>
@@ -10012,7 +10012,7 @@
             <a:pPr algn="l">
               <a:defRPr sz="825" b="1">
                 <a:solidFill>
-                  <a:srgbClr val="626A78"/>
+                  <a:srgbClr val="70647A"/>
                 </a:solidFill>
                 <a:latin typeface="Arial"/>
                 <a:ea typeface="Arial"/>
@@ -10030,7 +10030,7 @@
           <p:cNvPr id="17" name="footer-page-8">
             <a:extLst xmlns:a="http://schemas.openxmlformats.org/drawingml/2006/main">
               <a:ext uri="{FF2B5EF4-FFF2-40B4-BE49-F238E27FC236}">
-                <a16:creationId xmlns:a16="http://schemas.microsoft.com/office/drawing/2014/main" id="{EC7119FB-1F8B-4757-AA94-BA2E4BB8CEA5}"/>
+                <a16:creationId xmlns:a16="http://schemas.microsoft.com/office/drawing/2014/main" id="{60ACE54D-000F-4787-92E6-D6577C3DDA28}"/>
               </a:ext>
             </a:extLst>
           </p:cNvPr>
@@ -10057,7 +10057,7 @@
             <a:pPr algn="r">
               <a:defRPr sz="900" b="1">
                 <a:solidFill>
-                  <a:srgbClr val="626A78"/>
+                  <a:srgbClr val="70647A"/>
                 </a:solidFill>
                 <a:latin typeface="Arial"/>
                 <a:ea typeface="Arial"/>
@@ -10079,7 +10079,7 @@
           <p:nvPr/>
         </p:nvPicPr>
         <p:blipFill>
-          <a:blip xmlns:r="http://schemas.openxmlformats.org/officeDocument/2006/relationships" xmlns:a="http://schemas.openxmlformats.org/drawingml/2006/main" r:embed="R0228ba0899e74a9d"/>
+          <a:blip xmlns:r="http://schemas.openxmlformats.org/officeDocument/2006/relationships" xmlns:a="http://schemas.openxmlformats.org/drawingml/2006/main" r:embed="R28a9f3ae12a44d8d"/>
           <a:srcRect xmlns:a="http://schemas.openxmlformats.org/drawingml/2006/main" l="0" t="4261" r="0" b="4261"/>
           <a:stretch xmlns:a="http://schemas.openxmlformats.org/drawingml/2006/main">
             <a:fillRect l="0" t="0" r="0" b="0"/>
@@ -10098,7 +10098,7 @@
     </p:spTree>
     <p:extLst>
       <p:ext uri="{BB962C8B-B14F-4D97-AF65-F5344CB8AC3E}">
-        <p14:creationId xmlns:p14="http://schemas.microsoft.com/office/powerpoint/2010/main" val="1914102307"/>
+        <p14:creationId xmlns:p14="http://schemas.microsoft.com/office/powerpoint/2010/main" val="1687731816"/>
       </p:ext>
     </p:extLst>
   </p:cSld>
@@ -10119,10 +10119,10 @@
       </p:grpSpPr>
       <p:sp>
         <p:nvSpPr>
-          <p:cNvPr id="1" name="09-bi-gallery-canvas">
-            <a:extLst xmlns:a="http://schemas.openxmlformats.org/drawingml/2006/main">
-              <a:ext uri="{FF2B5EF4-FFF2-40B4-BE49-F238E27FC236}">
-                <a16:creationId xmlns:a16="http://schemas.microsoft.com/office/drawing/2014/main" id="{19FF8792-11E9-486A-8A52-D7D58EE84EF1}"/>
+          <p:cNvPr id="20" name="09-bi-gallery-canvas">
+            <a:extLst xmlns:a="http://schemas.openxmlformats.org/drawingml/2006/main">
+              <a:ext uri="{FF2B5EF4-FFF2-40B4-BE49-F238E27FC236}">
+                <a16:creationId xmlns:a16="http://schemas.microsoft.com/office/drawing/2014/main" id="{4AE5AD9C-E44B-4239-82EA-8FC5FD51C383}"/>
               </a:ext>
             </a:extLst>
           </p:cNvPr>
@@ -10149,7 +10149,7 @@
           <p:cNvPr id="2" name="eyebrow-9">
             <a:extLst xmlns:a="http://schemas.openxmlformats.org/drawingml/2006/main">
               <a:ext uri="{FF2B5EF4-FFF2-40B4-BE49-F238E27FC236}">
-                <a16:creationId xmlns:a16="http://schemas.microsoft.com/office/drawing/2014/main" id="{2A1A76BC-8109-4B4D-B134-25895F513AB1}"/>
+                <a16:creationId xmlns:a16="http://schemas.microsoft.com/office/drawing/2014/main" id="{A41B6DAE-63BB-4AF9-BE7F-7A363F75F6BC}"/>
               </a:ext>
             </a:extLst>
           </p:cNvPr>
@@ -10176,7 +10176,7 @@
             <a:pPr algn="l">
               <a:defRPr sz="1050" b="1">
                 <a:solidFill>
-                  <a:srgbClr val="1769E0"/>
+                  <a:srgbClr val="6845C6"/>
                 </a:solidFill>
                 <a:latin typeface="Arial"/>
                 <a:ea typeface="Arial"/>
@@ -10194,7 +10194,7 @@
           <p:cNvPr id="3" name="title-9">
             <a:extLst xmlns:a="http://schemas.openxmlformats.org/drawingml/2006/main">
               <a:ext uri="{FF2B5EF4-FFF2-40B4-BE49-F238E27FC236}">
-                <a16:creationId xmlns:a16="http://schemas.microsoft.com/office/drawing/2014/main" id="{25546EA3-3F02-4CE2-A00C-B4321DC622EB}"/>
+                <a16:creationId xmlns:a16="http://schemas.microsoft.com/office/drawing/2014/main" id="{CCA36688-08B2-4B90-9633-4F5711B2B812}"/>
               </a:ext>
             </a:extLst>
           </p:cNvPr>
@@ -10221,7 +10221,7 @@
             <a:pPr algn="l">
               <a:defRPr sz="3225" b="1">
                 <a:solidFill>
-                  <a:srgbClr val="111318"/>
+                  <a:srgbClr val="180D20"/>
                 </a:solidFill>
                 <a:latin typeface="Arial"/>
                 <a:ea typeface="Arial"/>
@@ -10239,7 +10239,7 @@
           <p:cNvPr id="4" name="bi-note">
             <a:extLst xmlns:a="http://schemas.openxmlformats.org/drawingml/2006/main">
               <a:ext uri="{FF2B5EF4-FFF2-40B4-BE49-F238E27FC236}">
-                <a16:creationId xmlns:a16="http://schemas.microsoft.com/office/drawing/2014/main" id="{CE1413D8-DE43-469E-A0DF-61C8DDD79320}"/>
+                <a16:creationId xmlns:a16="http://schemas.microsoft.com/office/drawing/2014/main" id="{CC997CF6-1A61-4003-B4B7-A7D8AA018124}"/>
               </a:ext>
             </a:extLst>
           </p:cNvPr>
@@ -10266,7 +10266,7 @@
             <a:pPr algn="l">
               <a:defRPr sz="1125" b="0">
                 <a:solidFill>
-                  <a:srgbClr val="626A78"/>
+                  <a:srgbClr val="70647A"/>
                 </a:solidFill>
                 <a:latin typeface="Arial"/>
                 <a:ea typeface="Arial"/>
@@ -10284,7 +10284,7 @@
           <p:cNvPr id="5" name="dash-frame-1">
             <a:extLst xmlns:a="http://schemas.openxmlformats.org/drawingml/2006/main">
               <a:ext uri="{FF2B5EF4-FFF2-40B4-BE49-F238E27FC236}">
-                <a16:creationId xmlns:a16="http://schemas.microsoft.com/office/drawing/2014/main" id="{9075C2E3-7825-4733-9EC1-664D4B4B99DA}"/>
+                <a16:creationId xmlns:a16="http://schemas.microsoft.com/office/drawing/2014/main" id="{E5566D89-1340-4281-9130-F10B85D95716}"/>
               </a:ext>
             </a:extLst>
           </p:cNvPr>
@@ -10304,7 +10304,7 @@
             </a:avLst>
           </a:prstGeom>
           <a:solidFill xmlns:a="http://schemas.openxmlformats.org/drawingml/2006/main">
-            <a:srgbClr val="F3F6FA"/>
+            <a:srgbClr val="FBF7EF"/>
           </a:solidFill>
         </p:spPr>
       </p:sp>
@@ -10313,7 +10313,7 @@
           <p:cNvPr id="6" name="dash-frame-2">
             <a:extLst xmlns:a="http://schemas.openxmlformats.org/drawingml/2006/main">
               <a:ext uri="{FF2B5EF4-FFF2-40B4-BE49-F238E27FC236}">
-                <a16:creationId xmlns:a16="http://schemas.microsoft.com/office/drawing/2014/main" id="{4916D493-33C3-494A-857B-1D683F6F04BD}"/>
+                <a16:creationId xmlns:a16="http://schemas.microsoft.com/office/drawing/2014/main" id="{8C656052-ECDC-4A95-9001-749DF49F390E}"/>
               </a:ext>
             </a:extLst>
           </p:cNvPr>
@@ -10333,7 +10333,7 @@
             </a:avLst>
           </a:prstGeom>
           <a:solidFill xmlns:a="http://schemas.openxmlformats.org/drawingml/2006/main">
-            <a:srgbClr val="F3F6FA"/>
+            <a:srgbClr val="FBF7EF"/>
           </a:solidFill>
         </p:spPr>
       </p:sp>
@@ -10342,7 +10342,7 @@
           <p:cNvPr id="7" name="dash-frame-3">
             <a:extLst xmlns:a="http://schemas.openxmlformats.org/drawingml/2006/main">
               <a:ext uri="{FF2B5EF4-FFF2-40B4-BE49-F238E27FC236}">
-                <a16:creationId xmlns:a16="http://schemas.microsoft.com/office/drawing/2014/main" id="{404BABB7-9388-47E8-9296-1A1BDCDB4398}"/>
+                <a16:creationId xmlns:a16="http://schemas.microsoft.com/office/drawing/2014/main" id="{EFA4B472-6CB4-48AE-BFC1-E165DB0122C6}"/>
               </a:ext>
             </a:extLst>
           </p:cNvPr>
@@ -10362,7 +10362,7 @@
             </a:avLst>
           </a:prstGeom>
           <a:solidFill xmlns:a="http://schemas.openxmlformats.org/drawingml/2006/main">
-            <a:srgbClr val="F3F6FA"/>
+            <a:srgbClr val="FBF7EF"/>
           </a:solidFill>
         </p:spPr>
       </p:sp>
@@ -10371,7 +10371,7 @@
           <p:cNvPr id="8" name="dash-title-1">
             <a:extLst xmlns:a="http://schemas.openxmlformats.org/drawingml/2006/main">
               <a:ext uri="{FF2B5EF4-FFF2-40B4-BE49-F238E27FC236}">
-                <a16:creationId xmlns:a16="http://schemas.microsoft.com/office/drawing/2014/main" id="{DBF86D3C-736E-4BB6-9300-A91B210461A6}"/>
+                <a16:creationId xmlns:a16="http://schemas.microsoft.com/office/drawing/2014/main" id="{68B1BF16-CC5A-47BB-8787-C6788BB50486}"/>
               </a:ext>
             </a:extLst>
           </p:cNvPr>
@@ -10398,7 +10398,7 @@
             <a:pPr algn="l">
               <a:defRPr sz="1575" b="1">
                 <a:solidFill>
-                  <a:srgbClr val="111318"/>
+                  <a:srgbClr val="180D20"/>
                 </a:solidFill>
                 <a:latin typeface="Arial"/>
                 <a:ea typeface="Arial"/>
@@ -10416,7 +10416,7 @@
           <p:cNvPr id="9" name="dash-caption-1">
             <a:extLst xmlns:a="http://schemas.openxmlformats.org/drawingml/2006/main">
               <a:ext uri="{FF2B5EF4-FFF2-40B4-BE49-F238E27FC236}">
-                <a16:creationId xmlns:a16="http://schemas.microsoft.com/office/drawing/2014/main" id="{66A729FB-7D45-41A0-A825-AFDCEE8BF525}"/>
+                <a16:creationId xmlns:a16="http://schemas.microsoft.com/office/drawing/2014/main" id="{18016C80-4499-4915-A221-A9DBC1844D65}"/>
               </a:ext>
             </a:extLst>
           </p:cNvPr>
@@ -10443,7 +10443,7 @@
             <a:pPr algn="l">
               <a:defRPr sz="1200" b="0">
                 <a:solidFill>
-                  <a:srgbClr val="626A78"/>
+                  <a:srgbClr val="70647A"/>
                 </a:solidFill>
                 <a:latin typeface="Arial"/>
                 <a:ea typeface="Arial"/>
@@ -10461,7 +10461,7 @@
           <p:cNvPr id="10" name="dash-title-2">
             <a:extLst xmlns:a="http://schemas.openxmlformats.org/drawingml/2006/main">
               <a:ext uri="{FF2B5EF4-FFF2-40B4-BE49-F238E27FC236}">
-                <a16:creationId xmlns:a16="http://schemas.microsoft.com/office/drawing/2014/main" id="{7C1B1266-95F6-42E6-893C-24BE6290C917}"/>
+                <a16:creationId xmlns:a16="http://schemas.microsoft.com/office/drawing/2014/main" id="{2945D35B-CBCB-4637-8546-639DC5F7A348}"/>
               </a:ext>
             </a:extLst>
           </p:cNvPr>
@@ -10488,7 +10488,7 @@
             <a:pPr algn="l">
               <a:defRPr sz="1575" b="1">
                 <a:solidFill>
-                  <a:srgbClr val="111318"/>
+                  <a:srgbClr val="180D20"/>
                 </a:solidFill>
                 <a:latin typeface="Arial"/>
                 <a:ea typeface="Arial"/>
@@ -10506,7 +10506,7 @@
           <p:cNvPr id="11" name="dash-caption-2">
             <a:extLst xmlns:a="http://schemas.openxmlformats.org/drawingml/2006/main">
               <a:ext uri="{FF2B5EF4-FFF2-40B4-BE49-F238E27FC236}">
-                <a16:creationId xmlns:a16="http://schemas.microsoft.com/office/drawing/2014/main" id="{6ABC7572-4D99-4AE0-B84E-699353C4E69F}"/>
+                <a16:creationId xmlns:a16="http://schemas.microsoft.com/office/drawing/2014/main" id="{211ED5B7-3074-46B0-8117-B4D650B45A31}"/>
               </a:ext>
             </a:extLst>
           </p:cNvPr>
@@ -10533,7 +10533,7 @@
             <a:pPr algn="l">
               <a:defRPr sz="1200" b="0">
                 <a:solidFill>
-                  <a:srgbClr val="626A78"/>
+                  <a:srgbClr val="70647A"/>
                 </a:solidFill>
                 <a:latin typeface="Arial"/>
                 <a:ea typeface="Arial"/>
@@ -10551,7 +10551,7 @@
           <p:cNvPr id="12" name="dash-title-3">
             <a:extLst xmlns:a="http://schemas.openxmlformats.org/drawingml/2006/main">
               <a:ext uri="{FF2B5EF4-FFF2-40B4-BE49-F238E27FC236}">
-                <a16:creationId xmlns:a16="http://schemas.microsoft.com/office/drawing/2014/main" id="{C19F5C10-8236-467E-B16F-5CA17D79A73F}"/>
+                <a16:creationId xmlns:a16="http://schemas.microsoft.com/office/drawing/2014/main" id="{ADA3493B-DB87-446E-BECD-8D2538E7AEC4}"/>
               </a:ext>
             </a:extLst>
           </p:cNvPr>
@@ -10578,7 +10578,7 @@
             <a:pPr algn="l">
               <a:defRPr sz="1575" b="1">
                 <a:solidFill>
-                  <a:srgbClr val="111318"/>
+                  <a:srgbClr val="180D20"/>
                 </a:solidFill>
                 <a:latin typeface="Arial"/>
                 <a:ea typeface="Arial"/>
@@ -10596,7 +10596,7 @@
           <p:cNvPr id="13" name="dash-caption-3">
             <a:extLst xmlns:a="http://schemas.openxmlformats.org/drawingml/2006/main">
               <a:ext uri="{FF2B5EF4-FFF2-40B4-BE49-F238E27FC236}">
-                <a16:creationId xmlns:a16="http://schemas.microsoft.com/office/drawing/2014/main" id="{EB7C3E66-517F-453B-A00C-F9D82AD0A41E}"/>
+                <a16:creationId xmlns:a16="http://schemas.microsoft.com/office/drawing/2014/main" id="{AB6F2F2C-D9CF-4E97-8245-1BE33405ADAE}"/>
               </a:ext>
             </a:extLst>
           </p:cNvPr>
@@ -10623,7 +10623,7 @@
             <a:pPr algn="l">
               <a:defRPr sz="1200" b="0">
                 <a:solidFill>
-                  <a:srgbClr val="626A78"/>
+                  <a:srgbClr val="70647A"/>
                 </a:solidFill>
                 <a:latin typeface="Arial"/>
                 <a:ea typeface="Arial"/>
@@ -10641,7 +10641,7 @@
           <p:cNvPr id="14" name="footer-line-9">
             <a:extLst xmlns:a="http://schemas.openxmlformats.org/drawingml/2006/main">
               <a:ext uri="{FF2B5EF4-FFF2-40B4-BE49-F238E27FC236}">
-                <a16:creationId xmlns:a16="http://schemas.microsoft.com/office/drawing/2014/main" id="{A5F0918C-79A0-426C-93C0-D8BBF379F848}"/>
+                <a16:creationId xmlns:a16="http://schemas.microsoft.com/office/drawing/2014/main" id="{879A5A0F-EC30-494C-B26B-7068F581BE52}"/>
               </a:ext>
             </a:extLst>
           </p:cNvPr>
@@ -10659,7 +10659,7 @@
             <a:avLst/>
           </a:prstGeom>
           <a:solidFill xmlns:a="http://schemas.openxmlformats.org/drawingml/2006/main">
-            <a:srgbClr val="D9E0E9"/>
+            <a:srgbClr val="DED4E6"/>
           </a:solidFill>
         </p:spPr>
       </p:sp>
@@ -10668,7 +10668,7 @@
           <p:cNvPr id="15" name="footer-name-9">
             <a:extLst xmlns:a="http://schemas.openxmlformats.org/drawingml/2006/main">
               <a:ext uri="{FF2B5EF4-FFF2-40B4-BE49-F238E27FC236}">
-                <a16:creationId xmlns:a16="http://schemas.microsoft.com/office/drawing/2014/main" id="{0F3D0DED-7AD0-44CB-AC49-593566DD1683}"/>
+                <a16:creationId xmlns:a16="http://schemas.microsoft.com/office/drawing/2014/main" id="{7108B7EA-B966-4428-836A-A7D9A61A700D}"/>
               </a:ext>
             </a:extLst>
           </p:cNvPr>
@@ -10695,7 +10695,7 @@
             <a:pPr algn="l">
               <a:defRPr sz="825" b="1">
                 <a:solidFill>
-                  <a:srgbClr val="626A78"/>
+                  <a:srgbClr val="70647A"/>
                 </a:solidFill>
                 <a:latin typeface="Arial"/>
                 <a:ea typeface="Arial"/>
@@ -10713,7 +10713,7 @@
           <p:cNvPr id="16" name="footer-page-9">
             <a:extLst xmlns:a="http://schemas.openxmlformats.org/drawingml/2006/main">
               <a:ext uri="{FF2B5EF4-FFF2-40B4-BE49-F238E27FC236}">
-                <a16:creationId xmlns:a16="http://schemas.microsoft.com/office/drawing/2014/main" id="{668A67A2-4FD8-41B7-8E93-27B0A711706B}"/>
+                <a16:creationId xmlns:a16="http://schemas.microsoft.com/office/drawing/2014/main" id="{C1B58406-6712-4362-85B9-C4B974EE012A}"/>
               </a:ext>
             </a:extLst>
           </p:cNvPr>
@@ -10740,7 +10740,7 @@
             <a:pPr algn="r">
               <a:defRPr sz="900" b="1">
                 <a:solidFill>
-                  <a:srgbClr val="626A78"/>
+                  <a:srgbClr val="70647A"/>
                 </a:solidFill>
                 <a:latin typeface="Arial"/>
                 <a:ea typeface="Arial"/>
@@ -10762,7 +10762,7 @@
           <p:nvPr/>
         </p:nvPicPr>
         <p:blipFill>
-          <a:blip xmlns:r="http://schemas.openxmlformats.org/officeDocument/2006/relationships" xmlns:a="http://schemas.openxmlformats.org/drawingml/2006/main" r:embed="R5d83bd007fd84362"/>
+          <a:blip xmlns:r="http://schemas.openxmlformats.org/officeDocument/2006/relationships" xmlns:a="http://schemas.openxmlformats.org/drawingml/2006/main" r:embed="R727b4417622e492b"/>
           <a:srcRect xmlns:a="http://schemas.openxmlformats.org/drawingml/2006/main" l="10463" t="0" r="10463" b="0"/>
           <a:stretch xmlns:a="http://schemas.openxmlformats.org/drawingml/2006/main">
             <a:fillRect l="0" t="0" r="0" b="0"/>
@@ -10787,7 +10787,7 @@
           <p:nvPr/>
         </p:nvPicPr>
         <p:blipFill>
-          <a:blip xmlns:r="http://schemas.openxmlformats.org/officeDocument/2006/relationships" xmlns:a="http://schemas.openxmlformats.org/drawingml/2006/main" r:embed="R7390537c30764e28"/>
+          <a:blip xmlns:r="http://schemas.openxmlformats.org/officeDocument/2006/relationships" xmlns:a="http://schemas.openxmlformats.org/drawingml/2006/main" r:embed="Rac864c6773924795"/>
           <a:srcRect xmlns:a="http://schemas.openxmlformats.org/drawingml/2006/main" l="0" t="2817" r="0" b="2817"/>
           <a:stretch xmlns:a="http://schemas.openxmlformats.org/drawingml/2006/main">
             <a:fillRect l="0" t="0" r="0" b="0"/>
@@ -10812,7 +10812,7 @@
           <p:nvPr/>
         </p:nvPicPr>
         <p:blipFill>
-          <a:blip xmlns:r="http://schemas.openxmlformats.org/officeDocument/2006/relationships" xmlns:a="http://schemas.openxmlformats.org/drawingml/2006/main" r:embed="R44db98baeb9f42f1"/>
+          <a:blip xmlns:r="http://schemas.openxmlformats.org/officeDocument/2006/relationships" xmlns:a="http://schemas.openxmlformats.org/drawingml/2006/main" r:embed="R4ce175943bbe423f"/>
           <a:srcRect xmlns:a="http://schemas.openxmlformats.org/drawingml/2006/main" l="0" t="2500" r="0" b="2500"/>
           <a:stretch xmlns:a="http://schemas.openxmlformats.org/drawingml/2006/main">
             <a:fillRect l="0" t="0" r="0" b="0"/>
@@ -10831,7 +10831,7 @@
     </p:spTree>
     <p:extLst>
       <p:ext uri="{BB962C8B-B14F-4D97-AF65-F5344CB8AC3E}">
-        <p14:creationId xmlns:p14="http://schemas.microsoft.com/office/powerpoint/2010/main" val="278802214"/>
+        <p14:creationId xmlns:p14="http://schemas.microsoft.com/office/powerpoint/2010/main" val="356870525"/>
       </p:ext>
     </p:extLst>
   </p:cSld>

--- a/outputs/Muhammad_Ali_Akbar_Al-Qahri_Portfolio.pptx
+++ b/outputs/Muhammad_Ali_Akbar_Al-Qahri_Portfolio.pptx
@@ -2,23 +2,23 @@
 <file path=ppt/presentation.xml><?xml version="1.0" encoding="utf-8"?>
 <p:presentation xmlns:p="http://schemas.openxmlformats.org/presentationml/2006/main">
   <p:sldMasterIdLst>
-    <p:sldMasterId xmlns:r="http://schemas.openxmlformats.org/officeDocument/2006/relationships" id="2147483648" r:id="Rb3aecc7f327443c8"/>
+    <p:sldMasterId xmlns:r="http://schemas.openxmlformats.org/officeDocument/2006/relationships" id="2147483648" r:id="R86ae9cf3ab614c21"/>
   </p:sldMasterIdLst>
   <p:notesMasterIdLst>
-    <p:notesMasterId xmlns:r="http://schemas.openxmlformats.org/officeDocument/2006/relationships" r:id="Rb8767244bdd941b9"/>
+    <p:notesMasterId xmlns:r="http://schemas.openxmlformats.org/officeDocument/2006/relationships" r:id="R5de9fbe5c35d4cdf"/>
   </p:notesMasterIdLst>
   <p:sldIdLst>
-    <p:sldId xmlns:r="http://schemas.openxmlformats.org/officeDocument/2006/relationships" id="256" r:id="R8227a1aec2d04c52"/>
-    <p:sldId xmlns:r="http://schemas.openxmlformats.org/officeDocument/2006/relationships" id="257" r:id="R83e922ac714d4b42"/>
-    <p:sldId xmlns:r="http://schemas.openxmlformats.org/officeDocument/2006/relationships" id="258" r:id="Rb7a700d923634d72"/>
-    <p:sldId xmlns:r="http://schemas.openxmlformats.org/officeDocument/2006/relationships" id="259" r:id="R40ec7691f0e34268"/>
-    <p:sldId xmlns:r="http://schemas.openxmlformats.org/officeDocument/2006/relationships" id="260" r:id="R85528466862f4723"/>
-    <p:sldId xmlns:r="http://schemas.openxmlformats.org/officeDocument/2006/relationships" id="261" r:id="Rb403ff9b6dc44031"/>
-    <p:sldId xmlns:r="http://schemas.openxmlformats.org/officeDocument/2006/relationships" id="262" r:id="R063485ee2a2c4fb4"/>
-    <p:sldId xmlns:r="http://schemas.openxmlformats.org/officeDocument/2006/relationships" id="263" r:id="R1c7215f4d5e640fb"/>
-    <p:sldId xmlns:r="http://schemas.openxmlformats.org/officeDocument/2006/relationships" id="264" r:id="R58d6f86db66a4e45"/>
-    <p:sldId xmlns:r="http://schemas.openxmlformats.org/officeDocument/2006/relationships" id="265" r:id="R8e55402a7a4a4676"/>
-    <p:sldId xmlns:r="http://schemas.openxmlformats.org/officeDocument/2006/relationships" id="266" r:id="R29514ac0a21d463d"/>
+    <p:sldId xmlns:r="http://schemas.openxmlformats.org/officeDocument/2006/relationships" id="256" r:id="R593d38640c2c4815"/>
+    <p:sldId xmlns:r="http://schemas.openxmlformats.org/officeDocument/2006/relationships" id="257" r:id="Ra6e5a523b94146fd"/>
+    <p:sldId xmlns:r="http://schemas.openxmlformats.org/officeDocument/2006/relationships" id="258" r:id="R9c3a40b21b904cb8"/>
+    <p:sldId xmlns:r="http://schemas.openxmlformats.org/officeDocument/2006/relationships" id="259" r:id="Rf67c53b0d0424fd2"/>
+    <p:sldId xmlns:r="http://schemas.openxmlformats.org/officeDocument/2006/relationships" id="260" r:id="R266f217c20354e61"/>
+    <p:sldId xmlns:r="http://schemas.openxmlformats.org/officeDocument/2006/relationships" id="261" r:id="Rc33ab78779fc42a7"/>
+    <p:sldId xmlns:r="http://schemas.openxmlformats.org/officeDocument/2006/relationships" id="262" r:id="Ra8d450b067054f78"/>
+    <p:sldId xmlns:r="http://schemas.openxmlformats.org/officeDocument/2006/relationships" id="263" r:id="Rf6ebf4c091364269"/>
+    <p:sldId xmlns:r="http://schemas.openxmlformats.org/officeDocument/2006/relationships" id="264" r:id="R63b6217a886940e2"/>
+    <p:sldId xmlns:r="http://schemas.openxmlformats.org/officeDocument/2006/relationships" id="265" r:id="R222af0f01ded42b2"/>
+    <p:sldId xmlns:r="http://schemas.openxmlformats.org/officeDocument/2006/relationships" id="266" r:id="R5c5b20d4cd6245d3"/>
   </p:sldIdLst>
   <p:sldSz cx="12192000" cy="6858000"/>
   <p:notesSz cx="6858000" cy="9144000"/>
@@ -1271,7 +1271,7 @@
   </p:cSld>
   <p:clrMap bg1="lt1" tx1="dk1" bg2="lt2" tx2="dk2" accent1="accent1" accent2="accent2" accent3="accent3" accent4="accent4" accent5="accent5" accent6="accent6" hlink="hlink" folHlink="folHlink"/>
   <p:sldLayoutIdLst>
-    <p:sldLayoutId xmlns:r="http://schemas.openxmlformats.org/officeDocument/2006/relationships" id="2147483649" r:id="Rc8664c03651f4629"/>
+    <p:sldLayoutId xmlns:r="http://schemas.openxmlformats.org/officeDocument/2006/relationships" id="2147483649" r:id="Rfea203bc5bed4652"/>
   </p:sldLayoutIdLst>
   <p:txStyles>
     <p:titleStyle>
@@ -1812,10 +1812,10 @@
       </p:grpSpPr>
       <p:sp>
         <p:nvSpPr>
-          <p:cNvPr id="21" name="01-cover-canvas">
-            <a:extLst xmlns:a="http://schemas.openxmlformats.org/drawingml/2006/main">
-              <a:ext uri="{FF2B5EF4-FFF2-40B4-BE49-F238E27FC236}">
-                <a16:creationId xmlns:a16="http://schemas.microsoft.com/office/drawing/2014/main" id="{874E0670-C662-42E7-B453-32A943B1D28F}"/>
+          <p:cNvPr id="30" name="01-cover-canvas">
+            <a:extLst xmlns:a="http://schemas.openxmlformats.org/drawingml/2006/main">
+              <a:ext uri="{FF2B5EF4-FFF2-40B4-BE49-F238E27FC236}">
+                <a16:creationId xmlns:a16="http://schemas.microsoft.com/office/drawing/2014/main" id="{07249081-A0AA-4F32-800F-8E9910C5EAEB}"/>
               </a:ext>
             </a:extLst>
           </p:cNvPr>
@@ -1833,16 +1833,16 @@
             <a:avLst/>
           </a:prstGeom>
           <a:solidFill xmlns:a="http://schemas.openxmlformats.org/drawingml/2006/main">
-            <a:srgbClr val="FFFFFF"/>
-          </a:solidFill>
-        </p:spPr>
-      </p:sp>
-      <p:sp>
-        <p:nvSpPr>
-          <p:cNvPr id="2" name="cover-blue-rail">
-            <a:extLst xmlns:a="http://schemas.openxmlformats.org/drawingml/2006/main">
-              <a:ext uri="{FF2B5EF4-FFF2-40B4-BE49-F238E27FC236}">
-                <a16:creationId xmlns:a16="http://schemas.microsoft.com/office/drawing/2014/main" id="{628FB84B-82C9-4022-B5FC-B75E39F96C3E}"/>
+            <a:srgbClr val="120B0A"/>
+          </a:solidFill>
+        </p:spPr>
+      </p:sp>
+      <p:sp>
+        <p:nvSpPr>
+          <p:cNvPr id="2" name="01-cover-edge-gold">
+            <a:extLst xmlns:a="http://schemas.openxmlformats.org/drawingml/2006/main">
+              <a:ext uri="{FF2B5EF4-FFF2-40B4-BE49-F238E27FC236}">
+                <a16:creationId xmlns:a16="http://schemas.microsoft.com/office/drawing/2014/main" id="{624C6AF7-3B15-41F9-98D8-8E0C390B587E}"/>
               </a:ext>
             </a:extLst>
           </p:cNvPr>
@@ -1854,34 +1854,88 @@
         <p:spPr>
           <a:xfrm xmlns:a="http://schemas.openxmlformats.org/drawingml/2006/main">
             <a:off x="0" y="0"/>
-            <a:ext cx="171450" cy="6858000"/>
-          </a:xfrm>
-          <a:prstGeom xmlns:a="http://schemas.openxmlformats.org/drawingml/2006/main" prst="rect">
-            <a:avLst/>
-          </a:prstGeom>
-          <a:solidFill xmlns:a="http://schemas.openxmlformats.org/drawingml/2006/main">
-            <a:srgbClr val="E0B44F"/>
-          </a:solidFill>
-        </p:spPr>
-      </p:sp>
-      <p:sp>
-        <p:nvSpPr>
-          <p:cNvPr id="3" name="cover-kicker">
-            <a:extLst xmlns:a="http://schemas.openxmlformats.org/drawingml/2006/main">
-              <a:ext uri="{FF2B5EF4-FFF2-40B4-BE49-F238E27FC236}">
-                <a16:creationId xmlns:a16="http://schemas.microsoft.com/office/drawing/2014/main" id="{1DE9DE61-F9B6-4717-AE27-8E6249E96E88}"/>
-              </a:ext>
-            </a:extLst>
-          </p:cNvPr>
-          <p:cNvSpPr>
-            <a:spLocks xmlns:a="http://schemas.openxmlformats.org/drawingml/2006/main" noGrp="1"/>
-          </p:cNvSpPr>
-          <p:nvPr/>
-        </p:nvSpPr>
-        <p:spPr>
-          <a:xfrm xmlns:a="http://schemas.openxmlformats.org/drawingml/2006/main">
-            <a:off x="552450" y="514350"/>
-            <a:ext cx="6572250" cy="228600"/>
+            <a:ext cx="38100" cy="2286000"/>
+          </a:xfrm>
+          <a:prstGeom xmlns:a="http://schemas.openxmlformats.org/drawingml/2006/main" prst="rect">
+            <a:avLst/>
+          </a:prstGeom>
+          <a:solidFill xmlns:a="http://schemas.openxmlformats.org/drawingml/2006/main">
+            <a:srgbClr val="F6C453"/>
+          </a:solidFill>
+        </p:spPr>
+      </p:sp>
+      <p:sp>
+        <p:nvSpPr>
+          <p:cNvPr id="3" name="01-cover-edge-coral">
+            <a:extLst xmlns:a="http://schemas.openxmlformats.org/drawingml/2006/main">
+              <a:ext uri="{FF2B5EF4-FFF2-40B4-BE49-F238E27FC236}">
+                <a16:creationId xmlns:a16="http://schemas.microsoft.com/office/drawing/2014/main" id="{E91AD339-66AA-4859-9F2E-A68BEDF33B6F}"/>
+              </a:ext>
+            </a:extLst>
+          </p:cNvPr>
+          <p:cNvSpPr>
+            <a:spLocks xmlns:a="http://schemas.openxmlformats.org/drawingml/2006/main" noGrp="1"/>
+          </p:cNvSpPr>
+          <p:nvPr/>
+        </p:nvSpPr>
+        <p:spPr>
+          <a:xfrm xmlns:a="http://schemas.openxmlformats.org/drawingml/2006/main">
+            <a:off x="0" y="2286000"/>
+            <a:ext cx="38100" cy="2286000"/>
+          </a:xfrm>
+          <a:prstGeom xmlns:a="http://schemas.openxmlformats.org/drawingml/2006/main" prst="rect">
+            <a:avLst/>
+          </a:prstGeom>
+          <a:solidFill xmlns:a="http://schemas.openxmlformats.org/drawingml/2006/main">
+            <a:srgbClr val="FF7A59"/>
+          </a:solidFill>
+        </p:spPr>
+      </p:sp>
+      <p:sp>
+        <p:nvSpPr>
+          <p:cNvPr id="4" name="01-cover-edge-teal">
+            <a:extLst xmlns:a="http://schemas.openxmlformats.org/drawingml/2006/main">
+              <a:ext uri="{FF2B5EF4-FFF2-40B4-BE49-F238E27FC236}">
+                <a16:creationId xmlns:a16="http://schemas.microsoft.com/office/drawing/2014/main" id="{C029E0CC-1582-4AE5-A37B-D2704E445EA6}"/>
+              </a:ext>
+            </a:extLst>
+          </p:cNvPr>
+          <p:cNvSpPr>
+            <a:spLocks xmlns:a="http://schemas.openxmlformats.org/drawingml/2006/main" noGrp="1"/>
+          </p:cNvSpPr>
+          <p:nvPr/>
+        </p:nvSpPr>
+        <p:spPr>
+          <a:xfrm xmlns:a="http://schemas.openxmlformats.org/drawingml/2006/main">
+            <a:off x="0" y="4572000"/>
+            <a:ext cx="38100" cy="2286000"/>
+          </a:xfrm>
+          <a:prstGeom xmlns:a="http://schemas.openxmlformats.org/drawingml/2006/main" prst="rect">
+            <a:avLst/>
+          </a:prstGeom>
+          <a:solidFill xmlns:a="http://schemas.openxmlformats.org/drawingml/2006/main">
+            <a:srgbClr val="5EEAD4"/>
+          </a:solidFill>
+        </p:spPr>
+      </p:sp>
+      <p:sp>
+        <p:nvSpPr>
+          <p:cNvPr id="5" name="cover-kicker">
+            <a:extLst xmlns:a="http://schemas.openxmlformats.org/drawingml/2006/main">
+              <a:ext uri="{FF2B5EF4-FFF2-40B4-BE49-F238E27FC236}">
+                <a16:creationId xmlns:a16="http://schemas.microsoft.com/office/drawing/2014/main" id="{85986C85-AAF5-48EF-BBF1-CFD58528E0DE}"/>
+              </a:ext>
+            </a:extLst>
+          </p:cNvPr>
+          <p:cNvSpPr>
+            <a:spLocks xmlns:a="http://schemas.openxmlformats.org/drawingml/2006/main" noGrp="1"/>
+          </p:cNvSpPr>
+          <p:nvPr/>
+        </p:nvSpPr>
+        <p:spPr>
+          <a:xfrm xmlns:a="http://schemas.openxmlformats.org/drawingml/2006/main">
+            <a:off x="514350" y="457200"/>
+            <a:ext cx="5429250" cy="228600"/>
           </a:xfrm>
           <a:prstGeom xmlns:a="http://schemas.openxmlformats.org/drawingml/2006/main" prst="rect">
             <a:avLst/>
@@ -1896,37 +1950,37 @@
             <a:pPr algn="l">
               <a:defRPr sz="1050" b="1">
                 <a:solidFill>
-                  <a:srgbClr val="6845C6"/>
-                </a:solidFill>
-                <a:latin typeface="Arial"/>
-                <a:ea typeface="Arial"/>
-                <a:cs typeface="Arial"/>
-              </a:defRPr>
-            </a:pPr>
-            <a:r>
-              <a:t>DATA ANALYST  ·  DATA SCIENTIST  ·  DATABASE ENGINEER</a:t>
-            </a:r>
-          </a:p>
-        </p:txBody>
-      </p:sp>
-      <p:sp>
-        <p:nvSpPr>
-          <p:cNvPr id="4" name="cover-title">
-            <a:extLst xmlns:a="http://schemas.openxmlformats.org/drawingml/2006/main">
-              <a:ext uri="{FF2B5EF4-FFF2-40B4-BE49-F238E27FC236}">
-                <a16:creationId xmlns:a16="http://schemas.microsoft.com/office/drawing/2014/main" id="{77E19648-E717-443B-8F94-6103D5793B48}"/>
-              </a:ext>
-            </a:extLst>
-          </p:cNvPr>
-          <p:cNvSpPr>
-            <a:spLocks xmlns:a="http://schemas.openxmlformats.org/drawingml/2006/main" noGrp="1"/>
-          </p:cNvSpPr>
-          <p:nvPr/>
-        </p:nvSpPr>
-        <p:spPr>
-          <a:xfrm xmlns:a="http://schemas.openxmlformats.org/drawingml/2006/main">
-            <a:off x="533400" y="1104900"/>
-            <a:ext cx="6572250" cy="1638300"/>
+                  <a:srgbClr val="F6C453"/>
+                </a:solidFill>
+                <a:latin typeface="Consolas"/>
+                <a:ea typeface="Consolas"/>
+                <a:cs typeface="Consolas"/>
+              </a:defRPr>
+            </a:pPr>
+            <a:r>
+              <a:t>~/ SUNSET SIGNAL  /  DATA INTELLIGENCE</a:t>
+            </a:r>
+          </a:p>
+        </p:txBody>
+      </p:sp>
+      <p:sp>
+        <p:nvSpPr>
+          <p:cNvPr id="6" name="cover-title">
+            <a:extLst xmlns:a="http://schemas.openxmlformats.org/drawingml/2006/main">
+              <a:ext uri="{FF2B5EF4-FFF2-40B4-BE49-F238E27FC236}">
+                <a16:creationId xmlns:a16="http://schemas.microsoft.com/office/drawing/2014/main" id="{424F1659-C2AC-4DBC-8411-385D97555C7D}"/>
+              </a:ext>
+            </a:extLst>
+          </p:cNvPr>
+          <p:cNvSpPr>
+            <a:spLocks xmlns:a="http://schemas.openxmlformats.org/drawingml/2006/main" noGrp="1"/>
+          </p:cNvSpPr>
+          <p:nvPr/>
+        </p:nvSpPr>
+        <p:spPr>
+          <a:xfrm xmlns:a="http://schemas.openxmlformats.org/drawingml/2006/main">
+            <a:off x="514350" y="1066800"/>
+            <a:ext cx="5095875" cy="1638300"/>
           </a:xfrm>
           <a:prstGeom xmlns:a="http://schemas.openxmlformats.org/drawingml/2006/main" prst="rect">
             <a:avLst/>
@@ -1939,13 +1993,13 @@
           <a:lstStyle xmlns:a="http://schemas.openxmlformats.org/drawingml/2006/main"/>
           <a:p xmlns:a="http://schemas.openxmlformats.org/drawingml/2006/main">
             <a:pPr algn="l">
-              <a:defRPr sz="4650" b="1">
-                <a:solidFill>
-                  <a:srgbClr val="180D20"/>
-                </a:solidFill>
-                <a:latin typeface="Arial"/>
-                <a:ea typeface="Arial"/>
-                <a:cs typeface="Arial"/>
+              <a:defRPr sz="4350" b="1">
+                <a:solidFill>
+                  <a:srgbClr val="FFF7ED"/>
+                </a:solidFill>
+                <a:latin typeface="Aptos"/>
+                <a:ea typeface="Aptos"/>
+                <a:cs typeface="Aptos"/>
               </a:defRPr>
             </a:pPr>
             <a:r>
@@ -1957,22 +2011,22 @@
       </p:sp>
       <p:sp>
         <p:nvSpPr>
-          <p:cNvPr id="5" name="cover-subtitle">
-            <a:extLst xmlns:a="http://schemas.openxmlformats.org/drawingml/2006/main">
-              <a:ext uri="{FF2B5EF4-FFF2-40B4-BE49-F238E27FC236}">
-                <a16:creationId xmlns:a16="http://schemas.microsoft.com/office/drawing/2014/main" id="{7CF40701-CCD7-42FF-B82F-2EC68E7D5A87}"/>
-              </a:ext>
-            </a:extLst>
-          </p:cNvPr>
-          <p:cNvSpPr>
-            <a:spLocks xmlns:a="http://schemas.openxmlformats.org/drawingml/2006/main" noGrp="1"/>
-          </p:cNvSpPr>
-          <p:nvPr/>
-        </p:nvSpPr>
-        <p:spPr>
-          <a:xfrm xmlns:a="http://schemas.openxmlformats.org/drawingml/2006/main">
-            <a:off x="571500" y="2924175"/>
-            <a:ext cx="6000750" cy="571500"/>
+          <p:cNvPr id="7" name="cover-subtitle">
+            <a:extLst xmlns:a="http://schemas.openxmlformats.org/drawingml/2006/main">
+              <a:ext uri="{FF2B5EF4-FFF2-40B4-BE49-F238E27FC236}">
+                <a16:creationId xmlns:a16="http://schemas.microsoft.com/office/drawing/2014/main" id="{43E3639B-866C-46D1-9696-C9099F5EFE5B}"/>
+              </a:ext>
+            </a:extLst>
+          </p:cNvPr>
+          <p:cNvSpPr>
+            <a:spLocks xmlns:a="http://schemas.openxmlformats.org/drawingml/2006/main" noGrp="1"/>
+          </p:cNvSpPr>
+          <p:nvPr/>
+        </p:nvSpPr>
+        <p:spPr>
+          <a:xfrm xmlns:a="http://schemas.openxmlformats.org/drawingml/2006/main">
+            <a:off x="552450" y="2924175"/>
+            <a:ext cx="4953000" cy="571500"/>
           </a:xfrm>
           <a:prstGeom xmlns:a="http://schemas.openxmlformats.org/drawingml/2006/main" prst="rect">
             <a:avLst/>
@@ -1985,13 +2039,13 @@
           <a:lstStyle xmlns:a="http://schemas.openxmlformats.org/drawingml/2006/main"/>
           <a:p xmlns:a="http://schemas.openxmlformats.org/drawingml/2006/main">
             <a:pPr algn="l">
-              <a:defRPr sz="1725" b="0">
-                <a:solidFill>
-                  <a:srgbClr val="70647A"/>
-                </a:solidFill>
-                <a:latin typeface="Arial"/>
-                <a:ea typeface="Arial"/>
-                <a:cs typeface="Arial"/>
+              <a:defRPr sz="1575" b="0">
+                <a:solidFill>
+                  <a:srgbClr val="B9A59B"/>
+                </a:solidFill>
+                <a:latin typeface="Aptos"/>
+                <a:ea typeface="Aptos"/>
+                <a:cs typeface="Aptos"/>
               </a:defRPr>
             </a:pPr>
             <a:r>
@@ -2002,21 +2056,21 @@
       </p:sp>
       <p:sp>
         <p:nvSpPr>
-          <p:cNvPr id="6" name="cover-pill-1-bg">
-            <a:extLst xmlns:a="http://schemas.openxmlformats.org/drawingml/2006/main">
-              <a:ext uri="{FF2B5EF4-FFF2-40B4-BE49-F238E27FC236}">
-                <a16:creationId xmlns:a16="http://schemas.microsoft.com/office/drawing/2014/main" id="{E7BE3185-E624-4ECD-97A1-6A8F4268266E}"/>
-              </a:ext>
-            </a:extLst>
-          </p:cNvPr>
-          <p:cNvSpPr>
-            <a:spLocks xmlns:a="http://schemas.openxmlformats.org/drawingml/2006/main" noGrp="1"/>
-          </p:cNvSpPr>
-          <p:nvPr/>
-        </p:nvSpPr>
-        <p:spPr>
-          <a:xfrm xmlns:a="http://schemas.openxmlformats.org/drawingml/2006/main">
-            <a:off x="552450" y="3762375"/>
+          <p:cNvPr id="8" name="cover-pill-1-bg">
+            <a:extLst xmlns:a="http://schemas.openxmlformats.org/drawingml/2006/main">
+              <a:ext uri="{FF2B5EF4-FFF2-40B4-BE49-F238E27FC236}">
+                <a16:creationId xmlns:a16="http://schemas.microsoft.com/office/drawing/2014/main" id="{E87DCA60-68CE-427D-87F7-69E2A3FC5109}"/>
+              </a:ext>
+            </a:extLst>
+          </p:cNvPr>
+          <p:cNvSpPr>
+            <a:spLocks xmlns:a="http://schemas.openxmlformats.org/drawingml/2006/main" noGrp="1"/>
+          </p:cNvSpPr>
+          <p:nvPr/>
+        </p:nvSpPr>
+        <p:spPr>
+          <a:xfrm xmlns:a="http://schemas.openxmlformats.org/drawingml/2006/main">
+            <a:off x="533400" y="3714750"/>
             <a:ext cx="1581150" cy="323850"/>
           </a:xfrm>
           <a:prstGeom xmlns:a="http://schemas.openxmlformats.org/drawingml/2006/main" prst="roundRect">
@@ -2025,27 +2079,27 @@
             </a:avLst>
           </a:prstGeom>
           <a:solidFill xmlns:a="http://schemas.openxmlformats.org/drawingml/2006/main">
-            <a:srgbClr val="F1EBFF"/>
-          </a:solidFill>
-        </p:spPr>
-      </p:sp>
-      <p:sp>
-        <p:nvSpPr>
-          <p:cNvPr id="7" name="cover-pill-1-text">
-            <a:extLst xmlns:a="http://schemas.openxmlformats.org/drawingml/2006/main">
-              <a:ext uri="{FF2B5EF4-FFF2-40B4-BE49-F238E27FC236}">
-                <a16:creationId xmlns:a16="http://schemas.microsoft.com/office/drawing/2014/main" id="{D999D140-8015-4577-9F34-A05397A854DC}"/>
-              </a:ext>
-            </a:extLst>
-          </p:cNvPr>
-          <p:cNvSpPr>
-            <a:spLocks xmlns:a="http://schemas.openxmlformats.org/drawingml/2006/main" noGrp="1"/>
-          </p:cNvSpPr>
-          <p:nvPr/>
-        </p:nvSpPr>
-        <p:spPr>
-          <a:xfrm xmlns:a="http://schemas.openxmlformats.org/drawingml/2006/main">
-            <a:off x="666750" y="3829050"/>
+            <a:srgbClr val="2A1A17"/>
+          </a:solidFill>
+        </p:spPr>
+      </p:sp>
+      <p:sp>
+        <p:nvSpPr>
+          <p:cNvPr id="9" name="cover-pill-1-text">
+            <a:extLst xmlns:a="http://schemas.openxmlformats.org/drawingml/2006/main">
+              <a:ext uri="{FF2B5EF4-FFF2-40B4-BE49-F238E27FC236}">
+                <a16:creationId xmlns:a16="http://schemas.microsoft.com/office/drawing/2014/main" id="{409CEDD7-63C4-447D-BAF2-172B4B1E3A92}"/>
+              </a:ext>
+            </a:extLst>
+          </p:cNvPr>
+          <p:cNvSpPr>
+            <a:spLocks xmlns:a="http://schemas.openxmlformats.org/drawingml/2006/main" noGrp="1"/>
+          </p:cNvSpPr>
+          <p:nvPr/>
+        </p:nvSpPr>
+        <p:spPr>
+          <a:xfrm xmlns:a="http://schemas.openxmlformats.org/drawingml/2006/main">
+            <a:off x="647700" y="3781425"/>
             <a:ext cx="1352550" cy="190500"/>
           </a:xfrm>
           <a:prstGeom xmlns:a="http://schemas.openxmlformats.org/drawingml/2006/main" prst="rect">
@@ -2061,11 +2115,11 @@
             <a:pPr algn="ctr">
               <a:defRPr sz="1125" b="1">
                 <a:solidFill>
-                  <a:srgbClr val="6845C6"/>
-                </a:solidFill>
-                <a:latin typeface="Arial"/>
-                <a:ea typeface="Arial"/>
-                <a:cs typeface="Arial"/>
+                  <a:srgbClr val="F6C453"/>
+                </a:solidFill>
+                <a:latin typeface="Aptos"/>
+                <a:ea typeface="Aptos"/>
+                <a:cs typeface="Aptos"/>
               </a:defRPr>
             </a:pPr>
             <a:r>
@@ -2076,22 +2130,22 @@
       </p:sp>
       <p:sp>
         <p:nvSpPr>
-          <p:cNvPr id="8" name="cover-pill-2-bg">
-            <a:extLst xmlns:a="http://schemas.openxmlformats.org/drawingml/2006/main">
-              <a:ext uri="{FF2B5EF4-FFF2-40B4-BE49-F238E27FC236}">
-                <a16:creationId xmlns:a16="http://schemas.microsoft.com/office/drawing/2014/main" id="{54E07E58-B362-4B89-9CF3-42A009607108}"/>
-              </a:ext>
-            </a:extLst>
-          </p:cNvPr>
-          <p:cNvSpPr>
-            <a:spLocks xmlns:a="http://schemas.openxmlformats.org/drawingml/2006/main" noGrp="1"/>
-          </p:cNvSpPr>
-          <p:nvPr/>
-        </p:nvSpPr>
-        <p:spPr>
-          <a:xfrm xmlns:a="http://schemas.openxmlformats.org/drawingml/2006/main">
-            <a:off x="2266950" y="3762375"/>
-            <a:ext cx="1790700" cy="323850"/>
+          <p:cNvPr id="10" name="cover-pill-2-bg">
+            <a:extLst xmlns:a="http://schemas.openxmlformats.org/drawingml/2006/main">
+              <a:ext uri="{FF2B5EF4-FFF2-40B4-BE49-F238E27FC236}">
+                <a16:creationId xmlns:a16="http://schemas.microsoft.com/office/drawing/2014/main" id="{FC8CB479-823D-4C7D-8F3D-2E4DB3319361}"/>
+              </a:ext>
+            </a:extLst>
+          </p:cNvPr>
+          <p:cNvSpPr>
+            <a:spLocks xmlns:a="http://schemas.openxmlformats.org/drawingml/2006/main" noGrp="1"/>
+          </p:cNvSpPr>
+          <p:nvPr/>
+        </p:nvSpPr>
+        <p:spPr>
+          <a:xfrm xmlns:a="http://schemas.openxmlformats.org/drawingml/2006/main">
+            <a:off x="2247900" y="3714750"/>
+            <a:ext cx="1352550" cy="323850"/>
           </a:xfrm>
           <a:prstGeom xmlns:a="http://schemas.openxmlformats.org/drawingml/2006/main" prst="roundRect">
             <a:avLst>
@@ -2099,28 +2153,28 @@
             </a:avLst>
           </a:prstGeom>
           <a:solidFill xmlns:a="http://schemas.openxmlformats.org/drawingml/2006/main">
-            <a:srgbClr val="F1EBFF"/>
-          </a:solidFill>
-        </p:spPr>
-      </p:sp>
-      <p:sp>
-        <p:nvSpPr>
-          <p:cNvPr id="9" name="cover-pill-2-text">
-            <a:extLst xmlns:a="http://schemas.openxmlformats.org/drawingml/2006/main">
-              <a:ext uri="{FF2B5EF4-FFF2-40B4-BE49-F238E27FC236}">
-                <a16:creationId xmlns:a16="http://schemas.microsoft.com/office/drawing/2014/main" id="{A09B1C40-EC50-4084-8AB3-77C3C349CBE7}"/>
-              </a:ext>
-            </a:extLst>
-          </p:cNvPr>
-          <p:cNvSpPr>
-            <a:spLocks xmlns:a="http://schemas.openxmlformats.org/drawingml/2006/main" noGrp="1"/>
-          </p:cNvSpPr>
-          <p:nvPr/>
-        </p:nvSpPr>
-        <p:spPr>
-          <a:xfrm xmlns:a="http://schemas.openxmlformats.org/drawingml/2006/main">
-            <a:off x="2381250" y="3829050"/>
-            <a:ext cx="1562100" cy="190500"/>
+            <a:srgbClr val="2A1A17"/>
+          </a:solidFill>
+        </p:spPr>
+      </p:sp>
+      <p:sp>
+        <p:nvSpPr>
+          <p:cNvPr id="11" name="cover-pill-2-text">
+            <a:extLst xmlns:a="http://schemas.openxmlformats.org/drawingml/2006/main">
+              <a:ext uri="{FF2B5EF4-FFF2-40B4-BE49-F238E27FC236}">
+                <a16:creationId xmlns:a16="http://schemas.microsoft.com/office/drawing/2014/main" id="{036C0FA4-1129-4A66-A17B-CDCBDC6A9539}"/>
+              </a:ext>
+            </a:extLst>
+          </p:cNvPr>
+          <p:cNvSpPr>
+            <a:spLocks xmlns:a="http://schemas.openxmlformats.org/drawingml/2006/main" noGrp="1"/>
+          </p:cNvSpPr>
+          <p:nvPr/>
+        </p:nvSpPr>
+        <p:spPr>
+          <a:xfrm xmlns:a="http://schemas.openxmlformats.org/drawingml/2006/main">
+            <a:off x="2362200" y="3781425"/>
+            <a:ext cx="1123950" cy="190500"/>
           </a:xfrm>
           <a:prstGeom xmlns:a="http://schemas.openxmlformats.org/drawingml/2006/main" prst="rect">
             <a:avLst/>
@@ -2135,37 +2189,37 @@
             <a:pPr algn="ctr">
               <a:defRPr sz="1125" b="1">
                 <a:solidFill>
-                  <a:srgbClr val="6845C6"/>
-                </a:solidFill>
-                <a:latin typeface="Arial"/>
-                <a:ea typeface="Arial"/>
-                <a:cs typeface="Arial"/>
-              </a:defRPr>
-            </a:pPr>
-            <a:r>
-              <a:t>Best Paper · ICoDSA</a:t>
-            </a:r>
-          </a:p>
-        </p:txBody>
-      </p:sp>
-      <p:sp>
-        <p:nvSpPr>
-          <p:cNvPr id="10" name="cover-pill-3-bg">
-            <a:extLst xmlns:a="http://schemas.openxmlformats.org/drawingml/2006/main">
-              <a:ext uri="{FF2B5EF4-FFF2-40B4-BE49-F238E27FC236}">
-                <a16:creationId xmlns:a16="http://schemas.microsoft.com/office/drawing/2014/main" id="{F15BC570-B3E8-426E-9AF8-71DA5D1FAF2E}"/>
-              </a:ext>
-            </a:extLst>
-          </p:cNvPr>
-          <p:cNvSpPr>
-            <a:spLocks xmlns:a="http://schemas.openxmlformats.org/drawingml/2006/main" noGrp="1"/>
-          </p:cNvSpPr>
-          <p:nvPr/>
-        </p:nvSpPr>
-        <p:spPr>
-          <a:xfrm xmlns:a="http://schemas.openxmlformats.org/drawingml/2006/main">
-            <a:off x="4191000" y="3762375"/>
-            <a:ext cx="1085850" cy="323850"/>
+                  <a:srgbClr val="FF7A59"/>
+                </a:solidFill>
+                <a:latin typeface="Aptos"/>
+                <a:ea typeface="Aptos"/>
+                <a:cs typeface="Aptos"/>
+              </a:defRPr>
+            </a:pPr>
+            <a:r>
+              <a:t>BEST PAPER</a:t>
+            </a:r>
+          </a:p>
+        </p:txBody>
+      </p:sp>
+      <p:sp>
+        <p:nvSpPr>
+          <p:cNvPr id="12" name="cover-pill-3-bg">
+            <a:extLst xmlns:a="http://schemas.openxmlformats.org/drawingml/2006/main">
+              <a:ext uri="{FF2B5EF4-FFF2-40B4-BE49-F238E27FC236}">
+                <a16:creationId xmlns:a16="http://schemas.microsoft.com/office/drawing/2014/main" id="{31879E1D-6AF0-4A42-B8F3-FB1491A64F1E}"/>
+              </a:ext>
+            </a:extLst>
+          </p:cNvPr>
+          <p:cNvSpPr>
+            <a:spLocks xmlns:a="http://schemas.openxmlformats.org/drawingml/2006/main" noGrp="1"/>
+          </p:cNvSpPr>
+          <p:nvPr/>
+        </p:nvSpPr>
+        <p:spPr>
+          <a:xfrm xmlns:a="http://schemas.openxmlformats.org/drawingml/2006/main">
+            <a:off x="3733800" y="3714750"/>
+            <a:ext cx="1219200" cy="323850"/>
           </a:xfrm>
           <a:prstGeom xmlns:a="http://schemas.openxmlformats.org/drawingml/2006/main" prst="roundRect">
             <a:avLst>
@@ -2173,28 +2227,28 @@
             </a:avLst>
           </a:prstGeom>
           <a:solidFill xmlns:a="http://schemas.openxmlformats.org/drawingml/2006/main">
-            <a:srgbClr val="F1EBFF"/>
-          </a:solidFill>
-        </p:spPr>
-      </p:sp>
-      <p:sp>
-        <p:nvSpPr>
-          <p:cNvPr id="11" name="cover-pill-3-text">
-            <a:extLst xmlns:a="http://schemas.openxmlformats.org/drawingml/2006/main">
-              <a:ext uri="{FF2B5EF4-FFF2-40B4-BE49-F238E27FC236}">
-                <a16:creationId xmlns:a16="http://schemas.microsoft.com/office/drawing/2014/main" id="{6B3515CA-F211-4BC9-B414-07028D6D6EC8}"/>
-              </a:ext>
-            </a:extLst>
-          </p:cNvPr>
-          <p:cNvSpPr>
-            <a:spLocks xmlns:a="http://schemas.openxmlformats.org/drawingml/2006/main" noGrp="1"/>
-          </p:cNvSpPr>
-          <p:nvPr/>
-        </p:nvSpPr>
-        <p:spPr>
-          <a:xfrm xmlns:a="http://schemas.openxmlformats.org/drawingml/2006/main">
-            <a:off x="4305300" y="3829050"/>
-            <a:ext cx="857250" cy="190500"/>
+            <a:srgbClr val="2A1A17"/>
+          </a:solidFill>
+        </p:spPr>
+      </p:sp>
+      <p:sp>
+        <p:nvSpPr>
+          <p:cNvPr id="13" name="cover-pill-3-text">
+            <a:extLst xmlns:a="http://schemas.openxmlformats.org/drawingml/2006/main">
+              <a:ext uri="{FF2B5EF4-FFF2-40B4-BE49-F238E27FC236}">
+                <a16:creationId xmlns:a16="http://schemas.microsoft.com/office/drawing/2014/main" id="{BBAC1D68-77CD-44CF-BBB2-B92935391422}"/>
+              </a:ext>
+            </a:extLst>
+          </p:cNvPr>
+          <p:cNvSpPr>
+            <a:spLocks xmlns:a="http://schemas.openxmlformats.org/drawingml/2006/main" noGrp="1"/>
+          </p:cNvSpPr>
+          <p:nvPr/>
+        </p:nvSpPr>
+        <p:spPr>
+          <a:xfrm xmlns:a="http://schemas.openxmlformats.org/drawingml/2006/main">
+            <a:off x="3848100" y="3781425"/>
+            <a:ext cx="990600" cy="190500"/>
           </a:xfrm>
           <a:prstGeom xmlns:a="http://schemas.openxmlformats.org/drawingml/2006/main" prst="rect">
             <a:avLst/>
@@ -2209,66 +2263,66 @@
             <a:pPr algn="ctr">
               <a:defRPr sz="1125" b="1">
                 <a:solidFill>
-                  <a:srgbClr val="6845C6"/>
-                </a:solidFill>
-                <a:latin typeface="Arial"/>
-                <a:ea typeface="Arial"/>
-                <a:cs typeface="Arial"/>
-              </a:defRPr>
-            </a:pPr>
-            <a:r>
-              <a:t>Indonesia</a:t>
-            </a:r>
-          </a:p>
-        </p:txBody>
-      </p:sp>
-      <p:sp>
-        <p:nvSpPr>
-          <p:cNvPr id="12" name="cover-contact-panel">
-            <a:extLst xmlns:a="http://schemas.openxmlformats.org/drawingml/2006/main">
-              <a:ext uri="{FF2B5EF4-FFF2-40B4-BE49-F238E27FC236}">
-                <a16:creationId xmlns:a16="http://schemas.microsoft.com/office/drawing/2014/main" id="{F440EC31-D423-45F2-9334-6BD23B241F17}"/>
-              </a:ext>
-            </a:extLst>
-          </p:cNvPr>
-          <p:cNvSpPr>
-            <a:spLocks xmlns:a="http://schemas.openxmlformats.org/drawingml/2006/main" noGrp="1"/>
-          </p:cNvSpPr>
-          <p:nvPr/>
-        </p:nvSpPr>
-        <p:spPr>
-          <a:xfrm xmlns:a="http://schemas.openxmlformats.org/drawingml/2006/main">
-            <a:off x="552450" y="4695825"/>
-            <a:ext cx="5934075" cy="1009650"/>
+                  <a:srgbClr val="5EEAD4"/>
+                </a:solidFill>
+                <a:latin typeface="Aptos"/>
+                <a:ea typeface="Aptos"/>
+                <a:cs typeface="Aptos"/>
+              </a:defRPr>
+            </a:pPr>
+            <a:r>
+              <a:t>INDONESIA</a:t>
+            </a:r>
+          </a:p>
+        </p:txBody>
+      </p:sp>
+      <p:sp>
+        <p:nvSpPr>
+          <p:cNvPr id="14" name="cover-contact-panel">
+            <a:extLst xmlns:a="http://schemas.openxmlformats.org/drawingml/2006/main">
+              <a:ext uri="{FF2B5EF4-FFF2-40B4-BE49-F238E27FC236}">
+                <a16:creationId xmlns:a16="http://schemas.microsoft.com/office/drawing/2014/main" id="{677348D2-A494-4C6B-A134-778C798DC851}"/>
+              </a:ext>
+            </a:extLst>
+          </p:cNvPr>
+          <p:cNvSpPr>
+            <a:spLocks xmlns:a="http://schemas.openxmlformats.org/drawingml/2006/main" noGrp="1"/>
+          </p:cNvSpPr>
+          <p:nvPr/>
+        </p:nvSpPr>
+        <p:spPr>
+          <a:xfrm xmlns:a="http://schemas.openxmlformats.org/drawingml/2006/main">
+            <a:off x="533400" y="4552950"/>
+            <a:ext cx="5010150" cy="1123950"/>
           </a:xfrm>
           <a:prstGeom xmlns:a="http://schemas.openxmlformats.org/drawingml/2006/main" prst="roundRect">
             <a:avLst>
-              <a:gd name="adj" fmla="val 7547"/>
+              <a:gd name="adj" fmla="val 6780"/>
             </a:avLst>
           </a:prstGeom>
           <a:solidFill xmlns:a="http://schemas.openxmlformats.org/drawingml/2006/main">
-            <a:srgbClr val="FBF7EF"/>
-          </a:solidFill>
-        </p:spPr>
-      </p:sp>
-      <p:sp>
-        <p:nvSpPr>
-          <p:cNvPr id="13" name="cover-name">
-            <a:extLst xmlns:a="http://schemas.openxmlformats.org/drawingml/2006/main">
-              <a:ext uri="{FF2B5EF4-FFF2-40B4-BE49-F238E27FC236}">
-                <a16:creationId xmlns:a16="http://schemas.microsoft.com/office/drawing/2014/main" id="{9D1D8A8D-68F7-4C4E-A85A-22F1D58A4844}"/>
-              </a:ext>
-            </a:extLst>
-          </p:cNvPr>
-          <p:cNvSpPr>
-            <a:spLocks xmlns:a="http://schemas.openxmlformats.org/drawingml/2006/main" noGrp="1"/>
-          </p:cNvSpPr>
-          <p:nvPr/>
-        </p:nvSpPr>
-        <p:spPr>
-          <a:xfrm xmlns:a="http://schemas.openxmlformats.org/drawingml/2006/main">
-            <a:off x="762000" y="4905375"/>
-            <a:ext cx="5000625" cy="285750"/>
+            <a:srgbClr val="211512"/>
+          </a:solidFill>
+        </p:spPr>
+      </p:sp>
+      <p:sp>
+        <p:nvSpPr>
+          <p:cNvPr id="15" name="cover-name">
+            <a:extLst xmlns:a="http://schemas.openxmlformats.org/drawingml/2006/main">
+              <a:ext uri="{FF2B5EF4-FFF2-40B4-BE49-F238E27FC236}">
+                <a16:creationId xmlns:a16="http://schemas.microsoft.com/office/drawing/2014/main" id="{E71C6AEF-B2C4-4EC9-8182-C5DE19C9A7E4}"/>
+              </a:ext>
+            </a:extLst>
+          </p:cNvPr>
+          <p:cNvSpPr>
+            <a:spLocks xmlns:a="http://schemas.openxmlformats.org/drawingml/2006/main" noGrp="1"/>
+          </p:cNvSpPr>
+          <p:nvPr/>
+        </p:nvSpPr>
+        <p:spPr>
+          <a:xfrm xmlns:a="http://schemas.openxmlformats.org/drawingml/2006/main">
+            <a:off x="742950" y="4762500"/>
+            <a:ext cx="4476750" cy="285750"/>
           </a:xfrm>
           <a:prstGeom xmlns:a="http://schemas.openxmlformats.org/drawingml/2006/main" prst="rect">
             <a:avLst/>
@@ -2283,11 +2337,11 @@
             <a:pPr algn="l">
               <a:defRPr sz="1725" b="1">
                 <a:solidFill>
-                  <a:srgbClr val="180D20"/>
-                </a:solidFill>
-                <a:latin typeface="Arial"/>
-                <a:ea typeface="Arial"/>
-                <a:cs typeface="Arial"/>
+                  <a:srgbClr val="FFF7ED"/>
+                </a:solidFill>
+                <a:latin typeface="Aptos"/>
+                <a:ea typeface="Aptos"/>
+                <a:cs typeface="Aptos"/>
               </a:defRPr>
             </a:pPr>
             <a:r>
@@ -2298,22 +2352,22 @@
       </p:sp>
       <p:sp>
         <p:nvSpPr>
-          <p:cNvPr id="14" name="cover-email">
-            <a:extLst xmlns:a="http://schemas.openxmlformats.org/drawingml/2006/main">
-              <a:ext uri="{FF2B5EF4-FFF2-40B4-BE49-F238E27FC236}">
-                <a16:creationId xmlns:a16="http://schemas.microsoft.com/office/drawing/2014/main" id="{E4F56AD4-527F-4A2E-B12B-047DD826D41B}"/>
-              </a:ext>
-            </a:extLst>
-          </p:cNvPr>
-          <p:cNvSpPr>
-            <a:spLocks xmlns:a="http://schemas.openxmlformats.org/drawingml/2006/main" noGrp="1"/>
-          </p:cNvSpPr>
-          <p:nvPr/>
-        </p:nvSpPr>
-        <p:spPr>
-          <a:xfrm xmlns:a="http://schemas.openxmlformats.org/drawingml/2006/main">
-            <a:off x="762000" y="5314950"/>
-            <a:ext cx="5238750" cy="228600"/>
+          <p:cNvPr id="16" name="cover-role">
+            <a:extLst xmlns:a="http://schemas.openxmlformats.org/drawingml/2006/main">
+              <a:ext uri="{FF2B5EF4-FFF2-40B4-BE49-F238E27FC236}">
+                <a16:creationId xmlns:a16="http://schemas.microsoft.com/office/drawing/2014/main" id="{3CE86E3D-AEF7-448F-A2FC-2CF541E45A4E}"/>
+              </a:ext>
+            </a:extLst>
+          </p:cNvPr>
+          <p:cNvSpPr>
+            <a:spLocks xmlns:a="http://schemas.openxmlformats.org/drawingml/2006/main" noGrp="1"/>
+          </p:cNvSpPr>
+          <p:nvPr/>
+        </p:nvSpPr>
+        <p:spPr>
+          <a:xfrm xmlns:a="http://schemas.openxmlformats.org/drawingml/2006/main">
+            <a:off x="742950" y="5143500"/>
+            <a:ext cx="4476750" cy="190500"/>
           </a:xfrm>
           <a:prstGeom xmlns:a="http://schemas.openxmlformats.org/drawingml/2006/main" prst="rect">
             <a:avLst/>
@@ -2326,85 +2380,278 @@
           <a:lstStyle xmlns:a="http://schemas.openxmlformats.org/drawingml/2006/main"/>
           <a:p xmlns:a="http://schemas.openxmlformats.org/drawingml/2006/main">
             <a:pPr algn="l">
-              <a:defRPr sz="1200" b="0">
-                <a:solidFill>
-                  <a:srgbClr val="70647A"/>
-                </a:solidFill>
-                <a:latin typeface="Arial"/>
-                <a:ea typeface="Arial"/>
-                <a:cs typeface="Arial"/>
-              </a:defRPr>
-            </a:pPr>
-            <a:r>
-              <a:t>akbaralqahri@gmail.com  ·  linkedin.com/in/akbaralqahri</a:t>
-            </a:r>
-          </a:p>
-        </p:txBody>
-      </p:sp>
-      <p:sp>
-        <p:nvSpPr>
-          <p:cNvPr id="15" name="cover-photo-frame">
-            <a:extLst xmlns:a="http://schemas.openxmlformats.org/drawingml/2006/main">
-              <a:ext uri="{FF2B5EF4-FFF2-40B4-BE49-F238E27FC236}">
-                <a16:creationId xmlns:a16="http://schemas.microsoft.com/office/drawing/2014/main" id="{FAE369E5-0A6B-40CB-ABCF-68E728820D97}"/>
-              </a:ext>
-            </a:extLst>
-          </p:cNvPr>
-          <p:cNvSpPr>
-            <a:spLocks xmlns:a="http://schemas.openxmlformats.org/drawingml/2006/main" noGrp="1"/>
-          </p:cNvSpPr>
-          <p:nvPr/>
-        </p:nvSpPr>
-        <p:spPr>
-          <a:xfrm xmlns:a="http://schemas.openxmlformats.org/drawingml/2006/main">
-            <a:off x="7372350" y="400050"/>
-            <a:ext cx="4362450" cy="5619750"/>
+              <a:defRPr sz="900" b="1">
+                <a:solidFill>
+                  <a:srgbClr val="FF7A59"/>
+                </a:solidFill>
+                <a:latin typeface="Consolas"/>
+                <a:ea typeface="Consolas"/>
+                <a:cs typeface="Consolas"/>
+              </a:defRPr>
+            </a:pPr>
+            <a:r>
+              <a:t>DATA ANALYST  /  DATA SCIENTIST  /  DATABASE ENGINEER</a:t>
+            </a:r>
+          </a:p>
+        </p:txBody>
+      </p:sp>
+      <p:sp>
+        <p:nvSpPr>
+          <p:cNvPr id="17" name="cover-email">
+            <a:extLst xmlns:a="http://schemas.openxmlformats.org/drawingml/2006/main">
+              <a:ext uri="{FF2B5EF4-FFF2-40B4-BE49-F238E27FC236}">
+                <a16:creationId xmlns:a16="http://schemas.microsoft.com/office/drawing/2014/main" id="{25D311CE-88CE-463A-905D-AF7465BEFBF7}"/>
+              </a:ext>
+            </a:extLst>
+          </p:cNvPr>
+          <p:cNvSpPr>
+            <a:spLocks xmlns:a="http://schemas.openxmlformats.org/drawingml/2006/main" noGrp="1"/>
+          </p:cNvSpPr>
+          <p:nvPr/>
+        </p:nvSpPr>
+        <p:spPr>
+          <a:xfrm xmlns:a="http://schemas.openxmlformats.org/drawingml/2006/main">
+            <a:off x="742950" y="5429250"/>
+            <a:ext cx="3810000" cy="190500"/>
+          </a:xfrm>
+          <a:prstGeom xmlns:a="http://schemas.openxmlformats.org/drawingml/2006/main" prst="rect">
+            <a:avLst/>
+          </a:prstGeom>
+        </p:spPr>
+        <p:txBody>
+          <a:bodyPr xmlns:a="http://schemas.openxmlformats.org/drawingml/2006/main" wrap="square" lIns="0" tIns="0" rIns="0" bIns="0" anchor="t">
+            <a:normAutofit fontScale="100000"/>
+          </a:bodyPr>
+          <a:lstStyle xmlns:a="http://schemas.openxmlformats.org/drawingml/2006/main"/>
+          <a:p xmlns:a="http://schemas.openxmlformats.org/drawingml/2006/main">
+            <a:pPr algn="l">
+              <a:defRPr sz="1125" b="0">
+                <a:solidFill>
+                  <a:srgbClr val="B9A59B"/>
+                </a:solidFill>
+                <a:latin typeface="Consolas"/>
+                <a:ea typeface="Consolas"/>
+                <a:cs typeface="Consolas"/>
+              </a:defRPr>
+            </a:pPr>
+            <a:r>
+              <a:t>akbaralqahri@gmail.com</a:t>
+            </a:r>
+          </a:p>
+        </p:txBody>
+      </p:sp>
+      <p:sp>
+        <p:nvSpPr>
+          <p:cNvPr id="18" name="cover-site-frame">
+            <a:extLst xmlns:a="http://schemas.openxmlformats.org/drawingml/2006/main">
+              <a:ext uri="{FF2B5EF4-FFF2-40B4-BE49-F238E27FC236}">
+                <a16:creationId xmlns:a16="http://schemas.microsoft.com/office/drawing/2014/main" id="{E5FD3444-3143-4E24-98F2-8339C8E175DD}"/>
+              </a:ext>
+            </a:extLst>
+          </p:cNvPr>
+          <p:cNvSpPr>
+            <a:spLocks xmlns:a="http://schemas.openxmlformats.org/drawingml/2006/main" noGrp="1"/>
+          </p:cNvSpPr>
+          <p:nvPr/>
+        </p:nvSpPr>
+        <p:spPr>
+          <a:xfrm xmlns:a="http://schemas.openxmlformats.org/drawingml/2006/main">
+            <a:off x="5962650" y="876300"/>
+            <a:ext cx="5829300" cy="3467100"/>
           </a:xfrm>
           <a:prstGeom xmlns:a="http://schemas.openxmlformats.org/drawingml/2006/main" prst="roundRect">
             <a:avLst>
-              <a:gd name="adj" fmla="val 1747"/>
+              <a:gd name="adj" fmla="val 2198"/>
             </a:avLst>
           </a:prstGeom>
           <a:solidFill xmlns:a="http://schemas.openxmlformats.org/drawingml/2006/main">
-            <a:srgbClr val="F1EBFF"/>
-          </a:solidFill>
-        </p:spPr>
-      </p:sp>
-      <p:sp>
-        <p:nvSpPr>
-          <p:cNvPr id="16" name="cover-photo-accent">
-            <a:extLst xmlns:a="http://schemas.openxmlformats.org/drawingml/2006/main">
-              <a:ext uri="{FF2B5EF4-FFF2-40B4-BE49-F238E27FC236}">
-                <a16:creationId xmlns:a16="http://schemas.microsoft.com/office/drawing/2014/main" id="{A1CF5E8C-37EE-4789-8CD5-5BA404A7FA1D}"/>
-              </a:ext>
-            </a:extLst>
-          </p:cNvPr>
-          <p:cNvSpPr>
-            <a:spLocks xmlns:a="http://schemas.openxmlformats.org/drawingml/2006/main" noGrp="1"/>
-          </p:cNvSpPr>
-          <p:nvPr/>
-        </p:nvSpPr>
-        <p:spPr>
-          <a:xfrm xmlns:a="http://schemas.openxmlformats.org/drawingml/2006/main">
-            <a:off x="11010900" y="400050"/>
-            <a:ext cx="723900" cy="5619750"/>
+            <a:srgbClr val="2A1A17"/>
+          </a:solidFill>
+        </p:spPr>
+      </p:sp>
+      <p:sp>
+        <p:nvSpPr>
+          <p:cNvPr id="19" name="cover-site-label">
+            <a:extLst xmlns:a="http://schemas.openxmlformats.org/drawingml/2006/main">
+              <a:ext uri="{FF2B5EF4-FFF2-40B4-BE49-F238E27FC236}">
+                <a16:creationId xmlns:a16="http://schemas.microsoft.com/office/drawing/2014/main" id="{A82B9F33-B5DD-4950-981D-D1603138B826}"/>
+              </a:ext>
+            </a:extLst>
+          </p:cNvPr>
+          <p:cNvSpPr>
+            <a:spLocks xmlns:a="http://schemas.openxmlformats.org/drawingml/2006/main" noGrp="1"/>
+          </p:cNvSpPr>
+          <p:nvPr/>
+        </p:nvSpPr>
+        <p:spPr>
+          <a:xfrm xmlns:a="http://schemas.openxmlformats.org/drawingml/2006/main">
+            <a:off x="6000750" y="4591050"/>
+            <a:ext cx="4953000" cy="209550"/>
+          </a:xfrm>
+          <a:prstGeom xmlns:a="http://schemas.openxmlformats.org/drawingml/2006/main" prst="rect">
+            <a:avLst/>
+          </a:prstGeom>
+        </p:spPr>
+        <p:txBody>
+          <a:bodyPr xmlns:a="http://schemas.openxmlformats.org/drawingml/2006/main" wrap="square" lIns="0" tIns="0" rIns="0" bIns="0" anchor="t">
+            <a:normAutofit fontScale="100000"/>
+          </a:bodyPr>
+          <a:lstStyle xmlns:a="http://schemas.openxmlformats.org/drawingml/2006/main"/>
+          <a:p xmlns:a="http://schemas.openxmlformats.org/drawingml/2006/main">
+            <a:pPr algn="l">
+              <a:defRPr sz="975" b="1">
+                <a:solidFill>
+                  <a:srgbClr val="FF7A59"/>
+                </a:solidFill>
+                <a:latin typeface="Consolas"/>
+                <a:ea typeface="Consolas"/>
+                <a:cs typeface="Consolas"/>
+              </a:defRPr>
+            </a:pPr>
+            <a:r>
+              <a:t>LIVE PORTFOLIO  /  SAME DESIGN SYSTEM</a:t>
+            </a:r>
+          </a:p>
+        </p:txBody>
+      </p:sp>
+      <p:sp>
+        <p:nvSpPr>
+          <p:cNvPr id="20" name="cover-swatch-gold">
+            <a:extLst xmlns:a="http://schemas.openxmlformats.org/drawingml/2006/main">
+              <a:ext uri="{FF2B5EF4-FFF2-40B4-BE49-F238E27FC236}">
+                <a16:creationId xmlns:a16="http://schemas.microsoft.com/office/drawing/2014/main" id="{C906A6A2-F4EE-43FA-A40A-D7BBD0DB593C}"/>
+              </a:ext>
+            </a:extLst>
+          </p:cNvPr>
+          <p:cNvSpPr>
+            <a:spLocks xmlns:a="http://schemas.openxmlformats.org/drawingml/2006/main" noGrp="1"/>
+          </p:cNvSpPr>
+          <p:nvPr/>
+        </p:nvSpPr>
+        <p:spPr>
+          <a:xfrm xmlns:a="http://schemas.openxmlformats.org/drawingml/2006/main">
+            <a:off x="6000750" y="5010150"/>
+            <a:ext cx="895350" cy="95250"/>
           </a:xfrm>
           <a:prstGeom xmlns:a="http://schemas.openxmlformats.org/drawingml/2006/main" prst="roundRect">
             <a:avLst>
-              <a:gd name="adj" fmla="val 10526"/>
+              <a:gd name="adj" fmla="val 50000"/>
             </a:avLst>
           </a:prstGeom>
           <a:solidFill xmlns:a="http://schemas.openxmlformats.org/drawingml/2006/main">
-            <a:srgbClr val="E65FA8"/>
-          </a:solidFill>
-        </p:spPr>
-      </p:sp>
-      <p:sp>
-        <p:nvSpPr>
-          <p:cNvPr id="17" name="footer-line-1">
-            <a:extLst xmlns:a="http://schemas.openxmlformats.org/drawingml/2006/main">
-              <a:ext uri="{FF2B5EF4-FFF2-40B4-BE49-F238E27FC236}">
-                <a16:creationId xmlns:a16="http://schemas.microsoft.com/office/drawing/2014/main" id="{DB4121B9-6E7A-4C55-AF25-C6B6E568B9A5}"/>
+            <a:srgbClr val="F6C453"/>
+          </a:solidFill>
+        </p:spPr>
+      </p:sp>
+      <p:sp>
+        <p:nvSpPr>
+          <p:cNvPr id="21" name="cover-swatch-coral">
+            <a:extLst xmlns:a="http://schemas.openxmlformats.org/drawingml/2006/main">
+              <a:ext uri="{FF2B5EF4-FFF2-40B4-BE49-F238E27FC236}">
+                <a16:creationId xmlns:a16="http://schemas.microsoft.com/office/drawing/2014/main" id="{AD5FD5EC-4950-4F8D-A3FB-9E3174264B60}"/>
+              </a:ext>
+            </a:extLst>
+          </p:cNvPr>
+          <p:cNvSpPr>
+            <a:spLocks xmlns:a="http://schemas.openxmlformats.org/drawingml/2006/main" noGrp="1"/>
+          </p:cNvSpPr>
+          <p:nvPr/>
+        </p:nvSpPr>
+        <p:spPr>
+          <a:xfrm xmlns:a="http://schemas.openxmlformats.org/drawingml/2006/main">
+            <a:off x="7010400" y="5010150"/>
+            <a:ext cx="895350" cy="95250"/>
+          </a:xfrm>
+          <a:prstGeom xmlns:a="http://schemas.openxmlformats.org/drawingml/2006/main" prst="roundRect">
+            <a:avLst>
+              <a:gd name="adj" fmla="val 50000"/>
+            </a:avLst>
+          </a:prstGeom>
+          <a:solidFill xmlns:a="http://schemas.openxmlformats.org/drawingml/2006/main">
+            <a:srgbClr val="FF7A59"/>
+          </a:solidFill>
+        </p:spPr>
+      </p:sp>
+      <p:sp>
+        <p:nvSpPr>
+          <p:cNvPr id="22" name="cover-swatch-teal">
+            <a:extLst xmlns:a="http://schemas.openxmlformats.org/drawingml/2006/main">
+              <a:ext uri="{FF2B5EF4-FFF2-40B4-BE49-F238E27FC236}">
+                <a16:creationId xmlns:a16="http://schemas.microsoft.com/office/drawing/2014/main" id="{5F78E29F-2B04-4335-A584-F38D06453FDE}"/>
+              </a:ext>
+            </a:extLst>
+          </p:cNvPr>
+          <p:cNvSpPr>
+            <a:spLocks xmlns:a="http://schemas.openxmlformats.org/drawingml/2006/main" noGrp="1"/>
+          </p:cNvSpPr>
+          <p:nvPr/>
+        </p:nvSpPr>
+        <p:spPr>
+          <a:xfrm xmlns:a="http://schemas.openxmlformats.org/drawingml/2006/main">
+            <a:off x="8020050" y="5010150"/>
+            <a:ext cx="895350" cy="95250"/>
+          </a:xfrm>
+          <a:prstGeom xmlns:a="http://schemas.openxmlformats.org/drawingml/2006/main" prst="roundRect">
+            <a:avLst>
+              <a:gd name="adj" fmla="val 50000"/>
+            </a:avLst>
+          </a:prstGeom>
+          <a:solidFill xmlns:a="http://schemas.openxmlformats.org/drawingml/2006/main">
+            <a:srgbClr val="5EEAD4"/>
+          </a:solidFill>
+        </p:spPr>
+      </p:sp>
+      <p:sp>
+        <p:nvSpPr>
+          <p:cNvPr id="23" name="cover-site-copy">
+            <a:extLst xmlns:a="http://schemas.openxmlformats.org/drawingml/2006/main">
+              <a:ext uri="{FF2B5EF4-FFF2-40B4-BE49-F238E27FC236}">
+                <a16:creationId xmlns:a16="http://schemas.microsoft.com/office/drawing/2014/main" id="{11782E38-11CB-4AF5-9D74-8F6150CE6B42}"/>
+              </a:ext>
+            </a:extLst>
+          </p:cNvPr>
+          <p:cNvSpPr>
+            <a:spLocks xmlns:a="http://schemas.openxmlformats.org/drawingml/2006/main" noGrp="1"/>
+          </p:cNvSpPr>
+          <p:nvPr/>
+        </p:nvSpPr>
+        <p:spPr>
+          <a:xfrm xmlns:a="http://schemas.openxmlformats.org/drawingml/2006/main">
+            <a:off x="6000750" y="5295900"/>
+            <a:ext cx="5524500" cy="666750"/>
+          </a:xfrm>
+          <a:prstGeom xmlns:a="http://schemas.openxmlformats.org/drawingml/2006/main" prst="rect">
+            <a:avLst/>
+          </a:prstGeom>
+        </p:spPr>
+        <p:txBody>
+          <a:bodyPr xmlns:a="http://schemas.openxmlformats.org/drawingml/2006/main" wrap="square" lIns="0" tIns="0" rIns="0" bIns="0" anchor="t">
+            <a:normAutofit fontScale="100000"/>
+          </a:bodyPr>
+          <a:lstStyle xmlns:a="http://schemas.openxmlformats.org/drawingml/2006/main"/>
+          <a:p xmlns:a="http://schemas.openxmlformats.org/drawingml/2006/main">
+            <a:pPr algn="l">
+              <a:defRPr sz="1275" b="0">
+                <a:solidFill>
+                  <a:srgbClr val="B9A59B"/>
+                </a:solidFill>
+                <a:latin typeface="Aptos"/>
+                <a:ea typeface="Aptos"/>
+                <a:cs typeface="Aptos"/>
+              </a:defRPr>
+            </a:pPr>
+            <a:r>
+              <a:t>A consistent visual language across web, PowerPoint, and PDF: cosmic dark surfaces, signal colors, monospaced labels, and decision-focused storytelling.</a:t>
+            </a:r>
+          </a:p>
+        </p:txBody>
+      </p:sp>
+      <p:sp>
+        <p:nvSpPr>
+          <p:cNvPr id="24" name="footer-line-gold-1">
+            <a:extLst xmlns:a="http://schemas.openxmlformats.org/drawingml/2006/main">
+              <a:ext uri="{FF2B5EF4-FFF2-40B4-BE49-F238E27FC236}">
+                <a16:creationId xmlns:a16="http://schemas.microsoft.com/office/drawing/2014/main" id="{811D24CA-3DDB-4D04-B94A-9BD0328574AF}"/>
               </a:ext>
             </a:extLst>
           </p:cNvPr>
@@ -2416,22 +2663,76 @@
         <p:spPr>
           <a:xfrm xmlns:a="http://schemas.openxmlformats.org/drawingml/2006/main">
             <a:off x="400050" y="6429375"/>
-            <a:ext cx="10553700" cy="19050"/>
-          </a:xfrm>
-          <a:prstGeom xmlns:a="http://schemas.openxmlformats.org/drawingml/2006/main" prst="rect">
-            <a:avLst/>
-          </a:prstGeom>
-          <a:solidFill xmlns:a="http://schemas.openxmlformats.org/drawingml/2006/main">
-            <a:srgbClr val="DED4E6"/>
-          </a:solidFill>
-        </p:spPr>
-      </p:sp>
-      <p:sp>
-        <p:nvSpPr>
-          <p:cNvPr id="18" name="footer-name-1">
-            <a:extLst xmlns:a="http://schemas.openxmlformats.org/drawingml/2006/main">
-              <a:ext uri="{FF2B5EF4-FFF2-40B4-BE49-F238E27FC236}">
-                <a16:creationId xmlns:a16="http://schemas.microsoft.com/office/drawing/2014/main" id="{24F00833-164A-434C-B903-696D71857DCD}"/>
+            <a:ext cx="5276850" cy="19050"/>
+          </a:xfrm>
+          <a:prstGeom xmlns:a="http://schemas.openxmlformats.org/drawingml/2006/main" prst="rect">
+            <a:avLst/>
+          </a:prstGeom>
+          <a:solidFill xmlns:a="http://schemas.openxmlformats.org/drawingml/2006/main">
+            <a:srgbClr val="F6C453"/>
+          </a:solidFill>
+        </p:spPr>
+      </p:sp>
+      <p:sp>
+        <p:nvSpPr>
+          <p:cNvPr id="25" name="footer-line-coral-1">
+            <a:extLst xmlns:a="http://schemas.openxmlformats.org/drawingml/2006/main">
+              <a:ext uri="{FF2B5EF4-FFF2-40B4-BE49-F238E27FC236}">
+                <a16:creationId xmlns:a16="http://schemas.microsoft.com/office/drawing/2014/main" id="{0F95C558-4682-4633-A2FD-4C9CC55E2D8D}"/>
+              </a:ext>
+            </a:extLst>
+          </p:cNvPr>
+          <p:cNvSpPr>
+            <a:spLocks xmlns:a="http://schemas.openxmlformats.org/drawingml/2006/main" noGrp="1"/>
+          </p:cNvSpPr>
+          <p:nvPr/>
+        </p:nvSpPr>
+        <p:spPr>
+          <a:xfrm xmlns:a="http://schemas.openxmlformats.org/drawingml/2006/main">
+            <a:off x="5676900" y="6429375"/>
+            <a:ext cx="2638425" cy="19050"/>
+          </a:xfrm>
+          <a:prstGeom xmlns:a="http://schemas.openxmlformats.org/drawingml/2006/main" prst="rect">
+            <a:avLst/>
+          </a:prstGeom>
+          <a:solidFill xmlns:a="http://schemas.openxmlformats.org/drawingml/2006/main">
+            <a:srgbClr val="FF7A59"/>
+          </a:solidFill>
+        </p:spPr>
+      </p:sp>
+      <p:sp>
+        <p:nvSpPr>
+          <p:cNvPr id="26" name="footer-line-teal-1">
+            <a:extLst xmlns:a="http://schemas.openxmlformats.org/drawingml/2006/main">
+              <a:ext uri="{FF2B5EF4-FFF2-40B4-BE49-F238E27FC236}">
+                <a16:creationId xmlns:a16="http://schemas.microsoft.com/office/drawing/2014/main" id="{181A9748-3C86-4134-81A6-ADDFA3D83B2A}"/>
+              </a:ext>
+            </a:extLst>
+          </p:cNvPr>
+          <p:cNvSpPr>
+            <a:spLocks xmlns:a="http://schemas.openxmlformats.org/drawingml/2006/main" noGrp="1"/>
+          </p:cNvSpPr>
+          <p:nvPr/>
+        </p:nvSpPr>
+        <p:spPr>
+          <a:xfrm xmlns:a="http://schemas.openxmlformats.org/drawingml/2006/main">
+            <a:off x="8315325" y="6429375"/>
+            <a:ext cx="2638425" cy="19050"/>
+          </a:xfrm>
+          <a:prstGeom xmlns:a="http://schemas.openxmlformats.org/drawingml/2006/main" prst="rect">
+            <a:avLst/>
+          </a:prstGeom>
+          <a:solidFill xmlns:a="http://schemas.openxmlformats.org/drawingml/2006/main">
+            <a:srgbClr val="5EEAD4"/>
+          </a:solidFill>
+        </p:spPr>
+      </p:sp>
+      <p:sp>
+        <p:nvSpPr>
+          <p:cNvPr id="27" name="footer-name-1">
+            <a:extLst xmlns:a="http://schemas.openxmlformats.org/drawingml/2006/main">
+              <a:ext uri="{FF2B5EF4-FFF2-40B4-BE49-F238E27FC236}">
+                <a16:creationId xmlns:a16="http://schemas.microsoft.com/office/drawing/2014/main" id="{A5CCA943-EF71-4F85-A29B-201D7AC51A25}"/>
               </a:ext>
             </a:extLst>
           </p:cNvPr>
@@ -2458,25 +2759,25 @@
             <a:pPr algn="l">
               <a:defRPr sz="825" b="1">
                 <a:solidFill>
-                  <a:srgbClr val="70647A"/>
-                </a:solidFill>
-                <a:latin typeface="Arial"/>
-                <a:ea typeface="Arial"/>
-                <a:cs typeface="Arial"/>
-              </a:defRPr>
-            </a:pPr>
-            <a:r>
-              <a:t>MUHAMMAD ALI AKBAR AL-QAHRI  /  DATA PORTFOLIO</a:t>
-            </a:r>
-          </a:p>
-        </p:txBody>
-      </p:sp>
-      <p:sp>
-        <p:nvSpPr>
-          <p:cNvPr id="19" name="footer-page-1">
-            <a:extLst xmlns:a="http://schemas.openxmlformats.org/drawingml/2006/main">
-              <a:ext uri="{FF2B5EF4-FFF2-40B4-BE49-F238E27FC236}">
-                <a16:creationId xmlns:a16="http://schemas.microsoft.com/office/drawing/2014/main" id="{1FBC802E-C34C-45C8-85E8-23C12B6B8711}"/>
+                  <a:srgbClr val="B9A59B"/>
+                </a:solidFill>
+                <a:latin typeface="Consolas"/>
+                <a:ea typeface="Consolas"/>
+                <a:cs typeface="Consolas"/>
+              </a:defRPr>
+            </a:pPr>
+            <a:r>
+              <a:t>~/ali_  /  DATA INTELLIGENCE PORTFOLIO</a:t>
+            </a:r>
+          </a:p>
+        </p:txBody>
+      </p:sp>
+      <p:sp>
+        <p:nvSpPr>
+          <p:cNvPr id="28" name="footer-page-1">
+            <a:extLst xmlns:a="http://schemas.openxmlformats.org/drawingml/2006/main">
+              <a:ext uri="{FF2B5EF4-FFF2-40B4-BE49-F238E27FC236}">
+                <a16:creationId xmlns:a16="http://schemas.microsoft.com/office/drawing/2014/main" id="{5BBCA88C-7559-47D8-BAEA-6A2FEA1F9741}"/>
               </a:ext>
             </a:extLst>
           </p:cNvPr>
@@ -2503,11 +2804,11 @@
             <a:pPr algn="r">
               <a:defRPr sz="900" b="1">
                 <a:solidFill>
-                  <a:srgbClr val="70647A"/>
-                </a:solidFill>
-                <a:latin typeface="Arial"/>
-                <a:ea typeface="Arial"/>
-                <a:cs typeface="Arial"/>
+                  <a:srgbClr val="F6C453"/>
+                </a:solidFill>
+                <a:latin typeface="Consolas"/>
+                <a:ea typeface="Consolas"/>
+                <a:cs typeface="Consolas"/>
               </a:defRPr>
             </a:pPr>
             <a:r>
@@ -2518,23 +2819,23 @@
       </p:sp>
       <p:pic>
         <p:nvPicPr>
-          <p:cNvPr id="40" name=""/>
+          <p:cNvPr id="58" name=""/>
           <p:cNvPicPr>
             <a:picLocks xmlns:a="http://schemas.openxmlformats.org/drawingml/2006/main" noChangeAspect="1"/>
           </p:cNvPicPr>
           <p:nvPr/>
         </p:nvPicPr>
         <p:blipFill>
-          <a:blip xmlns:r="http://schemas.openxmlformats.org/officeDocument/2006/relationships" xmlns:a="http://schemas.openxmlformats.org/drawingml/2006/main" r:embed="R2b28eba398554a4e"/>
-          <a:srcRect xmlns:a="http://schemas.openxmlformats.org/drawingml/2006/main" l="0" t="1015" r="0" b="1015"/>
+          <a:blip xmlns:r="http://schemas.openxmlformats.org/officeDocument/2006/relationships" xmlns:a="http://schemas.openxmlformats.org/drawingml/2006/main" r:embed="R2d5dc728a12b4177"/>
+          <a:srcRect xmlns:a="http://schemas.openxmlformats.org/drawingml/2006/main" l="836" t="0" r="836" b="0"/>
           <a:stretch xmlns:a="http://schemas.openxmlformats.org/drawingml/2006/main">
             <a:fillRect l="0" t="0" r="0" b="0"/>
           </a:stretch>
         </p:blipFill>
         <p:spPr>
           <a:xfrm xmlns:a="http://schemas.openxmlformats.org/drawingml/2006/main">
-            <a:off x="7562850" y="590550"/>
-            <a:ext cx="3981450" cy="5238750"/>
+            <a:off x="6115050" y="1028700"/>
+            <a:ext cx="5524500" cy="3162300"/>
           </a:xfrm>
           <a:prstGeom xmlns:a="http://schemas.openxmlformats.org/drawingml/2006/main" prst="rect">
             <a:avLst/>
@@ -2544,7 +2845,7 @@
     </p:spTree>
     <p:extLst>
       <p:ext uri="{BB962C8B-B14F-4D97-AF65-F5344CB8AC3E}">
-        <p14:creationId xmlns:p14="http://schemas.microsoft.com/office/powerpoint/2010/main" val="1642647245"/>
+        <p14:creationId xmlns:p14="http://schemas.microsoft.com/office/powerpoint/2010/main" val="850563681"/>
       </p:ext>
     </p:extLst>
   </p:cSld>
@@ -2565,10 +2866,10 @@
       </p:grpSpPr>
       <p:sp>
         <p:nvSpPr>
-          <p:cNvPr id="26" name="10-capability-canvas">
-            <a:extLst xmlns:a="http://schemas.openxmlformats.org/drawingml/2006/main">
-              <a:ext uri="{FF2B5EF4-FFF2-40B4-BE49-F238E27FC236}">
-                <a16:creationId xmlns:a16="http://schemas.microsoft.com/office/drawing/2014/main" id="{DFC061BE-9235-4D04-B345-D904C5A37931}"/>
+          <p:cNvPr id="31" name="10-capability-canvas">
+            <a:extLst xmlns:a="http://schemas.openxmlformats.org/drawingml/2006/main">
+              <a:ext uri="{FF2B5EF4-FFF2-40B4-BE49-F238E27FC236}">
+                <a16:creationId xmlns:a16="http://schemas.microsoft.com/office/drawing/2014/main" id="{8414CC02-B03A-4711-9D27-4A137E47C0B7}"/>
               </a:ext>
             </a:extLst>
           </p:cNvPr>
@@ -2586,16 +2887,97 @@
             <a:avLst/>
           </a:prstGeom>
           <a:solidFill xmlns:a="http://schemas.openxmlformats.org/drawingml/2006/main">
-            <a:srgbClr val="FFFFFF"/>
-          </a:solidFill>
-        </p:spPr>
-      </p:sp>
-      <p:sp>
-        <p:nvSpPr>
-          <p:cNvPr id="2" name="eyebrow-10">
-            <a:extLst xmlns:a="http://schemas.openxmlformats.org/drawingml/2006/main">
-              <a:ext uri="{FF2B5EF4-FFF2-40B4-BE49-F238E27FC236}">
-                <a16:creationId xmlns:a16="http://schemas.microsoft.com/office/drawing/2014/main" id="{C7310ACA-64DB-4470-989A-51628F165207}"/>
+            <a:srgbClr val="120B0A"/>
+          </a:solidFill>
+        </p:spPr>
+      </p:sp>
+      <p:sp>
+        <p:nvSpPr>
+          <p:cNvPr id="2" name="10-capability-edge-gold">
+            <a:extLst xmlns:a="http://schemas.openxmlformats.org/drawingml/2006/main">
+              <a:ext uri="{FF2B5EF4-FFF2-40B4-BE49-F238E27FC236}">
+                <a16:creationId xmlns:a16="http://schemas.microsoft.com/office/drawing/2014/main" id="{87A7BB48-86F4-43A5-BFF5-0133C668A08D}"/>
+              </a:ext>
+            </a:extLst>
+          </p:cNvPr>
+          <p:cNvSpPr>
+            <a:spLocks xmlns:a="http://schemas.openxmlformats.org/drawingml/2006/main" noGrp="1"/>
+          </p:cNvSpPr>
+          <p:nvPr/>
+        </p:nvSpPr>
+        <p:spPr>
+          <a:xfrm xmlns:a="http://schemas.openxmlformats.org/drawingml/2006/main">
+            <a:off x="0" y="0"/>
+            <a:ext cx="38100" cy="2286000"/>
+          </a:xfrm>
+          <a:prstGeom xmlns:a="http://schemas.openxmlformats.org/drawingml/2006/main" prst="rect">
+            <a:avLst/>
+          </a:prstGeom>
+          <a:solidFill xmlns:a="http://schemas.openxmlformats.org/drawingml/2006/main">
+            <a:srgbClr val="F6C453"/>
+          </a:solidFill>
+        </p:spPr>
+      </p:sp>
+      <p:sp>
+        <p:nvSpPr>
+          <p:cNvPr id="3" name="10-capability-edge-coral">
+            <a:extLst xmlns:a="http://schemas.openxmlformats.org/drawingml/2006/main">
+              <a:ext uri="{FF2B5EF4-FFF2-40B4-BE49-F238E27FC236}">
+                <a16:creationId xmlns:a16="http://schemas.microsoft.com/office/drawing/2014/main" id="{02DD2B15-1CE3-4EE2-B3F2-E95D2DBD8F48}"/>
+              </a:ext>
+            </a:extLst>
+          </p:cNvPr>
+          <p:cNvSpPr>
+            <a:spLocks xmlns:a="http://schemas.openxmlformats.org/drawingml/2006/main" noGrp="1"/>
+          </p:cNvSpPr>
+          <p:nvPr/>
+        </p:nvSpPr>
+        <p:spPr>
+          <a:xfrm xmlns:a="http://schemas.openxmlformats.org/drawingml/2006/main">
+            <a:off x="0" y="2286000"/>
+            <a:ext cx="38100" cy="2286000"/>
+          </a:xfrm>
+          <a:prstGeom xmlns:a="http://schemas.openxmlformats.org/drawingml/2006/main" prst="rect">
+            <a:avLst/>
+          </a:prstGeom>
+          <a:solidFill xmlns:a="http://schemas.openxmlformats.org/drawingml/2006/main">
+            <a:srgbClr val="FF7A59"/>
+          </a:solidFill>
+        </p:spPr>
+      </p:sp>
+      <p:sp>
+        <p:nvSpPr>
+          <p:cNvPr id="4" name="10-capability-edge-teal">
+            <a:extLst xmlns:a="http://schemas.openxmlformats.org/drawingml/2006/main">
+              <a:ext uri="{FF2B5EF4-FFF2-40B4-BE49-F238E27FC236}">
+                <a16:creationId xmlns:a16="http://schemas.microsoft.com/office/drawing/2014/main" id="{989751D0-43E6-4FB2-9CF1-2BC163EC0289}"/>
+              </a:ext>
+            </a:extLst>
+          </p:cNvPr>
+          <p:cNvSpPr>
+            <a:spLocks xmlns:a="http://schemas.openxmlformats.org/drawingml/2006/main" noGrp="1"/>
+          </p:cNvSpPr>
+          <p:nvPr/>
+        </p:nvSpPr>
+        <p:spPr>
+          <a:xfrm xmlns:a="http://schemas.openxmlformats.org/drawingml/2006/main">
+            <a:off x="0" y="4572000"/>
+            <a:ext cx="38100" cy="2286000"/>
+          </a:xfrm>
+          <a:prstGeom xmlns:a="http://schemas.openxmlformats.org/drawingml/2006/main" prst="rect">
+            <a:avLst/>
+          </a:prstGeom>
+          <a:solidFill xmlns:a="http://schemas.openxmlformats.org/drawingml/2006/main">
+            <a:srgbClr val="5EEAD4"/>
+          </a:solidFill>
+        </p:spPr>
+      </p:sp>
+      <p:sp>
+        <p:nvSpPr>
+          <p:cNvPr id="5" name="eyebrow-10">
+            <a:extLst xmlns:a="http://schemas.openxmlformats.org/drawingml/2006/main">
+              <a:ext uri="{FF2B5EF4-FFF2-40B4-BE49-F238E27FC236}">
+                <a16:creationId xmlns:a16="http://schemas.microsoft.com/office/drawing/2014/main" id="{7740F151-B437-4A0F-95F8-E14A9B0A2534}"/>
               </a:ext>
             </a:extLst>
           </p:cNvPr>
@@ -2622,25 +3004,25 @@
             <a:pPr algn="l">
               <a:defRPr sz="1050" b="1">
                 <a:solidFill>
-                  <a:srgbClr val="6845C6"/>
-                </a:solidFill>
-                <a:latin typeface="Arial"/>
-                <a:ea typeface="Arial"/>
-                <a:cs typeface="Arial"/>
-              </a:defRPr>
-            </a:pPr>
-            <a:r>
-              <a:t>CAPABILITY</a:t>
-            </a:r>
-          </a:p>
-        </p:txBody>
-      </p:sp>
-      <p:sp>
-        <p:nvSpPr>
-          <p:cNvPr id="3" name="title-10">
-            <a:extLst xmlns:a="http://schemas.openxmlformats.org/drawingml/2006/main">
-              <a:ext uri="{FF2B5EF4-FFF2-40B4-BE49-F238E27FC236}">
-                <a16:creationId xmlns:a16="http://schemas.microsoft.com/office/drawing/2014/main" id="{BC0A561E-2C7A-4A8F-A6D6-25C955EC7491}"/>
+                  <a:srgbClr val="FF7A59"/>
+                </a:solidFill>
+                <a:latin typeface="Consolas"/>
+                <a:ea typeface="Consolas"/>
+                <a:cs typeface="Consolas"/>
+              </a:defRPr>
+            </a:pPr>
+            <a:r>
+              <a:t>~/ CAPABILITY</a:t>
+            </a:r>
+          </a:p>
+        </p:txBody>
+      </p:sp>
+      <p:sp>
+        <p:nvSpPr>
+          <p:cNvPr id="6" name="title-10">
+            <a:extLst xmlns:a="http://schemas.openxmlformats.org/drawingml/2006/main">
+              <a:ext uri="{FF2B5EF4-FFF2-40B4-BE49-F238E27FC236}">
+                <a16:creationId xmlns:a16="http://schemas.microsoft.com/office/drawing/2014/main" id="{D8536ECB-72C2-4B6F-B1DF-1B52AD4FA841}"/>
               </a:ext>
             </a:extLst>
           </p:cNvPr>
@@ -2660,18 +3042,18 @@
         </p:spPr>
         <p:txBody>
           <a:bodyPr xmlns:a="http://schemas.openxmlformats.org/drawingml/2006/main" wrap="square" lIns="0" tIns="0" rIns="0" bIns="0" anchor="t">
-            <a:normAutofit fontScale="93023"/>
+            <a:normAutofit fontScale="95671"/>
           </a:bodyPr>
           <a:lstStyle xmlns:a="http://schemas.openxmlformats.org/drawingml/2006/main"/>
           <a:p xmlns:a="http://schemas.openxmlformats.org/drawingml/2006/main">
             <a:pPr algn="l">
               <a:defRPr sz="3225" b="1">
                 <a:solidFill>
-                  <a:srgbClr val="180D20"/>
-                </a:solidFill>
-                <a:latin typeface="Arial"/>
-                <a:ea typeface="Arial"/>
-                <a:cs typeface="Arial"/>
+                  <a:srgbClr val="FFF7ED"/>
+                </a:solidFill>
+                <a:latin typeface="Aptos"/>
+                <a:ea typeface="Aptos"/>
+                <a:cs typeface="Aptos"/>
               </a:defRPr>
             </a:pPr>
             <a:r>
@@ -2682,10 +3064,10 @@
       </p:sp>
       <p:sp>
         <p:nvSpPr>
-          <p:cNvPr id="4" name="cap-card-0">
-            <a:extLst xmlns:a="http://schemas.openxmlformats.org/drawingml/2006/main">
-              <a:ext uri="{FF2B5EF4-FFF2-40B4-BE49-F238E27FC236}">
-                <a16:creationId xmlns:a16="http://schemas.microsoft.com/office/drawing/2014/main" id="{23C57131-354B-423E-B6CD-BCA08F141EC8}"/>
+          <p:cNvPr id="7" name="cap-card-0">
+            <a:extLst xmlns:a="http://schemas.openxmlformats.org/drawingml/2006/main">
+              <a:ext uri="{FF2B5EF4-FFF2-40B4-BE49-F238E27FC236}">
+                <a16:creationId xmlns:a16="http://schemas.microsoft.com/office/drawing/2014/main" id="{D70234A3-B409-433C-83E0-3AA3A0FF9638}"/>
               </a:ext>
             </a:extLst>
           </p:cNvPr>
@@ -2705,16 +3087,16 @@
             </a:avLst>
           </a:prstGeom>
           <a:solidFill xmlns:a="http://schemas.openxmlformats.org/drawingml/2006/main">
-            <a:srgbClr val="FBF7EF"/>
-          </a:solidFill>
-        </p:spPr>
-      </p:sp>
-      <p:sp>
-        <p:nvSpPr>
-          <p:cNvPr id="5" name="cap-accent-0">
-            <a:extLst xmlns:a="http://schemas.openxmlformats.org/drawingml/2006/main">
-              <a:ext uri="{FF2B5EF4-FFF2-40B4-BE49-F238E27FC236}">
-                <a16:creationId xmlns:a16="http://schemas.microsoft.com/office/drawing/2014/main" id="{FBFC52CE-BBC5-4B62-81F4-3FDACD90F4D5}"/>
+            <a:srgbClr val="211512"/>
+          </a:solidFill>
+        </p:spPr>
+      </p:sp>
+      <p:sp>
+        <p:nvSpPr>
+          <p:cNvPr id="8" name="cap-accent-0">
+            <a:extLst xmlns:a="http://schemas.openxmlformats.org/drawingml/2006/main">
+              <a:ext uri="{FF2B5EF4-FFF2-40B4-BE49-F238E27FC236}">
+                <a16:creationId xmlns:a16="http://schemas.microsoft.com/office/drawing/2014/main" id="{5E0E2C55-CBC0-4A30-A23F-79C8019828E2}"/>
               </a:ext>
             </a:extLst>
           </p:cNvPr>
@@ -2734,16 +3116,16 @@
             </a:avLst>
           </a:prstGeom>
           <a:solidFill xmlns:a="http://schemas.openxmlformats.org/drawingml/2006/main">
-            <a:srgbClr val="E0B44F"/>
-          </a:solidFill>
-        </p:spPr>
-      </p:sp>
-      <p:sp>
-        <p:nvSpPr>
-          <p:cNvPr id="6" name="cap-title-0">
-            <a:extLst xmlns:a="http://schemas.openxmlformats.org/drawingml/2006/main">
-              <a:ext uri="{FF2B5EF4-FFF2-40B4-BE49-F238E27FC236}">
-                <a16:creationId xmlns:a16="http://schemas.microsoft.com/office/drawing/2014/main" id="{07423D7B-C12F-4C9B-9CE5-F5FCE9A32DEC}"/>
+            <a:srgbClr val="F6C453"/>
+          </a:solidFill>
+        </p:spPr>
+      </p:sp>
+      <p:sp>
+        <p:nvSpPr>
+          <p:cNvPr id="9" name="cap-title-0">
+            <a:extLst xmlns:a="http://schemas.openxmlformats.org/drawingml/2006/main">
+              <a:ext uri="{FF2B5EF4-FFF2-40B4-BE49-F238E27FC236}">
+                <a16:creationId xmlns:a16="http://schemas.microsoft.com/office/drawing/2014/main" id="{2FA8D1C1-9E1C-4783-B07A-B4E7DFE535CD}"/>
               </a:ext>
             </a:extLst>
           </p:cNvPr>
@@ -2770,11 +3152,11 @@
             <a:pPr algn="l">
               <a:defRPr sz="1875" b="1">
                 <a:solidFill>
-                  <a:srgbClr val="180D20"/>
-                </a:solidFill>
-                <a:latin typeface="Arial"/>
-                <a:ea typeface="Arial"/>
-                <a:cs typeface="Arial"/>
+                  <a:srgbClr val="FFF7ED"/>
+                </a:solidFill>
+                <a:latin typeface="Aptos"/>
+                <a:ea typeface="Aptos"/>
+                <a:cs typeface="Aptos"/>
               </a:defRPr>
             </a:pPr>
             <a:r>
@@ -2785,10 +3167,10 @@
       </p:sp>
       <p:sp>
         <p:nvSpPr>
-          <p:cNvPr id="7" name="cap-items-0">
-            <a:extLst xmlns:a="http://schemas.openxmlformats.org/drawingml/2006/main">
-              <a:ext uri="{FF2B5EF4-FFF2-40B4-BE49-F238E27FC236}">
-                <a16:creationId xmlns:a16="http://schemas.microsoft.com/office/drawing/2014/main" id="{DFD05DAB-4C81-4303-80A1-5CF6116D0CAE}"/>
+          <p:cNvPr id="10" name="cap-items-0">
+            <a:extLst xmlns:a="http://schemas.openxmlformats.org/drawingml/2006/main">
+              <a:ext uri="{FF2B5EF4-FFF2-40B4-BE49-F238E27FC236}">
+                <a16:creationId xmlns:a16="http://schemas.microsoft.com/office/drawing/2014/main" id="{D5B34844-3966-4B57-AE56-705691EAC93A}"/>
               </a:ext>
             </a:extLst>
           </p:cNvPr>
@@ -2815,11 +3197,11 @@
             <a:pPr algn="l">
               <a:defRPr sz="1350" b="0">
                 <a:solidFill>
-                  <a:srgbClr val="70647A"/>
-                </a:solidFill>
-                <a:latin typeface="Arial"/>
-                <a:ea typeface="Arial"/>
-                <a:cs typeface="Arial"/>
+                  <a:srgbClr val="B9A59B"/>
+                </a:solidFill>
+                <a:latin typeface="Aptos"/>
+                <a:ea typeface="Aptos"/>
+                <a:cs typeface="Aptos"/>
               </a:defRPr>
             </a:pPr>
             <a:r>
@@ -2832,10 +3214,10 @@
       </p:sp>
       <p:sp>
         <p:nvSpPr>
-          <p:cNvPr id="8" name="cap-card-1">
-            <a:extLst xmlns:a="http://schemas.openxmlformats.org/drawingml/2006/main">
-              <a:ext uri="{FF2B5EF4-FFF2-40B4-BE49-F238E27FC236}">
-                <a16:creationId xmlns:a16="http://schemas.microsoft.com/office/drawing/2014/main" id="{872455CC-9A24-410D-B995-B4EA7332FD1F}"/>
+          <p:cNvPr id="11" name="cap-card-1">
+            <a:extLst xmlns:a="http://schemas.openxmlformats.org/drawingml/2006/main">
+              <a:ext uri="{FF2B5EF4-FFF2-40B4-BE49-F238E27FC236}">
+                <a16:creationId xmlns:a16="http://schemas.microsoft.com/office/drawing/2014/main" id="{85860AA8-89C0-4566-9B0B-018800F752F4}"/>
               </a:ext>
             </a:extLst>
           </p:cNvPr>
@@ -2855,16 +3237,16 @@
             </a:avLst>
           </a:prstGeom>
           <a:solidFill xmlns:a="http://schemas.openxmlformats.org/drawingml/2006/main">
-            <a:srgbClr val="FBF7EF"/>
-          </a:solidFill>
-        </p:spPr>
-      </p:sp>
-      <p:sp>
-        <p:nvSpPr>
-          <p:cNvPr id="9" name="cap-accent-1">
-            <a:extLst xmlns:a="http://schemas.openxmlformats.org/drawingml/2006/main">
-              <a:ext uri="{FF2B5EF4-FFF2-40B4-BE49-F238E27FC236}">
-                <a16:creationId xmlns:a16="http://schemas.microsoft.com/office/drawing/2014/main" id="{755844F1-29E4-4E01-805E-B56E5150D21A}"/>
+            <a:srgbClr val="211512"/>
+          </a:solidFill>
+        </p:spPr>
+      </p:sp>
+      <p:sp>
+        <p:nvSpPr>
+          <p:cNvPr id="12" name="cap-accent-1">
+            <a:extLst xmlns:a="http://schemas.openxmlformats.org/drawingml/2006/main">
+              <a:ext uri="{FF2B5EF4-FFF2-40B4-BE49-F238E27FC236}">
+                <a16:creationId xmlns:a16="http://schemas.microsoft.com/office/drawing/2014/main" id="{B5C10258-8B0F-4073-A68A-4D9EA9E53A91}"/>
               </a:ext>
             </a:extLst>
           </p:cNvPr>
@@ -2884,16 +3266,16 @@
             </a:avLst>
           </a:prstGeom>
           <a:solidFill xmlns:a="http://schemas.openxmlformats.org/drawingml/2006/main">
-            <a:srgbClr val="A78BFA"/>
-          </a:solidFill>
-        </p:spPr>
-      </p:sp>
-      <p:sp>
-        <p:nvSpPr>
-          <p:cNvPr id="10" name="cap-title-1">
-            <a:extLst xmlns:a="http://schemas.openxmlformats.org/drawingml/2006/main">
-              <a:ext uri="{FF2B5EF4-FFF2-40B4-BE49-F238E27FC236}">
-                <a16:creationId xmlns:a16="http://schemas.microsoft.com/office/drawing/2014/main" id="{BB10AE61-C408-4CCE-B0A7-2B35DB5F053B}"/>
+            <a:srgbClr val="FF7A59"/>
+          </a:solidFill>
+        </p:spPr>
+      </p:sp>
+      <p:sp>
+        <p:nvSpPr>
+          <p:cNvPr id="13" name="cap-title-1">
+            <a:extLst xmlns:a="http://schemas.openxmlformats.org/drawingml/2006/main">
+              <a:ext uri="{FF2B5EF4-FFF2-40B4-BE49-F238E27FC236}">
+                <a16:creationId xmlns:a16="http://schemas.microsoft.com/office/drawing/2014/main" id="{8E72B33B-6AFF-478F-9C5C-E6F13E9B7CF8}"/>
               </a:ext>
             </a:extLst>
           </p:cNvPr>
@@ -2920,11 +3302,11 @@
             <a:pPr algn="l">
               <a:defRPr sz="1875" b="1">
                 <a:solidFill>
-                  <a:srgbClr val="180D20"/>
-                </a:solidFill>
-                <a:latin typeface="Arial"/>
-                <a:ea typeface="Arial"/>
-                <a:cs typeface="Arial"/>
+                  <a:srgbClr val="FFF7ED"/>
+                </a:solidFill>
+                <a:latin typeface="Aptos"/>
+                <a:ea typeface="Aptos"/>
+                <a:cs typeface="Aptos"/>
               </a:defRPr>
             </a:pPr>
             <a:r>
@@ -2935,10 +3317,10 @@
       </p:sp>
       <p:sp>
         <p:nvSpPr>
-          <p:cNvPr id="11" name="cap-items-1">
-            <a:extLst xmlns:a="http://schemas.openxmlformats.org/drawingml/2006/main">
-              <a:ext uri="{FF2B5EF4-FFF2-40B4-BE49-F238E27FC236}">
-                <a16:creationId xmlns:a16="http://schemas.microsoft.com/office/drawing/2014/main" id="{6133E922-869C-4AE2-ADAC-2E9AB0497F79}"/>
+          <p:cNvPr id="14" name="cap-items-1">
+            <a:extLst xmlns:a="http://schemas.openxmlformats.org/drawingml/2006/main">
+              <a:ext uri="{FF2B5EF4-FFF2-40B4-BE49-F238E27FC236}">
+                <a16:creationId xmlns:a16="http://schemas.microsoft.com/office/drawing/2014/main" id="{2581EC3C-298A-42DD-A365-5BB1704A1912}"/>
               </a:ext>
             </a:extLst>
           </p:cNvPr>
@@ -2965,11 +3347,11 @@
             <a:pPr algn="l">
               <a:defRPr sz="1350" b="0">
                 <a:solidFill>
-                  <a:srgbClr val="70647A"/>
-                </a:solidFill>
-                <a:latin typeface="Arial"/>
-                <a:ea typeface="Arial"/>
-                <a:cs typeface="Arial"/>
+                  <a:srgbClr val="B9A59B"/>
+                </a:solidFill>
+                <a:latin typeface="Aptos"/>
+                <a:ea typeface="Aptos"/>
+                <a:cs typeface="Aptos"/>
               </a:defRPr>
             </a:pPr>
             <a:r>
@@ -2982,10 +3364,10 @@
       </p:sp>
       <p:sp>
         <p:nvSpPr>
-          <p:cNvPr id="12" name="cap-card-2">
-            <a:extLst xmlns:a="http://schemas.openxmlformats.org/drawingml/2006/main">
-              <a:ext uri="{FF2B5EF4-FFF2-40B4-BE49-F238E27FC236}">
-                <a16:creationId xmlns:a16="http://schemas.microsoft.com/office/drawing/2014/main" id="{9B9AF789-5EF2-4354-89BE-7894D0396263}"/>
+          <p:cNvPr id="15" name="cap-card-2">
+            <a:extLst xmlns:a="http://schemas.openxmlformats.org/drawingml/2006/main">
+              <a:ext uri="{FF2B5EF4-FFF2-40B4-BE49-F238E27FC236}">
+                <a16:creationId xmlns:a16="http://schemas.microsoft.com/office/drawing/2014/main" id="{302C1425-5037-47F7-9CE7-6E46B6B4EC37}"/>
               </a:ext>
             </a:extLst>
           </p:cNvPr>
@@ -3005,16 +3387,16 @@
             </a:avLst>
           </a:prstGeom>
           <a:solidFill xmlns:a="http://schemas.openxmlformats.org/drawingml/2006/main">
-            <a:srgbClr val="FBF7EF"/>
-          </a:solidFill>
-        </p:spPr>
-      </p:sp>
-      <p:sp>
-        <p:nvSpPr>
-          <p:cNvPr id="13" name="cap-accent-2">
-            <a:extLst xmlns:a="http://schemas.openxmlformats.org/drawingml/2006/main">
-              <a:ext uri="{FF2B5EF4-FFF2-40B4-BE49-F238E27FC236}">
-                <a16:creationId xmlns:a16="http://schemas.microsoft.com/office/drawing/2014/main" id="{343F16CC-B37A-4259-A483-E706B03DB10D}"/>
+            <a:srgbClr val="211512"/>
+          </a:solidFill>
+        </p:spPr>
+      </p:sp>
+      <p:sp>
+        <p:nvSpPr>
+          <p:cNvPr id="16" name="cap-accent-2">
+            <a:extLst xmlns:a="http://schemas.openxmlformats.org/drawingml/2006/main">
+              <a:ext uri="{FF2B5EF4-FFF2-40B4-BE49-F238E27FC236}">
+                <a16:creationId xmlns:a16="http://schemas.microsoft.com/office/drawing/2014/main" id="{D206CACF-31B5-4282-8A85-7444DAEB6B7C}"/>
               </a:ext>
             </a:extLst>
           </p:cNvPr>
@@ -3034,16 +3416,16 @@
             </a:avLst>
           </a:prstGeom>
           <a:solidFill xmlns:a="http://schemas.openxmlformats.org/drawingml/2006/main">
-            <a:srgbClr val="E65FA8"/>
-          </a:solidFill>
-        </p:spPr>
-      </p:sp>
-      <p:sp>
-        <p:nvSpPr>
-          <p:cNvPr id="14" name="cap-title-2">
-            <a:extLst xmlns:a="http://schemas.openxmlformats.org/drawingml/2006/main">
-              <a:ext uri="{FF2B5EF4-FFF2-40B4-BE49-F238E27FC236}">
-                <a16:creationId xmlns:a16="http://schemas.microsoft.com/office/drawing/2014/main" id="{FD138D6A-57AE-44F7-BC04-AA17287EAF66}"/>
+            <a:srgbClr val="5EEAD4"/>
+          </a:solidFill>
+        </p:spPr>
+      </p:sp>
+      <p:sp>
+        <p:nvSpPr>
+          <p:cNvPr id="17" name="cap-title-2">
+            <a:extLst xmlns:a="http://schemas.openxmlformats.org/drawingml/2006/main">
+              <a:ext uri="{FF2B5EF4-FFF2-40B4-BE49-F238E27FC236}">
+                <a16:creationId xmlns:a16="http://schemas.microsoft.com/office/drawing/2014/main" id="{0F46EF4D-8CF8-4E36-8625-658DAE29A08B}"/>
               </a:ext>
             </a:extLst>
           </p:cNvPr>
@@ -3070,11 +3452,11 @@
             <a:pPr algn="l">
               <a:defRPr sz="1875" b="1">
                 <a:solidFill>
-                  <a:srgbClr val="180D20"/>
-                </a:solidFill>
-                <a:latin typeface="Arial"/>
-                <a:ea typeface="Arial"/>
-                <a:cs typeface="Arial"/>
+                  <a:srgbClr val="FFF7ED"/>
+                </a:solidFill>
+                <a:latin typeface="Aptos"/>
+                <a:ea typeface="Aptos"/>
+                <a:cs typeface="Aptos"/>
               </a:defRPr>
             </a:pPr>
             <a:r>
@@ -3085,10 +3467,10 @@
       </p:sp>
       <p:sp>
         <p:nvSpPr>
-          <p:cNvPr id="15" name="cap-items-2">
-            <a:extLst xmlns:a="http://schemas.openxmlformats.org/drawingml/2006/main">
-              <a:ext uri="{FF2B5EF4-FFF2-40B4-BE49-F238E27FC236}">
-                <a16:creationId xmlns:a16="http://schemas.microsoft.com/office/drawing/2014/main" id="{4631D334-F265-4F31-8F48-061F013B20E2}"/>
+          <p:cNvPr id="18" name="cap-items-2">
+            <a:extLst xmlns:a="http://schemas.openxmlformats.org/drawingml/2006/main">
+              <a:ext uri="{FF2B5EF4-FFF2-40B4-BE49-F238E27FC236}">
+                <a16:creationId xmlns:a16="http://schemas.microsoft.com/office/drawing/2014/main" id="{F83A15FF-2645-4414-8832-F7F68FCD24C5}"/>
               </a:ext>
             </a:extLst>
           </p:cNvPr>
@@ -3115,11 +3497,11 @@
             <a:pPr algn="l">
               <a:defRPr sz="1350" b="0">
                 <a:solidFill>
-                  <a:srgbClr val="70647A"/>
-                </a:solidFill>
-                <a:latin typeface="Arial"/>
-                <a:ea typeface="Arial"/>
-                <a:cs typeface="Arial"/>
+                  <a:srgbClr val="B9A59B"/>
+                </a:solidFill>
+                <a:latin typeface="Aptos"/>
+                <a:ea typeface="Aptos"/>
+                <a:cs typeface="Aptos"/>
               </a:defRPr>
             </a:pPr>
             <a:r>
@@ -3132,10 +3514,10 @@
       </p:sp>
       <p:sp>
         <p:nvSpPr>
-          <p:cNvPr id="16" name="cap-card-3">
-            <a:extLst xmlns:a="http://schemas.openxmlformats.org/drawingml/2006/main">
-              <a:ext uri="{FF2B5EF4-FFF2-40B4-BE49-F238E27FC236}">
-                <a16:creationId xmlns:a16="http://schemas.microsoft.com/office/drawing/2014/main" id="{0FB20EF8-026F-419F-B2EB-59A99628B400}"/>
+          <p:cNvPr id="19" name="cap-card-3">
+            <a:extLst xmlns:a="http://schemas.openxmlformats.org/drawingml/2006/main">
+              <a:ext uri="{FF2B5EF4-FFF2-40B4-BE49-F238E27FC236}">
+                <a16:creationId xmlns:a16="http://schemas.microsoft.com/office/drawing/2014/main" id="{00AD3F9A-2F9F-42A8-9EEC-BC7BBB653F3D}"/>
               </a:ext>
             </a:extLst>
           </p:cNvPr>
@@ -3155,16 +3537,16 @@
             </a:avLst>
           </a:prstGeom>
           <a:solidFill xmlns:a="http://schemas.openxmlformats.org/drawingml/2006/main">
-            <a:srgbClr val="FBF7EF"/>
-          </a:solidFill>
-        </p:spPr>
-      </p:sp>
-      <p:sp>
-        <p:nvSpPr>
-          <p:cNvPr id="17" name="cap-accent-3">
-            <a:extLst xmlns:a="http://schemas.openxmlformats.org/drawingml/2006/main">
-              <a:ext uri="{FF2B5EF4-FFF2-40B4-BE49-F238E27FC236}">
-                <a16:creationId xmlns:a16="http://schemas.microsoft.com/office/drawing/2014/main" id="{CBE2A702-EF9B-4BE0-91EE-04C11F2C1EEE}"/>
+            <a:srgbClr val="211512"/>
+          </a:solidFill>
+        </p:spPr>
+      </p:sp>
+      <p:sp>
+        <p:nvSpPr>
+          <p:cNvPr id="20" name="cap-accent-3">
+            <a:extLst xmlns:a="http://schemas.openxmlformats.org/drawingml/2006/main">
+              <a:ext uri="{FF2B5EF4-FFF2-40B4-BE49-F238E27FC236}">
+                <a16:creationId xmlns:a16="http://schemas.microsoft.com/office/drawing/2014/main" id="{78038493-D742-46A2-810D-334A297473EC}"/>
               </a:ext>
             </a:extLst>
           </p:cNvPr>
@@ -3184,16 +3566,16 @@
             </a:avLst>
           </a:prstGeom>
           <a:solidFill xmlns:a="http://schemas.openxmlformats.org/drawingml/2006/main">
-            <a:srgbClr val="6845C6"/>
-          </a:solidFill>
-        </p:spPr>
-      </p:sp>
-      <p:sp>
-        <p:nvSpPr>
-          <p:cNvPr id="18" name="cap-title-3">
-            <a:extLst xmlns:a="http://schemas.openxmlformats.org/drawingml/2006/main">
-              <a:ext uri="{FF2B5EF4-FFF2-40B4-BE49-F238E27FC236}">
-                <a16:creationId xmlns:a16="http://schemas.microsoft.com/office/drawing/2014/main" id="{1459A81A-DA91-4FC1-B32E-19A8C4123223}"/>
+            <a:srgbClr val="FF7A59"/>
+          </a:solidFill>
+        </p:spPr>
+      </p:sp>
+      <p:sp>
+        <p:nvSpPr>
+          <p:cNvPr id="21" name="cap-title-3">
+            <a:extLst xmlns:a="http://schemas.openxmlformats.org/drawingml/2006/main">
+              <a:ext uri="{FF2B5EF4-FFF2-40B4-BE49-F238E27FC236}">
+                <a16:creationId xmlns:a16="http://schemas.microsoft.com/office/drawing/2014/main" id="{4FD9EE16-2403-42D8-B0FA-91EE101D2819}"/>
               </a:ext>
             </a:extLst>
           </p:cNvPr>
@@ -3220,11 +3602,11 @@
             <a:pPr algn="l">
               <a:defRPr sz="1875" b="1">
                 <a:solidFill>
-                  <a:srgbClr val="180D20"/>
-                </a:solidFill>
-                <a:latin typeface="Arial"/>
-                <a:ea typeface="Arial"/>
-                <a:cs typeface="Arial"/>
+                  <a:srgbClr val="FFF7ED"/>
+                </a:solidFill>
+                <a:latin typeface="Aptos"/>
+                <a:ea typeface="Aptos"/>
+                <a:cs typeface="Aptos"/>
               </a:defRPr>
             </a:pPr>
             <a:r>
@@ -3235,10 +3617,10 @@
       </p:sp>
       <p:sp>
         <p:nvSpPr>
-          <p:cNvPr id="19" name="cap-items-3">
-            <a:extLst xmlns:a="http://schemas.openxmlformats.org/drawingml/2006/main">
-              <a:ext uri="{FF2B5EF4-FFF2-40B4-BE49-F238E27FC236}">
-                <a16:creationId xmlns:a16="http://schemas.microsoft.com/office/drawing/2014/main" id="{D9EEFA4E-1713-48DF-912E-53E070E40D85}"/>
+          <p:cNvPr id="22" name="cap-items-3">
+            <a:extLst xmlns:a="http://schemas.openxmlformats.org/drawingml/2006/main">
+              <a:ext uri="{FF2B5EF4-FFF2-40B4-BE49-F238E27FC236}">
+                <a16:creationId xmlns:a16="http://schemas.microsoft.com/office/drawing/2014/main" id="{77F90BBC-A75F-4DDC-8F08-70FAD248E466}"/>
               </a:ext>
             </a:extLst>
           </p:cNvPr>
@@ -3265,11 +3647,11 @@
             <a:pPr algn="l">
               <a:defRPr sz="1350" b="0">
                 <a:solidFill>
-                  <a:srgbClr val="70647A"/>
-                </a:solidFill>
-                <a:latin typeface="Arial"/>
-                <a:ea typeface="Arial"/>
-                <a:cs typeface="Arial"/>
+                  <a:srgbClr val="B9A59B"/>
+                </a:solidFill>
+                <a:latin typeface="Aptos"/>
+                <a:ea typeface="Aptos"/>
+                <a:cs typeface="Aptos"/>
               </a:defRPr>
             </a:pPr>
             <a:r>
@@ -3282,10 +3664,10 @@
       </p:sp>
       <p:sp>
         <p:nvSpPr>
-          <p:cNvPr id="20" name="credentials-strip">
-            <a:extLst xmlns:a="http://schemas.openxmlformats.org/drawingml/2006/main">
-              <a:ext uri="{FF2B5EF4-FFF2-40B4-BE49-F238E27FC236}">
-                <a16:creationId xmlns:a16="http://schemas.microsoft.com/office/drawing/2014/main" id="{DFAAE59E-9589-407E-8F70-0BA07A8A3260}"/>
+          <p:cNvPr id="23" name="credentials-strip">
+            <a:extLst xmlns:a="http://schemas.openxmlformats.org/drawingml/2006/main">
+              <a:ext uri="{FF2B5EF4-FFF2-40B4-BE49-F238E27FC236}">
+                <a16:creationId xmlns:a16="http://schemas.microsoft.com/office/drawing/2014/main" id="{695A0D71-766D-41C3-95ED-42F7A90295D1}"/>
               </a:ext>
             </a:extLst>
           </p:cNvPr>
@@ -3305,16 +3687,16 @@
             </a:avLst>
           </a:prstGeom>
           <a:solidFill xmlns:a="http://schemas.openxmlformats.org/drawingml/2006/main">
-            <a:srgbClr val="F1EBFF"/>
-          </a:solidFill>
-        </p:spPr>
-      </p:sp>
-      <p:sp>
-        <p:nvSpPr>
-          <p:cNvPr id="21" name="credentials-label">
-            <a:extLst xmlns:a="http://schemas.openxmlformats.org/drawingml/2006/main">
-              <a:ext uri="{FF2B5EF4-FFF2-40B4-BE49-F238E27FC236}">
-                <a16:creationId xmlns:a16="http://schemas.microsoft.com/office/drawing/2014/main" id="{40127A28-820F-42B9-AA39-AEA5B9A3C847}"/>
+            <a:srgbClr val="2A1A17"/>
+          </a:solidFill>
+        </p:spPr>
+      </p:sp>
+      <p:sp>
+        <p:nvSpPr>
+          <p:cNvPr id="24" name="credentials-label">
+            <a:extLst xmlns:a="http://schemas.openxmlformats.org/drawingml/2006/main">
+              <a:ext uri="{FF2B5EF4-FFF2-40B4-BE49-F238E27FC236}">
+                <a16:creationId xmlns:a16="http://schemas.microsoft.com/office/drawing/2014/main" id="{DD0C9F4A-81BC-46F0-B612-CBF8B437653B}"/>
               </a:ext>
             </a:extLst>
           </p:cNvPr>
@@ -3341,11 +3723,11 @@
             <a:pPr algn="l">
               <a:defRPr sz="975" b="1">
                 <a:solidFill>
-                  <a:srgbClr val="6845C6"/>
-                </a:solidFill>
-                <a:latin typeface="Arial"/>
-                <a:ea typeface="Arial"/>
-                <a:cs typeface="Arial"/>
+                  <a:srgbClr val="FF7A59"/>
+                </a:solidFill>
+                <a:latin typeface="Aptos"/>
+                <a:ea typeface="Aptos"/>
+                <a:cs typeface="Aptos"/>
               </a:defRPr>
             </a:pPr>
             <a:r>
@@ -3356,10 +3738,10 @@
       </p:sp>
       <p:sp>
         <p:nvSpPr>
-          <p:cNvPr id="22" name="credentials-text">
-            <a:extLst xmlns:a="http://schemas.openxmlformats.org/drawingml/2006/main">
-              <a:ext uri="{FF2B5EF4-FFF2-40B4-BE49-F238E27FC236}">
-                <a16:creationId xmlns:a16="http://schemas.microsoft.com/office/drawing/2014/main" id="{CEEA3CB4-9B1D-46AD-BCE7-D4C380928E00}"/>
+          <p:cNvPr id="25" name="credentials-text">
+            <a:extLst xmlns:a="http://schemas.openxmlformats.org/drawingml/2006/main">
+              <a:ext uri="{FF2B5EF4-FFF2-40B4-BE49-F238E27FC236}">
+                <a16:creationId xmlns:a16="http://schemas.microsoft.com/office/drawing/2014/main" id="{28F2941A-7A0C-4D1F-B6B8-C101B49E0A71}"/>
               </a:ext>
             </a:extLst>
           </p:cNvPr>
@@ -3386,11 +3768,11 @@
             <a:pPr algn="l">
               <a:defRPr sz="1200" b="1">
                 <a:solidFill>
-                  <a:srgbClr val="180D20"/>
-                </a:solidFill>
-                <a:latin typeface="Arial"/>
-                <a:ea typeface="Arial"/>
-                <a:cs typeface="Arial"/>
+                  <a:srgbClr val="FFF7ED"/>
+                </a:solidFill>
+                <a:latin typeface="Aptos"/>
+                <a:ea typeface="Aptos"/>
+                <a:cs typeface="Aptos"/>
               </a:defRPr>
             </a:pPr>
             <a:r>
@@ -3401,10 +3783,10 @@
       </p:sp>
       <p:sp>
         <p:nvSpPr>
-          <p:cNvPr id="23" name="footer-line-10">
-            <a:extLst xmlns:a="http://schemas.openxmlformats.org/drawingml/2006/main">
-              <a:ext uri="{FF2B5EF4-FFF2-40B4-BE49-F238E27FC236}">
-                <a16:creationId xmlns:a16="http://schemas.microsoft.com/office/drawing/2014/main" id="{8B949F16-F0C7-481D-AF0C-9D2B115588EA}"/>
+          <p:cNvPr id="26" name="footer-line-gold-10">
+            <a:extLst xmlns:a="http://schemas.openxmlformats.org/drawingml/2006/main">
+              <a:ext uri="{FF2B5EF4-FFF2-40B4-BE49-F238E27FC236}">
+                <a16:creationId xmlns:a16="http://schemas.microsoft.com/office/drawing/2014/main" id="{02A0BE57-853F-499F-911F-28B42EE3400D}"/>
               </a:ext>
             </a:extLst>
           </p:cNvPr>
@@ -3416,22 +3798,76 @@
         <p:spPr>
           <a:xfrm xmlns:a="http://schemas.openxmlformats.org/drawingml/2006/main">
             <a:off x="400050" y="6429375"/>
-            <a:ext cx="10553700" cy="19050"/>
-          </a:xfrm>
-          <a:prstGeom xmlns:a="http://schemas.openxmlformats.org/drawingml/2006/main" prst="rect">
-            <a:avLst/>
-          </a:prstGeom>
-          <a:solidFill xmlns:a="http://schemas.openxmlformats.org/drawingml/2006/main">
-            <a:srgbClr val="DED4E6"/>
-          </a:solidFill>
-        </p:spPr>
-      </p:sp>
-      <p:sp>
-        <p:nvSpPr>
-          <p:cNvPr id="24" name="footer-name-10">
-            <a:extLst xmlns:a="http://schemas.openxmlformats.org/drawingml/2006/main">
-              <a:ext uri="{FF2B5EF4-FFF2-40B4-BE49-F238E27FC236}">
-                <a16:creationId xmlns:a16="http://schemas.microsoft.com/office/drawing/2014/main" id="{3B5E951F-09E3-40EE-8F00-1DC1BF45A6BB}"/>
+            <a:ext cx="5276850" cy="19050"/>
+          </a:xfrm>
+          <a:prstGeom xmlns:a="http://schemas.openxmlformats.org/drawingml/2006/main" prst="rect">
+            <a:avLst/>
+          </a:prstGeom>
+          <a:solidFill xmlns:a="http://schemas.openxmlformats.org/drawingml/2006/main">
+            <a:srgbClr val="F6C453"/>
+          </a:solidFill>
+        </p:spPr>
+      </p:sp>
+      <p:sp>
+        <p:nvSpPr>
+          <p:cNvPr id="27" name="footer-line-coral-10">
+            <a:extLst xmlns:a="http://schemas.openxmlformats.org/drawingml/2006/main">
+              <a:ext uri="{FF2B5EF4-FFF2-40B4-BE49-F238E27FC236}">
+                <a16:creationId xmlns:a16="http://schemas.microsoft.com/office/drawing/2014/main" id="{2ABB7C74-50EA-4556-B284-52C974F057C0}"/>
+              </a:ext>
+            </a:extLst>
+          </p:cNvPr>
+          <p:cNvSpPr>
+            <a:spLocks xmlns:a="http://schemas.openxmlformats.org/drawingml/2006/main" noGrp="1"/>
+          </p:cNvSpPr>
+          <p:nvPr/>
+        </p:nvSpPr>
+        <p:spPr>
+          <a:xfrm xmlns:a="http://schemas.openxmlformats.org/drawingml/2006/main">
+            <a:off x="5676900" y="6429375"/>
+            <a:ext cx="2638425" cy="19050"/>
+          </a:xfrm>
+          <a:prstGeom xmlns:a="http://schemas.openxmlformats.org/drawingml/2006/main" prst="rect">
+            <a:avLst/>
+          </a:prstGeom>
+          <a:solidFill xmlns:a="http://schemas.openxmlformats.org/drawingml/2006/main">
+            <a:srgbClr val="FF7A59"/>
+          </a:solidFill>
+        </p:spPr>
+      </p:sp>
+      <p:sp>
+        <p:nvSpPr>
+          <p:cNvPr id="28" name="footer-line-teal-10">
+            <a:extLst xmlns:a="http://schemas.openxmlformats.org/drawingml/2006/main">
+              <a:ext uri="{FF2B5EF4-FFF2-40B4-BE49-F238E27FC236}">
+                <a16:creationId xmlns:a16="http://schemas.microsoft.com/office/drawing/2014/main" id="{3E31BD39-95D7-4C41-BB0C-E9A21D3C417C}"/>
+              </a:ext>
+            </a:extLst>
+          </p:cNvPr>
+          <p:cNvSpPr>
+            <a:spLocks xmlns:a="http://schemas.openxmlformats.org/drawingml/2006/main" noGrp="1"/>
+          </p:cNvSpPr>
+          <p:nvPr/>
+        </p:nvSpPr>
+        <p:spPr>
+          <a:xfrm xmlns:a="http://schemas.openxmlformats.org/drawingml/2006/main">
+            <a:off x="8315325" y="6429375"/>
+            <a:ext cx="2638425" cy="19050"/>
+          </a:xfrm>
+          <a:prstGeom xmlns:a="http://schemas.openxmlformats.org/drawingml/2006/main" prst="rect">
+            <a:avLst/>
+          </a:prstGeom>
+          <a:solidFill xmlns:a="http://schemas.openxmlformats.org/drawingml/2006/main">
+            <a:srgbClr val="5EEAD4"/>
+          </a:solidFill>
+        </p:spPr>
+      </p:sp>
+      <p:sp>
+        <p:nvSpPr>
+          <p:cNvPr id="29" name="footer-name-10">
+            <a:extLst xmlns:a="http://schemas.openxmlformats.org/drawingml/2006/main">
+              <a:ext uri="{FF2B5EF4-FFF2-40B4-BE49-F238E27FC236}">
+                <a16:creationId xmlns:a16="http://schemas.microsoft.com/office/drawing/2014/main" id="{4526108F-E9B7-4E95-997C-7635A4B60604}"/>
               </a:ext>
             </a:extLst>
           </p:cNvPr>
@@ -3458,25 +3894,25 @@
             <a:pPr algn="l">
               <a:defRPr sz="825" b="1">
                 <a:solidFill>
-                  <a:srgbClr val="70647A"/>
-                </a:solidFill>
-                <a:latin typeface="Arial"/>
-                <a:ea typeface="Arial"/>
-                <a:cs typeface="Arial"/>
-              </a:defRPr>
-            </a:pPr>
-            <a:r>
-              <a:t>MUHAMMAD ALI AKBAR AL-QAHRI  /  DATA PORTFOLIO</a:t>
-            </a:r>
-          </a:p>
-        </p:txBody>
-      </p:sp>
-      <p:sp>
-        <p:nvSpPr>
-          <p:cNvPr id="25" name="footer-page-10">
-            <a:extLst xmlns:a="http://schemas.openxmlformats.org/drawingml/2006/main">
-              <a:ext uri="{FF2B5EF4-FFF2-40B4-BE49-F238E27FC236}">
-                <a16:creationId xmlns:a16="http://schemas.microsoft.com/office/drawing/2014/main" id="{C97D4472-CE2F-430E-AFDA-4421E429D713}"/>
+                  <a:srgbClr val="B9A59B"/>
+                </a:solidFill>
+                <a:latin typeface="Consolas"/>
+                <a:ea typeface="Consolas"/>
+                <a:cs typeface="Consolas"/>
+              </a:defRPr>
+            </a:pPr>
+            <a:r>
+              <a:t>~/ali_  /  DATA INTELLIGENCE PORTFOLIO</a:t>
+            </a:r>
+          </a:p>
+        </p:txBody>
+      </p:sp>
+      <p:sp>
+        <p:nvSpPr>
+          <p:cNvPr id="30" name="footer-page-10">
+            <a:extLst xmlns:a="http://schemas.openxmlformats.org/drawingml/2006/main">
+              <a:ext uri="{FF2B5EF4-FFF2-40B4-BE49-F238E27FC236}">
+                <a16:creationId xmlns:a16="http://schemas.microsoft.com/office/drawing/2014/main" id="{9CA32CBC-FEDC-4DAE-AA83-BE86FF0671A9}"/>
               </a:ext>
             </a:extLst>
           </p:cNvPr>
@@ -3503,11 +3939,11 @@
             <a:pPr algn="r">
               <a:defRPr sz="900" b="1">
                 <a:solidFill>
-                  <a:srgbClr val="70647A"/>
-                </a:solidFill>
-                <a:latin typeface="Arial"/>
-                <a:ea typeface="Arial"/>
-                <a:cs typeface="Arial"/>
+                  <a:srgbClr val="F6C453"/>
+                </a:solidFill>
+                <a:latin typeface="Consolas"/>
+                <a:ea typeface="Consolas"/>
+                <a:cs typeface="Consolas"/>
               </a:defRPr>
             </a:pPr>
             <a:r>
@@ -3519,7 +3955,7 @@
     </p:spTree>
     <p:extLst>
       <p:ext uri="{BB962C8B-B14F-4D97-AF65-F5344CB8AC3E}">
-        <p14:creationId xmlns:p14="http://schemas.microsoft.com/office/powerpoint/2010/main" val="2040103951"/>
+        <p14:creationId xmlns:p14="http://schemas.microsoft.com/office/powerpoint/2010/main" val="452186851"/>
       </p:ext>
     </p:extLst>
   </p:cSld>
@@ -3540,10 +3976,10 @@
       </p:grpSpPr>
       <p:sp>
         <p:nvSpPr>
-          <p:cNvPr id="14" name="11-closing-canvas">
-            <a:extLst xmlns:a="http://schemas.openxmlformats.org/drawingml/2006/main">
-              <a:ext uri="{FF2B5EF4-FFF2-40B4-BE49-F238E27FC236}">
-                <a16:creationId xmlns:a16="http://schemas.microsoft.com/office/drawing/2014/main" id="{C61273E1-5C14-482D-BA15-61DB09C9A266}"/>
+          <p:cNvPr id="23" name="11-closing-canvas">
+            <a:extLst xmlns:a="http://schemas.openxmlformats.org/drawingml/2006/main">
+              <a:ext uri="{FF2B5EF4-FFF2-40B4-BE49-F238E27FC236}">
+                <a16:creationId xmlns:a16="http://schemas.microsoft.com/office/drawing/2014/main" id="{EE019D46-0672-44F2-ACF9-957F7C9AA6F2}"/>
               </a:ext>
             </a:extLst>
           </p:cNvPr>
@@ -3561,16 +3997,97 @@
             <a:avLst/>
           </a:prstGeom>
           <a:solidFill xmlns:a="http://schemas.openxmlformats.org/drawingml/2006/main">
-            <a:srgbClr val="FFFFFF"/>
-          </a:solidFill>
-        </p:spPr>
-      </p:sp>
-      <p:sp>
-        <p:nvSpPr>
-          <p:cNvPr id="2" name="closing-blue">
-            <a:extLst xmlns:a="http://schemas.openxmlformats.org/drawingml/2006/main">
-              <a:ext uri="{FF2B5EF4-FFF2-40B4-BE49-F238E27FC236}">
-                <a16:creationId xmlns:a16="http://schemas.microsoft.com/office/drawing/2014/main" id="{6BEE99CF-85B3-44A5-89CA-A491A88BB6BD}"/>
+            <a:srgbClr val="120B0A"/>
+          </a:solidFill>
+        </p:spPr>
+      </p:sp>
+      <p:sp>
+        <p:nvSpPr>
+          <p:cNvPr id="2" name="11-closing-edge-gold">
+            <a:extLst xmlns:a="http://schemas.openxmlformats.org/drawingml/2006/main">
+              <a:ext uri="{FF2B5EF4-FFF2-40B4-BE49-F238E27FC236}">
+                <a16:creationId xmlns:a16="http://schemas.microsoft.com/office/drawing/2014/main" id="{D8A331F0-780E-4ECB-8D14-DC506CC5557E}"/>
+              </a:ext>
+            </a:extLst>
+          </p:cNvPr>
+          <p:cNvSpPr>
+            <a:spLocks xmlns:a="http://schemas.openxmlformats.org/drawingml/2006/main" noGrp="1"/>
+          </p:cNvSpPr>
+          <p:nvPr/>
+        </p:nvSpPr>
+        <p:spPr>
+          <a:xfrm xmlns:a="http://schemas.openxmlformats.org/drawingml/2006/main">
+            <a:off x="0" y="0"/>
+            <a:ext cx="38100" cy="2286000"/>
+          </a:xfrm>
+          <a:prstGeom xmlns:a="http://schemas.openxmlformats.org/drawingml/2006/main" prst="rect">
+            <a:avLst/>
+          </a:prstGeom>
+          <a:solidFill xmlns:a="http://schemas.openxmlformats.org/drawingml/2006/main">
+            <a:srgbClr val="F6C453"/>
+          </a:solidFill>
+        </p:spPr>
+      </p:sp>
+      <p:sp>
+        <p:nvSpPr>
+          <p:cNvPr id="3" name="11-closing-edge-coral">
+            <a:extLst xmlns:a="http://schemas.openxmlformats.org/drawingml/2006/main">
+              <a:ext uri="{FF2B5EF4-FFF2-40B4-BE49-F238E27FC236}">
+                <a16:creationId xmlns:a16="http://schemas.microsoft.com/office/drawing/2014/main" id="{5CA79AD8-63F2-4202-AC54-E9B7FFA0D671}"/>
+              </a:ext>
+            </a:extLst>
+          </p:cNvPr>
+          <p:cNvSpPr>
+            <a:spLocks xmlns:a="http://schemas.openxmlformats.org/drawingml/2006/main" noGrp="1"/>
+          </p:cNvSpPr>
+          <p:nvPr/>
+        </p:nvSpPr>
+        <p:spPr>
+          <a:xfrm xmlns:a="http://schemas.openxmlformats.org/drawingml/2006/main">
+            <a:off x="0" y="2286000"/>
+            <a:ext cx="38100" cy="2286000"/>
+          </a:xfrm>
+          <a:prstGeom xmlns:a="http://schemas.openxmlformats.org/drawingml/2006/main" prst="rect">
+            <a:avLst/>
+          </a:prstGeom>
+          <a:solidFill xmlns:a="http://schemas.openxmlformats.org/drawingml/2006/main">
+            <a:srgbClr val="FF7A59"/>
+          </a:solidFill>
+        </p:spPr>
+      </p:sp>
+      <p:sp>
+        <p:nvSpPr>
+          <p:cNvPr id="4" name="11-closing-edge-teal">
+            <a:extLst xmlns:a="http://schemas.openxmlformats.org/drawingml/2006/main">
+              <a:ext uri="{FF2B5EF4-FFF2-40B4-BE49-F238E27FC236}">
+                <a16:creationId xmlns:a16="http://schemas.microsoft.com/office/drawing/2014/main" id="{36291A8E-E7C1-4BAA-A11C-407635253644}"/>
+              </a:ext>
+            </a:extLst>
+          </p:cNvPr>
+          <p:cNvSpPr>
+            <a:spLocks xmlns:a="http://schemas.openxmlformats.org/drawingml/2006/main" noGrp="1"/>
+          </p:cNvSpPr>
+          <p:nvPr/>
+        </p:nvSpPr>
+        <p:spPr>
+          <a:xfrm xmlns:a="http://schemas.openxmlformats.org/drawingml/2006/main">
+            <a:off x="0" y="4572000"/>
+            <a:ext cx="38100" cy="2286000"/>
+          </a:xfrm>
+          <a:prstGeom xmlns:a="http://schemas.openxmlformats.org/drawingml/2006/main" prst="rect">
+            <a:avLst/>
+          </a:prstGeom>
+          <a:solidFill xmlns:a="http://schemas.openxmlformats.org/drawingml/2006/main">
+            <a:srgbClr val="5EEAD4"/>
+          </a:solidFill>
+        </p:spPr>
+      </p:sp>
+      <p:sp>
+        <p:nvSpPr>
+          <p:cNvPr id="5" name="closing-left">
+            <a:extLst xmlns:a="http://schemas.openxmlformats.org/drawingml/2006/main">
+              <a:ext uri="{FF2B5EF4-FFF2-40B4-BE49-F238E27FC236}">
+                <a16:creationId xmlns:a16="http://schemas.microsoft.com/office/drawing/2014/main" id="{1932158F-122F-4677-978A-AC506F01BEA1}"/>
               </a:ext>
             </a:extLst>
           </p:cNvPr>
@@ -3588,102 +4105,189 @@
             <a:avLst/>
           </a:prstGeom>
           <a:solidFill xmlns:a="http://schemas.openxmlformats.org/drawingml/2006/main">
-            <a:srgbClr val="180D20"/>
-          </a:solidFill>
-        </p:spPr>
-      </p:sp>
-      <p:sp>
-        <p:nvSpPr>
-          <p:cNvPr id="3" name="closing-blue-detail">
-            <a:extLst xmlns:a="http://schemas.openxmlformats.org/drawingml/2006/main">
-              <a:ext uri="{FF2B5EF4-FFF2-40B4-BE49-F238E27FC236}">
-                <a16:creationId xmlns:a16="http://schemas.microsoft.com/office/drawing/2014/main" id="{7716D1E4-CCC4-45A1-92ED-B5F2126A0D77}"/>
-              </a:ext>
-            </a:extLst>
-          </p:cNvPr>
-          <p:cNvSpPr>
-            <a:spLocks xmlns:a="http://schemas.openxmlformats.org/drawingml/2006/main" noGrp="1"/>
-          </p:cNvSpPr>
-          <p:nvPr/>
-        </p:nvSpPr>
-        <p:spPr>
-          <a:xfrm xmlns:a="http://schemas.openxmlformats.org/drawingml/2006/main">
-            <a:off x="609600" y="838200"/>
-            <a:ext cx="3009900" cy="3009900"/>
+            <a:srgbClr val="190F0D"/>
+          </a:solidFill>
+        </p:spPr>
+      </p:sp>
+      <p:sp>
+        <p:nvSpPr>
+          <p:cNvPr id="6" name="closing-photo-frame">
+            <a:extLst xmlns:a="http://schemas.openxmlformats.org/drawingml/2006/main">
+              <a:ext uri="{FF2B5EF4-FFF2-40B4-BE49-F238E27FC236}">
+                <a16:creationId xmlns:a16="http://schemas.microsoft.com/office/drawing/2014/main" id="{F4F45B51-C53D-46F3-8479-9A38785C947E}"/>
+              </a:ext>
+            </a:extLst>
+          </p:cNvPr>
+          <p:cNvSpPr>
+            <a:spLocks xmlns:a="http://schemas.openxmlformats.org/drawingml/2006/main" noGrp="1"/>
+          </p:cNvSpPr>
+          <p:nvPr/>
+        </p:nvSpPr>
+        <p:spPr>
+          <a:xfrm xmlns:a="http://schemas.openxmlformats.org/drawingml/2006/main">
+            <a:off x="590550" y="704850"/>
+            <a:ext cx="3048000" cy="3600450"/>
           </a:xfrm>
           <a:prstGeom xmlns:a="http://schemas.openxmlformats.org/drawingml/2006/main" prst="roundRect">
             <a:avLst>
-              <a:gd name="adj" fmla="val 2532"/>
+              <a:gd name="adj" fmla="val 2500"/>
             </a:avLst>
           </a:prstGeom>
           <a:solidFill xmlns:a="http://schemas.openxmlformats.org/drawingml/2006/main">
-            <a:srgbClr val="6845C6"/>
-          </a:solidFill>
-        </p:spPr>
-      </p:sp>
-      <p:sp>
-        <p:nvSpPr>
-          <p:cNvPr id="4" name="closing-monogram">
-            <a:extLst xmlns:a="http://schemas.openxmlformats.org/drawingml/2006/main">
-              <a:ext uri="{FF2B5EF4-FFF2-40B4-BE49-F238E27FC236}">
-                <a16:creationId xmlns:a16="http://schemas.microsoft.com/office/drawing/2014/main" id="{51F82954-8E04-42A7-B15B-09FC51020028}"/>
-              </a:ext>
-            </a:extLst>
-          </p:cNvPr>
-          <p:cNvSpPr>
-            <a:spLocks xmlns:a="http://schemas.openxmlformats.org/drawingml/2006/main" noGrp="1"/>
-          </p:cNvSpPr>
-          <p:nvPr/>
-        </p:nvSpPr>
-        <p:spPr>
-          <a:xfrm xmlns:a="http://schemas.openxmlformats.org/drawingml/2006/main">
-            <a:off x="800100" y="1352550"/>
-            <a:ext cx="2628900" cy="1428750"/>
-          </a:xfrm>
-          <a:prstGeom xmlns:a="http://schemas.openxmlformats.org/drawingml/2006/main" prst="rect">
-            <a:avLst/>
-          </a:prstGeom>
-        </p:spPr>
-        <p:txBody>
-          <a:bodyPr xmlns:a="http://schemas.openxmlformats.org/drawingml/2006/main" wrap="square" lIns="0" tIns="0" rIns="0" bIns="0" anchor="ctr">
+            <a:srgbClr val="2A1A17"/>
+          </a:solidFill>
+        </p:spPr>
+      </p:sp>
+      <p:sp>
+        <p:nvSpPr>
+          <p:cNvPr id="7" name="closing-signal-gold">
+            <a:extLst xmlns:a="http://schemas.openxmlformats.org/drawingml/2006/main">
+              <a:ext uri="{FF2B5EF4-FFF2-40B4-BE49-F238E27FC236}">
+                <a16:creationId xmlns:a16="http://schemas.microsoft.com/office/drawing/2014/main" id="{1729AAC5-74AE-4EA9-84C8-5E20E1005D8E}"/>
+              </a:ext>
+            </a:extLst>
+          </p:cNvPr>
+          <p:cNvSpPr>
+            <a:spLocks xmlns:a="http://schemas.openxmlformats.org/drawingml/2006/main" noGrp="1"/>
+          </p:cNvSpPr>
+          <p:nvPr/>
+        </p:nvSpPr>
+        <p:spPr>
+          <a:xfrm xmlns:a="http://schemas.openxmlformats.org/drawingml/2006/main">
+            <a:off x="590550" y="4495800"/>
+            <a:ext cx="914400" cy="76200"/>
+          </a:xfrm>
+          <a:prstGeom xmlns:a="http://schemas.openxmlformats.org/drawingml/2006/main" prst="roundRect">
+            <a:avLst>
+              <a:gd name="adj" fmla="val 50000"/>
+            </a:avLst>
+          </a:prstGeom>
+          <a:solidFill xmlns:a="http://schemas.openxmlformats.org/drawingml/2006/main">
+            <a:srgbClr val="F6C453"/>
+          </a:solidFill>
+        </p:spPr>
+      </p:sp>
+      <p:sp>
+        <p:nvSpPr>
+          <p:cNvPr id="8" name="closing-signal-coral">
+            <a:extLst xmlns:a="http://schemas.openxmlformats.org/drawingml/2006/main">
+              <a:ext uri="{FF2B5EF4-FFF2-40B4-BE49-F238E27FC236}">
+                <a16:creationId xmlns:a16="http://schemas.microsoft.com/office/drawing/2014/main" id="{BBBC6130-1DA1-498C-8FFB-C45E7FFD5150}"/>
+              </a:ext>
+            </a:extLst>
+          </p:cNvPr>
+          <p:cNvSpPr>
+            <a:spLocks xmlns:a="http://schemas.openxmlformats.org/drawingml/2006/main" noGrp="1"/>
+          </p:cNvSpPr>
+          <p:nvPr/>
+        </p:nvSpPr>
+        <p:spPr>
+          <a:xfrm xmlns:a="http://schemas.openxmlformats.org/drawingml/2006/main">
+            <a:off x="1619250" y="4495800"/>
+            <a:ext cx="914400" cy="76200"/>
+          </a:xfrm>
+          <a:prstGeom xmlns:a="http://schemas.openxmlformats.org/drawingml/2006/main" prst="roundRect">
+            <a:avLst>
+              <a:gd name="adj" fmla="val 50000"/>
+            </a:avLst>
+          </a:prstGeom>
+          <a:solidFill xmlns:a="http://schemas.openxmlformats.org/drawingml/2006/main">
+            <a:srgbClr val="FF7A59"/>
+          </a:solidFill>
+        </p:spPr>
+      </p:sp>
+      <p:sp>
+        <p:nvSpPr>
+          <p:cNvPr id="9" name="closing-signal-teal">
+            <a:extLst xmlns:a="http://schemas.openxmlformats.org/drawingml/2006/main">
+              <a:ext uri="{FF2B5EF4-FFF2-40B4-BE49-F238E27FC236}">
+                <a16:creationId xmlns:a16="http://schemas.microsoft.com/office/drawing/2014/main" id="{16D73053-C8C8-4439-92F4-586D90D47A09}"/>
+              </a:ext>
+            </a:extLst>
+          </p:cNvPr>
+          <p:cNvSpPr>
+            <a:spLocks xmlns:a="http://schemas.openxmlformats.org/drawingml/2006/main" noGrp="1"/>
+          </p:cNvSpPr>
+          <p:nvPr/>
+        </p:nvSpPr>
+        <p:spPr>
+          <a:xfrm xmlns:a="http://schemas.openxmlformats.org/drawingml/2006/main">
+            <a:off x="2647950" y="4495800"/>
+            <a:ext cx="990600" cy="76200"/>
+          </a:xfrm>
+          <a:prstGeom xmlns:a="http://schemas.openxmlformats.org/drawingml/2006/main" prst="roundRect">
+            <a:avLst>
+              <a:gd name="adj" fmla="val 50000"/>
+            </a:avLst>
+          </a:prstGeom>
+          <a:solidFill xmlns:a="http://schemas.openxmlformats.org/drawingml/2006/main">
+            <a:srgbClr val="5EEAD4"/>
+          </a:solidFill>
+        </p:spPr>
+      </p:sp>
+      <p:sp>
+        <p:nvSpPr>
+          <p:cNvPr id="10" name="closing-role">
+            <a:extLst xmlns:a="http://schemas.openxmlformats.org/drawingml/2006/main">
+              <a:ext uri="{FF2B5EF4-FFF2-40B4-BE49-F238E27FC236}">
+                <a16:creationId xmlns:a16="http://schemas.microsoft.com/office/drawing/2014/main" id="{C167FE25-B6EC-43EE-A9AD-3BA112DF6623}"/>
+              </a:ext>
+            </a:extLst>
+          </p:cNvPr>
+          <p:cNvSpPr>
+            <a:spLocks xmlns:a="http://schemas.openxmlformats.org/drawingml/2006/main" noGrp="1"/>
+          </p:cNvSpPr>
+          <p:nvPr/>
+        </p:nvSpPr>
+        <p:spPr>
+          <a:xfrm xmlns:a="http://schemas.openxmlformats.org/drawingml/2006/main">
+            <a:off x="685800" y="4857750"/>
+            <a:ext cx="2857500" cy="266700"/>
+          </a:xfrm>
+          <a:prstGeom xmlns:a="http://schemas.openxmlformats.org/drawingml/2006/main" prst="rect">
+            <a:avLst/>
+          </a:prstGeom>
+        </p:spPr>
+        <p:txBody>
+          <a:bodyPr xmlns:a="http://schemas.openxmlformats.org/drawingml/2006/main" wrap="square" lIns="0" tIns="0" rIns="0" bIns="0" anchor="t">
             <a:normAutofit fontScale="100000"/>
           </a:bodyPr>
           <a:lstStyle xmlns:a="http://schemas.openxmlformats.org/drawingml/2006/main"/>
           <a:p xmlns:a="http://schemas.openxmlformats.org/drawingml/2006/main">
             <a:pPr algn="ctr">
-              <a:defRPr sz="7350" b="1">
-                <a:solidFill>
-                  <a:srgbClr val="E0B44F"/>
-                </a:solidFill>
-                <a:latin typeface="Arial"/>
-                <a:ea typeface="Arial"/>
-                <a:cs typeface="Arial"/>
-              </a:defRPr>
-            </a:pPr>
-            <a:r>
-              <a:t>MA</a:t>
-            </a:r>
-          </a:p>
-        </p:txBody>
-      </p:sp>
-      <p:sp>
-        <p:nvSpPr>
-          <p:cNvPr id="5" name="closing-role">
-            <a:extLst xmlns:a="http://schemas.openxmlformats.org/drawingml/2006/main">
-              <a:ext uri="{FF2B5EF4-FFF2-40B4-BE49-F238E27FC236}">
-                <a16:creationId xmlns:a16="http://schemas.microsoft.com/office/drawing/2014/main" id="{9CA143AB-97A0-428E-87AF-8861DFDB3BE1}"/>
-              </a:ext>
-            </a:extLst>
-          </p:cNvPr>
-          <p:cNvSpPr>
-            <a:spLocks xmlns:a="http://schemas.openxmlformats.org/drawingml/2006/main" noGrp="1"/>
-          </p:cNvSpPr>
-          <p:nvPr/>
-        </p:nvSpPr>
-        <p:spPr>
-          <a:xfrm xmlns:a="http://schemas.openxmlformats.org/drawingml/2006/main">
-            <a:off x="742950" y="4219575"/>
-            <a:ext cx="2876550" cy="266700"/>
+              <a:defRPr sz="975" b="1">
+                <a:solidFill>
+                  <a:srgbClr val="5EEAD4"/>
+                </a:solidFill>
+                <a:latin typeface="Consolas"/>
+                <a:ea typeface="Consolas"/>
+                <a:cs typeface="Consolas"/>
+              </a:defRPr>
+            </a:pPr>
+            <a:r>
+              <a:t>DATA  /  MODELS  /  DECISIONS</a:t>
+            </a:r>
+          </a:p>
+        </p:txBody>
+      </p:sp>
+      <p:sp>
+        <p:nvSpPr>
+          <p:cNvPr id="11" name="closing-site">
+            <a:extLst xmlns:a="http://schemas.openxmlformats.org/drawingml/2006/main">
+              <a:ext uri="{FF2B5EF4-FFF2-40B4-BE49-F238E27FC236}">
+                <a16:creationId xmlns:a16="http://schemas.microsoft.com/office/drawing/2014/main" id="{23A9BC15-C0CB-4307-BB38-3085F945D13D}"/>
+              </a:ext>
+            </a:extLst>
+          </p:cNvPr>
+          <p:cNvSpPr>
+            <a:spLocks xmlns:a="http://schemas.openxmlformats.org/drawingml/2006/main" noGrp="1"/>
+          </p:cNvSpPr>
+          <p:nvPr/>
+        </p:nvSpPr>
+        <p:spPr>
+          <a:xfrm xmlns:a="http://schemas.openxmlformats.org/drawingml/2006/main">
+            <a:off x="514350" y="5314950"/>
+            <a:ext cx="3219450" cy="228600"/>
           </a:xfrm>
           <a:prstGeom xmlns:a="http://schemas.openxmlformats.org/drawingml/2006/main" prst="rect">
             <a:avLst/>
@@ -3696,27 +4300,27 @@
           <a:lstStyle xmlns:a="http://schemas.openxmlformats.org/drawingml/2006/main"/>
           <a:p xmlns:a="http://schemas.openxmlformats.org/drawingml/2006/main">
             <a:pPr algn="ctr">
-              <a:defRPr sz="1050" b="1">
-                <a:solidFill>
-                  <a:srgbClr val="E65FA8"/>
-                </a:solidFill>
-                <a:latin typeface="Arial"/>
-                <a:ea typeface="Arial"/>
-                <a:cs typeface="Arial"/>
-              </a:defRPr>
-            </a:pPr>
-            <a:r>
-              <a:t>DATA · MODELS · DECISIONS</a:t>
-            </a:r>
-          </a:p>
-        </p:txBody>
-      </p:sp>
-      <p:sp>
-        <p:nvSpPr>
-          <p:cNvPr id="6" name="closing-title">
-            <a:extLst xmlns:a="http://schemas.openxmlformats.org/drawingml/2006/main">
-              <a:ext uri="{FF2B5EF4-FFF2-40B4-BE49-F238E27FC236}">
-                <a16:creationId xmlns:a16="http://schemas.microsoft.com/office/drawing/2014/main" id="{B1FDF5A7-8D04-46FB-8D47-E3D2BF13285E}"/>
+              <a:defRPr sz="975" b="0">
+                <a:solidFill>
+                  <a:srgbClr val="F6C453"/>
+                </a:solidFill>
+                <a:latin typeface="Consolas"/>
+                <a:ea typeface="Consolas"/>
+                <a:cs typeface="Consolas"/>
+              </a:defRPr>
+            </a:pPr>
+            <a:r>
+              <a:t>akbaralqahri.github.io/portofolio</a:t>
+            </a:r>
+          </a:p>
+        </p:txBody>
+      </p:sp>
+      <p:sp>
+        <p:nvSpPr>
+          <p:cNvPr id="12" name="closing-title">
+            <a:extLst xmlns:a="http://schemas.openxmlformats.org/drawingml/2006/main">
+              <a:ext uri="{FF2B5EF4-FFF2-40B4-BE49-F238E27FC236}">
+                <a16:creationId xmlns:a16="http://schemas.microsoft.com/office/drawing/2014/main" id="{4D7BE693-7C9E-4457-9DC1-68CC307BB80A}"/>
               </a:ext>
             </a:extLst>
           </p:cNvPr>
@@ -3743,11 +4347,11 @@
             <a:pPr algn="l">
               <a:defRPr sz="3750" b="1">
                 <a:solidFill>
-                  <a:srgbClr val="180D20"/>
-                </a:solidFill>
-                <a:latin typeface="Arial"/>
-                <a:ea typeface="Arial"/>
-                <a:cs typeface="Arial"/>
+                  <a:srgbClr val="FFF7ED"/>
+                </a:solidFill>
+                <a:latin typeface="Aptos"/>
+                <a:ea typeface="Aptos"/>
+                <a:cs typeface="Aptos"/>
               </a:defRPr>
             </a:pPr>
             <a:r>
@@ -3759,10 +4363,10 @@
       </p:sp>
       <p:sp>
         <p:nvSpPr>
-          <p:cNvPr id="7" name="closing-copy">
-            <a:extLst xmlns:a="http://schemas.openxmlformats.org/drawingml/2006/main">
-              <a:ext uri="{FF2B5EF4-FFF2-40B4-BE49-F238E27FC236}">
-                <a16:creationId xmlns:a16="http://schemas.microsoft.com/office/drawing/2014/main" id="{A49F3D27-B105-4CAA-90D3-A0D0090648D0}"/>
+          <p:cNvPr id="13" name="closing-copy">
+            <a:extLst xmlns:a="http://schemas.openxmlformats.org/drawingml/2006/main">
+              <a:ext uri="{FF2B5EF4-FFF2-40B4-BE49-F238E27FC236}">
+                <a16:creationId xmlns:a16="http://schemas.microsoft.com/office/drawing/2014/main" id="{6EFC3735-6561-4EEF-92B5-268CFA842611}"/>
               </a:ext>
             </a:extLst>
           </p:cNvPr>
@@ -3789,11 +4393,11 @@
             <a:pPr algn="l">
               <a:defRPr sz="1575" b="0">
                 <a:solidFill>
-                  <a:srgbClr val="70647A"/>
-                </a:solidFill>
-                <a:latin typeface="Arial"/>
-                <a:ea typeface="Arial"/>
-                <a:cs typeface="Arial"/>
+                  <a:srgbClr val="B9A59B"/>
+                </a:solidFill>
+                <a:latin typeface="Aptos"/>
+                <a:ea typeface="Aptos"/>
+                <a:cs typeface="Aptos"/>
               </a:defRPr>
             </a:pPr>
             <a:r>
@@ -3804,10 +4408,10 @@
       </p:sp>
       <p:sp>
         <p:nvSpPr>
-          <p:cNvPr id="8" name="closing-line">
-            <a:extLst xmlns:a="http://schemas.openxmlformats.org/drawingml/2006/main">
-              <a:ext uri="{FF2B5EF4-FFF2-40B4-BE49-F238E27FC236}">
-                <a16:creationId xmlns:a16="http://schemas.microsoft.com/office/drawing/2014/main" id="{D12C9D6F-992C-418D-A0CB-D725A012476E}"/>
+          <p:cNvPr id="14" name="closing-line-gold">
+            <a:extLst xmlns:a="http://schemas.openxmlformats.org/drawingml/2006/main">
+              <a:ext uri="{FF2B5EF4-FFF2-40B4-BE49-F238E27FC236}">
+                <a16:creationId xmlns:a16="http://schemas.microsoft.com/office/drawing/2014/main" id="{FF7B9C85-6A61-4E17-99AF-DD6DFE6C3B70}"/>
               </a:ext>
             </a:extLst>
           </p:cNvPr>
@@ -3819,22 +4423,76 @@
         <p:spPr>
           <a:xfrm xmlns:a="http://schemas.openxmlformats.org/drawingml/2006/main">
             <a:off x="5010150" y="3838575"/>
-            <a:ext cx="6134100" cy="19050"/>
-          </a:xfrm>
-          <a:prstGeom xmlns:a="http://schemas.openxmlformats.org/drawingml/2006/main" prst="rect">
-            <a:avLst/>
-          </a:prstGeom>
-          <a:solidFill xmlns:a="http://schemas.openxmlformats.org/drawingml/2006/main">
-            <a:srgbClr val="DED4E6"/>
-          </a:solidFill>
-        </p:spPr>
-      </p:sp>
-      <p:sp>
-        <p:nvSpPr>
-          <p:cNvPr id="9" name="closing-email-label">
-            <a:extLst xmlns:a="http://schemas.openxmlformats.org/drawingml/2006/main">
-              <a:ext uri="{FF2B5EF4-FFF2-40B4-BE49-F238E27FC236}">
-                <a16:creationId xmlns:a16="http://schemas.microsoft.com/office/drawing/2014/main" id="{F7FC7CEE-E350-43C6-B2D9-E766708E0EE8}"/>
+            <a:ext cx="3067050" cy="19050"/>
+          </a:xfrm>
+          <a:prstGeom xmlns:a="http://schemas.openxmlformats.org/drawingml/2006/main" prst="rect">
+            <a:avLst/>
+          </a:prstGeom>
+          <a:solidFill xmlns:a="http://schemas.openxmlformats.org/drawingml/2006/main">
+            <a:srgbClr val="F6C453"/>
+          </a:solidFill>
+        </p:spPr>
+      </p:sp>
+      <p:sp>
+        <p:nvSpPr>
+          <p:cNvPr id="15" name="closing-line-coral">
+            <a:extLst xmlns:a="http://schemas.openxmlformats.org/drawingml/2006/main">
+              <a:ext uri="{FF2B5EF4-FFF2-40B4-BE49-F238E27FC236}">
+                <a16:creationId xmlns:a16="http://schemas.microsoft.com/office/drawing/2014/main" id="{33844BD3-8F89-4416-9C04-02E2276B539E}"/>
+              </a:ext>
+            </a:extLst>
+          </p:cNvPr>
+          <p:cNvSpPr>
+            <a:spLocks xmlns:a="http://schemas.openxmlformats.org/drawingml/2006/main" noGrp="1"/>
+          </p:cNvSpPr>
+          <p:nvPr/>
+        </p:nvSpPr>
+        <p:spPr>
+          <a:xfrm xmlns:a="http://schemas.openxmlformats.org/drawingml/2006/main">
+            <a:off x="8077200" y="3838575"/>
+            <a:ext cx="1533525" cy="19050"/>
+          </a:xfrm>
+          <a:prstGeom xmlns:a="http://schemas.openxmlformats.org/drawingml/2006/main" prst="rect">
+            <a:avLst/>
+          </a:prstGeom>
+          <a:solidFill xmlns:a="http://schemas.openxmlformats.org/drawingml/2006/main">
+            <a:srgbClr val="FF7A59"/>
+          </a:solidFill>
+        </p:spPr>
+      </p:sp>
+      <p:sp>
+        <p:nvSpPr>
+          <p:cNvPr id="16" name="closing-line-teal">
+            <a:extLst xmlns:a="http://schemas.openxmlformats.org/drawingml/2006/main">
+              <a:ext uri="{FF2B5EF4-FFF2-40B4-BE49-F238E27FC236}">
+                <a16:creationId xmlns:a16="http://schemas.microsoft.com/office/drawing/2014/main" id="{5F8F035F-DF6A-4E5B-AACC-3D304A083821}"/>
+              </a:ext>
+            </a:extLst>
+          </p:cNvPr>
+          <p:cNvSpPr>
+            <a:spLocks xmlns:a="http://schemas.openxmlformats.org/drawingml/2006/main" noGrp="1"/>
+          </p:cNvSpPr>
+          <p:nvPr/>
+        </p:nvSpPr>
+        <p:spPr>
+          <a:xfrm xmlns:a="http://schemas.openxmlformats.org/drawingml/2006/main">
+            <a:off x="9610725" y="3838575"/>
+            <a:ext cx="1533525" cy="19050"/>
+          </a:xfrm>
+          <a:prstGeom xmlns:a="http://schemas.openxmlformats.org/drawingml/2006/main" prst="rect">
+            <a:avLst/>
+          </a:prstGeom>
+          <a:solidFill xmlns:a="http://schemas.openxmlformats.org/drawingml/2006/main">
+            <a:srgbClr val="5EEAD4"/>
+          </a:solidFill>
+        </p:spPr>
+      </p:sp>
+      <p:sp>
+        <p:nvSpPr>
+          <p:cNvPr id="17" name="closing-email-label">
+            <a:extLst xmlns:a="http://schemas.openxmlformats.org/drawingml/2006/main">
+              <a:ext uri="{FF2B5EF4-FFF2-40B4-BE49-F238E27FC236}">
+                <a16:creationId xmlns:a16="http://schemas.microsoft.com/office/drawing/2014/main" id="{3BFE2EE2-D3BD-4916-87E8-72B2FCA5DAD8}"/>
               </a:ext>
             </a:extLst>
           </p:cNvPr>
@@ -3861,25 +4519,25 @@
             <a:pPr algn="l">
               <a:defRPr sz="975" b="1">
                 <a:solidFill>
-                  <a:srgbClr val="6845C6"/>
-                </a:solidFill>
-                <a:latin typeface="Arial"/>
-                <a:ea typeface="Arial"/>
-                <a:cs typeface="Arial"/>
-              </a:defRPr>
-            </a:pPr>
-            <a:r>
-              <a:t>EMAIL</a:t>
-            </a:r>
-          </a:p>
-        </p:txBody>
-      </p:sp>
-      <p:sp>
-        <p:nvSpPr>
-          <p:cNvPr id="10" name="closing-email">
-            <a:extLst xmlns:a="http://schemas.openxmlformats.org/drawingml/2006/main">
-              <a:ext uri="{FF2B5EF4-FFF2-40B4-BE49-F238E27FC236}">
-                <a16:creationId xmlns:a16="http://schemas.microsoft.com/office/drawing/2014/main" id="{0B3D969D-6BE8-4BC2-9632-CBB2776027E7}"/>
+                  <a:srgbClr val="FF7A59"/>
+                </a:solidFill>
+                <a:latin typeface="Consolas"/>
+                <a:ea typeface="Consolas"/>
+                <a:cs typeface="Consolas"/>
+              </a:defRPr>
+            </a:pPr>
+            <a:r>
+              <a:t>~/ EMAIL</a:t>
+            </a:r>
+          </a:p>
+        </p:txBody>
+      </p:sp>
+      <p:sp>
+        <p:nvSpPr>
+          <p:cNvPr id="18" name="closing-email">
+            <a:extLst xmlns:a="http://schemas.openxmlformats.org/drawingml/2006/main">
+              <a:ext uri="{FF2B5EF4-FFF2-40B4-BE49-F238E27FC236}">
+                <a16:creationId xmlns:a16="http://schemas.microsoft.com/office/drawing/2014/main" id="{362D24A2-5B0F-45C8-9990-5FFEB500DBE8}"/>
               </a:ext>
             </a:extLst>
           </p:cNvPr>
@@ -3906,11 +4564,11 @@
             <a:pPr algn="l">
               <a:defRPr sz="1650" b="1">
                 <a:solidFill>
-                  <a:srgbClr val="180D20"/>
-                </a:solidFill>
-                <a:latin typeface="Arial"/>
-                <a:ea typeface="Arial"/>
-                <a:cs typeface="Arial"/>
+                  <a:srgbClr val="FFF7ED"/>
+                </a:solidFill>
+                <a:latin typeface="Aptos"/>
+                <a:ea typeface="Aptos"/>
+                <a:cs typeface="Aptos"/>
               </a:defRPr>
             </a:pPr>
             <a:r>
@@ -3921,10 +4579,10 @@
       </p:sp>
       <p:sp>
         <p:nvSpPr>
-          <p:cNvPr id="11" name="closing-links">
-            <a:extLst xmlns:a="http://schemas.openxmlformats.org/drawingml/2006/main">
-              <a:ext uri="{FF2B5EF4-FFF2-40B4-BE49-F238E27FC236}">
-                <a16:creationId xmlns:a16="http://schemas.microsoft.com/office/drawing/2014/main" id="{7B9C0E9B-04A1-4F6B-B687-7EE0C25FB303}"/>
+          <p:cNvPr id="19" name="closing-links">
+            <a:extLst xmlns:a="http://schemas.openxmlformats.org/drawingml/2006/main">
+              <a:ext uri="{FF2B5EF4-FFF2-40B4-BE49-F238E27FC236}">
+                <a16:creationId xmlns:a16="http://schemas.microsoft.com/office/drawing/2014/main" id="{194CDA6B-52C5-4A55-8B8F-25525288FEDB}"/>
               </a:ext>
             </a:extLst>
           </p:cNvPr>
@@ -3951,11 +4609,11 @@
             <a:pPr algn="l">
               <a:defRPr sz="1425" b="0">
                 <a:solidFill>
-                  <a:srgbClr val="70647A"/>
-                </a:solidFill>
-                <a:latin typeface="Arial"/>
-                <a:ea typeface="Arial"/>
-                <a:cs typeface="Arial"/>
+                  <a:srgbClr val="B9A59B"/>
+                </a:solidFill>
+                <a:latin typeface="Aptos"/>
+                <a:ea typeface="Aptos"/>
+                <a:cs typeface="Aptos"/>
               </a:defRPr>
             </a:pPr>
             <a:r>
@@ -3967,10 +4625,10 @@
       </p:sp>
       <p:sp>
         <p:nvSpPr>
-          <p:cNvPr id="12" name="closing-phone">
-            <a:extLst xmlns:a="http://schemas.openxmlformats.org/drawingml/2006/main">
-              <a:ext uri="{FF2B5EF4-FFF2-40B4-BE49-F238E27FC236}">
-                <a16:creationId xmlns:a16="http://schemas.microsoft.com/office/drawing/2014/main" id="{ED998B23-023E-4A17-A158-6444550DD35E}"/>
+          <p:cNvPr id="20" name="closing-phone">
+            <a:extLst xmlns:a="http://schemas.openxmlformats.org/drawingml/2006/main">
+              <a:ext uri="{FF2B5EF4-FFF2-40B4-BE49-F238E27FC236}">
+                <a16:creationId xmlns:a16="http://schemas.microsoft.com/office/drawing/2014/main" id="{267F75CE-C6FD-40C4-9311-E7EECECBC88E}"/>
               </a:ext>
             </a:extLst>
           </p:cNvPr>
@@ -3997,11 +4655,11 @@
             <a:pPr algn="l">
               <a:defRPr sz="1275" b="1">
                 <a:solidFill>
-                  <a:srgbClr val="180D20"/>
-                </a:solidFill>
-                <a:latin typeface="Arial"/>
-                <a:ea typeface="Arial"/>
-                <a:cs typeface="Arial"/>
+                  <a:srgbClr val="FFF7ED"/>
+                </a:solidFill>
+                <a:latin typeface="Aptos"/>
+                <a:ea typeface="Aptos"/>
+                <a:cs typeface="Aptos"/>
               </a:defRPr>
             </a:pPr>
             <a:r>
@@ -4012,10 +4670,10 @@
       </p:sp>
       <p:sp>
         <p:nvSpPr>
-          <p:cNvPr id="13" name="closing-page">
-            <a:extLst xmlns:a="http://schemas.openxmlformats.org/drawingml/2006/main">
-              <a:ext uri="{FF2B5EF4-FFF2-40B4-BE49-F238E27FC236}">
-                <a16:creationId xmlns:a16="http://schemas.microsoft.com/office/drawing/2014/main" id="{FA4C20BB-7B73-412D-A199-26448E22C54C}"/>
+          <p:cNvPr id="21" name="closing-page">
+            <a:extLst xmlns:a="http://schemas.openxmlformats.org/drawingml/2006/main">
+              <a:ext uri="{FF2B5EF4-FFF2-40B4-BE49-F238E27FC236}">
+                <a16:creationId xmlns:a16="http://schemas.microsoft.com/office/drawing/2014/main" id="{EA3F2AFE-5DC1-4A2F-A142-93F42066738D}"/>
               </a:ext>
             </a:extLst>
           </p:cNvPr>
@@ -4042,11 +4700,11 @@
             <a:pPr algn="r">
               <a:defRPr sz="900" b="1">
                 <a:solidFill>
-                  <a:srgbClr val="70647A"/>
-                </a:solidFill>
-                <a:latin typeface="Arial"/>
-                <a:ea typeface="Arial"/>
-                <a:cs typeface="Arial"/>
+                  <a:srgbClr val="F6C453"/>
+                </a:solidFill>
+                <a:latin typeface="Consolas"/>
+                <a:ea typeface="Consolas"/>
+                <a:cs typeface="Consolas"/>
               </a:defRPr>
             </a:pPr>
             <a:r>
@@ -4055,10 +4713,35 @@
           </a:p>
         </p:txBody>
       </p:sp>
+      <p:pic>
+        <p:nvPicPr>
+          <p:cNvPr id="44" name=""/>
+          <p:cNvPicPr>
+            <a:picLocks xmlns:a="http://schemas.openxmlformats.org/drawingml/2006/main" noChangeAspect="1"/>
+          </p:cNvPicPr>
+          <p:nvPr/>
+        </p:nvPicPr>
+        <p:blipFill>
+          <a:blip xmlns:r="http://schemas.openxmlformats.org/officeDocument/2006/relationships" xmlns:a="http://schemas.openxmlformats.org/drawingml/2006/main" r:embed="R7651c16a4a6248f3"/>
+          <a:srcRect xmlns:a="http://schemas.openxmlformats.org/drawingml/2006/main" l="0" t="5980" r="0" b="5980"/>
+          <a:stretch xmlns:a="http://schemas.openxmlformats.org/drawingml/2006/main">
+            <a:fillRect l="0" t="0" r="0" b="0"/>
+          </a:stretch>
+        </p:blipFill>
+        <p:spPr>
+          <a:xfrm xmlns:a="http://schemas.openxmlformats.org/drawingml/2006/main">
+            <a:off x="704850" y="838200"/>
+            <a:ext cx="2819400" cy="3333750"/>
+          </a:xfrm>
+          <a:prstGeom xmlns:a="http://schemas.openxmlformats.org/drawingml/2006/main" prst="rect">
+            <a:avLst/>
+          </a:prstGeom>
+        </p:spPr>
+      </p:pic>
     </p:spTree>
     <p:extLst>
       <p:ext uri="{BB962C8B-B14F-4D97-AF65-F5344CB8AC3E}">
-        <p14:creationId xmlns:p14="http://schemas.microsoft.com/office/powerpoint/2010/main" val="592213662"/>
+        <p14:creationId xmlns:p14="http://schemas.microsoft.com/office/powerpoint/2010/main" val="186295639"/>
       </p:ext>
     </p:extLst>
   </p:cSld>
@@ -4079,10 +4762,10 @@
       </p:grpSpPr>
       <p:sp>
         <p:nvSpPr>
-          <p:cNvPr id="29" name="02-lifecycle-canvas">
-            <a:extLst xmlns:a="http://schemas.openxmlformats.org/drawingml/2006/main">
-              <a:ext uri="{FF2B5EF4-FFF2-40B4-BE49-F238E27FC236}">
-                <a16:creationId xmlns:a16="http://schemas.microsoft.com/office/drawing/2014/main" id="{818BC0FA-92D5-472F-8021-F05C7177CF60}"/>
+          <p:cNvPr id="34" name="02-lifecycle-canvas">
+            <a:extLst xmlns:a="http://schemas.openxmlformats.org/drawingml/2006/main">
+              <a:ext uri="{FF2B5EF4-FFF2-40B4-BE49-F238E27FC236}">
+                <a16:creationId xmlns:a16="http://schemas.microsoft.com/office/drawing/2014/main" id="{D5D3E469-422B-46DC-9B60-1D1565BAB9EB}"/>
               </a:ext>
             </a:extLst>
           </p:cNvPr>
@@ -4100,16 +4783,97 @@
             <a:avLst/>
           </a:prstGeom>
           <a:solidFill xmlns:a="http://schemas.openxmlformats.org/drawingml/2006/main">
-            <a:srgbClr val="FFFFFF"/>
-          </a:solidFill>
-        </p:spPr>
-      </p:sp>
-      <p:sp>
-        <p:nvSpPr>
-          <p:cNvPr id="2" name="eyebrow-2">
-            <a:extLst xmlns:a="http://schemas.openxmlformats.org/drawingml/2006/main">
-              <a:ext uri="{FF2B5EF4-FFF2-40B4-BE49-F238E27FC236}">
-                <a16:creationId xmlns:a16="http://schemas.microsoft.com/office/drawing/2014/main" id="{1B59F5F9-EA83-4A91-BFC5-33586D69310C}"/>
+            <a:srgbClr val="120B0A"/>
+          </a:solidFill>
+        </p:spPr>
+      </p:sp>
+      <p:sp>
+        <p:nvSpPr>
+          <p:cNvPr id="2" name="02-lifecycle-edge-gold">
+            <a:extLst xmlns:a="http://schemas.openxmlformats.org/drawingml/2006/main">
+              <a:ext uri="{FF2B5EF4-FFF2-40B4-BE49-F238E27FC236}">
+                <a16:creationId xmlns:a16="http://schemas.microsoft.com/office/drawing/2014/main" id="{4EF31B36-C2CB-4270-BA16-BA59698D9D83}"/>
+              </a:ext>
+            </a:extLst>
+          </p:cNvPr>
+          <p:cNvSpPr>
+            <a:spLocks xmlns:a="http://schemas.openxmlformats.org/drawingml/2006/main" noGrp="1"/>
+          </p:cNvSpPr>
+          <p:nvPr/>
+        </p:nvSpPr>
+        <p:spPr>
+          <a:xfrm xmlns:a="http://schemas.openxmlformats.org/drawingml/2006/main">
+            <a:off x="0" y="0"/>
+            <a:ext cx="38100" cy="2286000"/>
+          </a:xfrm>
+          <a:prstGeom xmlns:a="http://schemas.openxmlformats.org/drawingml/2006/main" prst="rect">
+            <a:avLst/>
+          </a:prstGeom>
+          <a:solidFill xmlns:a="http://schemas.openxmlformats.org/drawingml/2006/main">
+            <a:srgbClr val="F6C453"/>
+          </a:solidFill>
+        </p:spPr>
+      </p:sp>
+      <p:sp>
+        <p:nvSpPr>
+          <p:cNvPr id="3" name="02-lifecycle-edge-coral">
+            <a:extLst xmlns:a="http://schemas.openxmlformats.org/drawingml/2006/main">
+              <a:ext uri="{FF2B5EF4-FFF2-40B4-BE49-F238E27FC236}">
+                <a16:creationId xmlns:a16="http://schemas.microsoft.com/office/drawing/2014/main" id="{A00211F7-F410-41D2-BC73-DEDAE700329A}"/>
+              </a:ext>
+            </a:extLst>
+          </p:cNvPr>
+          <p:cNvSpPr>
+            <a:spLocks xmlns:a="http://schemas.openxmlformats.org/drawingml/2006/main" noGrp="1"/>
+          </p:cNvSpPr>
+          <p:nvPr/>
+        </p:nvSpPr>
+        <p:spPr>
+          <a:xfrm xmlns:a="http://schemas.openxmlformats.org/drawingml/2006/main">
+            <a:off x="0" y="2286000"/>
+            <a:ext cx="38100" cy="2286000"/>
+          </a:xfrm>
+          <a:prstGeom xmlns:a="http://schemas.openxmlformats.org/drawingml/2006/main" prst="rect">
+            <a:avLst/>
+          </a:prstGeom>
+          <a:solidFill xmlns:a="http://schemas.openxmlformats.org/drawingml/2006/main">
+            <a:srgbClr val="FF7A59"/>
+          </a:solidFill>
+        </p:spPr>
+      </p:sp>
+      <p:sp>
+        <p:nvSpPr>
+          <p:cNvPr id="4" name="02-lifecycle-edge-teal">
+            <a:extLst xmlns:a="http://schemas.openxmlformats.org/drawingml/2006/main">
+              <a:ext uri="{FF2B5EF4-FFF2-40B4-BE49-F238E27FC236}">
+                <a16:creationId xmlns:a16="http://schemas.microsoft.com/office/drawing/2014/main" id="{ADD25C05-0E38-4A22-AD2E-3115B096284D}"/>
+              </a:ext>
+            </a:extLst>
+          </p:cNvPr>
+          <p:cNvSpPr>
+            <a:spLocks xmlns:a="http://schemas.openxmlformats.org/drawingml/2006/main" noGrp="1"/>
+          </p:cNvSpPr>
+          <p:nvPr/>
+        </p:nvSpPr>
+        <p:spPr>
+          <a:xfrm xmlns:a="http://schemas.openxmlformats.org/drawingml/2006/main">
+            <a:off x="0" y="4572000"/>
+            <a:ext cx="38100" cy="2286000"/>
+          </a:xfrm>
+          <a:prstGeom xmlns:a="http://schemas.openxmlformats.org/drawingml/2006/main" prst="rect">
+            <a:avLst/>
+          </a:prstGeom>
+          <a:solidFill xmlns:a="http://schemas.openxmlformats.org/drawingml/2006/main">
+            <a:srgbClr val="5EEAD4"/>
+          </a:solidFill>
+        </p:spPr>
+      </p:sp>
+      <p:sp>
+        <p:nvSpPr>
+          <p:cNvPr id="5" name="eyebrow-2">
+            <a:extLst xmlns:a="http://schemas.openxmlformats.org/drawingml/2006/main">
+              <a:ext uri="{FF2B5EF4-FFF2-40B4-BE49-F238E27FC236}">
+                <a16:creationId xmlns:a16="http://schemas.microsoft.com/office/drawing/2014/main" id="{E993715A-979E-45F1-8DC7-AB05F74EC8CF}"/>
               </a:ext>
             </a:extLst>
           </p:cNvPr>
@@ -4136,25 +4900,25 @@
             <a:pPr algn="l">
               <a:defRPr sz="1050" b="1">
                 <a:solidFill>
-                  <a:srgbClr val="6845C6"/>
-                </a:solidFill>
-                <a:latin typeface="Arial"/>
-                <a:ea typeface="Arial"/>
-                <a:cs typeface="Arial"/>
-              </a:defRPr>
-            </a:pPr>
-            <a:r>
-              <a:t>POSITIONING</a:t>
-            </a:r>
-          </a:p>
-        </p:txBody>
-      </p:sp>
-      <p:sp>
-        <p:nvSpPr>
-          <p:cNvPr id="3" name="title-2">
-            <a:extLst xmlns:a="http://schemas.openxmlformats.org/drawingml/2006/main">
-              <a:ext uri="{FF2B5EF4-FFF2-40B4-BE49-F238E27FC236}">
-                <a16:creationId xmlns:a16="http://schemas.microsoft.com/office/drawing/2014/main" id="{47A712AF-4D3F-4056-883D-C6D398BF5A5E}"/>
+                  <a:srgbClr val="FF7A59"/>
+                </a:solidFill>
+                <a:latin typeface="Consolas"/>
+                <a:ea typeface="Consolas"/>
+                <a:cs typeface="Consolas"/>
+              </a:defRPr>
+            </a:pPr>
+            <a:r>
+              <a:t>~/ POSITIONING</a:t>
+            </a:r>
+          </a:p>
+        </p:txBody>
+      </p:sp>
+      <p:sp>
+        <p:nvSpPr>
+          <p:cNvPr id="6" name="title-2">
+            <a:extLst xmlns:a="http://schemas.openxmlformats.org/drawingml/2006/main">
+              <a:ext uri="{FF2B5EF4-FFF2-40B4-BE49-F238E27FC236}">
+                <a16:creationId xmlns:a16="http://schemas.microsoft.com/office/drawing/2014/main" id="{042B7F67-A0B6-4D40-B2AC-E182E8FE9578}"/>
               </a:ext>
             </a:extLst>
           </p:cNvPr>
@@ -4181,11 +4945,11 @@
             <a:pPr algn="l">
               <a:defRPr sz="3225" b="1">
                 <a:solidFill>
-                  <a:srgbClr val="180D20"/>
-                </a:solidFill>
-                <a:latin typeface="Arial"/>
-                <a:ea typeface="Arial"/>
-                <a:cs typeface="Arial"/>
+                  <a:srgbClr val="FFF7ED"/>
+                </a:solidFill>
+                <a:latin typeface="Aptos"/>
+                <a:ea typeface="Aptos"/>
+                <a:cs typeface="Aptos"/>
               </a:defRPr>
             </a:pPr>
             <a:r>
@@ -4196,10 +4960,10 @@
       </p:sp>
       <p:sp>
         <p:nvSpPr>
-          <p:cNvPr id="4" name="subtitle-2">
-            <a:extLst xmlns:a="http://schemas.openxmlformats.org/drawingml/2006/main">
-              <a:ext uri="{FF2B5EF4-FFF2-40B4-BE49-F238E27FC236}">
-                <a16:creationId xmlns:a16="http://schemas.microsoft.com/office/drawing/2014/main" id="{0CB2E2AF-6E6B-4E0B-9B6B-634ED9FAE72E}"/>
+          <p:cNvPr id="7" name="subtitle-2">
+            <a:extLst xmlns:a="http://schemas.openxmlformats.org/drawingml/2006/main">
+              <a:ext uri="{FF2B5EF4-FFF2-40B4-BE49-F238E27FC236}">
+                <a16:creationId xmlns:a16="http://schemas.microsoft.com/office/drawing/2014/main" id="{5F8AAC2E-297F-4227-86C4-C262DB6AB349}"/>
               </a:ext>
             </a:extLst>
           </p:cNvPr>
@@ -4226,11 +4990,11 @@
             <a:pPr algn="l">
               <a:defRPr sz="1425" b="0">
                 <a:solidFill>
-                  <a:srgbClr val="70647A"/>
-                </a:solidFill>
-                <a:latin typeface="Arial"/>
-                <a:ea typeface="Arial"/>
-                <a:cs typeface="Arial"/>
+                  <a:srgbClr val="B9A59B"/>
+                </a:solidFill>
+                <a:latin typeface="Aptos"/>
+                <a:ea typeface="Aptos"/>
+                <a:cs typeface="Aptos"/>
               </a:defRPr>
             </a:pPr>
             <a:r>
@@ -4241,10 +5005,10 @@
       </p:sp>
       <p:sp>
         <p:nvSpPr>
-          <p:cNvPr id="5" name="role-card-01">
-            <a:extLst xmlns:a="http://schemas.openxmlformats.org/drawingml/2006/main">
-              <a:ext uri="{FF2B5EF4-FFF2-40B4-BE49-F238E27FC236}">
-                <a16:creationId xmlns:a16="http://schemas.microsoft.com/office/drawing/2014/main" id="{446AB52E-F49C-41FB-B4E0-8DFAD1DBA371}"/>
+          <p:cNvPr id="8" name="role-card-01">
+            <a:extLst xmlns:a="http://schemas.openxmlformats.org/drawingml/2006/main">
+              <a:ext uri="{FF2B5EF4-FFF2-40B4-BE49-F238E27FC236}">
+                <a16:creationId xmlns:a16="http://schemas.microsoft.com/office/drawing/2014/main" id="{7951E032-23D8-4672-8A46-4101CA5AFD7F}"/>
               </a:ext>
             </a:extLst>
           </p:cNvPr>
@@ -4264,16 +5028,16 @@
             </a:avLst>
           </a:prstGeom>
           <a:solidFill xmlns:a="http://schemas.openxmlformats.org/drawingml/2006/main">
-            <a:srgbClr val="FBF7EF"/>
-          </a:solidFill>
-        </p:spPr>
-      </p:sp>
-      <p:sp>
-        <p:nvSpPr>
-          <p:cNvPr id="6" name="role-step-bg-01">
-            <a:extLst xmlns:a="http://schemas.openxmlformats.org/drawingml/2006/main">
-              <a:ext uri="{FF2B5EF4-FFF2-40B4-BE49-F238E27FC236}">
-                <a16:creationId xmlns:a16="http://schemas.microsoft.com/office/drawing/2014/main" id="{0F5FAF3D-CE9C-4696-8EA6-72C9F09392C0}"/>
+            <a:srgbClr val="211512"/>
+          </a:solidFill>
+        </p:spPr>
+      </p:sp>
+      <p:sp>
+        <p:nvSpPr>
+          <p:cNvPr id="9" name="role-step-bg-01">
+            <a:extLst xmlns:a="http://schemas.openxmlformats.org/drawingml/2006/main">
+              <a:ext uri="{FF2B5EF4-FFF2-40B4-BE49-F238E27FC236}">
+                <a16:creationId xmlns:a16="http://schemas.microsoft.com/office/drawing/2014/main" id="{991E8ACD-1F32-45E9-8D00-638CACB6C663}"/>
               </a:ext>
             </a:extLst>
           </p:cNvPr>
@@ -4293,16 +5057,16 @@
             </a:avLst>
           </a:prstGeom>
           <a:solidFill xmlns:a="http://schemas.openxmlformats.org/drawingml/2006/main">
-            <a:srgbClr val="E0B44F"/>
-          </a:solidFill>
-        </p:spPr>
-      </p:sp>
-      <p:sp>
-        <p:nvSpPr>
-          <p:cNvPr id="7" name="role-step-01">
-            <a:extLst xmlns:a="http://schemas.openxmlformats.org/drawingml/2006/main">
-              <a:ext uri="{FF2B5EF4-FFF2-40B4-BE49-F238E27FC236}">
-                <a16:creationId xmlns:a16="http://schemas.microsoft.com/office/drawing/2014/main" id="{3C93951F-A5DD-4610-95F9-6BE73924B0ED}"/>
+            <a:srgbClr val="F6C453"/>
+          </a:solidFill>
+        </p:spPr>
+      </p:sp>
+      <p:sp>
+        <p:nvSpPr>
+          <p:cNvPr id="10" name="role-step-01">
+            <a:extLst xmlns:a="http://schemas.openxmlformats.org/drawingml/2006/main">
+              <a:ext uri="{FF2B5EF4-FFF2-40B4-BE49-F238E27FC236}">
+                <a16:creationId xmlns:a16="http://schemas.microsoft.com/office/drawing/2014/main" id="{BE31BCFC-0DA9-46EA-BC68-4C3F05DB34B4}"/>
               </a:ext>
             </a:extLst>
           </p:cNvPr>
@@ -4329,11 +5093,11 @@
             <a:pPr algn="ctr">
               <a:defRPr sz="1350" b="1">
                 <a:solidFill>
-                  <a:srgbClr val="FFFFFF"/>
-                </a:solidFill>
-                <a:latin typeface="Arial"/>
-                <a:ea typeface="Arial"/>
-                <a:cs typeface="Arial"/>
+                  <a:srgbClr val="1A0D08"/>
+                </a:solidFill>
+                <a:latin typeface="Aptos"/>
+                <a:ea typeface="Aptos"/>
+                <a:cs typeface="Aptos"/>
               </a:defRPr>
             </a:pPr>
             <a:r>
@@ -4344,10 +5108,10 @@
       </p:sp>
       <p:sp>
         <p:nvSpPr>
-          <p:cNvPr id="8" name="role-title-01">
-            <a:extLst xmlns:a="http://schemas.openxmlformats.org/drawingml/2006/main">
-              <a:ext uri="{FF2B5EF4-FFF2-40B4-BE49-F238E27FC236}">
-                <a16:creationId xmlns:a16="http://schemas.microsoft.com/office/drawing/2014/main" id="{53AF66AF-F63D-477F-AEFE-9DED5ED349B2}"/>
+          <p:cNvPr id="11" name="role-title-01">
+            <a:extLst xmlns:a="http://schemas.openxmlformats.org/drawingml/2006/main">
+              <a:ext uri="{FF2B5EF4-FFF2-40B4-BE49-F238E27FC236}">
+                <a16:creationId xmlns:a16="http://schemas.microsoft.com/office/drawing/2014/main" id="{A4C615B8-5292-46CC-94D8-2201EB7BD3FA}"/>
               </a:ext>
             </a:extLst>
           </p:cNvPr>
@@ -4374,11 +5138,11 @@
             <a:pPr algn="l">
               <a:defRPr sz="2100" b="1">
                 <a:solidFill>
-                  <a:srgbClr val="180D20"/>
-                </a:solidFill>
-                <a:latin typeface="Arial"/>
-                <a:ea typeface="Arial"/>
-                <a:cs typeface="Arial"/>
+                  <a:srgbClr val="FFF7ED"/>
+                </a:solidFill>
+                <a:latin typeface="Aptos"/>
+                <a:ea typeface="Aptos"/>
+                <a:cs typeface="Aptos"/>
               </a:defRPr>
             </a:pPr>
             <a:r>
@@ -4389,10 +5153,10 @@
       </p:sp>
       <p:sp>
         <p:nvSpPr>
-          <p:cNvPr id="9" name="role-desc-01">
-            <a:extLst xmlns:a="http://schemas.openxmlformats.org/drawingml/2006/main">
-              <a:ext uri="{FF2B5EF4-FFF2-40B4-BE49-F238E27FC236}">
-                <a16:creationId xmlns:a16="http://schemas.microsoft.com/office/drawing/2014/main" id="{900F5480-240F-4180-8BDA-61CD91BE7BD8}"/>
+          <p:cNvPr id="12" name="role-desc-01">
+            <a:extLst xmlns:a="http://schemas.openxmlformats.org/drawingml/2006/main">
+              <a:ext uri="{FF2B5EF4-FFF2-40B4-BE49-F238E27FC236}">
+                <a16:creationId xmlns:a16="http://schemas.microsoft.com/office/drawing/2014/main" id="{14D4EA13-38B0-4EC5-AA28-3B445503633F}"/>
               </a:ext>
             </a:extLst>
           </p:cNvPr>
@@ -4419,11 +5183,11 @@
             <a:pPr algn="l">
               <a:defRPr sz="1350" b="0">
                 <a:solidFill>
-                  <a:srgbClr val="70647A"/>
-                </a:solidFill>
-                <a:latin typeface="Arial"/>
-                <a:ea typeface="Arial"/>
-                <a:cs typeface="Arial"/>
+                  <a:srgbClr val="B9A59B"/>
+                </a:solidFill>
+                <a:latin typeface="Aptos"/>
+                <a:ea typeface="Aptos"/>
+                <a:cs typeface="Aptos"/>
               </a:defRPr>
             </a:pPr>
             <a:r>
@@ -4434,10 +5198,10 @@
       </p:sp>
       <p:sp>
         <p:nvSpPr>
-          <p:cNvPr id="10" name="role-proof-line-01">
-            <a:extLst xmlns:a="http://schemas.openxmlformats.org/drawingml/2006/main">
-              <a:ext uri="{FF2B5EF4-FFF2-40B4-BE49-F238E27FC236}">
-                <a16:creationId xmlns:a16="http://schemas.microsoft.com/office/drawing/2014/main" id="{D24ACF06-0E81-438D-A572-9564435F392B}"/>
+          <p:cNvPr id="13" name="role-proof-line-01">
+            <a:extLst xmlns:a="http://schemas.openxmlformats.org/drawingml/2006/main">
+              <a:ext uri="{FF2B5EF4-FFF2-40B4-BE49-F238E27FC236}">
+                <a16:creationId xmlns:a16="http://schemas.microsoft.com/office/drawing/2014/main" id="{61F09F6C-056A-4263-8669-DABDC5CA1494}"/>
               </a:ext>
             </a:extLst>
           </p:cNvPr>
@@ -4455,16 +5219,16 @@
             <a:avLst/>
           </a:prstGeom>
           <a:solidFill xmlns:a="http://schemas.openxmlformats.org/drawingml/2006/main">
-            <a:srgbClr val="DED4E6"/>
-          </a:solidFill>
-        </p:spPr>
-      </p:sp>
-      <p:sp>
-        <p:nvSpPr>
-          <p:cNvPr id="11" name="role-proof-01">
-            <a:extLst xmlns:a="http://schemas.openxmlformats.org/drawingml/2006/main">
-              <a:ext uri="{FF2B5EF4-FFF2-40B4-BE49-F238E27FC236}">
-                <a16:creationId xmlns:a16="http://schemas.microsoft.com/office/drawing/2014/main" id="{3EAD081B-8A2D-46E0-84A9-53481F9BA589}"/>
+            <a:srgbClr val="49302A"/>
+          </a:solidFill>
+        </p:spPr>
+      </p:sp>
+      <p:sp>
+        <p:nvSpPr>
+          <p:cNvPr id="14" name="role-proof-01">
+            <a:extLst xmlns:a="http://schemas.openxmlformats.org/drawingml/2006/main">
+              <a:ext uri="{FF2B5EF4-FFF2-40B4-BE49-F238E27FC236}">
+                <a16:creationId xmlns:a16="http://schemas.microsoft.com/office/drawing/2014/main" id="{90199713-5DFD-466D-B1D5-5CEB6EB3C94A}"/>
               </a:ext>
             </a:extLst>
           </p:cNvPr>
@@ -4491,11 +5255,11 @@
             <a:pPr algn="l">
               <a:defRPr sz="1275" b="1">
                 <a:solidFill>
-                  <a:srgbClr val="6845C6"/>
-                </a:solidFill>
-                <a:latin typeface="Arial"/>
-                <a:ea typeface="Arial"/>
-                <a:cs typeface="Arial"/>
+                  <a:srgbClr val="FF7A59"/>
+                </a:solidFill>
+                <a:latin typeface="Aptos"/>
+                <a:ea typeface="Aptos"/>
+                <a:cs typeface="Aptos"/>
               </a:defRPr>
             </a:pPr>
             <a:r>
@@ -4506,10 +5270,10 @@
       </p:sp>
       <p:sp>
         <p:nvSpPr>
-          <p:cNvPr id="12" name="role-card-02">
-            <a:extLst xmlns:a="http://schemas.openxmlformats.org/drawingml/2006/main">
-              <a:ext uri="{FF2B5EF4-FFF2-40B4-BE49-F238E27FC236}">
-                <a16:creationId xmlns:a16="http://schemas.microsoft.com/office/drawing/2014/main" id="{935C5DF7-6D44-4407-9CE1-1C265F04F034}"/>
+          <p:cNvPr id="15" name="role-card-02">
+            <a:extLst xmlns:a="http://schemas.openxmlformats.org/drawingml/2006/main">
+              <a:ext uri="{FF2B5EF4-FFF2-40B4-BE49-F238E27FC236}">
+                <a16:creationId xmlns:a16="http://schemas.microsoft.com/office/drawing/2014/main" id="{C75D2E47-1578-4CB3-B551-829D50913EFD}"/>
               </a:ext>
             </a:extLst>
           </p:cNvPr>
@@ -4529,16 +5293,16 @@
             </a:avLst>
           </a:prstGeom>
           <a:solidFill xmlns:a="http://schemas.openxmlformats.org/drawingml/2006/main">
-            <a:srgbClr val="FBF7EF"/>
-          </a:solidFill>
-        </p:spPr>
-      </p:sp>
-      <p:sp>
-        <p:nvSpPr>
-          <p:cNvPr id="13" name="role-step-bg-02">
-            <a:extLst xmlns:a="http://schemas.openxmlformats.org/drawingml/2006/main">
-              <a:ext uri="{FF2B5EF4-FFF2-40B4-BE49-F238E27FC236}">
-                <a16:creationId xmlns:a16="http://schemas.microsoft.com/office/drawing/2014/main" id="{34106409-DD96-49BD-901B-CFA8D800772E}"/>
+            <a:srgbClr val="211512"/>
+          </a:solidFill>
+        </p:spPr>
+      </p:sp>
+      <p:sp>
+        <p:nvSpPr>
+          <p:cNvPr id="16" name="role-step-bg-02">
+            <a:extLst xmlns:a="http://schemas.openxmlformats.org/drawingml/2006/main">
+              <a:ext uri="{FF2B5EF4-FFF2-40B4-BE49-F238E27FC236}">
+                <a16:creationId xmlns:a16="http://schemas.microsoft.com/office/drawing/2014/main" id="{50C95959-3BC5-4C78-9B5B-5AF7A4AF53DE}"/>
               </a:ext>
             </a:extLst>
           </p:cNvPr>
@@ -4558,16 +5322,16 @@
             </a:avLst>
           </a:prstGeom>
           <a:solidFill xmlns:a="http://schemas.openxmlformats.org/drawingml/2006/main">
-            <a:srgbClr val="A78BFA"/>
-          </a:solidFill>
-        </p:spPr>
-      </p:sp>
-      <p:sp>
-        <p:nvSpPr>
-          <p:cNvPr id="14" name="role-step-02">
-            <a:extLst xmlns:a="http://schemas.openxmlformats.org/drawingml/2006/main">
-              <a:ext uri="{FF2B5EF4-FFF2-40B4-BE49-F238E27FC236}">
-                <a16:creationId xmlns:a16="http://schemas.microsoft.com/office/drawing/2014/main" id="{6251DE9C-1BCB-47E4-BA53-3480A15D7B67}"/>
+            <a:srgbClr val="FF7A59"/>
+          </a:solidFill>
+        </p:spPr>
+      </p:sp>
+      <p:sp>
+        <p:nvSpPr>
+          <p:cNvPr id="17" name="role-step-02">
+            <a:extLst xmlns:a="http://schemas.openxmlformats.org/drawingml/2006/main">
+              <a:ext uri="{FF2B5EF4-FFF2-40B4-BE49-F238E27FC236}">
+                <a16:creationId xmlns:a16="http://schemas.microsoft.com/office/drawing/2014/main" id="{80A28973-AA4E-4F85-8A6E-684CF79340ED}"/>
               </a:ext>
             </a:extLst>
           </p:cNvPr>
@@ -4594,11 +5358,11 @@
             <a:pPr algn="ctr">
               <a:defRPr sz="1350" b="1">
                 <a:solidFill>
-                  <a:srgbClr val="FFFFFF"/>
-                </a:solidFill>
-                <a:latin typeface="Arial"/>
-                <a:ea typeface="Arial"/>
-                <a:cs typeface="Arial"/>
+                  <a:srgbClr val="1A0D08"/>
+                </a:solidFill>
+                <a:latin typeface="Aptos"/>
+                <a:ea typeface="Aptos"/>
+                <a:cs typeface="Aptos"/>
               </a:defRPr>
             </a:pPr>
             <a:r>
@@ -4609,10 +5373,10 @@
       </p:sp>
       <p:sp>
         <p:nvSpPr>
-          <p:cNvPr id="15" name="role-title-02">
-            <a:extLst xmlns:a="http://schemas.openxmlformats.org/drawingml/2006/main">
-              <a:ext uri="{FF2B5EF4-FFF2-40B4-BE49-F238E27FC236}">
-                <a16:creationId xmlns:a16="http://schemas.microsoft.com/office/drawing/2014/main" id="{2C436E90-05A6-4984-A8DF-D11CF471DFAC}"/>
+          <p:cNvPr id="18" name="role-title-02">
+            <a:extLst xmlns:a="http://schemas.openxmlformats.org/drawingml/2006/main">
+              <a:ext uri="{FF2B5EF4-FFF2-40B4-BE49-F238E27FC236}">
+                <a16:creationId xmlns:a16="http://schemas.microsoft.com/office/drawing/2014/main" id="{7D0EF2A2-75D1-4836-9862-6E9389E78A75}"/>
               </a:ext>
             </a:extLst>
           </p:cNvPr>
@@ -4639,11 +5403,11 @@
             <a:pPr algn="l">
               <a:defRPr sz="2100" b="1">
                 <a:solidFill>
-                  <a:srgbClr val="180D20"/>
-                </a:solidFill>
-                <a:latin typeface="Arial"/>
-                <a:ea typeface="Arial"/>
-                <a:cs typeface="Arial"/>
+                  <a:srgbClr val="FFF7ED"/>
+                </a:solidFill>
+                <a:latin typeface="Aptos"/>
+                <a:ea typeface="Aptos"/>
+                <a:cs typeface="Aptos"/>
               </a:defRPr>
             </a:pPr>
             <a:r>
@@ -4654,10 +5418,10 @@
       </p:sp>
       <p:sp>
         <p:nvSpPr>
-          <p:cNvPr id="16" name="role-desc-02">
-            <a:extLst xmlns:a="http://schemas.openxmlformats.org/drawingml/2006/main">
-              <a:ext uri="{FF2B5EF4-FFF2-40B4-BE49-F238E27FC236}">
-                <a16:creationId xmlns:a16="http://schemas.microsoft.com/office/drawing/2014/main" id="{1927BE34-B858-489C-A48C-E6AA30098AF7}"/>
+          <p:cNvPr id="19" name="role-desc-02">
+            <a:extLst xmlns:a="http://schemas.openxmlformats.org/drawingml/2006/main">
+              <a:ext uri="{FF2B5EF4-FFF2-40B4-BE49-F238E27FC236}">
+                <a16:creationId xmlns:a16="http://schemas.microsoft.com/office/drawing/2014/main" id="{C3347A76-DEE4-4F1A-B367-01C24B4924EE}"/>
               </a:ext>
             </a:extLst>
           </p:cNvPr>
@@ -4684,11 +5448,11 @@
             <a:pPr algn="l">
               <a:defRPr sz="1350" b="0">
                 <a:solidFill>
-                  <a:srgbClr val="70647A"/>
-                </a:solidFill>
-                <a:latin typeface="Arial"/>
-                <a:ea typeface="Arial"/>
-                <a:cs typeface="Arial"/>
+                  <a:srgbClr val="B9A59B"/>
+                </a:solidFill>
+                <a:latin typeface="Aptos"/>
+                <a:ea typeface="Aptos"/>
+                <a:cs typeface="Aptos"/>
               </a:defRPr>
             </a:pPr>
             <a:r>
@@ -4699,10 +5463,10 @@
       </p:sp>
       <p:sp>
         <p:nvSpPr>
-          <p:cNvPr id="17" name="role-proof-line-02">
-            <a:extLst xmlns:a="http://schemas.openxmlformats.org/drawingml/2006/main">
-              <a:ext uri="{FF2B5EF4-FFF2-40B4-BE49-F238E27FC236}">
-                <a16:creationId xmlns:a16="http://schemas.microsoft.com/office/drawing/2014/main" id="{69BA743C-CF62-4881-A45D-35A028472068}"/>
+          <p:cNvPr id="20" name="role-proof-line-02">
+            <a:extLst xmlns:a="http://schemas.openxmlformats.org/drawingml/2006/main">
+              <a:ext uri="{FF2B5EF4-FFF2-40B4-BE49-F238E27FC236}">
+                <a16:creationId xmlns:a16="http://schemas.microsoft.com/office/drawing/2014/main" id="{D6BC763E-9369-4A58-9ED8-7BEC4865B058}"/>
               </a:ext>
             </a:extLst>
           </p:cNvPr>
@@ -4720,16 +5484,16 @@
             <a:avLst/>
           </a:prstGeom>
           <a:solidFill xmlns:a="http://schemas.openxmlformats.org/drawingml/2006/main">
-            <a:srgbClr val="DED4E6"/>
-          </a:solidFill>
-        </p:spPr>
-      </p:sp>
-      <p:sp>
-        <p:nvSpPr>
-          <p:cNvPr id="18" name="role-proof-02">
-            <a:extLst xmlns:a="http://schemas.openxmlformats.org/drawingml/2006/main">
-              <a:ext uri="{FF2B5EF4-FFF2-40B4-BE49-F238E27FC236}">
-                <a16:creationId xmlns:a16="http://schemas.microsoft.com/office/drawing/2014/main" id="{B215376D-6D65-4DE1-89C5-DDA0629E3975}"/>
+            <a:srgbClr val="49302A"/>
+          </a:solidFill>
+        </p:spPr>
+      </p:sp>
+      <p:sp>
+        <p:nvSpPr>
+          <p:cNvPr id="21" name="role-proof-02">
+            <a:extLst xmlns:a="http://schemas.openxmlformats.org/drawingml/2006/main">
+              <a:ext uri="{FF2B5EF4-FFF2-40B4-BE49-F238E27FC236}">
+                <a16:creationId xmlns:a16="http://schemas.microsoft.com/office/drawing/2014/main" id="{9908D5F6-29B6-4A27-BBC2-11175E3B45BD}"/>
               </a:ext>
             </a:extLst>
           </p:cNvPr>
@@ -4756,11 +5520,11 @@
             <a:pPr algn="l">
               <a:defRPr sz="1275" b="1">
                 <a:solidFill>
-                  <a:srgbClr val="6845C6"/>
-                </a:solidFill>
-                <a:latin typeface="Arial"/>
-                <a:ea typeface="Arial"/>
-                <a:cs typeface="Arial"/>
+                  <a:srgbClr val="FF7A59"/>
+                </a:solidFill>
+                <a:latin typeface="Aptos"/>
+                <a:ea typeface="Aptos"/>
+                <a:cs typeface="Aptos"/>
               </a:defRPr>
             </a:pPr>
             <a:r>
@@ -4771,10 +5535,10 @@
       </p:sp>
       <p:sp>
         <p:nvSpPr>
-          <p:cNvPr id="19" name="role-card-03">
-            <a:extLst xmlns:a="http://schemas.openxmlformats.org/drawingml/2006/main">
-              <a:ext uri="{FF2B5EF4-FFF2-40B4-BE49-F238E27FC236}">
-                <a16:creationId xmlns:a16="http://schemas.microsoft.com/office/drawing/2014/main" id="{804EEB0D-AC3C-499C-BB72-A6C297B2B5D0}"/>
+          <p:cNvPr id="22" name="role-card-03">
+            <a:extLst xmlns:a="http://schemas.openxmlformats.org/drawingml/2006/main">
+              <a:ext uri="{FF2B5EF4-FFF2-40B4-BE49-F238E27FC236}">
+                <a16:creationId xmlns:a16="http://schemas.microsoft.com/office/drawing/2014/main" id="{9080F452-893C-49E7-B02A-2A28B02ADE32}"/>
               </a:ext>
             </a:extLst>
           </p:cNvPr>
@@ -4794,16 +5558,16 @@
             </a:avLst>
           </a:prstGeom>
           <a:solidFill xmlns:a="http://schemas.openxmlformats.org/drawingml/2006/main">
-            <a:srgbClr val="FBF7EF"/>
-          </a:solidFill>
-        </p:spPr>
-      </p:sp>
-      <p:sp>
-        <p:nvSpPr>
-          <p:cNvPr id="20" name="role-step-bg-03">
-            <a:extLst xmlns:a="http://schemas.openxmlformats.org/drawingml/2006/main">
-              <a:ext uri="{FF2B5EF4-FFF2-40B4-BE49-F238E27FC236}">
-                <a16:creationId xmlns:a16="http://schemas.microsoft.com/office/drawing/2014/main" id="{573AD520-FD92-45AE-8F5E-6C4663DD4196}"/>
+            <a:srgbClr val="211512"/>
+          </a:solidFill>
+        </p:spPr>
+      </p:sp>
+      <p:sp>
+        <p:nvSpPr>
+          <p:cNvPr id="23" name="role-step-bg-03">
+            <a:extLst xmlns:a="http://schemas.openxmlformats.org/drawingml/2006/main">
+              <a:ext uri="{FF2B5EF4-FFF2-40B4-BE49-F238E27FC236}">
+                <a16:creationId xmlns:a16="http://schemas.microsoft.com/office/drawing/2014/main" id="{85092E50-1FE8-4B65-9E12-7F27C181E7FC}"/>
               </a:ext>
             </a:extLst>
           </p:cNvPr>
@@ -4823,16 +5587,16 @@
             </a:avLst>
           </a:prstGeom>
           <a:solidFill xmlns:a="http://schemas.openxmlformats.org/drawingml/2006/main">
-            <a:srgbClr val="E65FA8"/>
-          </a:solidFill>
-        </p:spPr>
-      </p:sp>
-      <p:sp>
-        <p:nvSpPr>
-          <p:cNvPr id="21" name="role-step-03">
-            <a:extLst xmlns:a="http://schemas.openxmlformats.org/drawingml/2006/main">
-              <a:ext uri="{FF2B5EF4-FFF2-40B4-BE49-F238E27FC236}">
-                <a16:creationId xmlns:a16="http://schemas.microsoft.com/office/drawing/2014/main" id="{B6E72B28-417E-4C3C-8AB9-4FF105B5631D}"/>
+            <a:srgbClr val="5EEAD4"/>
+          </a:solidFill>
+        </p:spPr>
+      </p:sp>
+      <p:sp>
+        <p:nvSpPr>
+          <p:cNvPr id="24" name="role-step-03">
+            <a:extLst xmlns:a="http://schemas.openxmlformats.org/drawingml/2006/main">
+              <a:ext uri="{FF2B5EF4-FFF2-40B4-BE49-F238E27FC236}">
+                <a16:creationId xmlns:a16="http://schemas.microsoft.com/office/drawing/2014/main" id="{AB9395D1-3A1D-45A8-8C8C-DC41973EBB5F}"/>
               </a:ext>
             </a:extLst>
           </p:cNvPr>
@@ -4859,11 +5623,11 @@
             <a:pPr algn="ctr">
               <a:defRPr sz="1350" b="1">
                 <a:solidFill>
-                  <a:srgbClr val="FFFFFF"/>
-                </a:solidFill>
-                <a:latin typeface="Arial"/>
-                <a:ea typeface="Arial"/>
-                <a:cs typeface="Arial"/>
+                  <a:srgbClr val="1A0D08"/>
+                </a:solidFill>
+                <a:latin typeface="Aptos"/>
+                <a:ea typeface="Aptos"/>
+                <a:cs typeface="Aptos"/>
               </a:defRPr>
             </a:pPr>
             <a:r>
@@ -4874,10 +5638,10 @@
       </p:sp>
       <p:sp>
         <p:nvSpPr>
-          <p:cNvPr id="22" name="role-title-03">
-            <a:extLst xmlns:a="http://schemas.openxmlformats.org/drawingml/2006/main">
-              <a:ext uri="{FF2B5EF4-FFF2-40B4-BE49-F238E27FC236}">
-                <a16:creationId xmlns:a16="http://schemas.microsoft.com/office/drawing/2014/main" id="{BE3D86B3-EC89-49C2-A745-3467228C7C81}"/>
+          <p:cNvPr id="25" name="role-title-03">
+            <a:extLst xmlns:a="http://schemas.openxmlformats.org/drawingml/2006/main">
+              <a:ext uri="{FF2B5EF4-FFF2-40B4-BE49-F238E27FC236}">
+                <a16:creationId xmlns:a16="http://schemas.microsoft.com/office/drawing/2014/main" id="{E9E3244A-D630-4DB7-ADC7-1D087B565D7A}"/>
               </a:ext>
             </a:extLst>
           </p:cNvPr>
@@ -4904,11 +5668,11 @@
             <a:pPr algn="l">
               <a:defRPr sz="2100" b="1">
                 <a:solidFill>
-                  <a:srgbClr val="180D20"/>
-                </a:solidFill>
-                <a:latin typeface="Arial"/>
-                <a:ea typeface="Arial"/>
-                <a:cs typeface="Arial"/>
+                  <a:srgbClr val="FFF7ED"/>
+                </a:solidFill>
+                <a:latin typeface="Aptos"/>
+                <a:ea typeface="Aptos"/>
+                <a:cs typeface="Aptos"/>
               </a:defRPr>
             </a:pPr>
             <a:r>
@@ -4919,10 +5683,10 @@
       </p:sp>
       <p:sp>
         <p:nvSpPr>
-          <p:cNvPr id="23" name="role-desc-03">
-            <a:extLst xmlns:a="http://schemas.openxmlformats.org/drawingml/2006/main">
-              <a:ext uri="{FF2B5EF4-FFF2-40B4-BE49-F238E27FC236}">
-                <a16:creationId xmlns:a16="http://schemas.microsoft.com/office/drawing/2014/main" id="{0F587F3A-271E-4D03-AF75-D0B5E5FA08F9}"/>
+          <p:cNvPr id="26" name="role-desc-03">
+            <a:extLst xmlns:a="http://schemas.openxmlformats.org/drawingml/2006/main">
+              <a:ext uri="{FF2B5EF4-FFF2-40B4-BE49-F238E27FC236}">
+                <a16:creationId xmlns:a16="http://schemas.microsoft.com/office/drawing/2014/main" id="{5EF0B411-C803-4E89-85AC-0A712C02D627}"/>
               </a:ext>
             </a:extLst>
           </p:cNvPr>
@@ -4949,11 +5713,11 @@
             <a:pPr algn="l">
               <a:defRPr sz="1350" b="0">
                 <a:solidFill>
-                  <a:srgbClr val="70647A"/>
-                </a:solidFill>
-                <a:latin typeface="Arial"/>
-                <a:ea typeface="Arial"/>
-                <a:cs typeface="Arial"/>
+                  <a:srgbClr val="B9A59B"/>
+                </a:solidFill>
+                <a:latin typeface="Aptos"/>
+                <a:ea typeface="Aptos"/>
+                <a:cs typeface="Aptos"/>
               </a:defRPr>
             </a:pPr>
             <a:r>
@@ -4964,10 +5728,10 @@
       </p:sp>
       <p:sp>
         <p:nvSpPr>
-          <p:cNvPr id="24" name="role-proof-line-03">
-            <a:extLst xmlns:a="http://schemas.openxmlformats.org/drawingml/2006/main">
-              <a:ext uri="{FF2B5EF4-FFF2-40B4-BE49-F238E27FC236}">
-                <a16:creationId xmlns:a16="http://schemas.microsoft.com/office/drawing/2014/main" id="{C5C91A87-ED3C-4C24-B13B-DBCFA5511325}"/>
+          <p:cNvPr id="27" name="role-proof-line-03">
+            <a:extLst xmlns:a="http://schemas.openxmlformats.org/drawingml/2006/main">
+              <a:ext uri="{FF2B5EF4-FFF2-40B4-BE49-F238E27FC236}">
+                <a16:creationId xmlns:a16="http://schemas.microsoft.com/office/drawing/2014/main" id="{7E138841-A328-4406-B327-4C792F352A4A}"/>
               </a:ext>
             </a:extLst>
           </p:cNvPr>
@@ -4985,16 +5749,16 @@
             <a:avLst/>
           </a:prstGeom>
           <a:solidFill xmlns:a="http://schemas.openxmlformats.org/drawingml/2006/main">
-            <a:srgbClr val="DED4E6"/>
-          </a:solidFill>
-        </p:spPr>
-      </p:sp>
-      <p:sp>
-        <p:nvSpPr>
-          <p:cNvPr id="25" name="role-proof-03">
-            <a:extLst xmlns:a="http://schemas.openxmlformats.org/drawingml/2006/main">
-              <a:ext uri="{FF2B5EF4-FFF2-40B4-BE49-F238E27FC236}">
-                <a16:creationId xmlns:a16="http://schemas.microsoft.com/office/drawing/2014/main" id="{57F5AD64-05D6-4385-A0D5-4957E155DB9E}"/>
+            <a:srgbClr val="49302A"/>
+          </a:solidFill>
+        </p:spPr>
+      </p:sp>
+      <p:sp>
+        <p:nvSpPr>
+          <p:cNvPr id="28" name="role-proof-03">
+            <a:extLst xmlns:a="http://schemas.openxmlformats.org/drawingml/2006/main">
+              <a:ext uri="{FF2B5EF4-FFF2-40B4-BE49-F238E27FC236}">
+                <a16:creationId xmlns:a16="http://schemas.microsoft.com/office/drawing/2014/main" id="{E84085B0-877B-4556-B0DB-314C7C690803}"/>
               </a:ext>
             </a:extLst>
           </p:cNvPr>
@@ -5021,11 +5785,11 @@
             <a:pPr algn="l">
               <a:defRPr sz="1275" b="1">
                 <a:solidFill>
-                  <a:srgbClr val="6845C6"/>
-                </a:solidFill>
-                <a:latin typeface="Arial"/>
-                <a:ea typeface="Arial"/>
-                <a:cs typeface="Arial"/>
+                  <a:srgbClr val="FF7A59"/>
+                </a:solidFill>
+                <a:latin typeface="Aptos"/>
+                <a:ea typeface="Aptos"/>
+                <a:cs typeface="Aptos"/>
               </a:defRPr>
             </a:pPr>
             <a:r>
@@ -5036,10 +5800,10 @@
       </p:sp>
       <p:sp>
         <p:nvSpPr>
-          <p:cNvPr id="26" name="footer-line-2">
-            <a:extLst xmlns:a="http://schemas.openxmlformats.org/drawingml/2006/main">
-              <a:ext uri="{FF2B5EF4-FFF2-40B4-BE49-F238E27FC236}">
-                <a16:creationId xmlns:a16="http://schemas.microsoft.com/office/drawing/2014/main" id="{4CCDDDC0-38D0-42C4-BEA3-CAC4C3BC9077}"/>
+          <p:cNvPr id="29" name="footer-line-gold-2">
+            <a:extLst xmlns:a="http://schemas.openxmlformats.org/drawingml/2006/main">
+              <a:ext uri="{FF2B5EF4-FFF2-40B4-BE49-F238E27FC236}">
+                <a16:creationId xmlns:a16="http://schemas.microsoft.com/office/drawing/2014/main" id="{6F2A6165-AB34-4FFA-B960-0BBEEF236177}"/>
               </a:ext>
             </a:extLst>
           </p:cNvPr>
@@ -5051,22 +5815,76 @@
         <p:spPr>
           <a:xfrm xmlns:a="http://schemas.openxmlformats.org/drawingml/2006/main">
             <a:off x="400050" y="6429375"/>
-            <a:ext cx="10553700" cy="19050"/>
-          </a:xfrm>
-          <a:prstGeom xmlns:a="http://schemas.openxmlformats.org/drawingml/2006/main" prst="rect">
-            <a:avLst/>
-          </a:prstGeom>
-          <a:solidFill xmlns:a="http://schemas.openxmlformats.org/drawingml/2006/main">
-            <a:srgbClr val="DED4E6"/>
-          </a:solidFill>
-        </p:spPr>
-      </p:sp>
-      <p:sp>
-        <p:nvSpPr>
-          <p:cNvPr id="27" name="footer-name-2">
-            <a:extLst xmlns:a="http://schemas.openxmlformats.org/drawingml/2006/main">
-              <a:ext uri="{FF2B5EF4-FFF2-40B4-BE49-F238E27FC236}">
-                <a16:creationId xmlns:a16="http://schemas.microsoft.com/office/drawing/2014/main" id="{75189572-8B16-4FC1-8C0C-7B5DDD6B17B1}"/>
+            <a:ext cx="5276850" cy="19050"/>
+          </a:xfrm>
+          <a:prstGeom xmlns:a="http://schemas.openxmlformats.org/drawingml/2006/main" prst="rect">
+            <a:avLst/>
+          </a:prstGeom>
+          <a:solidFill xmlns:a="http://schemas.openxmlformats.org/drawingml/2006/main">
+            <a:srgbClr val="F6C453"/>
+          </a:solidFill>
+        </p:spPr>
+      </p:sp>
+      <p:sp>
+        <p:nvSpPr>
+          <p:cNvPr id="30" name="footer-line-coral-2">
+            <a:extLst xmlns:a="http://schemas.openxmlformats.org/drawingml/2006/main">
+              <a:ext uri="{FF2B5EF4-FFF2-40B4-BE49-F238E27FC236}">
+                <a16:creationId xmlns:a16="http://schemas.microsoft.com/office/drawing/2014/main" id="{CED23ACC-DF92-4A76-A6BB-5B2F4366B9BF}"/>
+              </a:ext>
+            </a:extLst>
+          </p:cNvPr>
+          <p:cNvSpPr>
+            <a:spLocks xmlns:a="http://schemas.openxmlformats.org/drawingml/2006/main" noGrp="1"/>
+          </p:cNvSpPr>
+          <p:nvPr/>
+        </p:nvSpPr>
+        <p:spPr>
+          <a:xfrm xmlns:a="http://schemas.openxmlformats.org/drawingml/2006/main">
+            <a:off x="5676900" y="6429375"/>
+            <a:ext cx="2638425" cy="19050"/>
+          </a:xfrm>
+          <a:prstGeom xmlns:a="http://schemas.openxmlformats.org/drawingml/2006/main" prst="rect">
+            <a:avLst/>
+          </a:prstGeom>
+          <a:solidFill xmlns:a="http://schemas.openxmlformats.org/drawingml/2006/main">
+            <a:srgbClr val="FF7A59"/>
+          </a:solidFill>
+        </p:spPr>
+      </p:sp>
+      <p:sp>
+        <p:nvSpPr>
+          <p:cNvPr id="31" name="footer-line-teal-2">
+            <a:extLst xmlns:a="http://schemas.openxmlformats.org/drawingml/2006/main">
+              <a:ext uri="{FF2B5EF4-FFF2-40B4-BE49-F238E27FC236}">
+                <a16:creationId xmlns:a16="http://schemas.microsoft.com/office/drawing/2014/main" id="{CB207180-E161-48B5-93AD-8700E2F0F61B}"/>
+              </a:ext>
+            </a:extLst>
+          </p:cNvPr>
+          <p:cNvSpPr>
+            <a:spLocks xmlns:a="http://schemas.openxmlformats.org/drawingml/2006/main" noGrp="1"/>
+          </p:cNvSpPr>
+          <p:nvPr/>
+        </p:nvSpPr>
+        <p:spPr>
+          <a:xfrm xmlns:a="http://schemas.openxmlformats.org/drawingml/2006/main">
+            <a:off x="8315325" y="6429375"/>
+            <a:ext cx="2638425" cy="19050"/>
+          </a:xfrm>
+          <a:prstGeom xmlns:a="http://schemas.openxmlformats.org/drawingml/2006/main" prst="rect">
+            <a:avLst/>
+          </a:prstGeom>
+          <a:solidFill xmlns:a="http://schemas.openxmlformats.org/drawingml/2006/main">
+            <a:srgbClr val="5EEAD4"/>
+          </a:solidFill>
+        </p:spPr>
+      </p:sp>
+      <p:sp>
+        <p:nvSpPr>
+          <p:cNvPr id="32" name="footer-name-2">
+            <a:extLst xmlns:a="http://schemas.openxmlformats.org/drawingml/2006/main">
+              <a:ext uri="{FF2B5EF4-FFF2-40B4-BE49-F238E27FC236}">
+                <a16:creationId xmlns:a16="http://schemas.microsoft.com/office/drawing/2014/main" id="{D39C91C6-D7D5-4923-8FC3-2756D1B6F03E}"/>
               </a:ext>
             </a:extLst>
           </p:cNvPr>
@@ -5093,25 +5911,25 @@
             <a:pPr algn="l">
               <a:defRPr sz="825" b="1">
                 <a:solidFill>
-                  <a:srgbClr val="70647A"/>
-                </a:solidFill>
-                <a:latin typeface="Arial"/>
-                <a:ea typeface="Arial"/>
-                <a:cs typeface="Arial"/>
-              </a:defRPr>
-            </a:pPr>
-            <a:r>
-              <a:t>MUHAMMAD ALI AKBAR AL-QAHRI  /  DATA PORTFOLIO</a:t>
-            </a:r>
-          </a:p>
-        </p:txBody>
-      </p:sp>
-      <p:sp>
-        <p:nvSpPr>
-          <p:cNvPr id="28" name="footer-page-2">
-            <a:extLst xmlns:a="http://schemas.openxmlformats.org/drawingml/2006/main">
-              <a:ext uri="{FF2B5EF4-FFF2-40B4-BE49-F238E27FC236}">
-                <a16:creationId xmlns:a16="http://schemas.microsoft.com/office/drawing/2014/main" id="{3DF4DCBB-3822-471A-801A-0B9C7D80F186}"/>
+                  <a:srgbClr val="B9A59B"/>
+                </a:solidFill>
+                <a:latin typeface="Consolas"/>
+                <a:ea typeface="Consolas"/>
+                <a:cs typeface="Consolas"/>
+              </a:defRPr>
+            </a:pPr>
+            <a:r>
+              <a:t>~/ali_  /  DATA INTELLIGENCE PORTFOLIO</a:t>
+            </a:r>
+          </a:p>
+        </p:txBody>
+      </p:sp>
+      <p:sp>
+        <p:nvSpPr>
+          <p:cNvPr id="33" name="footer-page-2">
+            <a:extLst xmlns:a="http://schemas.openxmlformats.org/drawingml/2006/main">
+              <a:ext uri="{FF2B5EF4-FFF2-40B4-BE49-F238E27FC236}">
+                <a16:creationId xmlns:a16="http://schemas.microsoft.com/office/drawing/2014/main" id="{8429AAB9-7F4D-4DC3-8F79-400FFF8026B8}"/>
               </a:ext>
             </a:extLst>
           </p:cNvPr>
@@ -5138,11 +5956,11 @@
             <a:pPr algn="r">
               <a:defRPr sz="900" b="1">
                 <a:solidFill>
-                  <a:srgbClr val="70647A"/>
-                </a:solidFill>
-                <a:latin typeface="Arial"/>
-                <a:ea typeface="Arial"/>
-                <a:cs typeface="Arial"/>
+                  <a:srgbClr val="F6C453"/>
+                </a:solidFill>
+                <a:latin typeface="Consolas"/>
+                <a:ea typeface="Consolas"/>
+                <a:cs typeface="Consolas"/>
               </a:defRPr>
             </a:pPr>
             <a:r>
@@ -5154,7 +5972,7 @@
     </p:spTree>
     <p:extLst>
       <p:ext uri="{BB962C8B-B14F-4D97-AF65-F5344CB8AC3E}">
-        <p14:creationId xmlns:p14="http://schemas.microsoft.com/office/powerpoint/2010/main" val="1634199713"/>
+        <p14:creationId xmlns:p14="http://schemas.microsoft.com/office/powerpoint/2010/main" val="775015594"/>
       </p:ext>
     </p:extLst>
   </p:cSld>
@@ -5175,10 +5993,10 @@
       </p:grpSpPr>
       <p:sp>
         <p:nvSpPr>
-          <p:cNvPr id="23" name="03-proof-canvas">
-            <a:extLst xmlns:a="http://schemas.openxmlformats.org/drawingml/2006/main">
-              <a:ext uri="{FF2B5EF4-FFF2-40B4-BE49-F238E27FC236}">
-                <a16:creationId xmlns:a16="http://schemas.microsoft.com/office/drawing/2014/main" id="{BE87A7E3-E62C-4C7A-90A3-3D61C90A3CFE}"/>
+          <p:cNvPr id="28" name="03-proof-canvas">
+            <a:extLst xmlns:a="http://schemas.openxmlformats.org/drawingml/2006/main">
+              <a:ext uri="{FF2B5EF4-FFF2-40B4-BE49-F238E27FC236}">
+                <a16:creationId xmlns:a16="http://schemas.microsoft.com/office/drawing/2014/main" id="{BEC8AFE7-9087-45A3-94FF-B1DC63B32893}"/>
               </a:ext>
             </a:extLst>
           </p:cNvPr>
@@ -5196,16 +6014,97 @@
             <a:avLst/>
           </a:prstGeom>
           <a:solidFill xmlns:a="http://schemas.openxmlformats.org/drawingml/2006/main">
-            <a:srgbClr val="FFFFFF"/>
-          </a:solidFill>
-        </p:spPr>
-      </p:sp>
-      <p:sp>
-        <p:nvSpPr>
-          <p:cNvPr id="2" name="eyebrow-3">
-            <a:extLst xmlns:a="http://schemas.openxmlformats.org/drawingml/2006/main">
-              <a:ext uri="{FF2B5EF4-FFF2-40B4-BE49-F238E27FC236}">
-                <a16:creationId xmlns:a16="http://schemas.microsoft.com/office/drawing/2014/main" id="{DD7E3909-8788-4F22-B6E6-05AE2C6E8B96}"/>
+            <a:srgbClr val="120B0A"/>
+          </a:solidFill>
+        </p:spPr>
+      </p:sp>
+      <p:sp>
+        <p:nvSpPr>
+          <p:cNvPr id="2" name="03-proof-edge-gold">
+            <a:extLst xmlns:a="http://schemas.openxmlformats.org/drawingml/2006/main">
+              <a:ext uri="{FF2B5EF4-FFF2-40B4-BE49-F238E27FC236}">
+                <a16:creationId xmlns:a16="http://schemas.microsoft.com/office/drawing/2014/main" id="{E6546E9D-9BB6-433F-A57F-C102981A303A}"/>
+              </a:ext>
+            </a:extLst>
+          </p:cNvPr>
+          <p:cNvSpPr>
+            <a:spLocks xmlns:a="http://schemas.openxmlformats.org/drawingml/2006/main" noGrp="1"/>
+          </p:cNvSpPr>
+          <p:nvPr/>
+        </p:nvSpPr>
+        <p:spPr>
+          <a:xfrm xmlns:a="http://schemas.openxmlformats.org/drawingml/2006/main">
+            <a:off x="0" y="0"/>
+            <a:ext cx="38100" cy="2286000"/>
+          </a:xfrm>
+          <a:prstGeom xmlns:a="http://schemas.openxmlformats.org/drawingml/2006/main" prst="rect">
+            <a:avLst/>
+          </a:prstGeom>
+          <a:solidFill xmlns:a="http://schemas.openxmlformats.org/drawingml/2006/main">
+            <a:srgbClr val="F6C453"/>
+          </a:solidFill>
+        </p:spPr>
+      </p:sp>
+      <p:sp>
+        <p:nvSpPr>
+          <p:cNvPr id="3" name="03-proof-edge-coral">
+            <a:extLst xmlns:a="http://schemas.openxmlformats.org/drawingml/2006/main">
+              <a:ext uri="{FF2B5EF4-FFF2-40B4-BE49-F238E27FC236}">
+                <a16:creationId xmlns:a16="http://schemas.microsoft.com/office/drawing/2014/main" id="{FB497EB9-84C7-42BC-A6D0-3B3AC7697D15}"/>
+              </a:ext>
+            </a:extLst>
+          </p:cNvPr>
+          <p:cNvSpPr>
+            <a:spLocks xmlns:a="http://schemas.openxmlformats.org/drawingml/2006/main" noGrp="1"/>
+          </p:cNvSpPr>
+          <p:nvPr/>
+        </p:nvSpPr>
+        <p:spPr>
+          <a:xfrm xmlns:a="http://schemas.openxmlformats.org/drawingml/2006/main">
+            <a:off x="0" y="2286000"/>
+            <a:ext cx="38100" cy="2286000"/>
+          </a:xfrm>
+          <a:prstGeom xmlns:a="http://schemas.openxmlformats.org/drawingml/2006/main" prst="rect">
+            <a:avLst/>
+          </a:prstGeom>
+          <a:solidFill xmlns:a="http://schemas.openxmlformats.org/drawingml/2006/main">
+            <a:srgbClr val="FF7A59"/>
+          </a:solidFill>
+        </p:spPr>
+      </p:sp>
+      <p:sp>
+        <p:nvSpPr>
+          <p:cNvPr id="4" name="03-proof-edge-teal">
+            <a:extLst xmlns:a="http://schemas.openxmlformats.org/drawingml/2006/main">
+              <a:ext uri="{FF2B5EF4-FFF2-40B4-BE49-F238E27FC236}">
+                <a16:creationId xmlns:a16="http://schemas.microsoft.com/office/drawing/2014/main" id="{243F2F75-5AAC-43A4-ABFD-124631C54920}"/>
+              </a:ext>
+            </a:extLst>
+          </p:cNvPr>
+          <p:cNvSpPr>
+            <a:spLocks xmlns:a="http://schemas.openxmlformats.org/drawingml/2006/main" noGrp="1"/>
+          </p:cNvSpPr>
+          <p:nvPr/>
+        </p:nvSpPr>
+        <p:spPr>
+          <a:xfrm xmlns:a="http://schemas.openxmlformats.org/drawingml/2006/main">
+            <a:off x="0" y="4572000"/>
+            <a:ext cx="38100" cy="2286000"/>
+          </a:xfrm>
+          <a:prstGeom xmlns:a="http://schemas.openxmlformats.org/drawingml/2006/main" prst="rect">
+            <a:avLst/>
+          </a:prstGeom>
+          <a:solidFill xmlns:a="http://schemas.openxmlformats.org/drawingml/2006/main">
+            <a:srgbClr val="5EEAD4"/>
+          </a:solidFill>
+        </p:spPr>
+      </p:sp>
+      <p:sp>
+        <p:nvSpPr>
+          <p:cNvPr id="5" name="eyebrow-3">
+            <a:extLst xmlns:a="http://schemas.openxmlformats.org/drawingml/2006/main">
+              <a:ext uri="{FF2B5EF4-FFF2-40B4-BE49-F238E27FC236}">
+                <a16:creationId xmlns:a16="http://schemas.microsoft.com/office/drawing/2014/main" id="{1411476E-6DA3-4AA5-A057-BC0A91990A78}"/>
               </a:ext>
             </a:extLst>
           </p:cNvPr>
@@ -5232,25 +6131,25 @@
             <a:pPr algn="l">
               <a:defRPr sz="1050" b="1">
                 <a:solidFill>
-                  <a:srgbClr val="6845C6"/>
-                </a:solidFill>
-                <a:latin typeface="Arial"/>
-                <a:ea typeface="Arial"/>
-                <a:cs typeface="Arial"/>
-              </a:defRPr>
-            </a:pPr>
-            <a:r>
-              <a:t>EVIDENCE</a:t>
-            </a:r>
-          </a:p>
-        </p:txBody>
-      </p:sp>
-      <p:sp>
-        <p:nvSpPr>
-          <p:cNvPr id="3" name="title-3">
-            <a:extLst xmlns:a="http://schemas.openxmlformats.org/drawingml/2006/main">
-              <a:ext uri="{FF2B5EF4-FFF2-40B4-BE49-F238E27FC236}">
-                <a16:creationId xmlns:a16="http://schemas.microsoft.com/office/drawing/2014/main" id="{AA36BC9A-BF54-4CAD-9BC3-B206FB4EF975}"/>
+                  <a:srgbClr val="FF7A59"/>
+                </a:solidFill>
+                <a:latin typeface="Consolas"/>
+                <a:ea typeface="Consolas"/>
+                <a:cs typeface="Consolas"/>
+              </a:defRPr>
+            </a:pPr>
+            <a:r>
+              <a:t>~/ EVIDENCE</a:t>
+            </a:r>
+          </a:p>
+        </p:txBody>
+      </p:sp>
+      <p:sp>
+        <p:nvSpPr>
+          <p:cNvPr id="6" name="title-3">
+            <a:extLst xmlns:a="http://schemas.openxmlformats.org/drawingml/2006/main">
+              <a:ext uri="{FF2B5EF4-FFF2-40B4-BE49-F238E27FC236}">
+                <a16:creationId xmlns:a16="http://schemas.microsoft.com/office/drawing/2014/main" id="{13B8241E-3280-4B93-B6D6-AA2916AC7907}"/>
               </a:ext>
             </a:extLst>
           </p:cNvPr>
@@ -5277,11 +6176,11 @@
             <a:pPr algn="l">
               <a:defRPr sz="3225" b="1">
                 <a:solidFill>
-                  <a:srgbClr val="180D20"/>
-                </a:solidFill>
-                <a:latin typeface="Arial"/>
-                <a:ea typeface="Arial"/>
-                <a:cs typeface="Arial"/>
+                  <a:srgbClr val="FFF7ED"/>
+                </a:solidFill>
+                <a:latin typeface="Aptos"/>
+                <a:ea typeface="Aptos"/>
+                <a:cs typeface="Aptos"/>
               </a:defRPr>
             </a:pPr>
             <a:r>
@@ -5292,10 +6191,10 @@
       </p:sp>
       <p:sp>
         <p:nvSpPr>
-          <p:cNvPr id="4" name="subtitle-3">
-            <a:extLst xmlns:a="http://schemas.openxmlformats.org/drawingml/2006/main">
-              <a:ext uri="{FF2B5EF4-FFF2-40B4-BE49-F238E27FC236}">
-                <a16:creationId xmlns:a16="http://schemas.microsoft.com/office/drawing/2014/main" id="{A7126580-7E95-44AF-970E-87C5C187C5C4}"/>
+          <p:cNvPr id="7" name="subtitle-3">
+            <a:extLst xmlns:a="http://schemas.openxmlformats.org/drawingml/2006/main">
+              <a:ext uri="{FF2B5EF4-FFF2-40B4-BE49-F238E27FC236}">
+                <a16:creationId xmlns:a16="http://schemas.microsoft.com/office/drawing/2014/main" id="{9BD95B9F-C27B-4F82-B712-E108D7545214}"/>
               </a:ext>
             </a:extLst>
           </p:cNvPr>
@@ -5322,11 +6221,11 @@
             <a:pPr algn="l">
               <a:defRPr sz="1425" b="0">
                 <a:solidFill>
-                  <a:srgbClr val="70647A"/>
-                </a:solidFill>
-                <a:latin typeface="Arial"/>
-                <a:ea typeface="Arial"/>
-                <a:cs typeface="Arial"/>
+                  <a:srgbClr val="B9A59B"/>
+                </a:solidFill>
+                <a:latin typeface="Aptos"/>
+                <a:ea typeface="Aptos"/>
+                <a:cs typeface="Aptos"/>
               </a:defRPr>
             </a:pPr>
             <a:r>
@@ -5337,10 +6236,10 @@
       </p:sp>
       <p:sp>
         <p:nvSpPr>
-          <p:cNvPr id="5" name="metric-card-40%">
-            <a:extLst xmlns:a="http://schemas.openxmlformats.org/drawingml/2006/main">
-              <a:ext uri="{FF2B5EF4-FFF2-40B4-BE49-F238E27FC236}">
-                <a16:creationId xmlns:a16="http://schemas.microsoft.com/office/drawing/2014/main" id="{3412164B-360E-4C9E-B5B4-1FF7776926C4}"/>
+          <p:cNvPr id="8" name="metric-card-40%">
+            <a:extLst xmlns:a="http://schemas.openxmlformats.org/drawingml/2006/main">
+              <a:ext uri="{FF2B5EF4-FFF2-40B4-BE49-F238E27FC236}">
+                <a16:creationId xmlns:a16="http://schemas.microsoft.com/office/drawing/2014/main" id="{DC664017-D0E8-450D-90E4-88631C0E0C6F}"/>
               </a:ext>
             </a:extLst>
           </p:cNvPr>
@@ -5360,16 +6259,16 @@
             </a:avLst>
           </a:prstGeom>
           <a:solidFill xmlns:a="http://schemas.openxmlformats.org/drawingml/2006/main">
-            <a:srgbClr val="FBF7EF"/>
-          </a:solidFill>
-        </p:spPr>
-      </p:sp>
-      <p:sp>
-        <p:nvSpPr>
-          <p:cNvPr id="6" name="metric-accent-40%">
-            <a:extLst xmlns:a="http://schemas.openxmlformats.org/drawingml/2006/main">
-              <a:ext uri="{FF2B5EF4-FFF2-40B4-BE49-F238E27FC236}">
-                <a16:creationId xmlns:a16="http://schemas.microsoft.com/office/drawing/2014/main" id="{C0FB40D1-A8F5-4657-A590-8E9FB3245595}"/>
+            <a:srgbClr val="211512"/>
+          </a:solidFill>
+        </p:spPr>
+      </p:sp>
+      <p:sp>
+        <p:nvSpPr>
+          <p:cNvPr id="9" name="metric-accent-40%">
+            <a:extLst xmlns:a="http://schemas.openxmlformats.org/drawingml/2006/main">
+              <a:ext uri="{FF2B5EF4-FFF2-40B4-BE49-F238E27FC236}">
+                <a16:creationId xmlns:a16="http://schemas.microsoft.com/office/drawing/2014/main" id="{40735502-EFF4-4962-9608-52F0FF899B96}"/>
               </a:ext>
             </a:extLst>
           </p:cNvPr>
@@ -5389,16 +6288,16 @@
             </a:avLst>
           </a:prstGeom>
           <a:solidFill xmlns:a="http://schemas.openxmlformats.org/drawingml/2006/main">
-            <a:srgbClr val="E0B44F"/>
-          </a:solidFill>
-        </p:spPr>
-      </p:sp>
-      <p:sp>
-        <p:nvSpPr>
-          <p:cNvPr id="7" name="metric-value-40%">
-            <a:extLst xmlns:a="http://schemas.openxmlformats.org/drawingml/2006/main">
-              <a:ext uri="{FF2B5EF4-FFF2-40B4-BE49-F238E27FC236}">
-                <a16:creationId xmlns:a16="http://schemas.microsoft.com/office/drawing/2014/main" id="{AE36D262-1B0C-4C87-9A6A-50988B5244E6}"/>
+            <a:srgbClr val="F6C453"/>
+          </a:solidFill>
+        </p:spPr>
+      </p:sp>
+      <p:sp>
+        <p:nvSpPr>
+          <p:cNvPr id="10" name="metric-value-40%">
+            <a:extLst xmlns:a="http://schemas.openxmlformats.org/drawingml/2006/main">
+              <a:ext uri="{FF2B5EF4-FFF2-40B4-BE49-F238E27FC236}">
+                <a16:creationId xmlns:a16="http://schemas.microsoft.com/office/drawing/2014/main" id="{A80E4B8E-9774-4FF1-8CA2-5C3A8437BC69}"/>
               </a:ext>
             </a:extLst>
           </p:cNvPr>
@@ -5425,11 +6324,11 @@
             <a:pPr algn="l">
               <a:defRPr sz="5100" b="1">
                 <a:solidFill>
-                  <a:srgbClr val="180D20"/>
-                </a:solidFill>
-                <a:latin typeface="Arial"/>
-                <a:ea typeface="Arial"/>
-                <a:cs typeface="Arial"/>
+                  <a:srgbClr val="FFF7ED"/>
+                </a:solidFill>
+                <a:latin typeface="Aptos"/>
+                <a:ea typeface="Aptos"/>
+                <a:cs typeface="Aptos"/>
               </a:defRPr>
             </a:pPr>
             <a:r>
@@ -5440,10 +6339,10 @@
       </p:sp>
       <p:sp>
         <p:nvSpPr>
-          <p:cNvPr id="8" name="metric-label-40%">
-            <a:extLst xmlns:a="http://schemas.openxmlformats.org/drawingml/2006/main">
-              <a:ext uri="{FF2B5EF4-FFF2-40B4-BE49-F238E27FC236}">
-                <a16:creationId xmlns:a16="http://schemas.microsoft.com/office/drawing/2014/main" id="{B553037E-9DE7-4F42-B042-5121B567A70C}"/>
+          <p:cNvPr id="11" name="metric-label-40%">
+            <a:extLst xmlns:a="http://schemas.openxmlformats.org/drawingml/2006/main">
+              <a:ext uri="{FF2B5EF4-FFF2-40B4-BE49-F238E27FC236}">
+                <a16:creationId xmlns:a16="http://schemas.microsoft.com/office/drawing/2014/main" id="{495557E6-8451-48B6-B455-B85A2AEDC73C}"/>
               </a:ext>
             </a:extLst>
           </p:cNvPr>
@@ -5470,11 +6369,11 @@
             <a:pPr algn="l">
               <a:defRPr sz="1800" b="1">
                 <a:solidFill>
-                  <a:srgbClr val="180D20"/>
-                </a:solidFill>
-                <a:latin typeface="Arial"/>
-                <a:ea typeface="Arial"/>
-                <a:cs typeface="Arial"/>
+                  <a:srgbClr val="FFF7ED"/>
+                </a:solidFill>
+                <a:latin typeface="Aptos"/>
+                <a:ea typeface="Aptos"/>
+                <a:cs typeface="Aptos"/>
               </a:defRPr>
             </a:pPr>
             <a:r>
@@ -5485,10 +6384,10 @@
       </p:sp>
       <p:sp>
         <p:nvSpPr>
-          <p:cNvPr id="9" name="metric-detail-40%">
-            <a:extLst xmlns:a="http://schemas.openxmlformats.org/drawingml/2006/main">
-              <a:ext uri="{FF2B5EF4-FFF2-40B4-BE49-F238E27FC236}">
-                <a16:creationId xmlns:a16="http://schemas.microsoft.com/office/drawing/2014/main" id="{F579D585-B4B0-4702-8840-A2714CCEB252}"/>
+          <p:cNvPr id="12" name="metric-detail-40%">
+            <a:extLst xmlns:a="http://schemas.openxmlformats.org/drawingml/2006/main">
+              <a:ext uri="{FF2B5EF4-FFF2-40B4-BE49-F238E27FC236}">
+                <a16:creationId xmlns:a16="http://schemas.microsoft.com/office/drawing/2014/main" id="{142C64A0-68C8-43B4-84A5-3F61D385B7BA}"/>
               </a:ext>
             </a:extLst>
           </p:cNvPr>
@@ -5515,11 +6414,11 @@
             <a:pPr algn="l">
               <a:defRPr sz="1275" b="0">
                 <a:solidFill>
-                  <a:srgbClr val="70647A"/>
-                </a:solidFill>
-                <a:latin typeface="Arial"/>
-                <a:ea typeface="Arial"/>
-                <a:cs typeface="Arial"/>
+                  <a:srgbClr val="B9A59B"/>
+                </a:solidFill>
+                <a:latin typeface="Aptos"/>
+                <a:ea typeface="Aptos"/>
+                <a:cs typeface="Aptos"/>
               </a:defRPr>
             </a:pPr>
             <a:r>
@@ -5530,10 +6429,10 @@
       </p:sp>
       <p:sp>
         <p:nvSpPr>
-          <p:cNvPr id="10" name="metric-card-92%">
-            <a:extLst xmlns:a="http://schemas.openxmlformats.org/drawingml/2006/main">
-              <a:ext uri="{FF2B5EF4-FFF2-40B4-BE49-F238E27FC236}">
-                <a16:creationId xmlns:a16="http://schemas.microsoft.com/office/drawing/2014/main" id="{A4DF6434-7580-4E28-866F-99CAC2C436C8}"/>
+          <p:cNvPr id="13" name="metric-card-92%">
+            <a:extLst xmlns:a="http://schemas.openxmlformats.org/drawingml/2006/main">
+              <a:ext uri="{FF2B5EF4-FFF2-40B4-BE49-F238E27FC236}">
+                <a16:creationId xmlns:a16="http://schemas.microsoft.com/office/drawing/2014/main" id="{88F24802-DA20-4468-8378-450760FC313F}"/>
               </a:ext>
             </a:extLst>
           </p:cNvPr>
@@ -5553,16 +6452,16 @@
             </a:avLst>
           </a:prstGeom>
           <a:solidFill xmlns:a="http://schemas.openxmlformats.org/drawingml/2006/main">
-            <a:srgbClr val="FBF7EF"/>
-          </a:solidFill>
-        </p:spPr>
-      </p:sp>
-      <p:sp>
-        <p:nvSpPr>
-          <p:cNvPr id="11" name="metric-accent-92%">
-            <a:extLst xmlns:a="http://schemas.openxmlformats.org/drawingml/2006/main">
-              <a:ext uri="{FF2B5EF4-FFF2-40B4-BE49-F238E27FC236}">
-                <a16:creationId xmlns:a16="http://schemas.microsoft.com/office/drawing/2014/main" id="{68D5C66D-D29F-4231-A1F0-61FAD6F9BEC3}"/>
+            <a:srgbClr val="211512"/>
+          </a:solidFill>
+        </p:spPr>
+      </p:sp>
+      <p:sp>
+        <p:nvSpPr>
+          <p:cNvPr id="14" name="metric-accent-92%">
+            <a:extLst xmlns:a="http://schemas.openxmlformats.org/drawingml/2006/main">
+              <a:ext uri="{FF2B5EF4-FFF2-40B4-BE49-F238E27FC236}">
+                <a16:creationId xmlns:a16="http://schemas.microsoft.com/office/drawing/2014/main" id="{01D0A7BF-2A55-4773-A752-B68B82CC9EE1}"/>
               </a:ext>
             </a:extLst>
           </p:cNvPr>
@@ -5582,16 +6481,16 @@
             </a:avLst>
           </a:prstGeom>
           <a:solidFill xmlns:a="http://schemas.openxmlformats.org/drawingml/2006/main">
-            <a:srgbClr val="A78BFA"/>
-          </a:solidFill>
-        </p:spPr>
-      </p:sp>
-      <p:sp>
-        <p:nvSpPr>
-          <p:cNvPr id="12" name="metric-value-92%">
-            <a:extLst xmlns:a="http://schemas.openxmlformats.org/drawingml/2006/main">
-              <a:ext uri="{FF2B5EF4-FFF2-40B4-BE49-F238E27FC236}">
-                <a16:creationId xmlns:a16="http://schemas.microsoft.com/office/drawing/2014/main" id="{3DC3C3EA-9DAF-4D6A-A9D9-F28C21B5FDE0}"/>
+            <a:srgbClr val="FF7A59"/>
+          </a:solidFill>
+        </p:spPr>
+      </p:sp>
+      <p:sp>
+        <p:nvSpPr>
+          <p:cNvPr id="15" name="metric-value-92%">
+            <a:extLst xmlns:a="http://schemas.openxmlformats.org/drawingml/2006/main">
+              <a:ext uri="{FF2B5EF4-FFF2-40B4-BE49-F238E27FC236}">
+                <a16:creationId xmlns:a16="http://schemas.microsoft.com/office/drawing/2014/main" id="{79903104-3E68-46A7-8829-D3FC8CDA7C26}"/>
               </a:ext>
             </a:extLst>
           </p:cNvPr>
@@ -5618,11 +6517,11 @@
             <a:pPr algn="l">
               <a:defRPr sz="5100" b="1">
                 <a:solidFill>
-                  <a:srgbClr val="180D20"/>
-                </a:solidFill>
-                <a:latin typeface="Arial"/>
-                <a:ea typeface="Arial"/>
-                <a:cs typeface="Arial"/>
+                  <a:srgbClr val="FFF7ED"/>
+                </a:solidFill>
+                <a:latin typeface="Aptos"/>
+                <a:ea typeface="Aptos"/>
+                <a:cs typeface="Aptos"/>
               </a:defRPr>
             </a:pPr>
             <a:r>
@@ -5633,10 +6532,10 @@
       </p:sp>
       <p:sp>
         <p:nvSpPr>
-          <p:cNvPr id="13" name="metric-label-92%">
-            <a:extLst xmlns:a="http://schemas.openxmlformats.org/drawingml/2006/main">
-              <a:ext uri="{FF2B5EF4-FFF2-40B4-BE49-F238E27FC236}">
-                <a16:creationId xmlns:a16="http://schemas.microsoft.com/office/drawing/2014/main" id="{B703B55A-95F9-4464-9111-EC5DCCF21986}"/>
+          <p:cNvPr id="16" name="metric-label-92%">
+            <a:extLst xmlns:a="http://schemas.openxmlformats.org/drawingml/2006/main">
+              <a:ext uri="{FF2B5EF4-FFF2-40B4-BE49-F238E27FC236}">
+                <a16:creationId xmlns:a16="http://schemas.microsoft.com/office/drawing/2014/main" id="{A2589AC3-4947-4345-B6A9-2EA9A899590E}"/>
               </a:ext>
             </a:extLst>
           </p:cNvPr>
@@ -5663,11 +6562,11 @@
             <a:pPr algn="l">
               <a:defRPr sz="1800" b="1">
                 <a:solidFill>
-                  <a:srgbClr val="180D20"/>
-                </a:solidFill>
-                <a:latin typeface="Arial"/>
-                <a:ea typeface="Arial"/>
-                <a:cs typeface="Arial"/>
+                  <a:srgbClr val="FFF7ED"/>
+                </a:solidFill>
+                <a:latin typeface="Aptos"/>
+                <a:ea typeface="Aptos"/>
+                <a:cs typeface="Aptos"/>
               </a:defRPr>
             </a:pPr>
             <a:r>
@@ -5678,10 +6577,10 @@
       </p:sp>
       <p:sp>
         <p:nvSpPr>
-          <p:cNvPr id="14" name="metric-detail-92%">
-            <a:extLst xmlns:a="http://schemas.openxmlformats.org/drawingml/2006/main">
-              <a:ext uri="{FF2B5EF4-FFF2-40B4-BE49-F238E27FC236}">
-                <a16:creationId xmlns:a16="http://schemas.microsoft.com/office/drawing/2014/main" id="{3B1DFEB5-BEAE-4639-8426-A91D71D138BD}"/>
+          <p:cNvPr id="17" name="metric-detail-92%">
+            <a:extLst xmlns:a="http://schemas.openxmlformats.org/drawingml/2006/main">
+              <a:ext uri="{FF2B5EF4-FFF2-40B4-BE49-F238E27FC236}">
+                <a16:creationId xmlns:a16="http://schemas.microsoft.com/office/drawing/2014/main" id="{D6FD0209-CF19-4401-9DAC-B254E2A93995}"/>
               </a:ext>
             </a:extLst>
           </p:cNvPr>
@@ -5708,11 +6607,11 @@
             <a:pPr algn="l">
               <a:defRPr sz="1275" b="0">
                 <a:solidFill>
-                  <a:srgbClr val="70647A"/>
-                </a:solidFill>
-                <a:latin typeface="Arial"/>
-                <a:ea typeface="Arial"/>
-                <a:cs typeface="Arial"/>
+                  <a:srgbClr val="B9A59B"/>
+                </a:solidFill>
+                <a:latin typeface="Aptos"/>
+                <a:ea typeface="Aptos"/>
+                <a:cs typeface="Aptos"/>
               </a:defRPr>
             </a:pPr>
             <a:r>
@@ -5723,10 +6622,10 @@
       </p:sp>
       <p:sp>
         <p:nvSpPr>
-          <p:cNvPr id="15" name="metric-card-89%">
-            <a:extLst xmlns:a="http://schemas.openxmlformats.org/drawingml/2006/main">
-              <a:ext uri="{FF2B5EF4-FFF2-40B4-BE49-F238E27FC236}">
-                <a16:creationId xmlns:a16="http://schemas.microsoft.com/office/drawing/2014/main" id="{F341EE52-5EED-4928-9897-7FBAE21E28C0}"/>
+          <p:cNvPr id="18" name="metric-card-89%">
+            <a:extLst xmlns:a="http://schemas.openxmlformats.org/drawingml/2006/main">
+              <a:ext uri="{FF2B5EF4-FFF2-40B4-BE49-F238E27FC236}">
+                <a16:creationId xmlns:a16="http://schemas.microsoft.com/office/drawing/2014/main" id="{CAE1A5A8-9296-46A4-95FE-F26B4DA5AA91}"/>
               </a:ext>
             </a:extLst>
           </p:cNvPr>
@@ -5746,16 +6645,16 @@
             </a:avLst>
           </a:prstGeom>
           <a:solidFill xmlns:a="http://schemas.openxmlformats.org/drawingml/2006/main">
-            <a:srgbClr val="FBF7EF"/>
-          </a:solidFill>
-        </p:spPr>
-      </p:sp>
-      <p:sp>
-        <p:nvSpPr>
-          <p:cNvPr id="16" name="metric-accent-89%">
-            <a:extLst xmlns:a="http://schemas.openxmlformats.org/drawingml/2006/main">
-              <a:ext uri="{FF2B5EF4-FFF2-40B4-BE49-F238E27FC236}">
-                <a16:creationId xmlns:a16="http://schemas.microsoft.com/office/drawing/2014/main" id="{4464C0EF-4179-4064-AE5E-A0D2D43F0EB7}"/>
+            <a:srgbClr val="211512"/>
+          </a:solidFill>
+        </p:spPr>
+      </p:sp>
+      <p:sp>
+        <p:nvSpPr>
+          <p:cNvPr id="19" name="metric-accent-89%">
+            <a:extLst xmlns:a="http://schemas.openxmlformats.org/drawingml/2006/main">
+              <a:ext uri="{FF2B5EF4-FFF2-40B4-BE49-F238E27FC236}">
+                <a16:creationId xmlns:a16="http://schemas.microsoft.com/office/drawing/2014/main" id="{C28E32D1-69CC-46EA-B2B6-B37535766BB4}"/>
               </a:ext>
             </a:extLst>
           </p:cNvPr>
@@ -5775,16 +6674,16 @@
             </a:avLst>
           </a:prstGeom>
           <a:solidFill xmlns:a="http://schemas.openxmlformats.org/drawingml/2006/main">
-            <a:srgbClr val="E65FA8"/>
-          </a:solidFill>
-        </p:spPr>
-      </p:sp>
-      <p:sp>
-        <p:nvSpPr>
-          <p:cNvPr id="17" name="metric-value-89%">
-            <a:extLst xmlns:a="http://schemas.openxmlformats.org/drawingml/2006/main">
-              <a:ext uri="{FF2B5EF4-FFF2-40B4-BE49-F238E27FC236}">
-                <a16:creationId xmlns:a16="http://schemas.microsoft.com/office/drawing/2014/main" id="{18446EA5-10DF-4FBA-9B08-2F96EBC1FB1D}"/>
+            <a:srgbClr val="5EEAD4"/>
+          </a:solidFill>
+        </p:spPr>
+      </p:sp>
+      <p:sp>
+        <p:nvSpPr>
+          <p:cNvPr id="20" name="metric-value-89%">
+            <a:extLst xmlns:a="http://schemas.openxmlformats.org/drawingml/2006/main">
+              <a:ext uri="{FF2B5EF4-FFF2-40B4-BE49-F238E27FC236}">
+                <a16:creationId xmlns:a16="http://schemas.microsoft.com/office/drawing/2014/main" id="{77FF825E-D144-40E6-BF4C-2002380DDBFF}"/>
               </a:ext>
             </a:extLst>
           </p:cNvPr>
@@ -5811,11 +6710,11 @@
             <a:pPr algn="l">
               <a:defRPr sz="5100" b="1">
                 <a:solidFill>
-                  <a:srgbClr val="180D20"/>
-                </a:solidFill>
-                <a:latin typeface="Arial"/>
-                <a:ea typeface="Arial"/>
-                <a:cs typeface="Arial"/>
+                  <a:srgbClr val="FFF7ED"/>
+                </a:solidFill>
+                <a:latin typeface="Aptos"/>
+                <a:ea typeface="Aptos"/>
+                <a:cs typeface="Aptos"/>
               </a:defRPr>
             </a:pPr>
             <a:r>
@@ -5826,10 +6725,10 @@
       </p:sp>
       <p:sp>
         <p:nvSpPr>
-          <p:cNvPr id="18" name="metric-label-89%">
-            <a:extLst xmlns:a="http://schemas.openxmlformats.org/drawingml/2006/main">
-              <a:ext uri="{FF2B5EF4-FFF2-40B4-BE49-F238E27FC236}">
-                <a16:creationId xmlns:a16="http://schemas.microsoft.com/office/drawing/2014/main" id="{2ECBD27B-DC9D-40FC-8ED6-6FF78995AD19}"/>
+          <p:cNvPr id="21" name="metric-label-89%">
+            <a:extLst xmlns:a="http://schemas.openxmlformats.org/drawingml/2006/main">
+              <a:ext uri="{FF2B5EF4-FFF2-40B4-BE49-F238E27FC236}">
+                <a16:creationId xmlns:a16="http://schemas.microsoft.com/office/drawing/2014/main" id="{D8657FCE-5CE8-4A5F-9E0B-57F5F344B27E}"/>
               </a:ext>
             </a:extLst>
           </p:cNvPr>
@@ -5856,11 +6755,11 @@
             <a:pPr algn="l">
               <a:defRPr sz="1800" b="1">
                 <a:solidFill>
-                  <a:srgbClr val="180D20"/>
-                </a:solidFill>
-                <a:latin typeface="Arial"/>
-                <a:ea typeface="Arial"/>
-                <a:cs typeface="Arial"/>
+                  <a:srgbClr val="FFF7ED"/>
+                </a:solidFill>
+                <a:latin typeface="Aptos"/>
+                <a:ea typeface="Aptos"/>
+                <a:cs typeface="Aptos"/>
               </a:defRPr>
             </a:pPr>
             <a:r>
@@ -5871,10 +6770,10 @@
       </p:sp>
       <p:sp>
         <p:nvSpPr>
-          <p:cNvPr id="19" name="metric-detail-89%">
-            <a:extLst xmlns:a="http://schemas.openxmlformats.org/drawingml/2006/main">
-              <a:ext uri="{FF2B5EF4-FFF2-40B4-BE49-F238E27FC236}">
-                <a16:creationId xmlns:a16="http://schemas.microsoft.com/office/drawing/2014/main" id="{DD2548A7-5817-418D-8014-CAAADF9FF589}"/>
+          <p:cNvPr id="22" name="metric-detail-89%">
+            <a:extLst xmlns:a="http://schemas.openxmlformats.org/drawingml/2006/main">
+              <a:ext uri="{FF2B5EF4-FFF2-40B4-BE49-F238E27FC236}">
+                <a16:creationId xmlns:a16="http://schemas.microsoft.com/office/drawing/2014/main" id="{29980F11-7B41-429F-94CC-FF513D87AA34}"/>
               </a:ext>
             </a:extLst>
           </p:cNvPr>
@@ -5901,11 +6800,11 @@
             <a:pPr algn="l">
               <a:defRPr sz="1275" b="0">
                 <a:solidFill>
-                  <a:srgbClr val="70647A"/>
-                </a:solidFill>
-                <a:latin typeface="Arial"/>
-                <a:ea typeface="Arial"/>
-                <a:cs typeface="Arial"/>
+                  <a:srgbClr val="B9A59B"/>
+                </a:solidFill>
+                <a:latin typeface="Aptos"/>
+                <a:ea typeface="Aptos"/>
+                <a:cs typeface="Aptos"/>
               </a:defRPr>
             </a:pPr>
             <a:r>
@@ -5916,10 +6815,10 @@
       </p:sp>
       <p:sp>
         <p:nvSpPr>
-          <p:cNvPr id="20" name="footer-line-3">
-            <a:extLst xmlns:a="http://schemas.openxmlformats.org/drawingml/2006/main">
-              <a:ext uri="{FF2B5EF4-FFF2-40B4-BE49-F238E27FC236}">
-                <a16:creationId xmlns:a16="http://schemas.microsoft.com/office/drawing/2014/main" id="{A9BFA24B-7769-443D-816C-3056D7DEDDAD}"/>
+          <p:cNvPr id="23" name="footer-line-gold-3">
+            <a:extLst xmlns:a="http://schemas.openxmlformats.org/drawingml/2006/main">
+              <a:ext uri="{FF2B5EF4-FFF2-40B4-BE49-F238E27FC236}">
+                <a16:creationId xmlns:a16="http://schemas.microsoft.com/office/drawing/2014/main" id="{B15DEEA1-086D-41E5-8856-F5A61C18FB42}"/>
               </a:ext>
             </a:extLst>
           </p:cNvPr>
@@ -5931,22 +6830,76 @@
         <p:spPr>
           <a:xfrm xmlns:a="http://schemas.openxmlformats.org/drawingml/2006/main">
             <a:off x="400050" y="6429375"/>
-            <a:ext cx="10553700" cy="19050"/>
-          </a:xfrm>
-          <a:prstGeom xmlns:a="http://schemas.openxmlformats.org/drawingml/2006/main" prst="rect">
-            <a:avLst/>
-          </a:prstGeom>
-          <a:solidFill xmlns:a="http://schemas.openxmlformats.org/drawingml/2006/main">
-            <a:srgbClr val="DED4E6"/>
-          </a:solidFill>
-        </p:spPr>
-      </p:sp>
-      <p:sp>
-        <p:nvSpPr>
-          <p:cNvPr id="21" name="footer-name-3">
-            <a:extLst xmlns:a="http://schemas.openxmlformats.org/drawingml/2006/main">
-              <a:ext uri="{FF2B5EF4-FFF2-40B4-BE49-F238E27FC236}">
-                <a16:creationId xmlns:a16="http://schemas.microsoft.com/office/drawing/2014/main" id="{2E52BDA6-BDA4-4B3F-B3A0-1D9A54233928}"/>
+            <a:ext cx="5276850" cy="19050"/>
+          </a:xfrm>
+          <a:prstGeom xmlns:a="http://schemas.openxmlformats.org/drawingml/2006/main" prst="rect">
+            <a:avLst/>
+          </a:prstGeom>
+          <a:solidFill xmlns:a="http://schemas.openxmlformats.org/drawingml/2006/main">
+            <a:srgbClr val="F6C453"/>
+          </a:solidFill>
+        </p:spPr>
+      </p:sp>
+      <p:sp>
+        <p:nvSpPr>
+          <p:cNvPr id="24" name="footer-line-coral-3">
+            <a:extLst xmlns:a="http://schemas.openxmlformats.org/drawingml/2006/main">
+              <a:ext uri="{FF2B5EF4-FFF2-40B4-BE49-F238E27FC236}">
+                <a16:creationId xmlns:a16="http://schemas.microsoft.com/office/drawing/2014/main" id="{949390B1-34D7-44FD-AE1A-0DB0DBC9FAEC}"/>
+              </a:ext>
+            </a:extLst>
+          </p:cNvPr>
+          <p:cNvSpPr>
+            <a:spLocks xmlns:a="http://schemas.openxmlformats.org/drawingml/2006/main" noGrp="1"/>
+          </p:cNvSpPr>
+          <p:nvPr/>
+        </p:nvSpPr>
+        <p:spPr>
+          <a:xfrm xmlns:a="http://schemas.openxmlformats.org/drawingml/2006/main">
+            <a:off x="5676900" y="6429375"/>
+            <a:ext cx="2638425" cy="19050"/>
+          </a:xfrm>
+          <a:prstGeom xmlns:a="http://schemas.openxmlformats.org/drawingml/2006/main" prst="rect">
+            <a:avLst/>
+          </a:prstGeom>
+          <a:solidFill xmlns:a="http://schemas.openxmlformats.org/drawingml/2006/main">
+            <a:srgbClr val="FF7A59"/>
+          </a:solidFill>
+        </p:spPr>
+      </p:sp>
+      <p:sp>
+        <p:nvSpPr>
+          <p:cNvPr id="25" name="footer-line-teal-3">
+            <a:extLst xmlns:a="http://schemas.openxmlformats.org/drawingml/2006/main">
+              <a:ext uri="{FF2B5EF4-FFF2-40B4-BE49-F238E27FC236}">
+                <a16:creationId xmlns:a16="http://schemas.microsoft.com/office/drawing/2014/main" id="{C3F2EB31-D7B4-428E-9507-76EEA8DE7D17}"/>
+              </a:ext>
+            </a:extLst>
+          </p:cNvPr>
+          <p:cNvSpPr>
+            <a:spLocks xmlns:a="http://schemas.openxmlformats.org/drawingml/2006/main" noGrp="1"/>
+          </p:cNvSpPr>
+          <p:nvPr/>
+        </p:nvSpPr>
+        <p:spPr>
+          <a:xfrm xmlns:a="http://schemas.openxmlformats.org/drawingml/2006/main">
+            <a:off x="8315325" y="6429375"/>
+            <a:ext cx="2638425" cy="19050"/>
+          </a:xfrm>
+          <a:prstGeom xmlns:a="http://schemas.openxmlformats.org/drawingml/2006/main" prst="rect">
+            <a:avLst/>
+          </a:prstGeom>
+          <a:solidFill xmlns:a="http://schemas.openxmlformats.org/drawingml/2006/main">
+            <a:srgbClr val="5EEAD4"/>
+          </a:solidFill>
+        </p:spPr>
+      </p:sp>
+      <p:sp>
+        <p:nvSpPr>
+          <p:cNvPr id="26" name="footer-name-3">
+            <a:extLst xmlns:a="http://schemas.openxmlformats.org/drawingml/2006/main">
+              <a:ext uri="{FF2B5EF4-FFF2-40B4-BE49-F238E27FC236}">
+                <a16:creationId xmlns:a16="http://schemas.microsoft.com/office/drawing/2014/main" id="{BE9681F3-A705-45E8-8978-AB80A2062F2F}"/>
               </a:ext>
             </a:extLst>
           </p:cNvPr>
@@ -5973,25 +6926,25 @@
             <a:pPr algn="l">
               <a:defRPr sz="825" b="1">
                 <a:solidFill>
-                  <a:srgbClr val="70647A"/>
-                </a:solidFill>
-                <a:latin typeface="Arial"/>
-                <a:ea typeface="Arial"/>
-                <a:cs typeface="Arial"/>
-              </a:defRPr>
-            </a:pPr>
-            <a:r>
-              <a:t>MUHAMMAD ALI AKBAR AL-QAHRI  /  DATA PORTFOLIO</a:t>
-            </a:r>
-          </a:p>
-        </p:txBody>
-      </p:sp>
-      <p:sp>
-        <p:nvSpPr>
-          <p:cNvPr id="22" name="footer-page-3">
-            <a:extLst xmlns:a="http://schemas.openxmlformats.org/drawingml/2006/main">
-              <a:ext uri="{FF2B5EF4-FFF2-40B4-BE49-F238E27FC236}">
-                <a16:creationId xmlns:a16="http://schemas.microsoft.com/office/drawing/2014/main" id="{99DD64F3-7C11-4E4F-9911-EF95699E3DCE}"/>
+                  <a:srgbClr val="B9A59B"/>
+                </a:solidFill>
+                <a:latin typeface="Consolas"/>
+                <a:ea typeface="Consolas"/>
+                <a:cs typeface="Consolas"/>
+              </a:defRPr>
+            </a:pPr>
+            <a:r>
+              <a:t>~/ali_  /  DATA INTELLIGENCE PORTFOLIO</a:t>
+            </a:r>
+          </a:p>
+        </p:txBody>
+      </p:sp>
+      <p:sp>
+        <p:nvSpPr>
+          <p:cNvPr id="27" name="footer-page-3">
+            <a:extLst xmlns:a="http://schemas.openxmlformats.org/drawingml/2006/main">
+              <a:ext uri="{FF2B5EF4-FFF2-40B4-BE49-F238E27FC236}">
+                <a16:creationId xmlns:a16="http://schemas.microsoft.com/office/drawing/2014/main" id="{DE8906A9-1933-45BA-828F-C74C272E1DEA}"/>
               </a:ext>
             </a:extLst>
           </p:cNvPr>
@@ -6018,11 +6971,11 @@
             <a:pPr algn="r">
               <a:defRPr sz="900" b="1">
                 <a:solidFill>
-                  <a:srgbClr val="70647A"/>
-                </a:solidFill>
-                <a:latin typeface="Arial"/>
-                <a:ea typeface="Arial"/>
-                <a:cs typeface="Arial"/>
+                  <a:srgbClr val="F6C453"/>
+                </a:solidFill>
+                <a:latin typeface="Consolas"/>
+                <a:ea typeface="Consolas"/>
+                <a:cs typeface="Consolas"/>
               </a:defRPr>
             </a:pPr>
             <a:r>
@@ -6034,7 +6987,7 @@
     </p:spTree>
     <p:extLst>
       <p:ext uri="{BB962C8B-B14F-4D97-AF65-F5344CB8AC3E}">
-        <p14:creationId xmlns:p14="http://schemas.microsoft.com/office/powerpoint/2010/main" val="762832475"/>
+        <p14:creationId xmlns:p14="http://schemas.microsoft.com/office/powerpoint/2010/main" val="607574129"/>
       </p:ext>
     </p:extLst>
   </p:cSld>
@@ -6055,10 +7008,10 @@
       </p:grpSpPr>
       <p:sp>
         <p:nvSpPr>
-          <p:cNvPr id="32" name="04-experience-canvas">
-            <a:extLst xmlns:a="http://schemas.openxmlformats.org/drawingml/2006/main">
-              <a:ext uri="{FF2B5EF4-FFF2-40B4-BE49-F238E27FC236}">
-                <a16:creationId xmlns:a16="http://schemas.microsoft.com/office/drawing/2014/main" id="{232FEB19-3239-4055-90BF-41D14502ED8D}"/>
+          <p:cNvPr id="37" name="04-experience-canvas">
+            <a:extLst xmlns:a="http://schemas.openxmlformats.org/drawingml/2006/main">
+              <a:ext uri="{FF2B5EF4-FFF2-40B4-BE49-F238E27FC236}">
+                <a16:creationId xmlns:a16="http://schemas.microsoft.com/office/drawing/2014/main" id="{639C3B1B-EDD8-4C08-8C9C-824BFC606A7C}"/>
               </a:ext>
             </a:extLst>
           </p:cNvPr>
@@ -6076,16 +7029,97 @@
             <a:avLst/>
           </a:prstGeom>
           <a:solidFill xmlns:a="http://schemas.openxmlformats.org/drawingml/2006/main">
-            <a:srgbClr val="FFFFFF"/>
-          </a:solidFill>
-        </p:spPr>
-      </p:sp>
-      <p:sp>
-        <p:nvSpPr>
-          <p:cNvPr id="2" name="eyebrow-4">
-            <a:extLst xmlns:a="http://schemas.openxmlformats.org/drawingml/2006/main">
-              <a:ext uri="{FF2B5EF4-FFF2-40B4-BE49-F238E27FC236}">
-                <a16:creationId xmlns:a16="http://schemas.microsoft.com/office/drawing/2014/main" id="{4C1993B5-261E-4037-83E7-1E561225AC43}"/>
+            <a:srgbClr val="120B0A"/>
+          </a:solidFill>
+        </p:spPr>
+      </p:sp>
+      <p:sp>
+        <p:nvSpPr>
+          <p:cNvPr id="2" name="04-experience-edge-gold">
+            <a:extLst xmlns:a="http://schemas.openxmlformats.org/drawingml/2006/main">
+              <a:ext uri="{FF2B5EF4-FFF2-40B4-BE49-F238E27FC236}">
+                <a16:creationId xmlns:a16="http://schemas.microsoft.com/office/drawing/2014/main" id="{D83FB229-C4A3-4B67-A1CF-02F46DFA898E}"/>
+              </a:ext>
+            </a:extLst>
+          </p:cNvPr>
+          <p:cNvSpPr>
+            <a:spLocks xmlns:a="http://schemas.openxmlformats.org/drawingml/2006/main" noGrp="1"/>
+          </p:cNvSpPr>
+          <p:nvPr/>
+        </p:nvSpPr>
+        <p:spPr>
+          <a:xfrm xmlns:a="http://schemas.openxmlformats.org/drawingml/2006/main">
+            <a:off x="0" y="0"/>
+            <a:ext cx="38100" cy="2286000"/>
+          </a:xfrm>
+          <a:prstGeom xmlns:a="http://schemas.openxmlformats.org/drawingml/2006/main" prst="rect">
+            <a:avLst/>
+          </a:prstGeom>
+          <a:solidFill xmlns:a="http://schemas.openxmlformats.org/drawingml/2006/main">
+            <a:srgbClr val="F6C453"/>
+          </a:solidFill>
+        </p:spPr>
+      </p:sp>
+      <p:sp>
+        <p:nvSpPr>
+          <p:cNvPr id="3" name="04-experience-edge-coral">
+            <a:extLst xmlns:a="http://schemas.openxmlformats.org/drawingml/2006/main">
+              <a:ext uri="{FF2B5EF4-FFF2-40B4-BE49-F238E27FC236}">
+                <a16:creationId xmlns:a16="http://schemas.microsoft.com/office/drawing/2014/main" id="{808A1D87-EEE6-4B94-804A-7291545A75D3}"/>
+              </a:ext>
+            </a:extLst>
+          </p:cNvPr>
+          <p:cNvSpPr>
+            <a:spLocks xmlns:a="http://schemas.openxmlformats.org/drawingml/2006/main" noGrp="1"/>
+          </p:cNvSpPr>
+          <p:nvPr/>
+        </p:nvSpPr>
+        <p:spPr>
+          <a:xfrm xmlns:a="http://schemas.openxmlformats.org/drawingml/2006/main">
+            <a:off x="0" y="2286000"/>
+            <a:ext cx="38100" cy="2286000"/>
+          </a:xfrm>
+          <a:prstGeom xmlns:a="http://schemas.openxmlformats.org/drawingml/2006/main" prst="rect">
+            <a:avLst/>
+          </a:prstGeom>
+          <a:solidFill xmlns:a="http://schemas.openxmlformats.org/drawingml/2006/main">
+            <a:srgbClr val="FF7A59"/>
+          </a:solidFill>
+        </p:spPr>
+      </p:sp>
+      <p:sp>
+        <p:nvSpPr>
+          <p:cNvPr id="4" name="04-experience-edge-teal">
+            <a:extLst xmlns:a="http://schemas.openxmlformats.org/drawingml/2006/main">
+              <a:ext uri="{FF2B5EF4-FFF2-40B4-BE49-F238E27FC236}">
+                <a16:creationId xmlns:a16="http://schemas.microsoft.com/office/drawing/2014/main" id="{7C207E0F-C773-4344-8DED-7D53FB09FB40}"/>
+              </a:ext>
+            </a:extLst>
+          </p:cNvPr>
+          <p:cNvSpPr>
+            <a:spLocks xmlns:a="http://schemas.openxmlformats.org/drawingml/2006/main" noGrp="1"/>
+          </p:cNvSpPr>
+          <p:nvPr/>
+        </p:nvSpPr>
+        <p:spPr>
+          <a:xfrm xmlns:a="http://schemas.openxmlformats.org/drawingml/2006/main">
+            <a:off x="0" y="4572000"/>
+            <a:ext cx="38100" cy="2286000"/>
+          </a:xfrm>
+          <a:prstGeom xmlns:a="http://schemas.openxmlformats.org/drawingml/2006/main" prst="rect">
+            <a:avLst/>
+          </a:prstGeom>
+          <a:solidFill xmlns:a="http://schemas.openxmlformats.org/drawingml/2006/main">
+            <a:srgbClr val="5EEAD4"/>
+          </a:solidFill>
+        </p:spPr>
+      </p:sp>
+      <p:sp>
+        <p:nvSpPr>
+          <p:cNvPr id="5" name="eyebrow-4">
+            <a:extLst xmlns:a="http://schemas.openxmlformats.org/drawingml/2006/main">
+              <a:ext uri="{FF2B5EF4-FFF2-40B4-BE49-F238E27FC236}">
+                <a16:creationId xmlns:a16="http://schemas.microsoft.com/office/drawing/2014/main" id="{918CECFA-A356-4586-90C2-07F9E6B06DBB}"/>
               </a:ext>
             </a:extLst>
           </p:cNvPr>
@@ -6112,25 +7146,25 @@
             <a:pPr algn="l">
               <a:defRPr sz="1050" b="1">
                 <a:solidFill>
-                  <a:srgbClr val="6845C6"/>
-                </a:solidFill>
-                <a:latin typeface="Arial"/>
-                <a:ea typeface="Arial"/>
-                <a:cs typeface="Arial"/>
-              </a:defRPr>
-            </a:pPr>
-            <a:r>
-              <a:t>EXPERIENCE</a:t>
-            </a:r>
-          </a:p>
-        </p:txBody>
-      </p:sp>
-      <p:sp>
-        <p:nvSpPr>
-          <p:cNvPr id="3" name="title-4">
-            <a:extLst xmlns:a="http://schemas.openxmlformats.org/drawingml/2006/main">
-              <a:ext uri="{FF2B5EF4-FFF2-40B4-BE49-F238E27FC236}">
-                <a16:creationId xmlns:a16="http://schemas.microsoft.com/office/drawing/2014/main" id="{A3320AD2-4E21-4A5A-B22C-F74D033FF966}"/>
+                  <a:srgbClr val="FF7A59"/>
+                </a:solidFill>
+                <a:latin typeface="Consolas"/>
+                <a:ea typeface="Consolas"/>
+                <a:cs typeface="Consolas"/>
+              </a:defRPr>
+            </a:pPr>
+            <a:r>
+              <a:t>~/ EXPERIENCE</a:t>
+            </a:r>
+          </a:p>
+        </p:txBody>
+      </p:sp>
+      <p:sp>
+        <p:nvSpPr>
+          <p:cNvPr id="6" name="title-4">
+            <a:extLst xmlns:a="http://schemas.openxmlformats.org/drawingml/2006/main">
+              <a:ext uri="{FF2B5EF4-FFF2-40B4-BE49-F238E27FC236}">
+                <a16:creationId xmlns:a16="http://schemas.microsoft.com/office/drawing/2014/main" id="{D60DBE8E-8CE2-4F78-AFAC-6FAE38FF19CD}"/>
               </a:ext>
             </a:extLst>
           </p:cNvPr>
@@ -6157,11 +7191,11 @@
             <a:pPr algn="l">
               <a:defRPr sz="3225" b="1">
                 <a:solidFill>
-                  <a:srgbClr val="180D20"/>
-                </a:solidFill>
-                <a:latin typeface="Arial"/>
-                <a:ea typeface="Arial"/>
-                <a:cs typeface="Arial"/>
+                  <a:srgbClr val="FFF7ED"/>
+                </a:solidFill>
+                <a:latin typeface="Aptos"/>
+                <a:ea typeface="Aptos"/>
+                <a:cs typeface="Aptos"/>
               </a:defRPr>
             </a:pPr>
             <a:r>
@@ -6172,10 +7206,10 @@
       </p:sp>
       <p:sp>
         <p:nvSpPr>
-          <p:cNvPr id="4" name="timeline-line">
-            <a:extLst xmlns:a="http://schemas.openxmlformats.org/drawingml/2006/main">
-              <a:ext uri="{FF2B5EF4-FFF2-40B4-BE49-F238E27FC236}">
-                <a16:creationId xmlns:a16="http://schemas.microsoft.com/office/drawing/2014/main" id="{94BCBC37-03BD-4D80-9B44-C414104201AC}"/>
+          <p:cNvPr id="7" name="timeline-line">
+            <a:extLst xmlns:a="http://schemas.openxmlformats.org/drawingml/2006/main">
+              <a:ext uri="{FF2B5EF4-FFF2-40B4-BE49-F238E27FC236}">
+                <a16:creationId xmlns:a16="http://schemas.microsoft.com/office/drawing/2014/main" id="{7590AC58-4698-4ABC-BC7B-8895FF156B9D}"/>
               </a:ext>
             </a:extLst>
           </p:cNvPr>
@@ -6193,16 +7227,16 @@
             <a:avLst/>
           </a:prstGeom>
           <a:solidFill xmlns:a="http://schemas.openxmlformats.org/drawingml/2006/main">
-            <a:srgbClr val="DED4E6"/>
-          </a:solidFill>
-        </p:spPr>
-      </p:sp>
-      <p:sp>
-        <p:nvSpPr>
-          <p:cNvPr id="5" name="timeline-dot-0">
-            <a:extLst xmlns:a="http://schemas.openxmlformats.org/drawingml/2006/main">
-              <a:ext uri="{FF2B5EF4-FFF2-40B4-BE49-F238E27FC236}">
-                <a16:creationId xmlns:a16="http://schemas.microsoft.com/office/drawing/2014/main" id="{C39A6FFF-3B85-4803-A74D-70E25AD3CC66}"/>
+            <a:srgbClr val="49302A"/>
+          </a:solidFill>
+        </p:spPr>
+      </p:sp>
+      <p:sp>
+        <p:nvSpPr>
+          <p:cNvPr id="8" name="timeline-dot-0">
+            <a:extLst xmlns:a="http://schemas.openxmlformats.org/drawingml/2006/main">
+              <a:ext uri="{FF2B5EF4-FFF2-40B4-BE49-F238E27FC236}">
+                <a16:creationId xmlns:a16="http://schemas.microsoft.com/office/drawing/2014/main" id="{CEAC9224-325F-47B5-9479-5B7A2228CF19}"/>
               </a:ext>
             </a:extLst>
           </p:cNvPr>
@@ -6222,16 +7256,16 @@
             </a:avLst>
           </a:prstGeom>
           <a:solidFill xmlns:a="http://schemas.openxmlformats.org/drawingml/2006/main">
-            <a:srgbClr val="F1EBFF"/>
-          </a:solidFill>
-        </p:spPr>
-      </p:sp>
-      <p:sp>
-        <p:nvSpPr>
-          <p:cNvPr id="6" name="timeline-dot-core-0">
-            <a:extLst xmlns:a="http://schemas.openxmlformats.org/drawingml/2006/main">
-              <a:ext uri="{FF2B5EF4-FFF2-40B4-BE49-F238E27FC236}">
-                <a16:creationId xmlns:a16="http://schemas.microsoft.com/office/drawing/2014/main" id="{DF4A4292-BF80-44D9-B2A2-C0E193DF4B7D}"/>
+            <a:srgbClr val="2A1A17"/>
+          </a:solidFill>
+        </p:spPr>
+      </p:sp>
+      <p:sp>
+        <p:nvSpPr>
+          <p:cNvPr id="9" name="timeline-dot-core-0">
+            <a:extLst xmlns:a="http://schemas.openxmlformats.org/drawingml/2006/main">
+              <a:ext uri="{FF2B5EF4-FFF2-40B4-BE49-F238E27FC236}">
+                <a16:creationId xmlns:a16="http://schemas.microsoft.com/office/drawing/2014/main" id="{9AEE5E11-170F-42B0-97D5-506E5F570331}"/>
               </a:ext>
             </a:extLst>
           </p:cNvPr>
@@ -6251,16 +7285,16 @@
             </a:avLst>
           </a:prstGeom>
           <a:solidFill xmlns:a="http://schemas.openxmlformats.org/drawingml/2006/main">
-            <a:srgbClr val="E0B44F"/>
-          </a:solidFill>
-        </p:spPr>
-      </p:sp>
-      <p:sp>
-        <p:nvSpPr>
-          <p:cNvPr id="7" name="timeline-period-0">
-            <a:extLst xmlns:a="http://schemas.openxmlformats.org/drawingml/2006/main">
-              <a:ext uri="{FF2B5EF4-FFF2-40B4-BE49-F238E27FC236}">
-                <a16:creationId xmlns:a16="http://schemas.microsoft.com/office/drawing/2014/main" id="{9C59F436-B611-447E-969E-FAA98490CA32}"/>
+            <a:srgbClr val="F6C453"/>
+          </a:solidFill>
+        </p:spPr>
+      </p:sp>
+      <p:sp>
+        <p:nvSpPr>
+          <p:cNvPr id="10" name="timeline-period-0">
+            <a:extLst xmlns:a="http://schemas.openxmlformats.org/drawingml/2006/main">
+              <a:ext uri="{FF2B5EF4-FFF2-40B4-BE49-F238E27FC236}">
+                <a16:creationId xmlns:a16="http://schemas.microsoft.com/office/drawing/2014/main" id="{0B5961D7-C2B8-49D8-AB1F-A776BA54687D}"/>
               </a:ext>
             </a:extLst>
           </p:cNvPr>
@@ -6287,11 +7321,11 @@
             <a:pPr algn="l">
               <a:defRPr sz="1350" b="1">
                 <a:solidFill>
-                  <a:srgbClr val="6845C6"/>
-                </a:solidFill>
-                <a:latin typeface="Arial"/>
-                <a:ea typeface="Arial"/>
-                <a:cs typeface="Arial"/>
+                  <a:srgbClr val="FF7A59"/>
+                </a:solidFill>
+                <a:latin typeface="Aptos"/>
+                <a:ea typeface="Aptos"/>
+                <a:cs typeface="Aptos"/>
               </a:defRPr>
             </a:pPr>
             <a:r>
@@ -6302,10 +7336,10 @@
       </p:sp>
       <p:sp>
         <p:nvSpPr>
-          <p:cNvPr id="8" name="timeline-org-0">
-            <a:extLst xmlns:a="http://schemas.openxmlformats.org/drawingml/2006/main">
-              <a:ext uri="{FF2B5EF4-FFF2-40B4-BE49-F238E27FC236}">
-                <a16:creationId xmlns:a16="http://schemas.microsoft.com/office/drawing/2014/main" id="{6873E7E1-6571-4F7B-9F47-F410EB19190A}"/>
+          <p:cNvPr id="11" name="timeline-org-0">
+            <a:extLst xmlns:a="http://schemas.openxmlformats.org/drawingml/2006/main">
+              <a:ext uri="{FF2B5EF4-FFF2-40B4-BE49-F238E27FC236}">
+                <a16:creationId xmlns:a16="http://schemas.microsoft.com/office/drawing/2014/main" id="{E5903844-6D0A-4320-8EB4-2BA29831D6FC}"/>
               </a:ext>
             </a:extLst>
           </p:cNvPr>
@@ -6332,11 +7366,11 @@
             <a:pPr algn="l">
               <a:defRPr sz="1800" b="1">
                 <a:solidFill>
-                  <a:srgbClr val="180D20"/>
-                </a:solidFill>
-                <a:latin typeface="Arial"/>
-                <a:ea typeface="Arial"/>
-                <a:cs typeface="Arial"/>
+                  <a:srgbClr val="FFF7ED"/>
+                </a:solidFill>
+                <a:latin typeface="Aptos"/>
+                <a:ea typeface="Aptos"/>
+                <a:cs typeface="Aptos"/>
               </a:defRPr>
             </a:pPr>
             <a:r>
@@ -6347,10 +7381,10 @@
       </p:sp>
       <p:sp>
         <p:nvSpPr>
-          <p:cNvPr id="9" name="timeline-role-0">
-            <a:extLst xmlns:a="http://schemas.openxmlformats.org/drawingml/2006/main">
-              <a:ext uri="{FF2B5EF4-FFF2-40B4-BE49-F238E27FC236}">
-                <a16:creationId xmlns:a16="http://schemas.microsoft.com/office/drawing/2014/main" id="{591854D6-A535-4370-BEDB-2542800944F4}"/>
+          <p:cNvPr id="12" name="timeline-role-0">
+            <a:extLst xmlns:a="http://schemas.openxmlformats.org/drawingml/2006/main">
+              <a:ext uri="{FF2B5EF4-FFF2-40B4-BE49-F238E27FC236}">
+                <a16:creationId xmlns:a16="http://schemas.microsoft.com/office/drawing/2014/main" id="{664E3F9C-1FA1-4500-8D40-C5D45328FCBB}"/>
               </a:ext>
             </a:extLst>
           </p:cNvPr>
@@ -6377,11 +7411,11 @@
             <a:pPr algn="l">
               <a:defRPr sz="1200" b="0">
                 <a:solidFill>
-                  <a:srgbClr val="70647A"/>
-                </a:solidFill>
-                <a:latin typeface="Arial"/>
-                <a:ea typeface="Arial"/>
-                <a:cs typeface="Arial"/>
+                  <a:srgbClr val="B9A59B"/>
+                </a:solidFill>
+                <a:latin typeface="Aptos"/>
+                <a:ea typeface="Aptos"/>
+                <a:cs typeface="Aptos"/>
               </a:defRPr>
             </a:pPr>
             <a:r>
@@ -6392,10 +7426,10 @@
       </p:sp>
       <p:sp>
         <p:nvSpPr>
-          <p:cNvPr id="10" name="timeline-result-0">
-            <a:extLst xmlns:a="http://schemas.openxmlformats.org/drawingml/2006/main">
-              <a:ext uri="{FF2B5EF4-FFF2-40B4-BE49-F238E27FC236}">
-                <a16:creationId xmlns:a16="http://schemas.microsoft.com/office/drawing/2014/main" id="{46F00BE0-25C3-484F-82BE-34379E75CCA4}"/>
+          <p:cNvPr id="13" name="timeline-result-0">
+            <a:extLst xmlns:a="http://schemas.openxmlformats.org/drawingml/2006/main">
+              <a:ext uri="{FF2B5EF4-FFF2-40B4-BE49-F238E27FC236}">
+                <a16:creationId xmlns:a16="http://schemas.microsoft.com/office/drawing/2014/main" id="{CBD26106-7CCC-4B31-ABE1-BE84F54E1B74}"/>
               </a:ext>
             </a:extLst>
           </p:cNvPr>
@@ -6422,11 +7456,11 @@
             <a:pPr algn="l">
               <a:defRPr sz="1200" b="1">
                 <a:solidFill>
-                  <a:srgbClr val="180D20"/>
-                </a:solidFill>
-                <a:latin typeface="Arial"/>
-                <a:ea typeface="Arial"/>
-                <a:cs typeface="Arial"/>
+                  <a:srgbClr val="FFF7ED"/>
+                </a:solidFill>
+                <a:latin typeface="Aptos"/>
+                <a:ea typeface="Aptos"/>
+                <a:cs typeface="Aptos"/>
               </a:defRPr>
             </a:pPr>
             <a:r>
@@ -6437,10 +7471,10 @@
       </p:sp>
       <p:sp>
         <p:nvSpPr>
-          <p:cNvPr id="11" name="timeline-dot-1">
-            <a:extLst xmlns:a="http://schemas.openxmlformats.org/drawingml/2006/main">
-              <a:ext uri="{FF2B5EF4-FFF2-40B4-BE49-F238E27FC236}">
-                <a16:creationId xmlns:a16="http://schemas.microsoft.com/office/drawing/2014/main" id="{06F2765D-90A2-4DD8-A49A-89FFC62504DE}"/>
+          <p:cNvPr id="14" name="timeline-dot-1">
+            <a:extLst xmlns:a="http://schemas.openxmlformats.org/drawingml/2006/main">
+              <a:ext uri="{FF2B5EF4-FFF2-40B4-BE49-F238E27FC236}">
+                <a16:creationId xmlns:a16="http://schemas.microsoft.com/office/drawing/2014/main" id="{AEBCA2BC-E021-49AA-A4C6-C0783DC732F2}"/>
               </a:ext>
             </a:extLst>
           </p:cNvPr>
@@ -6460,16 +7494,16 @@
             </a:avLst>
           </a:prstGeom>
           <a:solidFill xmlns:a="http://schemas.openxmlformats.org/drawingml/2006/main">
-            <a:srgbClr val="F1EBFF"/>
-          </a:solidFill>
-        </p:spPr>
-      </p:sp>
-      <p:sp>
-        <p:nvSpPr>
-          <p:cNvPr id="12" name="timeline-dot-core-1">
-            <a:extLst xmlns:a="http://schemas.openxmlformats.org/drawingml/2006/main">
-              <a:ext uri="{FF2B5EF4-FFF2-40B4-BE49-F238E27FC236}">
-                <a16:creationId xmlns:a16="http://schemas.microsoft.com/office/drawing/2014/main" id="{BB0648B0-F890-4CF1-8D43-B05A186BB0E4}"/>
+            <a:srgbClr val="2A1A17"/>
+          </a:solidFill>
+        </p:spPr>
+      </p:sp>
+      <p:sp>
+        <p:nvSpPr>
+          <p:cNvPr id="15" name="timeline-dot-core-1">
+            <a:extLst xmlns:a="http://schemas.openxmlformats.org/drawingml/2006/main">
+              <a:ext uri="{FF2B5EF4-FFF2-40B4-BE49-F238E27FC236}">
+                <a16:creationId xmlns:a16="http://schemas.microsoft.com/office/drawing/2014/main" id="{5A37575E-EABF-421C-A1E3-55D249221BD6}"/>
               </a:ext>
             </a:extLst>
           </p:cNvPr>
@@ -6489,16 +7523,16 @@
             </a:avLst>
           </a:prstGeom>
           <a:solidFill xmlns:a="http://schemas.openxmlformats.org/drawingml/2006/main">
-            <a:srgbClr val="E0B44F"/>
-          </a:solidFill>
-        </p:spPr>
-      </p:sp>
-      <p:sp>
-        <p:nvSpPr>
-          <p:cNvPr id="13" name="timeline-period-1">
-            <a:extLst xmlns:a="http://schemas.openxmlformats.org/drawingml/2006/main">
-              <a:ext uri="{FF2B5EF4-FFF2-40B4-BE49-F238E27FC236}">
-                <a16:creationId xmlns:a16="http://schemas.microsoft.com/office/drawing/2014/main" id="{95D531E7-7696-43C0-A80C-6A8040DC6ADA}"/>
+            <a:srgbClr val="F6C453"/>
+          </a:solidFill>
+        </p:spPr>
+      </p:sp>
+      <p:sp>
+        <p:nvSpPr>
+          <p:cNvPr id="16" name="timeline-period-1">
+            <a:extLst xmlns:a="http://schemas.openxmlformats.org/drawingml/2006/main">
+              <a:ext uri="{FF2B5EF4-FFF2-40B4-BE49-F238E27FC236}">
+                <a16:creationId xmlns:a16="http://schemas.microsoft.com/office/drawing/2014/main" id="{97051A59-C226-4858-B3B1-ECD89EAD9034}"/>
               </a:ext>
             </a:extLst>
           </p:cNvPr>
@@ -6525,11 +7559,11 @@
             <a:pPr algn="l">
               <a:defRPr sz="1350" b="1">
                 <a:solidFill>
-                  <a:srgbClr val="6845C6"/>
-                </a:solidFill>
-                <a:latin typeface="Arial"/>
-                <a:ea typeface="Arial"/>
-                <a:cs typeface="Arial"/>
+                  <a:srgbClr val="FF7A59"/>
+                </a:solidFill>
+                <a:latin typeface="Aptos"/>
+                <a:ea typeface="Aptos"/>
+                <a:cs typeface="Aptos"/>
               </a:defRPr>
             </a:pPr>
             <a:r>
@@ -6540,10 +7574,10 @@
       </p:sp>
       <p:sp>
         <p:nvSpPr>
-          <p:cNvPr id="14" name="timeline-org-1">
-            <a:extLst xmlns:a="http://schemas.openxmlformats.org/drawingml/2006/main">
-              <a:ext uri="{FF2B5EF4-FFF2-40B4-BE49-F238E27FC236}">
-                <a16:creationId xmlns:a16="http://schemas.microsoft.com/office/drawing/2014/main" id="{87E41F04-EE91-49ED-BA45-4A5BB324AD77}"/>
+          <p:cNvPr id="17" name="timeline-org-1">
+            <a:extLst xmlns:a="http://schemas.openxmlformats.org/drawingml/2006/main">
+              <a:ext uri="{FF2B5EF4-FFF2-40B4-BE49-F238E27FC236}">
+                <a16:creationId xmlns:a16="http://schemas.microsoft.com/office/drawing/2014/main" id="{14C35393-12A6-4BE3-AA62-AB58B7B7A2B2}"/>
               </a:ext>
             </a:extLst>
           </p:cNvPr>
@@ -6570,11 +7604,11 @@
             <a:pPr algn="l">
               <a:defRPr sz="1800" b="1">
                 <a:solidFill>
-                  <a:srgbClr val="180D20"/>
-                </a:solidFill>
-                <a:latin typeface="Arial"/>
-                <a:ea typeface="Arial"/>
-                <a:cs typeface="Arial"/>
+                  <a:srgbClr val="FFF7ED"/>
+                </a:solidFill>
+                <a:latin typeface="Aptos"/>
+                <a:ea typeface="Aptos"/>
+                <a:cs typeface="Aptos"/>
               </a:defRPr>
             </a:pPr>
             <a:r>
@@ -6585,10 +7619,10 @@
       </p:sp>
       <p:sp>
         <p:nvSpPr>
-          <p:cNvPr id="15" name="timeline-role-1">
-            <a:extLst xmlns:a="http://schemas.openxmlformats.org/drawingml/2006/main">
-              <a:ext uri="{FF2B5EF4-FFF2-40B4-BE49-F238E27FC236}">
-                <a16:creationId xmlns:a16="http://schemas.microsoft.com/office/drawing/2014/main" id="{F2F89A42-E51B-4AF1-A404-4E0C05A4C9C5}"/>
+          <p:cNvPr id="18" name="timeline-role-1">
+            <a:extLst xmlns:a="http://schemas.openxmlformats.org/drawingml/2006/main">
+              <a:ext uri="{FF2B5EF4-FFF2-40B4-BE49-F238E27FC236}">
+                <a16:creationId xmlns:a16="http://schemas.microsoft.com/office/drawing/2014/main" id="{979DA7D9-0F5B-49AC-99FC-7E3B8FC5B643}"/>
               </a:ext>
             </a:extLst>
           </p:cNvPr>
@@ -6615,11 +7649,11 @@
             <a:pPr algn="l">
               <a:defRPr sz="1200" b="0">
                 <a:solidFill>
-                  <a:srgbClr val="70647A"/>
-                </a:solidFill>
-                <a:latin typeface="Arial"/>
-                <a:ea typeface="Arial"/>
-                <a:cs typeface="Arial"/>
+                  <a:srgbClr val="B9A59B"/>
+                </a:solidFill>
+                <a:latin typeface="Aptos"/>
+                <a:ea typeface="Aptos"/>
+                <a:cs typeface="Aptos"/>
               </a:defRPr>
             </a:pPr>
             <a:r>
@@ -6630,10 +7664,10 @@
       </p:sp>
       <p:sp>
         <p:nvSpPr>
-          <p:cNvPr id="16" name="timeline-result-1">
-            <a:extLst xmlns:a="http://schemas.openxmlformats.org/drawingml/2006/main">
-              <a:ext uri="{FF2B5EF4-FFF2-40B4-BE49-F238E27FC236}">
-                <a16:creationId xmlns:a16="http://schemas.microsoft.com/office/drawing/2014/main" id="{9E07E301-013D-4C1C-BB7F-0E3886CE3C9C}"/>
+          <p:cNvPr id="19" name="timeline-result-1">
+            <a:extLst xmlns:a="http://schemas.openxmlformats.org/drawingml/2006/main">
+              <a:ext uri="{FF2B5EF4-FFF2-40B4-BE49-F238E27FC236}">
+                <a16:creationId xmlns:a16="http://schemas.microsoft.com/office/drawing/2014/main" id="{FDCDCE65-AEB9-45B1-9A23-CEDEBB306713}"/>
               </a:ext>
             </a:extLst>
           </p:cNvPr>
@@ -6660,11 +7694,11 @@
             <a:pPr algn="l">
               <a:defRPr sz="1200" b="1">
                 <a:solidFill>
-                  <a:srgbClr val="180D20"/>
-                </a:solidFill>
-                <a:latin typeface="Arial"/>
-                <a:ea typeface="Arial"/>
-                <a:cs typeface="Arial"/>
+                  <a:srgbClr val="FFF7ED"/>
+                </a:solidFill>
+                <a:latin typeface="Aptos"/>
+                <a:ea typeface="Aptos"/>
+                <a:cs typeface="Aptos"/>
               </a:defRPr>
             </a:pPr>
             <a:r>
@@ -6675,10 +7709,10 @@
       </p:sp>
       <p:sp>
         <p:nvSpPr>
-          <p:cNvPr id="17" name="timeline-dot-2">
-            <a:extLst xmlns:a="http://schemas.openxmlformats.org/drawingml/2006/main">
-              <a:ext uri="{FF2B5EF4-FFF2-40B4-BE49-F238E27FC236}">
-                <a16:creationId xmlns:a16="http://schemas.microsoft.com/office/drawing/2014/main" id="{16134491-6C34-4B78-B37E-DE60E4FA905D}"/>
+          <p:cNvPr id="20" name="timeline-dot-2">
+            <a:extLst xmlns:a="http://schemas.openxmlformats.org/drawingml/2006/main">
+              <a:ext uri="{FF2B5EF4-FFF2-40B4-BE49-F238E27FC236}">
+                <a16:creationId xmlns:a16="http://schemas.microsoft.com/office/drawing/2014/main" id="{F829DA46-EC04-4C8A-BAA6-FF371186CE8F}"/>
               </a:ext>
             </a:extLst>
           </p:cNvPr>
@@ -6698,16 +7732,16 @@
             </a:avLst>
           </a:prstGeom>
           <a:solidFill xmlns:a="http://schemas.openxmlformats.org/drawingml/2006/main">
-            <a:srgbClr val="F1EBFF"/>
-          </a:solidFill>
-        </p:spPr>
-      </p:sp>
-      <p:sp>
-        <p:nvSpPr>
-          <p:cNvPr id="18" name="timeline-dot-core-2">
-            <a:extLst xmlns:a="http://schemas.openxmlformats.org/drawingml/2006/main">
-              <a:ext uri="{FF2B5EF4-FFF2-40B4-BE49-F238E27FC236}">
-                <a16:creationId xmlns:a16="http://schemas.microsoft.com/office/drawing/2014/main" id="{816FF0D6-50E9-41C6-9C3F-2BA59512727D}"/>
+            <a:srgbClr val="2A1A17"/>
+          </a:solidFill>
+        </p:spPr>
+      </p:sp>
+      <p:sp>
+        <p:nvSpPr>
+          <p:cNvPr id="21" name="timeline-dot-core-2">
+            <a:extLst xmlns:a="http://schemas.openxmlformats.org/drawingml/2006/main">
+              <a:ext uri="{FF2B5EF4-FFF2-40B4-BE49-F238E27FC236}">
+                <a16:creationId xmlns:a16="http://schemas.microsoft.com/office/drawing/2014/main" id="{8DFF590E-EC80-4982-9C02-DBC1525430C8}"/>
               </a:ext>
             </a:extLst>
           </p:cNvPr>
@@ -6727,16 +7761,16 @@
             </a:avLst>
           </a:prstGeom>
           <a:solidFill xmlns:a="http://schemas.openxmlformats.org/drawingml/2006/main">
-            <a:srgbClr val="E0B44F"/>
-          </a:solidFill>
-        </p:spPr>
-      </p:sp>
-      <p:sp>
-        <p:nvSpPr>
-          <p:cNvPr id="19" name="timeline-period-2">
-            <a:extLst xmlns:a="http://schemas.openxmlformats.org/drawingml/2006/main">
-              <a:ext uri="{FF2B5EF4-FFF2-40B4-BE49-F238E27FC236}">
-                <a16:creationId xmlns:a16="http://schemas.microsoft.com/office/drawing/2014/main" id="{64E1508F-C9C5-4925-A3DC-2EF9EC4527EF}"/>
+            <a:srgbClr val="F6C453"/>
+          </a:solidFill>
+        </p:spPr>
+      </p:sp>
+      <p:sp>
+        <p:nvSpPr>
+          <p:cNvPr id="22" name="timeline-period-2">
+            <a:extLst xmlns:a="http://schemas.openxmlformats.org/drawingml/2006/main">
+              <a:ext uri="{FF2B5EF4-FFF2-40B4-BE49-F238E27FC236}">
+                <a16:creationId xmlns:a16="http://schemas.microsoft.com/office/drawing/2014/main" id="{D1C5C7B6-F34B-4AC1-BB9F-6B397F5A1ECE}"/>
               </a:ext>
             </a:extLst>
           </p:cNvPr>
@@ -6763,11 +7797,11 @@
             <a:pPr algn="l">
               <a:defRPr sz="1350" b="1">
                 <a:solidFill>
-                  <a:srgbClr val="6845C6"/>
-                </a:solidFill>
-                <a:latin typeface="Arial"/>
-                <a:ea typeface="Arial"/>
-                <a:cs typeface="Arial"/>
+                  <a:srgbClr val="FF7A59"/>
+                </a:solidFill>
+                <a:latin typeface="Aptos"/>
+                <a:ea typeface="Aptos"/>
+                <a:cs typeface="Aptos"/>
               </a:defRPr>
             </a:pPr>
             <a:r>
@@ -6778,10 +7812,10 @@
       </p:sp>
       <p:sp>
         <p:nvSpPr>
-          <p:cNvPr id="20" name="timeline-org-2">
-            <a:extLst xmlns:a="http://schemas.openxmlformats.org/drawingml/2006/main">
-              <a:ext uri="{FF2B5EF4-FFF2-40B4-BE49-F238E27FC236}">
-                <a16:creationId xmlns:a16="http://schemas.microsoft.com/office/drawing/2014/main" id="{1428C36B-66A9-4B63-A83B-ED36DA7DD32B}"/>
+          <p:cNvPr id="23" name="timeline-org-2">
+            <a:extLst xmlns:a="http://schemas.openxmlformats.org/drawingml/2006/main">
+              <a:ext uri="{FF2B5EF4-FFF2-40B4-BE49-F238E27FC236}">
+                <a16:creationId xmlns:a16="http://schemas.microsoft.com/office/drawing/2014/main" id="{4761F0D9-5221-4AAC-A597-BC465D6D6A8A}"/>
               </a:ext>
             </a:extLst>
           </p:cNvPr>
@@ -6808,11 +7842,11 @@
             <a:pPr algn="l">
               <a:defRPr sz="1800" b="1">
                 <a:solidFill>
-                  <a:srgbClr val="180D20"/>
-                </a:solidFill>
-                <a:latin typeface="Arial"/>
-                <a:ea typeface="Arial"/>
-                <a:cs typeface="Arial"/>
+                  <a:srgbClr val="FFF7ED"/>
+                </a:solidFill>
+                <a:latin typeface="Aptos"/>
+                <a:ea typeface="Aptos"/>
+                <a:cs typeface="Aptos"/>
               </a:defRPr>
             </a:pPr>
             <a:r>
@@ -6823,10 +7857,10 @@
       </p:sp>
       <p:sp>
         <p:nvSpPr>
-          <p:cNvPr id="21" name="timeline-role-2">
-            <a:extLst xmlns:a="http://schemas.openxmlformats.org/drawingml/2006/main">
-              <a:ext uri="{FF2B5EF4-FFF2-40B4-BE49-F238E27FC236}">
-                <a16:creationId xmlns:a16="http://schemas.microsoft.com/office/drawing/2014/main" id="{B17D3980-0D2E-49D4-8168-47D74BFE4658}"/>
+          <p:cNvPr id="24" name="timeline-role-2">
+            <a:extLst xmlns:a="http://schemas.openxmlformats.org/drawingml/2006/main">
+              <a:ext uri="{FF2B5EF4-FFF2-40B4-BE49-F238E27FC236}">
+                <a16:creationId xmlns:a16="http://schemas.microsoft.com/office/drawing/2014/main" id="{03CAC0B5-6D07-4AB2-BADD-19730D42D0D4}"/>
               </a:ext>
             </a:extLst>
           </p:cNvPr>
@@ -6853,11 +7887,11 @@
             <a:pPr algn="l">
               <a:defRPr sz="1200" b="0">
                 <a:solidFill>
-                  <a:srgbClr val="70647A"/>
-                </a:solidFill>
-                <a:latin typeface="Arial"/>
-                <a:ea typeface="Arial"/>
-                <a:cs typeface="Arial"/>
+                  <a:srgbClr val="B9A59B"/>
+                </a:solidFill>
+                <a:latin typeface="Aptos"/>
+                <a:ea typeface="Aptos"/>
+                <a:cs typeface="Aptos"/>
               </a:defRPr>
             </a:pPr>
             <a:r>
@@ -6868,10 +7902,10 @@
       </p:sp>
       <p:sp>
         <p:nvSpPr>
-          <p:cNvPr id="22" name="timeline-result-2">
-            <a:extLst xmlns:a="http://schemas.openxmlformats.org/drawingml/2006/main">
-              <a:ext uri="{FF2B5EF4-FFF2-40B4-BE49-F238E27FC236}">
-                <a16:creationId xmlns:a16="http://schemas.microsoft.com/office/drawing/2014/main" id="{F3508A03-0510-47F4-9AC9-96D39819FAEF}"/>
+          <p:cNvPr id="25" name="timeline-result-2">
+            <a:extLst xmlns:a="http://schemas.openxmlformats.org/drawingml/2006/main">
+              <a:ext uri="{FF2B5EF4-FFF2-40B4-BE49-F238E27FC236}">
+                <a16:creationId xmlns:a16="http://schemas.microsoft.com/office/drawing/2014/main" id="{B8EB5F12-03F1-4FAE-A122-E118110EA27D}"/>
               </a:ext>
             </a:extLst>
           </p:cNvPr>
@@ -6898,11 +7932,11 @@
             <a:pPr algn="l">
               <a:defRPr sz="1200" b="1">
                 <a:solidFill>
-                  <a:srgbClr val="180D20"/>
-                </a:solidFill>
-                <a:latin typeface="Arial"/>
-                <a:ea typeface="Arial"/>
-                <a:cs typeface="Arial"/>
+                  <a:srgbClr val="FFF7ED"/>
+                </a:solidFill>
+                <a:latin typeface="Aptos"/>
+                <a:ea typeface="Aptos"/>
+                <a:cs typeface="Aptos"/>
               </a:defRPr>
             </a:pPr>
             <a:r>
@@ -6913,10 +7947,10 @@
       </p:sp>
       <p:sp>
         <p:nvSpPr>
-          <p:cNvPr id="23" name="timeline-dot-3">
-            <a:extLst xmlns:a="http://schemas.openxmlformats.org/drawingml/2006/main">
-              <a:ext uri="{FF2B5EF4-FFF2-40B4-BE49-F238E27FC236}">
-                <a16:creationId xmlns:a16="http://schemas.microsoft.com/office/drawing/2014/main" id="{89FFAABF-E869-4332-8F3B-605992AD3562}"/>
+          <p:cNvPr id="26" name="timeline-dot-3">
+            <a:extLst xmlns:a="http://schemas.openxmlformats.org/drawingml/2006/main">
+              <a:ext uri="{FF2B5EF4-FFF2-40B4-BE49-F238E27FC236}">
+                <a16:creationId xmlns:a16="http://schemas.microsoft.com/office/drawing/2014/main" id="{CD7CB673-3933-42D3-9F9B-2FAEA35B0E2D}"/>
               </a:ext>
             </a:extLst>
           </p:cNvPr>
@@ -6936,16 +7970,16 @@
             </a:avLst>
           </a:prstGeom>
           <a:solidFill xmlns:a="http://schemas.openxmlformats.org/drawingml/2006/main">
-            <a:srgbClr val="E0B44F"/>
-          </a:solidFill>
-        </p:spPr>
-      </p:sp>
-      <p:sp>
-        <p:nvSpPr>
-          <p:cNvPr id="24" name="timeline-dot-core-3">
-            <a:extLst xmlns:a="http://schemas.openxmlformats.org/drawingml/2006/main">
-              <a:ext uri="{FF2B5EF4-FFF2-40B4-BE49-F238E27FC236}">
-                <a16:creationId xmlns:a16="http://schemas.microsoft.com/office/drawing/2014/main" id="{0E28A986-8839-4987-A22A-8E989468CD32}"/>
+            <a:srgbClr val="F6C453"/>
+          </a:solidFill>
+        </p:spPr>
+      </p:sp>
+      <p:sp>
+        <p:nvSpPr>
+          <p:cNvPr id="27" name="timeline-dot-core-3">
+            <a:extLst xmlns:a="http://schemas.openxmlformats.org/drawingml/2006/main">
+              <a:ext uri="{FF2B5EF4-FFF2-40B4-BE49-F238E27FC236}">
+                <a16:creationId xmlns:a16="http://schemas.microsoft.com/office/drawing/2014/main" id="{2CDEC75F-54FB-4286-AC00-0FE6EA58391C}"/>
               </a:ext>
             </a:extLst>
           </p:cNvPr>
@@ -6965,16 +7999,16 @@
             </a:avLst>
           </a:prstGeom>
           <a:solidFill xmlns:a="http://schemas.openxmlformats.org/drawingml/2006/main">
-            <a:srgbClr val="FFFFFF"/>
-          </a:solidFill>
-        </p:spPr>
-      </p:sp>
-      <p:sp>
-        <p:nvSpPr>
-          <p:cNvPr id="25" name="timeline-period-3">
-            <a:extLst xmlns:a="http://schemas.openxmlformats.org/drawingml/2006/main">
-              <a:ext uri="{FF2B5EF4-FFF2-40B4-BE49-F238E27FC236}">
-                <a16:creationId xmlns:a16="http://schemas.microsoft.com/office/drawing/2014/main" id="{7E3CCC75-EBED-48A8-A1A8-FB971B6F9F42}"/>
+            <a:srgbClr val="FFF7ED"/>
+          </a:solidFill>
+        </p:spPr>
+      </p:sp>
+      <p:sp>
+        <p:nvSpPr>
+          <p:cNvPr id="28" name="timeline-period-3">
+            <a:extLst xmlns:a="http://schemas.openxmlformats.org/drawingml/2006/main">
+              <a:ext uri="{FF2B5EF4-FFF2-40B4-BE49-F238E27FC236}">
+                <a16:creationId xmlns:a16="http://schemas.microsoft.com/office/drawing/2014/main" id="{9C83DE42-7265-4B6E-A690-B8DECDE08DAD}"/>
               </a:ext>
             </a:extLst>
           </p:cNvPr>
@@ -7001,11 +8035,11 @@
             <a:pPr algn="l">
               <a:defRPr sz="1350" b="1">
                 <a:solidFill>
-                  <a:srgbClr val="6845C6"/>
-                </a:solidFill>
-                <a:latin typeface="Arial"/>
-                <a:ea typeface="Arial"/>
-                <a:cs typeface="Arial"/>
+                  <a:srgbClr val="FF7A59"/>
+                </a:solidFill>
+                <a:latin typeface="Aptos"/>
+                <a:ea typeface="Aptos"/>
+                <a:cs typeface="Aptos"/>
               </a:defRPr>
             </a:pPr>
             <a:r>
@@ -7016,10 +8050,10 @@
       </p:sp>
       <p:sp>
         <p:nvSpPr>
-          <p:cNvPr id="26" name="timeline-org-3">
-            <a:extLst xmlns:a="http://schemas.openxmlformats.org/drawingml/2006/main">
-              <a:ext uri="{FF2B5EF4-FFF2-40B4-BE49-F238E27FC236}">
-                <a16:creationId xmlns:a16="http://schemas.microsoft.com/office/drawing/2014/main" id="{2819C91C-197A-4753-AC06-0EAADB99C87A}"/>
+          <p:cNvPr id="29" name="timeline-org-3">
+            <a:extLst xmlns:a="http://schemas.openxmlformats.org/drawingml/2006/main">
+              <a:ext uri="{FF2B5EF4-FFF2-40B4-BE49-F238E27FC236}">
+                <a16:creationId xmlns:a16="http://schemas.microsoft.com/office/drawing/2014/main" id="{2BE70D57-C23D-49FE-8E65-16B8688F4DBC}"/>
               </a:ext>
             </a:extLst>
           </p:cNvPr>
@@ -7046,11 +8080,11 @@
             <a:pPr algn="l">
               <a:defRPr sz="1800" b="1">
                 <a:solidFill>
-                  <a:srgbClr val="180D20"/>
-                </a:solidFill>
-                <a:latin typeface="Arial"/>
-                <a:ea typeface="Arial"/>
-                <a:cs typeface="Arial"/>
+                  <a:srgbClr val="FFF7ED"/>
+                </a:solidFill>
+                <a:latin typeface="Aptos"/>
+                <a:ea typeface="Aptos"/>
+                <a:cs typeface="Aptos"/>
               </a:defRPr>
             </a:pPr>
             <a:r>
@@ -7061,10 +8095,10 @@
       </p:sp>
       <p:sp>
         <p:nvSpPr>
-          <p:cNvPr id="27" name="timeline-role-3">
-            <a:extLst xmlns:a="http://schemas.openxmlformats.org/drawingml/2006/main">
-              <a:ext uri="{FF2B5EF4-FFF2-40B4-BE49-F238E27FC236}">
-                <a16:creationId xmlns:a16="http://schemas.microsoft.com/office/drawing/2014/main" id="{C42DF89F-2AA1-4EBC-B925-528AF5785A81}"/>
+          <p:cNvPr id="30" name="timeline-role-3">
+            <a:extLst xmlns:a="http://schemas.openxmlformats.org/drawingml/2006/main">
+              <a:ext uri="{FF2B5EF4-FFF2-40B4-BE49-F238E27FC236}">
+                <a16:creationId xmlns:a16="http://schemas.microsoft.com/office/drawing/2014/main" id="{5AA694EF-1B21-462C-B89E-1E9E161C0421}"/>
               </a:ext>
             </a:extLst>
           </p:cNvPr>
@@ -7091,11 +8125,11 @@
             <a:pPr algn="l">
               <a:defRPr sz="1200" b="0">
                 <a:solidFill>
-                  <a:srgbClr val="70647A"/>
-                </a:solidFill>
-                <a:latin typeface="Arial"/>
-                <a:ea typeface="Arial"/>
-                <a:cs typeface="Arial"/>
+                  <a:srgbClr val="B9A59B"/>
+                </a:solidFill>
+                <a:latin typeface="Aptos"/>
+                <a:ea typeface="Aptos"/>
+                <a:cs typeface="Aptos"/>
               </a:defRPr>
             </a:pPr>
             <a:r>
@@ -7106,10 +8140,10 @@
       </p:sp>
       <p:sp>
         <p:nvSpPr>
-          <p:cNvPr id="28" name="timeline-result-3">
-            <a:extLst xmlns:a="http://schemas.openxmlformats.org/drawingml/2006/main">
-              <a:ext uri="{FF2B5EF4-FFF2-40B4-BE49-F238E27FC236}">
-                <a16:creationId xmlns:a16="http://schemas.microsoft.com/office/drawing/2014/main" id="{7B3830D0-86DF-4EF8-B828-C7BC35783BE4}"/>
+          <p:cNvPr id="31" name="timeline-result-3">
+            <a:extLst xmlns:a="http://schemas.openxmlformats.org/drawingml/2006/main">
+              <a:ext uri="{FF2B5EF4-FFF2-40B4-BE49-F238E27FC236}">
+                <a16:creationId xmlns:a16="http://schemas.microsoft.com/office/drawing/2014/main" id="{E593640E-8341-46CA-A642-567F786D11DE}"/>
               </a:ext>
             </a:extLst>
           </p:cNvPr>
@@ -7136,11 +8170,11 @@
             <a:pPr algn="l">
               <a:defRPr sz="1200" b="1">
                 <a:solidFill>
-                  <a:srgbClr val="180D20"/>
-                </a:solidFill>
-                <a:latin typeface="Arial"/>
-                <a:ea typeface="Arial"/>
-                <a:cs typeface="Arial"/>
+                  <a:srgbClr val="FFF7ED"/>
+                </a:solidFill>
+                <a:latin typeface="Aptos"/>
+                <a:ea typeface="Aptos"/>
+                <a:cs typeface="Aptos"/>
               </a:defRPr>
             </a:pPr>
             <a:r>
@@ -7151,10 +8185,10 @@
       </p:sp>
       <p:sp>
         <p:nvSpPr>
-          <p:cNvPr id="29" name="footer-line-4">
-            <a:extLst xmlns:a="http://schemas.openxmlformats.org/drawingml/2006/main">
-              <a:ext uri="{FF2B5EF4-FFF2-40B4-BE49-F238E27FC236}">
-                <a16:creationId xmlns:a16="http://schemas.microsoft.com/office/drawing/2014/main" id="{F51D81FC-46DC-43B7-95B2-A2E73A91095C}"/>
+          <p:cNvPr id="32" name="footer-line-gold-4">
+            <a:extLst xmlns:a="http://schemas.openxmlformats.org/drawingml/2006/main">
+              <a:ext uri="{FF2B5EF4-FFF2-40B4-BE49-F238E27FC236}">
+                <a16:creationId xmlns:a16="http://schemas.microsoft.com/office/drawing/2014/main" id="{8549CA94-A11D-413E-9492-E25940B4F86D}"/>
               </a:ext>
             </a:extLst>
           </p:cNvPr>
@@ -7166,22 +8200,76 @@
         <p:spPr>
           <a:xfrm xmlns:a="http://schemas.openxmlformats.org/drawingml/2006/main">
             <a:off x="400050" y="6429375"/>
-            <a:ext cx="10553700" cy="19050"/>
-          </a:xfrm>
-          <a:prstGeom xmlns:a="http://schemas.openxmlformats.org/drawingml/2006/main" prst="rect">
-            <a:avLst/>
-          </a:prstGeom>
-          <a:solidFill xmlns:a="http://schemas.openxmlformats.org/drawingml/2006/main">
-            <a:srgbClr val="DED4E6"/>
-          </a:solidFill>
-        </p:spPr>
-      </p:sp>
-      <p:sp>
-        <p:nvSpPr>
-          <p:cNvPr id="30" name="footer-name-4">
-            <a:extLst xmlns:a="http://schemas.openxmlformats.org/drawingml/2006/main">
-              <a:ext uri="{FF2B5EF4-FFF2-40B4-BE49-F238E27FC236}">
-                <a16:creationId xmlns:a16="http://schemas.microsoft.com/office/drawing/2014/main" id="{AE2F22FF-13CC-4BC5-9451-3B2360FC1B7C}"/>
+            <a:ext cx="5276850" cy="19050"/>
+          </a:xfrm>
+          <a:prstGeom xmlns:a="http://schemas.openxmlformats.org/drawingml/2006/main" prst="rect">
+            <a:avLst/>
+          </a:prstGeom>
+          <a:solidFill xmlns:a="http://schemas.openxmlformats.org/drawingml/2006/main">
+            <a:srgbClr val="F6C453"/>
+          </a:solidFill>
+        </p:spPr>
+      </p:sp>
+      <p:sp>
+        <p:nvSpPr>
+          <p:cNvPr id="33" name="footer-line-coral-4">
+            <a:extLst xmlns:a="http://schemas.openxmlformats.org/drawingml/2006/main">
+              <a:ext uri="{FF2B5EF4-FFF2-40B4-BE49-F238E27FC236}">
+                <a16:creationId xmlns:a16="http://schemas.microsoft.com/office/drawing/2014/main" id="{6908DB4E-7B20-4970-B625-723C129B050F}"/>
+              </a:ext>
+            </a:extLst>
+          </p:cNvPr>
+          <p:cNvSpPr>
+            <a:spLocks xmlns:a="http://schemas.openxmlformats.org/drawingml/2006/main" noGrp="1"/>
+          </p:cNvSpPr>
+          <p:nvPr/>
+        </p:nvSpPr>
+        <p:spPr>
+          <a:xfrm xmlns:a="http://schemas.openxmlformats.org/drawingml/2006/main">
+            <a:off x="5676900" y="6429375"/>
+            <a:ext cx="2638425" cy="19050"/>
+          </a:xfrm>
+          <a:prstGeom xmlns:a="http://schemas.openxmlformats.org/drawingml/2006/main" prst="rect">
+            <a:avLst/>
+          </a:prstGeom>
+          <a:solidFill xmlns:a="http://schemas.openxmlformats.org/drawingml/2006/main">
+            <a:srgbClr val="FF7A59"/>
+          </a:solidFill>
+        </p:spPr>
+      </p:sp>
+      <p:sp>
+        <p:nvSpPr>
+          <p:cNvPr id="34" name="footer-line-teal-4">
+            <a:extLst xmlns:a="http://schemas.openxmlformats.org/drawingml/2006/main">
+              <a:ext uri="{FF2B5EF4-FFF2-40B4-BE49-F238E27FC236}">
+                <a16:creationId xmlns:a16="http://schemas.microsoft.com/office/drawing/2014/main" id="{0D2F73F4-BF92-438C-AB27-CE0DFF3E60F9}"/>
+              </a:ext>
+            </a:extLst>
+          </p:cNvPr>
+          <p:cNvSpPr>
+            <a:spLocks xmlns:a="http://schemas.openxmlformats.org/drawingml/2006/main" noGrp="1"/>
+          </p:cNvSpPr>
+          <p:nvPr/>
+        </p:nvSpPr>
+        <p:spPr>
+          <a:xfrm xmlns:a="http://schemas.openxmlformats.org/drawingml/2006/main">
+            <a:off x="8315325" y="6429375"/>
+            <a:ext cx="2638425" cy="19050"/>
+          </a:xfrm>
+          <a:prstGeom xmlns:a="http://schemas.openxmlformats.org/drawingml/2006/main" prst="rect">
+            <a:avLst/>
+          </a:prstGeom>
+          <a:solidFill xmlns:a="http://schemas.openxmlformats.org/drawingml/2006/main">
+            <a:srgbClr val="5EEAD4"/>
+          </a:solidFill>
+        </p:spPr>
+      </p:sp>
+      <p:sp>
+        <p:nvSpPr>
+          <p:cNvPr id="35" name="footer-name-4">
+            <a:extLst xmlns:a="http://schemas.openxmlformats.org/drawingml/2006/main">
+              <a:ext uri="{FF2B5EF4-FFF2-40B4-BE49-F238E27FC236}">
+                <a16:creationId xmlns:a16="http://schemas.microsoft.com/office/drawing/2014/main" id="{FAD2E57F-0DC6-4295-9C3C-DA63488BEC7C}"/>
               </a:ext>
             </a:extLst>
           </p:cNvPr>
@@ -7208,25 +8296,25 @@
             <a:pPr algn="l">
               <a:defRPr sz="825" b="1">
                 <a:solidFill>
-                  <a:srgbClr val="70647A"/>
-                </a:solidFill>
-                <a:latin typeface="Arial"/>
-                <a:ea typeface="Arial"/>
-                <a:cs typeface="Arial"/>
-              </a:defRPr>
-            </a:pPr>
-            <a:r>
-              <a:t>MUHAMMAD ALI AKBAR AL-QAHRI  /  DATA PORTFOLIO</a:t>
-            </a:r>
-          </a:p>
-        </p:txBody>
-      </p:sp>
-      <p:sp>
-        <p:nvSpPr>
-          <p:cNvPr id="31" name="footer-page-4">
-            <a:extLst xmlns:a="http://schemas.openxmlformats.org/drawingml/2006/main">
-              <a:ext uri="{FF2B5EF4-FFF2-40B4-BE49-F238E27FC236}">
-                <a16:creationId xmlns:a16="http://schemas.microsoft.com/office/drawing/2014/main" id="{52A7D92E-6FAF-430F-91A5-2D60A1EB9C95}"/>
+                  <a:srgbClr val="B9A59B"/>
+                </a:solidFill>
+                <a:latin typeface="Consolas"/>
+                <a:ea typeface="Consolas"/>
+                <a:cs typeface="Consolas"/>
+              </a:defRPr>
+            </a:pPr>
+            <a:r>
+              <a:t>~/ali_  /  DATA INTELLIGENCE PORTFOLIO</a:t>
+            </a:r>
+          </a:p>
+        </p:txBody>
+      </p:sp>
+      <p:sp>
+        <p:nvSpPr>
+          <p:cNvPr id="36" name="footer-page-4">
+            <a:extLst xmlns:a="http://schemas.openxmlformats.org/drawingml/2006/main">
+              <a:ext uri="{FF2B5EF4-FFF2-40B4-BE49-F238E27FC236}">
+                <a16:creationId xmlns:a16="http://schemas.microsoft.com/office/drawing/2014/main" id="{914EE4D3-C63F-4844-99C7-AF7437842611}"/>
               </a:ext>
             </a:extLst>
           </p:cNvPr>
@@ -7253,11 +8341,11 @@
             <a:pPr algn="r">
               <a:defRPr sz="900" b="1">
                 <a:solidFill>
-                  <a:srgbClr val="70647A"/>
-                </a:solidFill>
-                <a:latin typeface="Arial"/>
-                <a:ea typeface="Arial"/>
-                <a:cs typeface="Arial"/>
+                  <a:srgbClr val="F6C453"/>
+                </a:solidFill>
+                <a:latin typeface="Consolas"/>
+                <a:ea typeface="Consolas"/>
+                <a:cs typeface="Consolas"/>
               </a:defRPr>
             </a:pPr>
             <a:r>
@@ -7269,7 +8357,7 @@
     </p:spTree>
     <p:extLst>
       <p:ext uri="{BB962C8B-B14F-4D97-AF65-F5344CB8AC3E}">
-        <p14:creationId xmlns:p14="http://schemas.microsoft.com/office/powerpoint/2010/main" val="662653398"/>
+        <p14:creationId xmlns:p14="http://schemas.microsoft.com/office/powerpoint/2010/main" val="807896691"/>
       </p:ext>
     </p:extLst>
   </p:cSld>
@@ -7290,10 +8378,10 @@
       </p:grpSpPr>
       <p:sp>
         <p:nvSpPr>
-          <p:cNvPr id="19" name="05-pddikti-canvas">
-            <a:extLst xmlns:a="http://schemas.openxmlformats.org/drawingml/2006/main">
-              <a:ext uri="{FF2B5EF4-FFF2-40B4-BE49-F238E27FC236}">
-                <a16:creationId xmlns:a16="http://schemas.microsoft.com/office/drawing/2014/main" id="{5D98760D-6606-4394-86A1-4CB43F9C3B53}"/>
+          <p:cNvPr id="24" name="05-pddikti-canvas">
+            <a:extLst xmlns:a="http://schemas.openxmlformats.org/drawingml/2006/main">
+              <a:ext uri="{FF2B5EF4-FFF2-40B4-BE49-F238E27FC236}">
+                <a16:creationId xmlns:a16="http://schemas.microsoft.com/office/drawing/2014/main" id="{5DD9B083-1CDD-4EEC-B05D-AF3EF7D6C35A}"/>
               </a:ext>
             </a:extLst>
           </p:cNvPr>
@@ -7311,16 +8399,97 @@
             <a:avLst/>
           </a:prstGeom>
           <a:solidFill xmlns:a="http://schemas.openxmlformats.org/drawingml/2006/main">
-            <a:srgbClr val="FFFFFF"/>
-          </a:solidFill>
-        </p:spPr>
-      </p:sp>
-      <p:sp>
-        <p:nvSpPr>
-          <p:cNvPr id="2" name="eyebrow-5">
-            <a:extLst xmlns:a="http://schemas.openxmlformats.org/drawingml/2006/main">
-              <a:ext uri="{FF2B5EF4-FFF2-40B4-BE49-F238E27FC236}">
-                <a16:creationId xmlns:a16="http://schemas.microsoft.com/office/drawing/2014/main" id="{2FDFE097-7ED2-4113-9921-CE470EC01A4C}"/>
+            <a:srgbClr val="120B0A"/>
+          </a:solidFill>
+        </p:spPr>
+      </p:sp>
+      <p:sp>
+        <p:nvSpPr>
+          <p:cNvPr id="2" name="05-pddikti-edge-gold">
+            <a:extLst xmlns:a="http://schemas.openxmlformats.org/drawingml/2006/main">
+              <a:ext uri="{FF2B5EF4-FFF2-40B4-BE49-F238E27FC236}">
+                <a16:creationId xmlns:a16="http://schemas.microsoft.com/office/drawing/2014/main" id="{7C777477-A240-4037-92B1-49D1C53CA809}"/>
+              </a:ext>
+            </a:extLst>
+          </p:cNvPr>
+          <p:cNvSpPr>
+            <a:spLocks xmlns:a="http://schemas.openxmlformats.org/drawingml/2006/main" noGrp="1"/>
+          </p:cNvSpPr>
+          <p:nvPr/>
+        </p:nvSpPr>
+        <p:spPr>
+          <a:xfrm xmlns:a="http://schemas.openxmlformats.org/drawingml/2006/main">
+            <a:off x="0" y="0"/>
+            <a:ext cx="38100" cy="2286000"/>
+          </a:xfrm>
+          <a:prstGeom xmlns:a="http://schemas.openxmlformats.org/drawingml/2006/main" prst="rect">
+            <a:avLst/>
+          </a:prstGeom>
+          <a:solidFill xmlns:a="http://schemas.openxmlformats.org/drawingml/2006/main">
+            <a:srgbClr val="F6C453"/>
+          </a:solidFill>
+        </p:spPr>
+      </p:sp>
+      <p:sp>
+        <p:nvSpPr>
+          <p:cNvPr id="3" name="05-pddikti-edge-coral">
+            <a:extLst xmlns:a="http://schemas.openxmlformats.org/drawingml/2006/main">
+              <a:ext uri="{FF2B5EF4-FFF2-40B4-BE49-F238E27FC236}">
+                <a16:creationId xmlns:a16="http://schemas.microsoft.com/office/drawing/2014/main" id="{B89024B7-6514-44AA-9176-C3455FC3D8ED}"/>
+              </a:ext>
+            </a:extLst>
+          </p:cNvPr>
+          <p:cNvSpPr>
+            <a:spLocks xmlns:a="http://schemas.openxmlformats.org/drawingml/2006/main" noGrp="1"/>
+          </p:cNvSpPr>
+          <p:nvPr/>
+        </p:nvSpPr>
+        <p:spPr>
+          <a:xfrm xmlns:a="http://schemas.openxmlformats.org/drawingml/2006/main">
+            <a:off x="0" y="2286000"/>
+            <a:ext cx="38100" cy="2286000"/>
+          </a:xfrm>
+          <a:prstGeom xmlns:a="http://schemas.openxmlformats.org/drawingml/2006/main" prst="rect">
+            <a:avLst/>
+          </a:prstGeom>
+          <a:solidFill xmlns:a="http://schemas.openxmlformats.org/drawingml/2006/main">
+            <a:srgbClr val="FF7A59"/>
+          </a:solidFill>
+        </p:spPr>
+      </p:sp>
+      <p:sp>
+        <p:nvSpPr>
+          <p:cNvPr id="4" name="05-pddikti-edge-teal">
+            <a:extLst xmlns:a="http://schemas.openxmlformats.org/drawingml/2006/main">
+              <a:ext uri="{FF2B5EF4-FFF2-40B4-BE49-F238E27FC236}">
+                <a16:creationId xmlns:a16="http://schemas.microsoft.com/office/drawing/2014/main" id="{2D2CC66E-5930-4975-9917-E2F3E2B54952}"/>
+              </a:ext>
+            </a:extLst>
+          </p:cNvPr>
+          <p:cNvSpPr>
+            <a:spLocks xmlns:a="http://schemas.openxmlformats.org/drawingml/2006/main" noGrp="1"/>
+          </p:cNvSpPr>
+          <p:nvPr/>
+        </p:nvSpPr>
+        <p:spPr>
+          <a:xfrm xmlns:a="http://schemas.openxmlformats.org/drawingml/2006/main">
+            <a:off x="0" y="4572000"/>
+            <a:ext cx="38100" cy="2286000"/>
+          </a:xfrm>
+          <a:prstGeom xmlns:a="http://schemas.openxmlformats.org/drawingml/2006/main" prst="rect">
+            <a:avLst/>
+          </a:prstGeom>
+          <a:solidFill xmlns:a="http://schemas.openxmlformats.org/drawingml/2006/main">
+            <a:srgbClr val="5EEAD4"/>
+          </a:solidFill>
+        </p:spPr>
+      </p:sp>
+      <p:sp>
+        <p:nvSpPr>
+          <p:cNvPr id="5" name="eyebrow-5">
+            <a:extLst xmlns:a="http://schemas.openxmlformats.org/drawingml/2006/main">
+              <a:ext uri="{FF2B5EF4-FFF2-40B4-BE49-F238E27FC236}">
+                <a16:creationId xmlns:a16="http://schemas.microsoft.com/office/drawing/2014/main" id="{9D0E6773-4C83-48AA-BC6D-0EA2781E7983}"/>
               </a:ext>
             </a:extLst>
           </p:cNvPr>
@@ -7347,25 +8516,25 @@
             <a:pPr algn="l">
               <a:defRPr sz="1050" b="1">
                 <a:solidFill>
-                  <a:srgbClr val="6845C6"/>
-                </a:solidFill>
-                <a:latin typeface="Arial"/>
-                <a:ea typeface="Arial"/>
-                <a:cs typeface="Arial"/>
-              </a:defRPr>
-            </a:pPr>
-            <a:r>
-              <a:t>FLAGSHIP PRODUCT</a:t>
-            </a:r>
-          </a:p>
-        </p:txBody>
-      </p:sp>
-      <p:sp>
-        <p:nvSpPr>
-          <p:cNvPr id="3" name="title-5">
-            <a:extLst xmlns:a="http://schemas.openxmlformats.org/drawingml/2006/main">
-              <a:ext uri="{FF2B5EF4-FFF2-40B4-BE49-F238E27FC236}">
-                <a16:creationId xmlns:a16="http://schemas.microsoft.com/office/drawing/2014/main" id="{5110BDB0-55BF-40F3-B113-A583502BA56D}"/>
+                  <a:srgbClr val="FF7A59"/>
+                </a:solidFill>
+                <a:latin typeface="Consolas"/>
+                <a:ea typeface="Consolas"/>
+                <a:cs typeface="Consolas"/>
+              </a:defRPr>
+            </a:pPr>
+            <a:r>
+              <a:t>~/ FLAGSHIP PRODUCT</a:t>
+            </a:r>
+          </a:p>
+        </p:txBody>
+      </p:sp>
+      <p:sp>
+        <p:nvSpPr>
+          <p:cNvPr id="6" name="title-5">
+            <a:extLst xmlns:a="http://schemas.openxmlformats.org/drawingml/2006/main">
+              <a:ext uri="{FF2B5EF4-FFF2-40B4-BE49-F238E27FC236}">
+                <a16:creationId xmlns:a16="http://schemas.microsoft.com/office/drawing/2014/main" id="{D675773E-B8E0-411D-9B92-03DEDDDB9B00}"/>
               </a:ext>
             </a:extLst>
           </p:cNvPr>
@@ -7392,11 +8561,11 @@
             <a:pPr algn="l">
               <a:defRPr sz="3225" b="1">
                 <a:solidFill>
-                  <a:srgbClr val="180D20"/>
-                </a:solidFill>
-                <a:latin typeface="Arial"/>
-                <a:ea typeface="Arial"/>
-                <a:cs typeface="Arial"/>
+                  <a:srgbClr val="FFF7ED"/>
+                </a:solidFill>
+                <a:latin typeface="Aptos"/>
+                <a:ea typeface="Aptos"/>
+                <a:cs typeface="Aptos"/>
               </a:defRPr>
             </a:pPr>
             <a:r>
@@ -7407,10 +8576,10 @@
       </p:sp>
       <p:sp>
         <p:nvSpPr>
-          <p:cNvPr id="4" name="pddikti-copy">
-            <a:extLst xmlns:a="http://schemas.openxmlformats.org/drawingml/2006/main">
-              <a:ext uri="{FF2B5EF4-FFF2-40B4-BE49-F238E27FC236}">
-                <a16:creationId xmlns:a16="http://schemas.microsoft.com/office/drawing/2014/main" id="{1C855B0C-9684-443D-A71F-683A5325BA2D}"/>
+          <p:cNvPr id="7" name="pddikti-copy">
+            <a:extLst xmlns:a="http://schemas.openxmlformats.org/drawingml/2006/main">
+              <a:ext uri="{FF2B5EF4-FFF2-40B4-BE49-F238E27FC236}">
+                <a16:creationId xmlns:a16="http://schemas.microsoft.com/office/drawing/2014/main" id="{43EB1347-9875-4237-85ED-52A7CA5CC16D}"/>
               </a:ext>
             </a:extLst>
           </p:cNvPr>
@@ -7437,11 +8606,11 @@
             <a:pPr algn="l">
               <a:defRPr sz="1500" b="0">
                 <a:solidFill>
-                  <a:srgbClr val="70647A"/>
-                </a:solidFill>
-                <a:latin typeface="Arial"/>
-                <a:ea typeface="Arial"/>
-                <a:cs typeface="Arial"/>
+                  <a:srgbClr val="B9A59B"/>
+                </a:solidFill>
+                <a:latin typeface="Aptos"/>
+                <a:ea typeface="Aptos"/>
+                <a:cs typeface="Aptos"/>
               </a:defRPr>
             </a:pPr>
             <a:r>
@@ -7452,10 +8621,10 @@
       </p:sp>
       <p:sp>
         <p:nvSpPr>
-          <p:cNvPr id="5" name="pddikti-pill-bg">
-            <a:extLst xmlns:a="http://schemas.openxmlformats.org/drawingml/2006/main">
-              <a:ext uri="{FF2B5EF4-FFF2-40B4-BE49-F238E27FC236}">
-                <a16:creationId xmlns:a16="http://schemas.microsoft.com/office/drawing/2014/main" id="{135C7711-E71E-45CF-A037-5D5DB7A38D06}"/>
+          <p:cNvPr id="8" name="pddikti-pill-bg">
+            <a:extLst xmlns:a="http://schemas.openxmlformats.org/drawingml/2006/main">
+              <a:ext uri="{FF2B5EF4-FFF2-40B4-BE49-F238E27FC236}">
+                <a16:creationId xmlns:a16="http://schemas.microsoft.com/office/drawing/2014/main" id="{891E4BDB-67E6-4A2D-8D02-CA66250D2548}"/>
               </a:ext>
             </a:extLst>
           </p:cNvPr>
@@ -7475,16 +8644,16 @@
             </a:avLst>
           </a:prstGeom>
           <a:solidFill xmlns:a="http://schemas.openxmlformats.org/drawingml/2006/main">
-            <a:srgbClr val="F1EBFF"/>
-          </a:solidFill>
-        </p:spPr>
-      </p:sp>
-      <p:sp>
-        <p:nvSpPr>
-          <p:cNvPr id="6" name="pddikti-pill-text">
-            <a:extLst xmlns:a="http://schemas.openxmlformats.org/drawingml/2006/main">
-              <a:ext uri="{FF2B5EF4-FFF2-40B4-BE49-F238E27FC236}">
-                <a16:creationId xmlns:a16="http://schemas.microsoft.com/office/drawing/2014/main" id="{5182A32E-1EEA-4454-B364-3673004106EE}"/>
+            <a:srgbClr val="2A1A17"/>
+          </a:solidFill>
+        </p:spPr>
+      </p:sp>
+      <p:sp>
+        <p:nvSpPr>
+          <p:cNvPr id="9" name="pddikti-pill-text">
+            <a:extLst xmlns:a="http://schemas.openxmlformats.org/drawingml/2006/main">
+              <a:ext uri="{FF2B5EF4-FFF2-40B4-BE49-F238E27FC236}">
+                <a16:creationId xmlns:a16="http://schemas.microsoft.com/office/drawing/2014/main" id="{773CF786-6285-4DED-AE0D-86AFE82E2FC3}"/>
               </a:ext>
             </a:extLst>
           </p:cNvPr>
@@ -7504,18 +8673,18 @@
         </p:spPr>
         <p:txBody>
           <a:bodyPr xmlns:a="http://schemas.openxmlformats.org/drawingml/2006/main" wrap="square" lIns="0" tIns="0" rIns="0" bIns="0" anchor="t">
-            <a:normAutofit fontScale="95830"/>
+            <a:normAutofit fontScale="100000"/>
           </a:bodyPr>
           <a:lstStyle xmlns:a="http://schemas.openxmlformats.org/drawingml/2006/main"/>
           <a:p xmlns:a="http://schemas.openxmlformats.org/drawingml/2006/main">
             <a:pPr algn="ctr">
               <a:defRPr sz="1125" b="1">
                 <a:solidFill>
-                  <a:srgbClr val="6845C6"/>
-                </a:solidFill>
-                <a:latin typeface="Arial"/>
-                <a:ea typeface="Arial"/>
-                <a:cs typeface="Arial"/>
+                  <a:srgbClr val="FF7A59"/>
+                </a:solidFill>
+                <a:latin typeface="Aptos"/>
+                <a:ea typeface="Aptos"/>
+                <a:cs typeface="Aptos"/>
               </a:defRPr>
             </a:pPr>
             <a:r>
@@ -7526,10 +8695,10 @@
       </p:sp>
       <p:sp>
         <p:nvSpPr>
-          <p:cNvPr id="7" name="pddikti-metric-1">
-            <a:extLst xmlns:a="http://schemas.openxmlformats.org/drawingml/2006/main">
-              <a:ext uri="{FF2B5EF4-FFF2-40B4-BE49-F238E27FC236}">
-                <a16:creationId xmlns:a16="http://schemas.microsoft.com/office/drawing/2014/main" id="{B683498D-3028-416D-9266-9380EE764288}"/>
+          <p:cNvPr id="10" name="pddikti-metric-1">
+            <a:extLst xmlns:a="http://schemas.openxmlformats.org/drawingml/2006/main">
+              <a:ext uri="{FF2B5EF4-FFF2-40B4-BE49-F238E27FC236}">
+                <a16:creationId xmlns:a16="http://schemas.microsoft.com/office/drawing/2014/main" id="{0973939F-21C4-45C0-A84D-3355B2619CA1}"/>
               </a:ext>
             </a:extLst>
           </p:cNvPr>
@@ -7556,11 +8725,11 @@
             <a:pPr algn="l">
               <a:defRPr sz="3300" b="1">
                 <a:solidFill>
-                  <a:srgbClr val="180D20"/>
-                </a:solidFill>
-                <a:latin typeface="Arial"/>
-                <a:ea typeface="Arial"/>
-                <a:cs typeface="Arial"/>
+                  <a:srgbClr val="FFF7ED"/>
+                </a:solidFill>
+                <a:latin typeface="Aptos"/>
+                <a:ea typeface="Aptos"/>
+                <a:cs typeface="Aptos"/>
               </a:defRPr>
             </a:pPr>
             <a:r>
@@ -7571,10 +8740,10 @@
       </p:sp>
       <p:sp>
         <p:nvSpPr>
-          <p:cNvPr id="8" name="pddikti-label-1">
-            <a:extLst xmlns:a="http://schemas.openxmlformats.org/drawingml/2006/main">
-              <a:ext uri="{FF2B5EF4-FFF2-40B4-BE49-F238E27FC236}">
-                <a16:creationId xmlns:a16="http://schemas.microsoft.com/office/drawing/2014/main" id="{9B0129FE-53CF-45EC-8106-1443A6902F66}"/>
+          <p:cNvPr id="11" name="pddikti-label-1">
+            <a:extLst xmlns:a="http://schemas.openxmlformats.org/drawingml/2006/main">
+              <a:ext uri="{FF2B5EF4-FFF2-40B4-BE49-F238E27FC236}">
+                <a16:creationId xmlns:a16="http://schemas.microsoft.com/office/drawing/2014/main" id="{455CFEFA-AFEA-4A3F-A831-7E4C497C8135}"/>
               </a:ext>
             </a:extLst>
           </p:cNvPr>
@@ -7601,11 +8770,11 @@
             <a:pPr algn="l">
               <a:defRPr sz="1275" b="0">
                 <a:solidFill>
-                  <a:srgbClr val="70647A"/>
-                </a:solidFill>
-                <a:latin typeface="Arial"/>
-                <a:ea typeface="Arial"/>
-                <a:cs typeface="Arial"/>
+                  <a:srgbClr val="B9A59B"/>
+                </a:solidFill>
+                <a:latin typeface="Aptos"/>
+                <a:ea typeface="Aptos"/>
+                <a:cs typeface="Aptos"/>
               </a:defRPr>
             </a:pPr>
             <a:r>
@@ -7616,10 +8785,10 @@
       </p:sp>
       <p:sp>
         <p:nvSpPr>
-          <p:cNvPr id="9" name="pddikti-metric-2">
-            <a:extLst xmlns:a="http://schemas.openxmlformats.org/drawingml/2006/main">
-              <a:ext uri="{FF2B5EF4-FFF2-40B4-BE49-F238E27FC236}">
-                <a16:creationId xmlns:a16="http://schemas.microsoft.com/office/drawing/2014/main" id="{DAC036C0-0B30-4359-97F8-A5E76677A4AF}"/>
+          <p:cNvPr id="12" name="pddikti-metric-2">
+            <a:extLst xmlns:a="http://schemas.openxmlformats.org/drawingml/2006/main">
+              <a:ext uri="{FF2B5EF4-FFF2-40B4-BE49-F238E27FC236}">
+                <a16:creationId xmlns:a16="http://schemas.microsoft.com/office/drawing/2014/main" id="{22F48AF4-4CDC-4BF7-8C4A-ABA0C3C6FD0B}"/>
               </a:ext>
             </a:extLst>
           </p:cNvPr>
@@ -7646,11 +8815,11 @@
             <a:pPr algn="l">
               <a:defRPr sz="3300" b="1">
                 <a:solidFill>
-                  <a:srgbClr val="180D20"/>
-                </a:solidFill>
-                <a:latin typeface="Arial"/>
-                <a:ea typeface="Arial"/>
-                <a:cs typeface="Arial"/>
+                  <a:srgbClr val="FFF7ED"/>
+                </a:solidFill>
+                <a:latin typeface="Aptos"/>
+                <a:ea typeface="Aptos"/>
+                <a:cs typeface="Aptos"/>
               </a:defRPr>
             </a:pPr>
             <a:r>
@@ -7661,10 +8830,10 @@
       </p:sp>
       <p:sp>
         <p:nvSpPr>
-          <p:cNvPr id="10" name="pddikti-label-2">
-            <a:extLst xmlns:a="http://schemas.openxmlformats.org/drawingml/2006/main">
-              <a:ext uri="{FF2B5EF4-FFF2-40B4-BE49-F238E27FC236}">
-                <a16:creationId xmlns:a16="http://schemas.microsoft.com/office/drawing/2014/main" id="{97A22853-6894-4D1F-A613-39FFFAA3F95C}"/>
+          <p:cNvPr id="13" name="pddikti-label-2">
+            <a:extLst xmlns:a="http://schemas.openxmlformats.org/drawingml/2006/main">
+              <a:ext uri="{FF2B5EF4-FFF2-40B4-BE49-F238E27FC236}">
+                <a16:creationId xmlns:a16="http://schemas.microsoft.com/office/drawing/2014/main" id="{4834B06F-334A-4733-B1B8-421A4C82DC15}"/>
               </a:ext>
             </a:extLst>
           </p:cNvPr>
@@ -7691,11 +8860,11 @@
             <a:pPr algn="l">
               <a:defRPr sz="1275" b="0">
                 <a:solidFill>
-                  <a:srgbClr val="70647A"/>
-                </a:solidFill>
-                <a:latin typeface="Arial"/>
-                <a:ea typeface="Arial"/>
-                <a:cs typeface="Arial"/>
+                  <a:srgbClr val="B9A59B"/>
+                </a:solidFill>
+                <a:latin typeface="Aptos"/>
+                <a:ea typeface="Aptos"/>
+                <a:cs typeface="Aptos"/>
               </a:defRPr>
             </a:pPr>
             <a:r>
@@ -7706,10 +8875,10 @@
       </p:sp>
       <p:sp>
         <p:nvSpPr>
-          <p:cNvPr id="11" name="pddikti-metric-3">
-            <a:extLst xmlns:a="http://schemas.openxmlformats.org/drawingml/2006/main">
-              <a:ext uri="{FF2B5EF4-FFF2-40B4-BE49-F238E27FC236}">
-                <a16:creationId xmlns:a16="http://schemas.microsoft.com/office/drawing/2014/main" id="{F2EA13E9-6E16-4A32-81D8-5525FC5405BD}"/>
+          <p:cNvPr id="14" name="pddikti-metric-3">
+            <a:extLst xmlns:a="http://schemas.openxmlformats.org/drawingml/2006/main">
+              <a:ext uri="{FF2B5EF4-FFF2-40B4-BE49-F238E27FC236}">
+                <a16:creationId xmlns:a16="http://schemas.microsoft.com/office/drawing/2014/main" id="{A0AFBA9E-65DD-49D6-A2CD-C370014761D7}"/>
               </a:ext>
             </a:extLst>
           </p:cNvPr>
@@ -7736,11 +8905,11 @@
             <a:pPr algn="l">
               <a:defRPr sz="3300" b="1">
                 <a:solidFill>
-                  <a:srgbClr val="180D20"/>
-                </a:solidFill>
-                <a:latin typeface="Arial"/>
-                <a:ea typeface="Arial"/>
-                <a:cs typeface="Arial"/>
+                  <a:srgbClr val="FFF7ED"/>
+                </a:solidFill>
+                <a:latin typeface="Aptos"/>
+                <a:ea typeface="Aptos"/>
+                <a:cs typeface="Aptos"/>
               </a:defRPr>
             </a:pPr>
             <a:r>
@@ -7751,10 +8920,10 @@
       </p:sp>
       <p:sp>
         <p:nvSpPr>
-          <p:cNvPr id="12" name="pddikti-label-3">
-            <a:extLst xmlns:a="http://schemas.openxmlformats.org/drawingml/2006/main">
-              <a:ext uri="{FF2B5EF4-FFF2-40B4-BE49-F238E27FC236}">
-                <a16:creationId xmlns:a16="http://schemas.microsoft.com/office/drawing/2014/main" id="{C5B73F77-CB5C-4FB1-B0F8-AD1E7D6A777E}"/>
+          <p:cNvPr id="15" name="pddikti-label-3">
+            <a:extLst xmlns:a="http://schemas.openxmlformats.org/drawingml/2006/main">
+              <a:ext uri="{FF2B5EF4-FFF2-40B4-BE49-F238E27FC236}">
+                <a16:creationId xmlns:a16="http://schemas.microsoft.com/office/drawing/2014/main" id="{CE0EF7B7-58C4-4EED-A3FC-1CC918281810}"/>
               </a:ext>
             </a:extLst>
           </p:cNvPr>
@@ -7781,11 +8950,11 @@
             <a:pPr algn="l">
               <a:defRPr sz="1275" b="0">
                 <a:solidFill>
-                  <a:srgbClr val="70647A"/>
-                </a:solidFill>
-                <a:latin typeface="Arial"/>
-                <a:ea typeface="Arial"/>
-                <a:cs typeface="Arial"/>
+                  <a:srgbClr val="B9A59B"/>
+                </a:solidFill>
+                <a:latin typeface="Aptos"/>
+                <a:ea typeface="Aptos"/>
+                <a:cs typeface="Aptos"/>
               </a:defRPr>
             </a:pPr>
             <a:r>
@@ -7796,10 +8965,10 @@
       </p:sp>
       <p:sp>
         <p:nvSpPr>
-          <p:cNvPr id="13" name="pddikti-frame">
-            <a:extLst xmlns:a="http://schemas.openxmlformats.org/drawingml/2006/main">
-              <a:ext uri="{FF2B5EF4-FFF2-40B4-BE49-F238E27FC236}">
-                <a16:creationId xmlns:a16="http://schemas.microsoft.com/office/drawing/2014/main" id="{F79C57A9-38EC-4C97-9A5E-D78E0C04D216}"/>
+          <p:cNvPr id="16" name="pddikti-frame">
+            <a:extLst xmlns:a="http://schemas.openxmlformats.org/drawingml/2006/main">
+              <a:ext uri="{FF2B5EF4-FFF2-40B4-BE49-F238E27FC236}">
+                <a16:creationId xmlns:a16="http://schemas.microsoft.com/office/drawing/2014/main" id="{786960C8-0C89-4E37-BD7E-489776CCE838}"/>
               </a:ext>
             </a:extLst>
           </p:cNvPr>
@@ -7819,16 +8988,16 @@
             </a:avLst>
           </a:prstGeom>
           <a:solidFill xmlns:a="http://schemas.openxmlformats.org/drawingml/2006/main">
-            <a:srgbClr val="FBF7EF"/>
-          </a:solidFill>
-        </p:spPr>
-      </p:sp>
-      <p:sp>
-        <p:nvSpPr>
-          <p:cNvPr id="14" name="pddikti-url">
-            <a:extLst xmlns:a="http://schemas.openxmlformats.org/drawingml/2006/main">
-              <a:ext uri="{FF2B5EF4-FFF2-40B4-BE49-F238E27FC236}">
-                <a16:creationId xmlns:a16="http://schemas.microsoft.com/office/drawing/2014/main" id="{779F4F8E-0251-4998-9370-A597DD862842}"/>
+            <a:srgbClr val="211512"/>
+          </a:solidFill>
+        </p:spPr>
+      </p:sp>
+      <p:sp>
+        <p:nvSpPr>
+          <p:cNvPr id="17" name="pddikti-url">
+            <a:extLst xmlns:a="http://schemas.openxmlformats.org/drawingml/2006/main">
+              <a:ext uri="{FF2B5EF4-FFF2-40B4-BE49-F238E27FC236}">
+                <a16:creationId xmlns:a16="http://schemas.microsoft.com/office/drawing/2014/main" id="{D80E28B0-7E27-4B03-994C-52AD5F5CCA2A}"/>
               </a:ext>
             </a:extLst>
           </p:cNvPr>
@@ -7855,11 +9024,11 @@
             <a:pPr algn="r">
               <a:defRPr sz="1050" b="1">
                 <a:solidFill>
-                  <a:srgbClr val="6845C6"/>
-                </a:solidFill>
-                <a:latin typeface="Arial"/>
-                <a:ea typeface="Arial"/>
-                <a:cs typeface="Arial"/>
+                  <a:srgbClr val="FF7A59"/>
+                </a:solidFill>
+                <a:latin typeface="Aptos"/>
+                <a:ea typeface="Aptos"/>
+                <a:cs typeface="Aptos"/>
               </a:defRPr>
             </a:pPr>
             <a:r>
@@ -7870,10 +9039,10 @@
       </p:sp>
       <p:sp>
         <p:nvSpPr>
-          <p:cNvPr id="15" name="footer-line-5">
-            <a:extLst xmlns:a="http://schemas.openxmlformats.org/drawingml/2006/main">
-              <a:ext uri="{FF2B5EF4-FFF2-40B4-BE49-F238E27FC236}">
-                <a16:creationId xmlns:a16="http://schemas.microsoft.com/office/drawing/2014/main" id="{3839861A-6911-4953-8F9A-FADF30130428}"/>
+          <p:cNvPr id="18" name="footer-line-gold-5">
+            <a:extLst xmlns:a="http://schemas.openxmlformats.org/drawingml/2006/main">
+              <a:ext uri="{FF2B5EF4-FFF2-40B4-BE49-F238E27FC236}">
+                <a16:creationId xmlns:a16="http://schemas.microsoft.com/office/drawing/2014/main" id="{88BB7AA2-9666-4263-9C65-E3E0942DDC66}"/>
               </a:ext>
             </a:extLst>
           </p:cNvPr>
@@ -7885,22 +9054,76 @@
         <p:spPr>
           <a:xfrm xmlns:a="http://schemas.openxmlformats.org/drawingml/2006/main">
             <a:off x="400050" y="6429375"/>
-            <a:ext cx="10553700" cy="19050"/>
-          </a:xfrm>
-          <a:prstGeom xmlns:a="http://schemas.openxmlformats.org/drawingml/2006/main" prst="rect">
-            <a:avLst/>
-          </a:prstGeom>
-          <a:solidFill xmlns:a="http://schemas.openxmlformats.org/drawingml/2006/main">
-            <a:srgbClr val="DED4E6"/>
-          </a:solidFill>
-        </p:spPr>
-      </p:sp>
-      <p:sp>
-        <p:nvSpPr>
-          <p:cNvPr id="16" name="footer-name-5">
-            <a:extLst xmlns:a="http://schemas.openxmlformats.org/drawingml/2006/main">
-              <a:ext uri="{FF2B5EF4-FFF2-40B4-BE49-F238E27FC236}">
-                <a16:creationId xmlns:a16="http://schemas.microsoft.com/office/drawing/2014/main" id="{62FB6725-73EB-4437-88DE-486CF9E8CF89}"/>
+            <a:ext cx="5276850" cy="19050"/>
+          </a:xfrm>
+          <a:prstGeom xmlns:a="http://schemas.openxmlformats.org/drawingml/2006/main" prst="rect">
+            <a:avLst/>
+          </a:prstGeom>
+          <a:solidFill xmlns:a="http://schemas.openxmlformats.org/drawingml/2006/main">
+            <a:srgbClr val="F6C453"/>
+          </a:solidFill>
+        </p:spPr>
+      </p:sp>
+      <p:sp>
+        <p:nvSpPr>
+          <p:cNvPr id="19" name="footer-line-coral-5">
+            <a:extLst xmlns:a="http://schemas.openxmlformats.org/drawingml/2006/main">
+              <a:ext uri="{FF2B5EF4-FFF2-40B4-BE49-F238E27FC236}">
+                <a16:creationId xmlns:a16="http://schemas.microsoft.com/office/drawing/2014/main" id="{5322E8EA-2DBF-4813-B570-20A3F6DC6577}"/>
+              </a:ext>
+            </a:extLst>
+          </p:cNvPr>
+          <p:cNvSpPr>
+            <a:spLocks xmlns:a="http://schemas.openxmlformats.org/drawingml/2006/main" noGrp="1"/>
+          </p:cNvSpPr>
+          <p:nvPr/>
+        </p:nvSpPr>
+        <p:spPr>
+          <a:xfrm xmlns:a="http://schemas.openxmlformats.org/drawingml/2006/main">
+            <a:off x="5676900" y="6429375"/>
+            <a:ext cx="2638425" cy="19050"/>
+          </a:xfrm>
+          <a:prstGeom xmlns:a="http://schemas.openxmlformats.org/drawingml/2006/main" prst="rect">
+            <a:avLst/>
+          </a:prstGeom>
+          <a:solidFill xmlns:a="http://schemas.openxmlformats.org/drawingml/2006/main">
+            <a:srgbClr val="FF7A59"/>
+          </a:solidFill>
+        </p:spPr>
+      </p:sp>
+      <p:sp>
+        <p:nvSpPr>
+          <p:cNvPr id="20" name="footer-line-teal-5">
+            <a:extLst xmlns:a="http://schemas.openxmlformats.org/drawingml/2006/main">
+              <a:ext uri="{FF2B5EF4-FFF2-40B4-BE49-F238E27FC236}">
+                <a16:creationId xmlns:a16="http://schemas.microsoft.com/office/drawing/2014/main" id="{510C55E3-CFD6-47F7-8610-F56F62F17BD3}"/>
+              </a:ext>
+            </a:extLst>
+          </p:cNvPr>
+          <p:cNvSpPr>
+            <a:spLocks xmlns:a="http://schemas.openxmlformats.org/drawingml/2006/main" noGrp="1"/>
+          </p:cNvSpPr>
+          <p:nvPr/>
+        </p:nvSpPr>
+        <p:spPr>
+          <a:xfrm xmlns:a="http://schemas.openxmlformats.org/drawingml/2006/main">
+            <a:off x="8315325" y="6429375"/>
+            <a:ext cx="2638425" cy="19050"/>
+          </a:xfrm>
+          <a:prstGeom xmlns:a="http://schemas.openxmlformats.org/drawingml/2006/main" prst="rect">
+            <a:avLst/>
+          </a:prstGeom>
+          <a:solidFill xmlns:a="http://schemas.openxmlformats.org/drawingml/2006/main">
+            <a:srgbClr val="5EEAD4"/>
+          </a:solidFill>
+        </p:spPr>
+      </p:sp>
+      <p:sp>
+        <p:nvSpPr>
+          <p:cNvPr id="21" name="footer-name-5">
+            <a:extLst xmlns:a="http://schemas.openxmlformats.org/drawingml/2006/main">
+              <a:ext uri="{FF2B5EF4-FFF2-40B4-BE49-F238E27FC236}">
+                <a16:creationId xmlns:a16="http://schemas.microsoft.com/office/drawing/2014/main" id="{0C29A738-85F1-498C-9356-30DC354A39DD}"/>
               </a:ext>
             </a:extLst>
           </p:cNvPr>
@@ -7927,25 +9150,25 @@
             <a:pPr algn="l">
               <a:defRPr sz="825" b="1">
                 <a:solidFill>
-                  <a:srgbClr val="70647A"/>
-                </a:solidFill>
-                <a:latin typeface="Arial"/>
-                <a:ea typeface="Arial"/>
-                <a:cs typeface="Arial"/>
-              </a:defRPr>
-            </a:pPr>
-            <a:r>
-              <a:t>MUHAMMAD ALI AKBAR AL-QAHRI  /  DATA PORTFOLIO</a:t>
-            </a:r>
-          </a:p>
-        </p:txBody>
-      </p:sp>
-      <p:sp>
-        <p:nvSpPr>
-          <p:cNvPr id="17" name="footer-page-5">
-            <a:extLst xmlns:a="http://schemas.openxmlformats.org/drawingml/2006/main">
-              <a:ext uri="{FF2B5EF4-FFF2-40B4-BE49-F238E27FC236}">
-                <a16:creationId xmlns:a16="http://schemas.microsoft.com/office/drawing/2014/main" id="{D6F9E653-BD19-478B-A28A-9ED75C20EFDC}"/>
+                  <a:srgbClr val="B9A59B"/>
+                </a:solidFill>
+                <a:latin typeface="Consolas"/>
+                <a:ea typeface="Consolas"/>
+                <a:cs typeface="Consolas"/>
+              </a:defRPr>
+            </a:pPr>
+            <a:r>
+              <a:t>~/ali_  /  DATA INTELLIGENCE PORTFOLIO</a:t>
+            </a:r>
+          </a:p>
+        </p:txBody>
+      </p:sp>
+      <p:sp>
+        <p:nvSpPr>
+          <p:cNvPr id="22" name="footer-page-5">
+            <a:extLst xmlns:a="http://schemas.openxmlformats.org/drawingml/2006/main">
+              <a:ext uri="{FF2B5EF4-FFF2-40B4-BE49-F238E27FC236}">
+                <a16:creationId xmlns:a16="http://schemas.microsoft.com/office/drawing/2014/main" id="{B2502829-EA38-4418-A132-5913CCA09D2B}"/>
               </a:ext>
             </a:extLst>
           </p:cNvPr>
@@ -7972,11 +9195,11 @@
             <a:pPr algn="r">
               <a:defRPr sz="900" b="1">
                 <a:solidFill>
-                  <a:srgbClr val="70647A"/>
-                </a:solidFill>
-                <a:latin typeface="Arial"/>
-                <a:ea typeface="Arial"/>
-                <a:cs typeface="Arial"/>
+                  <a:srgbClr val="F6C453"/>
+                </a:solidFill>
+                <a:latin typeface="Consolas"/>
+                <a:ea typeface="Consolas"/>
+                <a:cs typeface="Consolas"/>
               </a:defRPr>
             </a:pPr>
             <a:r>
@@ -7987,14 +9210,14 @@
       </p:sp>
       <p:pic>
         <p:nvPicPr>
-          <p:cNvPr id="36" name=""/>
+          <p:cNvPr id="46" name=""/>
           <p:cNvPicPr>
             <a:picLocks xmlns:a="http://schemas.openxmlformats.org/drawingml/2006/main" noChangeAspect="1"/>
           </p:cNvPicPr>
           <p:nvPr/>
         </p:nvPicPr>
         <p:blipFill>
-          <a:blip xmlns:r="http://schemas.openxmlformats.org/officeDocument/2006/relationships" xmlns:a="http://schemas.openxmlformats.org/drawingml/2006/main" r:embed="R119d49ebbf264a38"/>
+          <a:blip xmlns:r="http://schemas.openxmlformats.org/officeDocument/2006/relationships" xmlns:a="http://schemas.openxmlformats.org/drawingml/2006/main" r:embed="R7bff91f34faa40d7"/>
           <a:srcRect xmlns:a="http://schemas.openxmlformats.org/drawingml/2006/main" l="0" t="874" r="0" b="874"/>
           <a:stretch xmlns:a="http://schemas.openxmlformats.org/drawingml/2006/main">
             <a:fillRect l="0" t="0" r="0" b="0"/>
@@ -8013,7 +9236,7 @@
     </p:spTree>
     <p:extLst>
       <p:ext uri="{BB962C8B-B14F-4D97-AF65-F5344CB8AC3E}">
-        <p14:creationId xmlns:p14="http://schemas.microsoft.com/office/powerpoint/2010/main" val="1638630102"/>
+        <p14:creationId xmlns:p14="http://schemas.microsoft.com/office/powerpoint/2010/main" val="1751399416"/>
       </p:ext>
     </p:extLst>
   </p:cSld>
@@ -8034,10 +9257,10 @@
       </p:grpSpPr>
       <p:sp>
         <p:nvSpPr>
-          <p:cNvPr id="19" name="06-decision-products-canvas">
-            <a:extLst xmlns:a="http://schemas.openxmlformats.org/drawingml/2006/main">
-              <a:ext uri="{FF2B5EF4-FFF2-40B4-BE49-F238E27FC236}">
-                <a16:creationId xmlns:a16="http://schemas.microsoft.com/office/drawing/2014/main" id="{D2E1F8BE-0820-47A2-A864-15BD91D17951}"/>
+          <p:cNvPr id="24" name="06-decision-products-canvas">
+            <a:extLst xmlns:a="http://schemas.openxmlformats.org/drawingml/2006/main">
+              <a:ext uri="{FF2B5EF4-FFF2-40B4-BE49-F238E27FC236}">
+                <a16:creationId xmlns:a16="http://schemas.microsoft.com/office/drawing/2014/main" id="{DF7F950D-C23A-46F9-B758-86A21896ED7F}"/>
               </a:ext>
             </a:extLst>
           </p:cNvPr>
@@ -8055,16 +9278,97 @@
             <a:avLst/>
           </a:prstGeom>
           <a:solidFill xmlns:a="http://schemas.openxmlformats.org/drawingml/2006/main">
-            <a:srgbClr val="FFFFFF"/>
-          </a:solidFill>
-        </p:spPr>
-      </p:sp>
-      <p:sp>
-        <p:nvSpPr>
-          <p:cNvPr id="2" name="eyebrow-6">
-            <a:extLst xmlns:a="http://schemas.openxmlformats.org/drawingml/2006/main">
-              <a:ext uri="{FF2B5EF4-FFF2-40B4-BE49-F238E27FC236}">
-                <a16:creationId xmlns:a16="http://schemas.microsoft.com/office/drawing/2014/main" id="{0E965DCA-0314-4F61-B732-D32EBBA9BFA8}"/>
+            <a:srgbClr val="120B0A"/>
+          </a:solidFill>
+        </p:spPr>
+      </p:sp>
+      <p:sp>
+        <p:nvSpPr>
+          <p:cNvPr id="2" name="06-decision-products-edge-gold">
+            <a:extLst xmlns:a="http://schemas.openxmlformats.org/drawingml/2006/main">
+              <a:ext uri="{FF2B5EF4-FFF2-40B4-BE49-F238E27FC236}">
+                <a16:creationId xmlns:a16="http://schemas.microsoft.com/office/drawing/2014/main" id="{5F3D7EBE-7A10-4D33-B9C8-C30DF487790D}"/>
+              </a:ext>
+            </a:extLst>
+          </p:cNvPr>
+          <p:cNvSpPr>
+            <a:spLocks xmlns:a="http://schemas.openxmlformats.org/drawingml/2006/main" noGrp="1"/>
+          </p:cNvSpPr>
+          <p:nvPr/>
+        </p:nvSpPr>
+        <p:spPr>
+          <a:xfrm xmlns:a="http://schemas.openxmlformats.org/drawingml/2006/main">
+            <a:off x="0" y="0"/>
+            <a:ext cx="38100" cy="2286000"/>
+          </a:xfrm>
+          <a:prstGeom xmlns:a="http://schemas.openxmlformats.org/drawingml/2006/main" prst="rect">
+            <a:avLst/>
+          </a:prstGeom>
+          <a:solidFill xmlns:a="http://schemas.openxmlformats.org/drawingml/2006/main">
+            <a:srgbClr val="F6C453"/>
+          </a:solidFill>
+        </p:spPr>
+      </p:sp>
+      <p:sp>
+        <p:nvSpPr>
+          <p:cNvPr id="3" name="06-decision-products-edge-coral">
+            <a:extLst xmlns:a="http://schemas.openxmlformats.org/drawingml/2006/main">
+              <a:ext uri="{FF2B5EF4-FFF2-40B4-BE49-F238E27FC236}">
+                <a16:creationId xmlns:a16="http://schemas.microsoft.com/office/drawing/2014/main" id="{4144E170-6EF1-4E2A-BF98-0E04254C6440}"/>
+              </a:ext>
+            </a:extLst>
+          </p:cNvPr>
+          <p:cNvSpPr>
+            <a:spLocks xmlns:a="http://schemas.openxmlformats.org/drawingml/2006/main" noGrp="1"/>
+          </p:cNvSpPr>
+          <p:nvPr/>
+        </p:nvSpPr>
+        <p:spPr>
+          <a:xfrm xmlns:a="http://schemas.openxmlformats.org/drawingml/2006/main">
+            <a:off x="0" y="2286000"/>
+            <a:ext cx="38100" cy="2286000"/>
+          </a:xfrm>
+          <a:prstGeom xmlns:a="http://schemas.openxmlformats.org/drawingml/2006/main" prst="rect">
+            <a:avLst/>
+          </a:prstGeom>
+          <a:solidFill xmlns:a="http://schemas.openxmlformats.org/drawingml/2006/main">
+            <a:srgbClr val="FF7A59"/>
+          </a:solidFill>
+        </p:spPr>
+      </p:sp>
+      <p:sp>
+        <p:nvSpPr>
+          <p:cNvPr id="4" name="06-decision-products-edge-teal">
+            <a:extLst xmlns:a="http://schemas.openxmlformats.org/drawingml/2006/main">
+              <a:ext uri="{FF2B5EF4-FFF2-40B4-BE49-F238E27FC236}">
+                <a16:creationId xmlns:a16="http://schemas.microsoft.com/office/drawing/2014/main" id="{1320B059-C7DD-499F-9303-D8D98FFBDD1E}"/>
+              </a:ext>
+            </a:extLst>
+          </p:cNvPr>
+          <p:cNvSpPr>
+            <a:spLocks xmlns:a="http://schemas.openxmlformats.org/drawingml/2006/main" noGrp="1"/>
+          </p:cNvSpPr>
+          <p:nvPr/>
+        </p:nvSpPr>
+        <p:spPr>
+          <a:xfrm xmlns:a="http://schemas.openxmlformats.org/drawingml/2006/main">
+            <a:off x="0" y="4572000"/>
+            <a:ext cx="38100" cy="2286000"/>
+          </a:xfrm>
+          <a:prstGeom xmlns:a="http://schemas.openxmlformats.org/drawingml/2006/main" prst="rect">
+            <a:avLst/>
+          </a:prstGeom>
+          <a:solidFill xmlns:a="http://schemas.openxmlformats.org/drawingml/2006/main">
+            <a:srgbClr val="5EEAD4"/>
+          </a:solidFill>
+        </p:spPr>
+      </p:sp>
+      <p:sp>
+        <p:nvSpPr>
+          <p:cNvPr id="5" name="eyebrow-6">
+            <a:extLst xmlns:a="http://schemas.openxmlformats.org/drawingml/2006/main">
+              <a:ext uri="{FF2B5EF4-FFF2-40B4-BE49-F238E27FC236}">
+                <a16:creationId xmlns:a16="http://schemas.microsoft.com/office/drawing/2014/main" id="{385DBC7B-E83A-468F-B4A7-14C10DD10681}"/>
               </a:ext>
             </a:extLst>
           </p:cNvPr>
@@ -8091,25 +9395,25 @@
             <a:pPr algn="l">
               <a:defRPr sz="1050" b="1">
                 <a:solidFill>
-                  <a:srgbClr val="6845C6"/>
-                </a:solidFill>
-                <a:latin typeface="Arial"/>
-                <a:ea typeface="Arial"/>
-                <a:cs typeface="Arial"/>
-              </a:defRPr>
-            </a:pPr>
-            <a:r>
-              <a:t>DECISION PRODUCTS</a:t>
-            </a:r>
-          </a:p>
-        </p:txBody>
-      </p:sp>
-      <p:sp>
-        <p:nvSpPr>
-          <p:cNvPr id="3" name="title-6">
-            <a:extLst xmlns:a="http://schemas.openxmlformats.org/drawingml/2006/main">
-              <a:ext uri="{FF2B5EF4-FFF2-40B4-BE49-F238E27FC236}">
-                <a16:creationId xmlns:a16="http://schemas.microsoft.com/office/drawing/2014/main" id="{EE354381-17FA-4643-A7E6-3AF3F5479E7B}"/>
+                  <a:srgbClr val="FF7A59"/>
+                </a:solidFill>
+                <a:latin typeface="Consolas"/>
+                <a:ea typeface="Consolas"/>
+                <a:cs typeface="Consolas"/>
+              </a:defRPr>
+            </a:pPr>
+            <a:r>
+              <a:t>~/ DECISION PRODUCTS</a:t>
+            </a:r>
+          </a:p>
+        </p:txBody>
+      </p:sp>
+      <p:sp>
+        <p:nvSpPr>
+          <p:cNvPr id="6" name="title-6">
+            <a:extLst xmlns:a="http://schemas.openxmlformats.org/drawingml/2006/main">
+              <a:ext uri="{FF2B5EF4-FFF2-40B4-BE49-F238E27FC236}">
+                <a16:creationId xmlns:a16="http://schemas.microsoft.com/office/drawing/2014/main" id="{851E0DAA-4008-4E4D-A8B8-41A73E6F8D1B}"/>
               </a:ext>
             </a:extLst>
           </p:cNvPr>
@@ -8136,11 +9440,11 @@
             <a:pPr algn="l">
               <a:defRPr sz="3225" b="1">
                 <a:solidFill>
-                  <a:srgbClr val="180D20"/>
-                </a:solidFill>
-                <a:latin typeface="Arial"/>
-                <a:ea typeface="Arial"/>
-                <a:cs typeface="Arial"/>
+                  <a:srgbClr val="FFF7ED"/>
+                </a:solidFill>
+                <a:latin typeface="Aptos"/>
+                <a:ea typeface="Aptos"/>
+                <a:cs typeface="Aptos"/>
               </a:defRPr>
             </a:pPr>
             <a:r>
@@ -8151,10 +9455,10 @@
       </p:sp>
       <p:sp>
         <p:nvSpPr>
-          <p:cNvPr id="4" name="planner-frame">
-            <a:extLst xmlns:a="http://schemas.openxmlformats.org/drawingml/2006/main">
-              <a:ext uri="{FF2B5EF4-FFF2-40B4-BE49-F238E27FC236}">
-                <a16:creationId xmlns:a16="http://schemas.microsoft.com/office/drawing/2014/main" id="{11D0E4DC-19EE-498C-94A7-0FB423A8BF5F}"/>
+          <p:cNvPr id="7" name="planner-frame">
+            <a:extLst xmlns:a="http://schemas.openxmlformats.org/drawingml/2006/main">
+              <a:ext uri="{FF2B5EF4-FFF2-40B4-BE49-F238E27FC236}">
+                <a16:creationId xmlns:a16="http://schemas.microsoft.com/office/drawing/2014/main" id="{1CFFA421-B337-4050-8BBC-2C8B74D2657B}"/>
               </a:ext>
             </a:extLst>
           </p:cNvPr>
@@ -8174,16 +9478,16 @@
             </a:avLst>
           </a:prstGeom>
           <a:solidFill xmlns:a="http://schemas.openxmlformats.org/drawingml/2006/main">
-            <a:srgbClr val="FBF7EF"/>
-          </a:solidFill>
-        </p:spPr>
-      </p:sp>
-      <p:sp>
-        <p:nvSpPr>
-          <p:cNvPr id="5" name="snpmb-frame">
-            <a:extLst xmlns:a="http://schemas.openxmlformats.org/drawingml/2006/main">
-              <a:ext uri="{FF2B5EF4-FFF2-40B4-BE49-F238E27FC236}">
-                <a16:creationId xmlns:a16="http://schemas.microsoft.com/office/drawing/2014/main" id="{FEDE345A-4B00-47EB-81EC-40CCB0D32B37}"/>
+            <a:srgbClr val="211512"/>
+          </a:solidFill>
+        </p:spPr>
+      </p:sp>
+      <p:sp>
+        <p:nvSpPr>
+          <p:cNvPr id="8" name="snpmb-frame">
+            <a:extLst xmlns:a="http://schemas.openxmlformats.org/drawingml/2006/main">
+              <a:ext uri="{FF2B5EF4-FFF2-40B4-BE49-F238E27FC236}">
+                <a16:creationId xmlns:a16="http://schemas.microsoft.com/office/drawing/2014/main" id="{0E739643-2DB8-48FA-A962-AAC74F3456C9}"/>
               </a:ext>
             </a:extLst>
           </p:cNvPr>
@@ -8203,16 +9507,16 @@
             </a:avLst>
           </a:prstGeom>
           <a:solidFill xmlns:a="http://schemas.openxmlformats.org/drawingml/2006/main">
-            <a:srgbClr val="FBF7EF"/>
-          </a:solidFill>
-        </p:spPr>
-      </p:sp>
-      <p:sp>
-        <p:nvSpPr>
-          <p:cNvPr id="6" name="planner-title">
-            <a:extLst xmlns:a="http://schemas.openxmlformats.org/drawingml/2006/main">
-              <a:ext uri="{FF2B5EF4-FFF2-40B4-BE49-F238E27FC236}">
-                <a16:creationId xmlns:a16="http://schemas.microsoft.com/office/drawing/2014/main" id="{FEB83952-72B9-42EE-B416-A3B023016088}"/>
+            <a:srgbClr val="211512"/>
+          </a:solidFill>
+        </p:spPr>
+      </p:sp>
+      <p:sp>
+        <p:nvSpPr>
+          <p:cNvPr id="9" name="planner-title">
+            <a:extLst xmlns:a="http://schemas.openxmlformats.org/drawingml/2006/main">
+              <a:ext uri="{FF2B5EF4-FFF2-40B4-BE49-F238E27FC236}">
+                <a16:creationId xmlns:a16="http://schemas.microsoft.com/office/drawing/2014/main" id="{16FB909E-5797-453E-BCB6-6E9C8D94962A}"/>
               </a:ext>
             </a:extLst>
           </p:cNvPr>
@@ -8239,11 +9543,11 @@
             <a:pPr algn="l">
               <a:defRPr sz="1875" b="1">
                 <a:solidFill>
-                  <a:srgbClr val="180D20"/>
-                </a:solidFill>
-                <a:latin typeface="Arial"/>
-                <a:ea typeface="Arial"/>
-                <a:cs typeface="Arial"/>
+                  <a:srgbClr val="FFF7ED"/>
+                </a:solidFill>
+                <a:latin typeface="Aptos"/>
+                <a:ea typeface="Aptos"/>
+                <a:cs typeface="Aptos"/>
               </a:defRPr>
             </a:pPr>
             <a:r>
@@ -8254,10 +9558,10 @@
       </p:sp>
       <p:sp>
         <p:nvSpPr>
-          <p:cNvPr id="7" name="planner-body">
-            <a:extLst xmlns:a="http://schemas.openxmlformats.org/drawingml/2006/main">
-              <a:ext uri="{FF2B5EF4-FFF2-40B4-BE49-F238E27FC236}">
-                <a16:creationId xmlns:a16="http://schemas.microsoft.com/office/drawing/2014/main" id="{56B999EB-03D5-47ED-8564-92D442E71F0D}"/>
+          <p:cNvPr id="10" name="planner-body">
+            <a:extLst xmlns:a="http://schemas.openxmlformats.org/drawingml/2006/main">
+              <a:ext uri="{FF2B5EF4-FFF2-40B4-BE49-F238E27FC236}">
+                <a16:creationId xmlns:a16="http://schemas.microsoft.com/office/drawing/2014/main" id="{56630C92-70EF-4DE1-A168-BB4407300C65}"/>
               </a:ext>
             </a:extLst>
           </p:cNvPr>
@@ -8284,11 +9588,11 @@
             <a:pPr algn="l">
               <a:defRPr sz="1275" b="0">
                 <a:solidFill>
-                  <a:srgbClr val="70647A"/>
-                </a:solidFill>
-                <a:latin typeface="Arial"/>
-                <a:ea typeface="Arial"/>
-                <a:cs typeface="Arial"/>
+                  <a:srgbClr val="B9A59B"/>
+                </a:solidFill>
+                <a:latin typeface="Aptos"/>
+                <a:ea typeface="Aptos"/>
+                <a:cs typeface="Aptos"/>
               </a:defRPr>
             </a:pPr>
             <a:r>
@@ -8299,10 +9603,10 @@
       </p:sp>
       <p:sp>
         <p:nvSpPr>
-          <p:cNvPr id="8" name="planner-tech-bg">
-            <a:extLst xmlns:a="http://schemas.openxmlformats.org/drawingml/2006/main">
-              <a:ext uri="{FF2B5EF4-FFF2-40B4-BE49-F238E27FC236}">
-                <a16:creationId xmlns:a16="http://schemas.microsoft.com/office/drawing/2014/main" id="{196D4310-8937-4668-9C0B-2AABE110D4B1}"/>
+          <p:cNvPr id="11" name="planner-tech-bg">
+            <a:extLst xmlns:a="http://schemas.openxmlformats.org/drawingml/2006/main">
+              <a:ext uri="{FF2B5EF4-FFF2-40B4-BE49-F238E27FC236}">
+                <a16:creationId xmlns:a16="http://schemas.microsoft.com/office/drawing/2014/main" id="{8C372B7B-CEC7-4CFC-9512-481AEA7EEE4B}"/>
               </a:ext>
             </a:extLst>
           </p:cNvPr>
@@ -8322,16 +9626,16 @@
             </a:avLst>
           </a:prstGeom>
           <a:solidFill xmlns:a="http://schemas.openxmlformats.org/drawingml/2006/main">
-            <a:srgbClr val="F1EBFF"/>
-          </a:solidFill>
-        </p:spPr>
-      </p:sp>
-      <p:sp>
-        <p:nvSpPr>
-          <p:cNvPr id="9" name="planner-tech-text">
-            <a:extLst xmlns:a="http://schemas.openxmlformats.org/drawingml/2006/main">
-              <a:ext uri="{FF2B5EF4-FFF2-40B4-BE49-F238E27FC236}">
-                <a16:creationId xmlns:a16="http://schemas.microsoft.com/office/drawing/2014/main" id="{61A3A46B-D866-401A-822F-E55A265D92AF}"/>
+            <a:srgbClr val="2A1A17"/>
+          </a:solidFill>
+        </p:spPr>
+      </p:sp>
+      <p:sp>
+        <p:nvSpPr>
+          <p:cNvPr id="12" name="planner-tech-text">
+            <a:extLst xmlns:a="http://schemas.openxmlformats.org/drawingml/2006/main">
+              <a:ext uri="{FF2B5EF4-FFF2-40B4-BE49-F238E27FC236}">
+                <a16:creationId xmlns:a16="http://schemas.microsoft.com/office/drawing/2014/main" id="{DCA9BAF5-F6CA-4F20-A5DC-D656DF4B3621}"/>
               </a:ext>
             </a:extLst>
           </p:cNvPr>
@@ -8358,11 +9662,11 @@
             <a:pPr algn="ctr">
               <a:defRPr sz="1125" b="1">
                 <a:solidFill>
-                  <a:srgbClr val="6845C6"/>
-                </a:solidFill>
-                <a:latin typeface="Arial"/>
-                <a:ea typeface="Arial"/>
-                <a:cs typeface="Arial"/>
+                  <a:srgbClr val="FF7A59"/>
+                </a:solidFill>
+                <a:latin typeface="Aptos"/>
+                <a:ea typeface="Aptos"/>
+                <a:cs typeface="Aptos"/>
               </a:defRPr>
             </a:pPr>
             <a:r>
@@ -8373,10 +9677,10 @@
       </p:sp>
       <p:sp>
         <p:nvSpPr>
-          <p:cNvPr id="10" name="snpmb-title">
-            <a:extLst xmlns:a="http://schemas.openxmlformats.org/drawingml/2006/main">
-              <a:ext uri="{FF2B5EF4-FFF2-40B4-BE49-F238E27FC236}">
-                <a16:creationId xmlns:a16="http://schemas.microsoft.com/office/drawing/2014/main" id="{9782537C-6F78-4FED-8108-A51CBAE6754D}"/>
+          <p:cNvPr id="13" name="snpmb-title">
+            <a:extLst xmlns:a="http://schemas.openxmlformats.org/drawingml/2006/main">
+              <a:ext uri="{FF2B5EF4-FFF2-40B4-BE49-F238E27FC236}">
+                <a16:creationId xmlns:a16="http://schemas.microsoft.com/office/drawing/2014/main" id="{17B2C024-2ADA-4B8B-A623-BBFFF2C9173E}"/>
               </a:ext>
             </a:extLst>
           </p:cNvPr>
@@ -8403,11 +9707,11 @@
             <a:pPr algn="l">
               <a:defRPr sz="1875" b="1">
                 <a:solidFill>
-                  <a:srgbClr val="180D20"/>
-                </a:solidFill>
-                <a:latin typeface="Arial"/>
-                <a:ea typeface="Arial"/>
-                <a:cs typeface="Arial"/>
+                  <a:srgbClr val="FFF7ED"/>
+                </a:solidFill>
+                <a:latin typeface="Aptos"/>
+                <a:ea typeface="Aptos"/>
+                <a:cs typeface="Aptos"/>
               </a:defRPr>
             </a:pPr>
             <a:r>
@@ -8418,10 +9722,10 @@
       </p:sp>
       <p:sp>
         <p:nvSpPr>
-          <p:cNvPr id="11" name="snpmb-body">
-            <a:extLst xmlns:a="http://schemas.openxmlformats.org/drawingml/2006/main">
-              <a:ext uri="{FF2B5EF4-FFF2-40B4-BE49-F238E27FC236}">
-                <a16:creationId xmlns:a16="http://schemas.microsoft.com/office/drawing/2014/main" id="{550DD1C0-2E87-4F8A-AAFD-9EDB6DE59F04}"/>
+          <p:cNvPr id="14" name="snpmb-body">
+            <a:extLst xmlns:a="http://schemas.openxmlformats.org/drawingml/2006/main">
+              <a:ext uri="{FF2B5EF4-FFF2-40B4-BE49-F238E27FC236}">
+                <a16:creationId xmlns:a16="http://schemas.microsoft.com/office/drawing/2014/main" id="{C8D5A4A5-3C84-4F65-B653-891EF723DCBB}"/>
               </a:ext>
             </a:extLst>
           </p:cNvPr>
@@ -8448,11 +9752,11 @@
             <a:pPr algn="l">
               <a:defRPr sz="1275" b="0">
                 <a:solidFill>
-                  <a:srgbClr val="70647A"/>
-                </a:solidFill>
-                <a:latin typeface="Arial"/>
-                <a:ea typeface="Arial"/>
-                <a:cs typeface="Arial"/>
+                  <a:srgbClr val="B9A59B"/>
+                </a:solidFill>
+                <a:latin typeface="Aptos"/>
+                <a:ea typeface="Aptos"/>
+                <a:cs typeface="Aptos"/>
               </a:defRPr>
             </a:pPr>
             <a:r>
@@ -8463,10 +9767,10 @@
       </p:sp>
       <p:sp>
         <p:nvSpPr>
-          <p:cNvPr id="12" name="snpmb-tech-bg">
-            <a:extLst xmlns:a="http://schemas.openxmlformats.org/drawingml/2006/main">
-              <a:ext uri="{FF2B5EF4-FFF2-40B4-BE49-F238E27FC236}">
-                <a16:creationId xmlns:a16="http://schemas.microsoft.com/office/drawing/2014/main" id="{4CA378BF-2CBA-44C5-A13F-DF08664AF480}"/>
+          <p:cNvPr id="15" name="snpmb-tech-bg">
+            <a:extLst xmlns:a="http://schemas.openxmlformats.org/drawingml/2006/main">
+              <a:ext uri="{FF2B5EF4-FFF2-40B4-BE49-F238E27FC236}">
+                <a16:creationId xmlns:a16="http://schemas.microsoft.com/office/drawing/2014/main" id="{6BB0BF5E-43E6-4556-B27A-BA2F71C27A57}"/>
               </a:ext>
             </a:extLst>
           </p:cNvPr>
@@ -8486,16 +9790,16 @@
             </a:avLst>
           </a:prstGeom>
           <a:solidFill xmlns:a="http://schemas.openxmlformats.org/drawingml/2006/main">
-            <a:srgbClr val="F1EBFF"/>
-          </a:solidFill>
-        </p:spPr>
-      </p:sp>
-      <p:sp>
-        <p:nvSpPr>
-          <p:cNvPr id="13" name="snpmb-tech-text">
-            <a:extLst xmlns:a="http://schemas.openxmlformats.org/drawingml/2006/main">
-              <a:ext uri="{FF2B5EF4-FFF2-40B4-BE49-F238E27FC236}">
-                <a16:creationId xmlns:a16="http://schemas.microsoft.com/office/drawing/2014/main" id="{C5D570C2-DD63-44E2-A6C4-5730D5109DF9}"/>
+            <a:srgbClr val="2A1A17"/>
+          </a:solidFill>
+        </p:spPr>
+      </p:sp>
+      <p:sp>
+        <p:nvSpPr>
+          <p:cNvPr id="16" name="snpmb-tech-text">
+            <a:extLst xmlns:a="http://schemas.openxmlformats.org/drawingml/2006/main">
+              <a:ext uri="{FF2B5EF4-FFF2-40B4-BE49-F238E27FC236}">
+                <a16:creationId xmlns:a16="http://schemas.microsoft.com/office/drawing/2014/main" id="{D80B30DD-0318-4B41-B2DD-DEEDCB0416AD}"/>
               </a:ext>
             </a:extLst>
           </p:cNvPr>
@@ -8522,11 +9826,11 @@
             <a:pPr algn="ctr">
               <a:defRPr sz="1125" b="1">
                 <a:solidFill>
-                  <a:srgbClr val="6845C6"/>
-                </a:solidFill>
-                <a:latin typeface="Arial"/>
-                <a:ea typeface="Arial"/>
-                <a:cs typeface="Arial"/>
+                  <a:srgbClr val="FF7A59"/>
+                </a:solidFill>
+                <a:latin typeface="Aptos"/>
+                <a:ea typeface="Aptos"/>
+                <a:cs typeface="Aptos"/>
               </a:defRPr>
             </a:pPr>
             <a:r>
@@ -8537,10 +9841,10 @@
       </p:sp>
       <p:sp>
         <p:nvSpPr>
-          <p:cNvPr id="14" name="footer-line-6">
-            <a:extLst xmlns:a="http://schemas.openxmlformats.org/drawingml/2006/main">
-              <a:ext uri="{FF2B5EF4-FFF2-40B4-BE49-F238E27FC236}">
-                <a16:creationId xmlns:a16="http://schemas.microsoft.com/office/drawing/2014/main" id="{24999EDD-543E-421F-98D8-FAC695EF7672}"/>
+          <p:cNvPr id="17" name="footer-line-gold-6">
+            <a:extLst xmlns:a="http://schemas.openxmlformats.org/drawingml/2006/main">
+              <a:ext uri="{FF2B5EF4-FFF2-40B4-BE49-F238E27FC236}">
+                <a16:creationId xmlns:a16="http://schemas.microsoft.com/office/drawing/2014/main" id="{D8F6DABF-1046-4E3E-9F58-F2DDD62D9068}"/>
               </a:ext>
             </a:extLst>
           </p:cNvPr>
@@ -8552,22 +9856,76 @@
         <p:spPr>
           <a:xfrm xmlns:a="http://schemas.openxmlformats.org/drawingml/2006/main">
             <a:off x="400050" y="6429375"/>
-            <a:ext cx="10553700" cy="19050"/>
-          </a:xfrm>
-          <a:prstGeom xmlns:a="http://schemas.openxmlformats.org/drawingml/2006/main" prst="rect">
-            <a:avLst/>
-          </a:prstGeom>
-          <a:solidFill xmlns:a="http://schemas.openxmlformats.org/drawingml/2006/main">
-            <a:srgbClr val="DED4E6"/>
-          </a:solidFill>
-        </p:spPr>
-      </p:sp>
-      <p:sp>
-        <p:nvSpPr>
-          <p:cNvPr id="15" name="footer-name-6">
-            <a:extLst xmlns:a="http://schemas.openxmlformats.org/drawingml/2006/main">
-              <a:ext uri="{FF2B5EF4-FFF2-40B4-BE49-F238E27FC236}">
-                <a16:creationId xmlns:a16="http://schemas.microsoft.com/office/drawing/2014/main" id="{5E4A7E80-12C0-4610-B06C-4D2EF0FDCC14}"/>
+            <a:ext cx="5276850" cy="19050"/>
+          </a:xfrm>
+          <a:prstGeom xmlns:a="http://schemas.openxmlformats.org/drawingml/2006/main" prst="rect">
+            <a:avLst/>
+          </a:prstGeom>
+          <a:solidFill xmlns:a="http://schemas.openxmlformats.org/drawingml/2006/main">
+            <a:srgbClr val="F6C453"/>
+          </a:solidFill>
+        </p:spPr>
+      </p:sp>
+      <p:sp>
+        <p:nvSpPr>
+          <p:cNvPr id="18" name="footer-line-coral-6">
+            <a:extLst xmlns:a="http://schemas.openxmlformats.org/drawingml/2006/main">
+              <a:ext uri="{FF2B5EF4-FFF2-40B4-BE49-F238E27FC236}">
+                <a16:creationId xmlns:a16="http://schemas.microsoft.com/office/drawing/2014/main" id="{24D46A86-271B-42FA-855A-1726043D2FE9}"/>
+              </a:ext>
+            </a:extLst>
+          </p:cNvPr>
+          <p:cNvSpPr>
+            <a:spLocks xmlns:a="http://schemas.openxmlformats.org/drawingml/2006/main" noGrp="1"/>
+          </p:cNvSpPr>
+          <p:nvPr/>
+        </p:nvSpPr>
+        <p:spPr>
+          <a:xfrm xmlns:a="http://schemas.openxmlformats.org/drawingml/2006/main">
+            <a:off x="5676900" y="6429375"/>
+            <a:ext cx="2638425" cy="19050"/>
+          </a:xfrm>
+          <a:prstGeom xmlns:a="http://schemas.openxmlformats.org/drawingml/2006/main" prst="rect">
+            <a:avLst/>
+          </a:prstGeom>
+          <a:solidFill xmlns:a="http://schemas.openxmlformats.org/drawingml/2006/main">
+            <a:srgbClr val="FF7A59"/>
+          </a:solidFill>
+        </p:spPr>
+      </p:sp>
+      <p:sp>
+        <p:nvSpPr>
+          <p:cNvPr id="19" name="footer-line-teal-6">
+            <a:extLst xmlns:a="http://schemas.openxmlformats.org/drawingml/2006/main">
+              <a:ext uri="{FF2B5EF4-FFF2-40B4-BE49-F238E27FC236}">
+                <a16:creationId xmlns:a16="http://schemas.microsoft.com/office/drawing/2014/main" id="{B40D110E-10E4-43EA-BE08-D29F6CC2B312}"/>
+              </a:ext>
+            </a:extLst>
+          </p:cNvPr>
+          <p:cNvSpPr>
+            <a:spLocks xmlns:a="http://schemas.openxmlformats.org/drawingml/2006/main" noGrp="1"/>
+          </p:cNvSpPr>
+          <p:nvPr/>
+        </p:nvSpPr>
+        <p:spPr>
+          <a:xfrm xmlns:a="http://schemas.openxmlformats.org/drawingml/2006/main">
+            <a:off x="8315325" y="6429375"/>
+            <a:ext cx="2638425" cy="19050"/>
+          </a:xfrm>
+          <a:prstGeom xmlns:a="http://schemas.openxmlformats.org/drawingml/2006/main" prst="rect">
+            <a:avLst/>
+          </a:prstGeom>
+          <a:solidFill xmlns:a="http://schemas.openxmlformats.org/drawingml/2006/main">
+            <a:srgbClr val="5EEAD4"/>
+          </a:solidFill>
+        </p:spPr>
+      </p:sp>
+      <p:sp>
+        <p:nvSpPr>
+          <p:cNvPr id="20" name="footer-name-6">
+            <a:extLst xmlns:a="http://schemas.openxmlformats.org/drawingml/2006/main">
+              <a:ext uri="{FF2B5EF4-FFF2-40B4-BE49-F238E27FC236}">
+                <a16:creationId xmlns:a16="http://schemas.microsoft.com/office/drawing/2014/main" id="{64438299-E012-423D-9C41-3563138BB6B6}"/>
               </a:ext>
             </a:extLst>
           </p:cNvPr>
@@ -8594,25 +9952,25 @@
             <a:pPr algn="l">
               <a:defRPr sz="825" b="1">
                 <a:solidFill>
-                  <a:srgbClr val="70647A"/>
-                </a:solidFill>
-                <a:latin typeface="Arial"/>
-                <a:ea typeface="Arial"/>
-                <a:cs typeface="Arial"/>
-              </a:defRPr>
-            </a:pPr>
-            <a:r>
-              <a:t>MUHAMMAD ALI AKBAR AL-QAHRI  /  DATA PORTFOLIO</a:t>
-            </a:r>
-          </a:p>
-        </p:txBody>
-      </p:sp>
-      <p:sp>
-        <p:nvSpPr>
-          <p:cNvPr id="16" name="footer-page-6">
-            <a:extLst xmlns:a="http://schemas.openxmlformats.org/drawingml/2006/main">
-              <a:ext uri="{FF2B5EF4-FFF2-40B4-BE49-F238E27FC236}">
-                <a16:creationId xmlns:a16="http://schemas.microsoft.com/office/drawing/2014/main" id="{46EDDEAB-CDAC-41FF-9799-E1671C778B78}"/>
+                  <a:srgbClr val="B9A59B"/>
+                </a:solidFill>
+                <a:latin typeface="Consolas"/>
+                <a:ea typeface="Consolas"/>
+                <a:cs typeface="Consolas"/>
+              </a:defRPr>
+            </a:pPr>
+            <a:r>
+              <a:t>~/ali_  /  DATA INTELLIGENCE PORTFOLIO</a:t>
+            </a:r>
+          </a:p>
+        </p:txBody>
+      </p:sp>
+      <p:sp>
+        <p:nvSpPr>
+          <p:cNvPr id="21" name="footer-page-6">
+            <a:extLst xmlns:a="http://schemas.openxmlformats.org/drawingml/2006/main">
+              <a:ext uri="{FF2B5EF4-FFF2-40B4-BE49-F238E27FC236}">
+                <a16:creationId xmlns:a16="http://schemas.microsoft.com/office/drawing/2014/main" id="{D95EC32B-06EE-4717-B153-629ED4993637}"/>
               </a:ext>
             </a:extLst>
           </p:cNvPr>
@@ -8639,11 +9997,11 @@
             <a:pPr algn="r">
               <a:defRPr sz="900" b="1">
                 <a:solidFill>
-                  <a:srgbClr val="70647A"/>
-                </a:solidFill>
-                <a:latin typeface="Arial"/>
-                <a:ea typeface="Arial"/>
-                <a:cs typeface="Arial"/>
+                  <a:srgbClr val="F6C453"/>
+                </a:solidFill>
+                <a:latin typeface="Consolas"/>
+                <a:ea typeface="Consolas"/>
+                <a:cs typeface="Consolas"/>
               </a:defRPr>
             </a:pPr>
             <a:r>
@@ -8654,14 +10012,14 @@
       </p:sp>
       <p:pic>
         <p:nvPicPr>
-          <p:cNvPr id="35" name=""/>
+          <p:cNvPr id="45" name=""/>
           <p:cNvPicPr>
             <a:picLocks xmlns:a="http://schemas.openxmlformats.org/drawingml/2006/main" noChangeAspect="1"/>
           </p:cNvPicPr>
           <p:nvPr/>
         </p:nvPicPr>
         <p:blipFill>
-          <a:blip xmlns:r="http://schemas.openxmlformats.org/officeDocument/2006/relationships" xmlns:a="http://schemas.openxmlformats.org/drawingml/2006/main" r:embed="R59e696ef98f74b0f"/>
+          <a:blip xmlns:r="http://schemas.openxmlformats.org/officeDocument/2006/relationships" xmlns:a="http://schemas.openxmlformats.org/drawingml/2006/main" r:embed="R4a07ccc6be814d15"/>
           <a:srcRect xmlns:a="http://schemas.openxmlformats.org/drawingml/2006/main" l="0" t="5719" r="0" b="5719"/>
           <a:stretch xmlns:a="http://schemas.openxmlformats.org/drawingml/2006/main">
             <a:fillRect l="0" t="0" r="0" b="0"/>
@@ -8679,14 +10037,14 @@
       </p:pic>
       <p:pic>
         <p:nvPicPr>
-          <p:cNvPr id="36" name=""/>
+          <p:cNvPr id="46" name=""/>
           <p:cNvPicPr>
             <a:picLocks xmlns:a="http://schemas.openxmlformats.org/drawingml/2006/main" noChangeAspect="1"/>
           </p:cNvPicPr>
           <p:nvPr/>
         </p:nvPicPr>
         <p:blipFill>
-          <a:blip xmlns:r="http://schemas.openxmlformats.org/officeDocument/2006/relationships" xmlns:a="http://schemas.openxmlformats.org/drawingml/2006/main" r:embed="R9371c9e41ec5455e"/>
+          <a:blip xmlns:r="http://schemas.openxmlformats.org/officeDocument/2006/relationships" xmlns:a="http://schemas.openxmlformats.org/drawingml/2006/main" r:embed="R51643b1c1d3146a7"/>
           <a:srcRect xmlns:a="http://schemas.openxmlformats.org/drawingml/2006/main" l="0" t="5719" r="0" b="5719"/>
           <a:stretch xmlns:a="http://schemas.openxmlformats.org/drawingml/2006/main">
             <a:fillRect l="0" t="0" r="0" b="0"/>
@@ -8705,7 +10063,7 @@
     </p:spTree>
     <p:extLst>
       <p:ext uri="{BB962C8B-B14F-4D97-AF65-F5344CB8AC3E}">
-        <p14:creationId xmlns:p14="http://schemas.microsoft.com/office/powerpoint/2010/main" val="513183152"/>
+        <p14:creationId xmlns:p14="http://schemas.microsoft.com/office/powerpoint/2010/main" val="2101306185"/>
       </p:ext>
     </p:extLst>
   </p:cSld>
@@ -8726,10 +10084,10 @@
       </p:grpSpPr>
       <p:sp>
         <p:nvSpPr>
-          <p:cNvPr id="18" name="07-market-products-canvas">
-            <a:extLst xmlns:a="http://schemas.openxmlformats.org/drawingml/2006/main">
-              <a:ext uri="{FF2B5EF4-FFF2-40B4-BE49-F238E27FC236}">
-                <a16:creationId xmlns:a16="http://schemas.microsoft.com/office/drawing/2014/main" id="{84538341-7F73-4951-9F6B-617120AB37E0}"/>
+          <p:cNvPr id="23" name="07-market-products-canvas">
+            <a:extLst xmlns:a="http://schemas.openxmlformats.org/drawingml/2006/main">
+              <a:ext uri="{FF2B5EF4-FFF2-40B4-BE49-F238E27FC236}">
+                <a16:creationId xmlns:a16="http://schemas.microsoft.com/office/drawing/2014/main" id="{1C9D4A0B-6586-420B-A4E0-EC8082F6B050}"/>
               </a:ext>
             </a:extLst>
           </p:cNvPr>
@@ -8747,16 +10105,97 @@
             <a:avLst/>
           </a:prstGeom>
           <a:solidFill xmlns:a="http://schemas.openxmlformats.org/drawingml/2006/main">
-            <a:srgbClr val="FFFFFF"/>
-          </a:solidFill>
-        </p:spPr>
-      </p:sp>
-      <p:sp>
-        <p:nvSpPr>
-          <p:cNvPr id="2" name="eyebrow-7">
-            <a:extLst xmlns:a="http://schemas.openxmlformats.org/drawingml/2006/main">
-              <a:ext uri="{FF2B5EF4-FFF2-40B4-BE49-F238E27FC236}">
-                <a16:creationId xmlns:a16="http://schemas.microsoft.com/office/drawing/2014/main" id="{1A738EB2-0730-4CBE-8E90-F369EEA0F055}"/>
+            <a:srgbClr val="120B0A"/>
+          </a:solidFill>
+        </p:spPr>
+      </p:sp>
+      <p:sp>
+        <p:nvSpPr>
+          <p:cNvPr id="2" name="07-market-products-edge-gold">
+            <a:extLst xmlns:a="http://schemas.openxmlformats.org/drawingml/2006/main">
+              <a:ext uri="{FF2B5EF4-FFF2-40B4-BE49-F238E27FC236}">
+                <a16:creationId xmlns:a16="http://schemas.microsoft.com/office/drawing/2014/main" id="{0D4A51DC-894D-46EB-9547-364DEA58C04F}"/>
+              </a:ext>
+            </a:extLst>
+          </p:cNvPr>
+          <p:cNvSpPr>
+            <a:spLocks xmlns:a="http://schemas.openxmlformats.org/drawingml/2006/main" noGrp="1"/>
+          </p:cNvSpPr>
+          <p:nvPr/>
+        </p:nvSpPr>
+        <p:spPr>
+          <a:xfrm xmlns:a="http://schemas.openxmlformats.org/drawingml/2006/main">
+            <a:off x="0" y="0"/>
+            <a:ext cx="38100" cy="2286000"/>
+          </a:xfrm>
+          <a:prstGeom xmlns:a="http://schemas.openxmlformats.org/drawingml/2006/main" prst="rect">
+            <a:avLst/>
+          </a:prstGeom>
+          <a:solidFill xmlns:a="http://schemas.openxmlformats.org/drawingml/2006/main">
+            <a:srgbClr val="F6C453"/>
+          </a:solidFill>
+        </p:spPr>
+      </p:sp>
+      <p:sp>
+        <p:nvSpPr>
+          <p:cNvPr id="3" name="07-market-products-edge-coral">
+            <a:extLst xmlns:a="http://schemas.openxmlformats.org/drawingml/2006/main">
+              <a:ext uri="{FF2B5EF4-FFF2-40B4-BE49-F238E27FC236}">
+                <a16:creationId xmlns:a16="http://schemas.microsoft.com/office/drawing/2014/main" id="{DD16F761-5DB2-43AD-B20D-A0BAE9B6073A}"/>
+              </a:ext>
+            </a:extLst>
+          </p:cNvPr>
+          <p:cNvSpPr>
+            <a:spLocks xmlns:a="http://schemas.openxmlformats.org/drawingml/2006/main" noGrp="1"/>
+          </p:cNvSpPr>
+          <p:nvPr/>
+        </p:nvSpPr>
+        <p:spPr>
+          <a:xfrm xmlns:a="http://schemas.openxmlformats.org/drawingml/2006/main">
+            <a:off x="0" y="2286000"/>
+            <a:ext cx="38100" cy="2286000"/>
+          </a:xfrm>
+          <a:prstGeom xmlns:a="http://schemas.openxmlformats.org/drawingml/2006/main" prst="rect">
+            <a:avLst/>
+          </a:prstGeom>
+          <a:solidFill xmlns:a="http://schemas.openxmlformats.org/drawingml/2006/main">
+            <a:srgbClr val="FF7A59"/>
+          </a:solidFill>
+        </p:spPr>
+      </p:sp>
+      <p:sp>
+        <p:nvSpPr>
+          <p:cNvPr id="4" name="07-market-products-edge-teal">
+            <a:extLst xmlns:a="http://schemas.openxmlformats.org/drawingml/2006/main">
+              <a:ext uri="{FF2B5EF4-FFF2-40B4-BE49-F238E27FC236}">
+                <a16:creationId xmlns:a16="http://schemas.microsoft.com/office/drawing/2014/main" id="{3A13D7F8-7544-46C8-ACE5-80FCABF01D6E}"/>
+              </a:ext>
+            </a:extLst>
+          </p:cNvPr>
+          <p:cNvSpPr>
+            <a:spLocks xmlns:a="http://schemas.openxmlformats.org/drawingml/2006/main" noGrp="1"/>
+          </p:cNvSpPr>
+          <p:nvPr/>
+        </p:nvSpPr>
+        <p:spPr>
+          <a:xfrm xmlns:a="http://schemas.openxmlformats.org/drawingml/2006/main">
+            <a:off x="0" y="4572000"/>
+            <a:ext cx="38100" cy="2286000"/>
+          </a:xfrm>
+          <a:prstGeom xmlns:a="http://schemas.openxmlformats.org/drawingml/2006/main" prst="rect">
+            <a:avLst/>
+          </a:prstGeom>
+          <a:solidFill xmlns:a="http://schemas.openxmlformats.org/drawingml/2006/main">
+            <a:srgbClr val="5EEAD4"/>
+          </a:solidFill>
+        </p:spPr>
+      </p:sp>
+      <p:sp>
+        <p:nvSpPr>
+          <p:cNvPr id="5" name="eyebrow-7">
+            <a:extLst xmlns:a="http://schemas.openxmlformats.org/drawingml/2006/main">
+              <a:ext uri="{FF2B5EF4-FFF2-40B4-BE49-F238E27FC236}">
+                <a16:creationId xmlns:a16="http://schemas.microsoft.com/office/drawing/2014/main" id="{48B8C377-D12C-4790-87D7-5F1E8B56A8D7}"/>
               </a:ext>
             </a:extLst>
           </p:cNvPr>
@@ -8783,25 +10222,25 @@
             <a:pPr algn="l">
               <a:defRPr sz="1050" b="1">
                 <a:solidFill>
-                  <a:srgbClr val="6845C6"/>
-                </a:solidFill>
-                <a:latin typeface="Arial"/>
-                <a:ea typeface="Arial"/>
-                <a:cs typeface="Arial"/>
-              </a:defRPr>
-            </a:pPr>
-            <a:r>
-              <a:t>MARKET INTELLIGENCE</a:t>
-            </a:r>
-          </a:p>
-        </p:txBody>
-      </p:sp>
-      <p:sp>
-        <p:nvSpPr>
-          <p:cNvPr id="3" name="title-7">
-            <a:extLst xmlns:a="http://schemas.openxmlformats.org/drawingml/2006/main">
-              <a:ext uri="{FF2B5EF4-FFF2-40B4-BE49-F238E27FC236}">
-                <a16:creationId xmlns:a16="http://schemas.microsoft.com/office/drawing/2014/main" id="{2C099D6D-4269-49F7-B639-E9319E03DAF5}"/>
+                  <a:srgbClr val="FF7A59"/>
+                </a:solidFill>
+                <a:latin typeface="Consolas"/>
+                <a:ea typeface="Consolas"/>
+                <a:cs typeface="Consolas"/>
+              </a:defRPr>
+            </a:pPr>
+            <a:r>
+              <a:t>~/ MARKET INTELLIGENCE</a:t>
+            </a:r>
+          </a:p>
+        </p:txBody>
+      </p:sp>
+      <p:sp>
+        <p:nvSpPr>
+          <p:cNvPr id="6" name="title-7">
+            <a:extLst xmlns:a="http://schemas.openxmlformats.org/drawingml/2006/main">
+              <a:ext uri="{FF2B5EF4-FFF2-40B4-BE49-F238E27FC236}">
+                <a16:creationId xmlns:a16="http://schemas.microsoft.com/office/drawing/2014/main" id="{D4492A3B-3FD1-4424-BCB6-ADCB32D748E7}"/>
               </a:ext>
             </a:extLst>
           </p:cNvPr>
@@ -8828,11 +10267,11 @@
             <a:pPr algn="l">
               <a:defRPr sz="3225" b="1">
                 <a:solidFill>
-                  <a:srgbClr val="180D20"/>
-                </a:solidFill>
-                <a:latin typeface="Arial"/>
-                <a:ea typeface="Arial"/>
-                <a:cs typeface="Arial"/>
+                  <a:srgbClr val="FFF7ED"/>
+                </a:solidFill>
+                <a:latin typeface="Aptos"/>
+                <a:ea typeface="Aptos"/>
+                <a:cs typeface="Aptos"/>
               </a:defRPr>
             </a:pPr>
             <a:r>
@@ -8843,10 +10282,10 @@
       </p:sp>
       <p:sp>
         <p:nvSpPr>
-          <p:cNvPr id="4" name="market-left-panel">
-            <a:extLst xmlns:a="http://schemas.openxmlformats.org/drawingml/2006/main">
-              <a:ext uri="{FF2B5EF4-FFF2-40B4-BE49-F238E27FC236}">
-                <a16:creationId xmlns:a16="http://schemas.microsoft.com/office/drawing/2014/main" id="{800C6341-E9BC-47FD-8E45-E0773FF1E378}"/>
+          <p:cNvPr id="7" name="market-left-panel">
+            <a:extLst xmlns:a="http://schemas.openxmlformats.org/drawingml/2006/main">
+              <a:ext uri="{FF2B5EF4-FFF2-40B4-BE49-F238E27FC236}">
+                <a16:creationId xmlns:a16="http://schemas.microsoft.com/office/drawing/2014/main" id="{3931E498-F1C4-40B7-B1B8-997DB701AB32}"/>
               </a:ext>
             </a:extLst>
           </p:cNvPr>
@@ -8866,16 +10305,16 @@
             </a:avLst>
           </a:prstGeom>
           <a:solidFill xmlns:a="http://schemas.openxmlformats.org/drawingml/2006/main">
-            <a:srgbClr val="FBF7EF"/>
-          </a:solidFill>
-        </p:spPr>
-      </p:sp>
-      <p:sp>
-        <p:nvSpPr>
-          <p:cNvPr id="5" name="market-right-panel">
-            <a:extLst xmlns:a="http://schemas.openxmlformats.org/drawingml/2006/main">
-              <a:ext uri="{FF2B5EF4-FFF2-40B4-BE49-F238E27FC236}">
-                <a16:creationId xmlns:a16="http://schemas.microsoft.com/office/drawing/2014/main" id="{4129E43D-2CA0-4109-A5F2-264545A12D1B}"/>
+            <a:srgbClr val="211512"/>
+          </a:solidFill>
+        </p:spPr>
+      </p:sp>
+      <p:sp>
+        <p:nvSpPr>
+          <p:cNvPr id="8" name="market-right-panel">
+            <a:extLst xmlns:a="http://schemas.openxmlformats.org/drawingml/2006/main">
+              <a:ext uri="{FF2B5EF4-FFF2-40B4-BE49-F238E27FC236}">
+                <a16:creationId xmlns:a16="http://schemas.microsoft.com/office/drawing/2014/main" id="{92BDFADF-6BA2-4BC3-BA9A-8F5F16E3922B}"/>
               </a:ext>
             </a:extLst>
           </p:cNvPr>
@@ -8895,16 +10334,16 @@
             </a:avLst>
           </a:prstGeom>
           <a:solidFill xmlns:a="http://schemas.openxmlformats.org/drawingml/2006/main">
-            <a:srgbClr val="FBF7EF"/>
-          </a:solidFill>
-        </p:spPr>
-      </p:sp>
-      <p:sp>
-        <p:nvSpPr>
-          <p:cNvPr id="6" name="ipo-eyebrow">
-            <a:extLst xmlns:a="http://schemas.openxmlformats.org/drawingml/2006/main">
-              <a:ext uri="{FF2B5EF4-FFF2-40B4-BE49-F238E27FC236}">
-                <a16:creationId xmlns:a16="http://schemas.microsoft.com/office/drawing/2014/main" id="{7317282C-7524-46E5-8A41-7ABC16205E02}"/>
+            <a:srgbClr val="211512"/>
+          </a:solidFill>
+        </p:spPr>
+      </p:sp>
+      <p:sp>
+        <p:nvSpPr>
+          <p:cNvPr id="9" name="ipo-eyebrow">
+            <a:extLst xmlns:a="http://schemas.openxmlformats.org/drawingml/2006/main">
+              <a:ext uri="{FF2B5EF4-FFF2-40B4-BE49-F238E27FC236}">
+                <a16:creationId xmlns:a16="http://schemas.microsoft.com/office/drawing/2014/main" id="{BB91F868-04C4-435C-ABC1-CB98AC8B2DA9}"/>
               </a:ext>
             </a:extLst>
           </p:cNvPr>
@@ -8931,11 +10370,11 @@
             <a:pPr algn="l">
               <a:defRPr sz="1050" b="1">
                 <a:solidFill>
-                  <a:srgbClr val="6845C6"/>
-                </a:solidFill>
-                <a:latin typeface="Arial"/>
-                <a:ea typeface="Arial"/>
-                <a:cs typeface="Arial"/>
+                  <a:srgbClr val="FF7A59"/>
+                </a:solidFill>
+                <a:latin typeface="Aptos"/>
+                <a:ea typeface="Aptos"/>
+                <a:cs typeface="Aptos"/>
               </a:defRPr>
             </a:pPr>
             <a:r>
@@ -8946,10 +10385,10 @@
       </p:sp>
       <p:sp>
         <p:nvSpPr>
-          <p:cNvPr id="7" name="ipo-title">
-            <a:extLst xmlns:a="http://schemas.openxmlformats.org/drawingml/2006/main">
-              <a:ext uri="{FF2B5EF4-FFF2-40B4-BE49-F238E27FC236}">
-                <a16:creationId xmlns:a16="http://schemas.microsoft.com/office/drawing/2014/main" id="{1FEC491C-4EE6-455F-92BA-F39CF673392E}"/>
+          <p:cNvPr id="10" name="ipo-title">
+            <a:extLst xmlns:a="http://schemas.openxmlformats.org/drawingml/2006/main">
+              <a:ext uri="{FF2B5EF4-FFF2-40B4-BE49-F238E27FC236}">
+                <a16:creationId xmlns:a16="http://schemas.microsoft.com/office/drawing/2014/main" id="{39EA0FB3-D70A-47B1-8403-492FD7BDDDD4}"/>
               </a:ext>
             </a:extLst>
           </p:cNvPr>
@@ -8976,11 +10415,11 @@
             <a:pPr algn="l">
               <a:defRPr sz="2175" b="1">
                 <a:solidFill>
-                  <a:srgbClr val="180D20"/>
-                </a:solidFill>
-                <a:latin typeface="Arial"/>
-                <a:ea typeface="Arial"/>
-                <a:cs typeface="Arial"/>
+                  <a:srgbClr val="FFF7ED"/>
+                </a:solidFill>
+                <a:latin typeface="Aptos"/>
+                <a:ea typeface="Aptos"/>
+                <a:cs typeface="Aptos"/>
               </a:defRPr>
             </a:pPr>
             <a:r>
@@ -8992,10 +10431,10 @@
       </p:sp>
       <p:sp>
         <p:nvSpPr>
-          <p:cNvPr id="8" name="ipo-copy">
-            <a:extLst xmlns:a="http://schemas.openxmlformats.org/drawingml/2006/main">
-              <a:ext uri="{FF2B5EF4-FFF2-40B4-BE49-F238E27FC236}">
-                <a16:creationId xmlns:a16="http://schemas.microsoft.com/office/drawing/2014/main" id="{30E38706-780F-479B-B0A7-0B551238D857}"/>
+          <p:cNvPr id="11" name="ipo-copy">
+            <a:extLst xmlns:a="http://schemas.openxmlformats.org/drawingml/2006/main">
+              <a:ext uri="{FF2B5EF4-FFF2-40B4-BE49-F238E27FC236}">
+                <a16:creationId xmlns:a16="http://schemas.microsoft.com/office/drawing/2014/main" id="{5BC35759-5FFC-4E4F-A02A-B36367DCB419}"/>
               </a:ext>
             </a:extLst>
           </p:cNvPr>
@@ -9022,11 +10461,11 @@
             <a:pPr algn="l">
               <a:defRPr sz="1350" b="0">
                 <a:solidFill>
-                  <a:srgbClr val="70647A"/>
-                </a:solidFill>
-                <a:latin typeface="Arial"/>
-                <a:ea typeface="Arial"/>
-                <a:cs typeface="Arial"/>
+                  <a:srgbClr val="B9A59B"/>
+                </a:solidFill>
+                <a:latin typeface="Aptos"/>
+                <a:ea typeface="Aptos"/>
+                <a:cs typeface="Aptos"/>
               </a:defRPr>
             </a:pPr>
             <a:r>
@@ -9037,10 +10476,10 @@
       </p:sp>
       <p:sp>
         <p:nvSpPr>
-          <p:cNvPr id="9" name="ipo-url">
-            <a:extLst xmlns:a="http://schemas.openxmlformats.org/drawingml/2006/main">
-              <a:ext uri="{FF2B5EF4-FFF2-40B4-BE49-F238E27FC236}">
-                <a16:creationId xmlns:a16="http://schemas.microsoft.com/office/drawing/2014/main" id="{53E224B8-07DC-447C-A4B0-F2935453A11A}"/>
+          <p:cNvPr id="12" name="ipo-url">
+            <a:extLst xmlns:a="http://schemas.openxmlformats.org/drawingml/2006/main">
+              <a:ext uri="{FF2B5EF4-FFF2-40B4-BE49-F238E27FC236}">
+                <a16:creationId xmlns:a16="http://schemas.microsoft.com/office/drawing/2014/main" id="{64934BDD-E0F4-4AD4-98B3-F1D98F859329}"/>
               </a:ext>
             </a:extLst>
           </p:cNvPr>
@@ -9067,11 +10506,11 @@
             <a:pPr algn="l">
               <a:defRPr sz="1125" b="1">
                 <a:solidFill>
-                  <a:srgbClr val="6845C6"/>
-                </a:solidFill>
-                <a:latin typeface="Arial"/>
-                <a:ea typeface="Arial"/>
-                <a:cs typeface="Arial"/>
+                  <a:srgbClr val="FF7A59"/>
+                </a:solidFill>
+                <a:latin typeface="Aptos"/>
+                <a:ea typeface="Aptos"/>
+                <a:cs typeface="Aptos"/>
               </a:defRPr>
             </a:pPr>
             <a:r>
@@ -9082,10 +10521,10 @@
       </p:sp>
       <p:sp>
         <p:nvSpPr>
-          <p:cNvPr id="10" name="ihsg-eyebrow">
-            <a:extLst xmlns:a="http://schemas.openxmlformats.org/drawingml/2006/main">
-              <a:ext uri="{FF2B5EF4-FFF2-40B4-BE49-F238E27FC236}">
-                <a16:creationId xmlns:a16="http://schemas.microsoft.com/office/drawing/2014/main" id="{F5C80F84-E6C1-4C90-ADDB-0DC414899A75}"/>
+          <p:cNvPr id="13" name="ihsg-eyebrow">
+            <a:extLst xmlns:a="http://schemas.openxmlformats.org/drawingml/2006/main">
+              <a:ext uri="{FF2B5EF4-FFF2-40B4-BE49-F238E27FC236}">
+                <a16:creationId xmlns:a16="http://schemas.microsoft.com/office/drawing/2014/main" id="{7C6527F7-BA38-48FC-9758-16068D5854B1}"/>
               </a:ext>
             </a:extLst>
           </p:cNvPr>
@@ -9112,11 +10551,11 @@
             <a:pPr algn="l">
               <a:defRPr sz="1050" b="1">
                 <a:solidFill>
-                  <a:srgbClr val="E65FA8"/>
-                </a:solidFill>
-                <a:latin typeface="Arial"/>
-                <a:ea typeface="Arial"/>
-                <a:cs typeface="Arial"/>
+                  <a:srgbClr val="5EEAD4"/>
+                </a:solidFill>
+                <a:latin typeface="Aptos"/>
+                <a:ea typeface="Aptos"/>
+                <a:cs typeface="Aptos"/>
               </a:defRPr>
             </a:pPr>
             <a:r>
@@ -9127,10 +10566,10 @@
       </p:sp>
       <p:sp>
         <p:nvSpPr>
-          <p:cNvPr id="11" name="ihsg-title">
-            <a:extLst xmlns:a="http://schemas.openxmlformats.org/drawingml/2006/main">
-              <a:ext uri="{FF2B5EF4-FFF2-40B4-BE49-F238E27FC236}">
-                <a16:creationId xmlns:a16="http://schemas.microsoft.com/office/drawing/2014/main" id="{E7F0AD4C-AC8B-4493-8E53-2DD0B56A750D}"/>
+          <p:cNvPr id="14" name="ihsg-title">
+            <a:extLst xmlns:a="http://schemas.openxmlformats.org/drawingml/2006/main">
+              <a:ext uri="{FF2B5EF4-FFF2-40B4-BE49-F238E27FC236}">
+                <a16:creationId xmlns:a16="http://schemas.microsoft.com/office/drawing/2014/main" id="{496715ED-09B4-450F-9449-4AFD38871A20}"/>
               </a:ext>
             </a:extLst>
           </p:cNvPr>
@@ -9157,11 +10596,11 @@
             <a:pPr algn="l">
               <a:defRPr sz="2175" b="1">
                 <a:solidFill>
-                  <a:srgbClr val="180D20"/>
-                </a:solidFill>
-                <a:latin typeface="Arial"/>
-                <a:ea typeface="Arial"/>
-                <a:cs typeface="Arial"/>
+                  <a:srgbClr val="FFF7ED"/>
+                </a:solidFill>
+                <a:latin typeface="Aptos"/>
+                <a:ea typeface="Aptos"/>
+                <a:cs typeface="Aptos"/>
               </a:defRPr>
             </a:pPr>
             <a:r>
@@ -9173,10 +10612,10 @@
       </p:sp>
       <p:sp>
         <p:nvSpPr>
-          <p:cNvPr id="12" name="ihsg-url">
-            <a:extLst xmlns:a="http://schemas.openxmlformats.org/drawingml/2006/main">
-              <a:ext uri="{FF2B5EF4-FFF2-40B4-BE49-F238E27FC236}">
-                <a16:creationId xmlns:a16="http://schemas.microsoft.com/office/drawing/2014/main" id="{E4B21BA3-0A8D-493C-8062-98AB02E65A58}"/>
+          <p:cNvPr id="15" name="ihsg-url">
+            <a:extLst xmlns:a="http://schemas.openxmlformats.org/drawingml/2006/main">
+              <a:ext uri="{FF2B5EF4-FFF2-40B4-BE49-F238E27FC236}">
+                <a16:creationId xmlns:a16="http://schemas.microsoft.com/office/drawing/2014/main" id="{A1E8CAB5-BB09-482D-B7AC-FD7C22C56E01}"/>
               </a:ext>
             </a:extLst>
           </p:cNvPr>
@@ -9203,11 +10642,11 @@
             <a:pPr algn="l">
               <a:defRPr sz="1125" b="1">
                 <a:solidFill>
-                  <a:srgbClr val="6845C6"/>
-                </a:solidFill>
-                <a:latin typeface="Arial"/>
-                <a:ea typeface="Arial"/>
-                <a:cs typeface="Arial"/>
+                  <a:srgbClr val="FF7A59"/>
+                </a:solidFill>
+                <a:latin typeface="Aptos"/>
+                <a:ea typeface="Aptos"/>
+                <a:cs typeface="Aptos"/>
               </a:defRPr>
             </a:pPr>
             <a:r>
@@ -9218,10 +10657,10 @@
       </p:sp>
       <p:sp>
         <p:nvSpPr>
-          <p:cNvPr id="13" name="footer-line-7">
-            <a:extLst xmlns:a="http://schemas.openxmlformats.org/drawingml/2006/main">
-              <a:ext uri="{FF2B5EF4-FFF2-40B4-BE49-F238E27FC236}">
-                <a16:creationId xmlns:a16="http://schemas.microsoft.com/office/drawing/2014/main" id="{A419D0D5-E2F1-42AD-91DD-DEB319D68B9A}"/>
+          <p:cNvPr id="16" name="footer-line-gold-7">
+            <a:extLst xmlns:a="http://schemas.openxmlformats.org/drawingml/2006/main">
+              <a:ext uri="{FF2B5EF4-FFF2-40B4-BE49-F238E27FC236}">
+                <a16:creationId xmlns:a16="http://schemas.microsoft.com/office/drawing/2014/main" id="{81F96E65-563A-44C2-A4D8-14C7D08906AF}"/>
               </a:ext>
             </a:extLst>
           </p:cNvPr>
@@ -9233,22 +10672,76 @@
         <p:spPr>
           <a:xfrm xmlns:a="http://schemas.openxmlformats.org/drawingml/2006/main">
             <a:off x="400050" y="6429375"/>
-            <a:ext cx="10553700" cy="19050"/>
-          </a:xfrm>
-          <a:prstGeom xmlns:a="http://schemas.openxmlformats.org/drawingml/2006/main" prst="rect">
-            <a:avLst/>
-          </a:prstGeom>
-          <a:solidFill xmlns:a="http://schemas.openxmlformats.org/drawingml/2006/main">
-            <a:srgbClr val="DED4E6"/>
-          </a:solidFill>
-        </p:spPr>
-      </p:sp>
-      <p:sp>
-        <p:nvSpPr>
-          <p:cNvPr id="14" name="footer-name-7">
-            <a:extLst xmlns:a="http://schemas.openxmlformats.org/drawingml/2006/main">
-              <a:ext uri="{FF2B5EF4-FFF2-40B4-BE49-F238E27FC236}">
-                <a16:creationId xmlns:a16="http://schemas.microsoft.com/office/drawing/2014/main" id="{857C0951-6A53-48CC-9D92-7F9177971660}"/>
+            <a:ext cx="5276850" cy="19050"/>
+          </a:xfrm>
+          <a:prstGeom xmlns:a="http://schemas.openxmlformats.org/drawingml/2006/main" prst="rect">
+            <a:avLst/>
+          </a:prstGeom>
+          <a:solidFill xmlns:a="http://schemas.openxmlformats.org/drawingml/2006/main">
+            <a:srgbClr val="F6C453"/>
+          </a:solidFill>
+        </p:spPr>
+      </p:sp>
+      <p:sp>
+        <p:nvSpPr>
+          <p:cNvPr id="17" name="footer-line-coral-7">
+            <a:extLst xmlns:a="http://schemas.openxmlformats.org/drawingml/2006/main">
+              <a:ext uri="{FF2B5EF4-FFF2-40B4-BE49-F238E27FC236}">
+                <a16:creationId xmlns:a16="http://schemas.microsoft.com/office/drawing/2014/main" id="{7A084CCA-B948-444A-B8F0-7723163253FB}"/>
+              </a:ext>
+            </a:extLst>
+          </p:cNvPr>
+          <p:cNvSpPr>
+            <a:spLocks xmlns:a="http://schemas.openxmlformats.org/drawingml/2006/main" noGrp="1"/>
+          </p:cNvSpPr>
+          <p:nvPr/>
+        </p:nvSpPr>
+        <p:spPr>
+          <a:xfrm xmlns:a="http://schemas.openxmlformats.org/drawingml/2006/main">
+            <a:off x="5676900" y="6429375"/>
+            <a:ext cx="2638425" cy="19050"/>
+          </a:xfrm>
+          <a:prstGeom xmlns:a="http://schemas.openxmlformats.org/drawingml/2006/main" prst="rect">
+            <a:avLst/>
+          </a:prstGeom>
+          <a:solidFill xmlns:a="http://schemas.openxmlformats.org/drawingml/2006/main">
+            <a:srgbClr val="FF7A59"/>
+          </a:solidFill>
+        </p:spPr>
+      </p:sp>
+      <p:sp>
+        <p:nvSpPr>
+          <p:cNvPr id="18" name="footer-line-teal-7">
+            <a:extLst xmlns:a="http://schemas.openxmlformats.org/drawingml/2006/main">
+              <a:ext uri="{FF2B5EF4-FFF2-40B4-BE49-F238E27FC236}">
+                <a16:creationId xmlns:a16="http://schemas.microsoft.com/office/drawing/2014/main" id="{C561FE33-74DD-4C95-B9AE-52B8D943A2F9}"/>
+              </a:ext>
+            </a:extLst>
+          </p:cNvPr>
+          <p:cNvSpPr>
+            <a:spLocks xmlns:a="http://schemas.openxmlformats.org/drawingml/2006/main" noGrp="1"/>
+          </p:cNvSpPr>
+          <p:nvPr/>
+        </p:nvSpPr>
+        <p:spPr>
+          <a:xfrm xmlns:a="http://schemas.openxmlformats.org/drawingml/2006/main">
+            <a:off x="8315325" y="6429375"/>
+            <a:ext cx="2638425" cy="19050"/>
+          </a:xfrm>
+          <a:prstGeom xmlns:a="http://schemas.openxmlformats.org/drawingml/2006/main" prst="rect">
+            <a:avLst/>
+          </a:prstGeom>
+          <a:solidFill xmlns:a="http://schemas.openxmlformats.org/drawingml/2006/main">
+            <a:srgbClr val="5EEAD4"/>
+          </a:solidFill>
+        </p:spPr>
+      </p:sp>
+      <p:sp>
+        <p:nvSpPr>
+          <p:cNvPr id="19" name="footer-name-7">
+            <a:extLst xmlns:a="http://schemas.openxmlformats.org/drawingml/2006/main">
+              <a:ext uri="{FF2B5EF4-FFF2-40B4-BE49-F238E27FC236}">
+                <a16:creationId xmlns:a16="http://schemas.microsoft.com/office/drawing/2014/main" id="{E819F5BF-F8A9-4C86-A51D-E469BC53E9DB}"/>
               </a:ext>
             </a:extLst>
           </p:cNvPr>
@@ -9275,25 +10768,25 @@
             <a:pPr algn="l">
               <a:defRPr sz="825" b="1">
                 <a:solidFill>
-                  <a:srgbClr val="70647A"/>
-                </a:solidFill>
-                <a:latin typeface="Arial"/>
-                <a:ea typeface="Arial"/>
-                <a:cs typeface="Arial"/>
-              </a:defRPr>
-            </a:pPr>
-            <a:r>
-              <a:t>MUHAMMAD ALI AKBAR AL-QAHRI  /  DATA PORTFOLIO</a:t>
-            </a:r>
-          </a:p>
-        </p:txBody>
-      </p:sp>
-      <p:sp>
-        <p:nvSpPr>
-          <p:cNvPr id="15" name="footer-page-7">
-            <a:extLst xmlns:a="http://schemas.openxmlformats.org/drawingml/2006/main">
-              <a:ext uri="{FF2B5EF4-FFF2-40B4-BE49-F238E27FC236}">
-                <a16:creationId xmlns:a16="http://schemas.microsoft.com/office/drawing/2014/main" id="{A6787E05-D6E3-4314-BDA9-FE4996D0C777}"/>
+                  <a:srgbClr val="B9A59B"/>
+                </a:solidFill>
+                <a:latin typeface="Consolas"/>
+                <a:ea typeface="Consolas"/>
+                <a:cs typeface="Consolas"/>
+              </a:defRPr>
+            </a:pPr>
+            <a:r>
+              <a:t>~/ali_  /  DATA INTELLIGENCE PORTFOLIO</a:t>
+            </a:r>
+          </a:p>
+        </p:txBody>
+      </p:sp>
+      <p:sp>
+        <p:nvSpPr>
+          <p:cNvPr id="20" name="footer-page-7">
+            <a:extLst xmlns:a="http://schemas.openxmlformats.org/drawingml/2006/main">
+              <a:ext uri="{FF2B5EF4-FFF2-40B4-BE49-F238E27FC236}">
+                <a16:creationId xmlns:a16="http://schemas.microsoft.com/office/drawing/2014/main" id="{6F09BCCB-A280-47B9-99B6-BDEBB48CFCC2}"/>
               </a:ext>
             </a:extLst>
           </p:cNvPr>
@@ -9320,11 +10813,11 @@
             <a:pPr algn="r">
               <a:defRPr sz="900" b="1">
                 <a:solidFill>
-                  <a:srgbClr val="70647A"/>
-                </a:solidFill>
-                <a:latin typeface="Arial"/>
-                <a:ea typeface="Arial"/>
-                <a:cs typeface="Arial"/>
+                  <a:srgbClr val="F6C453"/>
+                </a:solidFill>
+                <a:latin typeface="Consolas"/>
+                <a:ea typeface="Consolas"/>
+                <a:cs typeface="Consolas"/>
               </a:defRPr>
             </a:pPr>
             <a:r>
@@ -9335,14 +10828,14 @@
       </p:sp>
       <p:pic>
         <p:nvPicPr>
-          <p:cNvPr id="33" name=""/>
+          <p:cNvPr id="43" name=""/>
           <p:cNvPicPr>
             <a:picLocks xmlns:a="http://schemas.openxmlformats.org/drawingml/2006/main" noChangeAspect="1"/>
           </p:cNvPicPr>
           <p:nvPr/>
         </p:nvPicPr>
         <p:blipFill>
-          <a:blip xmlns:r="http://schemas.openxmlformats.org/officeDocument/2006/relationships" xmlns:a="http://schemas.openxmlformats.org/drawingml/2006/main" r:embed="Re33f205eaedd4281"/>
+          <a:blip xmlns:r="http://schemas.openxmlformats.org/officeDocument/2006/relationships" xmlns:a="http://schemas.openxmlformats.org/drawingml/2006/main" r:embed="Rca5219db36a64495"/>
           <a:srcRect xmlns:a="http://schemas.openxmlformats.org/drawingml/2006/main" l="0" t="22720" r="0" b="22720"/>
           <a:stretch xmlns:a="http://schemas.openxmlformats.org/drawingml/2006/main">
             <a:fillRect l="0" t="0" r="0" b="0"/>
@@ -9360,14 +10853,14 @@
       </p:pic>
       <p:pic>
         <p:nvPicPr>
-          <p:cNvPr id="34" name=""/>
+          <p:cNvPr id="44" name=""/>
           <p:cNvPicPr>
             <a:picLocks xmlns:a="http://schemas.openxmlformats.org/drawingml/2006/main" noChangeAspect="1"/>
           </p:cNvPicPr>
           <p:nvPr/>
         </p:nvPicPr>
         <p:blipFill>
-          <a:blip xmlns:r="http://schemas.openxmlformats.org/officeDocument/2006/relationships" xmlns:a="http://schemas.openxmlformats.org/drawingml/2006/main" r:embed="R5da926c1163e447b"/>
+          <a:blip xmlns:r="http://schemas.openxmlformats.org/officeDocument/2006/relationships" xmlns:a="http://schemas.openxmlformats.org/drawingml/2006/main" r:embed="R063f1c430e4d432a"/>
           <a:srcRect xmlns:a="http://schemas.openxmlformats.org/drawingml/2006/main" l="0" t="22324" r="0" b="22324"/>
           <a:stretch xmlns:a="http://schemas.openxmlformats.org/drawingml/2006/main">
             <a:fillRect l="0" t="0" r="0" b="0"/>
@@ -9386,7 +10879,7 @@
     </p:spTree>
     <p:extLst>
       <p:ext uri="{BB962C8B-B14F-4D97-AF65-F5344CB8AC3E}">
-        <p14:creationId xmlns:p14="http://schemas.microsoft.com/office/powerpoint/2010/main" val="1322431331"/>
+        <p14:creationId xmlns:p14="http://schemas.microsoft.com/office/powerpoint/2010/main" val="1027736399"/>
       </p:ext>
     </p:extLst>
   </p:cSld>
@@ -9407,10 +10900,10 @@
       </p:grpSpPr>
       <p:sp>
         <p:nvSpPr>
-          <p:cNvPr id="19" name="08-ml-evidence-canvas">
-            <a:extLst xmlns:a="http://schemas.openxmlformats.org/drawingml/2006/main">
-              <a:ext uri="{FF2B5EF4-FFF2-40B4-BE49-F238E27FC236}">
-                <a16:creationId xmlns:a16="http://schemas.microsoft.com/office/drawing/2014/main" id="{678694C8-9371-4F65-A709-322BE5561A9F}"/>
+          <p:cNvPr id="24" name="08-ml-evidence-canvas">
+            <a:extLst xmlns:a="http://schemas.openxmlformats.org/drawingml/2006/main">
+              <a:ext uri="{FF2B5EF4-FFF2-40B4-BE49-F238E27FC236}">
+                <a16:creationId xmlns:a16="http://schemas.microsoft.com/office/drawing/2014/main" id="{8DAF4CF2-8319-488D-B0C3-A865631C8C22}"/>
               </a:ext>
             </a:extLst>
           </p:cNvPr>
@@ -9428,16 +10921,97 @@
             <a:avLst/>
           </a:prstGeom>
           <a:solidFill xmlns:a="http://schemas.openxmlformats.org/drawingml/2006/main">
-            <a:srgbClr val="FFFFFF"/>
-          </a:solidFill>
-        </p:spPr>
-      </p:sp>
-      <p:sp>
-        <p:nvSpPr>
-          <p:cNvPr id="2" name="eyebrow-8">
-            <a:extLst xmlns:a="http://schemas.openxmlformats.org/drawingml/2006/main">
-              <a:ext uri="{FF2B5EF4-FFF2-40B4-BE49-F238E27FC236}">
-                <a16:creationId xmlns:a16="http://schemas.microsoft.com/office/drawing/2014/main" id="{AAA648B4-627C-4FAE-A1DB-B37D2B4442FA}"/>
+            <a:srgbClr val="120B0A"/>
+          </a:solidFill>
+        </p:spPr>
+      </p:sp>
+      <p:sp>
+        <p:nvSpPr>
+          <p:cNvPr id="2" name="08-ml-evidence-edge-gold">
+            <a:extLst xmlns:a="http://schemas.openxmlformats.org/drawingml/2006/main">
+              <a:ext uri="{FF2B5EF4-FFF2-40B4-BE49-F238E27FC236}">
+                <a16:creationId xmlns:a16="http://schemas.microsoft.com/office/drawing/2014/main" id="{FBF9D9DE-18B8-4BE3-9240-DFDEB03981DF}"/>
+              </a:ext>
+            </a:extLst>
+          </p:cNvPr>
+          <p:cNvSpPr>
+            <a:spLocks xmlns:a="http://schemas.openxmlformats.org/drawingml/2006/main" noGrp="1"/>
+          </p:cNvSpPr>
+          <p:nvPr/>
+        </p:nvSpPr>
+        <p:spPr>
+          <a:xfrm xmlns:a="http://schemas.openxmlformats.org/drawingml/2006/main">
+            <a:off x="0" y="0"/>
+            <a:ext cx="38100" cy="2286000"/>
+          </a:xfrm>
+          <a:prstGeom xmlns:a="http://schemas.openxmlformats.org/drawingml/2006/main" prst="rect">
+            <a:avLst/>
+          </a:prstGeom>
+          <a:solidFill xmlns:a="http://schemas.openxmlformats.org/drawingml/2006/main">
+            <a:srgbClr val="F6C453"/>
+          </a:solidFill>
+        </p:spPr>
+      </p:sp>
+      <p:sp>
+        <p:nvSpPr>
+          <p:cNvPr id="3" name="08-ml-evidence-edge-coral">
+            <a:extLst xmlns:a="http://schemas.openxmlformats.org/drawingml/2006/main">
+              <a:ext uri="{FF2B5EF4-FFF2-40B4-BE49-F238E27FC236}">
+                <a16:creationId xmlns:a16="http://schemas.microsoft.com/office/drawing/2014/main" id="{879A3779-6122-4D4B-ABD9-E81F4F7545EA}"/>
+              </a:ext>
+            </a:extLst>
+          </p:cNvPr>
+          <p:cNvSpPr>
+            <a:spLocks xmlns:a="http://schemas.openxmlformats.org/drawingml/2006/main" noGrp="1"/>
+          </p:cNvSpPr>
+          <p:nvPr/>
+        </p:nvSpPr>
+        <p:spPr>
+          <a:xfrm xmlns:a="http://schemas.openxmlformats.org/drawingml/2006/main">
+            <a:off x="0" y="2286000"/>
+            <a:ext cx="38100" cy="2286000"/>
+          </a:xfrm>
+          <a:prstGeom xmlns:a="http://schemas.openxmlformats.org/drawingml/2006/main" prst="rect">
+            <a:avLst/>
+          </a:prstGeom>
+          <a:solidFill xmlns:a="http://schemas.openxmlformats.org/drawingml/2006/main">
+            <a:srgbClr val="FF7A59"/>
+          </a:solidFill>
+        </p:spPr>
+      </p:sp>
+      <p:sp>
+        <p:nvSpPr>
+          <p:cNvPr id="4" name="08-ml-evidence-edge-teal">
+            <a:extLst xmlns:a="http://schemas.openxmlformats.org/drawingml/2006/main">
+              <a:ext uri="{FF2B5EF4-FFF2-40B4-BE49-F238E27FC236}">
+                <a16:creationId xmlns:a16="http://schemas.microsoft.com/office/drawing/2014/main" id="{F612BC57-A089-4CF2-98D7-806AFCE69766}"/>
+              </a:ext>
+            </a:extLst>
+          </p:cNvPr>
+          <p:cNvSpPr>
+            <a:spLocks xmlns:a="http://schemas.openxmlformats.org/drawingml/2006/main" noGrp="1"/>
+          </p:cNvSpPr>
+          <p:nvPr/>
+        </p:nvSpPr>
+        <p:spPr>
+          <a:xfrm xmlns:a="http://schemas.openxmlformats.org/drawingml/2006/main">
+            <a:off x="0" y="4572000"/>
+            <a:ext cx="38100" cy="2286000"/>
+          </a:xfrm>
+          <a:prstGeom xmlns:a="http://schemas.openxmlformats.org/drawingml/2006/main" prst="rect">
+            <a:avLst/>
+          </a:prstGeom>
+          <a:solidFill xmlns:a="http://schemas.openxmlformats.org/drawingml/2006/main">
+            <a:srgbClr val="5EEAD4"/>
+          </a:solidFill>
+        </p:spPr>
+      </p:sp>
+      <p:sp>
+        <p:nvSpPr>
+          <p:cNvPr id="5" name="eyebrow-8">
+            <a:extLst xmlns:a="http://schemas.openxmlformats.org/drawingml/2006/main">
+              <a:ext uri="{FF2B5EF4-FFF2-40B4-BE49-F238E27FC236}">
+                <a16:creationId xmlns:a16="http://schemas.microsoft.com/office/drawing/2014/main" id="{24911C29-6ECC-423A-BDDE-EDF104FF6250}"/>
               </a:ext>
             </a:extLst>
           </p:cNvPr>
@@ -9464,25 +11038,25 @@
             <a:pPr algn="l">
               <a:defRPr sz="1050" b="1">
                 <a:solidFill>
-                  <a:srgbClr val="6845C6"/>
-                </a:solidFill>
-                <a:latin typeface="Arial"/>
-                <a:ea typeface="Arial"/>
-                <a:cs typeface="Arial"/>
-              </a:defRPr>
-            </a:pPr>
-            <a:r>
-              <a:t>APPLIED MACHINE LEARNING</a:t>
-            </a:r>
-          </a:p>
-        </p:txBody>
-      </p:sp>
-      <p:sp>
-        <p:nvSpPr>
-          <p:cNvPr id="3" name="title-8">
-            <a:extLst xmlns:a="http://schemas.openxmlformats.org/drawingml/2006/main">
-              <a:ext uri="{FF2B5EF4-FFF2-40B4-BE49-F238E27FC236}">
-                <a16:creationId xmlns:a16="http://schemas.microsoft.com/office/drawing/2014/main" id="{587AFB1A-DF7A-43B5-8C59-C74B29783381}"/>
+                  <a:srgbClr val="FF7A59"/>
+                </a:solidFill>
+                <a:latin typeface="Consolas"/>
+                <a:ea typeface="Consolas"/>
+                <a:cs typeface="Consolas"/>
+              </a:defRPr>
+            </a:pPr>
+            <a:r>
+              <a:t>~/ APPLIED MACHINE LEARNING</a:t>
+            </a:r>
+          </a:p>
+        </p:txBody>
+      </p:sp>
+      <p:sp>
+        <p:nvSpPr>
+          <p:cNvPr id="6" name="title-8">
+            <a:extLst xmlns:a="http://schemas.openxmlformats.org/drawingml/2006/main">
+              <a:ext uri="{FF2B5EF4-FFF2-40B4-BE49-F238E27FC236}">
+                <a16:creationId xmlns:a16="http://schemas.microsoft.com/office/drawing/2014/main" id="{4DACEDA3-FCDC-4F98-8497-209351DF5700}"/>
               </a:ext>
             </a:extLst>
           </p:cNvPr>
@@ -9502,18 +11076,18 @@
         </p:spPr>
         <p:txBody>
           <a:bodyPr xmlns:a="http://schemas.openxmlformats.org/drawingml/2006/main" wrap="square" lIns="0" tIns="0" rIns="0" bIns="0" anchor="t">
-            <a:normAutofit fontScale="93023"/>
+            <a:normAutofit fontScale="95117"/>
           </a:bodyPr>
           <a:lstStyle xmlns:a="http://schemas.openxmlformats.org/drawingml/2006/main"/>
           <a:p xmlns:a="http://schemas.openxmlformats.org/drawingml/2006/main">
             <a:pPr algn="l">
               <a:defRPr sz="3225" b="1">
                 <a:solidFill>
-                  <a:srgbClr val="180D20"/>
-                </a:solidFill>
-                <a:latin typeface="Arial"/>
-                <a:ea typeface="Arial"/>
-                <a:cs typeface="Arial"/>
+                  <a:srgbClr val="FFF7ED"/>
+                </a:solidFill>
+                <a:latin typeface="Aptos"/>
+                <a:ea typeface="Aptos"/>
+                <a:cs typeface="Aptos"/>
               </a:defRPr>
             </a:pPr>
             <a:r>
@@ -9524,10 +11098,10 @@
       </p:sp>
       <p:sp>
         <p:nvSpPr>
-          <p:cNvPr id="4" name="food-image-frame">
-            <a:extLst xmlns:a="http://schemas.openxmlformats.org/drawingml/2006/main">
-              <a:ext uri="{FF2B5EF4-FFF2-40B4-BE49-F238E27FC236}">
-                <a16:creationId xmlns:a16="http://schemas.microsoft.com/office/drawing/2014/main" id="{E7C192DF-7CB8-4601-BE2E-985BFC27AE00}"/>
+          <p:cNvPr id="7" name="food-image-frame">
+            <a:extLst xmlns:a="http://schemas.openxmlformats.org/drawingml/2006/main">
+              <a:ext uri="{FF2B5EF4-FFF2-40B4-BE49-F238E27FC236}">
+                <a16:creationId xmlns:a16="http://schemas.microsoft.com/office/drawing/2014/main" id="{039D171D-891E-42F1-91B0-E666D7D2E379}"/>
               </a:ext>
             </a:extLst>
           </p:cNvPr>
@@ -9547,16 +11121,16 @@
             </a:avLst>
           </a:prstGeom>
           <a:solidFill xmlns:a="http://schemas.openxmlformats.org/drawingml/2006/main">
-            <a:srgbClr val="FBF7EF"/>
-          </a:solidFill>
-        </p:spPr>
-      </p:sp>
-      <p:sp>
-        <p:nvSpPr>
-          <p:cNvPr id="5" name="food-metric-card">
-            <a:extLst xmlns:a="http://schemas.openxmlformats.org/drawingml/2006/main">
-              <a:ext uri="{FF2B5EF4-FFF2-40B4-BE49-F238E27FC236}">
-                <a16:creationId xmlns:a16="http://schemas.microsoft.com/office/drawing/2014/main" id="{8889D5DA-460C-4B67-82FC-10612A5A577E}"/>
+            <a:srgbClr val="211512"/>
+          </a:solidFill>
+        </p:spPr>
+      </p:sp>
+      <p:sp>
+        <p:nvSpPr>
+          <p:cNvPr id="8" name="food-metric-card">
+            <a:extLst xmlns:a="http://schemas.openxmlformats.org/drawingml/2006/main">
+              <a:ext uri="{FF2B5EF4-FFF2-40B4-BE49-F238E27FC236}">
+                <a16:creationId xmlns:a16="http://schemas.microsoft.com/office/drawing/2014/main" id="{576D3E4E-15A6-47E2-9222-EDB8EDB503AD}"/>
               </a:ext>
             </a:extLst>
           </p:cNvPr>
@@ -9576,16 +11150,16 @@
             </a:avLst>
           </a:prstGeom>
           <a:solidFill xmlns:a="http://schemas.openxmlformats.org/drawingml/2006/main">
-            <a:srgbClr val="F1EBFF"/>
-          </a:solidFill>
-        </p:spPr>
-      </p:sp>
-      <p:sp>
-        <p:nvSpPr>
-          <p:cNvPr id="6" name="food-metric">
-            <a:extLst xmlns:a="http://schemas.openxmlformats.org/drawingml/2006/main">
-              <a:ext uri="{FF2B5EF4-FFF2-40B4-BE49-F238E27FC236}">
-                <a16:creationId xmlns:a16="http://schemas.microsoft.com/office/drawing/2014/main" id="{8F77F592-7085-4C5B-80C5-A4CF0AFC9AE3}"/>
+            <a:srgbClr val="2A1A17"/>
+          </a:solidFill>
+        </p:spPr>
+      </p:sp>
+      <p:sp>
+        <p:nvSpPr>
+          <p:cNvPr id="9" name="food-metric">
+            <a:extLst xmlns:a="http://schemas.openxmlformats.org/drawingml/2006/main">
+              <a:ext uri="{FF2B5EF4-FFF2-40B4-BE49-F238E27FC236}">
+                <a16:creationId xmlns:a16="http://schemas.microsoft.com/office/drawing/2014/main" id="{029A98AF-B53F-4531-B70E-44DAFC8576CA}"/>
               </a:ext>
             </a:extLst>
           </p:cNvPr>
@@ -9612,11 +11186,11 @@
             <a:pPr algn="ctr">
               <a:defRPr sz="3975" b="1">
                 <a:solidFill>
-                  <a:srgbClr val="180D20"/>
-                </a:solidFill>
-                <a:latin typeface="Arial"/>
-                <a:ea typeface="Arial"/>
-                <a:cs typeface="Arial"/>
+                  <a:srgbClr val="FFF7ED"/>
+                </a:solidFill>
+                <a:latin typeface="Aptos"/>
+                <a:ea typeface="Aptos"/>
+                <a:cs typeface="Aptos"/>
               </a:defRPr>
             </a:pPr>
             <a:r>
@@ -9627,10 +11201,10 @@
       </p:sp>
       <p:sp>
         <p:nvSpPr>
-          <p:cNvPr id="7" name="food-metric-label">
-            <a:extLst xmlns:a="http://schemas.openxmlformats.org/drawingml/2006/main">
-              <a:ext uri="{FF2B5EF4-FFF2-40B4-BE49-F238E27FC236}">
-                <a16:creationId xmlns:a16="http://schemas.microsoft.com/office/drawing/2014/main" id="{11F72CA4-6051-48E1-9D3E-48A407ED5B25}"/>
+          <p:cNvPr id="10" name="food-metric-label">
+            <a:extLst xmlns:a="http://schemas.openxmlformats.org/drawingml/2006/main">
+              <a:ext uri="{FF2B5EF4-FFF2-40B4-BE49-F238E27FC236}">
+                <a16:creationId xmlns:a16="http://schemas.microsoft.com/office/drawing/2014/main" id="{16E9B047-1992-4371-8F17-29FB3C0C8C21}"/>
               </a:ext>
             </a:extLst>
           </p:cNvPr>
@@ -9657,11 +11231,11 @@
             <a:pPr algn="ctr">
               <a:defRPr sz="1275" b="0">
                 <a:solidFill>
-                  <a:srgbClr val="70647A"/>
-                </a:solidFill>
-                <a:latin typeface="Arial"/>
-                <a:ea typeface="Arial"/>
-                <a:cs typeface="Arial"/>
+                  <a:srgbClr val="B9A59B"/>
+                </a:solidFill>
+                <a:latin typeface="Aptos"/>
+                <a:ea typeface="Aptos"/>
+                <a:cs typeface="Aptos"/>
               </a:defRPr>
             </a:pPr>
             <a:r>
@@ -9672,10 +11246,10 @@
       </p:sp>
       <p:sp>
         <p:nvSpPr>
-          <p:cNvPr id="8" name="stock-metric-card">
-            <a:extLst xmlns:a="http://schemas.openxmlformats.org/drawingml/2006/main">
-              <a:ext uri="{FF2B5EF4-FFF2-40B4-BE49-F238E27FC236}">
-                <a16:creationId xmlns:a16="http://schemas.microsoft.com/office/drawing/2014/main" id="{57BA6217-BA51-470F-AABF-B66E10DBB9FE}"/>
+          <p:cNvPr id="11" name="stock-metric-card">
+            <a:extLst xmlns:a="http://schemas.openxmlformats.org/drawingml/2006/main">
+              <a:ext uri="{FF2B5EF4-FFF2-40B4-BE49-F238E27FC236}">
+                <a16:creationId xmlns:a16="http://schemas.microsoft.com/office/drawing/2014/main" id="{499869C2-18E8-442E-B529-7E11326EEA0C}"/>
               </a:ext>
             </a:extLst>
           </p:cNvPr>
@@ -9695,16 +11269,16 @@
             </a:avLst>
           </a:prstGeom>
           <a:solidFill xmlns:a="http://schemas.openxmlformats.org/drawingml/2006/main">
-            <a:srgbClr val="FBF7EF"/>
-          </a:solidFill>
-        </p:spPr>
-      </p:sp>
-      <p:sp>
-        <p:nvSpPr>
-          <p:cNvPr id="9" name="stock-metric">
-            <a:extLst xmlns:a="http://schemas.openxmlformats.org/drawingml/2006/main">
-              <a:ext uri="{FF2B5EF4-FFF2-40B4-BE49-F238E27FC236}">
-                <a16:creationId xmlns:a16="http://schemas.microsoft.com/office/drawing/2014/main" id="{A9B278A2-A2ED-45B8-9565-539B4C5BBDC1}"/>
+            <a:srgbClr val="211512"/>
+          </a:solidFill>
+        </p:spPr>
+      </p:sp>
+      <p:sp>
+        <p:nvSpPr>
+          <p:cNvPr id="12" name="stock-metric">
+            <a:extLst xmlns:a="http://schemas.openxmlformats.org/drawingml/2006/main">
+              <a:ext uri="{FF2B5EF4-FFF2-40B4-BE49-F238E27FC236}">
+                <a16:creationId xmlns:a16="http://schemas.microsoft.com/office/drawing/2014/main" id="{FAF4F992-9C5D-4F2C-9357-E58AB39DF093}"/>
               </a:ext>
             </a:extLst>
           </p:cNvPr>
@@ -9731,11 +11305,11 @@
             <a:pPr algn="ctr">
               <a:defRPr sz="3975" b="1">
                 <a:solidFill>
-                  <a:srgbClr val="180D20"/>
-                </a:solidFill>
-                <a:latin typeface="Arial"/>
-                <a:ea typeface="Arial"/>
-                <a:cs typeface="Arial"/>
+                  <a:srgbClr val="FFF7ED"/>
+                </a:solidFill>
+                <a:latin typeface="Aptos"/>
+                <a:ea typeface="Aptos"/>
+                <a:cs typeface="Aptos"/>
               </a:defRPr>
             </a:pPr>
             <a:r>
@@ -9746,10 +11320,10 @@
       </p:sp>
       <p:sp>
         <p:nvSpPr>
-          <p:cNvPr id="10" name="stock-metric-label">
-            <a:extLst xmlns:a="http://schemas.openxmlformats.org/drawingml/2006/main">
-              <a:ext uri="{FF2B5EF4-FFF2-40B4-BE49-F238E27FC236}">
-                <a16:creationId xmlns:a16="http://schemas.microsoft.com/office/drawing/2014/main" id="{1E8E0323-81A4-4EEF-9870-086F17853E5A}"/>
+          <p:cNvPr id="13" name="stock-metric-label">
+            <a:extLst xmlns:a="http://schemas.openxmlformats.org/drawingml/2006/main">
+              <a:ext uri="{FF2B5EF4-FFF2-40B4-BE49-F238E27FC236}">
+                <a16:creationId xmlns:a16="http://schemas.microsoft.com/office/drawing/2014/main" id="{F14CF640-043C-490F-B669-70E6207DD439}"/>
               </a:ext>
             </a:extLst>
           </p:cNvPr>
@@ -9769,18 +11343,18 @@
         </p:spPr>
         <p:txBody>
           <a:bodyPr xmlns:a="http://schemas.openxmlformats.org/drawingml/2006/main" wrap="square" lIns="0" tIns="0" rIns="0" bIns="0" anchor="t">
-            <a:normAutofit fontScale="96103"/>
+            <a:normAutofit fontScale="96791"/>
           </a:bodyPr>
           <a:lstStyle xmlns:a="http://schemas.openxmlformats.org/drawingml/2006/main"/>
           <a:p xmlns:a="http://schemas.openxmlformats.org/drawingml/2006/main">
             <a:pPr algn="ctr">
               <a:defRPr sz="1275" b="0">
                 <a:solidFill>
-                  <a:srgbClr val="70647A"/>
-                </a:solidFill>
-                <a:latin typeface="Arial"/>
-                <a:ea typeface="Arial"/>
-                <a:cs typeface="Arial"/>
+                  <a:srgbClr val="B9A59B"/>
+                </a:solidFill>
+                <a:latin typeface="Aptos"/>
+                <a:ea typeface="Aptos"/>
+                <a:cs typeface="Aptos"/>
               </a:defRPr>
             </a:pPr>
             <a:r>
@@ -9791,10 +11365,10 @@
       </p:sp>
       <p:sp>
         <p:nvSpPr>
-          <p:cNvPr id="11" name="food-title">
-            <a:extLst xmlns:a="http://schemas.openxmlformats.org/drawingml/2006/main">
-              <a:ext uri="{FF2B5EF4-FFF2-40B4-BE49-F238E27FC236}">
-                <a16:creationId xmlns:a16="http://schemas.microsoft.com/office/drawing/2014/main" id="{EDDC12DB-E0BB-4A09-BE14-6C87796A158F}"/>
+          <p:cNvPr id="14" name="food-title">
+            <a:extLst xmlns:a="http://schemas.openxmlformats.org/drawingml/2006/main">
+              <a:ext uri="{FF2B5EF4-FFF2-40B4-BE49-F238E27FC236}">
+                <a16:creationId xmlns:a16="http://schemas.microsoft.com/office/drawing/2014/main" id="{215A6C01-77F9-4D83-96AC-8F28C49A19CF}"/>
               </a:ext>
             </a:extLst>
           </p:cNvPr>
@@ -9821,11 +11395,11 @@
             <a:pPr algn="l">
               <a:defRPr sz="1950" b="1">
                 <a:solidFill>
-                  <a:srgbClr val="180D20"/>
-                </a:solidFill>
-                <a:latin typeface="Arial"/>
-                <a:ea typeface="Arial"/>
-                <a:cs typeface="Arial"/>
+                  <a:srgbClr val="FFF7ED"/>
+                </a:solidFill>
+                <a:latin typeface="Aptos"/>
+                <a:ea typeface="Aptos"/>
+                <a:cs typeface="Aptos"/>
               </a:defRPr>
             </a:pPr>
             <a:r>
@@ -9836,10 +11410,10 @@
       </p:sp>
       <p:sp>
         <p:nvSpPr>
-          <p:cNvPr id="12" name="food-copy">
-            <a:extLst xmlns:a="http://schemas.openxmlformats.org/drawingml/2006/main">
-              <a:ext uri="{FF2B5EF4-FFF2-40B4-BE49-F238E27FC236}">
-                <a16:creationId xmlns:a16="http://schemas.microsoft.com/office/drawing/2014/main" id="{13CAA9C8-E5BA-464E-B860-ACDF6057209D}"/>
+          <p:cNvPr id="15" name="food-copy">
+            <a:extLst xmlns:a="http://schemas.openxmlformats.org/drawingml/2006/main">
+              <a:ext uri="{FF2B5EF4-FFF2-40B4-BE49-F238E27FC236}">
+                <a16:creationId xmlns:a16="http://schemas.microsoft.com/office/drawing/2014/main" id="{F4357FC8-EB79-4F86-A304-D11BDF154B1F}"/>
               </a:ext>
             </a:extLst>
           </p:cNvPr>
@@ -9866,11 +11440,11 @@
             <a:pPr algn="l">
               <a:defRPr sz="1350" b="0">
                 <a:solidFill>
-                  <a:srgbClr val="70647A"/>
-                </a:solidFill>
-                <a:latin typeface="Arial"/>
-                <a:ea typeface="Arial"/>
-                <a:cs typeface="Arial"/>
+                  <a:srgbClr val="B9A59B"/>
+                </a:solidFill>
+                <a:latin typeface="Aptos"/>
+                <a:ea typeface="Aptos"/>
+                <a:cs typeface="Aptos"/>
               </a:defRPr>
             </a:pPr>
             <a:r>
@@ -9881,10 +11455,10 @@
       </p:sp>
       <p:sp>
         <p:nvSpPr>
-          <p:cNvPr id="13" name="award-strip">
-            <a:extLst xmlns:a="http://schemas.openxmlformats.org/drawingml/2006/main">
-              <a:ext uri="{FF2B5EF4-FFF2-40B4-BE49-F238E27FC236}">
-                <a16:creationId xmlns:a16="http://schemas.microsoft.com/office/drawing/2014/main" id="{708A9C4E-2722-4C57-A4E9-087DD83A071C}"/>
+          <p:cNvPr id="16" name="award-strip">
+            <a:extLst xmlns:a="http://schemas.openxmlformats.org/drawingml/2006/main">
+              <a:ext uri="{FF2B5EF4-FFF2-40B4-BE49-F238E27FC236}">
+                <a16:creationId xmlns:a16="http://schemas.microsoft.com/office/drawing/2014/main" id="{2CD3FFF9-AB38-496E-8979-BDA1EE419505}"/>
               </a:ext>
             </a:extLst>
           </p:cNvPr>
@@ -9904,16 +11478,16 @@
             </a:avLst>
           </a:prstGeom>
           <a:solidFill xmlns:a="http://schemas.openxmlformats.org/drawingml/2006/main">
-            <a:srgbClr val="E0B44F"/>
-          </a:solidFill>
-        </p:spPr>
-      </p:sp>
-      <p:sp>
-        <p:nvSpPr>
-          <p:cNvPr id="14" name="award-text">
-            <a:extLst xmlns:a="http://schemas.openxmlformats.org/drawingml/2006/main">
-              <a:ext uri="{FF2B5EF4-FFF2-40B4-BE49-F238E27FC236}">
-                <a16:creationId xmlns:a16="http://schemas.microsoft.com/office/drawing/2014/main" id="{8A5E61EB-C735-4958-8953-B6A56AF23575}"/>
+            <a:srgbClr val="F6C453"/>
+          </a:solidFill>
+        </p:spPr>
+      </p:sp>
+      <p:sp>
+        <p:nvSpPr>
+          <p:cNvPr id="17" name="award-text">
+            <a:extLst xmlns:a="http://schemas.openxmlformats.org/drawingml/2006/main">
+              <a:ext uri="{FF2B5EF4-FFF2-40B4-BE49-F238E27FC236}">
+                <a16:creationId xmlns:a16="http://schemas.microsoft.com/office/drawing/2014/main" id="{8C07B8DA-F1CD-4E30-BAE7-FF395D7FFF58}"/>
               </a:ext>
             </a:extLst>
           </p:cNvPr>
@@ -9940,11 +11514,11 @@
             <a:pPr algn="ctr">
               <a:defRPr sz="1200" b="1">
                 <a:solidFill>
-                  <a:srgbClr val="FFFFFF"/>
-                </a:solidFill>
-                <a:latin typeface="Arial"/>
-                <a:ea typeface="Arial"/>
-                <a:cs typeface="Arial"/>
+                  <a:srgbClr val="1A0D08"/>
+                </a:solidFill>
+                <a:latin typeface="Aptos"/>
+                <a:ea typeface="Aptos"/>
+                <a:cs typeface="Aptos"/>
               </a:defRPr>
             </a:pPr>
             <a:r>
@@ -9955,10 +11529,10 @@
       </p:sp>
       <p:sp>
         <p:nvSpPr>
-          <p:cNvPr id="15" name="footer-line-8">
-            <a:extLst xmlns:a="http://schemas.openxmlformats.org/drawingml/2006/main">
-              <a:ext uri="{FF2B5EF4-FFF2-40B4-BE49-F238E27FC236}">
-                <a16:creationId xmlns:a16="http://schemas.microsoft.com/office/drawing/2014/main" id="{8CE349C5-FDB5-442A-AD84-50B9AAF52C9F}"/>
+          <p:cNvPr id="18" name="footer-line-gold-8">
+            <a:extLst xmlns:a="http://schemas.openxmlformats.org/drawingml/2006/main">
+              <a:ext uri="{FF2B5EF4-FFF2-40B4-BE49-F238E27FC236}">
+                <a16:creationId xmlns:a16="http://schemas.microsoft.com/office/drawing/2014/main" id="{30A323C1-2513-4EA3-8AEC-57357B02E037}"/>
               </a:ext>
             </a:extLst>
           </p:cNvPr>
@@ -9970,22 +11544,76 @@
         <p:spPr>
           <a:xfrm xmlns:a="http://schemas.openxmlformats.org/drawingml/2006/main">
             <a:off x="400050" y="6429375"/>
-            <a:ext cx="10553700" cy="19050"/>
-          </a:xfrm>
-          <a:prstGeom xmlns:a="http://schemas.openxmlformats.org/drawingml/2006/main" prst="rect">
-            <a:avLst/>
-          </a:prstGeom>
-          <a:solidFill xmlns:a="http://schemas.openxmlformats.org/drawingml/2006/main">
-            <a:srgbClr val="DED4E6"/>
-          </a:solidFill>
-        </p:spPr>
-      </p:sp>
-      <p:sp>
-        <p:nvSpPr>
-          <p:cNvPr id="16" name="footer-name-8">
-            <a:extLst xmlns:a="http://schemas.openxmlformats.org/drawingml/2006/main">
-              <a:ext uri="{FF2B5EF4-FFF2-40B4-BE49-F238E27FC236}">
-                <a16:creationId xmlns:a16="http://schemas.microsoft.com/office/drawing/2014/main" id="{958EDD60-2B2A-4897-BC83-EB4BF0474630}"/>
+            <a:ext cx="5276850" cy="19050"/>
+          </a:xfrm>
+          <a:prstGeom xmlns:a="http://schemas.openxmlformats.org/drawingml/2006/main" prst="rect">
+            <a:avLst/>
+          </a:prstGeom>
+          <a:solidFill xmlns:a="http://schemas.openxmlformats.org/drawingml/2006/main">
+            <a:srgbClr val="F6C453"/>
+          </a:solidFill>
+        </p:spPr>
+      </p:sp>
+      <p:sp>
+        <p:nvSpPr>
+          <p:cNvPr id="19" name="footer-line-coral-8">
+            <a:extLst xmlns:a="http://schemas.openxmlformats.org/drawingml/2006/main">
+              <a:ext uri="{FF2B5EF4-FFF2-40B4-BE49-F238E27FC236}">
+                <a16:creationId xmlns:a16="http://schemas.microsoft.com/office/drawing/2014/main" id="{82A148FA-2F35-4B67-BA17-B7E1ABB320D5}"/>
+              </a:ext>
+            </a:extLst>
+          </p:cNvPr>
+          <p:cNvSpPr>
+            <a:spLocks xmlns:a="http://schemas.openxmlformats.org/drawingml/2006/main" noGrp="1"/>
+          </p:cNvSpPr>
+          <p:nvPr/>
+        </p:nvSpPr>
+        <p:spPr>
+          <a:xfrm xmlns:a="http://schemas.openxmlformats.org/drawingml/2006/main">
+            <a:off x="5676900" y="6429375"/>
+            <a:ext cx="2638425" cy="19050"/>
+          </a:xfrm>
+          <a:prstGeom xmlns:a="http://schemas.openxmlformats.org/drawingml/2006/main" prst="rect">
+            <a:avLst/>
+          </a:prstGeom>
+          <a:solidFill xmlns:a="http://schemas.openxmlformats.org/drawingml/2006/main">
+            <a:srgbClr val="FF7A59"/>
+          </a:solidFill>
+        </p:spPr>
+      </p:sp>
+      <p:sp>
+        <p:nvSpPr>
+          <p:cNvPr id="20" name="footer-line-teal-8">
+            <a:extLst xmlns:a="http://schemas.openxmlformats.org/drawingml/2006/main">
+              <a:ext uri="{FF2B5EF4-FFF2-40B4-BE49-F238E27FC236}">
+                <a16:creationId xmlns:a16="http://schemas.microsoft.com/office/drawing/2014/main" id="{B74DAAB8-CCB4-467F-BB70-20D6052948EE}"/>
+              </a:ext>
+            </a:extLst>
+          </p:cNvPr>
+          <p:cNvSpPr>
+            <a:spLocks xmlns:a="http://schemas.openxmlformats.org/drawingml/2006/main" noGrp="1"/>
+          </p:cNvSpPr>
+          <p:nvPr/>
+        </p:nvSpPr>
+        <p:spPr>
+          <a:xfrm xmlns:a="http://schemas.openxmlformats.org/drawingml/2006/main">
+            <a:off x="8315325" y="6429375"/>
+            <a:ext cx="2638425" cy="19050"/>
+          </a:xfrm>
+          <a:prstGeom xmlns:a="http://schemas.openxmlformats.org/drawingml/2006/main" prst="rect">
+            <a:avLst/>
+          </a:prstGeom>
+          <a:solidFill xmlns:a="http://schemas.openxmlformats.org/drawingml/2006/main">
+            <a:srgbClr val="5EEAD4"/>
+          </a:solidFill>
+        </p:spPr>
+      </p:sp>
+      <p:sp>
+        <p:nvSpPr>
+          <p:cNvPr id="21" name="footer-name-8">
+            <a:extLst xmlns:a="http://schemas.openxmlformats.org/drawingml/2006/main">
+              <a:ext uri="{FF2B5EF4-FFF2-40B4-BE49-F238E27FC236}">
+                <a16:creationId xmlns:a16="http://schemas.microsoft.com/office/drawing/2014/main" id="{BE079DBC-49E7-4FB9-ACDE-AFF0BB3BFEB7}"/>
               </a:ext>
             </a:extLst>
           </p:cNvPr>
@@ -10012,25 +11640,25 @@
             <a:pPr algn="l">
               <a:defRPr sz="825" b="1">
                 <a:solidFill>
-                  <a:srgbClr val="70647A"/>
-                </a:solidFill>
-                <a:latin typeface="Arial"/>
-                <a:ea typeface="Arial"/>
-                <a:cs typeface="Arial"/>
-              </a:defRPr>
-            </a:pPr>
-            <a:r>
-              <a:t>MUHAMMAD ALI AKBAR AL-QAHRI  /  DATA PORTFOLIO</a:t>
-            </a:r>
-          </a:p>
-        </p:txBody>
-      </p:sp>
-      <p:sp>
-        <p:nvSpPr>
-          <p:cNvPr id="17" name="footer-page-8">
-            <a:extLst xmlns:a="http://schemas.openxmlformats.org/drawingml/2006/main">
-              <a:ext uri="{FF2B5EF4-FFF2-40B4-BE49-F238E27FC236}">
-                <a16:creationId xmlns:a16="http://schemas.microsoft.com/office/drawing/2014/main" id="{60ACE54D-000F-4787-92E6-D6577C3DDA28}"/>
+                  <a:srgbClr val="B9A59B"/>
+                </a:solidFill>
+                <a:latin typeface="Consolas"/>
+                <a:ea typeface="Consolas"/>
+                <a:cs typeface="Consolas"/>
+              </a:defRPr>
+            </a:pPr>
+            <a:r>
+              <a:t>~/ali_  /  DATA INTELLIGENCE PORTFOLIO</a:t>
+            </a:r>
+          </a:p>
+        </p:txBody>
+      </p:sp>
+      <p:sp>
+        <p:nvSpPr>
+          <p:cNvPr id="22" name="footer-page-8">
+            <a:extLst xmlns:a="http://schemas.openxmlformats.org/drawingml/2006/main">
+              <a:ext uri="{FF2B5EF4-FFF2-40B4-BE49-F238E27FC236}">
+                <a16:creationId xmlns:a16="http://schemas.microsoft.com/office/drawing/2014/main" id="{C827B6A8-7B8B-4186-924F-A965A77FB8A0}"/>
               </a:ext>
             </a:extLst>
           </p:cNvPr>
@@ -10057,11 +11685,11 @@
             <a:pPr algn="r">
               <a:defRPr sz="900" b="1">
                 <a:solidFill>
-                  <a:srgbClr val="70647A"/>
-                </a:solidFill>
-                <a:latin typeface="Arial"/>
-                <a:ea typeface="Arial"/>
-                <a:cs typeface="Arial"/>
+                  <a:srgbClr val="F6C453"/>
+                </a:solidFill>
+                <a:latin typeface="Consolas"/>
+                <a:ea typeface="Consolas"/>
+                <a:cs typeface="Consolas"/>
               </a:defRPr>
             </a:pPr>
             <a:r>
@@ -10072,14 +11700,14 @@
       </p:sp>
       <p:pic>
         <p:nvPicPr>
-          <p:cNvPr id="36" name=""/>
+          <p:cNvPr id="46" name=""/>
           <p:cNvPicPr>
             <a:picLocks xmlns:a="http://schemas.openxmlformats.org/drawingml/2006/main" noChangeAspect="1"/>
           </p:cNvPicPr>
           <p:nvPr/>
         </p:nvPicPr>
         <p:blipFill>
-          <a:blip xmlns:r="http://schemas.openxmlformats.org/officeDocument/2006/relationships" xmlns:a="http://schemas.openxmlformats.org/drawingml/2006/main" r:embed="R28a9f3ae12a44d8d"/>
+          <a:blip xmlns:r="http://schemas.openxmlformats.org/officeDocument/2006/relationships" xmlns:a="http://schemas.openxmlformats.org/drawingml/2006/main" r:embed="R7408ef0a40474aeb"/>
           <a:srcRect xmlns:a="http://schemas.openxmlformats.org/drawingml/2006/main" l="0" t="4261" r="0" b="4261"/>
           <a:stretch xmlns:a="http://schemas.openxmlformats.org/drawingml/2006/main">
             <a:fillRect l="0" t="0" r="0" b="0"/>
@@ -10098,7 +11726,7 @@
     </p:spTree>
     <p:extLst>
       <p:ext uri="{BB962C8B-B14F-4D97-AF65-F5344CB8AC3E}">
-        <p14:creationId xmlns:p14="http://schemas.microsoft.com/office/powerpoint/2010/main" val="1687731816"/>
+        <p14:creationId xmlns:p14="http://schemas.microsoft.com/office/powerpoint/2010/main" val="1362856225"/>
       </p:ext>
     </p:extLst>
   </p:cSld>
@@ -10119,10 +11747,10 @@
       </p:grpSpPr>
       <p:sp>
         <p:nvSpPr>
-          <p:cNvPr id="20" name="09-bi-gallery-canvas">
-            <a:extLst xmlns:a="http://schemas.openxmlformats.org/drawingml/2006/main">
-              <a:ext uri="{FF2B5EF4-FFF2-40B4-BE49-F238E27FC236}">
-                <a16:creationId xmlns:a16="http://schemas.microsoft.com/office/drawing/2014/main" id="{4AE5AD9C-E44B-4239-82EA-8FC5FD51C383}"/>
+          <p:cNvPr id="25" name="09-bi-gallery-canvas">
+            <a:extLst xmlns:a="http://schemas.openxmlformats.org/drawingml/2006/main">
+              <a:ext uri="{FF2B5EF4-FFF2-40B4-BE49-F238E27FC236}">
+                <a16:creationId xmlns:a16="http://schemas.microsoft.com/office/drawing/2014/main" id="{E42C0068-63DF-4671-946C-316BC590ECF7}"/>
               </a:ext>
             </a:extLst>
           </p:cNvPr>
@@ -10140,16 +11768,97 @@
             <a:avLst/>
           </a:prstGeom>
           <a:solidFill xmlns:a="http://schemas.openxmlformats.org/drawingml/2006/main">
-            <a:srgbClr val="FFFFFF"/>
-          </a:solidFill>
-        </p:spPr>
-      </p:sp>
-      <p:sp>
-        <p:nvSpPr>
-          <p:cNvPr id="2" name="eyebrow-9">
-            <a:extLst xmlns:a="http://schemas.openxmlformats.org/drawingml/2006/main">
-              <a:ext uri="{FF2B5EF4-FFF2-40B4-BE49-F238E27FC236}">
-                <a16:creationId xmlns:a16="http://schemas.microsoft.com/office/drawing/2014/main" id="{A41B6DAE-63BB-4AF9-BE7F-7A363F75F6BC}"/>
+            <a:srgbClr val="120B0A"/>
+          </a:solidFill>
+        </p:spPr>
+      </p:sp>
+      <p:sp>
+        <p:nvSpPr>
+          <p:cNvPr id="2" name="09-bi-gallery-edge-gold">
+            <a:extLst xmlns:a="http://schemas.openxmlformats.org/drawingml/2006/main">
+              <a:ext uri="{FF2B5EF4-FFF2-40B4-BE49-F238E27FC236}">
+                <a16:creationId xmlns:a16="http://schemas.microsoft.com/office/drawing/2014/main" id="{9B2F70A0-E0DF-4A9F-9AED-56CBEBA520B4}"/>
+              </a:ext>
+            </a:extLst>
+          </p:cNvPr>
+          <p:cNvSpPr>
+            <a:spLocks xmlns:a="http://schemas.openxmlformats.org/drawingml/2006/main" noGrp="1"/>
+          </p:cNvSpPr>
+          <p:nvPr/>
+        </p:nvSpPr>
+        <p:spPr>
+          <a:xfrm xmlns:a="http://schemas.openxmlformats.org/drawingml/2006/main">
+            <a:off x="0" y="0"/>
+            <a:ext cx="38100" cy="2286000"/>
+          </a:xfrm>
+          <a:prstGeom xmlns:a="http://schemas.openxmlformats.org/drawingml/2006/main" prst="rect">
+            <a:avLst/>
+          </a:prstGeom>
+          <a:solidFill xmlns:a="http://schemas.openxmlformats.org/drawingml/2006/main">
+            <a:srgbClr val="F6C453"/>
+          </a:solidFill>
+        </p:spPr>
+      </p:sp>
+      <p:sp>
+        <p:nvSpPr>
+          <p:cNvPr id="3" name="09-bi-gallery-edge-coral">
+            <a:extLst xmlns:a="http://schemas.openxmlformats.org/drawingml/2006/main">
+              <a:ext uri="{FF2B5EF4-FFF2-40B4-BE49-F238E27FC236}">
+                <a16:creationId xmlns:a16="http://schemas.microsoft.com/office/drawing/2014/main" id="{5847BF22-5906-4FC2-8A38-F67D0E3A3664}"/>
+              </a:ext>
+            </a:extLst>
+          </p:cNvPr>
+          <p:cNvSpPr>
+            <a:spLocks xmlns:a="http://schemas.openxmlformats.org/drawingml/2006/main" noGrp="1"/>
+          </p:cNvSpPr>
+          <p:nvPr/>
+        </p:nvSpPr>
+        <p:spPr>
+          <a:xfrm xmlns:a="http://schemas.openxmlformats.org/drawingml/2006/main">
+            <a:off x="0" y="2286000"/>
+            <a:ext cx="38100" cy="2286000"/>
+          </a:xfrm>
+          <a:prstGeom xmlns:a="http://schemas.openxmlformats.org/drawingml/2006/main" prst="rect">
+            <a:avLst/>
+          </a:prstGeom>
+          <a:solidFill xmlns:a="http://schemas.openxmlformats.org/drawingml/2006/main">
+            <a:srgbClr val="FF7A59"/>
+          </a:solidFill>
+        </p:spPr>
+      </p:sp>
+      <p:sp>
+        <p:nvSpPr>
+          <p:cNvPr id="4" name="09-bi-gallery-edge-teal">
+            <a:extLst xmlns:a="http://schemas.openxmlformats.org/drawingml/2006/main">
+              <a:ext uri="{FF2B5EF4-FFF2-40B4-BE49-F238E27FC236}">
+                <a16:creationId xmlns:a16="http://schemas.microsoft.com/office/drawing/2014/main" id="{41BD782F-F0E6-4304-9BA1-591B9EC99FC6}"/>
+              </a:ext>
+            </a:extLst>
+          </p:cNvPr>
+          <p:cNvSpPr>
+            <a:spLocks xmlns:a="http://schemas.openxmlformats.org/drawingml/2006/main" noGrp="1"/>
+          </p:cNvSpPr>
+          <p:nvPr/>
+        </p:nvSpPr>
+        <p:spPr>
+          <a:xfrm xmlns:a="http://schemas.openxmlformats.org/drawingml/2006/main">
+            <a:off x="0" y="4572000"/>
+            <a:ext cx="38100" cy="2286000"/>
+          </a:xfrm>
+          <a:prstGeom xmlns:a="http://schemas.openxmlformats.org/drawingml/2006/main" prst="rect">
+            <a:avLst/>
+          </a:prstGeom>
+          <a:solidFill xmlns:a="http://schemas.openxmlformats.org/drawingml/2006/main">
+            <a:srgbClr val="5EEAD4"/>
+          </a:solidFill>
+        </p:spPr>
+      </p:sp>
+      <p:sp>
+        <p:nvSpPr>
+          <p:cNvPr id="5" name="eyebrow-9">
+            <a:extLst xmlns:a="http://schemas.openxmlformats.org/drawingml/2006/main">
+              <a:ext uri="{FF2B5EF4-FFF2-40B4-BE49-F238E27FC236}">
+                <a16:creationId xmlns:a16="http://schemas.microsoft.com/office/drawing/2014/main" id="{5CC599FE-D7E9-43C1-A404-A0B9E122E1C9}"/>
               </a:ext>
             </a:extLst>
           </p:cNvPr>
@@ -10176,25 +11885,25 @@
             <a:pPr algn="l">
               <a:defRPr sz="1050" b="1">
                 <a:solidFill>
-                  <a:srgbClr val="6845C6"/>
-                </a:solidFill>
-                <a:latin typeface="Arial"/>
-                <a:ea typeface="Arial"/>
-                <a:cs typeface="Arial"/>
-              </a:defRPr>
-            </a:pPr>
-            <a:r>
-              <a:t>BUSINESS INTELLIGENCE</a:t>
-            </a:r>
-          </a:p>
-        </p:txBody>
-      </p:sp>
-      <p:sp>
-        <p:nvSpPr>
-          <p:cNvPr id="3" name="title-9">
-            <a:extLst xmlns:a="http://schemas.openxmlformats.org/drawingml/2006/main">
-              <a:ext uri="{FF2B5EF4-FFF2-40B4-BE49-F238E27FC236}">
-                <a16:creationId xmlns:a16="http://schemas.microsoft.com/office/drawing/2014/main" id="{CCA36688-08B2-4B90-9633-4F5711B2B812}"/>
+                  <a:srgbClr val="FF7A59"/>
+                </a:solidFill>
+                <a:latin typeface="Consolas"/>
+                <a:ea typeface="Consolas"/>
+                <a:cs typeface="Consolas"/>
+              </a:defRPr>
+            </a:pPr>
+            <a:r>
+              <a:t>~/ BUSINESS INTELLIGENCE</a:t>
+            </a:r>
+          </a:p>
+        </p:txBody>
+      </p:sp>
+      <p:sp>
+        <p:nvSpPr>
+          <p:cNvPr id="6" name="title-9">
+            <a:extLst xmlns:a="http://schemas.openxmlformats.org/drawingml/2006/main">
+              <a:ext uri="{FF2B5EF4-FFF2-40B4-BE49-F238E27FC236}">
+                <a16:creationId xmlns:a16="http://schemas.microsoft.com/office/drawing/2014/main" id="{E357CB99-3CEB-45EE-A29E-36FEB937B573}"/>
               </a:ext>
             </a:extLst>
           </p:cNvPr>
@@ -10221,11 +11930,11 @@
             <a:pPr algn="l">
               <a:defRPr sz="3225" b="1">
                 <a:solidFill>
-                  <a:srgbClr val="180D20"/>
-                </a:solidFill>
-                <a:latin typeface="Arial"/>
-                <a:ea typeface="Arial"/>
-                <a:cs typeface="Arial"/>
+                  <a:srgbClr val="FFF7ED"/>
+                </a:solidFill>
+                <a:latin typeface="Aptos"/>
+                <a:ea typeface="Aptos"/>
+                <a:cs typeface="Aptos"/>
               </a:defRPr>
             </a:pPr>
             <a:r>
@@ -10236,10 +11945,10 @@
       </p:sp>
       <p:sp>
         <p:nvSpPr>
-          <p:cNvPr id="4" name="bi-note">
-            <a:extLst xmlns:a="http://schemas.openxmlformats.org/drawingml/2006/main">
-              <a:ext uri="{FF2B5EF4-FFF2-40B4-BE49-F238E27FC236}">
-                <a16:creationId xmlns:a16="http://schemas.microsoft.com/office/drawing/2014/main" id="{CC997CF6-1A61-4003-B4B7-A7D8AA018124}"/>
+          <p:cNvPr id="7" name="bi-note">
+            <a:extLst xmlns:a="http://schemas.openxmlformats.org/drawingml/2006/main">
+              <a:ext uri="{FF2B5EF4-FFF2-40B4-BE49-F238E27FC236}">
+                <a16:creationId xmlns:a16="http://schemas.microsoft.com/office/drawing/2014/main" id="{87CA3BC3-79D0-4C40-86D8-EFAEEEA54CF4}"/>
               </a:ext>
             </a:extLst>
           </p:cNvPr>
@@ -10266,11 +11975,11 @@
             <a:pPr algn="l">
               <a:defRPr sz="1125" b="0">
                 <a:solidFill>
-                  <a:srgbClr val="70647A"/>
-                </a:solidFill>
-                <a:latin typeface="Arial"/>
-                <a:ea typeface="Arial"/>
-                <a:cs typeface="Arial"/>
+                  <a:srgbClr val="B9A59B"/>
+                </a:solidFill>
+                <a:latin typeface="Aptos"/>
+                <a:ea typeface="Aptos"/>
+                <a:cs typeface="Aptos"/>
               </a:defRPr>
             </a:pPr>
             <a:r>
@@ -10281,10 +11990,10 @@
       </p:sp>
       <p:sp>
         <p:nvSpPr>
-          <p:cNvPr id="5" name="dash-frame-1">
-            <a:extLst xmlns:a="http://schemas.openxmlformats.org/drawingml/2006/main">
-              <a:ext uri="{FF2B5EF4-FFF2-40B4-BE49-F238E27FC236}">
-                <a16:creationId xmlns:a16="http://schemas.microsoft.com/office/drawing/2014/main" id="{E5566D89-1340-4281-9130-F10B85D95716}"/>
+          <p:cNvPr id="8" name="dash-frame-1">
+            <a:extLst xmlns:a="http://schemas.openxmlformats.org/drawingml/2006/main">
+              <a:ext uri="{FF2B5EF4-FFF2-40B4-BE49-F238E27FC236}">
+                <a16:creationId xmlns:a16="http://schemas.microsoft.com/office/drawing/2014/main" id="{B0B1CF08-95B0-4291-95F1-BC0C9947FDD5}"/>
               </a:ext>
             </a:extLst>
           </p:cNvPr>
@@ -10304,16 +12013,16 @@
             </a:avLst>
           </a:prstGeom>
           <a:solidFill xmlns:a="http://schemas.openxmlformats.org/drawingml/2006/main">
-            <a:srgbClr val="FBF7EF"/>
-          </a:solidFill>
-        </p:spPr>
-      </p:sp>
-      <p:sp>
-        <p:nvSpPr>
-          <p:cNvPr id="6" name="dash-frame-2">
-            <a:extLst xmlns:a="http://schemas.openxmlformats.org/drawingml/2006/main">
-              <a:ext uri="{FF2B5EF4-FFF2-40B4-BE49-F238E27FC236}">
-                <a16:creationId xmlns:a16="http://schemas.microsoft.com/office/drawing/2014/main" id="{8C656052-ECDC-4A95-9001-749DF49F390E}"/>
+            <a:srgbClr val="211512"/>
+          </a:solidFill>
+        </p:spPr>
+      </p:sp>
+      <p:sp>
+        <p:nvSpPr>
+          <p:cNvPr id="9" name="dash-frame-2">
+            <a:extLst xmlns:a="http://schemas.openxmlformats.org/drawingml/2006/main">
+              <a:ext uri="{FF2B5EF4-FFF2-40B4-BE49-F238E27FC236}">
+                <a16:creationId xmlns:a16="http://schemas.microsoft.com/office/drawing/2014/main" id="{931A6419-2EF0-435B-80D7-E75AB48EEB82}"/>
               </a:ext>
             </a:extLst>
           </p:cNvPr>
@@ -10333,16 +12042,16 @@
             </a:avLst>
           </a:prstGeom>
           <a:solidFill xmlns:a="http://schemas.openxmlformats.org/drawingml/2006/main">
-            <a:srgbClr val="FBF7EF"/>
-          </a:solidFill>
-        </p:spPr>
-      </p:sp>
-      <p:sp>
-        <p:nvSpPr>
-          <p:cNvPr id="7" name="dash-frame-3">
-            <a:extLst xmlns:a="http://schemas.openxmlformats.org/drawingml/2006/main">
-              <a:ext uri="{FF2B5EF4-FFF2-40B4-BE49-F238E27FC236}">
-                <a16:creationId xmlns:a16="http://schemas.microsoft.com/office/drawing/2014/main" id="{EFA4B472-6CB4-48AE-BFC1-E165DB0122C6}"/>
+            <a:srgbClr val="211512"/>
+          </a:solidFill>
+        </p:spPr>
+      </p:sp>
+      <p:sp>
+        <p:nvSpPr>
+          <p:cNvPr id="10" name="dash-frame-3">
+            <a:extLst xmlns:a="http://schemas.openxmlformats.org/drawingml/2006/main">
+              <a:ext uri="{FF2B5EF4-FFF2-40B4-BE49-F238E27FC236}">
+                <a16:creationId xmlns:a16="http://schemas.microsoft.com/office/drawing/2014/main" id="{FAF32225-6464-4D84-8F64-325ECD724F25}"/>
               </a:ext>
             </a:extLst>
           </p:cNvPr>
@@ -10362,16 +12071,16 @@
             </a:avLst>
           </a:prstGeom>
           <a:solidFill xmlns:a="http://schemas.openxmlformats.org/drawingml/2006/main">
-            <a:srgbClr val="FBF7EF"/>
-          </a:solidFill>
-        </p:spPr>
-      </p:sp>
-      <p:sp>
-        <p:nvSpPr>
-          <p:cNvPr id="8" name="dash-title-1">
-            <a:extLst xmlns:a="http://schemas.openxmlformats.org/drawingml/2006/main">
-              <a:ext uri="{FF2B5EF4-FFF2-40B4-BE49-F238E27FC236}">
-                <a16:creationId xmlns:a16="http://schemas.microsoft.com/office/drawing/2014/main" id="{68B1BF16-CC5A-47BB-8787-C6788BB50486}"/>
+            <a:srgbClr val="211512"/>
+          </a:solidFill>
+        </p:spPr>
+      </p:sp>
+      <p:sp>
+        <p:nvSpPr>
+          <p:cNvPr id="11" name="dash-title-1">
+            <a:extLst xmlns:a="http://schemas.openxmlformats.org/drawingml/2006/main">
+              <a:ext uri="{FF2B5EF4-FFF2-40B4-BE49-F238E27FC236}">
+                <a16:creationId xmlns:a16="http://schemas.microsoft.com/office/drawing/2014/main" id="{FEA74BF0-ECB4-4189-A910-950396A0D70A}"/>
               </a:ext>
             </a:extLst>
           </p:cNvPr>
@@ -10398,11 +12107,11 @@
             <a:pPr algn="l">
               <a:defRPr sz="1575" b="1">
                 <a:solidFill>
-                  <a:srgbClr val="180D20"/>
-                </a:solidFill>
-                <a:latin typeface="Arial"/>
-                <a:ea typeface="Arial"/>
-                <a:cs typeface="Arial"/>
+                  <a:srgbClr val="FFF7ED"/>
+                </a:solidFill>
+                <a:latin typeface="Aptos"/>
+                <a:ea typeface="Aptos"/>
+                <a:cs typeface="Aptos"/>
               </a:defRPr>
             </a:pPr>
             <a:r>
@@ -10413,10 +12122,10 @@
       </p:sp>
       <p:sp>
         <p:nvSpPr>
-          <p:cNvPr id="9" name="dash-caption-1">
-            <a:extLst xmlns:a="http://schemas.openxmlformats.org/drawingml/2006/main">
-              <a:ext uri="{FF2B5EF4-FFF2-40B4-BE49-F238E27FC236}">
-                <a16:creationId xmlns:a16="http://schemas.microsoft.com/office/drawing/2014/main" id="{18016C80-4499-4915-A221-A9DBC1844D65}"/>
+          <p:cNvPr id="12" name="dash-caption-1">
+            <a:extLst xmlns:a="http://schemas.openxmlformats.org/drawingml/2006/main">
+              <a:ext uri="{FF2B5EF4-FFF2-40B4-BE49-F238E27FC236}">
+                <a16:creationId xmlns:a16="http://schemas.microsoft.com/office/drawing/2014/main" id="{EDA4CDCA-2EDD-4156-B816-9E426DA02C36}"/>
               </a:ext>
             </a:extLst>
           </p:cNvPr>
@@ -10443,11 +12152,11 @@
             <a:pPr algn="l">
               <a:defRPr sz="1200" b="0">
                 <a:solidFill>
-                  <a:srgbClr val="70647A"/>
-                </a:solidFill>
-                <a:latin typeface="Arial"/>
-                <a:ea typeface="Arial"/>
-                <a:cs typeface="Arial"/>
+                  <a:srgbClr val="B9A59B"/>
+                </a:solidFill>
+                <a:latin typeface="Aptos"/>
+                <a:ea typeface="Aptos"/>
+                <a:cs typeface="Aptos"/>
               </a:defRPr>
             </a:pPr>
             <a:r>
@@ -10458,10 +12167,10 @@
       </p:sp>
       <p:sp>
         <p:nvSpPr>
-          <p:cNvPr id="10" name="dash-title-2">
-            <a:extLst xmlns:a="http://schemas.openxmlformats.org/drawingml/2006/main">
-              <a:ext uri="{FF2B5EF4-FFF2-40B4-BE49-F238E27FC236}">
-                <a16:creationId xmlns:a16="http://schemas.microsoft.com/office/drawing/2014/main" id="{2945D35B-CBCB-4637-8546-639DC5F7A348}"/>
+          <p:cNvPr id="13" name="dash-title-2">
+            <a:extLst xmlns:a="http://schemas.openxmlformats.org/drawingml/2006/main">
+              <a:ext uri="{FF2B5EF4-FFF2-40B4-BE49-F238E27FC236}">
+                <a16:creationId xmlns:a16="http://schemas.microsoft.com/office/drawing/2014/main" id="{62746E74-7CBA-4294-8570-503C3A1B4C54}"/>
               </a:ext>
             </a:extLst>
           </p:cNvPr>
@@ -10488,11 +12197,11 @@
             <a:pPr algn="l">
               <a:defRPr sz="1575" b="1">
                 <a:solidFill>
-                  <a:srgbClr val="180D20"/>
-                </a:solidFill>
-                <a:latin typeface="Arial"/>
-                <a:ea typeface="Arial"/>
-                <a:cs typeface="Arial"/>
+                  <a:srgbClr val="FFF7ED"/>
+                </a:solidFill>
+                <a:latin typeface="Aptos"/>
+                <a:ea typeface="Aptos"/>
+                <a:cs typeface="Aptos"/>
               </a:defRPr>
             </a:pPr>
             <a:r>
@@ -10503,10 +12212,10 @@
       </p:sp>
       <p:sp>
         <p:nvSpPr>
-          <p:cNvPr id="11" name="dash-caption-2">
-            <a:extLst xmlns:a="http://schemas.openxmlformats.org/drawingml/2006/main">
-              <a:ext uri="{FF2B5EF4-FFF2-40B4-BE49-F238E27FC236}">
-                <a16:creationId xmlns:a16="http://schemas.microsoft.com/office/drawing/2014/main" id="{211ED5B7-3074-46B0-8117-B4D650B45A31}"/>
+          <p:cNvPr id="14" name="dash-caption-2">
+            <a:extLst xmlns:a="http://schemas.openxmlformats.org/drawingml/2006/main">
+              <a:ext uri="{FF2B5EF4-FFF2-40B4-BE49-F238E27FC236}">
+                <a16:creationId xmlns:a16="http://schemas.microsoft.com/office/drawing/2014/main" id="{1F67E250-0AFC-4BB2-9128-E8104993C60A}"/>
               </a:ext>
             </a:extLst>
           </p:cNvPr>
@@ -10533,11 +12242,11 @@
             <a:pPr algn="l">
               <a:defRPr sz="1200" b="0">
                 <a:solidFill>
-                  <a:srgbClr val="70647A"/>
-                </a:solidFill>
-                <a:latin typeface="Arial"/>
-                <a:ea typeface="Arial"/>
-                <a:cs typeface="Arial"/>
+                  <a:srgbClr val="B9A59B"/>
+                </a:solidFill>
+                <a:latin typeface="Aptos"/>
+                <a:ea typeface="Aptos"/>
+                <a:cs typeface="Aptos"/>
               </a:defRPr>
             </a:pPr>
             <a:r>
@@ -10548,10 +12257,10 @@
       </p:sp>
       <p:sp>
         <p:nvSpPr>
-          <p:cNvPr id="12" name="dash-title-3">
-            <a:extLst xmlns:a="http://schemas.openxmlformats.org/drawingml/2006/main">
-              <a:ext uri="{FF2B5EF4-FFF2-40B4-BE49-F238E27FC236}">
-                <a16:creationId xmlns:a16="http://schemas.microsoft.com/office/drawing/2014/main" id="{ADA3493B-DB87-446E-BECD-8D2538E7AEC4}"/>
+          <p:cNvPr id="15" name="dash-title-3">
+            <a:extLst xmlns:a="http://schemas.openxmlformats.org/drawingml/2006/main">
+              <a:ext uri="{FF2B5EF4-FFF2-40B4-BE49-F238E27FC236}">
+                <a16:creationId xmlns:a16="http://schemas.microsoft.com/office/drawing/2014/main" id="{D2249AA2-7801-44B8-B049-EDC173D56448}"/>
               </a:ext>
             </a:extLst>
           </p:cNvPr>
@@ -10578,11 +12287,11 @@
             <a:pPr algn="l">
               <a:defRPr sz="1575" b="1">
                 <a:solidFill>
-                  <a:srgbClr val="180D20"/>
-                </a:solidFill>
-                <a:latin typeface="Arial"/>
-                <a:ea typeface="Arial"/>
-                <a:cs typeface="Arial"/>
+                  <a:srgbClr val="FFF7ED"/>
+                </a:solidFill>
+                <a:latin typeface="Aptos"/>
+                <a:ea typeface="Aptos"/>
+                <a:cs typeface="Aptos"/>
               </a:defRPr>
             </a:pPr>
             <a:r>
@@ -10593,10 +12302,10 @@
       </p:sp>
       <p:sp>
         <p:nvSpPr>
-          <p:cNvPr id="13" name="dash-caption-3">
-            <a:extLst xmlns:a="http://schemas.openxmlformats.org/drawingml/2006/main">
-              <a:ext uri="{FF2B5EF4-FFF2-40B4-BE49-F238E27FC236}">
-                <a16:creationId xmlns:a16="http://schemas.microsoft.com/office/drawing/2014/main" id="{AB6F2F2C-D9CF-4E97-8245-1BE33405ADAE}"/>
+          <p:cNvPr id="16" name="dash-caption-3">
+            <a:extLst xmlns:a="http://schemas.openxmlformats.org/drawingml/2006/main">
+              <a:ext uri="{FF2B5EF4-FFF2-40B4-BE49-F238E27FC236}">
+                <a16:creationId xmlns:a16="http://schemas.microsoft.com/office/drawing/2014/main" id="{36806871-1749-4153-B16F-30601B9DEEB9}"/>
               </a:ext>
             </a:extLst>
           </p:cNvPr>
@@ -10623,11 +12332,11 @@
             <a:pPr algn="l">
               <a:defRPr sz="1200" b="0">
                 <a:solidFill>
-                  <a:srgbClr val="70647A"/>
-                </a:solidFill>
-                <a:latin typeface="Arial"/>
-                <a:ea typeface="Arial"/>
-                <a:cs typeface="Arial"/>
+                  <a:srgbClr val="B9A59B"/>
+                </a:solidFill>
+                <a:latin typeface="Aptos"/>
+                <a:ea typeface="Aptos"/>
+                <a:cs typeface="Aptos"/>
               </a:defRPr>
             </a:pPr>
             <a:r>
@@ -10638,10 +12347,10 @@
       </p:sp>
       <p:sp>
         <p:nvSpPr>
-          <p:cNvPr id="14" name="footer-line-9">
-            <a:extLst xmlns:a="http://schemas.openxmlformats.org/drawingml/2006/main">
-              <a:ext uri="{FF2B5EF4-FFF2-40B4-BE49-F238E27FC236}">
-                <a16:creationId xmlns:a16="http://schemas.microsoft.com/office/drawing/2014/main" id="{879A5A0F-EC30-494C-B26B-7068F581BE52}"/>
+          <p:cNvPr id="17" name="footer-line-gold-9">
+            <a:extLst xmlns:a="http://schemas.openxmlformats.org/drawingml/2006/main">
+              <a:ext uri="{FF2B5EF4-FFF2-40B4-BE49-F238E27FC236}">
+                <a16:creationId xmlns:a16="http://schemas.microsoft.com/office/drawing/2014/main" id="{254FF8B6-F1DF-4023-B7C9-8D8824680F23}"/>
               </a:ext>
             </a:extLst>
           </p:cNvPr>
@@ -10653,22 +12362,76 @@
         <p:spPr>
           <a:xfrm xmlns:a="http://schemas.openxmlformats.org/drawingml/2006/main">
             <a:off x="400050" y="6429375"/>
-            <a:ext cx="10553700" cy="19050"/>
-          </a:xfrm>
-          <a:prstGeom xmlns:a="http://schemas.openxmlformats.org/drawingml/2006/main" prst="rect">
-            <a:avLst/>
-          </a:prstGeom>
-          <a:solidFill xmlns:a="http://schemas.openxmlformats.org/drawingml/2006/main">
-            <a:srgbClr val="DED4E6"/>
-          </a:solidFill>
-        </p:spPr>
-      </p:sp>
-      <p:sp>
-        <p:nvSpPr>
-          <p:cNvPr id="15" name="footer-name-9">
-            <a:extLst xmlns:a="http://schemas.openxmlformats.org/drawingml/2006/main">
-              <a:ext uri="{FF2B5EF4-FFF2-40B4-BE49-F238E27FC236}">
-                <a16:creationId xmlns:a16="http://schemas.microsoft.com/office/drawing/2014/main" id="{7108B7EA-B966-4428-836A-A7D9A61A700D}"/>
+            <a:ext cx="5276850" cy="19050"/>
+          </a:xfrm>
+          <a:prstGeom xmlns:a="http://schemas.openxmlformats.org/drawingml/2006/main" prst="rect">
+            <a:avLst/>
+          </a:prstGeom>
+          <a:solidFill xmlns:a="http://schemas.openxmlformats.org/drawingml/2006/main">
+            <a:srgbClr val="F6C453"/>
+          </a:solidFill>
+        </p:spPr>
+      </p:sp>
+      <p:sp>
+        <p:nvSpPr>
+          <p:cNvPr id="18" name="footer-line-coral-9">
+            <a:extLst xmlns:a="http://schemas.openxmlformats.org/drawingml/2006/main">
+              <a:ext uri="{FF2B5EF4-FFF2-40B4-BE49-F238E27FC236}">
+                <a16:creationId xmlns:a16="http://schemas.microsoft.com/office/drawing/2014/main" id="{9C0AECA4-0C3D-4798-99DC-B4E4EF3A6C84}"/>
+              </a:ext>
+            </a:extLst>
+          </p:cNvPr>
+          <p:cNvSpPr>
+            <a:spLocks xmlns:a="http://schemas.openxmlformats.org/drawingml/2006/main" noGrp="1"/>
+          </p:cNvSpPr>
+          <p:nvPr/>
+        </p:nvSpPr>
+        <p:spPr>
+          <a:xfrm xmlns:a="http://schemas.openxmlformats.org/drawingml/2006/main">
+            <a:off x="5676900" y="6429375"/>
+            <a:ext cx="2638425" cy="19050"/>
+          </a:xfrm>
+          <a:prstGeom xmlns:a="http://schemas.openxmlformats.org/drawingml/2006/main" prst="rect">
+            <a:avLst/>
+          </a:prstGeom>
+          <a:solidFill xmlns:a="http://schemas.openxmlformats.org/drawingml/2006/main">
+            <a:srgbClr val="FF7A59"/>
+          </a:solidFill>
+        </p:spPr>
+      </p:sp>
+      <p:sp>
+        <p:nvSpPr>
+          <p:cNvPr id="19" name="footer-line-teal-9">
+            <a:extLst xmlns:a="http://schemas.openxmlformats.org/drawingml/2006/main">
+              <a:ext uri="{FF2B5EF4-FFF2-40B4-BE49-F238E27FC236}">
+                <a16:creationId xmlns:a16="http://schemas.microsoft.com/office/drawing/2014/main" id="{8B6776AD-9D21-4525-B118-F1D0A220FFB1}"/>
+              </a:ext>
+            </a:extLst>
+          </p:cNvPr>
+          <p:cNvSpPr>
+            <a:spLocks xmlns:a="http://schemas.openxmlformats.org/drawingml/2006/main" noGrp="1"/>
+          </p:cNvSpPr>
+          <p:nvPr/>
+        </p:nvSpPr>
+        <p:spPr>
+          <a:xfrm xmlns:a="http://schemas.openxmlformats.org/drawingml/2006/main">
+            <a:off x="8315325" y="6429375"/>
+            <a:ext cx="2638425" cy="19050"/>
+          </a:xfrm>
+          <a:prstGeom xmlns:a="http://schemas.openxmlformats.org/drawingml/2006/main" prst="rect">
+            <a:avLst/>
+          </a:prstGeom>
+          <a:solidFill xmlns:a="http://schemas.openxmlformats.org/drawingml/2006/main">
+            <a:srgbClr val="5EEAD4"/>
+          </a:solidFill>
+        </p:spPr>
+      </p:sp>
+      <p:sp>
+        <p:nvSpPr>
+          <p:cNvPr id="20" name="footer-name-9">
+            <a:extLst xmlns:a="http://schemas.openxmlformats.org/drawingml/2006/main">
+              <a:ext uri="{FF2B5EF4-FFF2-40B4-BE49-F238E27FC236}">
+                <a16:creationId xmlns:a16="http://schemas.microsoft.com/office/drawing/2014/main" id="{B739C06A-733B-4C34-9496-2855152C366D}"/>
               </a:ext>
             </a:extLst>
           </p:cNvPr>
@@ -10695,25 +12458,25 @@
             <a:pPr algn="l">
               <a:defRPr sz="825" b="1">
                 <a:solidFill>
-                  <a:srgbClr val="70647A"/>
-                </a:solidFill>
-                <a:latin typeface="Arial"/>
-                <a:ea typeface="Arial"/>
-                <a:cs typeface="Arial"/>
-              </a:defRPr>
-            </a:pPr>
-            <a:r>
-              <a:t>MUHAMMAD ALI AKBAR AL-QAHRI  /  DATA PORTFOLIO</a:t>
-            </a:r>
-          </a:p>
-        </p:txBody>
-      </p:sp>
-      <p:sp>
-        <p:nvSpPr>
-          <p:cNvPr id="16" name="footer-page-9">
-            <a:extLst xmlns:a="http://schemas.openxmlformats.org/drawingml/2006/main">
-              <a:ext uri="{FF2B5EF4-FFF2-40B4-BE49-F238E27FC236}">
-                <a16:creationId xmlns:a16="http://schemas.microsoft.com/office/drawing/2014/main" id="{C1B58406-6712-4362-85B9-C4B974EE012A}"/>
+                  <a:srgbClr val="B9A59B"/>
+                </a:solidFill>
+                <a:latin typeface="Consolas"/>
+                <a:ea typeface="Consolas"/>
+                <a:cs typeface="Consolas"/>
+              </a:defRPr>
+            </a:pPr>
+            <a:r>
+              <a:t>~/ali_  /  DATA INTELLIGENCE PORTFOLIO</a:t>
+            </a:r>
+          </a:p>
+        </p:txBody>
+      </p:sp>
+      <p:sp>
+        <p:nvSpPr>
+          <p:cNvPr id="21" name="footer-page-9">
+            <a:extLst xmlns:a="http://schemas.openxmlformats.org/drawingml/2006/main">
+              <a:ext uri="{FF2B5EF4-FFF2-40B4-BE49-F238E27FC236}">
+                <a16:creationId xmlns:a16="http://schemas.microsoft.com/office/drawing/2014/main" id="{D3D0B22E-D99A-42F7-882E-C1D0CA26E62F}"/>
               </a:ext>
             </a:extLst>
           </p:cNvPr>
@@ -10740,11 +12503,11 @@
             <a:pPr algn="r">
               <a:defRPr sz="900" b="1">
                 <a:solidFill>
-                  <a:srgbClr val="70647A"/>
-                </a:solidFill>
-                <a:latin typeface="Arial"/>
-                <a:ea typeface="Arial"/>
-                <a:cs typeface="Arial"/>
+                  <a:srgbClr val="F6C453"/>
+                </a:solidFill>
+                <a:latin typeface="Consolas"/>
+                <a:ea typeface="Consolas"/>
+                <a:cs typeface="Consolas"/>
               </a:defRPr>
             </a:pPr>
             <a:r>
@@ -10755,14 +12518,14 @@
       </p:sp>
       <p:pic>
         <p:nvPicPr>
-          <p:cNvPr id="36" name=""/>
+          <p:cNvPr id="46" name=""/>
           <p:cNvPicPr>
             <a:picLocks xmlns:a="http://schemas.openxmlformats.org/drawingml/2006/main" noChangeAspect="1"/>
           </p:cNvPicPr>
           <p:nvPr/>
         </p:nvPicPr>
         <p:blipFill>
-          <a:blip xmlns:r="http://schemas.openxmlformats.org/officeDocument/2006/relationships" xmlns:a="http://schemas.openxmlformats.org/drawingml/2006/main" r:embed="R727b4417622e492b"/>
+          <a:blip xmlns:r="http://schemas.openxmlformats.org/officeDocument/2006/relationships" xmlns:a="http://schemas.openxmlformats.org/drawingml/2006/main" r:embed="Ra7497954e18d44c4"/>
           <a:srcRect xmlns:a="http://schemas.openxmlformats.org/drawingml/2006/main" l="10463" t="0" r="10463" b="0"/>
           <a:stretch xmlns:a="http://schemas.openxmlformats.org/drawingml/2006/main">
             <a:fillRect l="0" t="0" r="0" b="0"/>
@@ -10780,14 +12543,14 @@
       </p:pic>
       <p:pic>
         <p:nvPicPr>
-          <p:cNvPr id="37" name=""/>
+          <p:cNvPr id="47" name=""/>
           <p:cNvPicPr>
             <a:picLocks xmlns:a="http://schemas.openxmlformats.org/drawingml/2006/main" noChangeAspect="1"/>
           </p:cNvPicPr>
           <p:nvPr/>
         </p:nvPicPr>
         <p:blipFill>
-          <a:blip xmlns:r="http://schemas.openxmlformats.org/officeDocument/2006/relationships" xmlns:a="http://schemas.openxmlformats.org/drawingml/2006/main" r:embed="Rac864c6773924795"/>
+          <a:blip xmlns:r="http://schemas.openxmlformats.org/officeDocument/2006/relationships" xmlns:a="http://schemas.openxmlformats.org/drawingml/2006/main" r:embed="R7aa0a81250af4a6f"/>
           <a:srcRect xmlns:a="http://schemas.openxmlformats.org/drawingml/2006/main" l="0" t="2817" r="0" b="2817"/>
           <a:stretch xmlns:a="http://schemas.openxmlformats.org/drawingml/2006/main">
             <a:fillRect l="0" t="0" r="0" b="0"/>
@@ -10805,14 +12568,14 @@
       </p:pic>
       <p:pic>
         <p:nvPicPr>
-          <p:cNvPr id="38" name=""/>
+          <p:cNvPr id="48" name=""/>
           <p:cNvPicPr>
             <a:picLocks xmlns:a="http://schemas.openxmlformats.org/drawingml/2006/main" noChangeAspect="1"/>
           </p:cNvPicPr>
           <p:nvPr/>
         </p:nvPicPr>
         <p:blipFill>
-          <a:blip xmlns:r="http://schemas.openxmlformats.org/officeDocument/2006/relationships" xmlns:a="http://schemas.openxmlformats.org/drawingml/2006/main" r:embed="R4ce175943bbe423f"/>
+          <a:blip xmlns:r="http://schemas.openxmlformats.org/officeDocument/2006/relationships" xmlns:a="http://schemas.openxmlformats.org/drawingml/2006/main" r:embed="Rb1b82558ee204e3d"/>
           <a:srcRect xmlns:a="http://schemas.openxmlformats.org/drawingml/2006/main" l="0" t="2500" r="0" b="2500"/>
           <a:stretch xmlns:a="http://schemas.openxmlformats.org/drawingml/2006/main">
             <a:fillRect l="0" t="0" r="0" b="0"/>
@@ -10831,7 +12594,7 @@
     </p:spTree>
     <p:extLst>
       <p:ext uri="{BB962C8B-B14F-4D97-AF65-F5344CB8AC3E}">
-        <p14:creationId xmlns:p14="http://schemas.microsoft.com/office/powerpoint/2010/main" val="356870525"/>
+        <p14:creationId xmlns:p14="http://schemas.microsoft.com/office/powerpoint/2010/main" val="973202348"/>
       </p:ext>
     </p:extLst>
   </p:cSld>

--- a/outputs/Muhammad_Ali_Akbar_Al-Qahri_Portfolio.pptx
+++ b/outputs/Muhammad_Ali_Akbar_Al-Qahri_Portfolio.pptx
@@ -2,23 +2,23 @@
 <file path=ppt/presentation.xml><?xml version="1.0" encoding="utf-8"?>
 <p:presentation xmlns:p="http://schemas.openxmlformats.org/presentationml/2006/main">
   <p:sldMasterIdLst>
-    <p:sldMasterId xmlns:r="http://schemas.openxmlformats.org/officeDocument/2006/relationships" id="2147483648" r:id="R86ae9cf3ab614c21"/>
+    <p:sldMasterId xmlns:r="http://schemas.openxmlformats.org/officeDocument/2006/relationships" id="2147483648" r:id="R32c41cd20ab047e5"/>
   </p:sldMasterIdLst>
   <p:notesMasterIdLst>
-    <p:notesMasterId xmlns:r="http://schemas.openxmlformats.org/officeDocument/2006/relationships" r:id="R5de9fbe5c35d4cdf"/>
+    <p:notesMasterId xmlns:r="http://schemas.openxmlformats.org/officeDocument/2006/relationships" r:id="Rc11a8191fb874bf4"/>
   </p:notesMasterIdLst>
   <p:sldIdLst>
-    <p:sldId xmlns:r="http://schemas.openxmlformats.org/officeDocument/2006/relationships" id="256" r:id="R593d38640c2c4815"/>
-    <p:sldId xmlns:r="http://schemas.openxmlformats.org/officeDocument/2006/relationships" id="257" r:id="Ra6e5a523b94146fd"/>
-    <p:sldId xmlns:r="http://schemas.openxmlformats.org/officeDocument/2006/relationships" id="258" r:id="R9c3a40b21b904cb8"/>
-    <p:sldId xmlns:r="http://schemas.openxmlformats.org/officeDocument/2006/relationships" id="259" r:id="Rf67c53b0d0424fd2"/>
-    <p:sldId xmlns:r="http://schemas.openxmlformats.org/officeDocument/2006/relationships" id="260" r:id="R266f217c20354e61"/>
-    <p:sldId xmlns:r="http://schemas.openxmlformats.org/officeDocument/2006/relationships" id="261" r:id="Rc33ab78779fc42a7"/>
-    <p:sldId xmlns:r="http://schemas.openxmlformats.org/officeDocument/2006/relationships" id="262" r:id="Ra8d450b067054f78"/>
-    <p:sldId xmlns:r="http://schemas.openxmlformats.org/officeDocument/2006/relationships" id="263" r:id="Rf6ebf4c091364269"/>
-    <p:sldId xmlns:r="http://schemas.openxmlformats.org/officeDocument/2006/relationships" id="264" r:id="R63b6217a886940e2"/>
-    <p:sldId xmlns:r="http://schemas.openxmlformats.org/officeDocument/2006/relationships" id="265" r:id="R222af0f01ded42b2"/>
-    <p:sldId xmlns:r="http://schemas.openxmlformats.org/officeDocument/2006/relationships" id="266" r:id="R5c5b20d4cd6245d3"/>
+    <p:sldId xmlns:r="http://schemas.openxmlformats.org/officeDocument/2006/relationships" id="256" r:id="R367263dc2683456d"/>
+    <p:sldId xmlns:r="http://schemas.openxmlformats.org/officeDocument/2006/relationships" id="257" r:id="R267e7b15ca204ff8"/>
+    <p:sldId xmlns:r="http://schemas.openxmlformats.org/officeDocument/2006/relationships" id="258" r:id="R1028904b46784514"/>
+    <p:sldId xmlns:r="http://schemas.openxmlformats.org/officeDocument/2006/relationships" id="259" r:id="Re3597415478f41a8"/>
+    <p:sldId xmlns:r="http://schemas.openxmlformats.org/officeDocument/2006/relationships" id="260" r:id="R3c273cd166c34cad"/>
+    <p:sldId xmlns:r="http://schemas.openxmlformats.org/officeDocument/2006/relationships" id="261" r:id="R2db5aa3f83934917"/>
+    <p:sldId xmlns:r="http://schemas.openxmlformats.org/officeDocument/2006/relationships" id="262" r:id="R8240c1d1f1fc4e86"/>
+    <p:sldId xmlns:r="http://schemas.openxmlformats.org/officeDocument/2006/relationships" id="263" r:id="R5c10c51e98794864"/>
+    <p:sldId xmlns:r="http://schemas.openxmlformats.org/officeDocument/2006/relationships" id="264" r:id="R5ce7ab29fe8643e7"/>
+    <p:sldId xmlns:r="http://schemas.openxmlformats.org/officeDocument/2006/relationships" id="265" r:id="R1b33f5d04aa94dee"/>
+    <p:sldId xmlns:r="http://schemas.openxmlformats.org/officeDocument/2006/relationships" id="266" r:id="R261616ffbac44b28"/>
   </p:sldIdLst>
   <p:sldSz cx="12192000" cy="6858000"/>
   <p:notesSz cx="6858000" cy="9144000"/>
@@ -1271,7 +1271,7 @@
   </p:cSld>
   <p:clrMap bg1="lt1" tx1="dk1" bg2="lt2" tx2="dk2" accent1="accent1" accent2="accent2" accent3="accent3" accent4="accent4" accent5="accent5" accent6="accent6" hlink="hlink" folHlink="folHlink"/>
   <p:sldLayoutIdLst>
-    <p:sldLayoutId xmlns:r="http://schemas.openxmlformats.org/officeDocument/2006/relationships" id="2147483649" r:id="Rfea203bc5bed4652"/>
+    <p:sldLayoutId xmlns:r="http://schemas.openxmlformats.org/officeDocument/2006/relationships" id="2147483649" r:id="R9f213c02ad394380"/>
   </p:sldLayoutIdLst>
   <p:txStyles>
     <p:titleStyle>
@@ -1815,7 +1815,7 @@
           <p:cNvPr id="30" name="01-cover-canvas">
             <a:extLst xmlns:a="http://schemas.openxmlformats.org/drawingml/2006/main">
               <a:ext uri="{FF2B5EF4-FFF2-40B4-BE49-F238E27FC236}">
-                <a16:creationId xmlns:a16="http://schemas.microsoft.com/office/drawing/2014/main" id="{07249081-A0AA-4F32-800F-8E9910C5EAEB}"/>
+                <a16:creationId xmlns:a16="http://schemas.microsoft.com/office/drawing/2014/main" id="{626A7567-6B99-471C-BF89-BCB893C1B9C5}"/>
               </a:ext>
             </a:extLst>
           </p:cNvPr>
@@ -1842,7 +1842,7 @@
           <p:cNvPr id="2" name="01-cover-edge-gold">
             <a:extLst xmlns:a="http://schemas.openxmlformats.org/drawingml/2006/main">
               <a:ext uri="{FF2B5EF4-FFF2-40B4-BE49-F238E27FC236}">
-                <a16:creationId xmlns:a16="http://schemas.microsoft.com/office/drawing/2014/main" id="{624C6AF7-3B15-41F9-98D8-8E0C390B587E}"/>
+                <a16:creationId xmlns:a16="http://schemas.microsoft.com/office/drawing/2014/main" id="{56CF41E0-2736-47CF-A150-45924B552887}"/>
               </a:ext>
             </a:extLst>
           </p:cNvPr>
@@ -1869,7 +1869,7 @@
           <p:cNvPr id="3" name="01-cover-edge-coral">
             <a:extLst xmlns:a="http://schemas.openxmlformats.org/drawingml/2006/main">
               <a:ext uri="{FF2B5EF4-FFF2-40B4-BE49-F238E27FC236}">
-                <a16:creationId xmlns:a16="http://schemas.microsoft.com/office/drawing/2014/main" id="{E91AD339-66AA-4859-9F2E-A68BEDF33B6F}"/>
+                <a16:creationId xmlns:a16="http://schemas.microsoft.com/office/drawing/2014/main" id="{56FE4387-6D13-4FC9-932A-7367600A2369}"/>
               </a:ext>
             </a:extLst>
           </p:cNvPr>
@@ -1896,7 +1896,7 @@
           <p:cNvPr id="4" name="01-cover-edge-teal">
             <a:extLst xmlns:a="http://schemas.openxmlformats.org/drawingml/2006/main">
               <a:ext uri="{FF2B5EF4-FFF2-40B4-BE49-F238E27FC236}">
-                <a16:creationId xmlns:a16="http://schemas.microsoft.com/office/drawing/2014/main" id="{C029E0CC-1582-4AE5-A37B-D2704E445EA6}"/>
+                <a16:creationId xmlns:a16="http://schemas.microsoft.com/office/drawing/2014/main" id="{D9BF8D9F-E261-4721-874F-300A622C43B0}"/>
               </a:ext>
             </a:extLst>
           </p:cNvPr>
@@ -1923,7 +1923,7 @@
           <p:cNvPr id="5" name="cover-kicker">
             <a:extLst xmlns:a="http://schemas.openxmlformats.org/drawingml/2006/main">
               <a:ext uri="{FF2B5EF4-FFF2-40B4-BE49-F238E27FC236}">
-                <a16:creationId xmlns:a16="http://schemas.microsoft.com/office/drawing/2014/main" id="{85986C85-AAF5-48EF-BBF1-CFD58528E0DE}"/>
+                <a16:creationId xmlns:a16="http://schemas.microsoft.com/office/drawing/2014/main" id="{FA577762-EB20-420F-BE16-FDD59CD8D4D7}"/>
               </a:ext>
             </a:extLst>
           </p:cNvPr>
@@ -1968,7 +1968,7 @@
           <p:cNvPr id="6" name="cover-title">
             <a:extLst xmlns:a="http://schemas.openxmlformats.org/drawingml/2006/main">
               <a:ext uri="{FF2B5EF4-FFF2-40B4-BE49-F238E27FC236}">
-                <a16:creationId xmlns:a16="http://schemas.microsoft.com/office/drawing/2014/main" id="{424F1659-C2AC-4DBC-8411-385D97555C7D}"/>
+                <a16:creationId xmlns:a16="http://schemas.microsoft.com/office/drawing/2014/main" id="{4C439319-C5EB-494B-ACD8-A43A40AB1F4F}"/>
               </a:ext>
             </a:extLst>
           </p:cNvPr>
@@ -2014,7 +2014,7 @@
           <p:cNvPr id="7" name="cover-subtitle">
             <a:extLst xmlns:a="http://schemas.openxmlformats.org/drawingml/2006/main">
               <a:ext uri="{FF2B5EF4-FFF2-40B4-BE49-F238E27FC236}">
-                <a16:creationId xmlns:a16="http://schemas.microsoft.com/office/drawing/2014/main" id="{43E3639B-866C-46D1-9696-C9099F5EFE5B}"/>
+                <a16:creationId xmlns:a16="http://schemas.microsoft.com/office/drawing/2014/main" id="{BAF36F89-E7BD-4DBA-B020-9173229E5CBE}"/>
               </a:ext>
             </a:extLst>
           </p:cNvPr>
@@ -2059,7 +2059,7 @@
           <p:cNvPr id="8" name="cover-pill-1-bg">
             <a:extLst xmlns:a="http://schemas.openxmlformats.org/drawingml/2006/main">
               <a:ext uri="{FF2B5EF4-FFF2-40B4-BE49-F238E27FC236}">
-                <a16:creationId xmlns:a16="http://schemas.microsoft.com/office/drawing/2014/main" id="{E87DCA60-68CE-427D-87F7-69E2A3FC5109}"/>
+                <a16:creationId xmlns:a16="http://schemas.microsoft.com/office/drawing/2014/main" id="{50D6ABE1-F49B-47C0-9119-C10BF9B27CC2}"/>
               </a:ext>
             </a:extLst>
           </p:cNvPr>
@@ -2088,7 +2088,7 @@
           <p:cNvPr id="9" name="cover-pill-1-text">
             <a:extLst xmlns:a="http://schemas.openxmlformats.org/drawingml/2006/main">
               <a:ext uri="{FF2B5EF4-FFF2-40B4-BE49-F238E27FC236}">
-                <a16:creationId xmlns:a16="http://schemas.microsoft.com/office/drawing/2014/main" id="{409CEDD7-63C4-447D-BAF2-172B4B1E3A92}"/>
+                <a16:creationId xmlns:a16="http://schemas.microsoft.com/office/drawing/2014/main" id="{55C69B13-9D5A-4AB4-A1FD-2B785C5281A9}"/>
               </a:ext>
             </a:extLst>
           </p:cNvPr>
@@ -2133,7 +2133,7 @@
           <p:cNvPr id="10" name="cover-pill-2-bg">
             <a:extLst xmlns:a="http://schemas.openxmlformats.org/drawingml/2006/main">
               <a:ext uri="{FF2B5EF4-FFF2-40B4-BE49-F238E27FC236}">
-                <a16:creationId xmlns:a16="http://schemas.microsoft.com/office/drawing/2014/main" id="{FC8CB479-823D-4C7D-8F3D-2E4DB3319361}"/>
+                <a16:creationId xmlns:a16="http://schemas.microsoft.com/office/drawing/2014/main" id="{CEB04690-7F22-44B1-A6BA-E672ECE6CF5E}"/>
               </a:ext>
             </a:extLst>
           </p:cNvPr>
@@ -2162,7 +2162,7 @@
           <p:cNvPr id="11" name="cover-pill-2-text">
             <a:extLst xmlns:a="http://schemas.openxmlformats.org/drawingml/2006/main">
               <a:ext uri="{FF2B5EF4-FFF2-40B4-BE49-F238E27FC236}">
-                <a16:creationId xmlns:a16="http://schemas.microsoft.com/office/drawing/2014/main" id="{036C0FA4-1129-4A66-A17B-CDCBDC6A9539}"/>
+                <a16:creationId xmlns:a16="http://schemas.microsoft.com/office/drawing/2014/main" id="{AB63C782-5FED-4A1C-8C96-986F01339375}"/>
               </a:ext>
             </a:extLst>
           </p:cNvPr>
@@ -2207,7 +2207,7 @@
           <p:cNvPr id="12" name="cover-pill-3-bg">
             <a:extLst xmlns:a="http://schemas.openxmlformats.org/drawingml/2006/main">
               <a:ext uri="{FF2B5EF4-FFF2-40B4-BE49-F238E27FC236}">
-                <a16:creationId xmlns:a16="http://schemas.microsoft.com/office/drawing/2014/main" id="{31879E1D-6AF0-4A42-B8F3-FB1491A64F1E}"/>
+                <a16:creationId xmlns:a16="http://schemas.microsoft.com/office/drawing/2014/main" id="{60EAB2A2-F65F-4E27-A3F4-EE52155BAEA5}"/>
               </a:ext>
             </a:extLst>
           </p:cNvPr>
@@ -2236,7 +2236,7 @@
           <p:cNvPr id="13" name="cover-pill-3-text">
             <a:extLst xmlns:a="http://schemas.openxmlformats.org/drawingml/2006/main">
               <a:ext uri="{FF2B5EF4-FFF2-40B4-BE49-F238E27FC236}">
-                <a16:creationId xmlns:a16="http://schemas.microsoft.com/office/drawing/2014/main" id="{BBAC1D68-77CD-44CF-BBB2-B92935391422}"/>
+                <a16:creationId xmlns:a16="http://schemas.microsoft.com/office/drawing/2014/main" id="{A6DDF7A0-54AE-449A-8AC0-20E0E580F127}"/>
               </a:ext>
             </a:extLst>
           </p:cNvPr>
@@ -2281,7 +2281,7 @@
           <p:cNvPr id="14" name="cover-contact-panel">
             <a:extLst xmlns:a="http://schemas.openxmlformats.org/drawingml/2006/main">
               <a:ext uri="{FF2B5EF4-FFF2-40B4-BE49-F238E27FC236}">
-                <a16:creationId xmlns:a16="http://schemas.microsoft.com/office/drawing/2014/main" id="{677348D2-A494-4C6B-A134-778C798DC851}"/>
+                <a16:creationId xmlns:a16="http://schemas.microsoft.com/office/drawing/2014/main" id="{F8F9C3CD-4F6B-4994-8EF8-DDDF5E4EF4A6}"/>
               </a:ext>
             </a:extLst>
           </p:cNvPr>
@@ -2310,7 +2310,7 @@
           <p:cNvPr id="15" name="cover-name">
             <a:extLst xmlns:a="http://schemas.openxmlformats.org/drawingml/2006/main">
               <a:ext uri="{FF2B5EF4-FFF2-40B4-BE49-F238E27FC236}">
-                <a16:creationId xmlns:a16="http://schemas.microsoft.com/office/drawing/2014/main" id="{E71C6AEF-B2C4-4EC9-8182-C5DE19C9A7E4}"/>
+                <a16:creationId xmlns:a16="http://schemas.microsoft.com/office/drawing/2014/main" id="{50B5DBA1-1B45-4069-B4E4-0A13EA319F02}"/>
               </a:ext>
             </a:extLst>
           </p:cNvPr>
@@ -2355,7 +2355,7 @@
           <p:cNvPr id="16" name="cover-role">
             <a:extLst xmlns:a="http://schemas.openxmlformats.org/drawingml/2006/main">
               <a:ext uri="{FF2B5EF4-FFF2-40B4-BE49-F238E27FC236}">
-                <a16:creationId xmlns:a16="http://schemas.microsoft.com/office/drawing/2014/main" id="{3CE86E3D-AEF7-448F-A2FC-2CF541E45A4E}"/>
+                <a16:creationId xmlns:a16="http://schemas.microsoft.com/office/drawing/2014/main" id="{D2F9E8FD-1735-4C9B-BEBA-27A6304AA66C}"/>
               </a:ext>
             </a:extLst>
           </p:cNvPr>
@@ -2400,7 +2400,7 @@
           <p:cNvPr id="17" name="cover-email">
             <a:extLst xmlns:a="http://schemas.openxmlformats.org/drawingml/2006/main">
               <a:ext uri="{FF2B5EF4-FFF2-40B4-BE49-F238E27FC236}">
-                <a16:creationId xmlns:a16="http://schemas.microsoft.com/office/drawing/2014/main" id="{25D311CE-88CE-463A-905D-AF7465BEFBF7}"/>
+                <a16:creationId xmlns:a16="http://schemas.microsoft.com/office/drawing/2014/main" id="{6F081AD7-93B1-4CDC-9FFF-AA9E3A3C8E4B}"/>
               </a:ext>
             </a:extLst>
           </p:cNvPr>
@@ -2445,7 +2445,7 @@
           <p:cNvPr id="18" name="cover-site-frame">
             <a:extLst xmlns:a="http://schemas.openxmlformats.org/drawingml/2006/main">
               <a:ext uri="{FF2B5EF4-FFF2-40B4-BE49-F238E27FC236}">
-                <a16:creationId xmlns:a16="http://schemas.microsoft.com/office/drawing/2014/main" id="{E5FD3444-3143-4E24-98F2-8339C8E175DD}"/>
+                <a16:creationId xmlns:a16="http://schemas.microsoft.com/office/drawing/2014/main" id="{F824071E-C9CF-4B24-AA6B-8E5D61403F6D}"/>
               </a:ext>
             </a:extLst>
           </p:cNvPr>
@@ -2474,7 +2474,7 @@
           <p:cNvPr id="19" name="cover-site-label">
             <a:extLst xmlns:a="http://schemas.openxmlformats.org/drawingml/2006/main">
               <a:ext uri="{FF2B5EF4-FFF2-40B4-BE49-F238E27FC236}">
-                <a16:creationId xmlns:a16="http://schemas.microsoft.com/office/drawing/2014/main" id="{A82B9F33-B5DD-4950-981D-D1603138B826}"/>
+                <a16:creationId xmlns:a16="http://schemas.microsoft.com/office/drawing/2014/main" id="{31BAF09D-9CF8-4C49-9291-BD84EE8B7689}"/>
               </a:ext>
             </a:extLst>
           </p:cNvPr>
@@ -2519,7 +2519,7 @@
           <p:cNvPr id="20" name="cover-swatch-gold">
             <a:extLst xmlns:a="http://schemas.openxmlformats.org/drawingml/2006/main">
               <a:ext uri="{FF2B5EF4-FFF2-40B4-BE49-F238E27FC236}">
-                <a16:creationId xmlns:a16="http://schemas.microsoft.com/office/drawing/2014/main" id="{C906A6A2-F4EE-43FA-A40A-D7BBD0DB593C}"/>
+                <a16:creationId xmlns:a16="http://schemas.microsoft.com/office/drawing/2014/main" id="{BD085350-5D73-4793-8CE3-EF125BF11F19}"/>
               </a:ext>
             </a:extLst>
           </p:cNvPr>
@@ -2548,7 +2548,7 @@
           <p:cNvPr id="21" name="cover-swatch-coral">
             <a:extLst xmlns:a="http://schemas.openxmlformats.org/drawingml/2006/main">
               <a:ext uri="{FF2B5EF4-FFF2-40B4-BE49-F238E27FC236}">
-                <a16:creationId xmlns:a16="http://schemas.microsoft.com/office/drawing/2014/main" id="{AD5FD5EC-4950-4F8D-A3FB-9E3174264B60}"/>
+                <a16:creationId xmlns:a16="http://schemas.microsoft.com/office/drawing/2014/main" id="{CC35DF65-1D94-4CCA-B701-79DED1DFA90D}"/>
               </a:ext>
             </a:extLst>
           </p:cNvPr>
@@ -2577,7 +2577,7 @@
           <p:cNvPr id="22" name="cover-swatch-teal">
             <a:extLst xmlns:a="http://schemas.openxmlformats.org/drawingml/2006/main">
               <a:ext uri="{FF2B5EF4-FFF2-40B4-BE49-F238E27FC236}">
-                <a16:creationId xmlns:a16="http://schemas.microsoft.com/office/drawing/2014/main" id="{5F78E29F-2B04-4335-A584-F38D06453FDE}"/>
+                <a16:creationId xmlns:a16="http://schemas.microsoft.com/office/drawing/2014/main" id="{46DC0973-660A-47ED-88BB-C9409A6B482F}"/>
               </a:ext>
             </a:extLst>
           </p:cNvPr>
@@ -2606,7 +2606,7 @@
           <p:cNvPr id="23" name="cover-site-copy">
             <a:extLst xmlns:a="http://schemas.openxmlformats.org/drawingml/2006/main">
               <a:ext uri="{FF2B5EF4-FFF2-40B4-BE49-F238E27FC236}">
-                <a16:creationId xmlns:a16="http://schemas.microsoft.com/office/drawing/2014/main" id="{11782E38-11CB-4AF5-9D74-8F6150CE6B42}"/>
+                <a16:creationId xmlns:a16="http://schemas.microsoft.com/office/drawing/2014/main" id="{DDE5F6BA-C887-4BF5-801A-C889DA519A55}"/>
               </a:ext>
             </a:extLst>
           </p:cNvPr>
@@ -2651,7 +2651,7 @@
           <p:cNvPr id="24" name="footer-line-gold-1">
             <a:extLst xmlns:a="http://schemas.openxmlformats.org/drawingml/2006/main">
               <a:ext uri="{FF2B5EF4-FFF2-40B4-BE49-F238E27FC236}">
-                <a16:creationId xmlns:a16="http://schemas.microsoft.com/office/drawing/2014/main" id="{811D24CA-3DDB-4D04-B94A-9BD0328574AF}"/>
+                <a16:creationId xmlns:a16="http://schemas.microsoft.com/office/drawing/2014/main" id="{0AEB74FF-8149-4F70-93BE-3002F7C7FDAE}"/>
               </a:ext>
             </a:extLst>
           </p:cNvPr>
@@ -2678,7 +2678,7 @@
           <p:cNvPr id="25" name="footer-line-coral-1">
             <a:extLst xmlns:a="http://schemas.openxmlformats.org/drawingml/2006/main">
               <a:ext uri="{FF2B5EF4-FFF2-40B4-BE49-F238E27FC236}">
-                <a16:creationId xmlns:a16="http://schemas.microsoft.com/office/drawing/2014/main" id="{0F95C558-4682-4633-A2FD-4C9CC55E2D8D}"/>
+                <a16:creationId xmlns:a16="http://schemas.microsoft.com/office/drawing/2014/main" id="{BDB39D0F-CC88-4B70-973A-F684635DB2CA}"/>
               </a:ext>
             </a:extLst>
           </p:cNvPr>
@@ -2705,7 +2705,7 @@
           <p:cNvPr id="26" name="footer-line-teal-1">
             <a:extLst xmlns:a="http://schemas.openxmlformats.org/drawingml/2006/main">
               <a:ext uri="{FF2B5EF4-FFF2-40B4-BE49-F238E27FC236}">
-                <a16:creationId xmlns:a16="http://schemas.microsoft.com/office/drawing/2014/main" id="{181A9748-3C86-4134-81A6-ADDFA3D83B2A}"/>
+                <a16:creationId xmlns:a16="http://schemas.microsoft.com/office/drawing/2014/main" id="{1C805FB7-B64F-4ED8-B322-27E4E9A244DB}"/>
               </a:ext>
             </a:extLst>
           </p:cNvPr>
@@ -2732,7 +2732,7 @@
           <p:cNvPr id="27" name="footer-name-1">
             <a:extLst xmlns:a="http://schemas.openxmlformats.org/drawingml/2006/main">
               <a:ext uri="{FF2B5EF4-FFF2-40B4-BE49-F238E27FC236}">
-                <a16:creationId xmlns:a16="http://schemas.microsoft.com/office/drawing/2014/main" id="{A5CCA943-EF71-4F85-A29B-201D7AC51A25}"/>
+                <a16:creationId xmlns:a16="http://schemas.microsoft.com/office/drawing/2014/main" id="{B3B15A19-F6CA-4C77-8834-EA085CEC0D33}"/>
               </a:ext>
             </a:extLst>
           </p:cNvPr>
@@ -2777,7 +2777,7 @@
           <p:cNvPr id="28" name="footer-page-1">
             <a:extLst xmlns:a="http://schemas.openxmlformats.org/drawingml/2006/main">
               <a:ext uri="{FF2B5EF4-FFF2-40B4-BE49-F238E27FC236}">
-                <a16:creationId xmlns:a16="http://schemas.microsoft.com/office/drawing/2014/main" id="{5BBCA88C-7559-47D8-BAEA-6A2FEA1F9741}"/>
+                <a16:creationId xmlns:a16="http://schemas.microsoft.com/office/drawing/2014/main" id="{BA1F091B-4F3F-4A0D-98A2-F6C8EFE5412D}"/>
               </a:ext>
             </a:extLst>
           </p:cNvPr>
@@ -2826,7 +2826,7 @@
           <p:nvPr/>
         </p:nvPicPr>
         <p:blipFill>
-          <a:blip xmlns:r="http://schemas.openxmlformats.org/officeDocument/2006/relationships" xmlns:a="http://schemas.openxmlformats.org/drawingml/2006/main" r:embed="R2d5dc728a12b4177"/>
+          <a:blip xmlns:r="http://schemas.openxmlformats.org/officeDocument/2006/relationships" xmlns:a="http://schemas.openxmlformats.org/drawingml/2006/main" r:embed="Rfdd6d71ca8bf4f6a"/>
           <a:srcRect xmlns:a="http://schemas.openxmlformats.org/drawingml/2006/main" l="836" t="0" r="836" b="0"/>
           <a:stretch xmlns:a="http://schemas.openxmlformats.org/drawingml/2006/main">
             <a:fillRect l="0" t="0" r="0" b="0"/>
@@ -2845,7 +2845,7 @@
     </p:spTree>
     <p:extLst>
       <p:ext uri="{BB962C8B-B14F-4D97-AF65-F5344CB8AC3E}">
-        <p14:creationId xmlns:p14="http://schemas.microsoft.com/office/powerpoint/2010/main" val="850563681"/>
+        <p14:creationId xmlns:p14="http://schemas.microsoft.com/office/powerpoint/2010/main" val="551733031"/>
       </p:ext>
     </p:extLst>
   </p:cSld>
@@ -2869,7 +2869,7 @@
           <p:cNvPr id="31" name="10-capability-canvas">
             <a:extLst xmlns:a="http://schemas.openxmlformats.org/drawingml/2006/main">
               <a:ext uri="{FF2B5EF4-FFF2-40B4-BE49-F238E27FC236}">
-                <a16:creationId xmlns:a16="http://schemas.microsoft.com/office/drawing/2014/main" id="{8414CC02-B03A-4711-9D27-4A137E47C0B7}"/>
+                <a16:creationId xmlns:a16="http://schemas.microsoft.com/office/drawing/2014/main" id="{F157593B-EB67-42D5-9AD9-FB6B92DCBC1B}"/>
               </a:ext>
             </a:extLst>
           </p:cNvPr>
@@ -2896,7 +2896,7 @@
           <p:cNvPr id="2" name="10-capability-edge-gold">
             <a:extLst xmlns:a="http://schemas.openxmlformats.org/drawingml/2006/main">
               <a:ext uri="{FF2B5EF4-FFF2-40B4-BE49-F238E27FC236}">
-                <a16:creationId xmlns:a16="http://schemas.microsoft.com/office/drawing/2014/main" id="{87A7BB48-86F4-43A5-BFF5-0133C668A08D}"/>
+                <a16:creationId xmlns:a16="http://schemas.microsoft.com/office/drawing/2014/main" id="{A85AB4C9-4BFB-4683-8E09-7256F26D75F1}"/>
               </a:ext>
             </a:extLst>
           </p:cNvPr>
@@ -2923,7 +2923,7 @@
           <p:cNvPr id="3" name="10-capability-edge-coral">
             <a:extLst xmlns:a="http://schemas.openxmlformats.org/drawingml/2006/main">
               <a:ext uri="{FF2B5EF4-FFF2-40B4-BE49-F238E27FC236}">
-                <a16:creationId xmlns:a16="http://schemas.microsoft.com/office/drawing/2014/main" id="{02DD2B15-1CE3-4EE2-B3F2-E95D2DBD8F48}"/>
+                <a16:creationId xmlns:a16="http://schemas.microsoft.com/office/drawing/2014/main" id="{865FE5D8-02FF-41EE-A7B4-BBE32F8DD012}"/>
               </a:ext>
             </a:extLst>
           </p:cNvPr>
@@ -2950,7 +2950,7 @@
           <p:cNvPr id="4" name="10-capability-edge-teal">
             <a:extLst xmlns:a="http://schemas.openxmlformats.org/drawingml/2006/main">
               <a:ext uri="{FF2B5EF4-FFF2-40B4-BE49-F238E27FC236}">
-                <a16:creationId xmlns:a16="http://schemas.microsoft.com/office/drawing/2014/main" id="{989751D0-43E6-4FB2-9CF1-2BC163EC0289}"/>
+                <a16:creationId xmlns:a16="http://schemas.microsoft.com/office/drawing/2014/main" id="{F52CF5E0-6277-409B-8135-97DB97F23B0D}"/>
               </a:ext>
             </a:extLst>
           </p:cNvPr>
@@ -2977,7 +2977,7 @@
           <p:cNvPr id="5" name="eyebrow-10">
             <a:extLst xmlns:a="http://schemas.openxmlformats.org/drawingml/2006/main">
               <a:ext uri="{FF2B5EF4-FFF2-40B4-BE49-F238E27FC236}">
-                <a16:creationId xmlns:a16="http://schemas.microsoft.com/office/drawing/2014/main" id="{7740F151-B437-4A0F-95F8-E14A9B0A2534}"/>
+                <a16:creationId xmlns:a16="http://schemas.microsoft.com/office/drawing/2014/main" id="{3D259CEF-7CA4-4BAE-975E-5187B24CC7B1}"/>
               </a:ext>
             </a:extLst>
           </p:cNvPr>
@@ -3022,7 +3022,7 @@
           <p:cNvPr id="6" name="title-10">
             <a:extLst xmlns:a="http://schemas.openxmlformats.org/drawingml/2006/main">
               <a:ext uri="{FF2B5EF4-FFF2-40B4-BE49-F238E27FC236}">
-                <a16:creationId xmlns:a16="http://schemas.microsoft.com/office/drawing/2014/main" id="{D8536ECB-72C2-4B6F-B1DF-1B52AD4FA841}"/>
+                <a16:creationId xmlns:a16="http://schemas.microsoft.com/office/drawing/2014/main" id="{C11F3E30-3B65-4C4B-9CE6-BA6E06768421}"/>
               </a:ext>
             </a:extLst>
           </p:cNvPr>
@@ -3067,7 +3067,7 @@
           <p:cNvPr id="7" name="cap-card-0">
             <a:extLst xmlns:a="http://schemas.openxmlformats.org/drawingml/2006/main">
               <a:ext uri="{FF2B5EF4-FFF2-40B4-BE49-F238E27FC236}">
-                <a16:creationId xmlns:a16="http://schemas.microsoft.com/office/drawing/2014/main" id="{D70234A3-B409-433C-83E0-3AA3A0FF9638}"/>
+                <a16:creationId xmlns:a16="http://schemas.microsoft.com/office/drawing/2014/main" id="{7B519F05-BF22-43AE-852F-385035A503B7}"/>
               </a:ext>
             </a:extLst>
           </p:cNvPr>
@@ -3096,7 +3096,7 @@
           <p:cNvPr id="8" name="cap-accent-0">
             <a:extLst xmlns:a="http://schemas.openxmlformats.org/drawingml/2006/main">
               <a:ext uri="{FF2B5EF4-FFF2-40B4-BE49-F238E27FC236}">
-                <a16:creationId xmlns:a16="http://schemas.microsoft.com/office/drawing/2014/main" id="{5E0E2C55-CBC0-4A30-A23F-79C8019828E2}"/>
+                <a16:creationId xmlns:a16="http://schemas.microsoft.com/office/drawing/2014/main" id="{B3139CE4-CDAB-4D0A-96CD-2CE08C59D597}"/>
               </a:ext>
             </a:extLst>
           </p:cNvPr>
@@ -3125,7 +3125,7 @@
           <p:cNvPr id="9" name="cap-title-0">
             <a:extLst xmlns:a="http://schemas.openxmlformats.org/drawingml/2006/main">
               <a:ext uri="{FF2B5EF4-FFF2-40B4-BE49-F238E27FC236}">
-                <a16:creationId xmlns:a16="http://schemas.microsoft.com/office/drawing/2014/main" id="{2FA8D1C1-9E1C-4783-B07A-B4E7DFE535CD}"/>
+                <a16:creationId xmlns:a16="http://schemas.microsoft.com/office/drawing/2014/main" id="{EAA889AF-2B6A-423F-9AB5-D4C906E45D66}"/>
               </a:ext>
             </a:extLst>
           </p:cNvPr>
@@ -3170,7 +3170,7 @@
           <p:cNvPr id="10" name="cap-items-0">
             <a:extLst xmlns:a="http://schemas.openxmlformats.org/drawingml/2006/main">
               <a:ext uri="{FF2B5EF4-FFF2-40B4-BE49-F238E27FC236}">
-                <a16:creationId xmlns:a16="http://schemas.microsoft.com/office/drawing/2014/main" id="{D5B34844-3966-4B57-AE56-705691EAC93A}"/>
+                <a16:creationId xmlns:a16="http://schemas.microsoft.com/office/drawing/2014/main" id="{005AAA87-AB89-4D9C-8A4E-DA2F1DB164D7}"/>
               </a:ext>
             </a:extLst>
           </p:cNvPr>
@@ -3217,7 +3217,7 @@
           <p:cNvPr id="11" name="cap-card-1">
             <a:extLst xmlns:a="http://schemas.openxmlformats.org/drawingml/2006/main">
               <a:ext uri="{FF2B5EF4-FFF2-40B4-BE49-F238E27FC236}">
-                <a16:creationId xmlns:a16="http://schemas.microsoft.com/office/drawing/2014/main" id="{85860AA8-89C0-4566-9B0B-018800F752F4}"/>
+                <a16:creationId xmlns:a16="http://schemas.microsoft.com/office/drawing/2014/main" id="{F09D717C-B08E-4C90-8A19-B32F721D3610}"/>
               </a:ext>
             </a:extLst>
           </p:cNvPr>
@@ -3246,7 +3246,7 @@
           <p:cNvPr id="12" name="cap-accent-1">
             <a:extLst xmlns:a="http://schemas.openxmlformats.org/drawingml/2006/main">
               <a:ext uri="{FF2B5EF4-FFF2-40B4-BE49-F238E27FC236}">
-                <a16:creationId xmlns:a16="http://schemas.microsoft.com/office/drawing/2014/main" id="{B5C10258-8B0F-4073-A68A-4D9EA9E53A91}"/>
+                <a16:creationId xmlns:a16="http://schemas.microsoft.com/office/drawing/2014/main" id="{377530BD-68FC-421A-BC49-E36FF3CFD8B5}"/>
               </a:ext>
             </a:extLst>
           </p:cNvPr>
@@ -3275,7 +3275,7 @@
           <p:cNvPr id="13" name="cap-title-1">
             <a:extLst xmlns:a="http://schemas.openxmlformats.org/drawingml/2006/main">
               <a:ext uri="{FF2B5EF4-FFF2-40B4-BE49-F238E27FC236}">
-                <a16:creationId xmlns:a16="http://schemas.microsoft.com/office/drawing/2014/main" id="{8E72B33B-6AFF-478F-9C5C-E6F13E9B7CF8}"/>
+                <a16:creationId xmlns:a16="http://schemas.microsoft.com/office/drawing/2014/main" id="{1695AD42-2565-48C1-A664-624C7F217AB0}"/>
               </a:ext>
             </a:extLst>
           </p:cNvPr>
@@ -3320,7 +3320,7 @@
           <p:cNvPr id="14" name="cap-items-1">
             <a:extLst xmlns:a="http://schemas.openxmlformats.org/drawingml/2006/main">
               <a:ext uri="{FF2B5EF4-FFF2-40B4-BE49-F238E27FC236}">
-                <a16:creationId xmlns:a16="http://schemas.microsoft.com/office/drawing/2014/main" id="{2581EC3C-298A-42DD-A365-5BB1704A1912}"/>
+                <a16:creationId xmlns:a16="http://schemas.microsoft.com/office/drawing/2014/main" id="{46E0892F-8EDC-4C13-8579-F98A0B1C3FBF}"/>
               </a:ext>
             </a:extLst>
           </p:cNvPr>
@@ -3367,7 +3367,7 @@
           <p:cNvPr id="15" name="cap-card-2">
             <a:extLst xmlns:a="http://schemas.openxmlformats.org/drawingml/2006/main">
               <a:ext uri="{FF2B5EF4-FFF2-40B4-BE49-F238E27FC236}">
-                <a16:creationId xmlns:a16="http://schemas.microsoft.com/office/drawing/2014/main" id="{302C1425-5037-47F7-9CE7-6E46B6B4EC37}"/>
+                <a16:creationId xmlns:a16="http://schemas.microsoft.com/office/drawing/2014/main" id="{C10E55C1-CC4C-4E36-91F6-6704CD5C17A4}"/>
               </a:ext>
             </a:extLst>
           </p:cNvPr>
@@ -3396,7 +3396,7 @@
           <p:cNvPr id="16" name="cap-accent-2">
             <a:extLst xmlns:a="http://schemas.openxmlformats.org/drawingml/2006/main">
               <a:ext uri="{FF2B5EF4-FFF2-40B4-BE49-F238E27FC236}">
-                <a16:creationId xmlns:a16="http://schemas.microsoft.com/office/drawing/2014/main" id="{D206CACF-31B5-4282-8A85-7444DAEB6B7C}"/>
+                <a16:creationId xmlns:a16="http://schemas.microsoft.com/office/drawing/2014/main" id="{0E1F4823-57D8-484E-92AB-3CA699A0ADBC}"/>
               </a:ext>
             </a:extLst>
           </p:cNvPr>
@@ -3425,7 +3425,7 @@
           <p:cNvPr id="17" name="cap-title-2">
             <a:extLst xmlns:a="http://schemas.openxmlformats.org/drawingml/2006/main">
               <a:ext uri="{FF2B5EF4-FFF2-40B4-BE49-F238E27FC236}">
-                <a16:creationId xmlns:a16="http://schemas.microsoft.com/office/drawing/2014/main" id="{0F46EF4D-8CF8-4E36-8625-658DAE29A08B}"/>
+                <a16:creationId xmlns:a16="http://schemas.microsoft.com/office/drawing/2014/main" id="{974B848A-DE4F-47A1-97D4-34D9FDF93ACE}"/>
               </a:ext>
             </a:extLst>
           </p:cNvPr>
@@ -3470,7 +3470,7 @@
           <p:cNvPr id="18" name="cap-items-2">
             <a:extLst xmlns:a="http://schemas.openxmlformats.org/drawingml/2006/main">
               <a:ext uri="{FF2B5EF4-FFF2-40B4-BE49-F238E27FC236}">
-                <a16:creationId xmlns:a16="http://schemas.microsoft.com/office/drawing/2014/main" id="{F83A15FF-2645-4414-8832-F7F68FCD24C5}"/>
+                <a16:creationId xmlns:a16="http://schemas.microsoft.com/office/drawing/2014/main" id="{B080E255-2654-4854-8A9F-F251824DA076}"/>
               </a:ext>
             </a:extLst>
           </p:cNvPr>
@@ -3517,7 +3517,7 @@
           <p:cNvPr id="19" name="cap-card-3">
             <a:extLst xmlns:a="http://schemas.openxmlformats.org/drawingml/2006/main">
               <a:ext uri="{FF2B5EF4-FFF2-40B4-BE49-F238E27FC236}">
-                <a16:creationId xmlns:a16="http://schemas.microsoft.com/office/drawing/2014/main" id="{00AD3F9A-2F9F-42A8-9EEC-BC7BBB653F3D}"/>
+                <a16:creationId xmlns:a16="http://schemas.microsoft.com/office/drawing/2014/main" id="{2D4AAF62-8504-452A-B774-24AA21C5CB0A}"/>
               </a:ext>
             </a:extLst>
           </p:cNvPr>
@@ -3546,7 +3546,7 @@
           <p:cNvPr id="20" name="cap-accent-3">
             <a:extLst xmlns:a="http://schemas.openxmlformats.org/drawingml/2006/main">
               <a:ext uri="{FF2B5EF4-FFF2-40B4-BE49-F238E27FC236}">
-                <a16:creationId xmlns:a16="http://schemas.microsoft.com/office/drawing/2014/main" id="{78038493-D742-46A2-810D-334A297473EC}"/>
+                <a16:creationId xmlns:a16="http://schemas.microsoft.com/office/drawing/2014/main" id="{99F908D6-D06D-4A25-9E94-EF767D45D6F9}"/>
               </a:ext>
             </a:extLst>
           </p:cNvPr>
@@ -3575,7 +3575,7 @@
           <p:cNvPr id="21" name="cap-title-3">
             <a:extLst xmlns:a="http://schemas.openxmlformats.org/drawingml/2006/main">
               <a:ext uri="{FF2B5EF4-FFF2-40B4-BE49-F238E27FC236}">
-                <a16:creationId xmlns:a16="http://schemas.microsoft.com/office/drawing/2014/main" id="{4FD9EE16-2403-42D8-B0FA-91EE101D2819}"/>
+                <a16:creationId xmlns:a16="http://schemas.microsoft.com/office/drawing/2014/main" id="{C612CE3B-D756-486E-BDCE-7434F56D746B}"/>
               </a:ext>
             </a:extLst>
           </p:cNvPr>
@@ -3620,7 +3620,7 @@
           <p:cNvPr id="22" name="cap-items-3">
             <a:extLst xmlns:a="http://schemas.openxmlformats.org/drawingml/2006/main">
               <a:ext uri="{FF2B5EF4-FFF2-40B4-BE49-F238E27FC236}">
-                <a16:creationId xmlns:a16="http://schemas.microsoft.com/office/drawing/2014/main" id="{77F90BBC-A75F-4DDC-8F08-70FAD248E466}"/>
+                <a16:creationId xmlns:a16="http://schemas.microsoft.com/office/drawing/2014/main" id="{F9231E8D-B14A-4C3F-AC41-2B1D7C50A363}"/>
               </a:ext>
             </a:extLst>
           </p:cNvPr>
@@ -3667,7 +3667,7 @@
           <p:cNvPr id="23" name="credentials-strip">
             <a:extLst xmlns:a="http://schemas.openxmlformats.org/drawingml/2006/main">
               <a:ext uri="{FF2B5EF4-FFF2-40B4-BE49-F238E27FC236}">
-                <a16:creationId xmlns:a16="http://schemas.microsoft.com/office/drawing/2014/main" id="{695A0D71-766D-41C3-95ED-42F7A90295D1}"/>
+                <a16:creationId xmlns:a16="http://schemas.microsoft.com/office/drawing/2014/main" id="{7832DFFC-82AE-4DF5-96DB-6163127AE3A2}"/>
               </a:ext>
             </a:extLst>
           </p:cNvPr>
@@ -3696,7 +3696,7 @@
           <p:cNvPr id="24" name="credentials-label">
             <a:extLst xmlns:a="http://schemas.openxmlformats.org/drawingml/2006/main">
               <a:ext uri="{FF2B5EF4-FFF2-40B4-BE49-F238E27FC236}">
-                <a16:creationId xmlns:a16="http://schemas.microsoft.com/office/drawing/2014/main" id="{DD0C9F4A-81BC-46F0-B612-CBF8B437653B}"/>
+                <a16:creationId xmlns:a16="http://schemas.microsoft.com/office/drawing/2014/main" id="{DE17349B-63BD-474E-B02E-FE9435194AD3}"/>
               </a:ext>
             </a:extLst>
           </p:cNvPr>
@@ -3741,7 +3741,7 @@
           <p:cNvPr id="25" name="credentials-text">
             <a:extLst xmlns:a="http://schemas.openxmlformats.org/drawingml/2006/main">
               <a:ext uri="{FF2B5EF4-FFF2-40B4-BE49-F238E27FC236}">
-                <a16:creationId xmlns:a16="http://schemas.microsoft.com/office/drawing/2014/main" id="{28F2941A-7A0C-4D1F-B6B8-C101B49E0A71}"/>
+                <a16:creationId xmlns:a16="http://schemas.microsoft.com/office/drawing/2014/main" id="{96947170-50AF-4328-8503-E5F97C4A2B96}"/>
               </a:ext>
             </a:extLst>
           </p:cNvPr>
@@ -3786,7 +3786,7 @@
           <p:cNvPr id="26" name="footer-line-gold-10">
             <a:extLst xmlns:a="http://schemas.openxmlformats.org/drawingml/2006/main">
               <a:ext uri="{FF2B5EF4-FFF2-40B4-BE49-F238E27FC236}">
-                <a16:creationId xmlns:a16="http://schemas.microsoft.com/office/drawing/2014/main" id="{02A0BE57-853F-499F-911F-28B42EE3400D}"/>
+                <a16:creationId xmlns:a16="http://schemas.microsoft.com/office/drawing/2014/main" id="{D2FB3AA4-30B9-4C22-AF44-D82E5F3C1836}"/>
               </a:ext>
             </a:extLst>
           </p:cNvPr>
@@ -3813,7 +3813,7 @@
           <p:cNvPr id="27" name="footer-line-coral-10">
             <a:extLst xmlns:a="http://schemas.openxmlformats.org/drawingml/2006/main">
               <a:ext uri="{FF2B5EF4-FFF2-40B4-BE49-F238E27FC236}">
-                <a16:creationId xmlns:a16="http://schemas.microsoft.com/office/drawing/2014/main" id="{2ABB7C74-50EA-4556-B284-52C974F057C0}"/>
+                <a16:creationId xmlns:a16="http://schemas.microsoft.com/office/drawing/2014/main" id="{DFA3CDC3-A6DA-41DD-B8DB-66A9B5F71F0A}"/>
               </a:ext>
             </a:extLst>
           </p:cNvPr>
@@ -3840,7 +3840,7 @@
           <p:cNvPr id="28" name="footer-line-teal-10">
             <a:extLst xmlns:a="http://schemas.openxmlformats.org/drawingml/2006/main">
               <a:ext uri="{FF2B5EF4-FFF2-40B4-BE49-F238E27FC236}">
-                <a16:creationId xmlns:a16="http://schemas.microsoft.com/office/drawing/2014/main" id="{3E31BD39-95D7-4C41-BB0C-E9A21D3C417C}"/>
+                <a16:creationId xmlns:a16="http://schemas.microsoft.com/office/drawing/2014/main" id="{560B0449-6934-4613-BACB-8C0B39CCE31C}"/>
               </a:ext>
             </a:extLst>
           </p:cNvPr>
@@ -3867,7 +3867,7 @@
           <p:cNvPr id="29" name="footer-name-10">
             <a:extLst xmlns:a="http://schemas.openxmlformats.org/drawingml/2006/main">
               <a:ext uri="{FF2B5EF4-FFF2-40B4-BE49-F238E27FC236}">
-                <a16:creationId xmlns:a16="http://schemas.microsoft.com/office/drawing/2014/main" id="{4526108F-E9B7-4E95-997C-7635A4B60604}"/>
+                <a16:creationId xmlns:a16="http://schemas.microsoft.com/office/drawing/2014/main" id="{3863B611-C67C-44A9-BB5F-E98FB243E7AB}"/>
               </a:ext>
             </a:extLst>
           </p:cNvPr>
@@ -3912,7 +3912,7 @@
           <p:cNvPr id="30" name="footer-page-10">
             <a:extLst xmlns:a="http://schemas.openxmlformats.org/drawingml/2006/main">
               <a:ext uri="{FF2B5EF4-FFF2-40B4-BE49-F238E27FC236}">
-                <a16:creationId xmlns:a16="http://schemas.microsoft.com/office/drawing/2014/main" id="{9CA32CBC-FEDC-4DAE-AA83-BE86FF0671A9}"/>
+                <a16:creationId xmlns:a16="http://schemas.microsoft.com/office/drawing/2014/main" id="{BFC0F54F-E951-45F7-A597-521DBA84C063}"/>
               </a:ext>
             </a:extLst>
           </p:cNvPr>
@@ -3955,7 +3955,7 @@
     </p:spTree>
     <p:extLst>
       <p:ext uri="{BB962C8B-B14F-4D97-AF65-F5344CB8AC3E}">
-        <p14:creationId xmlns:p14="http://schemas.microsoft.com/office/powerpoint/2010/main" val="452186851"/>
+        <p14:creationId xmlns:p14="http://schemas.microsoft.com/office/powerpoint/2010/main" val="1690605564"/>
       </p:ext>
     </p:extLst>
   </p:cSld>
@@ -3979,7 +3979,7 @@
           <p:cNvPr id="23" name="11-closing-canvas">
             <a:extLst xmlns:a="http://schemas.openxmlformats.org/drawingml/2006/main">
               <a:ext uri="{FF2B5EF4-FFF2-40B4-BE49-F238E27FC236}">
-                <a16:creationId xmlns:a16="http://schemas.microsoft.com/office/drawing/2014/main" id="{EE019D46-0672-44F2-ACF9-957F7C9AA6F2}"/>
+                <a16:creationId xmlns:a16="http://schemas.microsoft.com/office/drawing/2014/main" id="{77FC7E13-B930-428D-B398-DC5BBAC0C0FC}"/>
               </a:ext>
             </a:extLst>
           </p:cNvPr>
@@ -4006,7 +4006,7 @@
           <p:cNvPr id="2" name="11-closing-edge-gold">
             <a:extLst xmlns:a="http://schemas.openxmlformats.org/drawingml/2006/main">
               <a:ext uri="{FF2B5EF4-FFF2-40B4-BE49-F238E27FC236}">
-                <a16:creationId xmlns:a16="http://schemas.microsoft.com/office/drawing/2014/main" id="{D8A331F0-780E-4ECB-8D14-DC506CC5557E}"/>
+                <a16:creationId xmlns:a16="http://schemas.microsoft.com/office/drawing/2014/main" id="{79A329DB-1F41-422C-9F19-7D4029F55337}"/>
               </a:ext>
             </a:extLst>
           </p:cNvPr>
@@ -4033,7 +4033,7 @@
           <p:cNvPr id="3" name="11-closing-edge-coral">
             <a:extLst xmlns:a="http://schemas.openxmlformats.org/drawingml/2006/main">
               <a:ext uri="{FF2B5EF4-FFF2-40B4-BE49-F238E27FC236}">
-                <a16:creationId xmlns:a16="http://schemas.microsoft.com/office/drawing/2014/main" id="{5CA79AD8-63F2-4202-AC54-E9B7FFA0D671}"/>
+                <a16:creationId xmlns:a16="http://schemas.microsoft.com/office/drawing/2014/main" id="{4FECC391-ADEB-47B6-B17D-E01686E78EA3}"/>
               </a:ext>
             </a:extLst>
           </p:cNvPr>
@@ -4060,7 +4060,7 @@
           <p:cNvPr id="4" name="11-closing-edge-teal">
             <a:extLst xmlns:a="http://schemas.openxmlformats.org/drawingml/2006/main">
               <a:ext uri="{FF2B5EF4-FFF2-40B4-BE49-F238E27FC236}">
-                <a16:creationId xmlns:a16="http://schemas.microsoft.com/office/drawing/2014/main" id="{36291A8E-E7C1-4BAA-A11C-407635253644}"/>
+                <a16:creationId xmlns:a16="http://schemas.microsoft.com/office/drawing/2014/main" id="{FA8CD67F-C9B1-45E8-9DD8-6DD17BA5E75E}"/>
               </a:ext>
             </a:extLst>
           </p:cNvPr>
@@ -4087,7 +4087,7 @@
           <p:cNvPr id="5" name="closing-left">
             <a:extLst xmlns:a="http://schemas.openxmlformats.org/drawingml/2006/main">
               <a:ext uri="{FF2B5EF4-FFF2-40B4-BE49-F238E27FC236}">
-                <a16:creationId xmlns:a16="http://schemas.microsoft.com/office/drawing/2014/main" id="{1932158F-122F-4677-978A-AC506F01BEA1}"/>
+                <a16:creationId xmlns:a16="http://schemas.microsoft.com/office/drawing/2014/main" id="{3D2CF0D5-E5C9-479E-9048-0723B8FCA2C8}"/>
               </a:ext>
             </a:extLst>
           </p:cNvPr>
@@ -4114,7 +4114,7 @@
           <p:cNvPr id="6" name="closing-photo-frame">
             <a:extLst xmlns:a="http://schemas.openxmlformats.org/drawingml/2006/main">
               <a:ext uri="{FF2B5EF4-FFF2-40B4-BE49-F238E27FC236}">
-                <a16:creationId xmlns:a16="http://schemas.microsoft.com/office/drawing/2014/main" id="{F4F45B51-C53D-46F3-8479-9A38785C947E}"/>
+                <a16:creationId xmlns:a16="http://schemas.microsoft.com/office/drawing/2014/main" id="{EC57E85D-DFE4-4C10-AF52-0BF825BFB579}"/>
               </a:ext>
             </a:extLst>
           </p:cNvPr>
@@ -4143,7 +4143,7 @@
           <p:cNvPr id="7" name="closing-signal-gold">
             <a:extLst xmlns:a="http://schemas.openxmlformats.org/drawingml/2006/main">
               <a:ext uri="{FF2B5EF4-FFF2-40B4-BE49-F238E27FC236}">
-                <a16:creationId xmlns:a16="http://schemas.microsoft.com/office/drawing/2014/main" id="{1729AAC5-74AE-4EA9-84C8-5E20E1005D8E}"/>
+                <a16:creationId xmlns:a16="http://schemas.microsoft.com/office/drawing/2014/main" id="{D570474C-E6C9-4C7C-9B49-3EB02446E7CC}"/>
               </a:ext>
             </a:extLst>
           </p:cNvPr>
@@ -4172,7 +4172,7 @@
           <p:cNvPr id="8" name="closing-signal-coral">
             <a:extLst xmlns:a="http://schemas.openxmlformats.org/drawingml/2006/main">
               <a:ext uri="{FF2B5EF4-FFF2-40B4-BE49-F238E27FC236}">
-                <a16:creationId xmlns:a16="http://schemas.microsoft.com/office/drawing/2014/main" id="{BBBC6130-1DA1-498C-8FFB-C45E7FFD5150}"/>
+                <a16:creationId xmlns:a16="http://schemas.microsoft.com/office/drawing/2014/main" id="{18F8578B-A6C8-4D00-9CB8-00F83C992B62}"/>
               </a:ext>
             </a:extLst>
           </p:cNvPr>
@@ -4201,7 +4201,7 @@
           <p:cNvPr id="9" name="closing-signal-teal">
             <a:extLst xmlns:a="http://schemas.openxmlformats.org/drawingml/2006/main">
               <a:ext uri="{FF2B5EF4-FFF2-40B4-BE49-F238E27FC236}">
-                <a16:creationId xmlns:a16="http://schemas.microsoft.com/office/drawing/2014/main" id="{16D73053-C8C8-4439-92F4-586D90D47A09}"/>
+                <a16:creationId xmlns:a16="http://schemas.microsoft.com/office/drawing/2014/main" id="{94C8F1E4-01AC-40CA-9B7C-4DC5E80581AD}"/>
               </a:ext>
             </a:extLst>
           </p:cNvPr>
@@ -4230,7 +4230,7 @@
           <p:cNvPr id="10" name="closing-role">
             <a:extLst xmlns:a="http://schemas.openxmlformats.org/drawingml/2006/main">
               <a:ext uri="{FF2B5EF4-FFF2-40B4-BE49-F238E27FC236}">
-                <a16:creationId xmlns:a16="http://schemas.microsoft.com/office/drawing/2014/main" id="{C167FE25-B6EC-43EE-A9AD-3BA112DF6623}"/>
+                <a16:creationId xmlns:a16="http://schemas.microsoft.com/office/drawing/2014/main" id="{15E3D214-BEA4-49DC-AE53-A5618E57799D}"/>
               </a:ext>
             </a:extLst>
           </p:cNvPr>
@@ -4275,7 +4275,7 @@
           <p:cNvPr id="11" name="closing-site">
             <a:extLst xmlns:a="http://schemas.openxmlformats.org/drawingml/2006/main">
               <a:ext uri="{FF2B5EF4-FFF2-40B4-BE49-F238E27FC236}">
-                <a16:creationId xmlns:a16="http://schemas.microsoft.com/office/drawing/2014/main" id="{23A9BC15-C0CB-4307-BB38-3085F945D13D}"/>
+                <a16:creationId xmlns:a16="http://schemas.microsoft.com/office/drawing/2014/main" id="{9C4B5267-CB15-46E8-B08E-362592CEC4B6}"/>
               </a:ext>
             </a:extLst>
           </p:cNvPr>
@@ -4320,7 +4320,7 @@
           <p:cNvPr id="12" name="closing-title">
             <a:extLst xmlns:a="http://schemas.openxmlformats.org/drawingml/2006/main">
               <a:ext uri="{FF2B5EF4-FFF2-40B4-BE49-F238E27FC236}">
-                <a16:creationId xmlns:a16="http://schemas.microsoft.com/office/drawing/2014/main" id="{4D7BE693-7C9E-4457-9DC1-68CC307BB80A}"/>
+                <a16:creationId xmlns:a16="http://schemas.microsoft.com/office/drawing/2014/main" id="{9E3EBE82-0CD6-4E7D-AFA4-A323C5C4F279}"/>
               </a:ext>
             </a:extLst>
           </p:cNvPr>
@@ -4366,7 +4366,7 @@
           <p:cNvPr id="13" name="closing-copy">
             <a:extLst xmlns:a="http://schemas.openxmlformats.org/drawingml/2006/main">
               <a:ext uri="{FF2B5EF4-FFF2-40B4-BE49-F238E27FC236}">
-                <a16:creationId xmlns:a16="http://schemas.microsoft.com/office/drawing/2014/main" id="{6EFC3735-6561-4EEF-92B5-268CFA842611}"/>
+                <a16:creationId xmlns:a16="http://schemas.microsoft.com/office/drawing/2014/main" id="{917C73F8-1261-42EB-B2F1-1413AA2EBDA5}"/>
               </a:ext>
             </a:extLst>
           </p:cNvPr>
@@ -4411,7 +4411,7 @@
           <p:cNvPr id="14" name="closing-line-gold">
             <a:extLst xmlns:a="http://schemas.openxmlformats.org/drawingml/2006/main">
               <a:ext uri="{FF2B5EF4-FFF2-40B4-BE49-F238E27FC236}">
-                <a16:creationId xmlns:a16="http://schemas.microsoft.com/office/drawing/2014/main" id="{FF7B9C85-6A61-4E17-99AF-DD6DFE6C3B70}"/>
+                <a16:creationId xmlns:a16="http://schemas.microsoft.com/office/drawing/2014/main" id="{02DC13A4-8A83-480D-B481-1B0AFB93135F}"/>
               </a:ext>
             </a:extLst>
           </p:cNvPr>
@@ -4438,7 +4438,7 @@
           <p:cNvPr id="15" name="closing-line-coral">
             <a:extLst xmlns:a="http://schemas.openxmlformats.org/drawingml/2006/main">
               <a:ext uri="{FF2B5EF4-FFF2-40B4-BE49-F238E27FC236}">
-                <a16:creationId xmlns:a16="http://schemas.microsoft.com/office/drawing/2014/main" id="{33844BD3-8F89-4416-9C04-02E2276B539E}"/>
+                <a16:creationId xmlns:a16="http://schemas.microsoft.com/office/drawing/2014/main" id="{6A984643-99C1-493E-9A6B-AA9BBCA33249}"/>
               </a:ext>
             </a:extLst>
           </p:cNvPr>
@@ -4465,7 +4465,7 @@
           <p:cNvPr id="16" name="closing-line-teal">
             <a:extLst xmlns:a="http://schemas.openxmlformats.org/drawingml/2006/main">
               <a:ext uri="{FF2B5EF4-FFF2-40B4-BE49-F238E27FC236}">
-                <a16:creationId xmlns:a16="http://schemas.microsoft.com/office/drawing/2014/main" id="{5F8F035F-DF6A-4E5B-AACC-3D304A083821}"/>
+                <a16:creationId xmlns:a16="http://schemas.microsoft.com/office/drawing/2014/main" id="{F7ED0AC9-EF48-4FEF-8A96-D742A6BDE36F}"/>
               </a:ext>
             </a:extLst>
           </p:cNvPr>
@@ -4492,7 +4492,7 @@
           <p:cNvPr id="17" name="closing-email-label">
             <a:extLst xmlns:a="http://schemas.openxmlformats.org/drawingml/2006/main">
               <a:ext uri="{FF2B5EF4-FFF2-40B4-BE49-F238E27FC236}">
-                <a16:creationId xmlns:a16="http://schemas.microsoft.com/office/drawing/2014/main" id="{3BFE2EE2-D3BD-4916-87E8-72B2FCA5DAD8}"/>
+                <a16:creationId xmlns:a16="http://schemas.microsoft.com/office/drawing/2014/main" id="{ACDB15F7-0D53-4E5D-907F-D5602C4D8FB2}"/>
               </a:ext>
             </a:extLst>
           </p:cNvPr>
@@ -4537,7 +4537,7 @@
           <p:cNvPr id="18" name="closing-email">
             <a:extLst xmlns:a="http://schemas.openxmlformats.org/drawingml/2006/main">
               <a:ext uri="{FF2B5EF4-FFF2-40B4-BE49-F238E27FC236}">
-                <a16:creationId xmlns:a16="http://schemas.microsoft.com/office/drawing/2014/main" id="{362D24A2-5B0F-45C8-9990-5FFEB500DBE8}"/>
+                <a16:creationId xmlns:a16="http://schemas.microsoft.com/office/drawing/2014/main" id="{5D990C17-3E5D-40D8-89EC-9583370D0C0E}"/>
               </a:ext>
             </a:extLst>
           </p:cNvPr>
@@ -4582,7 +4582,7 @@
           <p:cNvPr id="19" name="closing-links">
             <a:extLst xmlns:a="http://schemas.openxmlformats.org/drawingml/2006/main">
               <a:ext uri="{FF2B5EF4-FFF2-40B4-BE49-F238E27FC236}">
-                <a16:creationId xmlns:a16="http://schemas.microsoft.com/office/drawing/2014/main" id="{194CDA6B-52C5-4A55-8B8F-25525288FEDB}"/>
+                <a16:creationId xmlns:a16="http://schemas.microsoft.com/office/drawing/2014/main" id="{7AE9283C-20F7-46CE-A6FA-B2DA7AC2E7B5}"/>
               </a:ext>
             </a:extLst>
           </p:cNvPr>
@@ -4628,7 +4628,7 @@
           <p:cNvPr id="20" name="closing-phone">
             <a:extLst xmlns:a="http://schemas.openxmlformats.org/drawingml/2006/main">
               <a:ext uri="{FF2B5EF4-FFF2-40B4-BE49-F238E27FC236}">
-                <a16:creationId xmlns:a16="http://schemas.microsoft.com/office/drawing/2014/main" id="{267F75CE-C6FD-40C4-9311-E7EECECBC88E}"/>
+                <a16:creationId xmlns:a16="http://schemas.microsoft.com/office/drawing/2014/main" id="{BFB66D98-398D-4916-9E83-44C8F27872CB}"/>
               </a:ext>
             </a:extLst>
           </p:cNvPr>
@@ -4673,7 +4673,7 @@
           <p:cNvPr id="21" name="closing-page">
             <a:extLst xmlns:a="http://schemas.openxmlformats.org/drawingml/2006/main">
               <a:ext uri="{FF2B5EF4-FFF2-40B4-BE49-F238E27FC236}">
-                <a16:creationId xmlns:a16="http://schemas.microsoft.com/office/drawing/2014/main" id="{EA3F2AFE-5DC1-4A2F-A142-93F42066738D}"/>
+                <a16:creationId xmlns:a16="http://schemas.microsoft.com/office/drawing/2014/main" id="{2593E488-7588-4A49-9FF9-650F08DB6C49}"/>
               </a:ext>
             </a:extLst>
           </p:cNvPr>
@@ -4722,7 +4722,7 @@
           <p:nvPr/>
         </p:nvPicPr>
         <p:blipFill>
-          <a:blip xmlns:r="http://schemas.openxmlformats.org/officeDocument/2006/relationships" xmlns:a="http://schemas.openxmlformats.org/drawingml/2006/main" r:embed="R7651c16a4a6248f3"/>
+          <a:blip xmlns:r="http://schemas.openxmlformats.org/officeDocument/2006/relationships" xmlns:a="http://schemas.openxmlformats.org/drawingml/2006/main" r:embed="R7acddbad5bf140d9"/>
           <a:srcRect xmlns:a="http://schemas.openxmlformats.org/drawingml/2006/main" l="0" t="5980" r="0" b="5980"/>
           <a:stretch xmlns:a="http://schemas.openxmlformats.org/drawingml/2006/main">
             <a:fillRect l="0" t="0" r="0" b="0"/>
@@ -4741,7 +4741,7 @@
     </p:spTree>
     <p:extLst>
       <p:ext uri="{BB962C8B-B14F-4D97-AF65-F5344CB8AC3E}">
-        <p14:creationId xmlns:p14="http://schemas.microsoft.com/office/powerpoint/2010/main" val="186295639"/>
+        <p14:creationId xmlns:p14="http://schemas.microsoft.com/office/powerpoint/2010/main" val="131203257"/>
       </p:ext>
     </p:extLst>
   </p:cSld>
@@ -4765,7 +4765,7 @@
           <p:cNvPr id="34" name="02-lifecycle-canvas">
             <a:extLst xmlns:a="http://schemas.openxmlformats.org/drawingml/2006/main">
               <a:ext uri="{FF2B5EF4-FFF2-40B4-BE49-F238E27FC236}">
-                <a16:creationId xmlns:a16="http://schemas.microsoft.com/office/drawing/2014/main" id="{D5D3E469-422B-46DC-9B60-1D1565BAB9EB}"/>
+                <a16:creationId xmlns:a16="http://schemas.microsoft.com/office/drawing/2014/main" id="{818A2599-B14F-4E28-A1E3-9BF7CDE45503}"/>
               </a:ext>
             </a:extLst>
           </p:cNvPr>
@@ -4792,7 +4792,7 @@
           <p:cNvPr id="2" name="02-lifecycle-edge-gold">
             <a:extLst xmlns:a="http://schemas.openxmlformats.org/drawingml/2006/main">
               <a:ext uri="{FF2B5EF4-FFF2-40B4-BE49-F238E27FC236}">
-                <a16:creationId xmlns:a16="http://schemas.microsoft.com/office/drawing/2014/main" id="{4EF31B36-C2CB-4270-BA16-BA59698D9D83}"/>
+                <a16:creationId xmlns:a16="http://schemas.microsoft.com/office/drawing/2014/main" id="{3ABD1544-1231-4779-BCFE-527272C17DC9}"/>
               </a:ext>
             </a:extLst>
           </p:cNvPr>
@@ -4819,7 +4819,7 @@
           <p:cNvPr id="3" name="02-lifecycle-edge-coral">
             <a:extLst xmlns:a="http://schemas.openxmlformats.org/drawingml/2006/main">
               <a:ext uri="{FF2B5EF4-FFF2-40B4-BE49-F238E27FC236}">
-                <a16:creationId xmlns:a16="http://schemas.microsoft.com/office/drawing/2014/main" id="{A00211F7-F410-41D2-BC73-DEDAE700329A}"/>
+                <a16:creationId xmlns:a16="http://schemas.microsoft.com/office/drawing/2014/main" id="{87CC7411-A334-46AE-8291-A9191079E657}"/>
               </a:ext>
             </a:extLst>
           </p:cNvPr>
@@ -4846,7 +4846,7 @@
           <p:cNvPr id="4" name="02-lifecycle-edge-teal">
             <a:extLst xmlns:a="http://schemas.openxmlformats.org/drawingml/2006/main">
               <a:ext uri="{FF2B5EF4-FFF2-40B4-BE49-F238E27FC236}">
-                <a16:creationId xmlns:a16="http://schemas.microsoft.com/office/drawing/2014/main" id="{ADD25C05-0E38-4A22-AD2E-3115B096284D}"/>
+                <a16:creationId xmlns:a16="http://schemas.microsoft.com/office/drawing/2014/main" id="{1D9F495A-15DB-4F2B-B63E-421F096CFA4F}"/>
               </a:ext>
             </a:extLst>
           </p:cNvPr>
@@ -4873,7 +4873,7 @@
           <p:cNvPr id="5" name="eyebrow-2">
             <a:extLst xmlns:a="http://schemas.openxmlformats.org/drawingml/2006/main">
               <a:ext uri="{FF2B5EF4-FFF2-40B4-BE49-F238E27FC236}">
-                <a16:creationId xmlns:a16="http://schemas.microsoft.com/office/drawing/2014/main" id="{E993715A-979E-45F1-8DC7-AB05F74EC8CF}"/>
+                <a16:creationId xmlns:a16="http://schemas.microsoft.com/office/drawing/2014/main" id="{8CC9A524-75CF-4A73-8E6D-A3C3B2EE75E3}"/>
               </a:ext>
             </a:extLst>
           </p:cNvPr>
@@ -4918,7 +4918,7 @@
           <p:cNvPr id="6" name="title-2">
             <a:extLst xmlns:a="http://schemas.openxmlformats.org/drawingml/2006/main">
               <a:ext uri="{FF2B5EF4-FFF2-40B4-BE49-F238E27FC236}">
-                <a16:creationId xmlns:a16="http://schemas.microsoft.com/office/drawing/2014/main" id="{042B7F67-A0B6-4D40-B2AC-E182E8FE9578}"/>
+                <a16:creationId xmlns:a16="http://schemas.microsoft.com/office/drawing/2014/main" id="{3928F3F0-4417-4E1C-9EAA-6112B233A243}"/>
               </a:ext>
             </a:extLst>
           </p:cNvPr>
@@ -4963,7 +4963,7 @@
           <p:cNvPr id="7" name="subtitle-2">
             <a:extLst xmlns:a="http://schemas.openxmlformats.org/drawingml/2006/main">
               <a:ext uri="{FF2B5EF4-FFF2-40B4-BE49-F238E27FC236}">
-                <a16:creationId xmlns:a16="http://schemas.microsoft.com/office/drawing/2014/main" id="{5F8AAC2E-297F-4227-86C4-C262DB6AB349}"/>
+                <a16:creationId xmlns:a16="http://schemas.microsoft.com/office/drawing/2014/main" id="{DF16A094-D544-4782-9C97-30F62BBCFEF9}"/>
               </a:ext>
             </a:extLst>
           </p:cNvPr>
@@ -5008,7 +5008,7 @@
           <p:cNvPr id="8" name="role-card-01">
             <a:extLst xmlns:a="http://schemas.openxmlformats.org/drawingml/2006/main">
               <a:ext uri="{FF2B5EF4-FFF2-40B4-BE49-F238E27FC236}">
-                <a16:creationId xmlns:a16="http://schemas.microsoft.com/office/drawing/2014/main" id="{7951E032-23D8-4672-8A46-4101CA5AFD7F}"/>
+                <a16:creationId xmlns:a16="http://schemas.microsoft.com/office/drawing/2014/main" id="{B19C6AA4-428B-420A-A66C-AF46EF9ECE2D}"/>
               </a:ext>
             </a:extLst>
           </p:cNvPr>
@@ -5037,7 +5037,7 @@
           <p:cNvPr id="9" name="role-step-bg-01">
             <a:extLst xmlns:a="http://schemas.openxmlformats.org/drawingml/2006/main">
               <a:ext uri="{FF2B5EF4-FFF2-40B4-BE49-F238E27FC236}">
-                <a16:creationId xmlns:a16="http://schemas.microsoft.com/office/drawing/2014/main" id="{991E8ACD-1F32-45E9-8D00-638CACB6C663}"/>
+                <a16:creationId xmlns:a16="http://schemas.microsoft.com/office/drawing/2014/main" id="{8D15D020-0A09-456D-A446-5D1715EA13BB}"/>
               </a:ext>
             </a:extLst>
           </p:cNvPr>
@@ -5066,7 +5066,7 @@
           <p:cNvPr id="10" name="role-step-01">
             <a:extLst xmlns:a="http://schemas.openxmlformats.org/drawingml/2006/main">
               <a:ext uri="{FF2B5EF4-FFF2-40B4-BE49-F238E27FC236}">
-                <a16:creationId xmlns:a16="http://schemas.microsoft.com/office/drawing/2014/main" id="{BE31BCFC-0DA9-46EA-BC68-4C3F05DB34B4}"/>
+                <a16:creationId xmlns:a16="http://schemas.microsoft.com/office/drawing/2014/main" id="{67900E45-76A6-4A9F-B303-53EE548151E6}"/>
               </a:ext>
             </a:extLst>
           </p:cNvPr>
@@ -5111,7 +5111,7 @@
           <p:cNvPr id="11" name="role-title-01">
             <a:extLst xmlns:a="http://schemas.openxmlformats.org/drawingml/2006/main">
               <a:ext uri="{FF2B5EF4-FFF2-40B4-BE49-F238E27FC236}">
-                <a16:creationId xmlns:a16="http://schemas.microsoft.com/office/drawing/2014/main" id="{A4C615B8-5292-46CC-94D8-2201EB7BD3FA}"/>
+                <a16:creationId xmlns:a16="http://schemas.microsoft.com/office/drawing/2014/main" id="{36651BD3-F0CF-400E-BFED-710E3D75FA7A}"/>
               </a:ext>
             </a:extLst>
           </p:cNvPr>
@@ -5156,7 +5156,7 @@
           <p:cNvPr id="12" name="role-desc-01">
             <a:extLst xmlns:a="http://schemas.openxmlformats.org/drawingml/2006/main">
               <a:ext uri="{FF2B5EF4-FFF2-40B4-BE49-F238E27FC236}">
-                <a16:creationId xmlns:a16="http://schemas.microsoft.com/office/drawing/2014/main" id="{14D4EA13-38B0-4EC5-AA28-3B445503633F}"/>
+                <a16:creationId xmlns:a16="http://schemas.microsoft.com/office/drawing/2014/main" id="{79AF3D9E-DD53-4807-AD3E-9A236C174A66}"/>
               </a:ext>
             </a:extLst>
           </p:cNvPr>
@@ -5201,7 +5201,7 @@
           <p:cNvPr id="13" name="role-proof-line-01">
             <a:extLst xmlns:a="http://schemas.openxmlformats.org/drawingml/2006/main">
               <a:ext uri="{FF2B5EF4-FFF2-40B4-BE49-F238E27FC236}">
-                <a16:creationId xmlns:a16="http://schemas.microsoft.com/office/drawing/2014/main" id="{61F09F6C-056A-4263-8669-DABDC5CA1494}"/>
+                <a16:creationId xmlns:a16="http://schemas.microsoft.com/office/drawing/2014/main" id="{7ABA5537-EDE9-4D57-94EE-B263402574E4}"/>
               </a:ext>
             </a:extLst>
           </p:cNvPr>
@@ -5228,7 +5228,7 @@
           <p:cNvPr id="14" name="role-proof-01">
             <a:extLst xmlns:a="http://schemas.openxmlformats.org/drawingml/2006/main">
               <a:ext uri="{FF2B5EF4-FFF2-40B4-BE49-F238E27FC236}">
-                <a16:creationId xmlns:a16="http://schemas.microsoft.com/office/drawing/2014/main" id="{90199713-5DFD-466D-B1D5-5CEB6EB3C94A}"/>
+                <a16:creationId xmlns:a16="http://schemas.microsoft.com/office/drawing/2014/main" id="{0408B396-9B3E-4884-A7F9-415EE19E93E3}"/>
               </a:ext>
             </a:extLst>
           </p:cNvPr>
@@ -5273,7 +5273,7 @@
           <p:cNvPr id="15" name="role-card-02">
             <a:extLst xmlns:a="http://schemas.openxmlformats.org/drawingml/2006/main">
               <a:ext uri="{FF2B5EF4-FFF2-40B4-BE49-F238E27FC236}">
-                <a16:creationId xmlns:a16="http://schemas.microsoft.com/office/drawing/2014/main" id="{C75D2E47-1578-4CB3-B551-829D50913EFD}"/>
+                <a16:creationId xmlns:a16="http://schemas.microsoft.com/office/drawing/2014/main" id="{A804A581-7C66-4377-BFE7-B8A1B5E1BC28}"/>
               </a:ext>
             </a:extLst>
           </p:cNvPr>
@@ -5302,7 +5302,7 @@
           <p:cNvPr id="16" name="role-step-bg-02">
             <a:extLst xmlns:a="http://schemas.openxmlformats.org/drawingml/2006/main">
               <a:ext uri="{FF2B5EF4-FFF2-40B4-BE49-F238E27FC236}">
-                <a16:creationId xmlns:a16="http://schemas.microsoft.com/office/drawing/2014/main" id="{50C95959-3BC5-4C78-9B5B-5AF7A4AF53DE}"/>
+                <a16:creationId xmlns:a16="http://schemas.microsoft.com/office/drawing/2014/main" id="{1D9739E2-115E-46E1-AB8E-8F30946440E6}"/>
               </a:ext>
             </a:extLst>
           </p:cNvPr>
@@ -5331,7 +5331,7 @@
           <p:cNvPr id="17" name="role-step-02">
             <a:extLst xmlns:a="http://schemas.openxmlformats.org/drawingml/2006/main">
               <a:ext uri="{FF2B5EF4-FFF2-40B4-BE49-F238E27FC236}">
-                <a16:creationId xmlns:a16="http://schemas.microsoft.com/office/drawing/2014/main" id="{80A28973-AA4E-4F85-8A6E-684CF79340ED}"/>
+                <a16:creationId xmlns:a16="http://schemas.microsoft.com/office/drawing/2014/main" id="{9F1546B2-BAE5-4F0E-AB89-CD24F556C7DE}"/>
               </a:ext>
             </a:extLst>
           </p:cNvPr>
@@ -5376,7 +5376,7 @@
           <p:cNvPr id="18" name="role-title-02">
             <a:extLst xmlns:a="http://schemas.openxmlformats.org/drawingml/2006/main">
               <a:ext uri="{FF2B5EF4-FFF2-40B4-BE49-F238E27FC236}">
-                <a16:creationId xmlns:a16="http://schemas.microsoft.com/office/drawing/2014/main" id="{7D0EF2A2-75D1-4836-9862-6E9389E78A75}"/>
+                <a16:creationId xmlns:a16="http://schemas.microsoft.com/office/drawing/2014/main" id="{E4A4A153-1DD9-451B-ABB2-ECD21D9D978B}"/>
               </a:ext>
             </a:extLst>
           </p:cNvPr>
@@ -5421,7 +5421,7 @@
           <p:cNvPr id="19" name="role-desc-02">
             <a:extLst xmlns:a="http://schemas.openxmlformats.org/drawingml/2006/main">
               <a:ext uri="{FF2B5EF4-FFF2-40B4-BE49-F238E27FC236}">
-                <a16:creationId xmlns:a16="http://schemas.microsoft.com/office/drawing/2014/main" id="{C3347A76-DEE4-4F1A-B367-01C24B4924EE}"/>
+                <a16:creationId xmlns:a16="http://schemas.microsoft.com/office/drawing/2014/main" id="{517B3BD2-C1C3-467C-8BAB-E4A28B67B807}"/>
               </a:ext>
             </a:extLst>
           </p:cNvPr>
@@ -5466,7 +5466,7 @@
           <p:cNvPr id="20" name="role-proof-line-02">
             <a:extLst xmlns:a="http://schemas.openxmlformats.org/drawingml/2006/main">
               <a:ext uri="{FF2B5EF4-FFF2-40B4-BE49-F238E27FC236}">
-                <a16:creationId xmlns:a16="http://schemas.microsoft.com/office/drawing/2014/main" id="{D6BC763E-9369-4A58-9ED8-7BEC4865B058}"/>
+                <a16:creationId xmlns:a16="http://schemas.microsoft.com/office/drawing/2014/main" id="{CF3D9917-2B72-46EE-A14F-5617BCFA027B}"/>
               </a:ext>
             </a:extLst>
           </p:cNvPr>
@@ -5493,7 +5493,7 @@
           <p:cNvPr id="21" name="role-proof-02">
             <a:extLst xmlns:a="http://schemas.openxmlformats.org/drawingml/2006/main">
               <a:ext uri="{FF2B5EF4-FFF2-40B4-BE49-F238E27FC236}">
-                <a16:creationId xmlns:a16="http://schemas.microsoft.com/office/drawing/2014/main" id="{9908D5F6-29B6-4A27-BBC2-11175E3B45BD}"/>
+                <a16:creationId xmlns:a16="http://schemas.microsoft.com/office/drawing/2014/main" id="{E197AA7E-2099-4F91-9053-EC07DA655B72}"/>
               </a:ext>
             </a:extLst>
           </p:cNvPr>
@@ -5538,7 +5538,7 @@
           <p:cNvPr id="22" name="role-card-03">
             <a:extLst xmlns:a="http://schemas.openxmlformats.org/drawingml/2006/main">
               <a:ext uri="{FF2B5EF4-FFF2-40B4-BE49-F238E27FC236}">
-                <a16:creationId xmlns:a16="http://schemas.microsoft.com/office/drawing/2014/main" id="{9080F452-893C-49E7-B02A-2A28B02ADE32}"/>
+                <a16:creationId xmlns:a16="http://schemas.microsoft.com/office/drawing/2014/main" id="{9C344AD6-7590-42C8-A50D-1AA6984B5172}"/>
               </a:ext>
             </a:extLst>
           </p:cNvPr>
@@ -5567,7 +5567,7 @@
           <p:cNvPr id="23" name="role-step-bg-03">
             <a:extLst xmlns:a="http://schemas.openxmlformats.org/drawingml/2006/main">
               <a:ext uri="{FF2B5EF4-FFF2-40B4-BE49-F238E27FC236}">
-                <a16:creationId xmlns:a16="http://schemas.microsoft.com/office/drawing/2014/main" id="{85092E50-1FE8-4B65-9E12-7F27C181E7FC}"/>
+                <a16:creationId xmlns:a16="http://schemas.microsoft.com/office/drawing/2014/main" id="{B14EA19C-E383-4FA6-8C4A-7CEC0EA2BFAC}"/>
               </a:ext>
             </a:extLst>
           </p:cNvPr>
@@ -5596,7 +5596,7 @@
           <p:cNvPr id="24" name="role-step-03">
             <a:extLst xmlns:a="http://schemas.openxmlformats.org/drawingml/2006/main">
               <a:ext uri="{FF2B5EF4-FFF2-40B4-BE49-F238E27FC236}">
-                <a16:creationId xmlns:a16="http://schemas.microsoft.com/office/drawing/2014/main" id="{AB9395D1-3A1D-45A8-8C8C-DC41973EBB5F}"/>
+                <a16:creationId xmlns:a16="http://schemas.microsoft.com/office/drawing/2014/main" id="{CA9A42DD-4AF8-4708-9D1D-5B39EBA978FA}"/>
               </a:ext>
             </a:extLst>
           </p:cNvPr>
@@ -5641,7 +5641,7 @@
           <p:cNvPr id="25" name="role-title-03">
             <a:extLst xmlns:a="http://schemas.openxmlformats.org/drawingml/2006/main">
               <a:ext uri="{FF2B5EF4-FFF2-40B4-BE49-F238E27FC236}">
-                <a16:creationId xmlns:a16="http://schemas.microsoft.com/office/drawing/2014/main" id="{E9E3244A-D630-4DB7-ADC7-1D087B565D7A}"/>
+                <a16:creationId xmlns:a16="http://schemas.microsoft.com/office/drawing/2014/main" id="{A7ACD6D4-F224-4A80-B56B-00CBF82C5F0F}"/>
               </a:ext>
             </a:extLst>
           </p:cNvPr>
@@ -5686,7 +5686,7 @@
           <p:cNvPr id="26" name="role-desc-03">
             <a:extLst xmlns:a="http://schemas.openxmlformats.org/drawingml/2006/main">
               <a:ext uri="{FF2B5EF4-FFF2-40B4-BE49-F238E27FC236}">
-                <a16:creationId xmlns:a16="http://schemas.microsoft.com/office/drawing/2014/main" id="{5EF0B411-C803-4E89-85AC-0A712C02D627}"/>
+                <a16:creationId xmlns:a16="http://schemas.microsoft.com/office/drawing/2014/main" id="{0364B1AD-761E-4458-98AF-CF3F816C3F7B}"/>
               </a:ext>
             </a:extLst>
           </p:cNvPr>
@@ -5731,7 +5731,7 @@
           <p:cNvPr id="27" name="role-proof-line-03">
             <a:extLst xmlns:a="http://schemas.openxmlformats.org/drawingml/2006/main">
               <a:ext uri="{FF2B5EF4-FFF2-40B4-BE49-F238E27FC236}">
-                <a16:creationId xmlns:a16="http://schemas.microsoft.com/office/drawing/2014/main" id="{7E138841-A328-4406-B327-4C792F352A4A}"/>
+                <a16:creationId xmlns:a16="http://schemas.microsoft.com/office/drawing/2014/main" id="{B0748118-43F2-4B52-82DF-3E28F9462D28}"/>
               </a:ext>
             </a:extLst>
           </p:cNvPr>
@@ -5758,7 +5758,7 @@
           <p:cNvPr id="28" name="role-proof-03">
             <a:extLst xmlns:a="http://schemas.openxmlformats.org/drawingml/2006/main">
               <a:ext uri="{FF2B5EF4-FFF2-40B4-BE49-F238E27FC236}">
-                <a16:creationId xmlns:a16="http://schemas.microsoft.com/office/drawing/2014/main" id="{E84085B0-877B-4556-B0DB-314C7C690803}"/>
+                <a16:creationId xmlns:a16="http://schemas.microsoft.com/office/drawing/2014/main" id="{CC19A5E4-A68E-4DED-9623-C701D29163B2}"/>
               </a:ext>
             </a:extLst>
           </p:cNvPr>
@@ -5803,7 +5803,7 @@
           <p:cNvPr id="29" name="footer-line-gold-2">
             <a:extLst xmlns:a="http://schemas.openxmlformats.org/drawingml/2006/main">
               <a:ext uri="{FF2B5EF4-FFF2-40B4-BE49-F238E27FC236}">
-                <a16:creationId xmlns:a16="http://schemas.microsoft.com/office/drawing/2014/main" id="{6F2A6165-AB34-4FFA-B960-0BBEEF236177}"/>
+                <a16:creationId xmlns:a16="http://schemas.microsoft.com/office/drawing/2014/main" id="{6998AD76-4FE4-4FEA-B2BB-6FB31A4E55B7}"/>
               </a:ext>
             </a:extLst>
           </p:cNvPr>
@@ -5830,7 +5830,7 @@
           <p:cNvPr id="30" name="footer-line-coral-2">
             <a:extLst xmlns:a="http://schemas.openxmlformats.org/drawingml/2006/main">
               <a:ext uri="{FF2B5EF4-FFF2-40B4-BE49-F238E27FC236}">
-                <a16:creationId xmlns:a16="http://schemas.microsoft.com/office/drawing/2014/main" id="{CED23ACC-DF92-4A76-A6BB-5B2F4366B9BF}"/>
+                <a16:creationId xmlns:a16="http://schemas.microsoft.com/office/drawing/2014/main" id="{80AEABCA-F969-4E01-82F2-30108CC25329}"/>
               </a:ext>
             </a:extLst>
           </p:cNvPr>
@@ -5857,7 +5857,7 @@
           <p:cNvPr id="31" name="footer-line-teal-2">
             <a:extLst xmlns:a="http://schemas.openxmlformats.org/drawingml/2006/main">
               <a:ext uri="{FF2B5EF4-FFF2-40B4-BE49-F238E27FC236}">
-                <a16:creationId xmlns:a16="http://schemas.microsoft.com/office/drawing/2014/main" id="{CB207180-E161-48B5-93AD-8700E2F0F61B}"/>
+                <a16:creationId xmlns:a16="http://schemas.microsoft.com/office/drawing/2014/main" id="{DC62C39B-08AE-45CB-919E-E042ED0C8F9A}"/>
               </a:ext>
             </a:extLst>
           </p:cNvPr>
@@ -5884,7 +5884,7 @@
           <p:cNvPr id="32" name="footer-name-2">
             <a:extLst xmlns:a="http://schemas.openxmlformats.org/drawingml/2006/main">
               <a:ext uri="{FF2B5EF4-FFF2-40B4-BE49-F238E27FC236}">
-                <a16:creationId xmlns:a16="http://schemas.microsoft.com/office/drawing/2014/main" id="{D39C91C6-D7D5-4923-8FC3-2756D1B6F03E}"/>
+                <a16:creationId xmlns:a16="http://schemas.microsoft.com/office/drawing/2014/main" id="{422B1619-D3EC-4318-9098-5A3718337C82}"/>
               </a:ext>
             </a:extLst>
           </p:cNvPr>
@@ -5929,7 +5929,7 @@
           <p:cNvPr id="33" name="footer-page-2">
             <a:extLst xmlns:a="http://schemas.openxmlformats.org/drawingml/2006/main">
               <a:ext uri="{FF2B5EF4-FFF2-40B4-BE49-F238E27FC236}">
-                <a16:creationId xmlns:a16="http://schemas.microsoft.com/office/drawing/2014/main" id="{8429AAB9-7F4D-4DC3-8F79-400FFF8026B8}"/>
+                <a16:creationId xmlns:a16="http://schemas.microsoft.com/office/drawing/2014/main" id="{0DAE97B1-31A4-4D1C-B34C-289D4FD81C13}"/>
               </a:ext>
             </a:extLst>
           </p:cNvPr>
@@ -5972,7 +5972,7 @@
     </p:spTree>
     <p:extLst>
       <p:ext uri="{BB962C8B-B14F-4D97-AF65-F5344CB8AC3E}">
-        <p14:creationId xmlns:p14="http://schemas.microsoft.com/office/powerpoint/2010/main" val="775015594"/>
+        <p14:creationId xmlns:p14="http://schemas.microsoft.com/office/powerpoint/2010/main" val="1932608717"/>
       </p:ext>
     </p:extLst>
   </p:cSld>
@@ -5996,7 +5996,7 @@
           <p:cNvPr id="28" name="03-proof-canvas">
             <a:extLst xmlns:a="http://schemas.openxmlformats.org/drawingml/2006/main">
               <a:ext uri="{FF2B5EF4-FFF2-40B4-BE49-F238E27FC236}">
-                <a16:creationId xmlns:a16="http://schemas.microsoft.com/office/drawing/2014/main" id="{BEC8AFE7-9087-45A3-94FF-B1DC63B32893}"/>
+                <a16:creationId xmlns:a16="http://schemas.microsoft.com/office/drawing/2014/main" id="{FCEB0AE1-5231-46C5-BA91-90A92496C63C}"/>
               </a:ext>
             </a:extLst>
           </p:cNvPr>
@@ -6023,7 +6023,7 @@
           <p:cNvPr id="2" name="03-proof-edge-gold">
             <a:extLst xmlns:a="http://schemas.openxmlformats.org/drawingml/2006/main">
               <a:ext uri="{FF2B5EF4-FFF2-40B4-BE49-F238E27FC236}">
-                <a16:creationId xmlns:a16="http://schemas.microsoft.com/office/drawing/2014/main" id="{E6546E9D-9BB6-433F-A57F-C102981A303A}"/>
+                <a16:creationId xmlns:a16="http://schemas.microsoft.com/office/drawing/2014/main" id="{9E53666F-7919-445E-954D-F04760EA1B58}"/>
               </a:ext>
             </a:extLst>
           </p:cNvPr>
@@ -6050,7 +6050,7 @@
           <p:cNvPr id="3" name="03-proof-edge-coral">
             <a:extLst xmlns:a="http://schemas.openxmlformats.org/drawingml/2006/main">
               <a:ext uri="{FF2B5EF4-FFF2-40B4-BE49-F238E27FC236}">
-                <a16:creationId xmlns:a16="http://schemas.microsoft.com/office/drawing/2014/main" id="{FB497EB9-84C7-42BC-A6D0-3B3AC7697D15}"/>
+                <a16:creationId xmlns:a16="http://schemas.microsoft.com/office/drawing/2014/main" id="{249F11A7-7FEC-4BBF-893A-C378E9CD3D6D}"/>
               </a:ext>
             </a:extLst>
           </p:cNvPr>
@@ -6077,7 +6077,7 @@
           <p:cNvPr id="4" name="03-proof-edge-teal">
             <a:extLst xmlns:a="http://schemas.openxmlformats.org/drawingml/2006/main">
               <a:ext uri="{FF2B5EF4-FFF2-40B4-BE49-F238E27FC236}">
-                <a16:creationId xmlns:a16="http://schemas.microsoft.com/office/drawing/2014/main" id="{243F2F75-5AAC-43A4-ABFD-124631C54920}"/>
+                <a16:creationId xmlns:a16="http://schemas.microsoft.com/office/drawing/2014/main" id="{71BEB81C-0950-48CC-8995-C97A4F60CBA2}"/>
               </a:ext>
             </a:extLst>
           </p:cNvPr>
@@ -6104,7 +6104,7 @@
           <p:cNvPr id="5" name="eyebrow-3">
             <a:extLst xmlns:a="http://schemas.openxmlformats.org/drawingml/2006/main">
               <a:ext uri="{FF2B5EF4-FFF2-40B4-BE49-F238E27FC236}">
-                <a16:creationId xmlns:a16="http://schemas.microsoft.com/office/drawing/2014/main" id="{1411476E-6DA3-4AA5-A057-BC0A91990A78}"/>
+                <a16:creationId xmlns:a16="http://schemas.microsoft.com/office/drawing/2014/main" id="{EB95093A-3861-4AD6-9ABF-80D2A09A9E34}"/>
               </a:ext>
             </a:extLst>
           </p:cNvPr>
@@ -6149,7 +6149,7 @@
           <p:cNvPr id="6" name="title-3">
             <a:extLst xmlns:a="http://schemas.openxmlformats.org/drawingml/2006/main">
               <a:ext uri="{FF2B5EF4-FFF2-40B4-BE49-F238E27FC236}">
-                <a16:creationId xmlns:a16="http://schemas.microsoft.com/office/drawing/2014/main" id="{13B8241E-3280-4B93-B6D6-AA2916AC7907}"/>
+                <a16:creationId xmlns:a16="http://schemas.microsoft.com/office/drawing/2014/main" id="{99D16CC8-8B3E-40C6-AE20-74894A139D58}"/>
               </a:ext>
             </a:extLst>
           </p:cNvPr>
@@ -6194,7 +6194,7 @@
           <p:cNvPr id="7" name="subtitle-3">
             <a:extLst xmlns:a="http://schemas.openxmlformats.org/drawingml/2006/main">
               <a:ext uri="{FF2B5EF4-FFF2-40B4-BE49-F238E27FC236}">
-                <a16:creationId xmlns:a16="http://schemas.microsoft.com/office/drawing/2014/main" id="{9BD95B9F-C27B-4F82-B712-E108D7545214}"/>
+                <a16:creationId xmlns:a16="http://schemas.microsoft.com/office/drawing/2014/main" id="{3C49B761-2E26-40DA-BC6D-B245ECC1B157}"/>
               </a:ext>
             </a:extLst>
           </p:cNvPr>
@@ -6239,7 +6239,7 @@
           <p:cNvPr id="8" name="metric-card-40%">
             <a:extLst xmlns:a="http://schemas.openxmlformats.org/drawingml/2006/main">
               <a:ext uri="{FF2B5EF4-FFF2-40B4-BE49-F238E27FC236}">
-                <a16:creationId xmlns:a16="http://schemas.microsoft.com/office/drawing/2014/main" id="{DC664017-D0E8-450D-90E4-88631C0E0C6F}"/>
+                <a16:creationId xmlns:a16="http://schemas.microsoft.com/office/drawing/2014/main" id="{5FA75417-7A16-4728-9493-16D436B2356F}"/>
               </a:ext>
             </a:extLst>
           </p:cNvPr>
@@ -6268,7 +6268,7 @@
           <p:cNvPr id="9" name="metric-accent-40%">
             <a:extLst xmlns:a="http://schemas.openxmlformats.org/drawingml/2006/main">
               <a:ext uri="{FF2B5EF4-FFF2-40B4-BE49-F238E27FC236}">
-                <a16:creationId xmlns:a16="http://schemas.microsoft.com/office/drawing/2014/main" id="{40735502-EFF4-4962-9608-52F0FF899B96}"/>
+                <a16:creationId xmlns:a16="http://schemas.microsoft.com/office/drawing/2014/main" id="{C43D3A3A-31C1-4674-8B16-620D67A3AEE2}"/>
               </a:ext>
             </a:extLst>
           </p:cNvPr>
@@ -6297,7 +6297,7 @@
           <p:cNvPr id="10" name="metric-value-40%">
             <a:extLst xmlns:a="http://schemas.openxmlformats.org/drawingml/2006/main">
               <a:ext uri="{FF2B5EF4-FFF2-40B4-BE49-F238E27FC236}">
-                <a16:creationId xmlns:a16="http://schemas.microsoft.com/office/drawing/2014/main" id="{A80E4B8E-9774-4FF1-8CA2-5C3A8437BC69}"/>
+                <a16:creationId xmlns:a16="http://schemas.microsoft.com/office/drawing/2014/main" id="{1D09153F-9F13-44D5-8108-5516F2D98367}"/>
               </a:ext>
             </a:extLst>
           </p:cNvPr>
@@ -6342,7 +6342,7 @@
           <p:cNvPr id="11" name="metric-label-40%">
             <a:extLst xmlns:a="http://schemas.openxmlformats.org/drawingml/2006/main">
               <a:ext uri="{FF2B5EF4-FFF2-40B4-BE49-F238E27FC236}">
-                <a16:creationId xmlns:a16="http://schemas.microsoft.com/office/drawing/2014/main" id="{495557E6-8451-48B6-B455-B85A2AEDC73C}"/>
+                <a16:creationId xmlns:a16="http://schemas.microsoft.com/office/drawing/2014/main" id="{30948EEF-385C-46F7-918D-19FE10DAA518}"/>
               </a:ext>
             </a:extLst>
           </p:cNvPr>
@@ -6387,7 +6387,7 @@
           <p:cNvPr id="12" name="metric-detail-40%">
             <a:extLst xmlns:a="http://schemas.openxmlformats.org/drawingml/2006/main">
               <a:ext uri="{FF2B5EF4-FFF2-40B4-BE49-F238E27FC236}">
-                <a16:creationId xmlns:a16="http://schemas.microsoft.com/office/drawing/2014/main" id="{142C64A0-68C8-43B4-84A5-3F61D385B7BA}"/>
+                <a16:creationId xmlns:a16="http://schemas.microsoft.com/office/drawing/2014/main" id="{4FFC0768-8CBF-402A-BDD3-B7B2569B40C8}"/>
               </a:ext>
             </a:extLst>
           </p:cNvPr>
@@ -6432,7 +6432,7 @@
           <p:cNvPr id="13" name="metric-card-92%">
             <a:extLst xmlns:a="http://schemas.openxmlformats.org/drawingml/2006/main">
               <a:ext uri="{FF2B5EF4-FFF2-40B4-BE49-F238E27FC236}">
-                <a16:creationId xmlns:a16="http://schemas.microsoft.com/office/drawing/2014/main" id="{88F24802-DA20-4468-8378-450760FC313F}"/>
+                <a16:creationId xmlns:a16="http://schemas.microsoft.com/office/drawing/2014/main" id="{D6E2B219-E4AE-4FC9-B304-EF2ED7D45F8D}"/>
               </a:ext>
             </a:extLst>
           </p:cNvPr>
@@ -6461,7 +6461,7 @@
           <p:cNvPr id="14" name="metric-accent-92%">
             <a:extLst xmlns:a="http://schemas.openxmlformats.org/drawingml/2006/main">
               <a:ext uri="{FF2B5EF4-FFF2-40B4-BE49-F238E27FC236}">
-                <a16:creationId xmlns:a16="http://schemas.microsoft.com/office/drawing/2014/main" id="{01D0A7BF-2A55-4773-A752-B68B82CC9EE1}"/>
+                <a16:creationId xmlns:a16="http://schemas.microsoft.com/office/drawing/2014/main" id="{3633AAD5-760F-460F-AD5F-A2040F3052A4}"/>
               </a:ext>
             </a:extLst>
           </p:cNvPr>
@@ -6490,7 +6490,7 @@
           <p:cNvPr id="15" name="metric-value-92%">
             <a:extLst xmlns:a="http://schemas.openxmlformats.org/drawingml/2006/main">
               <a:ext uri="{FF2B5EF4-FFF2-40B4-BE49-F238E27FC236}">
-                <a16:creationId xmlns:a16="http://schemas.microsoft.com/office/drawing/2014/main" id="{79903104-3E68-46A7-8829-D3FC8CDA7C26}"/>
+                <a16:creationId xmlns:a16="http://schemas.microsoft.com/office/drawing/2014/main" id="{C2E258A5-D36D-4BFE-B429-C532F9251515}"/>
               </a:ext>
             </a:extLst>
           </p:cNvPr>
@@ -6535,7 +6535,7 @@
           <p:cNvPr id="16" name="metric-label-92%">
             <a:extLst xmlns:a="http://schemas.openxmlformats.org/drawingml/2006/main">
               <a:ext uri="{FF2B5EF4-FFF2-40B4-BE49-F238E27FC236}">
-                <a16:creationId xmlns:a16="http://schemas.microsoft.com/office/drawing/2014/main" id="{A2589AC3-4947-4345-B6A9-2EA9A899590E}"/>
+                <a16:creationId xmlns:a16="http://schemas.microsoft.com/office/drawing/2014/main" id="{EC4F8A7C-594D-4A98-AC88-01E851C18E4C}"/>
               </a:ext>
             </a:extLst>
           </p:cNvPr>
@@ -6580,7 +6580,7 @@
           <p:cNvPr id="17" name="metric-detail-92%">
             <a:extLst xmlns:a="http://schemas.openxmlformats.org/drawingml/2006/main">
               <a:ext uri="{FF2B5EF4-FFF2-40B4-BE49-F238E27FC236}">
-                <a16:creationId xmlns:a16="http://schemas.microsoft.com/office/drawing/2014/main" id="{D6FD0209-CF19-4401-9DAC-B254E2A93995}"/>
+                <a16:creationId xmlns:a16="http://schemas.microsoft.com/office/drawing/2014/main" id="{F9ACEFBE-5CAE-4B18-8F9D-B57C0335345E}"/>
               </a:ext>
             </a:extLst>
           </p:cNvPr>
@@ -6625,7 +6625,7 @@
           <p:cNvPr id="18" name="metric-card-89%">
             <a:extLst xmlns:a="http://schemas.openxmlformats.org/drawingml/2006/main">
               <a:ext uri="{FF2B5EF4-FFF2-40B4-BE49-F238E27FC236}">
-                <a16:creationId xmlns:a16="http://schemas.microsoft.com/office/drawing/2014/main" id="{CAE1A5A8-9296-46A4-95FE-F26B4DA5AA91}"/>
+                <a16:creationId xmlns:a16="http://schemas.microsoft.com/office/drawing/2014/main" id="{FC728E5F-5963-4C44-BC67-935C3E659892}"/>
               </a:ext>
             </a:extLst>
           </p:cNvPr>
@@ -6654,7 +6654,7 @@
           <p:cNvPr id="19" name="metric-accent-89%">
             <a:extLst xmlns:a="http://schemas.openxmlformats.org/drawingml/2006/main">
               <a:ext uri="{FF2B5EF4-FFF2-40B4-BE49-F238E27FC236}">
-                <a16:creationId xmlns:a16="http://schemas.microsoft.com/office/drawing/2014/main" id="{C28E32D1-69CC-46EA-B2B6-B37535766BB4}"/>
+                <a16:creationId xmlns:a16="http://schemas.microsoft.com/office/drawing/2014/main" id="{81F7E2DE-D099-48F3-A7A6-239A03CB0D26}"/>
               </a:ext>
             </a:extLst>
           </p:cNvPr>
@@ -6683,7 +6683,7 @@
           <p:cNvPr id="20" name="metric-value-89%">
             <a:extLst xmlns:a="http://schemas.openxmlformats.org/drawingml/2006/main">
               <a:ext uri="{FF2B5EF4-FFF2-40B4-BE49-F238E27FC236}">
-                <a16:creationId xmlns:a16="http://schemas.microsoft.com/office/drawing/2014/main" id="{77FF825E-D144-40E6-BF4C-2002380DDBFF}"/>
+                <a16:creationId xmlns:a16="http://schemas.microsoft.com/office/drawing/2014/main" id="{C1F29B35-C77A-4A9B-95A0-D15674925E8E}"/>
               </a:ext>
             </a:extLst>
           </p:cNvPr>
@@ -6728,7 +6728,7 @@
           <p:cNvPr id="21" name="metric-label-89%">
             <a:extLst xmlns:a="http://schemas.openxmlformats.org/drawingml/2006/main">
               <a:ext uri="{FF2B5EF4-FFF2-40B4-BE49-F238E27FC236}">
-                <a16:creationId xmlns:a16="http://schemas.microsoft.com/office/drawing/2014/main" id="{D8657FCE-5CE8-4A5F-9E0B-57F5F344B27E}"/>
+                <a16:creationId xmlns:a16="http://schemas.microsoft.com/office/drawing/2014/main" id="{90048BAD-26C4-4917-98A5-78B57D2BEEA1}"/>
               </a:ext>
             </a:extLst>
           </p:cNvPr>
@@ -6773,7 +6773,7 @@
           <p:cNvPr id="22" name="metric-detail-89%">
             <a:extLst xmlns:a="http://schemas.openxmlformats.org/drawingml/2006/main">
               <a:ext uri="{FF2B5EF4-FFF2-40B4-BE49-F238E27FC236}">
-                <a16:creationId xmlns:a16="http://schemas.microsoft.com/office/drawing/2014/main" id="{29980F11-7B41-429F-94CC-FF513D87AA34}"/>
+                <a16:creationId xmlns:a16="http://schemas.microsoft.com/office/drawing/2014/main" id="{EDF31DA2-D898-4DDE-9BA1-5EFCFC4BBBE7}"/>
               </a:ext>
             </a:extLst>
           </p:cNvPr>
@@ -6818,7 +6818,7 @@
           <p:cNvPr id="23" name="footer-line-gold-3">
             <a:extLst xmlns:a="http://schemas.openxmlformats.org/drawingml/2006/main">
               <a:ext uri="{FF2B5EF4-FFF2-40B4-BE49-F238E27FC236}">
-                <a16:creationId xmlns:a16="http://schemas.microsoft.com/office/drawing/2014/main" id="{B15DEEA1-086D-41E5-8856-F5A61C18FB42}"/>
+                <a16:creationId xmlns:a16="http://schemas.microsoft.com/office/drawing/2014/main" id="{292FAEFC-B2CC-4C5C-B421-55E46A557837}"/>
               </a:ext>
             </a:extLst>
           </p:cNvPr>
@@ -6845,7 +6845,7 @@
           <p:cNvPr id="24" name="footer-line-coral-3">
             <a:extLst xmlns:a="http://schemas.openxmlformats.org/drawingml/2006/main">
               <a:ext uri="{FF2B5EF4-FFF2-40B4-BE49-F238E27FC236}">
-                <a16:creationId xmlns:a16="http://schemas.microsoft.com/office/drawing/2014/main" id="{949390B1-34D7-44FD-AE1A-0DB0DBC9FAEC}"/>
+                <a16:creationId xmlns:a16="http://schemas.microsoft.com/office/drawing/2014/main" id="{82AF6605-FD30-47FC-9E25-A201C691A95E}"/>
               </a:ext>
             </a:extLst>
           </p:cNvPr>
@@ -6872,7 +6872,7 @@
           <p:cNvPr id="25" name="footer-line-teal-3">
             <a:extLst xmlns:a="http://schemas.openxmlformats.org/drawingml/2006/main">
               <a:ext uri="{FF2B5EF4-FFF2-40B4-BE49-F238E27FC236}">
-                <a16:creationId xmlns:a16="http://schemas.microsoft.com/office/drawing/2014/main" id="{C3F2EB31-D7B4-428E-9507-76EEA8DE7D17}"/>
+                <a16:creationId xmlns:a16="http://schemas.microsoft.com/office/drawing/2014/main" id="{D5A16C03-CA09-4577-9A84-3C2C1D67DAB7}"/>
               </a:ext>
             </a:extLst>
           </p:cNvPr>
@@ -6899,7 +6899,7 @@
           <p:cNvPr id="26" name="footer-name-3">
             <a:extLst xmlns:a="http://schemas.openxmlformats.org/drawingml/2006/main">
               <a:ext uri="{FF2B5EF4-FFF2-40B4-BE49-F238E27FC236}">
-                <a16:creationId xmlns:a16="http://schemas.microsoft.com/office/drawing/2014/main" id="{BE9681F3-A705-45E8-8978-AB80A2062F2F}"/>
+                <a16:creationId xmlns:a16="http://schemas.microsoft.com/office/drawing/2014/main" id="{11D8DDAB-0F78-4460-8D74-B27A65631593}"/>
               </a:ext>
             </a:extLst>
           </p:cNvPr>
@@ -6944,7 +6944,7 @@
           <p:cNvPr id="27" name="footer-page-3">
             <a:extLst xmlns:a="http://schemas.openxmlformats.org/drawingml/2006/main">
               <a:ext uri="{FF2B5EF4-FFF2-40B4-BE49-F238E27FC236}">
-                <a16:creationId xmlns:a16="http://schemas.microsoft.com/office/drawing/2014/main" id="{DE8906A9-1933-45BA-828F-C74C272E1DEA}"/>
+                <a16:creationId xmlns:a16="http://schemas.microsoft.com/office/drawing/2014/main" id="{16BD8E6E-9E8A-4A3E-BDC3-FD1B42FEE198}"/>
               </a:ext>
             </a:extLst>
           </p:cNvPr>
@@ -6987,7 +6987,7 @@
     </p:spTree>
     <p:extLst>
       <p:ext uri="{BB962C8B-B14F-4D97-AF65-F5344CB8AC3E}">
-        <p14:creationId xmlns:p14="http://schemas.microsoft.com/office/powerpoint/2010/main" val="607574129"/>
+        <p14:creationId xmlns:p14="http://schemas.microsoft.com/office/powerpoint/2010/main" val="1010036959"/>
       </p:ext>
     </p:extLst>
   </p:cSld>
@@ -7011,7 +7011,7 @@
           <p:cNvPr id="37" name="04-experience-canvas">
             <a:extLst xmlns:a="http://schemas.openxmlformats.org/drawingml/2006/main">
               <a:ext uri="{FF2B5EF4-FFF2-40B4-BE49-F238E27FC236}">
-                <a16:creationId xmlns:a16="http://schemas.microsoft.com/office/drawing/2014/main" id="{639C3B1B-EDD8-4C08-8C9C-824BFC606A7C}"/>
+                <a16:creationId xmlns:a16="http://schemas.microsoft.com/office/drawing/2014/main" id="{CD327683-F04E-4FA3-9B9E-0502AEF95D9F}"/>
               </a:ext>
             </a:extLst>
           </p:cNvPr>
@@ -7038,7 +7038,7 @@
           <p:cNvPr id="2" name="04-experience-edge-gold">
             <a:extLst xmlns:a="http://schemas.openxmlformats.org/drawingml/2006/main">
               <a:ext uri="{FF2B5EF4-FFF2-40B4-BE49-F238E27FC236}">
-                <a16:creationId xmlns:a16="http://schemas.microsoft.com/office/drawing/2014/main" id="{D83FB229-C4A3-4B67-A1CF-02F46DFA898E}"/>
+                <a16:creationId xmlns:a16="http://schemas.microsoft.com/office/drawing/2014/main" id="{02003481-4A4A-426C-A333-BDD6D722A45C}"/>
               </a:ext>
             </a:extLst>
           </p:cNvPr>
@@ -7065,7 +7065,7 @@
           <p:cNvPr id="3" name="04-experience-edge-coral">
             <a:extLst xmlns:a="http://schemas.openxmlformats.org/drawingml/2006/main">
               <a:ext uri="{FF2B5EF4-FFF2-40B4-BE49-F238E27FC236}">
-                <a16:creationId xmlns:a16="http://schemas.microsoft.com/office/drawing/2014/main" id="{808A1D87-EEE6-4B94-804A-7291545A75D3}"/>
+                <a16:creationId xmlns:a16="http://schemas.microsoft.com/office/drawing/2014/main" id="{C08DC786-0111-45D1-A582-4B53E6A73CB4}"/>
               </a:ext>
             </a:extLst>
           </p:cNvPr>
@@ -7092,7 +7092,7 @@
           <p:cNvPr id="4" name="04-experience-edge-teal">
             <a:extLst xmlns:a="http://schemas.openxmlformats.org/drawingml/2006/main">
               <a:ext uri="{FF2B5EF4-FFF2-40B4-BE49-F238E27FC236}">
-                <a16:creationId xmlns:a16="http://schemas.microsoft.com/office/drawing/2014/main" id="{7C207E0F-C773-4344-8DED-7D53FB09FB40}"/>
+                <a16:creationId xmlns:a16="http://schemas.microsoft.com/office/drawing/2014/main" id="{69D6F485-1240-4808-B79C-DE49AB13819A}"/>
               </a:ext>
             </a:extLst>
           </p:cNvPr>
@@ -7119,7 +7119,7 @@
           <p:cNvPr id="5" name="eyebrow-4">
             <a:extLst xmlns:a="http://schemas.openxmlformats.org/drawingml/2006/main">
               <a:ext uri="{FF2B5EF4-FFF2-40B4-BE49-F238E27FC236}">
-                <a16:creationId xmlns:a16="http://schemas.microsoft.com/office/drawing/2014/main" id="{918CECFA-A356-4586-90C2-07F9E6B06DBB}"/>
+                <a16:creationId xmlns:a16="http://schemas.microsoft.com/office/drawing/2014/main" id="{31F5337A-8604-44AF-801A-39AC972D9AAF}"/>
               </a:ext>
             </a:extLst>
           </p:cNvPr>
@@ -7164,7 +7164,7 @@
           <p:cNvPr id="6" name="title-4">
             <a:extLst xmlns:a="http://schemas.openxmlformats.org/drawingml/2006/main">
               <a:ext uri="{FF2B5EF4-FFF2-40B4-BE49-F238E27FC236}">
-                <a16:creationId xmlns:a16="http://schemas.microsoft.com/office/drawing/2014/main" id="{D60DBE8E-8CE2-4F78-AFAC-6FAE38FF19CD}"/>
+                <a16:creationId xmlns:a16="http://schemas.microsoft.com/office/drawing/2014/main" id="{7911A25D-187E-4E48-97EC-980B6E2DCBAB}"/>
               </a:ext>
             </a:extLst>
           </p:cNvPr>
@@ -7209,7 +7209,7 @@
           <p:cNvPr id="7" name="timeline-line">
             <a:extLst xmlns:a="http://schemas.openxmlformats.org/drawingml/2006/main">
               <a:ext uri="{FF2B5EF4-FFF2-40B4-BE49-F238E27FC236}">
-                <a16:creationId xmlns:a16="http://schemas.microsoft.com/office/drawing/2014/main" id="{7590AC58-4698-4ABC-BC7B-8895FF156B9D}"/>
+                <a16:creationId xmlns:a16="http://schemas.microsoft.com/office/drawing/2014/main" id="{1029863C-7847-426F-AC7C-C261240488D0}"/>
               </a:ext>
             </a:extLst>
           </p:cNvPr>
@@ -7236,7 +7236,7 @@
           <p:cNvPr id="8" name="timeline-dot-0">
             <a:extLst xmlns:a="http://schemas.openxmlformats.org/drawingml/2006/main">
               <a:ext uri="{FF2B5EF4-FFF2-40B4-BE49-F238E27FC236}">
-                <a16:creationId xmlns:a16="http://schemas.microsoft.com/office/drawing/2014/main" id="{CEAC9224-325F-47B5-9479-5B7A2228CF19}"/>
+                <a16:creationId xmlns:a16="http://schemas.microsoft.com/office/drawing/2014/main" id="{C2F4EDA8-4192-4819-B517-AB1A0E414C08}"/>
               </a:ext>
             </a:extLst>
           </p:cNvPr>
@@ -7265,7 +7265,7 @@
           <p:cNvPr id="9" name="timeline-dot-core-0">
             <a:extLst xmlns:a="http://schemas.openxmlformats.org/drawingml/2006/main">
               <a:ext uri="{FF2B5EF4-FFF2-40B4-BE49-F238E27FC236}">
-                <a16:creationId xmlns:a16="http://schemas.microsoft.com/office/drawing/2014/main" id="{9AEE5E11-170F-42B0-97D5-506E5F570331}"/>
+                <a16:creationId xmlns:a16="http://schemas.microsoft.com/office/drawing/2014/main" id="{9125C25E-4438-4B91-B396-7E0A78AD1296}"/>
               </a:ext>
             </a:extLst>
           </p:cNvPr>
@@ -7294,7 +7294,7 @@
           <p:cNvPr id="10" name="timeline-period-0">
             <a:extLst xmlns:a="http://schemas.openxmlformats.org/drawingml/2006/main">
               <a:ext uri="{FF2B5EF4-FFF2-40B4-BE49-F238E27FC236}">
-                <a16:creationId xmlns:a16="http://schemas.microsoft.com/office/drawing/2014/main" id="{0B5961D7-C2B8-49D8-AB1F-A776BA54687D}"/>
+                <a16:creationId xmlns:a16="http://schemas.microsoft.com/office/drawing/2014/main" id="{49FABED0-361E-4F4F-89E4-9EC64FFEF009}"/>
               </a:ext>
             </a:extLst>
           </p:cNvPr>
@@ -7339,7 +7339,7 @@
           <p:cNvPr id="11" name="timeline-org-0">
             <a:extLst xmlns:a="http://schemas.openxmlformats.org/drawingml/2006/main">
               <a:ext uri="{FF2B5EF4-FFF2-40B4-BE49-F238E27FC236}">
-                <a16:creationId xmlns:a16="http://schemas.microsoft.com/office/drawing/2014/main" id="{E5903844-6D0A-4320-8EB4-2BA29831D6FC}"/>
+                <a16:creationId xmlns:a16="http://schemas.microsoft.com/office/drawing/2014/main" id="{7AA96355-F88C-4383-82E2-F404E0077A87}"/>
               </a:ext>
             </a:extLst>
           </p:cNvPr>
@@ -7384,7 +7384,7 @@
           <p:cNvPr id="12" name="timeline-role-0">
             <a:extLst xmlns:a="http://schemas.openxmlformats.org/drawingml/2006/main">
               <a:ext uri="{FF2B5EF4-FFF2-40B4-BE49-F238E27FC236}">
-                <a16:creationId xmlns:a16="http://schemas.microsoft.com/office/drawing/2014/main" id="{664E3F9C-1FA1-4500-8D40-C5D45328FCBB}"/>
+                <a16:creationId xmlns:a16="http://schemas.microsoft.com/office/drawing/2014/main" id="{7AF89F7F-8DA7-4A12-BCA9-B3EB976D0020}"/>
               </a:ext>
             </a:extLst>
           </p:cNvPr>
@@ -7429,7 +7429,7 @@
           <p:cNvPr id="13" name="timeline-result-0">
             <a:extLst xmlns:a="http://schemas.openxmlformats.org/drawingml/2006/main">
               <a:ext uri="{FF2B5EF4-FFF2-40B4-BE49-F238E27FC236}">
-                <a16:creationId xmlns:a16="http://schemas.microsoft.com/office/drawing/2014/main" id="{CBD26106-7CCC-4B31-ABE1-BE84F54E1B74}"/>
+                <a16:creationId xmlns:a16="http://schemas.microsoft.com/office/drawing/2014/main" id="{12F576EA-FE19-4201-AF0E-DE63A42818C3}"/>
               </a:ext>
             </a:extLst>
           </p:cNvPr>
@@ -7474,7 +7474,7 @@
           <p:cNvPr id="14" name="timeline-dot-1">
             <a:extLst xmlns:a="http://schemas.openxmlformats.org/drawingml/2006/main">
               <a:ext uri="{FF2B5EF4-FFF2-40B4-BE49-F238E27FC236}">
-                <a16:creationId xmlns:a16="http://schemas.microsoft.com/office/drawing/2014/main" id="{AEBCA2BC-E021-49AA-A4C6-C0783DC732F2}"/>
+                <a16:creationId xmlns:a16="http://schemas.microsoft.com/office/drawing/2014/main" id="{A506158D-C8B8-4F98-9DDE-B759217A90EC}"/>
               </a:ext>
             </a:extLst>
           </p:cNvPr>
@@ -7503,7 +7503,7 @@
           <p:cNvPr id="15" name="timeline-dot-core-1">
             <a:extLst xmlns:a="http://schemas.openxmlformats.org/drawingml/2006/main">
               <a:ext uri="{FF2B5EF4-FFF2-40B4-BE49-F238E27FC236}">
-                <a16:creationId xmlns:a16="http://schemas.microsoft.com/office/drawing/2014/main" id="{5A37575E-EABF-421C-A1E3-55D249221BD6}"/>
+                <a16:creationId xmlns:a16="http://schemas.microsoft.com/office/drawing/2014/main" id="{B1C90E96-DDB5-4F2D-A8F5-796B2AE5D85C}"/>
               </a:ext>
             </a:extLst>
           </p:cNvPr>
@@ -7532,7 +7532,7 @@
           <p:cNvPr id="16" name="timeline-period-1">
             <a:extLst xmlns:a="http://schemas.openxmlformats.org/drawingml/2006/main">
               <a:ext uri="{FF2B5EF4-FFF2-40B4-BE49-F238E27FC236}">
-                <a16:creationId xmlns:a16="http://schemas.microsoft.com/office/drawing/2014/main" id="{97051A59-C226-4858-B3B1-ECD89EAD9034}"/>
+                <a16:creationId xmlns:a16="http://schemas.microsoft.com/office/drawing/2014/main" id="{76C58D01-B7C8-442E-BD90-C406149697CE}"/>
               </a:ext>
             </a:extLst>
           </p:cNvPr>
@@ -7577,7 +7577,7 @@
           <p:cNvPr id="17" name="timeline-org-1">
             <a:extLst xmlns:a="http://schemas.openxmlformats.org/drawingml/2006/main">
               <a:ext uri="{FF2B5EF4-FFF2-40B4-BE49-F238E27FC236}">
-                <a16:creationId xmlns:a16="http://schemas.microsoft.com/office/drawing/2014/main" id="{14C35393-12A6-4BE3-AA62-AB58B7B7A2B2}"/>
+                <a16:creationId xmlns:a16="http://schemas.microsoft.com/office/drawing/2014/main" id="{B25C4E1D-C008-49EF-B396-60A83B18BA52}"/>
               </a:ext>
             </a:extLst>
           </p:cNvPr>
@@ -7622,7 +7622,7 @@
           <p:cNvPr id="18" name="timeline-role-1">
             <a:extLst xmlns:a="http://schemas.openxmlformats.org/drawingml/2006/main">
               <a:ext uri="{FF2B5EF4-FFF2-40B4-BE49-F238E27FC236}">
-                <a16:creationId xmlns:a16="http://schemas.microsoft.com/office/drawing/2014/main" id="{979DA7D9-0F5B-49AC-99FC-7E3B8FC5B643}"/>
+                <a16:creationId xmlns:a16="http://schemas.microsoft.com/office/drawing/2014/main" id="{F4FE63DD-D2C3-40A2-8507-147C6E139075}"/>
               </a:ext>
             </a:extLst>
           </p:cNvPr>
@@ -7667,7 +7667,7 @@
           <p:cNvPr id="19" name="timeline-result-1">
             <a:extLst xmlns:a="http://schemas.openxmlformats.org/drawingml/2006/main">
               <a:ext uri="{FF2B5EF4-FFF2-40B4-BE49-F238E27FC236}">
-                <a16:creationId xmlns:a16="http://schemas.microsoft.com/office/drawing/2014/main" id="{FDCDCE65-AEB9-45B1-9A23-CEDEBB306713}"/>
+                <a16:creationId xmlns:a16="http://schemas.microsoft.com/office/drawing/2014/main" id="{085C76BB-9C99-41AB-8D42-7427D3324939}"/>
               </a:ext>
             </a:extLst>
           </p:cNvPr>
@@ -7712,7 +7712,7 @@
           <p:cNvPr id="20" name="timeline-dot-2">
             <a:extLst xmlns:a="http://schemas.openxmlformats.org/drawingml/2006/main">
               <a:ext uri="{FF2B5EF4-FFF2-40B4-BE49-F238E27FC236}">
-                <a16:creationId xmlns:a16="http://schemas.microsoft.com/office/drawing/2014/main" id="{F829DA46-EC04-4C8A-BAA6-FF371186CE8F}"/>
+                <a16:creationId xmlns:a16="http://schemas.microsoft.com/office/drawing/2014/main" id="{DB39153F-9CFE-47D8-80FD-E065DCBB650F}"/>
               </a:ext>
             </a:extLst>
           </p:cNvPr>
@@ -7741,7 +7741,7 @@
           <p:cNvPr id="21" name="timeline-dot-core-2">
             <a:extLst xmlns:a="http://schemas.openxmlformats.org/drawingml/2006/main">
               <a:ext uri="{FF2B5EF4-FFF2-40B4-BE49-F238E27FC236}">
-                <a16:creationId xmlns:a16="http://schemas.microsoft.com/office/drawing/2014/main" id="{8DFF590E-EC80-4982-9C02-DBC1525430C8}"/>
+                <a16:creationId xmlns:a16="http://schemas.microsoft.com/office/drawing/2014/main" id="{14C05002-DB88-4985-92A7-CB17C90EF226}"/>
               </a:ext>
             </a:extLst>
           </p:cNvPr>
@@ -7770,7 +7770,7 @@
           <p:cNvPr id="22" name="timeline-period-2">
             <a:extLst xmlns:a="http://schemas.openxmlformats.org/drawingml/2006/main">
               <a:ext uri="{FF2B5EF4-FFF2-40B4-BE49-F238E27FC236}">
-                <a16:creationId xmlns:a16="http://schemas.microsoft.com/office/drawing/2014/main" id="{D1C5C7B6-F34B-4AC1-BB9F-6B397F5A1ECE}"/>
+                <a16:creationId xmlns:a16="http://schemas.microsoft.com/office/drawing/2014/main" id="{F568D920-1924-4958-96E2-BE861A07BA62}"/>
               </a:ext>
             </a:extLst>
           </p:cNvPr>
@@ -7815,7 +7815,7 @@
           <p:cNvPr id="23" name="timeline-org-2">
             <a:extLst xmlns:a="http://schemas.openxmlformats.org/drawingml/2006/main">
               <a:ext uri="{FF2B5EF4-FFF2-40B4-BE49-F238E27FC236}">
-                <a16:creationId xmlns:a16="http://schemas.microsoft.com/office/drawing/2014/main" id="{4761F0D9-5221-4AAC-A597-BC465D6D6A8A}"/>
+                <a16:creationId xmlns:a16="http://schemas.microsoft.com/office/drawing/2014/main" id="{48217E0C-A918-45CD-BE72-E130E3464489}"/>
               </a:ext>
             </a:extLst>
           </p:cNvPr>
@@ -7860,7 +7860,7 @@
           <p:cNvPr id="24" name="timeline-role-2">
             <a:extLst xmlns:a="http://schemas.openxmlformats.org/drawingml/2006/main">
               <a:ext uri="{FF2B5EF4-FFF2-40B4-BE49-F238E27FC236}">
-                <a16:creationId xmlns:a16="http://schemas.microsoft.com/office/drawing/2014/main" id="{03CAC0B5-6D07-4AB2-BADD-19730D42D0D4}"/>
+                <a16:creationId xmlns:a16="http://schemas.microsoft.com/office/drawing/2014/main" id="{00A9934B-9B06-4A12-81FA-3184F53050A6}"/>
               </a:ext>
             </a:extLst>
           </p:cNvPr>
@@ -7905,7 +7905,7 @@
           <p:cNvPr id="25" name="timeline-result-2">
             <a:extLst xmlns:a="http://schemas.openxmlformats.org/drawingml/2006/main">
               <a:ext uri="{FF2B5EF4-FFF2-40B4-BE49-F238E27FC236}">
-                <a16:creationId xmlns:a16="http://schemas.microsoft.com/office/drawing/2014/main" id="{B8EB5F12-03F1-4FAE-A122-E118110EA27D}"/>
+                <a16:creationId xmlns:a16="http://schemas.microsoft.com/office/drawing/2014/main" id="{69CE96FB-B817-4BD3-8740-C7638C9ADEBE}"/>
               </a:ext>
             </a:extLst>
           </p:cNvPr>
@@ -7950,7 +7950,7 @@
           <p:cNvPr id="26" name="timeline-dot-3">
             <a:extLst xmlns:a="http://schemas.openxmlformats.org/drawingml/2006/main">
               <a:ext uri="{FF2B5EF4-FFF2-40B4-BE49-F238E27FC236}">
-                <a16:creationId xmlns:a16="http://schemas.microsoft.com/office/drawing/2014/main" id="{CD7CB673-3933-42D3-9F9B-2FAEA35B0E2D}"/>
+                <a16:creationId xmlns:a16="http://schemas.microsoft.com/office/drawing/2014/main" id="{092BF931-D785-45F1-B693-645DB6F0B819}"/>
               </a:ext>
             </a:extLst>
           </p:cNvPr>
@@ -7979,7 +7979,7 @@
           <p:cNvPr id="27" name="timeline-dot-core-3">
             <a:extLst xmlns:a="http://schemas.openxmlformats.org/drawingml/2006/main">
               <a:ext uri="{FF2B5EF4-FFF2-40B4-BE49-F238E27FC236}">
-                <a16:creationId xmlns:a16="http://schemas.microsoft.com/office/drawing/2014/main" id="{2CDEC75F-54FB-4286-AC00-0FE6EA58391C}"/>
+                <a16:creationId xmlns:a16="http://schemas.microsoft.com/office/drawing/2014/main" id="{1752A3B8-4913-4104-8625-21DEF1E16129}"/>
               </a:ext>
             </a:extLst>
           </p:cNvPr>
@@ -8008,7 +8008,7 @@
           <p:cNvPr id="28" name="timeline-period-3">
             <a:extLst xmlns:a="http://schemas.openxmlformats.org/drawingml/2006/main">
               <a:ext uri="{FF2B5EF4-FFF2-40B4-BE49-F238E27FC236}">
-                <a16:creationId xmlns:a16="http://schemas.microsoft.com/office/drawing/2014/main" id="{9C83DE42-7265-4B6E-A690-B8DECDE08DAD}"/>
+                <a16:creationId xmlns:a16="http://schemas.microsoft.com/office/drawing/2014/main" id="{FCF68070-52A9-4882-8102-03E5286EA852}"/>
               </a:ext>
             </a:extLst>
           </p:cNvPr>
@@ -8053,7 +8053,7 @@
           <p:cNvPr id="29" name="timeline-org-3">
             <a:extLst xmlns:a="http://schemas.openxmlformats.org/drawingml/2006/main">
               <a:ext uri="{FF2B5EF4-FFF2-40B4-BE49-F238E27FC236}">
-                <a16:creationId xmlns:a16="http://schemas.microsoft.com/office/drawing/2014/main" id="{2BE70D57-C23D-49FE-8E65-16B8688F4DBC}"/>
+                <a16:creationId xmlns:a16="http://schemas.microsoft.com/office/drawing/2014/main" id="{3C8B2300-8EFA-4DCE-BFCB-64F69087FC0F}"/>
               </a:ext>
             </a:extLst>
           </p:cNvPr>
@@ -8098,7 +8098,7 @@
           <p:cNvPr id="30" name="timeline-role-3">
             <a:extLst xmlns:a="http://schemas.openxmlformats.org/drawingml/2006/main">
               <a:ext uri="{FF2B5EF4-FFF2-40B4-BE49-F238E27FC236}">
-                <a16:creationId xmlns:a16="http://schemas.microsoft.com/office/drawing/2014/main" id="{5AA694EF-1B21-462C-B89E-1E9E161C0421}"/>
+                <a16:creationId xmlns:a16="http://schemas.microsoft.com/office/drawing/2014/main" id="{D47CBC0A-D5DA-47BD-932B-04C86A6E63C6}"/>
               </a:ext>
             </a:extLst>
           </p:cNvPr>
@@ -8143,7 +8143,7 @@
           <p:cNvPr id="31" name="timeline-result-3">
             <a:extLst xmlns:a="http://schemas.openxmlformats.org/drawingml/2006/main">
               <a:ext uri="{FF2B5EF4-FFF2-40B4-BE49-F238E27FC236}">
-                <a16:creationId xmlns:a16="http://schemas.microsoft.com/office/drawing/2014/main" id="{E593640E-8341-46CA-A642-567F786D11DE}"/>
+                <a16:creationId xmlns:a16="http://schemas.microsoft.com/office/drawing/2014/main" id="{9B0C500F-DC18-43E6-ABA5-FA8E228603C6}"/>
               </a:ext>
             </a:extLst>
           </p:cNvPr>
@@ -8188,7 +8188,7 @@
           <p:cNvPr id="32" name="footer-line-gold-4">
             <a:extLst xmlns:a="http://schemas.openxmlformats.org/drawingml/2006/main">
               <a:ext uri="{FF2B5EF4-FFF2-40B4-BE49-F238E27FC236}">
-                <a16:creationId xmlns:a16="http://schemas.microsoft.com/office/drawing/2014/main" id="{8549CA94-A11D-413E-9492-E25940B4F86D}"/>
+                <a16:creationId xmlns:a16="http://schemas.microsoft.com/office/drawing/2014/main" id="{C9132E5E-AB25-4388-AF48-FE10B5C52566}"/>
               </a:ext>
             </a:extLst>
           </p:cNvPr>
@@ -8215,7 +8215,7 @@
           <p:cNvPr id="33" name="footer-line-coral-4">
             <a:extLst xmlns:a="http://schemas.openxmlformats.org/drawingml/2006/main">
               <a:ext uri="{FF2B5EF4-FFF2-40B4-BE49-F238E27FC236}">
-                <a16:creationId xmlns:a16="http://schemas.microsoft.com/office/drawing/2014/main" id="{6908DB4E-7B20-4970-B625-723C129B050F}"/>
+                <a16:creationId xmlns:a16="http://schemas.microsoft.com/office/drawing/2014/main" id="{6CDC92BC-1C32-4884-B05D-49FBFD7C6FAC}"/>
               </a:ext>
             </a:extLst>
           </p:cNvPr>
@@ -8242,7 +8242,7 @@
           <p:cNvPr id="34" name="footer-line-teal-4">
             <a:extLst xmlns:a="http://schemas.openxmlformats.org/drawingml/2006/main">
               <a:ext uri="{FF2B5EF4-FFF2-40B4-BE49-F238E27FC236}">
-                <a16:creationId xmlns:a16="http://schemas.microsoft.com/office/drawing/2014/main" id="{0D2F73F4-BF92-438C-AB27-CE0DFF3E60F9}"/>
+                <a16:creationId xmlns:a16="http://schemas.microsoft.com/office/drawing/2014/main" id="{FB1D56C0-9479-4B7C-AEBE-5AD5F954069D}"/>
               </a:ext>
             </a:extLst>
           </p:cNvPr>
@@ -8269,7 +8269,7 @@
           <p:cNvPr id="35" name="footer-name-4">
             <a:extLst xmlns:a="http://schemas.openxmlformats.org/drawingml/2006/main">
               <a:ext uri="{FF2B5EF4-FFF2-40B4-BE49-F238E27FC236}">
-                <a16:creationId xmlns:a16="http://schemas.microsoft.com/office/drawing/2014/main" id="{FAD2E57F-0DC6-4295-9C3C-DA63488BEC7C}"/>
+                <a16:creationId xmlns:a16="http://schemas.microsoft.com/office/drawing/2014/main" id="{72336046-5EFB-4E96-866C-2B6166A57D74}"/>
               </a:ext>
             </a:extLst>
           </p:cNvPr>
@@ -8314,7 +8314,7 @@
           <p:cNvPr id="36" name="footer-page-4">
             <a:extLst xmlns:a="http://schemas.openxmlformats.org/drawingml/2006/main">
               <a:ext uri="{FF2B5EF4-FFF2-40B4-BE49-F238E27FC236}">
-                <a16:creationId xmlns:a16="http://schemas.microsoft.com/office/drawing/2014/main" id="{914EE4D3-C63F-4844-99C7-AF7437842611}"/>
+                <a16:creationId xmlns:a16="http://schemas.microsoft.com/office/drawing/2014/main" id="{F2A70A78-D57F-4C70-9911-8B9AB1F75328}"/>
               </a:ext>
             </a:extLst>
           </p:cNvPr>
@@ -8357,7 +8357,7 @@
     </p:spTree>
     <p:extLst>
       <p:ext uri="{BB962C8B-B14F-4D97-AF65-F5344CB8AC3E}">
-        <p14:creationId xmlns:p14="http://schemas.microsoft.com/office/powerpoint/2010/main" val="807896691"/>
+        <p14:creationId xmlns:p14="http://schemas.microsoft.com/office/powerpoint/2010/main" val="321130936"/>
       </p:ext>
     </p:extLst>
   </p:cSld>
@@ -8381,7 +8381,7 @@
           <p:cNvPr id="24" name="05-pddikti-canvas">
             <a:extLst xmlns:a="http://schemas.openxmlformats.org/drawingml/2006/main">
               <a:ext uri="{FF2B5EF4-FFF2-40B4-BE49-F238E27FC236}">
-                <a16:creationId xmlns:a16="http://schemas.microsoft.com/office/drawing/2014/main" id="{5DD9B083-1CDD-4EEC-B05D-AF3EF7D6C35A}"/>
+                <a16:creationId xmlns:a16="http://schemas.microsoft.com/office/drawing/2014/main" id="{4BBC7FAD-C44A-45F0-84DB-2537DCA27F6A}"/>
               </a:ext>
             </a:extLst>
           </p:cNvPr>
@@ -8408,7 +8408,7 @@
           <p:cNvPr id="2" name="05-pddikti-edge-gold">
             <a:extLst xmlns:a="http://schemas.openxmlformats.org/drawingml/2006/main">
               <a:ext uri="{FF2B5EF4-FFF2-40B4-BE49-F238E27FC236}">
-                <a16:creationId xmlns:a16="http://schemas.microsoft.com/office/drawing/2014/main" id="{7C777477-A240-4037-92B1-49D1C53CA809}"/>
+                <a16:creationId xmlns:a16="http://schemas.microsoft.com/office/drawing/2014/main" id="{E610EB48-7764-4924-9B7C-5AB88E5AE3A9}"/>
               </a:ext>
             </a:extLst>
           </p:cNvPr>
@@ -8435,7 +8435,7 @@
           <p:cNvPr id="3" name="05-pddikti-edge-coral">
             <a:extLst xmlns:a="http://schemas.openxmlformats.org/drawingml/2006/main">
               <a:ext uri="{FF2B5EF4-FFF2-40B4-BE49-F238E27FC236}">
-                <a16:creationId xmlns:a16="http://schemas.microsoft.com/office/drawing/2014/main" id="{B89024B7-6514-44AA-9176-C3455FC3D8ED}"/>
+                <a16:creationId xmlns:a16="http://schemas.microsoft.com/office/drawing/2014/main" id="{433C09C6-6380-416A-ACDA-E11C948C9AA6}"/>
               </a:ext>
             </a:extLst>
           </p:cNvPr>
@@ -8462,7 +8462,7 @@
           <p:cNvPr id="4" name="05-pddikti-edge-teal">
             <a:extLst xmlns:a="http://schemas.openxmlformats.org/drawingml/2006/main">
               <a:ext uri="{FF2B5EF4-FFF2-40B4-BE49-F238E27FC236}">
-                <a16:creationId xmlns:a16="http://schemas.microsoft.com/office/drawing/2014/main" id="{2D2CC66E-5930-4975-9917-E2F3E2B54952}"/>
+                <a16:creationId xmlns:a16="http://schemas.microsoft.com/office/drawing/2014/main" id="{B86967D4-4347-4022-BBC9-510357767DBF}"/>
               </a:ext>
             </a:extLst>
           </p:cNvPr>
@@ -8489,7 +8489,7 @@
           <p:cNvPr id="5" name="eyebrow-5">
             <a:extLst xmlns:a="http://schemas.openxmlformats.org/drawingml/2006/main">
               <a:ext uri="{FF2B5EF4-FFF2-40B4-BE49-F238E27FC236}">
-                <a16:creationId xmlns:a16="http://schemas.microsoft.com/office/drawing/2014/main" id="{9D0E6773-4C83-48AA-BC6D-0EA2781E7983}"/>
+                <a16:creationId xmlns:a16="http://schemas.microsoft.com/office/drawing/2014/main" id="{8211264E-B160-46CE-A70F-EDA7C0FB8A54}"/>
               </a:ext>
             </a:extLst>
           </p:cNvPr>
@@ -8534,7 +8534,7 @@
           <p:cNvPr id="6" name="title-5">
             <a:extLst xmlns:a="http://schemas.openxmlformats.org/drawingml/2006/main">
               <a:ext uri="{FF2B5EF4-FFF2-40B4-BE49-F238E27FC236}">
-                <a16:creationId xmlns:a16="http://schemas.microsoft.com/office/drawing/2014/main" id="{D675773E-B8E0-411D-9B92-03DEDDDB9B00}"/>
+                <a16:creationId xmlns:a16="http://schemas.microsoft.com/office/drawing/2014/main" id="{26D3E3F7-73D7-4995-AFAD-3A17C312B647}"/>
               </a:ext>
             </a:extLst>
           </p:cNvPr>
@@ -8579,7 +8579,7 @@
           <p:cNvPr id="7" name="pddikti-copy">
             <a:extLst xmlns:a="http://schemas.openxmlformats.org/drawingml/2006/main">
               <a:ext uri="{FF2B5EF4-FFF2-40B4-BE49-F238E27FC236}">
-                <a16:creationId xmlns:a16="http://schemas.microsoft.com/office/drawing/2014/main" id="{43EB1347-9875-4237-85ED-52A7CA5CC16D}"/>
+                <a16:creationId xmlns:a16="http://schemas.microsoft.com/office/drawing/2014/main" id="{07AB2978-B689-4F82-8BEE-EFA8397FEEF8}"/>
               </a:ext>
             </a:extLst>
           </p:cNvPr>
@@ -8624,7 +8624,7 @@
           <p:cNvPr id="8" name="pddikti-pill-bg">
             <a:extLst xmlns:a="http://schemas.openxmlformats.org/drawingml/2006/main">
               <a:ext uri="{FF2B5EF4-FFF2-40B4-BE49-F238E27FC236}">
-                <a16:creationId xmlns:a16="http://schemas.microsoft.com/office/drawing/2014/main" id="{891E4BDB-67E6-4A2D-8D02-CA66250D2548}"/>
+                <a16:creationId xmlns:a16="http://schemas.microsoft.com/office/drawing/2014/main" id="{269B7704-68C6-49CE-80ED-5DB8877B869F}"/>
               </a:ext>
             </a:extLst>
           </p:cNvPr>
@@ -8653,7 +8653,7 @@
           <p:cNvPr id="9" name="pddikti-pill-text">
             <a:extLst xmlns:a="http://schemas.openxmlformats.org/drawingml/2006/main">
               <a:ext uri="{FF2B5EF4-FFF2-40B4-BE49-F238E27FC236}">
-                <a16:creationId xmlns:a16="http://schemas.microsoft.com/office/drawing/2014/main" id="{773CF786-6285-4DED-AE0D-86AFE82E2FC3}"/>
+                <a16:creationId xmlns:a16="http://schemas.microsoft.com/office/drawing/2014/main" id="{C4868F6F-7069-4C95-808A-340FA67CFE16}"/>
               </a:ext>
             </a:extLst>
           </p:cNvPr>
@@ -8698,7 +8698,7 @@
           <p:cNvPr id="10" name="pddikti-metric-1">
             <a:extLst xmlns:a="http://schemas.openxmlformats.org/drawingml/2006/main">
               <a:ext uri="{FF2B5EF4-FFF2-40B4-BE49-F238E27FC236}">
-                <a16:creationId xmlns:a16="http://schemas.microsoft.com/office/drawing/2014/main" id="{0973939F-21C4-45C0-A84D-3355B2619CA1}"/>
+                <a16:creationId xmlns:a16="http://schemas.microsoft.com/office/drawing/2014/main" id="{D32CAE39-36FB-4112-B401-7D2505D2A240}"/>
               </a:ext>
             </a:extLst>
           </p:cNvPr>
@@ -8743,7 +8743,7 @@
           <p:cNvPr id="11" name="pddikti-label-1">
             <a:extLst xmlns:a="http://schemas.openxmlformats.org/drawingml/2006/main">
               <a:ext uri="{FF2B5EF4-FFF2-40B4-BE49-F238E27FC236}">
-                <a16:creationId xmlns:a16="http://schemas.microsoft.com/office/drawing/2014/main" id="{455CFEFA-AFEA-4A3F-A831-7E4C497C8135}"/>
+                <a16:creationId xmlns:a16="http://schemas.microsoft.com/office/drawing/2014/main" id="{71BDE9E8-764E-4CE6-AF77-EC4022532F34}"/>
               </a:ext>
             </a:extLst>
           </p:cNvPr>
@@ -8788,7 +8788,7 @@
           <p:cNvPr id="12" name="pddikti-metric-2">
             <a:extLst xmlns:a="http://schemas.openxmlformats.org/drawingml/2006/main">
               <a:ext uri="{FF2B5EF4-FFF2-40B4-BE49-F238E27FC236}">
-                <a16:creationId xmlns:a16="http://schemas.microsoft.com/office/drawing/2014/main" id="{22F48AF4-4CDC-4BF7-8C4A-ABA0C3C6FD0B}"/>
+                <a16:creationId xmlns:a16="http://schemas.microsoft.com/office/drawing/2014/main" id="{DF8F9BA8-7934-42EE-9AA4-DE9E123B3D52}"/>
               </a:ext>
             </a:extLst>
           </p:cNvPr>
@@ -8833,7 +8833,7 @@
           <p:cNvPr id="13" name="pddikti-label-2">
             <a:extLst xmlns:a="http://schemas.openxmlformats.org/drawingml/2006/main">
               <a:ext uri="{FF2B5EF4-FFF2-40B4-BE49-F238E27FC236}">
-                <a16:creationId xmlns:a16="http://schemas.microsoft.com/office/drawing/2014/main" id="{4834B06F-334A-4733-B1B8-421A4C82DC15}"/>
+                <a16:creationId xmlns:a16="http://schemas.microsoft.com/office/drawing/2014/main" id="{1E6519B3-2B7D-4291-90EC-5E47667DFD76}"/>
               </a:ext>
             </a:extLst>
           </p:cNvPr>
@@ -8878,7 +8878,7 @@
           <p:cNvPr id="14" name="pddikti-metric-3">
             <a:extLst xmlns:a="http://schemas.openxmlformats.org/drawingml/2006/main">
               <a:ext uri="{FF2B5EF4-FFF2-40B4-BE49-F238E27FC236}">
-                <a16:creationId xmlns:a16="http://schemas.microsoft.com/office/drawing/2014/main" id="{A0AFBA9E-65DD-49D6-A2CD-C370014761D7}"/>
+                <a16:creationId xmlns:a16="http://schemas.microsoft.com/office/drawing/2014/main" id="{C04CD348-F1A0-45E0-899C-B114B259286B}"/>
               </a:ext>
             </a:extLst>
           </p:cNvPr>
@@ -8923,7 +8923,7 @@
           <p:cNvPr id="15" name="pddikti-label-3">
             <a:extLst xmlns:a="http://schemas.openxmlformats.org/drawingml/2006/main">
               <a:ext uri="{FF2B5EF4-FFF2-40B4-BE49-F238E27FC236}">
-                <a16:creationId xmlns:a16="http://schemas.microsoft.com/office/drawing/2014/main" id="{CE0EF7B7-58C4-4EED-A3FC-1CC918281810}"/>
+                <a16:creationId xmlns:a16="http://schemas.microsoft.com/office/drawing/2014/main" id="{24FD7010-6E0D-487D-B690-71B57035C1FC}"/>
               </a:ext>
             </a:extLst>
           </p:cNvPr>
@@ -8968,7 +8968,7 @@
           <p:cNvPr id="16" name="pddikti-frame">
             <a:extLst xmlns:a="http://schemas.openxmlformats.org/drawingml/2006/main">
               <a:ext uri="{FF2B5EF4-FFF2-40B4-BE49-F238E27FC236}">
-                <a16:creationId xmlns:a16="http://schemas.microsoft.com/office/drawing/2014/main" id="{786960C8-0C89-4E37-BD7E-489776CCE838}"/>
+                <a16:creationId xmlns:a16="http://schemas.microsoft.com/office/drawing/2014/main" id="{D2DFC813-275F-4F34-9C32-FFA48775CF59}"/>
               </a:ext>
             </a:extLst>
           </p:cNvPr>
@@ -8997,7 +8997,7 @@
           <p:cNvPr id="17" name="pddikti-url">
             <a:extLst xmlns:a="http://schemas.openxmlformats.org/drawingml/2006/main">
               <a:ext uri="{FF2B5EF4-FFF2-40B4-BE49-F238E27FC236}">
-                <a16:creationId xmlns:a16="http://schemas.microsoft.com/office/drawing/2014/main" id="{D80E28B0-7E27-4B03-994C-52AD5F5CCA2A}"/>
+                <a16:creationId xmlns:a16="http://schemas.microsoft.com/office/drawing/2014/main" id="{8AC55254-1C3F-4B85-AB9C-20D42CC3A5C9}"/>
               </a:ext>
             </a:extLst>
           </p:cNvPr>
@@ -9042,7 +9042,7 @@
           <p:cNvPr id="18" name="footer-line-gold-5">
             <a:extLst xmlns:a="http://schemas.openxmlformats.org/drawingml/2006/main">
               <a:ext uri="{FF2B5EF4-FFF2-40B4-BE49-F238E27FC236}">
-                <a16:creationId xmlns:a16="http://schemas.microsoft.com/office/drawing/2014/main" id="{88BB7AA2-9666-4263-9C65-E3E0942DDC66}"/>
+                <a16:creationId xmlns:a16="http://schemas.microsoft.com/office/drawing/2014/main" id="{425395C5-BF1F-4120-844A-44E6F2CA52CF}"/>
               </a:ext>
             </a:extLst>
           </p:cNvPr>
@@ -9069,7 +9069,7 @@
           <p:cNvPr id="19" name="footer-line-coral-5">
             <a:extLst xmlns:a="http://schemas.openxmlformats.org/drawingml/2006/main">
               <a:ext uri="{FF2B5EF4-FFF2-40B4-BE49-F238E27FC236}">
-                <a16:creationId xmlns:a16="http://schemas.microsoft.com/office/drawing/2014/main" id="{5322E8EA-2DBF-4813-B570-20A3F6DC6577}"/>
+                <a16:creationId xmlns:a16="http://schemas.microsoft.com/office/drawing/2014/main" id="{4A53174C-F4A7-4861-89BF-22CA167EA536}"/>
               </a:ext>
             </a:extLst>
           </p:cNvPr>
@@ -9096,7 +9096,7 @@
           <p:cNvPr id="20" name="footer-line-teal-5">
             <a:extLst xmlns:a="http://schemas.openxmlformats.org/drawingml/2006/main">
               <a:ext uri="{FF2B5EF4-FFF2-40B4-BE49-F238E27FC236}">
-                <a16:creationId xmlns:a16="http://schemas.microsoft.com/office/drawing/2014/main" id="{510C55E3-CFD6-47F7-8610-F56F62F17BD3}"/>
+                <a16:creationId xmlns:a16="http://schemas.microsoft.com/office/drawing/2014/main" id="{463BE9C1-20AB-4C08-AC90-DF31D6FB3D14}"/>
               </a:ext>
             </a:extLst>
           </p:cNvPr>
@@ -9123,7 +9123,7 @@
           <p:cNvPr id="21" name="footer-name-5">
             <a:extLst xmlns:a="http://schemas.openxmlformats.org/drawingml/2006/main">
               <a:ext uri="{FF2B5EF4-FFF2-40B4-BE49-F238E27FC236}">
-                <a16:creationId xmlns:a16="http://schemas.microsoft.com/office/drawing/2014/main" id="{0C29A738-85F1-498C-9356-30DC354A39DD}"/>
+                <a16:creationId xmlns:a16="http://schemas.microsoft.com/office/drawing/2014/main" id="{73B43F15-048B-460A-B733-3F2B04127DD5}"/>
               </a:ext>
             </a:extLst>
           </p:cNvPr>
@@ -9168,7 +9168,7 @@
           <p:cNvPr id="22" name="footer-page-5">
             <a:extLst xmlns:a="http://schemas.openxmlformats.org/drawingml/2006/main">
               <a:ext uri="{FF2B5EF4-FFF2-40B4-BE49-F238E27FC236}">
-                <a16:creationId xmlns:a16="http://schemas.microsoft.com/office/drawing/2014/main" id="{B2502829-EA38-4418-A132-5913CCA09D2B}"/>
+                <a16:creationId xmlns:a16="http://schemas.microsoft.com/office/drawing/2014/main" id="{28E761BF-E4A1-460D-8F94-9AC020F25EE1}"/>
               </a:ext>
             </a:extLst>
           </p:cNvPr>
@@ -9217,7 +9217,7 @@
           <p:nvPr/>
         </p:nvPicPr>
         <p:blipFill>
-          <a:blip xmlns:r="http://schemas.openxmlformats.org/officeDocument/2006/relationships" xmlns:a="http://schemas.openxmlformats.org/drawingml/2006/main" r:embed="R7bff91f34faa40d7"/>
+          <a:blip xmlns:r="http://schemas.openxmlformats.org/officeDocument/2006/relationships" xmlns:a="http://schemas.openxmlformats.org/drawingml/2006/main" r:embed="Ra7194dd9eae544d9"/>
           <a:srcRect xmlns:a="http://schemas.openxmlformats.org/drawingml/2006/main" l="0" t="874" r="0" b="874"/>
           <a:stretch xmlns:a="http://schemas.openxmlformats.org/drawingml/2006/main">
             <a:fillRect l="0" t="0" r="0" b="0"/>
@@ -9236,7 +9236,7 @@
     </p:spTree>
     <p:extLst>
       <p:ext uri="{BB962C8B-B14F-4D97-AF65-F5344CB8AC3E}">
-        <p14:creationId xmlns:p14="http://schemas.microsoft.com/office/powerpoint/2010/main" val="1751399416"/>
+        <p14:creationId xmlns:p14="http://schemas.microsoft.com/office/powerpoint/2010/main" val="621729299"/>
       </p:ext>
     </p:extLst>
   </p:cSld>
@@ -9260,7 +9260,7 @@
           <p:cNvPr id="24" name="06-decision-products-canvas">
             <a:extLst xmlns:a="http://schemas.openxmlformats.org/drawingml/2006/main">
               <a:ext uri="{FF2B5EF4-FFF2-40B4-BE49-F238E27FC236}">
-                <a16:creationId xmlns:a16="http://schemas.microsoft.com/office/drawing/2014/main" id="{DF7F950D-C23A-46F9-B758-86A21896ED7F}"/>
+                <a16:creationId xmlns:a16="http://schemas.microsoft.com/office/drawing/2014/main" id="{6C0997BB-EE16-4C69-BFDB-E9CF57501EA1}"/>
               </a:ext>
             </a:extLst>
           </p:cNvPr>
@@ -9287,7 +9287,7 @@
           <p:cNvPr id="2" name="06-decision-products-edge-gold">
             <a:extLst xmlns:a="http://schemas.openxmlformats.org/drawingml/2006/main">
               <a:ext uri="{FF2B5EF4-FFF2-40B4-BE49-F238E27FC236}">
-                <a16:creationId xmlns:a16="http://schemas.microsoft.com/office/drawing/2014/main" id="{5F3D7EBE-7A10-4D33-B9C8-C30DF487790D}"/>
+                <a16:creationId xmlns:a16="http://schemas.microsoft.com/office/drawing/2014/main" id="{2B0F1CCC-9BBB-4982-A617-99004E27A0D6}"/>
               </a:ext>
             </a:extLst>
           </p:cNvPr>
@@ -9314,7 +9314,7 @@
           <p:cNvPr id="3" name="06-decision-products-edge-coral">
             <a:extLst xmlns:a="http://schemas.openxmlformats.org/drawingml/2006/main">
               <a:ext uri="{FF2B5EF4-FFF2-40B4-BE49-F238E27FC236}">
-                <a16:creationId xmlns:a16="http://schemas.microsoft.com/office/drawing/2014/main" id="{4144E170-6EF1-4E2A-BF98-0E04254C6440}"/>
+                <a16:creationId xmlns:a16="http://schemas.microsoft.com/office/drawing/2014/main" id="{173B64FF-C703-4CCC-A0A8-BABCC185B9B8}"/>
               </a:ext>
             </a:extLst>
           </p:cNvPr>
@@ -9341,7 +9341,7 @@
           <p:cNvPr id="4" name="06-decision-products-edge-teal">
             <a:extLst xmlns:a="http://schemas.openxmlformats.org/drawingml/2006/main">
               <a:ext uri="{FF2B5EF4-FFF2-40B4-BE49-F238E27FC236}">
-                <a16:creationId xmlns:a16="http://schemas.microsoft.com/office/drawing/2014/main" id="{1320B059-C7DD-499F-9303-D8D98FFBDD1E}"/>
+                <a16:creationId xmlns:a16="http://schemas.microsoft.com/office/drawing/2014/main" id="{7A8CEEE1-CB1F-4207-9D2A-071E90407310}"/>
               </a:ext>
             </a:extLst>
           </p:cNvPr>
@@ -9368,7 +9368,7 @@
           <p:cNvPr id="5" name="eyebrow-6">
             <a:extLst xmlns:a="http://schemas.openxmlformats.org/drawingml/2006/main">
               <a:ext uri="{FF2B5EF4-FFF2-40B4-BE49-F238E27FC236}">
-                <a16:creationId xmlns:a16="http://schemas.microsoft.com/office/drawing/2014/main" id="{385DBC7B-E83A-468F-B4A7-14C10DD10681}"/>
+                <a16:creationId xmlns:a16="http://schemas.microsoft.com/office/drawing/2014/main" id="{26FBA457-0BEB-4D3F-BD27-6E984E903FBE}"/>
               </a:ext>
             </a:extLst>
           </p:cNvPr>
@@ -9413,7 +9413,7 @@
           <p:cNvPr id="6" name="title-6">
             <a:extLst xmlns:a="http://schemas.openxmlformats.org/drawingml/2006/main">
               <a:ext uri="{FF2B5EF4-FFF2-40B4-BE49-F238E27FC236}">
-                <a16:creationId xmlns:a16="http://schemas.microsoft.com/office/drawing/2014/main" id="{851E0DAA-4008-4E4D-A8B8-41A73E6F8D1B}"/>
+                <a16:creationId xmlns:a16="http://schemas.microsoft.com/office/drawing/2014/main" id="{C2B69544-7F01-48A9-A275-069910CF1BFB}"/>
               </a:ext>
             </a:extLst>
           </p:cNvPr>
@@ -9458,7 +9458,7 @@
           <p:cNvPr id="7" name="planner-frame">
             <a:extLst xmlns:a="http://schemas.openxmlformats.org/drawingml/2006/main">
               <a:ext uri="{FF2B5EF4-FFF2-40B4-BE49-F238E27FC236}">
-                <a16:creationId xmlns:a16="http://schemas.microsoft.com/office/drawing/2014/main" id="{1CFFA421-B337-4050-8BBC-2C8B74D2657B}"/>
+                <a16:creationId xmlns:a16="http://schemas.microsoft.com/office/drawing/2014/main" id="{43777A7C-CF0A-4BE8-9CA3-32212846D64B}"/>
               </a:ext>
             </a:extLst>
           </p:cNvPr>
@@ -9487,7 +9487,7 @@
           <p:cNvPr id="8" name="snpmb-frame">
             <a:extLst xmlns:a="http://schemas.openxmlformats.org/drawingml/2006/main">
               <a:ext uri="{FF2B5EF4-FFF2-40B4-BE49-F238E27FC236}">
-                <a16:creationId xmlns:a16="http://schemas.microsoft.com/office/drawing/2014/main" id="{0E739643-2DB8-48FA-A962-AAC74F3456C9}"/>
+                <a16:creationId xmlns:a16="http://schemas.microsoft.com/office/drawing/2014/main" id="{83A91163-4439-4EE3-8976-23E5950427F7}"/>
               </a:ext>
             </a:extLst>
           </p:cNvPr>
@@ -9516,7 +9516,7 @@
           <p:cNvPr id="9" name="planner-title">
             <a:extLst xmlns:a="http://schemas.openxmlformats.org/drawingml/2006/main">
               <a:ext uri="{FF2B5EF4-FFF2-40B4-BE49-F238E27FC236}">
-                <a16:creationId xmlns:a16="http://schemas.microsoft.com/office/drawing/2014/main" id="{16FB909E-5797-453E-BCB6-6E9C8D94962A}"/>
+                <a16:creationId xmlns:a16="http://schemas.microsoft.com/office/drawing/2014/main" id="{53F4B6E7-90C6-4C0C-9BD1-940C7D60517F}"/>
               </a:ext>
             </a:extLst>
           </p:cNvPr>
@@ -9561,7 +9561,7 @@
           <p:cNvPr id="10" name="planner-body">
             <a:extLst xmlns:a="http://schemas.openxmlformats.org/drawingml/2006/main">
               <a:ext uri="{FF2B5EF4-FFF2-40B4-BE49-F238E27FC236}">
-                <a16:creationId xmlns:a16="http://schemas.microsoft.com/office/drawing/2014/main" id="{56630C92-70EF-4DE1-A168-BB4407300C65}"/>
+                <a16:creationId xmlns:a16="http://schemas.microsoft.com/office/drawing/2014/main" id="{063F303A-D216-4CC2-BB3F-AAA88A4924F3}"/>
               </a:ext>
             </a:extLst>
           </p:cNvPr>
@@ -9606,7 +9606,7 @@
           <p:cNvPr id="11" name="planner-tech-bg">
             <a:extLst xmlns:a="http://schemas.openxmlformats.org/drawingml/2006/main">
               <a:ext uri="{FF2B5EF4-FFF2-40B4-BE49-F238E27FC236}">
-                <a16:creationId xmlns:a16="http://schemas.microsoft.com/office/drawing/2014/main" id="{8C372B7B-CEC7-4CFC-9512-481AEA7EEE4B}"/>
+                <a16:creationId xmlns:a16="http://schemas.microsoft.com/office/drawing/2014/main" id="{9F535B13-A4F7-4283-89CC-1741A44F1C52}"/>
               </a:ext>
             </a:extLst>
           </p:cNvPr>
@@ -9635,7 +9635,7 @@
           <p:cNvPr id="12" name="planner-tech-text">
             <a:extLst xmlns:a="http://schemas.openxmlformats.org/drawingml/2006/main">
               <a:ext uri="{FF2B5EF4-FFF2-40B4-BE49-F238E27FC236}">
-                <a16:creationId xmlns:a16="http://schemas.microsoft.com/office/drawing/2014/main" id="{DCA9BAF5-F6CA-4F20-A5DC-D656DF4B3621}"/>
+                <a16:creationId xmlns:a16="http://schemas.microsoft.com/office/drawing/2014/main" id="{28B14AE7-CD7A-4DC2-AE14-73B72BAE6BB8}"/>
               </a:ext>
             </a:extLst>
           </p:cNvPr>
@@ -9680,7 +9680,7 @@
           <p:cNvPr id="13" name="snpmb-title">
             <a:extLst xmlns:a="http://schemas.openxmlformats.org/drawingml/2006/main">
               <a:ext uri="{FF2B5EF4-FFF2-40B4-BE49-F238E27FC236}">
-                <a16:creationId xmlns:a16="http://schemas.microsoft.com/office/drawing/2014/main" id="{17B2C024-2ADA-4B8B-A623-BBFFF2C9173E}"/>
+                <a16:creationId xmlns:a16="http://schemas.microsoft.com/office/drawing/2014/main" id="{AFB30CC7-DA94-4D57-B4E3-F1D0F5EF41B4}"/>
               </a:ext>
             </a:extLst>
           </p:cNvPr>
@@ -9725,7 +9725,7 @@
           <p:cNvPr id="14" name="snpmb-body">
             <a:extLst xmlns:a="http://schemas.openxmlformats.org/drawingml/2006/main">
               <a:ext uri="{FF2B5EF4-FFF2-40B4-BE49-F238E27FC236}">
-                <a16:creationId xmlns:a16="http://schemas.microsoft.com/office/drawing/2014/main" id="{C8D5A4A5-3C84-4F65-B653-891EF723DCBB}"/>
+                <a16:creationId xmlns:a16="http://schemas.microsoft.com/office/drawing/2014/main" id="{D104936C-38E2-43AB-8846-5AF59A6DA3E9}"/>
               </a:ext>
             </a:extLst>
           </p:cNvPr>
@@ -9770,7 +9770,7 @@
           <p:cNvPr id="15" name="snpmb-tech-bg">
             <a:extLst xmlns:a="http://schemas.openxmlformats.org/drawingml/2006/main">
               <a:ext uri="{FF2B5EF4-FFF2-40B4-BE49-F238E27FC236}">
-                <a16:creationId xmlns:a16="http://schemas.microsoft.com/office/drawing/2014/main" id="{6BB0BF5E-43E6-4556-B27A-BA2F71C27A57}"/>
+                <a16:creationId xmlns:a16="http://schemas.microsoft.com/office/drawing/2014/main" id="{26D78B8C-4BDA-42E4-9630-F2139EED8CA3}"/>
               </a:ext>
             </a:extLst>
           </p:cNvPr>
@@ -9799,7 +9799,7 @@
           <p:cNvPr id="16" name="snpmb-tech-text">
             <a:extLst xmlns:a="http://schemas.openxmlformats.org/drawingml/2006/main">
               <a:ext uri="{FF2B5EF4-FFF2-40B4-BE49-F238E27FC236}">
-                <a16:creationId xmlns:a16="http://schemas.microsoft.com/office/drawing/2014/main" id="{D80B30DD-0318-4B41-B2DD-DEEDCB0416AD}"/>
+                <a16:creationId xmlns:a16="http://schemas.microsoft.com/office/drawing/2014/main" id="{5631348D-BF84-4FFB-B03C-2D8BB42E5A27}"/>
               </a:ext>
             </a:extLst>
           </p:cNvPr>
@@ -9844,7 +9844,7 @@
           <p:cNvPr id="17" name="footer-line-gold-6">
             <a:extLst xmlns:a="http://schemas.openxmlformats.org/drawingml/2006/main">
               <a:ext uri="{FF2B5EF4-FFF2-40B4-BE49-F238E27FC236}">
-                <a16:creationId xmlns:a16="http://schemas.microsoft.com/office/drawing/2014/main" id="{D8F6DABF-1046-4E3E-9F58-F2DDD62D9068}"/>
+                <a16:creationId xmlns:a16="http://schemas.microsoft.com/office/drawing/2014/main" id="{9B84F3A5-F36B-4E69-AB3B-9D23A7500083}"/>
               </a:ext>
             </a:extLst>
           </p:cNvPr>
@@ -9871,7 +9871,7 @@
           <p:cNvPr id="18" name="footer-line-coral-6">
             <a:extLst xmlns:a="http://schemas.openxmlformats.org/drawingml/2006/main">
               <a:ext uri="{FF2B5EF4-FFF2-40B4-BE49-F238E27FC236}">
-                <a16:creationId xmlns:a16="http://schemas.microsoft.com/office/drawing/2014/main" id="{24D46A86-271B-42FA-855A-1726043D2FE9}"/>
+                <a16:creationId xmlns:a16="http://schemas.microsoft.com/office/drawing/2014/main" id="{5FE01863-A006-48D8-80F3-9AFDAB8BD815}"/>
               </a:ext>
             </a:extLst>
           </p:cNvPr>
@@ -9898,7 +9898,7 @@
           <p:cNvPr id="19" name="footer-line-teal-6">
             <a:extLst xmlns:a="http://schemas.openxmlformats.org/drawingml/2006/main">
               <a:ext uri="{FF2B5EF4-FFF2-40B4-BE49-F238E27FC236}">
-                <a16:creationId xmlns:a16="http://schemas.microsoft.com/office/drawing/2014/main" id="{B40D110E-10E4-43EA-BE08-D29F6CC2B312}"/>
+                <a16:creationId xmlns:a16="http://schemas.microsoft.com/office/drawing/2014/main" id="{E215FB64-C2DF-4788-BD36-BFF1A389E5F5}"/>
               </a:ext>
             </a:extLst>
           </p:cNvPr>
@@ -9925,7 +9925,7 @@
           <p:cNvPr id="20" name="footer-name-6">
             <a:extLst xmlns:a="http://schemas.openxmlformats.org/drawingml/2006/main">
               <a:ext uri="{FF2B5EF4-FFF2-40B4-BE49-F238E27FC236}">
-                <a16:creationId xmlns:a16="http://schemas.microsoft.com/office/drawing/2014/main" id="{64438299-E012-423D-9C41-3563138BB6B6}"/>
+                <a16:creationId xmlns:a16="http://schemas.microsoft.com/office/drawing/2014/main" id="{E6524ABD-8412-4EC9-A1EA-A06CA8A621CF}"/>
               </a:ext>
             </a:extLst>
           </p:cNvPr>
@@ -9970,7 +9970,7 @@
           <p:cNvPr id="21" name="footer-page-6">
             <a:extLst xmlns:a="http://schemas.openxmlformats.org/drawingml/2006/main">
               <a:ext uri="{FF2B5EF4-FFF2-40B4-BE49-F238E27FC236}">
-                <a16:creationId xmlns:a16="http://schemas.microsoft.com/office/drawing/2014/main" id="{D95EC32B-06EE-4717-B153-629ED4993637}"/>
+                <a16:creationId xmlns:a16="http://schemas.microsoft.com/office/drawing/2014/main" id="{F8F586FB-EE99-489C-8426-6788904C019A}"/>
               </a:ext>
             </a:extLst>
           </p:cNvPr>
@@ -10019,7 +10019,7 @@
           <p:nvPr/>
         </p:nvPicPr>
         <p:blipFill>
-          <a:blip xmlns:r="http://schemas.openxmlformats.org/officeDocument/2006/relationships" xmlns:a="http://schemas.openxmlformats.org/drawingml/2006/main" r:embed="R4a07ccc6be814d15"/>
+          <a:blip xmlns:r="http://schemas.openxmlformats.org/officeDocument/2006/relationships" xmlns:a="http://schemas.openxmlformats.org/drawingml/2006/main" r:embed="Rbd9dabab005f4680"/>
           <a:srcRect xmlns:a="http://schemas.openxmlformats.org/drawingml/2006/main" l="0" t="5719" r="0" b="5719"/>
           <a:stretch xmlns:a="http://schemas.openxmlformats.org/drawingml/2006/main">
             <a:fillRect l="0" t="0" r="0" b="0"/>
@@ -10044,7 +10044,7 @@
           <p:nvPr/>
         </p:nvPicPr>
         <p:blipFill>
-          <a:blip xmlns:r="http://schemas.openxmlformats.org/officeDocument/2006/relationships" xmlns:a="http://schemas.openxmlformats.org/drawingml/2006/main" r:embed="R51643b1c1d3146a7"/>
+          <a:blip xmlns:r="http://schemas.openxmlformats.org/officeDocument/2006/relationships" xmlns:a="http://schemas.openxmlformats.org/drawingml/2006/main" r:embed="R39027b46dd574b40"/>
           <a:srcRect xmlns:a="http://schemas.openxmlformats.org/drawingml/2006/main" l="0" t="5719" r="0" b="5719"/>
           <a:stretch xmlns:a="http://schemas.openxmlformats.org/drawingml/2006/main">
             <a:fillRect l="0" t="0" r="0" b="0"/>
@@ -10063,7 +10063,7 @@
     </p:spTree>
     <p:extLst>
       <p:ext uri="{BB962C8B-B14F-4D97-AF65-F5344CB8AC3E}">
-        <p14:creationId xmlns:p14="http://schemas.microsoft.com/office/powerpoint/2010/main" val="2101306185"/>
+        <p14:creationId xmlns:p14="http://schemas.microsoft.com/office/powerpoint/2010/main" val="1754089660"/>
       </p:ext>
     </p:extLst>
   </p:cSld>
@@ -10087,7 +10087,7 @@
           <p:cNvPr id="23" name="07-market-products-canvas">
             <a:extLst xmlns:a="http://schemas.openxmlformats.org/drawingml/2006/main">
               <a:ext uri="{FF2B5EF4-FFF2-40B4-BE49-F238E27FC236}">
-                <a16:creationId xmlns:a16="http://schemas.microsoft.com/office/drawing/2014/main" id="{1C9D4A0B-6586-420B-A4E0-EC8082F6B050}"/>
+                <a16:creationId xmlns:a16="http://schemas.microsoft.com/office/drawing/2014/main" id="{DE7367E3-81C3-4B17-A7C5-6866741B4323}"/>
               </a:ext>
             </a:extLst>
           </p:cNvPr>
@@ -10114,7 +10114,7 @@
           <p:cNvPr id="2" name="07-market-products-edge-gold">
             <a:extLst xmlns:a="http://schemas.openxmlformats.org/drawingml/2006/main">
               <a:ext uri="{FF2B5EF4-FFF2-40B4-BE49-F238E27FC236}">
-                <a16:creationId xmlns:a16="http://schemas.microsoft.com/office/drawing/2014/main" id="{0D4A51DC-894D-46EB-9547-364DEA58C04F}"/>
+                <a16:creationId xmlns:a16="http://schemas.microsoft.com/office/drawing/2014/main" id="{64437B72-EB7A-48A0-AB68-4BA435EF2614}"/>
               </a:ext>
             </a:extLst>
           </p:cNvPr>
@@ -10141,7 +10141,7 @@
           <p:cNvPr id="3" name="07-market-products-edge-coral">
             <a:extLst xmlns:a="http://schemas.openxmlformats.org/drawingml/2006/main">
               <a:ext uri="{FF2B5EF4-FFF2-40B4-BE49-F238E27FC236}">
-                <a16:creationId xmlns:a16="http://schemas.microsoft.com/office/drawing/2014/main" id="{DD16F761-5DB2-43AD-B20D-A0BAE9B6073A}"/>
+                <a16:creationId xmlns:a16="http://schemas.microsoft.com/office/drawing/2014/main" id="{D58621E7-47CB-4C16-85CC-4A975742CD42}"/>
               </a:ext>
             </a:extLst>
           </p:cNvPr>
@@ -10168,7 +10168,7 @@
           <p:cNvPr id="4" name="07-market-products-edge-teal">
             <a:extLst xmlns:a="http://schemas.openxmlformats.org/drawingml/2006/main">
               <a:ext uri="{FF2B5EF4-FFF2-40B4-BE49-F238E27FC236}">
-                <a16:creationId xmlns:a16="http://schemas.microsoft.com/office/drawing/2014/main" id="{3A13D7F8-7544-46C8-ACE5-80FCABF01D6E}"/>
+                <a16:creationId xmlns:a16="http://schemas.microsoft.com/office/drawing/2014/main" id="{35960CC0-CAF6-47B9-AE2C-D3E68BA7998C}"/>
               </a:ext>
             </a:extLst>
           </p:cNvPr>
@@ -10195,7 +10195,7 @@
           <p:cNvPr id="5" name="eyebrow-7">
             <a:extLst xmlns:a="http://schemas.openxmlformats.org/drawingml/2006/main">
               <a:ext uri="{FF2B5EF4-FFF2-40B4-BE49-F238E27FC236}">
-                <a16:creationId xmlns:a16="http://schemas.microsoft.com/office/drawing/2014/main" id="{48B8C377-D12C-4790-87D7-5F1E8B56A8D7}"/>
+                <a16:creationId xmlns:a16="http://schemas.microsoft.com/office/drawing/2014/main" id="{274113CA-5D3C-4B46-B991-5CB4189C18A1}"/>
               </a:ext>
             </a:extLst>
           </p:cNvPr>
@@ -10240,7 +10240,7 @@
           <p:cNvPr id="6" name="title-7">
             <a:extLst xmlns:a="http://schemas.openxmlformats.org/drawingml/2006/main">
               <a:ext uri="{FF2B5EF4-FFF2-40B4-BE49-F238E27FC236}">
-                <a16:creationId xmlns:a16="http://schemas.microsoft.com/office/drawing/2014/main" id="{D4492A3B-3FD1-4424-BCB6-ADCB32D748E7}"/>
+                <a16:creationId xmlns:a16="http://schemas.microsoft.com/office/drawing/2014/main" id="{4FCCFD00-2432-401B-9B70-AE0B6C5F5BD2}"/>
               </a:ext>
             </a:extLst>
           </p:cNvPr>
@@ -10285,7 +10285,7 @@
           <p:cNvPr id="7" name="market-left-panel">
             <a:extLst xmlns:a="http://schemas.openxmlformats.org/drawingml/2006/main">
               <a:ext uri="{FF2B5EF4-FFF2-40B4-BE49-F238E27FC236}">
-                <a16:creationId xmlns:a16="http://schemas.microsoft.com/office/drawing/2014/main" id="{3931E498-F1C4-40B7-B1B8-997DB701AB32}"/>
+                <a16:creationId xmlns:a16="http://schemas.microsoft.com/office/drawing/2014/main" id="{6E6788E3-F9F6-4DEA-BFD8-24392C6D4F01}"/>
               </a:ext>
             </a:extLst>
           </p:cNvPr>
@@ -10314,7 +10314,7 @@
           <p:cNvPr id="8" name="market-right-panel">
             <a:extLst xmlns:a="http://schemas.openxmlformats.org/drawingml/2006/main">
               <a:ext uri="{FF2B5EF4-FFF2-40B4-BE49-F238E27FC236}">
-                <a16:creationId xmlns:a16="http://schemas.microsoft.com/office/drawing/2014/main" id="{92BDFADF-6BA2-4BC3-BA9A-8F5F16E3922B}"/>
+                <a16:creationId xmlns:a16="http://schemas.microsoft.com/office/drawing/2014/main" id="{4CBCC058-245E-4B9A-BE52-817FC831481F}"/>
               </a:ext>
             </a:extLst>
           </p:cNvPr>
@@ -10343,7 +10343,7 @@
           <p:cNvPr id="9" name="ipo-eyebrow">
             <a:extLst xmlns:a="http://schemas.openxmlformats.org/drawingml/2006/main">
               <a:ext uri="{FF2B5EF4-FFF2-40B4-BE49-F238E27FC236}">
-                <a16:creationId xmlns:a16="http://schemas.microsoft.com/office/drawing/2014/main" id="{BB91F868-04C4-435C-ABC1-CB98AC8B2DA9}"/>
+                <a16:creationId xmlns:a16="http://schemas.microsoft.com/office/drawing/2014/main" id="{868613C3-9549-4482-9EA6-53BFA54979A6}"/>
               </a:ext>
             </a:extLst>
           </p:cNvPr>
@@ -10388,7 +10388,7 @@
           <p:cNvPr id="10" name="ipo-title">
             <a:extLst xmlns:a="http://schemas.openxmlformats.org/drawingml/2006/main">
               <a:ext uri="{FF2B5EF4-FFF2-40B4-BE49-F238E27FC236}">
-                <a16:creationId xmlns:a16="http://schemas.microsoft.com/office/drawing/2014/main" id="{39EA0FB3-D70A-47B1-8403-492FD7BDDDD4}"/>
+                <a16:creationId xmlns:a16="http://schemas.microsoft.com/office/drawing/2014/main" id="{6730570D-47B7-457F-BC9F-0B2FAEB90142}"/>
               </a:ext>
             </a:extLst>
           </p:cNvPr>
@@ -10434,7 +10434,7 @@
           <p:cNvPr id="11" name="ipo-copy">
             <a:extLst xmlns:a="http://schemas.openxmlformats.org/drawingml/2006/main">
               <a:ext uri="{FF2B5EF4-FFF2-40B4-BE49-F238E27FC236}">
-                <a16:creationId xmlns:a16="http://schemas.microsoft.com/office/drawing/2014/main" id="{5BC35759-5FFC-4E4F-A02A-B36367DCB419}"/>
+                <a16:creationId xmlns:a16="http://schemas.microsoft.com/office/drawing/2014/main" id="{4272AF03-6E29-41CF-B1F5-F173865F8927}"/>
               </a:ext>
             </a:extLst>
           </p:cNvPr>
@@ -10479,7 +10479,7 @@
           <p:cNvPr id="12" name="ipo-url">
             <a:extLst xmlns:a="http://schemas.openxmlformats.org/drawingml/2006/main">
               <a:ext uri="{FF2B5EF4-FFF2-40B4-BE49-F238E27FC236}">
-                <a16:creationId xmlns:a16="http://schemas.microsoft.com/office/drawing/2014/main" id="{64934BDD-E0F4-4AD4-98B3-F1D98F859329}"/>
+                <a16:creationId xmlns:a16="http://schemas.microsoft.com/office/drawing/2014/main" id="{535A7BCF-88B5-4A75-812A-1ABAE0EC9CE1}"/>
               </a:ext>
             </a:extLst>
           </p:cNvPr>
@@ -10524,7 +10524,7 @@
           <p:cNvPr id="13" name="ihsg-eyebrow">
             <a:extLst xmlns:a="http://schemas.openxmlformats.org/drawingml/2006/main">
               <a:ext uri="{FF2B5EF4-FFF2-40B4-BE49-F238E27FC236}">
-                <a16:creationId xmlns:a16="http://schemas.microsoft.com/office/drawing/2014/main" id="{7C6527F7-BA38-48FC-9758-16068D5854B1}"/>
+                <a16:creationId xmlns:a16="http://schemas.microsoft.com/office/drawing/2014/main" id="{03F1432F-A804-43B8-A05D-C5BA7BC51AE4}"/>
               </a:ext>
             </a:extLst>
           </p:cNvPr>
@@ -10569,7 +10569,7 @@
           <p:cNvPr id="14" name="ihsg-title">
             <a:extLst xmlns:a="http://schemas.openxmlformats.org/drawingml/2006/main">
               <a:ext uri="{FF2B5EF4-FFF2-40B4-BE49-F238E27FC236}">
-                <a16:creationId xmlns:a16="http://schemas.microsoft.com/office/drawing/2014/main" id="{496715ED-09B4-450F-9449-4AFD38871A20}"/>
+                <a16:creationId xmlns:a16="http://schemas.microsoft.com/office/drawing/2014/main" id="{8C70F14F-2407-4CA0-91A0-29494C9BE9B8}"/>
               </a:ext>
             </a:extLst>
           </p:cNvPr>
@@ -10615,7 +10615,7 @@
           <p:cNvPr id="15" name="ihsg-url">
             <a:extLst xmlns:a="http://schemas.openxmlformats.org/drawingml/2006/main">
               <a:ext uri="{FF2B5EF4-FFF2-40B4-BE49-F238E27FC236}">
-                <a16:creationId xmlns:a16="http://schemas.microsoft.com/office/drawing/2014/main" id="{A1E8CAB5-BB09-482D-B7AC-FD7C22C56E01}"/>
+                <a16:creationId xmlns:a16="http://schemas.microsoft.com/office/drawing/2014/main" id="{44AA251D-6818-49E2-BEE0-8F7C50D7FA0F}"/>
               </a:ext>
             </a:extLst>
           </p:cNvPr>
@@ -10660,7 +10660,7 @@
           <p:cNvPr id="16" name="footer-line-gold-7">
             <a:extLst xmlns:a="http://schemas.openxmlformats.org/drawingml/2006/main">
               <a:ext uri="{FF2B5EF4-FFF2-40B4-BE49-F238E27FC236}">
-                <a16:creationId xmlns:a16="http://schemas.microsoft.com/office/drawing/2014/main" id="{81F96E65-563A-44C2-A4D8-14C7D08906AF}"/>
+                <a16:creationId xmlns:a16="http://schemas.microsoft.com/office/drawing/2014/main" id="{9063E10C-1E3B-4F5C-8430-412632A74AB2}"/>
               </a:ext>
             </a:extLst>
           </p:cNvPr>
@@ -10687,7 +10687,7 @@
           <p:cNvPr id="17" name="footer-line-coral-7">
             <a:extLst xmlns:a="http://schemas.openxmlformats.org/drawingml/2006/main">
               <a:ext uri="{FF2B5EF4-FFF2-40B4-BE49-F238E27FC236}">
-                <a16:creationId xmlns:a16="http://schemas.microsoft.com/office/drawing/2014/main" id="{7A084CCA-B948-444A-B8F0-7723163253FB}"/>
+                <a16:creationId xmlns:a16="http://schemas.microsoft.com/office/drawing/2014/main" id="{D06331ED-8D81-47DD-9388-74A51209905B}"/>
               </a:ext>
             </a:extLst>
           </p:cNvPr>
@@ -10714,7 +10714,7 @@
           <p:cNvPr id="18" name="footer-line-teal-7">
             <a:extLst xmlns:a="http://schemas.openxmlformats.org/drawingml/2006/main">
               <a:ext uri="{FF2B5EF4-FFF2-40B4-BE49-F238E27FC236}">
-                <a16:creationId xmlns:a16="http://schemas.microsoft.com/office/drawing/2014/main" id="{C561FE33-74DD-4C95-B9AE-52B8D943A2F9}"/>
+                <a16:creationId xmlns:a16="http://schemas.microsoft.com/office/drawing/2014/main" id="{9AE6866F-6B76-4217-BCA5-E06EB2A5CA4C}"/>
               </a:ext>
             </a:extLst>
           </p:cNvPr>
@@ -10741,7 +10741,7 @@
           <p:cNvPr id="19" name="footer-name-7">
             <a:extLst xmlns:a="http://schemas.openxmlformats.org/drawingml/2006/main">
               <a:ext uri="{FF2B5EF4-FFF2-40B4-BE49-F238E27FC236}">
-                <a16:creationId xmlns:a16="http://schemas.microsoft.com/office/drawing/2014/main" id="{E819F5BF-F8A9-4C86-A51D-E469BC53E9DB}"/>
+                <a16:creationId xmlns:a16="http://schemas.microsoft.com/office/drawing/2014/main" id="{779DEBA5-E818-4A61-ACE4-31A2C3D3E191}"/>
               </a:ext>
             </a:extLst>
           </p:cNvPr>
@@ -10786,7 +10786,7 @@
           <p:cNvPr id="20" name="footer-page-7">
             <a:extLst xmlns:a="http://schemas.openxmlformats.org/drawingml/2006/main">
               <a:ext uri="{FF2B5EF4-FFF2-40B4-BE49-F238E27FC236}">
-                <a16:creationId xmlns:a16="http://schemas.microsoft.com/office/drawing/2014/main" id="{6F09BCCB-A280-47B9-99B6-BDEBB48CFCC2}"/>
+                <a16:creationId xmlns:a16="http://schemas.microsoft.com/office/drawing/2014/main" id="{3D63983A-945A-4BE2-94F8-7D2BE3E1333D}"/>
               </a:ext>
             </a:extLst>
           </p:cNvPr>
@@ -10835,7 +10835,7 @@
           <p:nvPr/>
         </p:nvPicPr>
         <p:blipFill>
-          <a:blip xmlns:r="http://schemas.openxmlformats.org/officeDocument/2006/relationships" xmlns:a="http://schemas.openxmlformats.org/drawingml/2006/main" r:embed="Rca5219db36a64495"/>
+          <a:blip xmlns:r="http://schemas.openxmlformats.org/officeDocument/2006/relationships" xmlns:a="http://schemas.openxmlformats.org/drawingml/2006/main" r:embed="R8373d698530c42a2"/>
           <a:srcRect xmlns:a="http://schemas.openxmlformats.org/drawingml/2006/main" l="0" t="22720" r="0" b="22720"/>
           <a:stretch xmlns:a="http://schemas.openxmlformats.org/drawingml/2006/main">
             <a:fillRect l="0" t="0" r="0" b="0"/>
@@ -10860,7 +10860,7 @@
           <p:nvPr/>
         </p:nvPicPr>
         <p:blipFill>
-          <a:blip xmlns:r="http://schemas.openxmlformats.org/officeDocument/2006/relationships" xmlns:a="http://schemas.openxmlformats.org/drawingml/2006/main" r:embed="R063f1c430e4d432a"/>
+          <a:blip xmlns:r="http://schemas.openxmlformats.org/officeDocument/2006/relationships" xmlns:a="http://schemas.openxmlformats.org/drawingml/2006/main" r:embed="R7e310f0735cc4938"/>
           <a:srcRect xmlns:a="http://schemas.openxmlformats.org/drawingml/2006/main" l="0" t="22324" r="0" b="22324"/>
           <a:stretch xmlns:a="http://schemas.openxmlformats.org/drawingml/2006/main">
             <a:fillRect l="0" t="0" r="0" b="0"/>
@@ -10879,7 +10879,7 @@
     </p:spTree>
     <p:extLst>
       <p:ext uri="{BB962C8B-B14F-4D97-AF65-F5344CB8AC3E}">
-        <p14:creationId xmlns:p14="http://schemas.microsoft.com/office/powerpoint/2010/main" val="1027736399"/>
+        <p14:creationId xmlns:p14="http://schemas.microsoft.com/office/powerpoint/2010/main" val="1469978931"/>
       </p:ext>
     </p:extLst>
   </p:cSld>
@@ -10903,7 +10903,7 @@
           <p:cNvPr id="24" name="08-ml-evidence-canvas">
             <a:extLst xmlns:a="http://schemas.openxmlformats.org/drawingml/2006/main">
               <a:ext uri="{FF2B5EF4-FFF2-40B4-BE49-F238E27FC236}">
-                <a16:creationId xmlns:a16="http://schemas.microsoft.com/office/drawing/2014/main" id="{8DAF4CF2-8319-488D-B0C3-A865631C8C22}"/>
+                <a16:creationId xmlns:a16="http://schemas.microsoft.com/office/drawing/2014/main" id="{BB8D3548-C68C-400C-9B61-006B51F8ABDB}"/>
               </a:ext>
             </a:extLst>
           </p:cNvPr>
@@ -10930,7 +10930,7 @@
           <p:cNvPr id="2" name="08-ml-evidence-edge-gold">
             <a:extLst xmlns:a="http://schemas.openxmlformats.org/drawingml/2006/main">
               <a:ext uri="{FF2B5EF4-FFF2-40B4-BE49-F238E27FC236}">
-                <a16:creationId xmlns:a16="http://schemas.microsoft.com/office/drawing/2014/main" id="{FBF9D9DE-18B8-4BE3-9240-DFDEB03981DF}"/>
+                <a16:creationId xmlns:a16="http://schemas.microsoft.com/office/drawing/2014/main" id="{3D80AA65-2279-41E9-8797-CDE7CAB5C786}"/>
               </a:ext>
             </a:extLst>
           </p:cNvPr>
@@ -10957,7 +10957,7 @@
           <p:cNvPr id="3" name="08-ml-evidence-edge-coral">
             <a:extLst xmlns:a="http://schemas.openxmlformats.org/drawingml/2006/main">
               <a:ext uri="{FF2B5EF4-FFF2-40B4-BE49-F238E27FC236}">
-                <a16:creationId xmlns:a16="http://schemas.microsoft.com/office/drawing/2014/main" id="{879A3779-6122-4D4B-ABD9-E81F4F7545EA}"/>
+                <a16:creationId xmlns:a16="http://schemas.microsoft.com/office/drawing/2014/main" id="{8E85FA43-65FC-4504-B5FA-9A01EECF1E7C}"/>
               </a:ext>
             </a:extLst>
           </p:cNvPr>
@@ -10984,7 +10984,7 @@
           <p:cNvPr id="4" name="08-ml-evidence-edge-teal">
             <a:extLst xmlns:a="http://schemas.openxmlformats.org/drawingml/2006/main">
               <a:ext uri="{FF2B5EF4-FFF2-40B4-BE49-F238E27FC236}">
-                <a16:creationId xmlns:a16="http://schemas.microsoft.com/office/drawing/2014/main" id="{F612BC57-A089-4CF2-98D7-806AFCE69766}"/>
+                <a16:creationId xmlns:a16="http://schemas.microsoft.com/office/drawing/2014/main" id="{AF905316-705A-4913-9BEC-04529094A5EF}"/>
               </a:ext>
             </a:extLst>
           </p:cNvPr>
@@ -11011,7 +11011,7 @@
           <p:cNvPr id="5" name="eyebrow-8">
             <a:extLst xmlns:a="http://schemas.openxmlformats.org/drawingml/2006/main">
               <a:ext uri="{FF2B5EF4-FFF2-40B4-BE49-F238E27FC236}">
-                <a16:creationId xmlns:a16="http://schemas.microsoft.com/office/drawing/2014/main" id="{24911C29-6ECC-423A-BDDE-EDF104FF6250}"/>
+                <a16:creationId xmlns:a16="http://schemas.microsoft.com/office/drawing/2014/main" id="{487DC618-F8B8-4BEB-A935-EAFF88413B2B}"/>
               </a:ext>
             </a:extLst>
           </p:cNvPr>
@@ -11056,7 +11056,7 @@
           <p:cNvPr id="6" name="title-8">
             <a:extLst xmlns:a="http://schemas.openxmlformats.org/drawingml/2006/main">
               <a:ext uri="{FF2B5EF4-FFF2-40B4-BE49-F238E27FC236}">
-                <a16:creationId xmlns:a16="http://schemas.microsoft.com/office/drawing/2014/main" id="{4DACEDA3-FCDC-4F98-8497-209351DF5700}"/>
+                <a16:creationId xmlns:a16="http://schemas.microsoft.com/office/drawing/2014/main" id="{A09CF7FF-301E-4AD9-9919-0ED5C229D6C7}"/>
               </a:ext>
             </a:extLst>
           </p:cNvPr>
@@ -11101,7 +11101,7 @@
           <p:cNvPr id="7" name="food-image-frame">
             <a:extLst xmlns:a="http://schemas.openxmlformats.org/drawingml/2006/main">
               <a:ext uri="{FF2B5EF4-FFF2-40B4-BE49-F238E27FC236}">
-                <a16:creationId xmlns:a16="http://schemas.microsoft.com/office/drawing/2014/main" id="{039D171D-891E-42F1-91B0-E666D7D2E379}"/>
+                <a16:creationId xmlns:a16="http://schemas.microsoft.com/office/drawing/2014/main" id="{FAE550B9-2B1B-4882-91A4-9BFA235B249C}"/>
               </a:ext>
             </a:extLst>
           </p:cNvPr>
@@ -11130,7 +11130,7 @@
           <p:cNvPr id="8" name="food-metric-card">
             <a:extLst xmlns:a="http://schemas.openxmlformats.org/drawingml/2006/main">
               <a:ext uri="{FF2B5EF4-FFF2-40B4-BE49-F238E27FC236}">
-                <a16:creationId xmlns:a16="http://schemas.microsoft.com/office/drawing/2014/main" id="{576D3E4E-15A6-47E2-9222-EDB8EDB503AD}"/>
+                <a16:creationId xmlns:a16="http://schemas.microsoft.com/office/drawing/2014/main" id="{F80BD0D1-1F44-4D6C-926C-74EDCF1C0942}"/>
               </a:ext>
             </a:extLst>
           </p:cNvPr>
@@ -11159,7 +11159,7 @@
           <p:cNvPr id="9" name="food-metric">
             <a:extLst xmlns:a="http://schemas.openxmlformats.org/drawingml/2006/main">
               <a:ext uri="{FF2B5EF4-FFF2-40B4-BE49-F238E27FC236}">
-                <a16:creationId xmlns:a16="http://schemas.microsoft.com/office/drawing/2014/main" id="{029A98AF-B53F-4531-B70E-44DAFC8576CA}"/>
+                <a16:creationId xmlns:a16="http://schemas.microsoft.com/office/drawing/2014/main" id="{360167B3-779A-4D3F-8A0A-46D57C556688}"/>
               </a:ext>
             </a:extLst>
           </p:cNvPr>
@@ -11204,7 +11204,7 @@
           <p:cNvPr id="10" name="food-metric-label">
             <a:extLst xmlns:a="http://schemas.openxmlformats.org/drawingml/2006/main">
               <a:ext uri="{FF2B5EF4-FFF2-40B4-BE49-F238E27FC236}">
-                <a16:creationId xmlns:a16="http://schemas.microsoft.com/office/drawing/2014/main" id="{16E9B047-1992-4371-8F17-29FB3C0C8C21}"/>
+                <a16:creationId xmlns:a16="http://schemas.microsoft.com/office/drawing/2014/main" id="{7CA48D61-0679-4FF1-8F60-E54677ACA307}"/>
               </a:ext>
             </a:extLst>
           </p:cNvPr>
@@ -11249,7 +11249,7 @@
           <p:cNvPr id="11" name="stock-metric-card">
             <a:extLst xmlns:a="http://schemas.openxmlformats.org/drawingml/2006/main">
               <a:ext uri="{FF2B5EF4-FFF2-40B4-BE49-F238E27FC236}">
-                <a16:creationId xmlns:a16="http://schemas.microsoft.com/office/drawing/2014/main" id="{499869C2-18E8-442E-B529-7E11326EEA0C}"/>
+                <a16:creationId xmlns:a16="http://schemas.microsoft.com/office/drawing/2014/main" id="{F93EFCA8-F0A5-4B40-95B0-2436ED7FDE6A}"/>
               </a:ext>
             </a:extLst>
           </p:cNvPr>
@@ -11278,7 +11278,7 @@
           <p:cNvPr id="12" name="stock-metric">
             <a:extLst xmlns:a="http://schemas.openxmlformats.org/drawingml/2006/main">
               <a:ext uri="{FF2B5EF4-FFF2-40B4-BE49-F238E27FC236}">
-                <a16:creationId xmlns:a16="http://schemas.microsoft.com/office/drawing/2014/main" id="{FAF4F992-9C5D-4F2C-9357-E58AB39DF093}"/>
+                <a16:creationId xmlns:a16="http://schemas.microsoft.com/office/drawing/2014/main" id="{90895F44-2B20-4045-BFDE-B79BC8260C1C}"/>
               </a:ext>
             </a:extLst>
           </p:cNvPr>
@@ -11323,7 +11323,7 @@
           <p:cNvPr id="13" name="stock-metric-label">
             <a:extLst xmlns:a="http://schemas.openxmlformats.org/drawingml/2006/main">
               <a:ext uri="{FF2B5EF4-FFF2-40B4-BE49-F238E27FC236}">
-                <a16:creationId xmlns:a16="http://schemas.microsoft.com/office/drawing/2014/main" id="{F14CF640-043C-490F-B669-70E6207DD439}"/>
+                <a16:creationId xmlns:a16="http://schemas.microsoft.com/office/drawing/2014/main" id="{BFAAEDE1-A196-42E2-BA65-CAB6AEEA7CB3}"/>
               </a:ext>
             </a:extLst>
           </p:cNvPr>
@@ -11368,7 +11368,7 @@
           <p:cNvPr id="14" name="food-title">
             <a:extLst xmlns:a="http://schemas.openxmlformats.org/drawingml/2006/main">
               <a:ext uri="{FF2B5EF4-FFF2-40B4-BE49-F238E27FC236}">
-                <a16:creationId xmlns:a16="http://schemas.microsoft.com/office/drawing/2014/main" id="{215A6C01-77F9-4D83-96AC-8F28C49A19CF}"/>
+                <a16:creationId xmlns:a16="http://schemas.microsoft.com/office/drawing/2014/main" id="{9AE7C4ED-4387-4D74-9E35-7D3277669D94}"/>
               </a:ext>
             </a:extLst>
           </p:cNvPr>
@@ -11413,7 +11413,7 @@
           <p:cNvPr id="15" name="food-copy">
             <a:extLst xmlns:a="http://schemas.openxmlformats.org/drawingml/2006/main">
               <a:ext uri="{FF2B5EF4-FFF2-40B4-BE49-F238E27FC236}">
-                <a16:creationId xmlns:a16="http://schemas.microsoft.com/office/drawing/2014/main" id="{F4357FC8-EB79-4F86-A304-D11BDF154B1F}"/>
+                <a16:creationId xmlns:a16="http://schemas.microsoft.com/office/drawing/2014/main" id="{82838244-2F25-46EE-9A8F-A8790B27490A}"/>
               </a:ext>
             </a:extLst>
           </p:cNvPr>
@@ -11458,7 +11458,7 @@
           <p:cNvPr id="16" name="award-strip">
             <a:extLst xmlns:a="http://schemas.openxmlformats.org/drawingml/2006/main">
               <a:ext uri="{FF2B5EF4-FFF2-40B4-BE49-F238E27FC236}">
-                <a16:creationId xmlns:a16="http://schemas.microsoft.com/office/drawing/2014/main" id="{2CD3FFF9-AB38-496E-8979-BDA1EE419505}"/>
+                <a16:creationId xmlns:a16="http://schemas.microsoft.com/office/drawing/2014/main" id="{FD321A91-AA98-421A-A5E3-680206DF85EC}"/>
               </a:ext>
             </a:extLst>
           </p:cNvPr>
@@ -11487,7 +11487,7 @@
           <p:cNvPr id="17" name="award-text">
             <a:extLst xmlns:a="http://schemas.openxmlformats.org/drawingml/2006/main">
               <a:ext uri="{FF2B5EF4-FFF2-40B4-BE49-F238E27FC236}">
-                <a16:creationId xmlns:a16="http://schemas.microsoft.com/office/drawing/2014/main" id="{8C07B8DA-F1CD-4E30-BAE7-FF395D7FFF58}"/>
+                <a16:creationId xmlns:a16="http://schemas.microsoft.com/office/drawing/2014/main" id="{460FEFF9-274B-4305-A801-515D07AFC3DE}"/>
               </a:ext>
             </a:extLst>
           </p:cNvPr>
@@ -11532,7 +11532,7 @@
           <p:cNvPr id="18" name="footer-line-gold-8">
             <a:extLst xmlns:a="http://schemas.openxmlformats.org/drawingml/2006/main">
               <a:ext uri="{FF2B5EF4-FFF2-40B4-BE49-F238E27FC236}">
-                <a16:creationId xmlns:a16="http://schemas.microsoft.com/office/drawing/2014/main" id="{30A323C1-2513-4EA3-8AEC-57357B02E037}"/>
+                <a16:creationId xmlns:a16="http://schemas.microsoft.com/office/drawing/2014/main" id="{32E218AA-B46C-43FC-87A3-A5FB9A35C9A0}"/>
               </a:ext>
             </a:extLst>
           </p:cNvPr>
@@ -11559,7 +11559,7 @@
           <p:cNvPr id="19" name="footer-line-coral-8">
             <a:extLst xmlns:a="http://schemas.openxmlformats.org/drawingml/2006/main">
               <a:ext uri="{FF2B5EF4-FFF2-40B4-BE49-F238E27FC236}">
-                <a16:creationId xmlns:a16="http://schemas.microsoft.com/office/drawing/2014/main" id="{82A148FA-2F35-4B67-BA17-B7E1ABB320D5}"/>
+                <a16:creationId xmlns:a16="http://schemas.microsoft.com/office/drawing/2014/main" id="{E678BADE-2A9D-4652-A3DF-F4809FB8C158}"/>
               </a:ext>
             </a:extLst>
           </p:cNvPr>
@@ -11586,7 +11586,7 @@
           <p:cNvPr id="20" name="footer-line-teal-8">
             <a:extLst xmlns:a="http://schemas.openxmlformats.org/drawingml/2006/main">
               <a:ext uri="{FF2B5EF4-FFF2-40B4-BE49-F238E27FC236}">
-                <a16:creationId xmlns:a16="http://schemas.microsoft.com/office/drawing/2014/main" id="{B74DAAB8-CCB4-467F-BB70-20D6052948EE}"/>
+                <a16:creationId xmlns:a16="http://schemas.microsoft.com/office/drawing/2014/main" id="{0935B54C-3A00-4750-BE8E-DFF7DB076662}"/>
               </a:ext>
             </a:extLst>
           </p:cNvPr>
@@ -11613,7 +11613,7 @@
           <p:cNvPr id="21" name="footer-name-8">
             <a:extLst xmlns:a="http://schemas.openxmlformats.org/drawingml/2006/main">
               <a:ext uri="{FF2B5EF4-FFF2-40B4-BE49-F238E27FC236}">
-                <a16:creationId xmlns:a16="http://schemas.microsoft.com/office/drawing/2014/main" id="{BE079DBC-49E7-4FB9-ACDE-AFF0BB3BFEB7}"/>
+                <a16:creationId xmlns:a16="http://schemas.microsoft.com/office/drawing/2014/main" id="{FF9D2001-EC35-4CBA-8C63-5962168F2F84}"/>
               </a:ext>
             </a:extLst>
           </p:cNvPr>
@@ -11658,7 +11658,7 @@
           <p:cNvPr id="22" name="footer-page-8">
             <a:extLst xmlns:a="http://schemas.openxmlformats.org/drawingml/2006/main">
               <a:ext uri="{FF2B5EF4-FFF2-40B4-BE49-F238E27FC236}">
-                <a16:creationId xmlns:a16="http://schemas.microsoft.com/office/drawing/2014/main" id="{C827B6A8-7B8B-4186-924F-A965A77FB8A0}"/>
+                <a16:creationId xmlns:a16="http://schemas.microsoft.com/office/drawing/2014/main" id="{52ED8375-D185-4F4A-AB70-E8E5B7AEA013}"/>
               </a:ext>
             </a:extLst>
           </p:cNvPr>
@@ -11707,7 +11707,7 @@
           <p:nvPr/>
         </p:nvPicPr>
         <p:blipFill>
-          <a:blip xmlns:r="http://schemas.openxmlformats.org/officeDocument/2006/relationships" xmlns:a="http://schemas.openxmlformats.org/drawingml/2006/main" r:embed="R7408ef0a40474aeb"/>
+          <a:blip xmlns:r="http://schemas.openxmlformats.org/officeDocument/2006/relationships" xmlns:a="http://schemas.openxmlformats.org/drawingml/2006/main" r:embed="R4c9ad065010646e4"/>
           <a:srcRect xmlns:a="http://schemas.openxmlformats.org/drawingml/2006/main" l="0" t="4261" r="0" b="4261"/>
           <a:stretch xmlns:a="http://schemas.openxmlformats.org/drawingml/2006/main">
             <a:fillRect l="0" t="0" r="0" b="0"/>
@@ -11726,7 +11726,7 @@
     </p:spTree>
     <p:extLst>
       <p:ext uri="{BB962C8B-B14F-4D97-AF65-F5344CB8AC3E}">
-        <p14:creationId xmlns:p14="http://schemas.microsoft.com/office/powerpoint/2010/main" val="1362856225"/>
+        <p14:creationId xmlns:p14="http://schemas.microsoft.com/office/powerpoint/2010/main" val="629423412"/>
       </p:ext>
     </p:extLst>
   </p:cSld>
@@ -11750,7 +11750,7 @@
           <p:cNvPr id="25" name="09-bi-gallery-canvas">
             <a:extLst xmlns:a="http://schemas.openxmlformats.org/drawingml/2006/main">
               <a:ext uri="{FF2B5EF4-FFF2-40B4-BE49-F238E27FC236}">
-                <a16:creationId xmlns:a16="http://schemas.microsoft.com/office/drawing/2014/main" id="{E42C0068-63DF-4671-946C-316BC590ECF7}"/>
+                <a16:creationId xmlns:a16="http://schemas.microsoft.com/office/drawing/2014/main" id="{EC176FFC-F0D8-4767-8942-9E6FBC45709B}"/>
               </a:ext>
             </a:extLst>
           </p:cNvPr>
@@ -11777,7 +11777,7 @@
           <p:cNvPr id="2" name="09-bi-gallery-edge-gold">
             <a:extLst xmlns:a="http://schemas.openxmlformats.org/drawingml/2006/main">
               <a:ext uri="{FF2B5EF4-FFF2-40B4-BE49-F238E27FC236}">
-                <a16:creationId xmlns:a16="http://schemas.microsoft.com/office/drawing/2014/main" id="{9B2F70A0-E0DF-4A9F-9AED-56CBEBA520B4}"/>
+                <a16:creationId xmlns:a16="http://schemas.microsoft.com/office/drawing/2014/main" id="{B2587789-B1EE-41C6-93CF-D98F40698D64}"/>
               </a:ext>
             </a:extLst>
           </p:cNvPr>
@@ -11804,7 +11804,7 @@
           <p:cNvPr id="3" name="09-bi-gallery-edge-coral">
             <a:extLst xmlns:a="http://schemas.openxmlformats.org/drawingml/2006/main">
               <a:ext uri="{FF2B5EF4-FFF2-40B4-BE49-F238E27FC236}">
-                <a16:creationId xmlns:a16="http://schemas.microsoft.com/office/drawing/2014/main" id="{5847BF22-5906-4FC2-8A38-F67D0E3A3664}"/>
+                <a16:creationId xmlns:a16="http://schemas.microsoft.com/office/drawing/2014/main" id="{0CF31097-3156-4558-8A11-3A9F380686AA}"/>
               </a:ext>
             </a:extLst>
           </p:cNvPr>
@@ -11831,7 +11831,7 @@
           <p:cNvPr id="4" name="09-bi-gallery-edge-teal">
             <a:extLst xmlns:a="http://schemas.openxmlformats.org/drawingml/2006/main">
               <a:ext uri="{FF2B5EF4-FFF2-40B4-BE49-F238E27FC236}">
-                <a16:creationId xmlns:a16="http://schemas.microsoft.com/office/drawing/2014/main" id="{41BD782F-F0E6-4304-9BA1-591B9EC99FC6}"/>
+                <a16:creationId xmlns:a16="http://schemas.microsoft.com/office/drawing/2014/main" id="{DF53C7DC-C30F-4162-96B7-C90746386998}"/>
               </a:ext>
             </a:extLst>
           </p:cNvPr>
@@ -11858,7 +11858,7 @@
           <p:cNvPr id="5" name="eyebrow-9">
             <a:extLst xmlns:a="http://schemas.openxmlformats.org/drawingml/2006/main">
               <a:ext uri="{FF2B5EF4-FFF2-40B4-BE49-F238E27FC236}">
-                <a16:creationId xmlns:a16="http://schemas.microsoft.com/office/drawing/2014/main" id="{5CC599FE-D7E9-43C1-A404-A0B9E122E1C9}"/>
+                <a16:creationId xmlns:a16="http://schemas.microsoft.com/office/drawing/2014/main" id="{1A7FD832-80D6-4B33-BB64-AF9139104039}"/>
               </a:ext>
             </a:extLst>
           </p:cNvPr>
@@ -11903,7 +11903,7 @@
           <p:cNvPr id="6" name="title-9">
             <a:extLst xmlns:a="http://schemas.openxmlformats.org/drawingml/2006/main">
               <a:ext uri="{FF2B5EF4-FFF2-40B4-BE49-F238E27FC236}">
-                <a16:creationId xmlns:a16="http://schemas.microsoft.com/office/drawing/2014/main" id="{E357CB99-3CEB-45EE-A29E-36FEB937B573}"/>
+                <a16:creationId xmlns:a16="http://schemas.microsoft.com/office/drawing/2014/main" id="{AAAA166A-1895-4E67-9AE9-CBC306FADA86}"/>
               </a:ext>
             </a:extLst>
           </p:cNvPr>
@@ -11948,7 +11948,7 @@
           <p:cNvPr id="7" name="bi-note">
             <a:extLst xmlns:a="http://schemas.openxmlformats.org/drawingml/2006/main">
               <a:ext uri="{FF2B5EF4-FFF2-40B4-BE49-F238E27FC236}">
-                <a16:creationId xmlns:a16="http://schemas.microsoft.com/office/drawing/2014/main" id="{87CA3BC3-79D0-4C40-86D8-EFAEEEA54CF4}"/>
+                <a16:creationId xmlns:a16="http://schemas.microsoft.com/office/drawing/2014/main" id="{9DD21AE0-6C17-42A7-9B9E-E8EFF9F9397A}"/>
               </a:ext>
             </a:extLst>
           </p:cNvPr>
@@ -11993,7 +11993,7 @@
           <p:cNvPr id="8" name="dash-frame-1">
             <a:extLst xmlns:a="http://schemas.openxmlformats.org/drawingml/2006/main">
               <a:ext uri="{FF2B5EF4-FFF2-40B4-BE49-F238E27FC236}">
-                <a16:creationId xmlns:a16="http://schemas.microsoft.com/office/drawing/2014/main" id="{B0B1CF08-95B0-4291-95F1-BC0C9947FDD5}"/>
+                <a16:creationId xmlns:a16="http://schemas.microsoft.com/office/drawing/2014/main" id="{900DD33E-DC33-497C-96D4-F0C8CE281454}"/>
               </a:ext>
             </a:extLst>
           </p:cNvPr>
@@ -12022,7 +12022,7 @@
           <p:cNvPr id="9" name="dash-frame-2">
             <a:extLst xmlns:a="http://schemas.openxmlformats.org/drawingml/2006/main">
               <a:ext uri="{FF2B5EF4-FFF2-40B4-BE49-F238E27FC236}">
-                <a16:creationId xmlns:a16="http://schemas.microsoft.com/office/drawing/2014/main" id="{931A6419-2EF0-435B-80D7-E75AB48EEB82}"/>
+                <a16:creationId xmlns:a16="http://schemas.microsoft.com/office/drawing/2014/main" id="{087C0B8A-E01D-433B-80EA-0FFF2853F7F9}"/>
               </a:ext>
             </a:extLst>
           </p:cNvPr>
@@ -12051,7 +12051,7 @@
           <p:cNvPr id="10" name="dash-frame-3">
             <a:extLst xmlns:a="http://schemas.openxmlformats.org/drawingml/2006/main">
               <a:ext uri="{FF2B5EF4-FFF2-40B4-BE49-F238E27FC236}">
-                <a16:creationId xmlns:a16="http://schemas.microsoft.com/office/drawing/2014/main" id="{FAF32225-6464-4D84-8F64-325ECD724F25}"/>
+                <a16:creationId xmlns:a16="http://schemas.microsoft.com/office/drawing/2014/main" id="{3156E863-44C5-4159-BD65-7E1FB64F8449}"/>
               </a:ext>
             </a:extLst>
           </p:cNvPr>
@@ -12080,7 +12080,7 @@
           <p:cNvPr id="11" name="dash-title-1">
             <a:extLst xmlns:a="http://schemas.openxmlformats.org/drawingml/2006/main">
               <a:ext uri="{FF2B5EF4-FFF2-40B4-BE49-F238E27FC236}">
-                <a16:creationId xmlns:a16="http://schemas.microsoft.com/office/drawing/2014/main" id="{FEA74BF0-ECB4-4189-A910-950396A0D70A}"/>
+                <a16:creationId xmlns:a16="http://schemas.microsoft.com/office/drawing/2014/main" id="{AC13FB71-9ACA-4402-BCC3-808DD4CBEFDC}"/>
               </a:ext>
             </a:extLst>
           </p:cNvPr>
@@ -12125,7 +12125,7 @@
           <p:cNvPr id="12" name="dash-caption-1">
             <a:extLst xmlns:a="http://schemas.openxmlformats.org/drawingml/2006/main">
               <a:ext uri="{FF2B5EF4-FFF2-40B4-BE49-F238E27FC236}">
-                <a16:creationId xmlns:a16="http://schemas.microsoft.com/office/drawing/2014/main" id="{EDA4CDCA-2EDD-4156-B816-9E426DA02C36}"/>
+                <a16:creationId xmlns:a16="http://schemas.microsoft.com/office/drawing/2014/main" id="{775D1AEC-CC65-4025-A78A-B258F3DE9EB4}"/>
               </a:ext>
             </a:extLst>
           </p:cNvPr>
@@ -12170,7 +12170,7 @@
           <p:cNvPr id="13" name="dash-title-2">
             <a:extLst xmlns:a="http://schemas.openxmlformats.org/drawingml/2006/main">
               <a:ext uri="{FF2B5EF4-FFF2-40B4-BE49-F238E27FC236}">
-                <a16:creationId xmlns:a16="http://schemas.microsoft.com/office/drawing/2014/main" id="{62746E74-7CBA-4294-8570-503C3A1B4C54}"/>
+                <a16:creationId xmlns:a16="http://schemas.microsoft.com/office/drawing/2014/main" id="{B0434688-0B00-4B0C-A21D-94BC17F3927F}"/>
               </a:ext>
             </a:extLst>
           </p:cNvPr>
@@ -12215,7 +12215,7 @@
           <p:cNvPr id="14" name="dash-caption-2">
             <a:extLst xmlns:a="http://schemas.openxmlformats.org/drawingml/2006/main">
               <a:ext uri="{FF2B5EF4-FFF2-40B4-BE49-F238E27FC236}">
-                <a16:creationId xmlns:a16="http://schemas.microsoft.com/office/drawing/2014/main" id="{1F67E250-0AFC-4BB2-9128-E8104993C60A}"/>
+                <a16:creationId xmlns:a16="http://schemas.microsoft.com/office/drawing/2014/main" id="{460184C8-1AC3-4F78-A38C-E8C74E2FF3D4}"/>
               </a:ext>
             </a:extLst>
           </p:cNvPr>
@@ -12260,7 +12260,7 @@
           <p:cNvPr id="15" name="dash-title-3">
             <a:extLst xmlns:a="http://schemas.openxmlformats.org/drawingml/2006/main">
               <a:ext uri="{FF2B5EF4-FFF2-40B4-BE49-F238E27FC236}">
-                <a16:creationId xmlns:a16="http://schemas.microsoft.com/office/drawing/2014/main" id="{D2249AA2-7801-44B8-B049-EDC173D56448}"/>
+                <a16:creationId xmlns:a16="http://schemas.microsoft.com/office/drawing/2014/main" id="{DDABF9CD-358A-46BB-A7E5-3084780062BA}"/>
               </a:ext>
             </a:extLst>
           </p:cNvPr>
@@ -12305,7 +12305,7 @@
           <p:cNvPr id="16" name="dash-caption-3">
             <a:extLst xmlns:a="http://schemas.openxmlformats.org/drawingml/2006/main">
               <a:ext uri="{FF2B5EF4-FFF2-40B4-BE49-F238E27FC236}">
-                <a16:creationId xmlns:a16="http://schemas.microsoft.com/office/drawing/2014/main" id="{36806871-1749-4153-B16F-30601B9DEEB9}"/>
+                <a16:creationId xmlns:a16="http://schemas.microsoft.com/office/drawing/2014/main" id="{580F00DC-2459-4B3A-915A-C0AD4DD26EE4}"/>
               </a:ext>
             </a:extLst>
           </p:cNvPr>
@@ -12350,7 +12350,7 @@
           <p:cNvPr id="17" name="footer-line-gold-9">
             <a:extLst xmlns:a="http://schemas.openxmlformats.org/drawingml/2006/main">
               <a:ext uri="{FF2B5EF4-FFF2-40B4-BE49-F238E27FC236}">
-                <a16:creationId xmlns:a16="http://schemas.microsoft.com/office/drawing/2014/main" id="{254FF8B6-F1DF-4023-B7C9-8D8824680F23}"/>
+                <a16:creationId xmlns:a16="http://schemas.microsoft.com/office/drawing/2014/main" id="{4AF5A18D-B92C-47C1-81C7-6E6036DDD9C1}"/>
               </a:ext>
             </a:extLst>
           </p:cNvPr>
@@ -12377,7 +12377,7 @@
           <p:cNvPr id="18" name="footer-line-coral-9">
             <a:extLst xmlns:a="http://schemas.openxmlformats.org/drawingml/2006/main">
               <a:ext uri="{FF2B5EF4-FFF2-40B4-BE49-F238E27FC236}">
-                <a16:creationId xmlns:a16="http://schemas.microsoft.com/office/drawing/2014/main" id="{9C0AECA4-0C3D-4798-99DC-B4E4EF3A6C84}"/>
+                <a16:creationId xmlns:a16="http://schemas.microsoft.com/office/drawing/2014/main" id="{9096AAF7-C27B-4C44-802B-1BE61B3869B5}"/>
               </a:ext>
             </a:extLst>
           </p:cNvPr>
@@ -12404,7 +12404,7 @@
           <p:cNvPr id="19" name="footer-line-teal-9">
             <a:extLst xmlns:a="http://schemas.openxmlformats.org/drawingml/2006/main">
               <a:ext uri="{FF2B5EF4-FFF2-40B4-BE49-F238E27FC236}">
-                <a16:creationId xmlns:a16="http://schemas.microsoft.com/office/drawing/2014/main" id="{8B6776AD-9D21-4525-B118-F1D0A220FFB1}"/>
+                <a16:creationId xmlns:a16="http://schemas.microsoft.com/office/drawing/2014/main" id="{713C6CA8-1862-4871-BE7D-CFF9982FE2D0}"/>
               </a:ext>
             </a:extLst>
           </p:cNvPr>
@@ -12431,7 +12431,7 @@
           <p:cNvPr id="20" name="footer-name-9">
             <a:extLst xmlns:a="http://schemas.openxmlformats.org/drawingml/2006/main">
               <a:ext uri="{FF2B5EF4-FFF2-40B4-BE49-F238E27FC236}">
-                <a16:creationId xmlns:a16="http://schemas.microsoft.com/office/drawing/2014/main" id="{B739C06A-733B-4C34-9496-2855152C366D}"/>
+                <a16:creationId xmlns:a16="http://schemas.microsoft.com/office/drawing/2014/main" id="{C416CE87-63D6-4F1D-9F27-030AF661A5DC}"/>
               </a:ext>
             </a:extLst>
           </p:cNvPr>
@@ -12476,7 +12476,7 @@
           <p:cNvPr id="21" name="footer-page-9">
             <a:extLst xmlns:a="http://schemas.openxmlformats.org/drawingml/2006/main">
               <a:ext uri="{FF2B5EF4-FFF2-40B4-BE49-F238E27FC236}">
-                <a16:creationId xmlns:a16="http://schemas.microsoft.com/office/drawing/2014/main" id="{D3D0B22E-D99A-42F7-882E-C1D0CA26E62F}"/>
+                <a16:creationId xmlns:a16="http://schemas.microsoft.com/office/drawing/2014/main" id="{199779DB-84C9-48F1-8103-1B07BDA8D833}"/>
               </a:ext>
             </a:extLst>
           </p:cNvPr>
@@ -12525,7 +12525,7 @@
           <p:nvPr/>
         </p:nvPicPr>
         <p:blipFill>
-          <a:blip xmlns:r="http://schemas.openxmlformats.org/officeDocument/2006/relationships" xmlns:a="http://schemas.openxmlformats.org/drawingml/2006/main" r:embed="Ra7497954e18d44c4"/>
+          <a:blip xmlns:r="http://schemas.openxmlformats.org/officeDocument/2006/relationships" xmlns:a="http://schemas.openxmlformats.org/drawingml/2006/main" r:embed="R5e88c9c6a85a4237"/>
           <a:srcRect xmlns:a="http://schemas.openxmlformats.org/drawingml/2006/main" l="10463" t="0" r="10463" b="0"/>
           <a:stretch xmlns:a="http://schemas.openxmlformats.org/drawingml/2006/main">
             <a:fillRect l="0" t="0" r="0" b="0"/>
@@ -12550,7 +12550,7 @@
           <p:nvPr/>
         </p:nvPicPr>
         <p:blipFill>
-          <a:blip xmlns:r="http://schemas.openxmlformats.org/officeDocument/2006/relationships" xmlns:a="http://schemas.openxmlformats.org/drawingml/2006/main" r:embed="R7aa0a81250af4a6f"/>
+          <a:blip xmlns:r="http://schemas.openxmlformats.org/officeDocument/2006/relationships" xmlns:a="http://schemas.openxmlformats.org/drawingml/2006/main" r:embed="Raa724df7dcde4c25"/>
           <a:srcRect xmlns:a="http://schemas.openxmlformats.org/drawingml/2006/main" l="0" t="2817" r="0" b="2817"/>
           <a:stretch xmlns:a="http://schemas.openxmlformats.org/drawingml/2006/main">
             <a:fillRect l="0" t="0" r="0" b="0"/>
@@ -12575,7 +12575,7 @@
           <p:nvPr/>
         </p:nvPicPr>
         <p:blipFill>
-          <a:blip xmlns:r="http://schemas.openxmlformats.org/officeDocument/2006/relationships" xmlns:a="http://schemas.openxmlformats.org/drawingml/2006/main" r:embed="Rb1b82558ee204e3d"/>
+          <a:blip xmlns:r="http://schemas.openxmlformats.org/officeDocument/2006/relationships" xmlns:a="http://schemas.openxmlformats.org/drawingml/2006/main" r:embed="Ra489cd6bc9374d07"/>
           <a:srcRect xmlns:a="http://schemas.openxmlformats.org/drawingml/2006/main" l="0" t="2500" r="0" b="2500"/>
           <a:stretch xmlns:a="http://schemas.openxmlformats.org/drawingml/2006/main">
             <a:fillRect l="0" t="0" r="0" b="0"/>
@@ -12594,7 +12594,7 @@
     </p:spTree>
     <p:extLst>
       <p:ext uri="{BB962C8B-B14F-4D97-AF65-F5344CB8AC3E}">
-        <p14:creationId xmlns:p14="http://schemas.microsoft.com/office/powerpoint/2010/main" val="973202348"/>
+        <p14:creationId xmlns:p14="http://schemas.microsoft.com/office/powerpoint/2010/main" val="1071737243"/>
       </p:ext>
     </p:extLst>
   </p:cSld>

--- a/outputs/Muhammad_Ali_Akbar_Al-Qahri_Portfolio.pptx
+++ b/outputs/Muhammad_Ali_Akbar_Al-Qahri_Portfolio.pptx
@@ -7419,7 +7419,7 @@
               </a:defRPr>
             </a:pPr>
             <a:r>
-              <a:t>Business Intelligence Intern</a:t>
+              <a:t>Data Analyst Intern</a:t>
             </a:r>
           </a:p>
         </p:txBody>
@@ -10514,7 +10514,7 @@
               </a:defRPr>
             </a:pPr>
             <a:r>
-              <a:t>ypcemas.streamlit.app</a:t>
+              <a:t>saham-ipo.vercel.app</a:t>
             </a:r>
           </a:p>
         </p:txBody>
